--- a/lesson_01/lesson_01_slides.pptx
+++ b/lesson_01/lesson_01_slides.pptx
@@ -16,9 +16,10 @@
     <p:sldId id="264" r:id="rId10"/>
     <p:sldId id="265" r:id="rId11"/>
     <p:sldId id="266" r:id="rId12"/>
+    <p:sldId id="267" r:id="rId13"/>
   </p:sldIdLst>
   <p:notesMasterIdLst>
-    <p:notesMasterId r:id="rId13"/>
+    <p:notesMasterId r:id="rId14"/>
   </p:notesMasterIdLst>
   <p:sldSz cx="12192000" cy="6858000"/>
   <p:notesSz cx="6858000" cy="12192000"/>
@@ -712,6 +713,94 @@
             <a:fld id="{F7021451-1387-4CA6-816F-3879F97B5CBC}" type="slidenum">
               <a:rPr lang="en-US"/>
               <a:t>11</a:t>
+            </a:fld>
+            <a:endParaRPr lang="en-US"/>
+          </a:p>
+        </p:txBody>
+      </p:sp>
+    </p:spTree>
+    <p:extLst>
+      <p:ext uri="{BB962C8B-B14F-4D97-AF65-F5344CB8AC3E}">
+        <p14:creationId xmlns:p14="http://schemas.microsoft.com/office/powerpoint/2010/main" val="1024086991"/>
+      </p:ext>
+    </p:extLst>
+  </p:cSld>
+  <p:clrMapOvr>
+    <a:masterClrMapping/>
+  </p:clrMapOvr>
+</p:notes>
+</file>
+
+<file path=ppt/notesSlides/notesSlide12.xml><?xml version="1.0" encoding="utf-8"?>
+<p:notes xmlns:a="http://schemas.openxmlformats.org/drawingml/2006/main" xmlns:r="http://schemas.openxmlformats.org/officeDocument/2006/relationships" xmlns:p="http://schemas.openxmlformats.org/presentationml/2006/main">
+  <p:cSld>
+    <p:spTree>
+      <p:nvGrpSpPr>
+        <p:cNvPr id="1" name=""/>
+        <p:cNvGrpSpPr/>
+        <p:nvPr/>
+      </p:nvGrpSpPr>
+      <p:grpSpPr>
+        <a:xfrm>
+          <a:off x="0" y="0"/>
+          <a:ext cx="0" cy="0"/>
+          <a:chOff x="0" y="0"/>
+          <a:chExt cx="0" cy="0"/>
+        </a:xfrm>
+      </p:grpSpPr>
+      <p:sp>
+        <p:nvSpPr>
+          <p:cNvPr id="2" name="Slide Image Placeholder 1"/>
+          <p:cNvSpPr>
+            <a:spLocks noGrp="1" noRot="1" noChangeAspect="1"/>
+          </p:cNvSpPr>
+          <p:nvPr>
+            <p:ph type="sldImg"/>
+          </p:nvPr>
+        </p:nvSpPr>
+        <p:spPr/>
+      </p:sp>
+      <p:sp>
+        <p:nvSpPr>
+          <p:cNvPr id="3" name="Notes Placeholder 2"/>
+          <p:cNvSpPr>
+            <a:spLocks noGrp="1"/>
+          </p:cNvSpPr>
+          <p:nvPr>
+            <p:ph type="body" idx="1"/>
+          </p:nvPr>
+        </p:nvSpPr>
+        <p:spPr/>
+        <p:txBody>
+          <a:bodyPr/>
+          <a:lstStyle/>
+          <a:p>
+            <a:r>
+              <a:rPr lang="en-US" dirty="0"/>
+              <a:t/>
+            </a:r>
+            <a:endParaRPr lang="en-US" dirty="0"/>
+          </a:p>
+        </p:txBody>
+      </p:sp>
+      <p:sp>
+        <p:nvSpPr>
+          <p:cNvPr id="4" name="Slide Number Placeholder 3"/>
+          <p:cNvSpPr>
+            <a:spLocks noGrp="1"/>
+          </p:cNvSpPr>
+          <p:nvPr>
+            <p:ph type="sldNum" sz="quarter" idx="10"/>
+          </p:nvPr>
+        </p:nvSpPr>
+        <p:spPr/>
+        <p:txBody>
+          <a:bodyPr/>
+          <a:lstStyle/>
+          <a:p>
+            <a:fld id="{F7021451-1387-4CA6-816F-3879F97B5CBC}" type="slidenum">
+              <a:rPr lang="en-US"/>
+              <a:t>12</a:t>
             </a:fld>
             <a:endParaRPr lang="en-US"/>
           </a:p>
@@ -2140,6 +2229,258 @@
     <p:bg>
       <p:bgPr>
         <a:solidFill>
+          <a:srgbClr val="1B1F3B"/>
+        </a:solidFill>
+      </p:bgPr>
+    </p:bg>
+    <p:spTree>
+      <p:nvGrpSpPr>
+        <p:cNvPr id="1" name=""/>
+        <p:cNvGrpSpPr/>
+        <p:nvPr/>
+      </p:nvGrpSpPr>
+      <p:grpSpPr>
+        <a:xfrm>
+          <a:off x="0" y="0"/>
+          <a:ext cx="0" cy="0"/>
+          <a:chOff x="0" y="0"/>
+          <a:chExt cx="0" cy="0"/>
+        </a:xfrm>
+      </p:grpSpPr>
+      <p:sp>
+        <p:nvSpPr>
+          <p:cNvPr id="2" name="Text 0"/>
+          <p:cNvSpPr/>
+          <p:nvPr/>
+        </p:nvSpPr>
+        <p:spPr>
+          <a:xfrm>
+            <a:off x="548640" y="457200"/>
+            <a:ext cx="11091672" cy="548640"/>
+          </a:xfrm>
+          <a:prstGeom prst="rect">
+            <a:avLst/>
+          </a:prstGeom>
+          <a:noFill/>
+          <a:ln/>
+        </p:spPr>
+        <p:txBody>
+          <a:bodyPr wrap="square" lIns="0" tIns="0" rIns="0" bIns="0" rtlCol="0" anchor="ctr"/>
+          <a:lstStyle/>
+          <a:p>
+            <a:pPr algn="ctr" indent="0" marL="0">
+              <a:buNone/>
+            </a:pPr>
+            <a:r>
+              <a:rPr lang="en-US" sz="1600" i="1" dirty="0">
+                <a:solidFill>
+                  <a:srgbClr val="00C2A8"/>
+                </a:solidFill>
+                <a:latin typeface="Calibri" pitchFamily="34" charset="0"/>
+                <a:ea typeface="Calibri" pitchFamily="34" charset="-122"/>
+                <a:cs typeface="Calibri" pitchFamily="34" charset="-120"/>
+              </a:rPr>
+              <a:t>הדגמה חיה</a:t>
+            </a:r>
+            <a:endParaRPr lang="en-US" sz="1600" dirty="0"/>
+          </a:p>
+        </p:txBody>
+      </p:sp>
+      <p:sp>
+        <p:nvSpPr>
+          <p:cNvPr id="3" name="Text 1"/>
+          <p:cNvSpPr/>
+          <p:nvPr/>
+        </p:nvSpPr>
+        <p:spPr>
+          <a:xfrm>
+            <a:off x="548640" y="1097280"/>
+            <a:ext cx="11091672" cy="1097280"/>
+          </a:xfrm>
+          <a:prstGeom prst="rect">
+            <a:avLst/>
+          </a:prstGeom>
+          <a:noFill/>
+          <a:ln/>
+        </p:spPr>
+        <p:txBody>
+          <a:bodyPr wrap="square" lIns="0" tIns="0" rIns="0" bIns="0" rtlCol="0" anchor="ctr"/>
+          <a:lstStyle/>
+          <a:p>
+            <a:pPr rtl="1" algn="ctr" indent="0" marL="0">
+              <a:buNone/>
+            </a:pPr>
+            <a:r>
+              <a:rPr lang="en-US" sz="3800" b="1" dirty="0">
+                <a:solidFill>
+                  <a:srgbClr val="FFFFFF"/>
+                </a:solidFill>
+                <a:latin typeface="Arial" pitchFamily="34" charset="0"/>
+                <a:ea typeface="Arial" pitchFamily="34" charset="-122"/>
+                <a:cs typeface="Arial" pitchFamily="34" charset="-120"/>
+              </a:rPr>
+              <a:t>20 דקות. בונים יחד, בזמן אמת.</a:t>
+            </a:r>
+            <a:endParaRPr lang="en-US" sz="3800" dirty="0"/>
+          </a:p>
+        </p:txBody>
+      </p:sp>
+      <p:sp>
+        <p:nvSpPr>
+          <p:cNvPr id="4" name="Text 2"/>
+          <p:cNvSpPr/>
+          <p:nvPr/>
+        </p:nvSpPr>
+        <p:spPr>
+          <a:xfrm>
+            <a:off x="548640" y="2148840"/>
+            <a:ext cx="11091672" cy="457200"/>
+          </a:xfrm>
+          <a:prstGeom prst="rect">
+            <a:avLst/>
+          </a:prstGeom>
+          <a:noFill/>
+          <a:ln/>
+        </p:spPr>
+        <p:txBody>
+          <a:bodyPr wrap="square" lIns="0" tIns="0" rIns="0" bIns="0" rtlCol="0" anchor="ctr"/>
+          <a:lstStyle/>
+          <a:p>
+            <a:pPr rtl="1" algn="ctr" indent="0" marL="0">
+              <a:buNone/>
+            </a:pPr>
+            <a:r>
+              <a:rPr lang="en-US" sz="1500" i="1" dirty="0">
+                <a:solidFill>
+                  <a:srgbClr val="CADCFC"/>
+                </a:solidFill>
+                <a:latin typeface="Calibri" pitchFamily="34" charset="0"/>
+                <a:ea typeface="Calibri" pitchFamily="34" charset="-122"/>
+                <a:cs typeface="Calibri" pitchFamily="34" charset="-120"/>
+              </a:rPr>
+              <a:t>ראו demo/prompt.md להוראות המלאות</a:t>
+            </a:r>
+            <a:endParaRPr lang="en-US" sz="1500" dirty="0"/>
+          </a:p>
+        </p:txBody>
+      </p:sp>
+      <p:sp>
+        <p:nvSpPr>
+          <p:cNvPr id="5" name="Shape 3"/>
+          <p:cNvSpPr/>
+          <p:nvPr/>
+        </p:nvSpPr>
+        <p:spPr>
+          <a:xfrm>
+            <a:off x="3200400" y="2880360"/>
+            <a:ext cx="5788152" cy="3291840"/>
+          </a:xfrm>
+          <a:prstGeom prst="rect">
+            <a:avLst/>
+          </a:prstGeom>
+          <a:solidFill>
+            <a:srgbClr val="2A2F55"/>
+          </a:solidFill>
+          <a:ln w="15875">
+            <a:solidFill>
+              <a:srgbClr val="00C2A8"/>
+            </a:solidFill>
+            <a:prstDash val="dash"/>
+          </a:ln>
+        </p:spPr>
+      </p:sp>
+      <p:sp>
+        <p:nvSpPr>
+          <p:cNvPr id="6" name="Text 4"/>
+          <p:cNvSpPr/>
+          <p:nvPr/>
+        </p:nvSpPr>
+        <p:spPr>
+          <a:xfrm>
+            <a:off x="3200400" y="2880360"/>
+            <a:ext cx="5788152" cy="3291840"/>
+          </a:xfrm>
+          <a:prstGeom prst="rect">
+            <a:avLst/>
+          </a:prstGeom>
+          <a:noFill/>
+          <a:ln/>
+        </p:spPr>
+        <p:txBody>
+          <a:bodyPr wrap="square" lIns="101600" tIns="101600" rIns="101600" bIns="101600" rtlCol="0" anchor="ctr"/>
+          <a:lstStyle/>
+          <a:p>
+            <a:pPr rtl="1" algn="ctr" indent="0" marL="0">
+              <a:buNone/>
+            </a:pPr>
+            <a:r>
+              <a:rPr lang="en-US" sz="1200" i="1" dirty="0">
+                <a:solidFill>
+                  <a:srgbClr val="00C2A8"/>
+                </a:solidFill>
+                <a:latin typeface="Calibri" pitchFamily="34" charset="0"/>
+                <a:ea typeface="Calibri" pitchFamily="34" charset="-122"/>
+                <a:cs typeface="Calibri" pitchFamily="34" charset="-120"/>
+              </a:rPr>
+              <a:t>[תמונה: מסך שיתוף / הקלטת מסך של סוכן AI בונה קוד בזמן אמת]</a:t>
+            </a:r>
+            <a:endParaRPr lang="en-US" sz="1200" dirty="0"/>
+          </a:p>
+        </p:txBody>
+      </p:sp>
+      <p:sp>
+        <p:nvSpPr>
+          <p:cNvPr id="7" name="Text 5"/>
+          <p:cNvSpPr/>
+          <p:nvPr/>
+        </p:nvSpPr>
+        <p:spPr>
+          <a:xfrm>
+            <a:off x="548640" y="6492240"/>
+            <a:ext cx="11091672" cy="274320"/>
+          </a:xfrm>
+          <a:prstGeom prst="rect">
+            <a:avLst/>
+          </a:prstGeom>
+          <a:noFill/>
+          <a:ln/>
+        </p:spPr>
+        <p:txBody>
+          <a:bodyPr wrap="square" lIns="0" tIns="0" rIns="0" bIns="0" rtlCol="0" anchor="ctr"/>
+          <a:lstStyle/>
+          <a:p>
+            <a:pPr rtl="1" algn="r" indent="0" marL="0">
+              <a:buNone/>
+            </a:pPr>
+            <a:r>
+              <a:rPr lang="en-US" sz="900" dirty="0">
+                <a:solidFill>
+                  <a:srgbClr val="8891C2"/>
+                </a:solidFill>
+                <a:latin typeface="Calibri" pitchFamily="34" charset="0"/>
+                <a:ea typeface="Calibri" pitchFamily="34" charset="-122"/>
+                <a:cs typeface="Calibri" pitchFamily="34" charset="-120"/>
+              </a:rPr>
+              <a:t>Vibe Coding · שיעור 1 · שקף 10</a:t>
+            </a:r>
+            <a:endParaRPr lang="en-US" sz="900" dirty="0"/>
+          </a:p>
+        </p:txBody>
+      </p:sp>
+    </p:spTree>
+  </p:cSld>
+  <p:clrMapOvr>
+    <a:masterClrMapping/>
+  </p:clrMapOvr>
+</p:sld>
+</file>
+
+<file path=ppt/slides/slide11.xml><?xml version="1.0" encoding="utf-8"?>
+<p:sld xmlns:a="http://schemas.openxmlformats.org/drawingml/2006/main" xmlns:r="http://schemas.openxmlformats.org/officeDocument/2006/relationships" xmlns:p="http://schemas.openxmlformats.org/presentationml/2006/main">
+  <p:cSld name="Slide 11">
+    <p:bg>
+      <p:bgPr>
+        <a:solidFill>
           <a:srgbClr val="00C2A8"/>
         </a:solidFill>
       </p:bgPr>
@@ -2449,9 +2790,9 @@
 </p:sld>
 </file>
 
-<file path=ppt/slides/slide11.xml><?xml version="1.0" encoding="utf-8"?>
+<file path=ppt/slides/slide12.xml><?xml version="1.0" encoding="utf-8"?>
 <p:sld xmlns:a="http://schemas.openxmlformats.org/drawingml/2006/main" xmlns:r="http://schemas.openxmlformats.org/officeDocument/2006/relationships" xmlns:p="http://schemas.openxmlformats.org/presentationml/2006/main">
-  <p:cSld name="Slide 11">
+  <p:cSld name="Slide 12">
     <p:bg>
       <p:bgPr>
         <a:solidFill>
@@ -8212,7 +8553,7 @@
     <p:bg>
       <p:bgPr>
         <a:solidFill>
-          <a:srgbClr val="1B1F3B"/>
+          <a:srgbClr val="FFFFFF"/>
         </a:solidFill>
       </p:bgPr>
     </p:bg>
@@ -8238,8 +8579,89 @@
         </p:nvSpPr>
         <p:spPr>
           <a:xfrm>
-            <a:off x="548640" y="457200"/>
-            <a:ext cx="11091672" cy="548640"/>
+            <a:off x="548640" y="365760"/>
+            <a:ext cx="11091672" cy="822960"/>
+          </a:xfrm>
+          <a:prstGeom prst="rect">
+            <a:avLst/>
+          </a:prstGeom>
+          <a:noFill/>
+          <a:ln/>
+        </p:spPr>
+        <p:txBody>
+          <a:bodyPr wrap="square" lIns="0" tIns="0" rIns="0" bIns="0" rtlCol="0" anchor="ctr"/>
+          <a:lstStyle/>
+          <a:p>
+            <a:pPr rtl="1" algn="r" indent="0" marL="0">
+              <a:buNone/>
+            </a:pPr>
+            <a:r>
+              <a:rPr lang="en-US" sz="3000" b="1" dirty="0">
+                <a:solidFill>
+                  <a:srgbClr val="1B1F3B"/>
+                </a:solidFill>
+                <a:latin typeface="Arial" pitchFamily="34" charset="0"/>
+                <a:ea typeface="Arial" pitchFamily="34" charset="-122"/>
+                <a:cs typeface="Arial" pitchFamily="34" charset="-120"/>
+              </a:rPr>
+              <a:t>עוד דוגמה: זה לא רק Google</a:t>
+            </a:r>
+            <a:endParaRPr lang="en-US" sz="3000" dirty="0"/>
+          </a:p>
+        </p:txBody>
+      </p:sp>
+      <p:sp>
+        <p:nvSpPr>
+          <p:cNvPr id="3" name="Shape 1"/>
+          <p:cNvSpPr/>
+          <p:nvPr/>
+        </p:nvSpPr>
+        <p:spPr>
+          <a:xfrm>
+            <a:off x="548640" y="1645920"/>
+            <a:ext cx="11091672" cy="2286000"/>
+          </a:xfrm>
+          <a:prstGeom prst="roundRect">
+            <a:avLst>
+              <a:gd name="adj" fmla="val 4000"/>
+            </a:avLst>
+          </a:prstGeom>
+          <a:solidFill>
+            <a:srgbClr val="FFF6E6"/>
+          </a:solidFill>
+          <a:ln/>
+        </p:spPr>
+      </p:sp>
+      <p:sp>
+        <p:nvSpPr>
+          <p:cNvPr id="4" name="Shape 2"/>
+          <p:cNvSpPr/>
+          <p:nvPr/>
+        </p:nvSpPr>
+        <p:spPr>
+          <a:xfrm>
+            <a:off x="10332720" y="1828800"/>
+            <a:ext cx="457200" cy="457200"/>
+          </a:xfrm>
+          <a:prstGeom prst="ellipse">
+            <a:avLst/>
+          </a:prstGeom>
+          <a:solidFill>
+            <a:srgbClr val="FFB000"/>
+          </a:solidFill>
+          <a:ln/>
+        </p:spPr>
+      </p:sp>
+      <p:sp>
+        <p:nvSpPr>
+          <p:cNvPr id="5" name="Text 3"/>
+          <p:cNvSpPr/>
+          <p:nvPr/>
+        </p:nvSpPr>
+        <p:spPr>
+          <a:xfrm>
+            <a:off x="10332720" y="1828800"/>
+            <a:ext cx="457200" cy="457200"/>
           </a:xfrm>
           <a:prstGeom prst="rect">
             <a:avLst/>
@@ -8255,165 +8677,205 @@
               <a:buNone/>
             </a:pPr>
             <a:r>
-              <a:rPr lang="en-US" sz="1600" i="1" dirty="0">
-                <a:solidFill>
-                  <a:srgbClr val="00C2A8"/>
+              <a:rPr lang="en-US" sz="1400" b="1" dirty="0">
+                <a:solidFill>
+                  <a:srgbClr val="FFFFFF"/>
+                </a:solidFill>
+                <a:latin typeface="Arial" pitchFamily="34" charset="0"/>
+                <a:ea typeface="Arial" pitchFamily="34" charset="-122"/>
+                <a:cs typeface="Arial" pitchFamily="34" charset="-120"/>
+              </a:rPr>
+              <a:t>!</a:t>
+            </a:r>
+            <a:endParaRPr lang="en-US" sz="1400" dirty="0"/>
+          </a:p>
+        </p:txBody>
+      </p:sp>
+      <p:sp>
+        <p:nvSpPr>
+          <p:cNvPr id="6" name="Text 4"/>
+          <p:cNvSpPr/>
+          <p:nvPr/>
+        </p:nvSpPr>
+        <p:spPr>
+          <a:xfrm>
+            <a:off x="822960" y="1920240"/>
+            <a:ext cx="9326880" cy="1828800"/>
+          </a:xfrm>
+          <a:prstGeom prst="rect">
+            <a:avLst/>
+          </a:prstGeom>
+          <a:noFill/>
+          <a:ln/>
+        </p:spPr>
+        <p:txBody>
+          <a:bodyPr wrap="square" lIns="0" tIns="0" rIns="0" bIns="0" rtlCol="0" anchor="ctr"/>
+          <a:lstStyle/>
+          <a:p>
+            <a:pPr algn="r" indent="0" marL="0">
+              <a:spcAft>
+                <a:spcPts val="1000"/>
+              </a:spcAft>
+              <a:buNone/>
+            </a:pPr>
+            <a:r>
+              <a:rPr lang="en-US" sz="1500" dirty="0">
+                <a:solidFill>
+                  <a:srgbClr val="1B1F3B"/>
                 </a:solidFill>
                 <a:latin typeface="Calibri" pitchFamily="34" charset="0"/>
                 <a:ea typeface="Calibri" pitchFamily="34" charset="-122"/>
                 <a:cs typeface="Calibri" pitchFamily="34" charset="-120"/>
               </a:rPr>
-              <a:t>הדגמה חיה</a:t>
-            </a:r>
-            <a:endParaRPr lang="en-US" sz="1600" dirty="0"/>
-          </a:p>
-        </p:txBody>
-      </p:sp>
-      <p:sp>
-        <p:nvSpPr>
-          <p:cNvPr id="3" name="Text 1"/>
-          <p:cNvSpPr/>
-          <p:nvPr/>
-        </p:nvSpPr>
-        <p:spPr>
-          <a:xfrm>
-            <a:off x="548640" y="1097280"/>
-            <a:ext cx="11091672" cy="1097280"/>
-          </a:xfrm>
-          <a:prstGeom prst="rect">
-            <a:avLst/>
-          </a:prstGeom>
-          <a:noFill/>
-          <a:ln/>
-        </p:spPr>
-        <p:txBody>
-          <a:bodyPr wrap="square" lIns="0" tIns="0" rIns="0" bIns="0" rtlCol="0" anchor="ctr"/>
-          <a:lstStyle/>
-          <a:p>
-            <a:pPr rtl="1" algn="ctr" indent="0" marL="0">
-              <a:buNone/>
-            </a:pPr>
-            <a:r>
-              <a:rPr lang="en-US" sz="3800" b="1" dirty="0">
-                <a:solidFill>
-                  <a:srgbClr val="FFFFFF"/>
+              <a:t>• מרץ 2026: GitHub שינה את מסלול הסטודנטים ל-Copilot Student</a:t>
+            </a:r>
+            <a:endParaRPr lang="en-US" sz="1500" dirty="0"/>
+          </a:p>
+          <a:p>
+            <a:pPr algn="r" indent="0" marL="0">
+              <a:spcAft>
+                <a:spcPts val="1000"/>
+              </a:spcAft>
+              <a:buNone/>
+            </a:pPr>
+            <a:r>
+              <a:rPr lang="en-US" sz="1500" dirty="0">
+                <a:solidFill>
+                  <a:srgbClr val="1B1F3B"/>
+                </a:solidFill>
+                <a:latin typeface="Calibri" pitchFamily="34" charset="0"/>
+                <a:ea typeface="Calibri" pitchFamily="34" charset="-122"/>
+                <a:cs typeface="Calibri" pitchFamily="34" charset="-120"/>
+              </a:rPr>
+              <a:t>• הפעלות חדשות מוקפאות זמנית — בלי לוח זמנים לחידוש</a:t>
+            </a:r>
+            <a:endParaRPr lang="en-US" sz="1500" dirty="0"/>
+          </a:p>
+          <a:p>
+            <a:pPr algn="r" indent="0" marL="0">
+              <a:spcAft>
+                <a:spcPts val="1000"/>
+              </a:spcAft>
+              <a:buNone/>
+            </a:pPr>
+            <a:r>
+              <a:rPr lang="en-US" sz="1500" dirty="0">
+                <a:solidFill>
+                  <a:srgbClr val="1B1F3B"/>
+                </a:solidFill>
+                <a:latin typeface="Calibri" pitchFamily="34" charset="0"/>
+                <a:ea typeface="Calibri" pitchFamily="34" charset="-122"/>
+                <a:cs typeface="Calibri" pitchFamily="34" charset="-120"/>
+              </a:rPr>
+              <a:t>• גם ״תנאי מסלול חינם״ משתנים בלי אזהרה, לא רק כלים שלמים</a:t>
+            </a:r>
+            <a:endParaRPr lang="en-US" sz="1500" dirty="0"/>
+          </a:p>
+        </p:txBody>
+      </p:sp>
+      <p:sp>
+        <p:nvSpPr>
+          <p:cNvPr id="7" name="Shape 5"/>
+          <p:cNvSpPr/>
+          <p:nvPr/>
+        </p:nvSpPr>
+        <p:spPr>
+          <a:xfrm>
+            <a:off x="548640" y="4206240"/>
+            <a:ext cx="11091672" cy="1371600"/>
+          </a:xfrm>
+          <a:prstGeom prst="roundRect">
+            <a:avLst>
+              <a:gd name="adj" fmla="val 6667"/>
+            </a:avLst>
+          </a:prstGeom>
+          <a:solidFill>
+            <a:srgbClr val="E6FBF7"/>
+          </a:solidFill>
+          <a:ln/>
+        </p:spPr>
+      </p:sp>
+      <p:sp>
+        <p:nvSpPr>
+          <p:cNvPr id="8" name="Text 6"/>
+          <p:cNvSpPr/>
+          <p:nvPr/>
+        </p:nvSpPr>
+        <p:spPr>
+          <a:xfrm>
+            <a:off x="822960" y="4370832"/>
+            <a:ext cx="10543032" cy="365760"/>
+          </a:xfrm>
+          <a:prstGeom prst="rect">
+            <a:avLst/>
+          </a:prstGeom>
+          <a:noFill/>
+          <a:ln/>
+        </p:spPr>
+        <p:txBody>
+          <a:bodyPr wrap="square" lIns="0" tIns="0" rIns="0" bIns="0" rtlCol="0" anchor="ctr"/>
+          <a:lstStyle/>
+          <a:p>
+            <a:pPr rtl="1" algn="r" indent="0" marL="0">
+              <a:buNone/>
+            </a:pPr>
+            <a:r>
+              <a:rPr lang="en-US" sz="1300" i="1" dirty="0">
+                <a:solidFill>
+                  <a:srgbClr val="00C2A8"/>
+                </a:solidFill>
+                <a:latin typeface="Calibri" pitchFamily="34" charset="0"/>
+                <a:ea typeface="Calibri" pitchFamily="34" charset="-122"/>
+                <a:cs typeface="Calibri" pitchFamily="34" charset="-120"/>
+              </a:rPr>
+              <a:t>פעילות זוגות</a:t>
+            </a:r>
+            <a:endParaRPr lang="en-US" sz="1300" dirty="0"/>
+          </a:p>
+        </p:txBody>
+      </p:sp>
+      <p:sp>
+        <p:nvSpPr>
+          <p:cNvPr id="9" name="Text 7"/>
+          <p:cNvSpPr/>
+          <p:nvPr/>
+        </p:nvSpPr>
+        <p:spPr>
+          <a:xfrm>
+            <a:off x="822960" y="4663440"/>
+            <a:ext cx="10543032" cy="822960"/>
+          </a:xfrm>
+          <a:prstGeom prst="rect">
+            <a:avLst/>
+          </a:prstGeom>
+          <a:noFill/>
+          <a:ln/>
+        </p:spPr>
+        <p:txBody>
+          <a:bodyPr wrap="square" lIns="0" tIns="0" rIns="0" bIns="0" rtlCol="0" anchor="ctr"/>
+          <a:lstStyle/>
+          <a:p>
+            <a:pPr rtl="1" algn="r" indent="0" marL="0">
+              <a:buNone/>
+            </a:pPr>
+            <a:r>
+              <a:rPr lang="en-US" sz="1600" b="1" dirty="0">
+                <a:solidFill>
+                  <a:srgbClr val="1B1F3B"/>
                 </a:solidFill>
                 <a:latin typeface="Arial" pitchFamily="34" charset="0"/>
                 <a:ea typeface="Arial" pitchFamily="34" charset="-122"/>
                 <a:cs typeface="Arial" pitchFamily="34" charset="-120"/>
               </a:rPr>
-              <a:t>20 דקות. בונים יחד, בזמן אמת.</a:t>
-            </a:r>
-            <a:endParaRPr lang="en-US" sz="3800" dirty="0"/>
-          </a:p>
-        </p:txBody>
-      </p:sp>
-      <p:sp>
-        <p:nvSpPr>
-          <p:cNvPr id="4" name="Text 2"/>
-          <p:cNvSpPr/>
-          <p:nvPr/>
-        </p:nvSpPr>
-        <p:spPr>
-          <a:xfrm>
-            <a:off x="548640" y="2148840"/>
-            <a:ext cx="11091672" cy="457200"/>
-          </a:xfrm>
-          <a:prstGeom prst="rect">
-            <a:avLst/>
-          </a:prstGeom>
-          <a:noFill/>
-          <a:ln/>
-        </p:spPr>
-        <p:txBody>
-          <a:bodyPr wrap="square" lIns="0" tIns="0" rIns="0" bIns="0" rtlCol="0" anchor="ctr"/>
-          <a:lstStyle/>
-          <a:p>
-            <a:pPr rtl="1" algn="ctr" indent="0" marL="0">
-              <a:buNone/>
-            </a:pPr>
-            <a:r>
-              <a:rPr lang="en-US" sz="1500" i="1" dirty="0">
-                <a:solidFill>
-                  <a:srgbClr val="CADCFC"/>
-                </a:solidFill>
-                <a:latin typeface="Calibri" pitchFamily="34" charset="0"/>
-                <a:ea typeface="Calibri" pitchFamily="34" charset="-122"/>
-                <a:cs typeface="Calibri" pitchFamily="34" charset="-120"/>
-              </a:rPr>
-              <a:t>ראו demo/prompt.md להוראות המלאות</a:t>
-            </a:r>
-            <a:endParaRPr lang="en-US" sz="1500" dirty="0"/>
-          </a:p>
-        </p:txBody>
-      </p:sp>
-      <p:sp>
-        <p:nvSpPr>
-          <p:cNvPr id="5" name="Shape 3"/>
-          <p:cNvSpPr/>
-          <p:nvPr/>
-        </p:nvSpPr>
-        <p:spPr>
-          <a:xfrm>
-            <a:off x="3200400" y="2880360"/>
-            <a:ext cx="5788152" cy="3291840"/>
-          </a:xfrm>
-          <a:prstGeom prst="rect">
-            <a:avLst/>
-          </a:prstGeom>
-          <a:solidFill>
-            <a:srgbClr val="2A2F55"/>
-          </a:solidFill>
-          <a:ln w="15875">
-            <a:solidFill>
-              <a:srgbClr val="00C2A8"/>
-            </a:solidFill>
-            <a:prstDash val="dash"/>
-          </a:ln>
-        </p:spPr>
-      </p:sp>
-      <p:sp>
-        <p:nvSpPr>
-          <p:cNvPr id="6" name="Text 4"/>
-          <p:cNvSpPr/>
-          <p:nvPr/>
-        </p:nvSpPr>
-        <p:spPr>
-          <a:xfrm>
-            <a:off x="3200400" y="2880360"/>
-            <a:ext cx="5788152" cy="3291840"/>
-          </a:xfrm>
-          <a:prstGeom prst="rect">
-            <a:avLst/>
-          </a:prstGeom>
-          <a:noFill/>
-          <a:ln/>
-        </p:spPr>
-        <p:txBody>
-          <a:bodyPr wrap="square" lIns="101600" tIns="101600" rIns="101600" bIns="101600" rtlCol="0" anchor="ctr"/>
-          <a:lstStyle/>
-          <a:p>
-            <a:pPr rtl="1" algn="ctr" indent="0" marL="0">
-              <a:buNone/>
-            </a:pPr>
-            <a:r>
-              <a:rPr lang="en-US" sz="1200" i="1" dirty="0">
-                <a:solidFill>
-                  <a:srgbClr val="00C2A8"/>
-                </a:solidFill>
-                <a:latin typeface="Calibri" pitchFamily="34" charset="0"/>
-                <a:ea typeface="Calibri" pitchFamily="34" charset="-122"/>
-                <a:cs typeface="Calibri" pitchFamily="34" charset="-120"/>
-              </a:rPr>
-              <a:t>[תמונה: מסך שיתוף / הקלטת מסך של סוכן AI בונה קוד בזמן אמת]</a:t>
-            </a:r>
-            <a:endParaRPr lang="en-US" sz="1200" dirty="0"/>
-          </a:p>
-        </p:txBody>
-      </p:sp>
-      <p:sp>
-        <p:nvSpPr>
-          <p:cNvPr id="7" name="Text 5"/>
+              <a:t>תחשבו על כלי טכנולוגי שהשתנה דרמטית בחייכם תוך שנה-שנתיים — שתפו את בן/בת הזוג</a:t>
+            </a:r>
+            <a:endParaRPr lang="en-US" sz="1600" dirty="0"/>
+          </a:p>
+        </p:txBody>
+      </p:sp>
+      <p:sp>
+        <p:nvSpPr>
+          <p:cNvPr id="10" name="Text 8"/>
           <p:cNvSpPr/>
           <p:nvPr/>
         </p:nvSpPr>
@@ -8438,7 +8900,7 @@
             <a:r>
               <a:rPr lang="en-US" sz="900" dirty="0">
                 <a:solidFill>
-                  <a:srgbClr val="8891C2"/>
+                  <a:srgbClr val="A6A6B0"/>
                 </a:solidFill>
                 <a:latin typeface="Calibri" pitchFamily="34" charset="0"/>
                 <a:ea typeface="Calibri" pitchFamily="34" charset="-122"/>

--- a/lesson_01/lesson_01_slides.pptx
+++ b/lesson_01/lesson_01_slides.pptx
@@ -26,9 +26,10 @@
     <p:sldId id="274" r:id="rId20"/>
     <p:sldId id="275" r:id="rId21"/>
     <p:sldId id="276" r:id="rId22"/>
+    <p:sldId id="277" r:id="rId23"/>
   </p:sldIdLst>
   <p:notesMasterIdLst>
-    <p:notesMasterId r:id="rId23"/>
+    <p:notesMasterId r:id="rId24"/>
   </p:notesMasterIdLst>
   <p:sldSz cx="12192000" cy="6858000"/>
   <p:notesSz cx="6858000" cy="12192000"/>
@@ -1690,6 +1691,94 @@
             <a:fld id="{F7021451-1387-4CA6-816F-3879F97B5CBC}" type="slidenum">
               <a:rPr lang="en-US"/>
               <a:t>21</a:t>
+            </a:fld>
+            <a:endParaRPr lang="en-US"/>
+          </a:p>
+        </p:txBody>
+      </p:sp>
+    </p:spTree>
+    <p:extLst>
+      <p:ext uri="{BB962C8B-B14F-4D97-AF65-F5344CB8AC3E}">
+        <p14:creationId xmlns:p14="http://schemas.microsoft.com/office/powerpoint/2010/main" val="1024086991"/>
+      </p:ext>
+    </p:extLst>
+  </p:cSld>
+  <p:clrMapOvr>
+    <a:masterClrMapping/>
+  </p:clrMapOvr>
+</p:notes>
+</file>
+
+<file path=ppt/notesSlides/notesSlide22.xml><?xml version="1.0" encoding="utf-8"?>
+<p:notes xmlns:a="http://schemas.openxmlformats.org/drawingml/2006/main" xmlns:r="http://schemas.openxmlformats.org/officeDocument/2006/relationships" xmlns:p="http://schemas.openxmlformats.org/presentationml/2006/main">
+  <p:cSld>
+    <p:spTree>
+      <p:nvGrpSpPr>
+        <p:cNvPr id="1" name=""/>
+        <p:cNvGrpSpPr/>
+        <p:nvPr/>
+      </p:nvGrpSpPr>
+      <p:grpSpPr>
+        <a:xfrm>
+          <a:off x="0" y="0"/>
+          <a:ext cx="0" cy="0"/>
+          <a:chOff x="0" y="0"/>
+          <a:chExt cx="0" cy="0"/>
+        </a:xfrm>
+      </p:grpSpPr>
+      <p:sp>
+        <p:nvSpPr>
+          <p:cNvPr id="2" name="Slide Image Placeholder 1"/>
+          <p:cNvSpPr>
+            <a:spLocks noGrp="1" noRot="1" noChangeAspect="1"/>
+          </p:cNvSpPr>
+          <p:nvPr>
+            <p:ph type="sldImg"/>
+          </p:nvPr>
+        </p:nvSpPr>
+        <p:spPr/>
+      </p:sp>
+      <p:sp>
+        <p:nvSpPr>
+          <p:cNvPr id="3" name="Notes Placeholder 2"/>
+          <p:cNvSpPr>
+            <a:spLocks noGrp="1"/>
+          </p:cNvSpPr>
+          <p:nvPr>
+            <p:ph type="body" idx="1"/>
+          </p:nvPr>
+        </p:nvSpPr>
+        <p:spPr/>
+        <p:txBody>
+          <a:bodyPr/>
+          <a:lstStyle/>
+          <a:p>
+            <a:r>
+              <a:rPr lang="en-US" dirty="0"/>
+              <a:t/>
+            </a:r>
+            <a:endParaRPr lang="en-US" dirty="0"/>
+          </a:p>
+        </p:txBody>
+      </p:sp>
+      <p:sp>
+        <p:nvSpPr>
+          <p:cNvPr id="4" name="Slide Number Placeholder 3"/>
+          <p:cNvSpPr>
+            <a:spLocks noGrp="1"/>
+          </p:cNvSpPr>
+          <p:nvPr>
+            <p:ph type="sldNum" sz="quarter" idx="10"/>
+          </p:nvPr>
+        </p:nvSpPr>
+        <p:spPr/>
+        <p:txBody>
+          <a:bodyPr/>
+          <a:lstStyle/>
+          <a:p>
+            <a:fld id="{F7021451-1387-4CA6-816F-3879F97B5CBC}" type="slidenum">
+              <a:rPr lang="en-US"/>
+              <a:t>22</a:t>
             </a:fld>
             <a:endParaRPr lang="en-US"/>
           </a:p>
@@ -2839,7 +2928,7 @@
               <a:buNone/>
             </a:pPr>
             <a:r>
-              <a:rPr lang="en-US" sz="1500" dirty="0">
+              <a:rPr lang="en-US" sz="1700" dirty="0">
                 <a:solidFill>
                   <a:srgbClr val="1B1F3B"/>
                 </a:solidFill>
@@ -2849,7 +2938,7 @@
               </a:rPr>
               <a:t>• מהו Vibe Coding, ובמה הוא שונה מ״להקליד פרומפט״?</a:t>
             </a:r>
-            <a:endParaRPr lang="en-US" sz="1500" dirty="0"/>
+            <a:endParaRPr lang="en-US" sz="1700" dirty="0"/>
           </a:p>
           <a:p>
             <a:pPr algn="r" indent="0" marL="0">
@@ -2859,7 +2948,7 @@
               <a:buNone/>
             </a:pPr>
             <a:r>
-              <a:rPr lang="en-US" sz="1500" dirty="0">
+              <a:rPr lang="en-US" sz="1700" dirty="0">
                 <a:solidFill>
                   <a:srgbClr val="1B1F3B"/>
                 </a:solidFill>
@@ -2869,7 +2958,7 @@
               </a:rPr>
               <a:t>• מה היתרונות, החסרונות והמגבלות — עם נתונים אמיתיים?</a:t>
             </a:r>
-            <a:endParaRPr lang="en-US" sz="1500" dirty="0"/>
+            <a:endParaRPr lang="en-US" sz="1700" dirty="0"/>
           </a:p>
           <a:p>
             <a:pPr algn="r" indent="0" marL="0">
@@ -2879,7 +2968,7 @@
               <a:buNone/>
             </a:pPr>
             <a:r>
-              <a:rPr lang="en-US" sz="1500" dirty="0">
+              <a:rPr lang="en-US" sz="1700" dirty="0">
                 <a:solidFill>
                   <a:srgbClr val="1B1F3B"/>
                 </a:solidFill>
@@ -2889,7 +2978,7 @@
               </a:rPr>
               <a:t>• מהו ה-Workflow בן 10 השלבים שנלמד לאורך כל הקורס?</a:t>
             </a:r>
-            <a:endParaRPr lang="en-US" sz="1500" dirty="0"/>
+            <a:endParaRPr lang="en-US" sz="1700" dirty="0"/>
           </a:p>
           <a:p>
             <a:pPr algn="r" indent="0" marL="0">
@@ -2899,7 +2988,7 @@
               <a:buNone/>
             </a:pPr>
             <a:r>
-              <a:rPr lang="en-US" sz="1500" dirty="0">
+              <a:rPr lang="en-US" sz="1700" dirty="0">
                 <a:solidFill>
                   <a:srgbClr val="1B1F3B"/>
                 </a:solidFill>
@@ -2909,7 +2998,7 @@
               </a:rPr>
               <a:t>• למה הקורס מלמד ״תהליך״, ולא ״כלי״?</a:t>
             </a:r>
-            <a:endParaRPr lang="en-US" sz="1500" dirty="0"/>
+            <a:endParaRPr lang="en-US" sz="1700" dirty="0"/>
           </a:p>
         </p:txBody>
       </p:sp>
@@ -2963,7 +3052,7 @@
               <a:buNone/>
             </a:pPr>
             <a:r>
-              <a:rPr lang="en-US" sz="1200" i="1" dirty="0">
+              <a:rPr lang="en-US" sz="1300" i="1" dirty="0">
                 <a:solidFill>
                   <a:srgbClr val="6B7280"/>
                 </a:solidFill>
@@ -2973,7 +3062,7 @@
               </a:rPr>
               <a:t>[תמונה: מסך טרמינל / IDE עם סוכן AI כותב קוד בזמן אמת]</a:t>
             </a:r>
-            <a:endParaRPr lang="en-US" sz="1200" dirty="0"/>
+            <a:endParaRPr lang="en-US" sz="1300" dirty="0"/>
           </a:p>
         </p:txBody>
       </p:sp>
@@ -3112,7 +3201,7 @@
               <a:buNone/>
             </a:pPr>
             <a:r>
-              <a:rPr lang="en-US" sz="1500" i="1" dirty="0">
+              <a:rPr lang="en-US" sz="1700" i="1" dirty="0">
                 <a:solidFill>
                   <a:srgbClr val="6B7280"/>
                 </a:solidFill>
@@ -3122,7 +3211,7 @@
               </a:rPr>
               <a:t>השאלה: מה קורה כש-AI "לא יודע" משהו?</a:t>
             </a:r>
-            <a:endParaRPr lang="en-US" sz="1500" dirty="0"/>
+            <a:endParaRPr lang="en-US" sz="1700" dirty="0"/>
           </a:p>
         </p:txBody>
       </p:sp>
@@ -3154,7 +3243,7 @@
               <a:buNone/>
             </a:pPr>
             <a:r>
-              <a:rPr lang="en-US" sz="1600" dirty="0">
+              <a:rPr lang="en-US" sz="1900" dirty="0">
                 <a:solidFill>
                   <a:srgbClr val="1B1F3B"/>
                 </a:solidFill>
@@ -3164,17 +3253,17 @@
               </a:rPr>
               <a:t>• בניגוד לבן אדם, מודל שפה כמעט אף פעם לא אומר "אני לא יודע"</a:t>
             </a:r>
-            <a:endParaRPr lang="en-US" sz="1600" dirty="0"/>
-          </a:p>
-          <a:p>
-            <a:pPr algn="r" indent="0" marL="0">
-              <a:spcAft>
-                <a:spcPts val="1000"/>
-              </a:spcAft>
-              <a:buNone/>
-            </a:pPr>
-            <a:r>
-              <a:rPr lang="en-US" sz="1600" dirty="0">
+            <a:endParaRPr lang="en-US" sz="1900" dirty="0"/>
+          </a:p>
+          <a:p>
+            <a:pPr algn="r" indent="0" marL="0">
+              <a:spcAft>
+                <a:spcPts val="1000"/>
+              </a:spcAft>
+              <a:buNone/>
+            </a:pPr>
+            <a:r>
+              <a:rPr lang="en-US" sz="1900" dirty="0">
                 <a:solidFill>
                   <a:srgbClr val="1B1F3B"/>
                 </a:solidFill>
@@ -3184,17 +3273,17 @@
               </a:rPr>
               <a:t>• הוא ממשיך "לנחש" את הטקסט הכי סביר — גם אם זה אומר להמציא פונקציה, ספרייה, או API שלא קיימים</a:t>
             </a:r>
-            <a:endParaRPr lang="en-US" sz="1600" dirty="0"/>
-          </a:p>
-          <a:p>
-            <a:pPr algn="r" indent="0" marL="0">
-              <a:spcAft>
-                <a:spcPts val="1000"/>
-              </a:spcAft>
-              <a:buNone/>
-            </a:pPr>
-            <a:r>
-              <a:rPr lang="en-US" sz="1600" dirty="0">
+            <a:endParaRPr lang="en-US" sz="1900" dirty="0"/>
+          </a:p>
+          <a:p>
+            <a:pPr algn="r" indent="0" marL="0">
+              <a:spcAft>
+                <a:spcPts val="1000"/>
+              </a:spcAft>
+              <a:buNone/>
+            </a:pPr>
+            <a:r>
+              <a:rPr lang="en-US" sz="1900" dirty="0">
                 <a:solidFill>
                   <a:srgbClr val="1B1F3B"/>
                 </a:solidFill>
@@ -3211,7 +3300,7 @@
               <a:buNone/>
             </a:pPr>
             <a:r>
-              <a:rPr lang="en-US" sz="1600" b="1" dirty="0">
+              <a:rPr lang="en-US" sz="1900" b="1" dirty="0">
                 <a:solidFill>
                   <a:srgbClr val="1B1F3B"/>
                 </a:solidFill>
@@ -3228,7 +3317,7 @@
               <a:buNone/>
             </a:pPr>
             <a:r>
-              <a:rPr lang="en-US" sz="1600" dirty="0">
+              <a:rPr lang="en-US" sz="1900" dirty="0">
                 <a:solidFill>
                   <a:srgbClr val="1B1F3B"/>
                 </a:solidFill>
@@ -3238,7 +3327,7 @@
               </a:rPr>
               <a:t> — אין שום סימן חזותי שההמצאה שונה מעובדה</a:t>
             </a:r>
-            <a:endParaRPr lang="en-US" sz="1600" dirty="0"/>
+            <a:endParaRPr lang="en-US" sz="1900" dirty="0"/>
           </a:p>
         </p:txBody>
       </p:sp>
@@ -3274,7 +3363,7 @@
         <p:spPr>
           <a:xfrm>
             <a:off x="548640" y="4023360"/>
-            <a:ext cx="11091672" cy="777240"/>
+            <a:ext cx="11091672" cy="868680"/>
           </a:xfrm>
           <a:prstGeom prst="rect">
             <a:avLst/>
@@ -3290,7 +3379,7 @@
               <a:buNone/>
             </a:pPr>
             <a:r>
-              <a:rPr lang="en-US" sz="1500" dirty="0">
+              <a:rPr lang="en-US" sz="1700" dirty="0">
                 <a:solidFill>
                   <a:srgbClr val="00A88A"/>
                 </a:solidFill>
@@ -3300,7 +3389,7 @@
               </a:rPr>
               <a:t>✔ מה עושים בפועל: לא מכירים פונקציה/ספרייה שה-AI השתמש בה? בודקים בתיעוד הרשמי לפני שממשיכים.</a:t>
             </a:r>
-            <a:endParaRPr lang="en-US" sz="1500" dirty="0"/>
+            <a:endParaRPr lang="en-US" sz="1700" dirty="0"/>
           </a:p>
         </p:txBody>
       </p:sp>
@@ -3354,7 +3443,7 @@
               <a:buNone/>
             </a:pPr>
             <a:r>
-              <a:rPr lang="en-US" sz="1200" i="1" dirty="0">
+              <a:rPr lang="en-US" sz="1300" i="1" dirty="0">
                 <a:solidFill>
                   <a:srgbClr val="6B7280"/>
                 </a:solidFill>
@@ -3364,7 +3453,7 @@
               </a:rPr>
               <a:t>[תמונה: קטע קוד עם קריאה לפונקציה שנראית לגיטימית, וסימן שאלה אדום ליד שמה — "האם זה קיים באמת?"]</a:t>
             </a:r>
-            <a:endParaRPr lang="en-US" sz="1200" dirty="0"/>
+            <a:endParaRPr lang="en-US" sz="1300" dirty="0"/>
           </a:p>
         </p:txBody>
       </p:sp>
@@ -3506,7 +3595,7 @@
               <a:buNone/>
             </a:pPr>
             <a:r>
-              <a:rPr lang="en-US" sz="1600" b="1" dirty="0">
+              <a:rPr lang="en-US" sz="1900" b="1" dirty="0">
                 <a:solidFill>
                   <a:srgbClr val="1B1F3B"/>
                 </a:solidFill>
@@ -3523,7 +3612,7 @@
               <a:buNone/>
             </a:pPr>
             <a:r>
-              <a:rPr lang="en-US" sz="1600" dirty="0">
+              <a:rPr lang="en-US" sz="1900" dirty="0">
                 <a:solidFill>
                   <a:srgbClr val="1B1F3B"/>
                 </a:solidFill>
@@ -3533,17 +3622,17 @@
               </a:rPr>
               <a:t> משתמשים/מתכננים להשתמש בכלי AI</a:t>
             </a:r>
-            <a:endParaRPr lang="en-US" sz="1600" dirty="0"/>
-          </a:p>
-          <a:p>
-            <a:pPr algn="r" indent="0" marL="0">
-              <a:spcAft>
-                <a:spcPts val="1000"/>
-              </a:spcAft>
-              <a:buNone/>
-            </a:pPr>
-            <a:r>
-              <a:rPr lang="en-US" sz="1600" dirty="0">
+            <a:endParaRPr lang="en-US" sz="1900" dirty="0"/>
+          </a:p>
+          <a:p>
+            <a:pPr algn="r" indent="0" marL="0">
+              <a:spcAft>
+                <a:spcPts val="1000"/>
+              </a:spcAft>
+              <a:buNone/>
+            </a:pPr>
+            <a:r>
+              <a:rPr lang="en-US" sz="1900" dirty="0">
                 <a:solidFill>
                   <a:srgbClr val="1B1F3B"/>
                 </a:solidFill>
@@ -3560,7 +3649,7 @@
               <a:buNone/>
             </a:pPr>
             <a:r>
-              <a:rPr lang="en-US" sz="1600" b="1" dirty="0">
+              <a:rPr lang="en-US" sz="1900" b="1" dirty="0">
                 <a:solidFill>
                   <a:srgbClr val="1B1F3B"/>
                 </a:solidFill>
@@ -3577,7 +3666,7 @@
               <a:buNone/>
             </a:pPr>
             <a:r>
-              <a:rPr lang="en-US" sz="1600" dirty="0">
+              <a:rPr lang="en-US" sz="1900" dirty="0">
                 <a:solidFill>
                   <a:srgbClr val="1B1F3B"/>
                 </a:solidFill>
@@ -3587,17 +3676,17 @@
               </a:rPr>
               <a:t> סומכים על הפלט</a:t>
             </a:r>
-            <a:endParaRPr lang="en-US" sz="1600" dirty="0"/>
-          </a:p>
-          <a:p>
-            <a:pPr algn="r" indent="0" marL="0">
-              <a:spcAft>
-                <a:spcPts val="1000"/>
-              </a:spcAft>
-              <a:buNone/>
-            </a:pPr>
-            <a:r>
-              <a:rPr lang="en-US" sz="1600" b="1" dirty="0">
+            <a:endParaRPr lang="en-US" sz="1900" dirty="0"/>
+          </a:p>
+          <a:p>
+            <a:pPr algn="r" indent="0" marL="0">
+              <a:spcAft>
+                <a:spcPts val="1000"/>
+              </a:spcAft>
+              <a:buNone/>
+            </a:pPr>
+            <a:r>
+              <a:rPr lang="en-US" sz="1900" b="1" dirty="0">
                 <a:solidFill>
                   <a:srgbClr val="1B1F3B"/>
                 </a:solidFill>
@@ -3614,7 +3703,7 @@
               <a:buNone/>
             </a:pPr>
             <a:r>
-              <a:rPr lang="en-US" sz="1600" dirty="0">
+              <a:rPr lang="en-US" sz="1900" dirty="0">
                 <a:solidFill>
                   <a:srgbClr val="1B1F3B"/>
                 </a:solidFill>
@@ -3624,17 +3713,17 @@
               </a:rPr>
               <a:t> מסכימים: "קוד AI נראה נכון אבל לא אמין"</a:t>
             </a:r>
-            <a:endParaRPr lang="en-US" sz="1600" dirty="0"/>
-          </a:p>
-          <a:p>
-            <a:pPr algn="r" indent="0" marL="0">
-              <a:spcAft>
-                <a:spcPts val="1000"/>
-              </a:spcAft>
-              <a:buNone/>
-            </a:pPr>
-            <a:r>
-              <a:rPr lang="en-US" sz="1600" dirty="0">
+            <a:endParaRPr lang="en-US" sz="1900" dirty="0"/>
+          </a:p>
+          <a:p>
+            <a:pPr algn="r" indent="0" marL="0">
+              <a:spcAft>
+                <a:spcPts val="1000"/>
+              </a:spcAft>
+              <a:buNone/>
+            </a:pPr>
+            <a:r>
+              <a:rPr lang="en-US" sz="1900" dirty="0">
                 <a:solidFill>
                   <a:srgbClr val="1B1F3B"/>
                 </a:solidFill>
@@ -3651,7 +3740,7 @@
               <a:buNone/>
             </a:pPr>
             <a:r>
-              <a:rPr lang="en-US" sz="1600" b="1" dirty="0">
+              <a:rPr lang="en-US" sz="1900" b="1" dirty="0">
                 <a:solidFill>
                   <a:srgbClr val="1B1F3B"/>
                 </a:solidFill>
@@ -3668,7 +3757,7 @@
               <a:buNone/>
             </a:pPr>
             <a:r>
-              <a:rPr lang="en-US" sz="1600" dirty="0">
+              <a:rPr lang="en-US" sz="1900" dirty="0">
                 <a:solidFill>
                   <a:srgbClr val="1B1F3B"/>
                 </a:solidFill>
@@ -3685,7 +3774,7 @@
               <a:buNone/>
             </a:pPr>
             <a:r>
-              <a:rPr lang="en-US" sz="1600" b="1" dirty="0">
+              <a:rPr lang="en-US" sz="1900" b="1" dirty="0">
                 <a:solidFill>
                   <a:srgbClr val="1B1F3B"/>
                 </a:solidFill>
@@ -3702,7 +3791,7 @@
               <a:buNone/>
             </a:pPr>
             <a:r>
-              <a:rPr lang="en-US" sz="1600" dirty="0">
+              <a:rPr lang="en-US" sz="1900" dirty="0">
                 <a:solidFill>
                   <a:srgbClr val="1B1F3B"/>
                 </a:solidFill>
@@ -3712,7 +3801,7 @@
               </a:rPr>
               <a:t> יציבות מערכת</a:t>
             </a:r>
-            <a:endParaRPr lang="en-US" sz="1600" dirty="0"/>
+            <a:endParaRPr lang="en-US" sz="1900" dirty="0"/>
           </a:p>
         </p:txBody>
       </p:sp>
@@ -3748,7 +3837,7 @@
         <p:spPr>
           <a:xfrm>
             <a:off x="548640" y="3749040"/>
-            <a:ext cx="11091672" cy="777240"/>
+            <a:ext cx="11091672" cy="868680"/>
           </a:xfrm>
           <a:prstGeom prst="rect">
             <a:avLst/>
@@ -3764,7 +3853,7 @@
               <a:buNone/>
             </a:pPr>
             <a:r>
-              <a:rPr lang="en-US" sz="1500" dirty="0">
+              <a:rPr lang="en-US" sz="1700" dirty="0">
                 <a:solidFill>
                   <a:srgbClr val="00A88A"/>
                 </a:solidFill>
@@ -3774,7 +3863,7 @@
               </a:rPr>
               <a:t>✔ מה עושים בפועל: זה בדיוק הפער שראינו בשקף הקודם עם Hallucination — עכשיו במספרים אמיתיים.</a:t>
             </a:r>
-            <a:endParaRPr lang="en-US" sz="1500" dirty="0"/>
+            <a:endParaRPr lang="en-US" sz="1700" dirty="0"/>
           </a:p>
         </p:txBody>
       </p:sp>
@@ -3952,7 +4041,7 @@
               <a:buNone/>
             </a:pPr>
             <a:r>
-              <a:rPr lang="en-US" sz="1500" i="1" dirty="0">
+              <a:rPr lang="en-US" sz="1700" i="1" dirty="0">
                 <a:solidFill>
                   <a:srgbClr val="6B7280"/>
                 </a:solidFill>
@@ -3962,7 +4051,7 @@
               </a:rPr>
               <a:t>השאלה: אם מפתחים מרגישים ש-AI מאיץ אותם — זה נכון?</a:t>
             </a:r>
-            <a:endParaRPr lang="en-US" sz="1500" dirty="0"/>
+            <a:endParaRPr lang="en-US" sz="1700" dirty="0"/>
           </a:p>
         </p:txBody>
       </p:sp>
@@ -3994,7 +4083,7 @@
               <a:buNone/>
             </a:pPr>
             <a:r>
-              <a:rPr lang="en-US" sz="1600" dirty="0">
+              <a:rPr lang="en-US" sz="1900" dirty="0">
                 <a:solidFill>
                   <a:srgbClr val="1B1F3B"/>
                 </a:solidFill>
@@ -4004,17 +4093,17 @@
               </a:rPr>
               <a:t>• מפתחים מנוסים עבדו עם כלי AI על משימות אמיתיות</a:t>
             </a:r>
-            <a:endParaRPr lang="en-US" sz="1600" dirty="0"/>
-          </a:p>
-          <a:p>
-            <a:pPr algn="r" indent="0" marL="0">
-              <a:spcAft>
-                <a:spcPts val="1000"/>
-              </a:spcAft>
-              <a:buNone/>
-            </a:pPr>
-            <a:r>
-              <a:rPr lang="en-US" sz="1600" dirty="0">
+            <a:endParaRPr lang="en-US" sz="1900" dirty="0"/>
+          </a:p>
+          <a:p>
+            <a:pPr algn="r" indent="0" marL="0">
+              <a:spcAft>
+                <a:spcPts val="1000"/>
+              </a:spcAft>
+              <a:buNone/>
+            </a:pPr>
+            <a:r>
+              <a:rPr lang="en-US" sz="1900" dirty="0">
                 <a:solidFill>
                   <a:srgbClr val="1B1F3B"/>
                 </a:solidFill>
@@ -4031,7 +4120,7 @@
               <a:buNone/>
             </a:pPr>
             <a:r>
-              <a:rPr lang="en-US" sz="1600" b="1" dirty="0">
+              <a:rPr lang="en-US" sz="1900" b="1" dirty="0">
                 <a:solidFill>
                   <a:srgbClr val="1B1F3B"/>
                 </a:solidFill>
@@ -4041,17 +4130,17 @@
               </a:rPr>
               <a:t>איטיים ב-19%</a:t>
             </a:r>
-            <a:endParaRPr lang="en-US" sz="1600" dirty="0"/>
-          </a:p>
-          <a:p>
-            <a:pPr algn="r" indent="0" marL="0">
-              <a:spcAft>
-                <a:spcPts val="1000"/>
-              </a:spcAft>
-              <a:buNone/>
-            </a:pPr>
-            <a:r>
-              <a:rPr lang="en-US" sz="1600" dirty="0">
+            <a:endParaRPr lang="en-US" sz="1900" dirty="0"/>
+          </a:p>
+          <a:p>
+            <a:pPr algn="r" indent="0" marL="0">
+              <a:spcAft>
+                <a:spcPts val="1000"/>
+              </a:spcAft>
+              <a:buNone/>
+            </a:pPr>
+            <a:r>
+              <a:rPr lang="en-US" sz="1900" dirty="0">
                 <a:solidFill>
                   <a:srgbClr val="1B1F3B"/>
                 </a:solidFill>
@@ -4068,7 +4157,7 @@
               <a:buNone/>
             </a:pPr>
             <a:r>
-              <a:rPr lang="en-US" sz="1600" b="1" dirty="0">
+              <a:rPr lang="en-US" sz="1900" b="1" dirty="0">
                 <a:solidFill>
                   <a:srgbClr val="1B1F3B"/>
                 </a:solidFill>
@@ -4078,7 +4167,7 @@
               </a:rPr>
               <a:t>מהירים ב-20%</a:t>
             </a:r>
-            <a:endParaRPr lang="en-US" sz="1600" dirty="0"/>
+            <a:endParaRPr lang="en-US" sz="1900" dirty="0"/>
           </a:p>
         </p:txBody>
       </p:sp>
@@ -4114,7 +4203,7 @@
         <p:spPr>
           <a:xfrm>
             <a:off x="548640" y="4023360"/>
-            <a:ext cx="11091672" cy="777240"/>
+            <a:ext cx="11091672" cy="868680"/>
           </a:xfrm>
           <a:prstGeom prst="rect">
             <a:avLst/>
@@ -4130,7 +4219,7 @@
               <a:buNone/>
             </a:pPr>
             <a:r>
-              <a:rPr lang="en-US" sz="1500" dirty="0">
+              <a:rPr lang="en-US" sz="1700" dirty="0">
                 <a:solidFill>
                   <a:srgbClr val="00A88A"/>
                 </a:solidFill>
@@ -4140,7 +4229,7 @@
               </a:rPr>
               <a:t>✔ מה עושים בפועל: לא סומכים על התחושה "זה הלך מהר" — עוקבים אחרי זמן אמיתי (שעון, לא הרגשה).</a:t>
             </a:r>
-            <a:endParaRPr lang="en-US" sz="1500" dirty="0"/>
+            <a:endParaRPr lang="en-US" sz="1700" dirty="0"/>
           </a:p>
         </p:txBody>
       </p:sp>
@@ -4287,7 +4376,7 @@
                 <a:ea typeface="Arial" pitchFamily="34" charset="-122"/>
                 <a:cs typeface="Arial" pitchFamily="34" charset="-120"/>
               </a:rPr>
-              <a:t>Workflow של מפתח מודרני</a:t>
+              <a:t>Workflow של מפתח מודרני (חלק א׳: שלבים 1-5)</a:t>
             </a:r>
             <a:endParaRPr lang="en-US" sz="2800" dirty="0"/>
           </a:p>
@@ -4318,7 +4407,7 @@
               <a:buNone/>
             </a:pPr>
             <a:r>
-              <a:rPr lang="en-US" sz="1500" i="1" dirty="0">
+              <a:rPr lang="en-US" sz="1700" i="1" dirty="0">
                 <a:solidFill>
                   <a:srgbClr val="6B7280"/>
                 </a:solidFill>
@@ -4326,9 +4415,9 @@
                 <a:ea typeface="Calibri" pitchFamily="34" charset="-122"/>
                 <a:cs typeface="Calibri" pitchFamily="34" charset="-120"/>
               </a:rPr>
-              <a:t>השאלה: אז איך עובדים נכון עם AI, אם לא סומכים על התחושה?</a:t>
-            </a:r>
-            <a:endParaRPr lang="en-US" sz="1500" dirty="0"/>
+              <a:t>השאלה: אז איך עובדים נכון עם AI, אם לא סומכים על התחושה (כמו שראינו בשקף הקודם)?</a:t>
+            </a:r>
+            <a:endParaRPr lang="en-US" sz="1700" dirty="0"/>
           </a:p>
         </p:txBody>
       </p:sp>
@@ -4340,8 +4429,8 @@
         </p:nvSpPr>
         <p:spPr>
           <a:xfrm>
-            <a:off x="6153912" y="1600200"/>
-            <a:ext cx="5303520" cy="2377440"/>
+            <a:off x="548640" y="1508760"/>
+            <a:ext cx="11091672" cy="2286000"/>
           </a:xfrm>
           <a:prstGeom prst="rect">
             <a:avLst/>
@@ -4355,236 +4444,199 @@
           <a:p>
             <a:pPr algn="r" indent="0" marL="0">
               <a:spcAft>
-                <a:spcPts val="1200"/>
-              </a:spcAft>
-              <a:buNone/>
-            </a:pPr>
-            <a:r>
-              <a:rPr lang="en-US" sz="1700" dirty="0">
-                <a:solidFill>
-                  <a:srgbClr val="1B1F3B"/>
-                </a:solidFill>
-                <a:latin typeface="Calibri" pitchFamily="34" charset="0"/>
-                <a:ea typeface="Calibri" pitchFamily="34" charset="-122"/>
-                <a:cs typeface="Calibri" pitchFamily="34" charset="-120"/>
-              </a:rPr>
-              <a:t>1. הבנת הבעיה</a:t>
-            </a:r>
-            <a:endParaRPr lang="en-US" sz="1700" dirty="0"/>
-          </a:p>
-          <a:p>
-            <a:pPr algn="r" indent="0" marL="0">
-              <a:spcAft>
-                <a:spcPts val="1200"/>
-              </a:spcAft>
-              <a:buNone/>
-            </a:pPr>
-            <a:r>
-              <a:rPr lang="en-US" sz="1700" dirty="0">
-                <a:solidFill>
-                  <a:srgbClr val="1B1F3B"/>
-                </a:solidFill>
-                <a:latin typeface="Calibri" pitchFamily="34" charset="0"/>
-                <a:ea typeface="Calibri" pitchFamily="34" charset="-122"/>
-                <a:cs typeface="Calibri" pitchFamily="34" charset="-120"/>
-              </a:rPr>
-              <a:t>2. Specification</a:t>
-            </a:r>
-            <a:endParaRPr lang="en-US" sz="1700" dirty="0"/>
-          </a:p>
-          <a:p>
-            <a:pPr algn="r" indent="0" marL="0">
-              <a:spcAft>
-                <a:spcPts val="1200"/>
-              </a:spcAft>
-              <a:buNone/>
-            </a:pPr>
-            <a:r>
-              <a:rPr lang="en-US" sz="1700" dirty="0">
-                <a:solidFill>
-                  <a:srgbClr val="1B1F3B"/>
-                </a:solidFill>
-                <a:latin typeface="Calibri" pitchFamily="34" charset="0"/>
-                <a:ea typeface="Calibri" pitchFamily="34" charset="-122"/>
-                <a:cs typeface="Calibri" pitchFamily="34" charset="-120"/>
-              </a:rPr>
-              <a:t>3. בניית Context</a:t>
-            </a:r>
-            <a:endParaRPr lang="en-US" sz="1700" dirty="0"/>
-          </a:p>
-          <a:p>
-            <a:pPr algn="r" indent="0" marL="0">
-              <a:spcAft>
-                <a:spcPts val="1200"/>
-              </a:spcAft>
-              <a:buNone/>
-            </a:pPr>
-            <a:r>
-              <a:rPr lang="en-US" sz="1700" dirty="0">
-                <a:solidFill>
-                  <a:srgbClr val="1B1F3B"/>
-                </a:solidFill>
-                <a:latin typeface="Calibri" pitchFamily="34" charset="0"/>
-                <a:ea typeface="Calibri" pitchFamily="34" charset="-122"/>
-                <a:cs typeface="Calibri" pitchFamily="34" charset="-120"/>
-              </a:rPr>
-              <a:t>4. תכנון עם AI</a:t>
-            </a:r>
-            <a:endParaRPr lang="en-US" sz="1700" dirty="0"/>
-          </a:p>
-          <a:p>
-            <a:pPr algn="r" indent="0" marL="0">
-              <a:spcAft>
-                <a:spcPts val="1200"/>
-              </a:spcAft>
-              <a:buNone/>
-            </a:pPr>
-            <a:r>
-              <a:rPr lang="en-US" sz="1700" dirty="0">
-                <a:solidFill>
-                  <a:srgbClr val="1B1F3B"/>
-                </a:solidFill>
-                <a:latin typeface="Calibri" pitchFamily="34" charset="0"/>
-                <a:ea typeface="Calibri" pitchFamily="34" charset="-122"/>
-                <a:cs typeface="Calibri" pitchFamily="34" charset="-120"/>
-              </a:rPr>
-              <a:t>5. מימוש עם AI</a:t>
-            </a:r>
-            <a:endParaRPr lang="en-US" sz="1700" dirty="0"/>
-          </a:p>
-        </p:txBody>
-      </p:sp>
-      <p:sp>
-        <p:nvSpPr>
-          <p:cNvPr id="5" name="Text 3"/>
-          <p:cNvSpPr/>
-          <p:nvPr/>
-        </p:nvSpPr>
-        <p:spPr>
-          <a:xfrm>
-            <a:off x="548640" y="1600200"/>
-            <a:ext cx="5303520" cy="2377440"/>
-          </a:xfrm>
-          <a:prstGeom prst="rect">
-            <a:avLst/>
-          </a:prstGeom>
-          <a:noFill/>
-          <a:ln/>
-        </p:spPr>
-        <p:txBody>
-          <a:bodyPr wrap="square" lIns="0" tIns="0" rIns="0" bIns="0" rtlCol="0" anchor="ctr"/>
-          <a:lstStyle/>
-          <a:p>
-            <a:pPr algn="r" indent="0" marL="0">
-              <a:spcAft>
-                <a:spcPts val="1200"/>
-              </a:spcAft>
-              <a:buNone/>
-            </a:pPr>
-            <a:r>
-              <a:rPr lang="en-US" sz="1700" dirty="0">
-                <a:solidFill>
-                  <a:srgbClr val="1B1F3B"/>
-                </a:solidFill>
-                <a:latin typeface="Calibri" pitchFamily="34" charset="0"/>
-                <a:ea typeface="Calibri" pitchFamily="34" charset="-122"/>
-                <a:cs typeface="Calibri" pitchFamily="34" charset="-120"/>
-              </a:rPr>
-              <a:t>6. Code Review</a:t>
-            </a:r>
-            <a:endParaRPr lang="en-US" sz="1700" dirty="0"/>
-          </a:p>
-          <a:p>
-            <a:pPr algn="r" indent="0" marL="0">
-              <a:spcAft>
-                <a:spcPts val="1200"/>
-              </a:spcAft>
-              <a:buNone/>
-            </a:pPr>
-            <a:r>
-              <a:rPr lang="en-US" sz="1700" dirty="0">
-                <a:solidFill>
-                  <a:srgbClr val="1B1F3B"/>
-                </a:solidFill>
-                <a:latin typeface="Calibri" pitchFamily="34" charset="0"/>
-                <a:ea typeface="Calibri" pitchFamily="34" charset="-122"/>
-                <a:cs typeface="Calibri" pitchFamily="34" charset="-120"/>
-              </a:rPr>
-              <a:t>7. Testing</a:t>
-            </a:r>
-            <a:endParaRPr lang="en-US" sz="1700" dirty="0"/>
-          </a:p>
-          <a:p>
-            <a:pPr algn="r" indent="0" marL="0">
-              <a:spcAft>
-                <a:spcPts val="1200"/>
-              </a:spcAft>
-              <a:buNone/>
-            </a:pPr>
-            <a:r>
-              <a:rPr lang="en-US" sz="1700" dirty="0">
-                <a:solidFill>
-                  <a:srgbClr val="1B1F3B"/>
-                </a:solidFill>
-                <a:latin typeface="Calibri" pitchFamily="34" charset="0"/>
-                <a:ea typeface="Calibri" pitchFamily="34" charset="-122"/>
-                <a:cs typeface="Calibri" pitchFamily="34" charset="-120"/>
-              </a:rPr>
-              <a:t>8. Commit</a:t>
-            </a:r>
-            <a:endParaRPr lang="en-US" sz="1700" dirty="0"/>
-          </a:p>
-          <a:p>
-            <a:pPr algn="r" indent="0" marL="0">
-              <a:spcAft>
-                <a:spcPts val="1200"/>
-              </a:spcAft>
-              <a:buNone/>
-            </a:pPr>
-            <a:r>
-              <a:rPr lang="en-US" sz="1700" dirty="0">
-                <a:solidFill>
-                  <a:srgbClr val="1B1F3B"/>
-                </a:solidFill>
-                <a:latin typeface="Calibri" pitchFamily="34" charset="0"/>
-                <a:ea typeface="Calibri" pitchFamily="34" charset="-122"/>
-                <a:cs typeface="Calibri" pitchFamily="34" charset="-120"/>
-              </a:rPr>
-              <a:t>9. Deploy</a:t>
-            </a:r>
-            <a:endParaRPr lang="en-US" sz="1700" dirty="0"/>
-          </a:p>
-          <a:p>
-            <a:pPr algn="r" indent="0" marL="0">
-              <a:spcAft>
-                <a:spcPts val="1200"/>
-              </a:spcAft>
-              <a:buNone/>
-            </a:pPr>
-            <a:r>
-              <a:rPr lang="en-US" sz="1700" dirty="0">
-                <a:solidFill>
-                  <a:srgbClr val="1B1F3B"/>
-                </a:solidFill>
-                <a:latin typeface="Calibri" pitchFamily="34" charset="0"/>
-                <a:ea typeface="Calibri" pitchFamily="34" charset="-122"/>
-                <a:cs typeface="Calibri" pitchFamily="34" charset="-120"/>
-              </a:rPr>
-              <a:t>10. שיתוף</a:t>
-            </a:r>
-            <a:endParaRPr lang="en-US" sz="1700" dirty="0"/>
-          </a:p>
-        </p:txBody>
-      </p:sp>
-      <p:sp>
-        <p:nvSpPr>
-          <p:cNvPr id="6" name="Shape 4"/>
-          <p:cNvSpPr/>
-          <p:nvPr/>
-        </p:nvSpPr>
-        <p:spPr>
-          <a:xfrm>
-            <a:off x="548640" y="4297680"/>
+                <a:spcPts val="1000"/>
+              </a:spcAft>
+              <a:buNone/>
+            </a:pPr>
+            <a:r>
+              <a:rPr lang="en-US" sz="1900" b="1" dirty="0">
+                <a:solidFill>
+                  <a:srgbClr val="1B1F3B"/>
+                </a:solidFill>
+                <a:latin typeface="Calibri" pitchFamily="34" charset="0"/>
+                <a:ea typeface="Calibri" pitchFamily="34" charset="-122"/>
+                <a:cs typeface="Calibri" pitchFamily="34" charset="-120"/>
+              </a:rPr>
+              <a:t>• 1. הבנת הבעיה</a:t>
+            </a:r>
+            <a:pPr algn="r" indent="0" marL="0">
+              <a:spcAft>
+                <a:spcPts val="1000"/>
+              </a:spcAft>
+              <a:buNone/>
+            </a:pPr>
+            <a:r>
+              <a:rPr lang="en-US" sz="1900" dirty="0">
+                <a:solidFill>
+                  <a:srgbClr val="1B1F3B"/>
+                </a:solidFill>
+                <a:latin typeface="Calibri" pitchFamily="34" charset="0"/>
+                <a:ea typeface="Calibri" pitchFamily="34" charset="-122"/>
+                <a:cs typeface="Calibri" pitchFamily="34" charset="-120"/>
+              </a:rPr>
+              <a:t> — מבינים מה בדיוק צריך, לפני שנוגעים בקוד בכלל</a:t>
+            </a:r>
+            <a:endParaRPr lang="en-US" sz="1900" dirty="0"/>
+          </a:p>
+          <a:p>
+            <a:pPr algn="r" indent="0" marL="0">
+              <a:spcAft>
+                <a:spcPts val="1000"/>
+              </a:spcAft>
+              <a:buNone/>
+            </a:pPr>
+            <a:r>
+              <a:rPr lang="en-US" sz="1900" b="1" dirty="0">
+                <a:solidFill>
+                  <a:srgbClr val="1B1F3B"/>
+                </a:solidFill>
+                <a:latin typeface="Calibri" pitchFamily="34" charset="0"/>
+                <a:ea typeface="Calibri" pitchFamily="34" charset="-122"/>
+                <a:cs typeface="Calibri" pitchFamily="34" charset="-120"/>
+              </a:rPr>
+              <a:t>• 2. Specification</a:t>
+            </a:r>
+            <a:pPr algn="r" indent="0" marL="0">
+              <a:spcAft>
+                <a:spcPts val="1000"/>
+              </a:spcAft>
+              <a:buNone/>
+            </a:pPr>
+            <a:r>
+              <a:rPr lang="en-US" sz="1900" dirty="0">
+                <a:solidFill>
+                  <a:srgbClr val="1B1F3B"/>
+                </a:solidFill>
+                <a:latin typeface="Calibri" pitchFamily="34" charset="0"/>
+                <a:ea typeface="Calibri" pitchFamily="34" charset="-122"/>
+                <a:cs typeface="Calibri" pitchFamily="34" charset="-120"/>
+              </a:rPr>
+              <a:t> — כותבים מסמך קצר שמתאר מה בונים ולמה</a:t>
+            </a:r>
+            <a:endParaRPr lang="en-US" sz="1900" dirty="0"/>
+          </a:p>
+          <a:p>
+            <a:pPr algn="r" indent="0" marL="0">
+              <a:spcAft>
+                <a:spcPts val="1000"/>
+              </a:spcAft>
+              <a:buNone/>
+            </a:pPr>
+            <a:r>
+              <a:rPr lang="en-US" sz="1900" b="1" dirty="0">
+                <a:solidFill>
+                  <a:srgbClr val="1B1F3B"/>
+                </a:solidFill>
+                <a:latin typeface="Calibri" pitchFamily="34" charset="0"/>
+                <a:ea typeface="Calibri" pitchFamily="34" charset="-122"/>
+                <a:cs typeface="Calibri" pitchFamily="34" charset="-120"/>
+              </a:rPr>
+              <a:t>• 3. בניית Context</a:t>
+            </a:r>
+            <a:pPr algn="r" indent="0" marL="0">
+              <a:spcAft>
+                <a:spcPts val="1000"/>
+              </a:spcAft>
+              <a:buNone/>
+            </a:pPr>
+            <a:r>
+              <a:rPr lang="en-US" sz="1900" dirty="0">
+                <a:solidFill>
+                  <a:srgbClr val="1B1F3B"/>
+                </a:solidFill>
+                <a:latin typeface="Calibri" pitchFamily="34" charset="0"/>
+                <a:ea typeface="Calibri" pitchFamily="34" charset="-122"/>
+                <a:cs typeface="Calibri" pitchFamily="34" charset="-120"/>
+              </a:rPr>
+              <a:t> — אוספים את המידע שה-AI צריך כדי להבין את הפרויקט (קבצים קיימים, מוסכמות, החלטות קודמות)</a:t>
+            </a:r>
+            <a:endParaRPr lang="en-US" sz="1900" dirty="0"/>
+          </a:p>
+          <a:p>
+            <a:pPr algn="r" indent="0" marL="0">
+              <a:spcAft>
+                <a:spcPts val="1000"/>
+              </a:spcAft>
+              <a:buNone/>
+            </a:pPr>
+            <a:r>
+              <a:rPr lang="en-US" sz="1900" b="1" dirty="0">
+                <a:solidFill>
+                  <a:srgbClr val="1B1F3B"/>
+                </a:solidFill>
+                <a:latin typeface="Calibri" pitchFamily="34" charset="0"/>
+                <a:ea typeface="Calibri" pitchFamily="34" charset="-122"/>
+                <a:cs typeface="Calibri" pitchFamily="34" charset="-120"/>
+              </a:rPr>
+              <a:t>• 4. תכנון עם AI</a:t>
+            </a:r>
+            <a:pPr algn="r" indent="0" marL="0">
+              <a:spcAft>
+                <a:spcPts val="1000"/>
+              </a:spcAft>
+              <a:buNone/>
+            </a:pPr>
+            <a:r>
+              <a:rPr lang="en-US" sz="1900" dirty="0">
+                <a:solidFill>
+                  <a:srgbClr val="1B1F3B"/>
+                </a:solidFill>
+                <a:latin typeface="Calibri" pitchFamily="34" charset="0"/>
+                <a:ea typeface="Calibri" pitchFamily="34" charset="-122"/>
+                <a:cs typeface="Calibri" pitchFamily="34" charset="-120"/>
+              </a:rPr>
+              <a:t> — מבקשים מה-AI הצעת תוכנית לפני שהוא כותב שורת קוד אחת</a:t>
+            </a:r>
+            <a:endParaRPr lang="en-US" sz="1900" dirty="0"/>
+          </a:p>
+          <a:p>
+            <a:pPr algn="r" indent="0" marL="0">
+              <a:spcAft>
+                <a:spcPts val="1000"/>
+              </a:spcAft>
+              <a:buNone/>
+            </a:pPr>
+            <a:r>
+              <a:rPr lang="en-US" sz="1900" b="1" dirty="0">
+                <a:solidFill>
+                  <a:srgbClr val="1B1F3B"/>
+                </a:solidFill>
+                <a:latin typeface="Calibri" pitchFamily="34" charset="0"/>
+                <a:ea typeface="Calibri" pitchFamily="34" charset="-122"/>
+                <a:cs typeface="Calibri" pitchFamily="34" charset="-120"/>
+              </a:rPr>
+              <a:t>• 5. מימוש עם AI</a:t>
+            </a:r>
+            <a:pPr algn="r" indent="0" marL="0">
+              <a:spcAft>
+                <a:spcPts val="1000"/>
+              </a:spcAft>
+              <a:buNone/>
+            </a:pPr>
+            <a:r>
+              <a:rPr lang="en-US" sz="1900" dirty="0">
+                <a:solidFill>
+                  <a:srgbClr val="1B1F3B"/>
+                </a:solidFill>
+                <a:latin typeface="Calibri" pitchFamily="34" charset="0"/>
+                <a:ea typeface="Calibri" pitchFamily="34" charset="-122"/>
+                <a:cs typeface="Calibri" pitchFamily="34" charset="-120"/>
+              </a:rPr>
+              <a:t> — ה-AI כותב את הקוד בפועל, לפי התוכנית שאושרה</a:t>
+            </a:r>
+            <a:endParaRPr lang="en-US" sz="1900" dirty="0"/>
+          </a:p>
+        </p:txBody>
+      </p:sp>
+      <p:sp>
+        <p:nvSpPr>
+          <p:cNvPr id="5" name="Shape 3"/>
+          <p:cNvSpPr/>
+          <p:nvPr/>
+        </p:nvSpPr>
+        <p:spPr>
+          <a:xfrm>
+            <a:off x="548640" y="3931920"/>
             <a:ext cx="11091672" cy="0"/>
           </a:xfrm>
           <a:prstGeom prst="line">
@@ -4601,14 +4653,14 @@
       </p:sp>
       <p:sp>
         <p:nvSpPr>
-          <p:cNvPr id="7" name="Text 5"/>
-          <p:cNvSpPr/>
-          <p:nvPr/>
-        </p:nvSpPr>
-        <p:spPr>
-          <a:xfrm>
-            <a:off x="548640" y="4389120"/>
-            <a:ext cx="11091672" cy="777240"/>
+          <p:cNvPr id="6" name="Text 4"/>
+          <p:cNvSpPr/>
+          <p:nvPr/>
+        </p:nvSpPr>
+        <p:spPr>
+          <a:xfrm>
+            <a:off x="548640" y="4023360"/>
+            <a:ext cx="11091672" cy="868680"/>
           </a:xfrm>
           <a:prstGeom prst="rect">
             <a:avLst/>
@@ -4624,7 +4676,7 @@
               <a:buNone/>
             </a:pPr>
             <a:r>
-              <a:rPr lang="en-US" sz="1500" dirty="0">
+              <a:rPr lang="en-US" sz="1700" dirty="0">
                 <a:solidFill>
                   <a:srgbClr val="00A88A"/>
                 </a:solidFill>
@@ -4632,15 +4684,15 @@
                 <a:ea typeface="Arial" pitchFamily="34" charset="-122"/>
                 <a:cs typeface="Arial" pitchFamily="34" charset="-120"/>
               </a:rPr>
-              <a:t>✔ מה עושים בפועל: בכל שיעור מהיום נחזור לרשימה הזו ונעמיק בשלב אחד או שניים ממנה — זהו העיקרון-על של כל הקורס.</a:t>
-            </a:r>
-            <a:endParaRPr lang="en-US" sz="1500" dirty="0"/>
-          </a:p>
-        </p:txBody>
-      </p:sp>
-      <p:sp>
-        <p:nvSpPr>
-          <p:cNvPr id="8" name="Text 6"/>
+              <a:t>✔ מה עושים בפועל: חמשת השלבים הבאים (6-10) עוסקים בבדיקה ובשילוב הקוד בעולם האמיתי — בשקף הבא.</a:t>
+            </a:r>
+            <a:endParaRPr lang="en-US" sz="1700" dirty="0"/>
+          </a:p>
+        </p:txBody>
+      </p:sp>
+      <p:sp>
+        <p:nvSpPr>
+          <p:cNvPr id="7" name="Text 5"/>
           <p:cNvSpPr/>
           <p:nvPr/>
         </p:nvSpPr>
@@ -4742,7 +4794,7 @@
                 <a:ea typeface="Arial" pitchFamily="34" charset="-122"/>
                 <a:cs typeface="Arial" pitchFamily="34" charset="-120"/>
               </a:rPr>
-              <a:t>גם הנתונים תומכים ב-Workflow</a:t>
+              <a:t>Workflow של מפתח מודרני (חלק ב׳: שלבים 6-10)</a:t>
             </a:r>
             <a:endParaRPr lang="en-US" sz="2800" dirty="0"/>
           </a:p>
@@ -4776,213 +4828,182 @@
               <a:buNone/>
             </a:pPr>
             <a:r>
-              <a:rPr lang="en-US" sz="1600" dirty="0">
-                <a:solidFill>
-                  <a:srgbClr val="1B1F3B"/>
-                </a:solidFill>
-                <a:latin typeface="Calibri" pitchFamily="34" charset="0"/>
-                <a:ea typeface="Calibri" pitchFamily="34" charset="-122"/>
-                <a:cs typeface="Calibri" pitchFamily="34" charset="-120"/>
-              </a:rPr>
-              <a:t>• דו"ח DORA 2026:</a:t>
-            </a:r>
-            <a:endParaRPr lang="en-US" sz="1600" dirty="0"/>
-          </a:p>
-          <a:p>
-            <a:pPr algn="r" indent="0" marL="0">
-              <a:spcAft>
-                <a:spcPts val="1000"/>
-              </a:spcAft>
-              <a:buNone/>
-            </a:pPr>
-            <a:r>
-              <a:rPr lang="en-US" sz="1600" dirty="0">
-                <a:solidFill>
-                  <a:srgbClr val="1B1F3B"/>
-                </a:solidFill>
-                <a:latin typeface="Calibri" pitchFamily="34" charset="0"/>
-                <a:ea typeface="Calibri" pitchFamily="34" charset="-122"/>
-                <a:cs typeface="Calibri" pitchFamily="34" charset="-120"/>
-              </a:rPr>
-              <a:t>• קוד קיים (Brownfield) בלי תהליך מסודר: </a:t>
-            </a:r>
-            <a:pPr algn="r" indent="0" marL="0">
-              <a:spcAft>
-                <a:spcPts val="1000"/>
-              </a:spcAft>
-              <a:buNone/>
-            </a:pPr>
-            <a:r>
-              <a:rPr lang="en-US" sz="1600" b="1" dirty="0">
-                <a:solidFill>
-                  <a:srgbClr val="1B1F3B"/>
-                </a:solidFill>
-                <a:latin typeface="Calibri" pitchFamily="34" charset="0"/>
-                <a:ea typeface="Calibri" pitchFamily="34" charset="-122"/>
-                <a:cs typeface="Calibri" pitchFamily="34" charset="-120"/>
-              </a:rPr>
-              <a:t>~10%</a:t>
-            </a:r>
-            <a:pPr algn="r" indent="0" marL="0">
-              <a:spcAft>
-                <a:spcPts val="1000"/>
-              </a:spcAft>
-              <a:buNone/>
-            </a:pPr>
-            <a:r>
-              <a:rPr lang="en-US" sz="1600" dirty="0">
-                <a:solidFill>
-                  <a:srgbClr val="1B1F3B"/>
-                </a:solidFill>
-                <a:latin typeface="Calibri" pitchFamily="34" charset="0"/>
-                <a:ea typeface="Calibri" pitchFamily="34" charset="-122"/>
-                <a:cs typeface="Calibri" pitchFamily="34" charset="-120"/>
-              </a:rPr>
-              <a:t> שיפור פרודוקטיביות</a:t>
-            </a:r>
-            <a:endParaRPr lang="en-US" sz="1600" dirty="0"/>
-          </a:p>
-          <a:p>
-            <a:pPr algn="r" indent="0" marL="0">
-              <a:spcAft>
-                <a:spcPts val="1000"/>
-              </a:spcAft>
-              <a:buNone/>
-            </a:pPr>
-            <a:r>
-              <a:rPr lang="en-US" sz="1600" dirty="0">
-                <a:solidFill>
-                  <a:srgbClr val="1B1F3B"/>
-                </a:solidFill>
-                <a:latin typeface="Calibri" pitchFamily="34" charset="0"/>
-                <a:ea typeface="Calibri" pitchFamily="34" charset="-122"/>
-                <a:cs typeface="Calibri" pitchFamily="34" charset="-120"/>
-              </a:rPr>
-              <a:t>• אותם כלים, על פרויקט עם Workflow ברור (Greenfield): </a:t>
-            </a:r>
-            <a:pPr algn="r" indent="0" marL="0">
-              <a:spcAft>
-                <a:spcPts val="1000"/>
-              </a:spcAft>
-              <a:buNone/>
-            </a:pPr>
-            <a:r>
-              <a:rPr lang="en-US" sz="1600" b="1" dirty="0">
-                <a:solidFill>
-                  <a:srgbClr val="1B1F3B"/>
-                </a:solidFill>
-                <a:latin typeface="Calibri" pitchFamily="34" charset="0"/>
-                <a:ea typeface="Calibri" pitchFamily="34" charset="-122"/>
-                <a:cs typeface="Calibri" pitchFamily="34" charset="-120"/>
-              </a:rPr>
-              <a:t>35-40%</a:t>
-            </a:r>
-            <a:pPr algn="r" indent="0" marL="0">
-              <a:spcAft>
-                <a:spcPts val="1000"/>
-              </a:spcAft>
-              <a:buNone/>
-            </a:pPr>
-            <a:r>
-              <a:rPr lang="en-US" sz="1600" dirty="0">
-                <a:solidFill>
-                  <a:srgbClr val="1B1F3B"/>
-                </a:solidFill>
-                <a:latin typeface="Calibri" pitchFamily="34" charset="0"/>
-                <a:ea typeface="Calibri" pitchFamily="34" charset="-122"/>
-                <a:cs typeface="Calibri" pitchFamily="34" charset="-120"/>
-              </a:rPr>
-              <a:t> שיפור</a:t>
-            </a:r>
-            <a:endParaRPr lang="en-US" sz="1600" dirty="0"/>
-          </a:p>
-          <a:p>
-            <a:pPr algn="r" indent="0" marL="0">
-              <a:spcAft>
-                <a:spcPts val="1000"/>
-              </a:spcAft>
-              <a:buNone/>
-            </a:pPr>
-            <a:r>
-              <a:rPr lang="en-US" sz="1600" dirty="0">
-                <a:solidFill>
-                  <a:srgbClr val="1B1F3B"/>
-                </a:solidFill>
-                <a:latin typeface="Calibri" pitchFamily="34" charset="0"/>
-                <a:ea typeface="Calibri" pitchFamily="34" charset="-122"/>
-                <a:cs typeface="Calibri" pitchFamily="34" charset="-120"/>
-              </a:rPr>
-              <a:t>• בלי תהליך מסודר: </a:t>
-            </a:r>
-            <a:pPr algn="r" indent="0" marL="0">
-              <a:spcAft>
-                <a:spcPts val="1000"/>
-              </a:spcAft>
-              <a:buNone/>
-            </a:pPr>
-            <a:r>
-              <a:rPr lang="en-US" sz="1600" b="1" dirty="0">
-                <a:solidFill>
-                  <a:srgbClr val="1B1F3B"/>
-                </a:solidFill>
-                <a:latin typeface="Calibri" pitchFamily="34" charset="0"/>
-                <a:ea typeface="Calibri" pitchFamily="34" charset="-122"/>
-                <a:cs typeface="Calibri" pitchFamily="34" charset="-120"/>
-              </a:rPr>
-              <a:t>30-41%</a:t>
-            </a:r>
-            <a:pPr algn="r" indent="0" marL="0">
-              <a:spcAft>
-                <a:spcPts val="1000"/>
-              </a:spcAft>
-              <a:buNone/>
-            </a:pPr>
-            <a:r>
-              <a:rPr lang="en-US" sz="1600" dirty="0">
-                <a:solidFill>
-                  <a:srgbClr val="1B1F3B"/>
-                </a:solidFill>
-                <a:latin typeface="Calibri" pitchFamily="34" charset="0"/>
-                <a:ea typeface="Calibri" pitchFamily="34" charset="-122"/>
-                <a:cs typeface="Calibri" pitchFamily="34" charset="-120"/>
-              </a:rPr>
-              <a:t> יותר חוב טכני, PR עם AI = </a:t>
-            </a:r>
-            <a:pPr algn="r" indent="0" marL="0">
-              <a:spcAft>
-                <a:spcPts val="1000"/>
-              </a:spcAft>
-              <a:buNone/>
-            </a:pPr>
-            <a:r>
-              <a:rPr lang="en-US" sz="1600" b="1" dirty="0">
-                <a:solidFill>
-                  <a:srgbClr val="1B1F3B"/>
-                </a:solidFill>
-                <a:latin typeface="Calibri" pitchFamily="34" charset="0"/>
-                <a:ea typeface="Calibri" pitchFamily="34" charset="-122"/>
-                <a:cs typeface="Calibri" pitchFamily="34" charset="-120"/>
-              </a:rPr>
-              <a:t>פי 1.7</a:t>
-            </a:r>
-            <a:pPr algn="r" indent="0" marL="0">
-              <a:spcAft>
-                <a:spcPts val="1000"/>
-              </a:spcAft>
-              <a:buNone/>
-            </a:pPr>
-            <a:r>
-              <a:rPr lang="en-US" sz="1600" dirty="0">
-                <a:solidFill>
-                  <a:srgbClr val="1B1F3B"/>
-                </a:solidFill>
-                <a:latin typeface="Calibri" pitchFamily="34" charset="0"/>
-                <a:ea typeface="Calibri" pitchFamily="34" charset="-122"/>
-                <a:cs typeface="Calibri" pitchFamily="34" charset="-120"/>
-              </a:rPr>
-              <a:t> יותר בעיות</a:t>
-            </a:r>
-            <a:endParaRPr lang="en-US" sz="1600" dirty="0"/>
+              <a:rPr lang="en-US" sz="1900" b="1" dirty="0">
+                <a:solidFill>
+                  <a:srgbClr val="1B1F3B"/>
+                </a:solidFill>
+                <a:latin typeface="Calibri" pitchFamily="34" charset="0"/>
+                <a:ea typeface="Calibri" pitchFamily="34" charset="-122"/>
+                <a:cs typeface="Calibri" pitchFamily="34" charset="-120"/>
+              </a:rPr>
+              <a:t>• 6. Code Review</a:t>
+            </a:r>
+            <a:pPr algn="r" indent="0" marL="0">
+              <a:spcAft>
+                <a:spcPts val="1000"/>
+              </a:spcAft>
+              <a:buNone/>
+            </a:pPr>
+            <a:r>
+              <a:rPr lang="en-US" sz="1900" dirty="0">
+                <a:solidFill>
+                  <a:srgbClr val="1B1F3B"/>
+                </a:solidFill>
+                <a:latin typeface="Calibri" pitchFamily="34" charset="0"/>
+                <a:ea typeface="Calibri" pitchFamily="34" charset="-122"/>
+                <a:cs typeface="Calibri" pitchFamily="34" charset="-120"/>
+              </a:rPr>
+              <a:t> — קוראים ובודקים כל שורה שה-AI כתב, לפני שהיא נכנסת לפרויקט</a:t>
+            </a:r>
+            <a:endParaRPr lang="en-US" sz="1900" dirty="0"/>
+          </a:p>
+          <a:p>
+            <a:pPr algn="r" indent="0" marL="0">
+              <a:spcAft>
+                <a:spcPts val="1000"/>
+              </a:spcAft>
+              <a:buNone/>
+            </a:pPr>
+            <a:r>
+              <a:rPr lang="en-US" sz="1900" b="1" dirty="0">
+                <a:solidFill>
+                  <a:srgbClr val="1B1F3B"/>
+                </a:solidFill>
+                <a:latin typeface="Calibri" pitchFamily="34" charset="0"/>
+                <a:ea typeface="Calibri" pitchFamily="34" charset="-122"/>
+                <a:cs typeface="Calibri" pitchFamily="34" charset="-120"/>
+              </a:rPr>
+              <a:t>• 7. Testing</a:t>
+            </a:r>
+            <a:pPr algn="r" indent="0" marL="0">
+              <a:spcAft>
+                <a:spcPts val="1000"/>
+              </a:spcAft>
+              <a:buNone/>
+            </a:pPr>
+            <a:r>
+              <a:rPr lang="en-US" sz="1900" dirty="0">
+                <a:solidFill>
+                  <a:srgbClr val="1B1F3B"/>
+                </a:solidFill>
+                <a:latin typeface="Calibri" pitchFamily="34" charset="0"/>
+                <a:ea typeface="Calibri" pitchFamily="34" charset="-122"/>
+                <a:cs typeface="Calibri" pitchFamily="34" charset="-120"/>
+              </a:rPr>
+              <a:t> — מריצים בדיקות אוטומטיות שמוודאות שהקוד באמת עושה מה שהוא אמור</a:t>
+            </a:r>
+            <a:endParaRPr lang="en-US" sz="1900" dirty="0"/>
+          </a:p>
+          <a:p>
+            <a:pPr algn="r" indent="0" marL="0">
+              <a:spcAft>
+                <a:spcPts val="1000"/>
+              </a:spcAft>
+              <a:buNone/>
+            </a:pPr>
+            <a:r>
+              <a:rPr lang="en-US" sz="1900" b="1" dirty="0">
+                <a:solidFill>
+                  <a:srgbClr val="1B1F3B"/>
+                </a:solidFill>
+                <a:latin typeface="Calibri" pitchFamily="34" charset="0"/>
+                <a:ea typeface="Calibri" pitchFamily="34" charset="-122"/>
+                <a:cs typeface="Calibri" pitchFamily="34" charset="-120"/>
+              </a:rPr>
+              <a:t>• 8. Commit</a:t>
+            </a:r>
+            <a:pPr algn="r" indent="0" marL="0">
+              <a:spcAft>
+                <a:spcPts val="1000"/>
+              </a:spcAft>
+              <a:buNone/>
+            </a:pPr>
+            <a:r>
+              <a:rPr lang="en-US" sz="1900" dirty="0">
+                <a:solidFill>
+                  <a:srgbClr val="1B1F3B"/>
+                </a:solidFill>
+                <a:latin typeface="Calibri" pitchFamily="34" charset="0"/>
+                <a:ea typeface="Calibri" pitchFamily="34" charset="-122"/>
+                <a:cs typeface="Calibri" pitchFamily="34" charset="-120"/>
+              </a:rPr>
+              <a:t> — שומרים גרסה מתועדת של השינוי (עם Git — נסביר בשיעור הבא)</a:t>
+            </a:r>
+            <a:endParaRPr lang="en-US" sz="1900" dirty="0"/>
+          </a:p>
+          <a:p>
+            <a:pPr algn="r" indent="0" marL="0">
+              <a:spcAft>
+                <a:spcPts val="1000"/>
+              </a:spcAft>
+              <a:buNone/>
+            </a:pPr>
+            <a:r>
+              <a:rPr lang="en-US" sz="1900" b="1" dirty="0">
+                <a:solidFill>
+                  <a:srgbClr val="1B1F3B"/>
+                </a:solidFill>
+                <a:latin typeface="Calibri" pitchFamily="34" charset="0"/>
+                <a:ea typeface="Calibri" pitchFamily="34" charset="-122"/>
+                <a:cs typeface="Calibri" pitchFamily="34" charset="-120"/>
+              </a:rPr>
+              <a:t>• 9. Deploy</a:t>
+            </a:r>
+            <a:pPr algn="r" indent="0" marL="0">
+              <a:spcAft>
+                <a:spcPts val="1000"/>
+              </a:spcAft>
+              <a:buNone/>
+            </a:pPr>
+            <a:r>
+              <a:rPr lang="en-US" sz="1900" dirty="0">
+                <a:solidFill>
+                  <a:srgbClr val="1B1F3B"/>
+                </a:solidFill>
+                <a:latin typeface="Calibri" pitchFamily="34" charset="0"/>
+                <a:ea typeface="Calibri" pitchFamily="34" charset="-122"/>
+                <a:cs typeface="Calibri" pitchFamily="34" charset="-120"/>
+              </a:rPr>
+              <a:t> — מעלים את הגרסה לסביבה שבה משתמשים אמיתיים יכולים להשתמש בה</a:t>
+            </a:r>
+            <a:endParaRPr lang="en-US" sz="1900" dirty="0"/>
+          </a:p>
+          <a:p>
+            <a:pPr algn="r" indent="0" marL="0">
+              <a:spcAft>
+                <a:spcPts val="1000"/>
+              </a:spcAft>
+              <a:buNone/>
+            </a:pPr>
+            <a:r>
+              <a:rPr lang="en-US" sz="1900" b="1" dirty="0">
+                <a:solidFill>
+                  <a:srgbClr val="1B1F3B"/>
+                </a:solidFill>
+                <a:latin typeface="Calibri" pitchFamily="34" charset="0"/>
+                <a:ea typeface="Calibri" pitchFamily="34" charset="-122"/>
+                <a:cs typeface="Calibri" pitchFamily="34" charset="-120"/>
+              </a:rPr>
+              <a:t>• 10. שיתוף</a:t>
+            </a:r>
+            <a:pPr algn="r" indent="0" marL="0">
+              <a:spcAft>
+                <a:spcPts val="1000"/>
+              </a:spcAft>
+              <a:buNone/>
+            </a:pPr>
+            <a:r>
+              <a:rPr lang="en-US" sz="1900" dirty="0">
+                <a:solidFill>
+                  <a:srgbClr val="1B1F3B"/>
+                </a:solidFill>
+                <a:latin typeface="Calibri" pitchFamily="34" charset="0"/>
+                <a:ea typeface="Calibri" pitchFamily="34" charset="-122"/>
+                <a:cs typeface="Calibri" pitchFamily="34" charset="-120"/>
+              </a:rPr>
+              <a:t> — מציגים ומתעדים את מה שנבנה, לצוות או ללקוח</a:t>
+            </a:r>
+            <a:endParaRPr lang="en-US" sz="1900" dirty="0"/>
           </a:p>
         </p:txBody>
       </p:sp>
@@ -5018,7 +5039,7 @@
         <p:spPr>
           <a:xfrm>
             <a:off x="548640" y="3749040"/>
-            <a:ext cx="11091672" cy="777240"/>
+            <a:ext cx="11091672" cy="868680"/>
           </a:xfrm>
           <a:prstGeom prst="rect">
             <a:avLst/>
@@ -5034,7 +5055,7 @@
               <a:buNone/>
             </a:pPr>
             <a:r>
-              <a:rPr lang="en-US" sz="1500" dirty="0">
+              <a:rPr lang="en-US" sz="1700" dirty="0">
                 <a:solidFill>
                   <a:srgbClr val="00A88A"/>
                 </a:solidFill>
@@ -5042,54 +5063,15 @@
                 <a:ea typeface="Arial" pitchFamily="34" charset="-122"/>
                 <a:cs typeface="Arial" pitchFamily="34" charset="-120"/>
               </a:rPr>
-              <a:t>✔ מה עושים בפועל: ההבדל הוא לא הכלי. ההבדל הוא התהליך.</a:t>
-            </a:r>
-            <a:endParaRPr lang="en-US" sz="1500" dirty="0"/>
+              <a:t>✔ מה עושים בפועל: בכל שיעור מהיום נחזור לרשימה הזו (כל 10 השלבים) ונעמיק בשלב אחד או שניים ממנה — זהו העיקרון-על של כל הקורס.</a:t>
+            </a:r>
+            <a:endParaRPr lang="en-US" sz="1700" dirty="0"/>
           </a:p>
         </p:txBody>
       </p:sp>
       <p:sp>
         <p:nvSpPr>
           <p:cNvPr id="6" name="Text 4"/>
-          <p:cNvSpPr/>
-          <p:nvPr/>
-        </p:nvSpPr>
-        <p:spPr>
-          <a:xfrm>
-            <a:off x="548640" y="6172200"/>
-            <a:ext cx="11091672" cy="274320"/>
-          </a:xfrm>
-          <a:prstGeom prst="rect">
-            <a:avLst/>
-          </a:prstGeom>
-          <a:noFill/>
-          <a:ln/>
-        </p:spPr>
-        <p:txBody>
-          <a:bodyPr wrap="square" lIns="0" tIns="0" rIns="0" bIns="0" rtlCol="0" anchor="ctr"/>
-          <a:lstStyle/>
-          <a:p>
-            <a:pPr rtl="1" algn="r" indent="0" marL="0">
-              <a:buNone/>
-            </a:pPr>
-            <a:r>
-              <a:rPr lang="en-US" sz="1000" i="1" dirty="0">
-                <a:solidFill>
-                  <a:srgbClr val="6B7280"/>
-                </a:solidFill>
-                <a:latin typeface="Calibri" pitchFamily="34" charset="0"/>
-                <a:ea typeface="Calibri" pitchFamily="34" charset="-122"/>
-                <a:cs typeface="Calibri" pitchFamily="34" charset="-120"/>
-              </a:rPr>
-              <a:t>מקור: DORA — ROI of AI-Assisted Software Development, 2026</a:t>
-            </a:r>
-            <a:endParaRPr lang="en-US" sz="1000" dirty="0"/>
-          </a:p>
-        </p:txBody>
-      </p:sp>
-      <p:sp>
-        <p:nvSpPr>
-          <p:cNvPr id="7" name="Text 5"/>
           <p:cNvSpPr/>
           <p:nvPr/>
         </p:nvSpPr>
@@ -5191,7 +5173,7 @@
                 <a:ea typeface="Arial" pitchFamily="34" charset="-122"/>
                 <a:cs typeface="Arial" pitchFamily="34" charset="-120"/>
               </a:rPr>
-              <a:t>מקרה בוחן: Gemini CLI → Antigravity</a:t>
+              <a:t>גם הנתונים תומכים ב-Workflow</a:t>
             </a:r>
             <a:endParaRPr lang="en-US" sz="2800" dirty="0"/>
           </a:p>
@@ -5205,8 +5187,8 @@
         </p:nvSpPr>
         <p:spPr>
           <a:xfrm>
-            <a:off x="548640" y="1024128"/>
-            <a:ext cx="11091672" cy="411480"/>
+            <a:off x="548640" y="1234440"/>
+            <a:ext cx="11091672" cy="2286000"/>
           </a:xfrm>
           <a:prstGeom prst="rect">
             <a:avLst/>
@@ -5219,134 +5201,231 @@
           <a:lstStyle/>
           <a:p>
             <a:pPr algn="r" indent="0" marL="0">
-              <a:buNone/>
-            </a:pPr>
-            <a:r>
-              <a:rPr lang="en-US" sz="1500" i="1" dirty="0">
-                <a:solidFill>
-                  <a:srgbClr val="6B7280"/>
-                </a:solidFill>
-                <a:latin typeface="Calibri" pitchFamily="34" charset="0"/>
-                <a:ea typeface="Calibri" pitchFamily="34" charset="-122"/>
-                <a:cs typeface="Calibri" pitchFamily="34" charset="-120"/>
-              </a:rPr>
-              <a:t>השאלה: מה קורה כשהכלי שלמדתם נעלם?</a:t>
-            </a:r>
-            <a:endParaRPr lang="en-US" sz="1500" dirty="0"/>
-          </a:p>
-        </p:txBody>
-      </p:sp>
-      <p:sp>
-        <p:nvSpPr>
-          <p:cNvPr id="4" name="Text 2"/>
-          <p:cNvSpPr/>
-          <p:nvPr/>
-        </p:nvSpPr>
-        <p:spPr>
-          <a:xfrm>
-            <a:off x="548640" y="1508760"/>
-            <a:ext cx="11091672" cy="2286000"/>
-          </a:xfrm>
-          <a:prstGeom prst="rect">
-            <a:avLst/>
-          </a:prstGeom>
-          <a:noFill/>
-          <a:ln/>
-        </p:spPr>
-        <p:txBody>
-          <a:bodyPr wrap="square" lIns="0" tIns="0" rIns="0" bIns="0" rtlCol="0" anchor="ctr"/>
-          <a:lstStyle/>
-          <a:p>
-            <a:pPr algn="r" indent="0" marL="0">
-              <a:spcAft>
-                <a:spcPts val="1000"/>
-              </a:spcAft>
-              <a:buNone/>
-            </a:pPr>
-            <a:r>
-              <a:rPr lang="en-US" sz="1600" dirty="0">
-                <a:solidFill>
-                  <a:srgbClr val="1B1F3B"/>
-                </a:solidFill>
-                <a:latin typeface="Calibri" pitchFamily="34" charset="0"/>
-                <a:ea typeface="Calibri" pitchFamily="34" charset="-122"/>
-                <a:cs typeface="Calibri" pitchFamily="34" charset="-120"/>
-              </a:rPr>
-              <a:t>• Google הריצה כלי CLI חינמי — Gemini CLI</a:t>
-            </a:r>
-            <a:endParaRPr lang="en-US" sz="1600" dirty="0"/>
-          </a:p>
-          <a:p>
-            <a:pPr algn="r" indent="0" marL="0">
-              <a:spcAft>
-                <a:spcPts val="1000"/>
-              </a:spcAft>
-              <a:buNone/>
-            </a:pPr>
-            <a:r>
-              <a:rPr lang="en-US" sz="1600" dirty="0">
-                <a:solidFill>
-                  <a:srgbClr val="1B1F3B"/>
-                </a:solidFill>
-                <a:latin typeface="Calibri" pitchFamily="34" charset="0"/>
-                <a:ea typeface="Calibri" pitchFamily="34" charset="-122"/>
-                <a:cs typeface="Calibri" pitchFamily="34" charset="-120"/>
-              </a:rPr>
-              <a:t>• אמצע 2026: נסגר, הוחלף ב-Antigravity CLI (לא חינמי באותו אופן)</a:t>
-            </a:r>
-            <a:endParaRPr lang="en-US" sz="1600" dirty="0"/>
-          </a:p>
-          <a:p>
-            <a:pPr algn="r" indent="0" marL="0">
-              <a:spcAft>
-                <a:spcPts val="1000"/>
-              </a:spcAft>
-              <a:buNone/>
-            </a:pPr>
-            <a:r>
-              <a:rPr lang="en-US" sz="1600" dirty="0">
-                <a:solidFill>
-                  <a:srgbClr val="1B1F3B"/>
-                </a:solidFill>
-                <a:latin typeface="Calibri" pitchFamily="34" charset="0"/>
-                <a:ea typeface="Calibri" pitchFamily="34" charset="-122"/>
-                <a:cs typeface="Calibri" pitchFamily="34" charset="-120"/>
-              </a:rPr>
-              <a:t>• מי שלמד רק "את הכלי" — מתחיל כמעט מאפס</a:t>
-            </a:r>
-            <a:endParaRPr lang="en-US" sz="1600" dirty="0"/>
-          </a:p>
-          <a:p>
-            <a:pPr algn="r" indent="0" marL="0">
-              <a:spcAft>
-                <a:spcPts val="1000"/>
-              </a:spcAft>
-              <a:buNone/>
-            </a:pPr>
-            <a:r>
-              <a:rPr lang="en-US" sz="1600" dirty="0">
-                <a:solidFill>
-                  <a:srgbClr val="1B1F3B"/>
-                </a:solidFill>
-                <a:latin typeface="Calibri" pitchFamily="34" charset="0"/>
-                <a:ea typeface="Calibri" pitchFamily="34" charset="-122"/>
-                <a:cs typeface="Calibri" pitchFamily="34" charset="-120"/>
-              </a:rPr>
-              <a:t>• מי שלמד את ה-Workflow — עובר לכלי הבא כמעט בלי לאבד זמן</a:t>
-            </a:r>
-            <a:endParaRPr lang="en-US" sz="1600" dirty="0"/>
-          </a:p>
-        </p:txBody>
-      </p:sp>
-      <p:sp>
-        <p:nvSpPr>
-          <p:cNvPr id="5" name="Shape 3"/>
-          <p:cNvSpPr/>
-          <p:nvPr/>
-        </p:nvSpPr>
-        <p:spPr>
-          <a:xfrm>
-            <a:off x="548640" y="3931920"/>
+              <a:spcAft>
+                <a:spcPts val="1000"/>
+              </a:spcAft>
+              <a:buNone/>
+            </a:pPr>
+            <a:r>
+              <a:rPr lang="en-US" sz="1900" dirty="0">
+                <a:solidFill>
+                  <a:srgbClr val="1B1F3B"/>
+                </a:solidFill>
+                <a:latin typeface="Calibri" pitchFamily="34" charset="0"/>
+                <a:ea typeface="Calibri" pitchFamily="34" charset="-122"/>
+                <a:cs typeface="Calibri" pitchFamily="34" charset="-120"/>
+              </a:rPr>
+              <a:t>• דו"ח DORA 2026:</a:t>
+            </a:r>
+            <a:endParaRPr lang="en-US" sz="1900" dirty="0"/>
+          </a:p>
+          <a:p>
+            <a:pPr algn="r" indent="0" marL="0">
+              <a:spcAft>
+                <a:spcPts val="1000"/>
+              </a:spcAft>
+              <a:buNone/>
+            </a:pPr>
+            <a:r>
+              <a:rPr lang="en-US" sz="1900" dirty="0">
+                <a:solidFill>
+                  <a:srgbClr val="1B1F3B"/>
+                </a:solidFill>
+                <a:latin typeface="Calibri" pitchFamily="34" charset="0"/>
+                <a:ea typeface="Calibri" pitchFamily="34" charset="-122"/>
+                <a:cs typeface="Calibri" pitchFamily="34" charset="-120"/>
+              </a:rPr>
+              <a:t>• קוד קיים (Brownfield) בלי תהליך מסודר: </a:t>
+            </a:r>
+            <a:pPr algn="r" indent="0" marL="0">
+              <a:spcAft>
+                <a:spcPts val="1000"/>
+              </a:spcAft>
+              <a:buNone/>
+            </a:pPr>
+            <a:r>
+              <a:rPr lang="en-US" sz="1900" b="1" dirty="0">
+                <a:solidFill>
+                  <a:srgbClr val="1B1F3B"/>
+                </a:solidFill>
+                <a:latin typeface="Calibri" pitchFamily="34" charset="0"/>
+                <a:ea typeface="Calibri" pitchFamily="34" charset="-122"/>
+                <a:cs typeface="Calibri" pitchFamily="34" charset="-120"/>
+              </a:rPr>
+              <a:t>~10%</a:t>
+            </a:r>
+            <a:pPr algn="r" indent="0" marL="0">
+              <a:spcAft>
+                <a:spcPts val="1000"/>
+              </a:spcAft>
+              <a:buNone/>
+            </a:pPr>
+            <a:r>
+              <a:rPr lang="en-US" sz="1900" dirty="0">
+                <a:solidFill>
+                  <a:srgbClr val="1B1F3B"/>
+                </a:solidFill>
+                <a:latin typeface="Calibri" pitchFamily="34" charset="0"/>
+                <a:ea typeface="Calibri" pitchFamily="34" charset="-122"/>
+                <a:cs typeface="Calibri" pitchFamily="34" charset="-120"/>
+              </a:rPr>
+              <a:t> שיפור פרודוקטיביות</a:t>
+            </a:r>
+            <a:endParaRPr lang="en-US" sz="1900" dirty="0"/>
+          </a:p>
+          <a:p>
+            <a:pPr algn="r" indent="0" marL="0">
+              <a:spcAft>
+                <a:spcPts val="1000"/>
+              </a:spcAft>
+              <a:buNone/>
+            </a:pPr>
+            <a:r>
+              <a:rPr lang="en-US" sz="1900" dirty="0">
+                <a:solidFill>
+                  <a:srgbClr val="1B1F3B"/>
+                </a:solidFill>
+                <a:latin typeface="Calibri" pitchFamily="34" charset="0"/>
+                <a:ea typeface="Calibri" pitchFamily="34" charset="-122"/>
+                <a:cs typeface="Calibri" pitchFamily="34" charset="-120"/>
+              </a:rPr>
+              <a:t>• אותם כלים, על פרויקט חדש שנבנה מאפס (Greenfield) עם Workflow ברור: </a:t>
+            </a:r>
+            <a:pPr algn="r" indent="0" marL="0">
+              <a:spcAft>
+                <a:spcPts val="1000"/>
+              </a:spcAft>
+              <a:buNone/>
+            </a:pPr>
+            <a:r>
+              <a:rPr lang="en-US" sz="1900" b="1" dirty="0">
+                <a:solidFill>
+                  <a:srgbClr val="1B1F3B"/>
+                </a:solidFill>
+                <a:latin typeface="Calibri" pitchFamily="34" charset="0"/>
+                <a:ea typeface="Calibri" pitchFamily="34" charset="-122"/>
+                <a:cs typeface="Calibri" pitchFamily="34" charset="-120"/>
+              </a:rPr>
+              <a:t>35-40%</a:t>
+            </a:r>
+            <a:pPr algn="r" indent="0" marL="0">
+              <a:spcAft>
+                <a:spcPts val="1000"/>
+              </a:spcAft>
+              <a:buNone/>
+            </a:pPr>
+            <a:r>
+              <a:rPr lang="en-US" sz="1900" dirty="0">
+                <a:solidFill>
+                  <a:srgbClr val="1B1F3B"/>
+                </a:solidFill>
+                <a:latin typeface="Calibri" pitchFamily="34" charset="0"/>
+                <a:ea typeface="Calibri" pitchFamily="34" charset="-122"/>
+                <a:cs typeface="Calibri" pitchFamily="34" charset="-120"/>
+              </a:rPr>
+              <a:t> שיפור</a:t>
+            </a:r>
+            <a:endParaRPr lang="en-US" sz="1900" dirty="0"/>
+          </a:p>
+          <a:p>
+            <a:pPr algn="r" indent="0" marL="0">
+              <a:spcAft>
+                <a:spcPts val="1000"/>
+              </a:spcAft>
+              <a:buNone/>
+            </a:pPr>
+            <a:r>
+              <a:rPr lang="en-US" sz="1900" dirty="0">
+                <a:solidFill>
+                  <a:srgbClr val="1B1F3B"/>
+                </a:solidFill>
+                <a:latin typeface="Calibri" pitchFamily="34" charset="0"/>
+                <a:ea typeface="Calibri" pitchFamily="34" charset="-122"/>
+                <a:cs typeface="Calibri" pitchFamily="34" charset="-120"/>
+              </a:rPr>
+              <a:t>• בלי תהליך מסודר: </a:t>
+            </a:r>
+            <a:pPr algn="r" indent="0" marL="0">
+              <a:spcAft>
+                <a:spcPts val="1000"/>
+              </a:spcAft>
+              <a:buNone/>
+            </a:pPr>
+            <a:r>
+              <a:rPr lang="en-US" sz="1900" b="1" dirty="0">
+                <a:solidFill>
+                  <a:srgbClr val="1B1F3B"/>
+                </a:solidFill>
+                <a:latin typeface="Calibri" pitchFamily="34" charset="0"/>
+                <a:ea typeface="Calibri" pitchFamily="34" charset="-122"/>
+                <a:cs typeface="Calibri" pitchFamily="34" charset="-120"/>
+              </a:rPr>
+              <a:t>30-41%</a:t>
+            </a:r>
+            <a:pPr algn="r" indent="0" marL="0">
+              <a:spcAft>
+                <a:spcPts val="1000"/>
+              </a:spcAft>
+              <a:buNone/>
+            </a:pPr>
+            <a:r>
+              <a:rPr lang="en-US" sz="1900" dirty="0">
+                <a:solidFill>
+                  <a:srgbClr val="1B1F3B"/>
+                </a:solidFill>
+                <a:latin typeface="Calibri" pitchFamily="34" charset="0"/>
+                <a:ea typeface="Calibri" pitchFamily="34" charset="-122"/>
+                <a:cs typeface="Calibri" pitchFamily="34" charset="-120"/>
+              </a:rPr>
+              <a:t> יותר חוב טכני, PR עם AI = </a:t>
+            </a:r>
+            <a:pPr algn="r" indent="0" marL="0">
+              <a:spcAft>
+                <a:spcPts val="1000"/>
+              </a:spcAft>
+              <a:buNone/>
+            </a:pPr>
+            <a:r>
+              <a:rPr lang="en-US" sz="1900" b="1" dirty="0">
+                <a:solidFill>
+                  <a:srgbClr val="1B1F3B"/>
+                </a:solidFill>
+                <a:latin typeface="Calibri" pitchFamily="34" charset="0"/>
+                <a:ea typeface="Calibri" pitchFamily="34" charset="-122"/>
+                <a:cs typeface="Calibri" pitchFamily="34" charset="-120"/>
+              </a:rPr>
+              <a:t>פי 1.7</a:t>
+            </a:r>
+            <a:pPr algn="r" indent="0" marL="0">
+              <a:spcAft>
+                <a:spcPts val="1000"/>
+              </a:spcAft>
+              <a:buNone/>
+            </a:pPr>
+            <a:r>
+              <a:rPr lang="en-US" sz="1900" dirty="0">
+                <a:solidFill>
+                  <a:srgbClr val="1B1F3B"/>
+                </a:solidFill>
+                <a:latin typeface="Calibri" pitchFamily="34" charset="0"/>
+                <a:ea typeface="Calibri" pitchFamily="34" charset="-122"/>
+                <a:cs typeface="Calibri" pitchFamily="34" charset="-120"/>
+              </a:rPr>
+              <a:t> יותר בעיות</a:t>
+            </a:r>
+            <a:endParaRPr lang="en-US" sz="1900" dirty="0"/>
+          </a:p>
+        </p:txBody>
+      </p:sp>
+      <p:sp>
+        <p:nvSpPr>
+          <p:cNvPr id="4" name="Shape 2"/>
+          <p:cNvSpPr/>
+          <p:nvPr/>
+        </p:nvSpPr>
+        <p:spPr>
+          <a:xfrm>
+            <a:off x="548640" y="3657600"/>
             <a:ext cx="11091672" cy="0"/>
           </a:xfrm>
           <a:prstGeom prst="line">
@@ -5363,14 +5442,14 @@
       </p:sp>
       <p:sp>
         <p:nvSpPr>
-          <p:cNvPr id="6" name="Text 4"/>
-          <p:cNvSpPr/>
-          <p:nvPr/>
-        </p:nvSpPr>
-        <p:spPr>
-          <a:xfrm>
-            <a:off x="548640" y="4023360"/>
-            <a:ext cx="11091672" cy="777240"/>
+          <p:cNvPr id="5" name="Text 3"/>
+          <p:cNvSpPr/>
+          <p:nvPr/>
+        </p:nvSpPr>
+        <p:spPr>
+          <a:xfrm>
+            <a:off x="548640" y="3749040"/>
+            <a:ext cx="11091672" cy="868680"/>
           </a:xfrm>
           <a:prstGeom prst="rect">
             <a:avLst/>
@@ -5386,7 +5465,7 @@
               <a:buNone/>
             </a:pPr>
             <a:r>
-              <a:rPr lang="en-US" sz="1500" dirty="0">
+              <a:rPr lang="en-US" sz="1700" dirty="0">
                 <a:solidFill>
                   <a:srgbClr val="00A88A"/>
                 </a:solidFill>
@@ -5394,63 +5473,38 @@
                 <a:ea typeface="Arial" pitchFamily="34" charset="-122"/>
                 <a:cs typeface="Arial" pitchFamily="34" charset="-120"/>
               </a:rPr>
-              <a:t>✔ מה עושים בפועל: משקיעים בהבנת התהליך של עבודה עם כלי אג'נטי, לא רק ב"איך לוחצים איפה" בכלי ספציפי אחד.</a:t>
-            </a:r>
-            <a:endParaRPr lang="en-US" sz="1500" dirty="0"/>
-          </a:p>
-        </p:txBody>
-      </p:sp>
-      <p:sp>
-        <p:nvSpPr>
-          <p:cNvPr id="7" name="Shape 5"/>
-          <p:cNvSpPr/>
-          <p:nvPr/>
-        </p:nvSpPr>
-        <p:spPr>
-          <a:xfrm>
-            <a:off x="548640" y="4846320"/>
-            <a:ext cx="11091672" cy="1143000"/>
-          </a:xfrm>
-          <a:prstGeom prst="rect">
-            <a:avLst/>
-          </a:prstGeom>
-          <a:solidFill>
-            <a:srgbClr val="F6F6F8"/>
-          </a:solidFill>
-          <a:ln w="12700">
-            <a:solidFill>
-              <a:srgbClr val="B8B8C8"/>
-            </a:solidFill>
-            <a:prstDash val="dash"/>
-          </a:ln>
-        </p:spPr>
-      </p:sp>
-      <p:sp>
-        <p:nvSpPr>
-          <p:cNvPr id="8" name="Text 6"/>
-          <p:cNvSpPr/>
-          <p:nvPr/>
-        </p:nvSpPr>
-        <p:spPr>
-          <a:xfrm>
-            <a:off x="548640" y="4846320"/>
-            <a:ext cx="11091672" cy="1143000"/>
-          </a:xfrm>
-          <a:prstGeom prst="rect">
-            <a:avLst/>
-          </a:prstGeom>
-          <a:noFill/>
-          <a:ln/>
-        </p:spPr>
-        <p:txBody>
-          <a:bodyPr wrap="square" lIns="101600" tIns="101600" rIns="101600" bIns="101600" rtlCol="0" anchor="ctr"/>
-          <a:lstStyle/>
-          <a:p>
-            <a:pPr rtl="1" algn="ctr" indent="0" marL="0">
-              <a:buNone/>
-            </a:pPr>
-            <a:r>
-              <a:rPr lang="en-US" sz="1200" i="1" dirty="0">
+              <a:t>✔ מה עושים בפועל: ההבדל הוא לא הכלי. ההבדל הוא התהליך.</a:t>
+            </a:r>
+            <a:endParaRPr lang="en-US" sz="1700" dirty="0"/>
+          </a:p>
+        </p:txBody>
+      </p:sp>
+      <p:sp>
+        <p:nvSpPr>
+          <p:cNvPr id="6" name="Text 4"/>
+          <p:cNvSpPr/>
+          <p:nvPr/>
+        </p:nvSpPr>
+        <p:spPr>
+          <a:xfrm>
+            <a:off x="548640" y="6172200"/>
+            <a:ext cx="11091672" cy="274320"/>
+          </a:xfrm>
+          <a:prstGeom prst="rect">
+            <a:avLst/>
+          </a:prstGeom>
+          <a:noFill/>
+          <a:ln/>
+        </p:spPr>
+        <p:txBody>
+          <a:bodyPr wrap="square" lIns="0" tIns="0" rIns="0" bIns="0" rtlCol="0" anchor="ctr"/>
+          <a:lstStyle/>
+          <a:p>
+            <a:pPr rtl="1" algn="r" indent="0" marL="0">
+              <a:buNone/>
+            </a:pPr>
+            <a:r>
+              <a:rPr lang="en-US" sz="1000" i="1" dirty="0">
                 <a:solidFill>
                   <a:srgbClr val="6B7280"/>
                 </a:solidFill>
@@ -5458,15 +5512,15 @@
                 <a:ea typeface="Calibri" pitchFamily="34" charset="-122"/>
                 <a:cs typeface="Calibri" pitchFamily="34" charset="-120"/>
               </a:rPr>
-              <a:t>[תמונה/לוגו: Gemini CLI ו-Google Antigravity CLI, זה לצד זה]</a:t>
-            </a:r>
-            <a:endParaRPr lang="en-US" sz="1200" dirty="0"/>
-          </a:p>
-        </p:txBody>
-      </p:sp>
-      <p:sp>
-        <p:nvSpPr>
-          <p:cNvPr id="9" name="Text 7"/>
+              <a:t>מקור: DORA — ROI of AI-Assisted Software Development, 2026</a:t>
+            </a:r>
+            <a:endParaRPr lang="en-US" sz="1000" dirty="0"/>
+          </a:p>
+        </p:txBody>
+      </p:sp>
+      <p:sp>
+        <p:nvSpPr>
+          <p:cNvPr id="7" name="Text 5"/>
           <p:cNvSpPr/>
           <p:nvPr/>
         </p:nvSpPr>
@@ -5568,7 +5622,7 @@
                 <a:ea typeface="Arial" pitchFamily="34" charset="-122"/>
                 <a:cs typeface="Arial" pitchFamily="34" charset="-120"/>
               </a:rPr>
-              <a:t>עוד דוגמה: זה לא רק Google</a:t>
+              <a:t>מקרה בוחן: Gemini CLI → Antigravity</a:t>
             </a:r>
             <a:endParaRPr lang="en-US" sz="2800" dirty="0"/>
           </a:p>
@@ -5599,7 +5653,7 @@
               <a:buNone/>
             </a:pPr>
             <a:r>
-              <a:rPr lang="en-US" sz="1500" i="1" dirty="0">
+              <a:rPr lang="en-US" sz="1700" i="1" dirty="0">
                 <a:solidFill>
                   <a:srgbClr val="6B7280"/>
                 </a:solidFill>
@@ -5607,9 +5661,9 @@
                 <a:ea typeface="Calibri" pitchFamily="34" charset="-122"/>
                 <a:cs typeface="Calibri" pitchFamily="34" charset="-120"/>
               </a:rPr>
-              <a:t>השאלה: זה קרה גם למישהו אחר, או שזה מקרה בודד?</a:t>
-            </a:r>
-            <a:endParaRPr lang="en-US" sz="1500" dirty="0"/>
+              <a:t>השאלה: מה קורה כשהכלי שלמדתם נעלם?</a:t>
+            </a:r>
+            <a:endParaRPr lang="en-US" sz="1700" dirty="0"/>
           </a:p>
         </p:txBody>
       </p:sp>
@@ -5641,94 +5695,77 @@
               <a:buNone/>
             </a:pPr>
             <a:r>
-              <a:rPr lang="en-US" sz="1600" dirty="0">
-                <a:solidFill>
-                  <a:srgbClr val="1B1F3B"/>
-                </a:solidFill>
-                <a:latin typeface="Calibri" pitchFamily="34" charset="0"/>
-                <a:ea typeface="Calibri" pitchFamily="34" charset="-122"/>
-                <a:cs typeface="Calibri" pitchFamily="34" charset="-120"/>
-              </a:rPr>
-              <a:t>• מרץ 2026: GitHub שינה את מסלול הסטודנטים ל-Copilot Student</a:t>
-            </a:r>
-            <a:endParaRPr lang="en-US" sz="1600" dirty="0"/>
-          </a:p>
-          <a:p>
-            <a:pPr algn="r" indent="0" marL="0">
-              <a:spcAft>
-                <a:spcPts val="1000"/>
-              </a:spcAft>
-              <a:buNone/>
-            </a:pPr>
-            <a:r>
-              <a:rPr lang="en-US" sz="1600" dirty="0">
-                <a:solidFill>
-                  <a:srgbClr val="1B1F3B"/>
-                </a:solidFill>
-                <a:latin typeface="Calibri" pitchFamily="34" charset="0"/>
-                <a:ea typeface="Calibri" pitchFamily="34" charset="-122"/>
-                <a:cs typeface="Calibri" pitchFamily="34" charset="-120"/>
-              </a:rPr>
-              <a:t>• הפעלות חדשות מוקפאות זמנית — בלי לוח זמנים לחידוש</a:t>
-            </a:r>
-            <a:endParaRPr lang="en-US" sz="1600" dirty="0"/>
-          </a:p>
-          <a:p>
-            <a:pPr algn="r" indent="0" marL="0">
-              <a:spcAft>
-                <a:spcPts val="1000"/>
-              </a:spcAft>
-              <a:buNone/>
-            </a:pPr>
-            <a:r>
-              <a:rPr lang="en-US" sz="1600" dirty="0">
-                <a:solidFill>
-                  <a:srgbClr val="1B1F3B"/>
-                </a:solidFill>
-                <a:latin typeface="Calibri" pitchFamily="34" charset="0"/>
-                <a:ea typeface="Calibri" pitchFamily="34" charset="-122"/>
-                <a:cs typeface="Calibri" pitchFamily="34" charset="-120"/>
-              </a:rPr>
-              <a:t>• גם "תנאי מסלול חינם" משתנים בלי אזהרה, לא רק כלים שלמים</a:t>
-            </a:r>
-            <a:endParaRPr lang="en-US" sz="1600" dirty="0"/>
-          </a:p>
-          <a:p>
-            <a:pPr algn="r" indent="0" marL="0">
-              <a:spcAft>
-                <a:spcPts val="1000"/>
-              </a:spcAft>
-              <a:buNone/>
-            </a:pPr>
-            <a:r>
-              <a:rPr lang="en-US" sz="1600" b="1" dirty="0">
-                <a:solidFill>
-                  <a:srgbClr val="1B1F3B"/>
-                </a:solidFill>
-                <a:latin typeface="Calibri" pitchFamily="34" charset="0"/>
-                <a:ea typeface="Calibri" pitchFamily="34" charset="-122"/>
-                <a:cs typeface="Calibri" pitchFamily="34" charset="-120"/>
-              </a:rPr>
-              <a:t>• פעילות זוגות:</a:t>
-            </a:r>
-            <a:pPr algn="r" indent="0" marL="0">
-              <a:spcAft>
-                <a:spcPts val="1000"/>
-              </a:spcAft>
-              <a:buNone/>
-            </a:pPr>
-            <a:r>
-              <a:rPr lang="en-US" sz="1600" dirty="0">
-                <a:solidFill>
-                  <a:srgbClr val="1B1F3B"/>
-                </a:solidFill>
-                <a:latin typeface="Calibri" pitchFamily="34" charset="0"/>
-                <a:ea typeface="Calibri" pitchFamily="34" charset="-122"/>
-                <a:cs typeface="Calibri" pitchFamily="34" charset="-120"/>
-              </a:rPr>
-              <a:t> תחשבו על כלי שהשתנה דרמטית בחייכם תוך שנה-שנתיים — שתפו את בן/בת הזוג</a:t>
-            </a:r>
-            <a:endParaRPr lang="en-US" sz="1600" dirty="0"/>
+              <a:rPr lang="en-US" sz="1900" dirty="0">
+                <a:solidFill>
+                  <a:srgbClr val="1B1F3B"/>
+                </a:solidFill>
+                <a:latin typeface="Calibri" pitchFamily="34" charset="0"/>
+                <a:ea typeface="Calibri" pitchFamily="34" charset="-122"/>
+                <a:cs typeface="Calibri" pitchFamily="34" charset="-120"/>
+              </a:rPr>
+              <a:t>• Google הריצה כלי CLI חינמי — Gemini CLI</a:t>
+            </a:r>
+            <a:endParaRPr lang="en-US" sz="1900" dirty="0"/>
+          </a:p>
+          <a:p>
+            <a:pPr algn="r" indent="0" marL="0">
+              <a:spcAft>
+                <a:spcPts val="1000"/>
+              </a:spcAft>
+              <a:buNone/>
+            </a:pPr>
+            <a:r>
+              <a:rPr lang="en-US" sz="1900" dirty="0">
+                <a:solidFill>
+                  <a:srgbClr val="1B1F3B"/>
+                </a:solidFill>
+                <a:latin typeface="Calibri" pitchFamily="34" charset="0"/>
+                <a:ea typeface="Calibri" pitchFamily="34" charset="-122"/>
+                <a:cs typeface="Calibri" pitchFamily="34" charset="-120"/>
+              </a:rPr>
+              <a:t>• אמצע 2026: נסגר, הוחלף ב-Antigravity CLI (לא חינמי באותו אופן)</a:t>
+            </a:r>
+            <a:endParaRPr lang="en-US" sz="1900" dirty="0"/>
+          </a:p>
+          <a:p>
+            <a:pPr algn="r" indent="0" marL="0">
+              <a:spcAft>
+                <a:spcPts val="1000"/>
+              </a:spcAft>
+              <a:buNone/>
+            </a:pPr>
+            <a:r>
+              <a:rPr lang="en-US" sz="1900" dirty="0">
+                <a:solidFill>
+                  <a:srgbClr val="1B1F3B"/>
+                </a:solidFill>
+                <a:latin typeface="Calibri" pitchFamily="34" charset="0"/>
+                <a:ea typeface="Calibri" pitchFamily="34" charset="-122"/>
+                <a:cs typeface="Calibri" pitchFamily="34" charset="-120"/>
+              </a:rPr>
+              <a:t>• מי שלמד רק "את הכלי" — מתחיל כמעט מאפס</a:t>
+            </a:r>
+            <a:endParaRPr lang="en-US" sz="1900" dirty="0"/>
+          </a:p>
+          <a:p>
+            <a:pPr algn="r" indent="0" marL="0">
+              <a:spcAft>
+                <a:spcPts val="1000"/>
+              </a:spcAft>
+              <a:buNone/>
+            </a:pPr>
+            <a:r>
+              <a:rPr lang="en-US" sz="1900" dirty="0">
+                <a:solidFill>
+                  <a:srgbClr val="1B1F3B"/>
+                </a:solidFill>
+                <a:latin typeface="Calibri" pitchFamily="34" charset="0"/>
+                <a:ea typeface="Calibri" pitchFamily="34" charset="-122"/>
+                <a:cs typeface="Calibri" pitchFamily="34" charset="-120"/>
+              </a:rPr>
+              <a:t>• מי שלמד את ה-Workflow — עובר לכלי הבא כמעט בלי לאבד זמן</a:t>
+            </a:r>
+            <a:endParaRPr lang="en-US" sz="1900" dirty="0"/>
           </a:p>
         </p:txBody>
       </p:sp>
@@ -5764,7 +5801,7 @@
         <p:spPr>
           <a:xfrm>
             <a:off x="548640" y="4023360"/>
-            <a:ext cx="11091672" cy="777240"/>
+            <a:ext cx="11091672" cy="868680"/>
           </a:xfrm>
           <a:prstGeom prst="rect">
             <a:avLst/>
@@ -5780,7 +5817,7 @@
               <a:buNone/>
             </a:pPr>
             <a:r>
-              <a:rPr lang="en-US" sz="1500" dirty="0">
+              <a:rPr lang="en-US" sz="1700" dirty="0">
                 <a:solidFill>
                   <a:srgbClr val="00A88A"/>
                 </a:solidFill>
@@ -5788,15 +5825,79 @@
                 <a:ea typeface="Arial" pitchFamily="34" charset="-122"/>
                 <a:cs typeface="Arial" pitchFamily="34" charset="-120"/>
               </a:rPr>
-              <a:t>✔ מה עושים בפועל: בונים על התהליך, לא על תנאי גישה של כלי מסוים.</a:t>
-            </a:r>
-            <a:endParaRPr lang="en-US" sz="1500" dirty="0"/>
-          </a:p>
-        </p:txBody>
-      </p:sp>
-      <p:sp>
-        <p:nvSpPr>
-          <p:cNvPr id="7" name="Text 5"/>
+              <a:t>✔ מה עושים בפועל: משקיעים בהבנת התהליך של עבודה עם כלי אג'נטי, לא רק ב"איך לוחצים איפה" בכלי ספציפי אחד.</a:t>
+            </a:r>
+            <a:endParaRPr lang="en-US" sz="1700" dirty="0"/>
+          </a:p>
+        </p:txBody>
+      </p:sp>
+      <p:sp>
+        <p:nvSpPr>
+          <p:cNvPr id="7" name="Shape 5"/>
+          <p:cNvSpPr/>
+          <p:nvPr/>
+        </p:nvSpPr>
+        <p:spPr>
+          <a:xfrm>
+            <a:off x="548640" y="4846320"/>
+            <a:ext cx="11091672" cy="1143000"/>
+          </a:xfrm>
+          <a:prstGeom prst="rect">
+            <a:avLst/>
+          </a:prstGeom>
+          <a:solidFill>
+            <a:srgbClr val="F6F6F8"/>
+          </a:solidFill>
+          <a:ln w="12700">
+            <a:solidFill>
+              <a:srgbClr val="B8B8C8"/>
+            </a:solidFill>
+            <a:prstDash val="dash"/>
+          </a:ln>
+        </p:spPr>
+      </p:sp>
+      <p:sp>
+        <p:nvSpPr>
+          <p:cNvPr id="8" name="Text 6"/>
+          <p:cNvSpPr/>
+          <p:nvPr/>
+        </p:nvSpPr>
+        <p:spPr>
+          <a:xfrm>
+            <a:off x="548640" y="4846320"/>
+            <a:ext cx="11091672" cy="1143000"/>
+          </a:xfrm>
+          <a:prstGeom prst="rect">
+            <a:avLst/>
+          </a:prstGeom>
+          <a:noFill/>
+          <a:ln/>
+        </p:spPr>
+        <p:txBody>
+          <a:bodyPr wrap="square" lIns="101600" tIns="101600" rIns="101600" bIns="101600" rtlCol="0" anchor="ctr"/>
+          <a:lstStyle/>
+          <a:p>
+            <a:pPr rtl="1" algn="ctr" indent="0" marL="0">
+              <a:buNone/>
+            </a:pPr>
+            <a:r>
+              <a:rPr lang="en-US" sz="1300" i="1" dirty="0">
+                <a:solidFill>
+                  <a:srgbClr val="6B7280"/>
+                </a:solidFill>
+                <a:latin typeface="Calibri" pitchFamily="34" charset="0"/>
+                <a:ea typeface="Calibri" pitchFamily="34" charset="-122"/>
+                <a:cs typeface="Calibri" pitchFamily="34" charset="-120"/>
+              </a:rPr>
+              <a:t>[תמונה/לוגו: Gemini CLI ו-Google Antigravity CLI, זה לצד זה]</a:t>
+            </a:r>
+            <a:endParaRPr lang="en-US" sz="1300" dirty="0"/>
+          </a:p>
+        </p:txBody>
+      </p:sp>
+      <p:sp>
+        <p:nvSpPr>
+          <p:cNvPr id="9" name="Text 7"/>
           <p:cNvSpPr/>
           <p:nvPr/>
         </p:nvSpPr>
@@ -5898,7 +5999,7 @@
                 <a:ea typeface="Arial" pitchFamily="34" charset="-122"/>
                 <a:cs typeface="Arial" pitchFamily="34" charset="-120"/>
               </a:rPr>
-              <a:t>זה קורה גם בענק</a:t>
+              <a:t>עוד דוגמה: זה לא רק Google</a:t>
             </a:r>
             <a:endParaRPr lang="en-US" sz="2800" dirty="0"/>
           </a:p>
@@ -5929,7 +6030,7 @@
               <a:buNone/>
             </a:pPr>
             <a:r>
-              <a:rPr lang="en-US" sz="1500" i="1" dirty="0">
+              <a:rPr lang="en-US" sz="1700" i="1" dirty="0">
                 <a:solidFill>
                   <a:srgbClr val="6B7280"/>
                 </a:solidFill>
@@ -5937,9 +6038,9 @@
                 <a:ea typeface="Calibri" pitchFamily="34" charset="-122"/>
                 <a:cs typeface="Calibri" pitchFamily="34" charset="-120"/>
               </a:rPr>
-              <a:t>השאלה: אולי זה רלוונטי רק לחברות ענק/סטארטאפים קטנים?</a:t>
-            </a:r>
-            <a:endParaRPr lang="en-US" sz="1500" dirty="0"/>
+              <a:t>השאלה: זה קרה גם למישהו אחר, או שזה מקרה בודד?</a:t>
+            </a:r>
+            <a:endParaRPr lang="en-US" sz="1700" dirty="0"/>
           </a:p>
         </p:txBody>
       </p:sp>
@@ -5971,108 +6072,94 @@
               <a:buNone/>
             </a:pPr>
             <a:r>
-              <a:rPr lang="en-US" sz="1600" b="1" dirty="0">
-                <a:solidFill>
-                  <a:srgbClr val="1B1F3B"/>
-                </a:solidFill>
-                <a:latin typeface="Calibri" pitchFamily="34" charset="0"/>
-                <a:ea typeface="Calibri" pitchFamily="34" charset="-122"/>
-                <a:cs typeface="Calibri" pitchFamily="34" charset="-120"/>
-              </a:rPr>
-              <a:t>• Stripe:</a:t>
-            </a:r>
-            <a:pPr algn="r" indent="0" marL="0">
-              <a:spcAft>
-                <a:spcPts val="1000"/>
-              </a:spcAft>
-              <a:buNone/>
-            </a:pPr>
-            <a:r>
-              <a:rPr lang="en-US" sz="1600" dirty="0">
-                <a:solidFill>
-                  <a:srgbClr val="1B1F3B"/>
-                </a:solidFill>
-                <a:latin typeface="Calibri" pitchFamily="34" charset="0"/>
-                <a:ea typeface="Calibri" pitchFamily="34" charset="-122"/>
-                <a:cs typeface="Calibri" pitchFamily="34" charset="-120"/>
-              </a:rPr>
-              <a:t> מערכת "Minions" — 1,000+ PR ממוזגים בשבוע</a:t>
-            </a:r>
-            <a:endParaRPr lang="en-US" sz="1600" dirty="0"/>
-          </a:p>
-          <a:p>
-            <a:pPr algn="r" indent="0" marL="0">
-              <a:spcAft>
-                <a:spcPts val="1000"/>
-              </a:spcAft>
-              <a:buNone/>
-            </a:pPr>
-            <a:r>
-              <a:rPr lang="en-US" sz="1600" b="1" dirty="0">
-                <a:solidFill>
-                  <a:srgbClr val="1B1F3B"/>
-                </a:solidFill>
-                <a:latin typeface="Calibri" pitchFamily="34" charset="0"/>
-                <a:ea typeface="Calibri" pitchFamily="34" charset="-122"/>
-                <a:cs typeface="Calibri" pitchFamily="34" charset="-120"/>
-              </a:rPr>
-              <a:t>• TELUS:</a:t>
-            </a:r>
-            <a:pPr algn="r" indent="0" marL="0">
-              <a:spcAft>
-                <a:spcPts val="1000"/>
-              </a:spcAft>
-              <a:buNone/>
-            </a:pPr>
-            <a:r>
-              <a:rPr lang="en-US" sz="1600" dirty="0">
-                <a:solidFill>
-                  <a:srgbClr val="1B1F3B"/>
-                </a:solidFill>
-                <a:latin typeface="Calibri" pitchFamily="34" charset="0"/>
-                <a:ea typeface="Calibri" pitchFamily="34" charset="-122"/>
-                <a:cs typeface="Calibri" pitchFamily="34" charset="-120"/>
-              </a:rPr>
-              <a:t> 500,000+ שעות נחסכו, 13,000 פתרונות AI</a:t>
-            </a:r>
-            <a:endParaRPr lang="en-US" sz="1600" dirty="0"/>
-          </a:p>
-          <a:p>
-            <a:pPr algn="r" indent="0" marL="0">
-              <a:spcAft>
-                <a:spcPts val="1000"/>
-              </a:spcAft>
-              <a:buNone/>
-            </a:pPr>
-            <a:r>
-              <a:rPr lang="en-US" sz="1600" b="1" dirty="0">
-                <a:solidFill>
-                  <a:srgbClr val="1B1F3B"/>
-                </a:solidFill>
-                <a:latin typeface="Calibri" pitchFamily="34" charset="0"/>
-                <a:ea typeface="Calibri" pitchFamily="34" charset="-122"/>
-                <a:cs typeface="Calibri" pitchFamily="34" charset="-120"/>
-              </a:rPr>
-              <a:t>• Zapier:</a:t>
-            </a:r>
-            <a:pPr algn="r" indent="0" marL="0">
-              <a:spcAft>
-                <a:spcPts val="1000"/>
-              </a:spcAft>
-              <a:buNone/>
-            </a:pPr>
-            <a:r>
-              <a:rPr lang="en-US" sz="1600" dirty="0">
-                <a:solidFill>
-                  <a:srgbClr val="1B1F3B"/>
-                </a:solidFill>
-                <a:latin typeface="Calibri" pitchFamily="34" charset="0"/>
-                <a:ea typeface="Calibri" pitchFamily="34" charset="-122"/>
-                <a:cs typeface="Calibri" pitchFamily="34" charset="-120"/>
-              </a:rPr>
-              <a:t> 89% אימוץ AI ארגוני</a:t>
-            </a:r>
-            <a:endParaRPr lang="en-US" sz="1600" dirty="0"/>
+              <a:rPr lang="en-US" sz="1900" dirty="0">
+                <a:solidFill>
+                  <a:srgbClr val="1B1F3B"/>
+                </a:solidFill>
+                <a:latin typeface="Calibri" pitchFamily="34" charset="0"/>
+                <a:ea typeface="Calibri" pitchFamily="34" charset="-122"/>
+                <a:cs typeface="Calibri" pitchFamily="34" charset="-120"/>
+              </a:rPr>
+              <a:t>• מרץ 2026: GitHub שינה את מסלול הסטודנטים ל-Copilot Student</a:t>
+            </a:r>
+            <a:endParaRPr lang="en-US" sz="1900" dirty="0"/>
+          </a:p>
+          <a:p>
+            <a:pPr algn="r" indent="0" marL="0">
+              <a:spcAft>
+                <a:spcPts val="1000"/>
+              </a:spcAft>
+              <a:buNone/>
+            </a:pPr>
+            <a:r>
+              <a:rPr lang="en-US" sz="1900" dirty="0">
+                <a:solidFill>
+                  <a:srgbClr val="1B1F3B"/>
+                </a:solidFill>
+                <a:latin typeface="Calibri" pitchFamily="34" charset="0"/>
+                <a:ea typeface="Calibri" pitchFamily="34" charset="-122"/>
+                <a:cs typeface="Calibri" pitchFamily="34" charset="-120"/>
+              </a:rPr>
+              <a:t>• הפעלות חדשות מוקפאות זמנית — בלי לוח זמנים לחידוש</a:t>
+            </a:r>
+            <a:endParaRPr lang="en-US" sz="1900" dirty="0"/>
+          </a:p>
+          <a:p>
+            <a:pPr algn="r" indent="0" marL="0">
+              <a:spcAft>
+                <a:spcPts val="1000"/>
+              </a:spcAft>
+              <a:buNone/>
+            </a:pPr>
+            <a:r>
+              <a:rPr lang="en-US" sz="1900" dirty="0">
+                <a:solidFill>
+                  <a:srgbClr val="1B1F3B"/>
+                </a:solidFill>
+                <a:latin typeface="Calibri" pitchFamily="34" charset="0"/>
+                <a:ea typeface="Calibri" pitchFamily="34" charset="-122"/>
+                <a:cs typeface="Calibri" pitchFamily="34" charset="-120"/>
+              </a:rPr>
+              <a:t>• גם "תנאי מסלול חינם" משתנים בלי אזהרה, לא רק כלים שלמים</a:t>
+            </a:r>
+            <a:endParaRPr lang="en-US" sz="1900" dirty="0"/>
+          </a:p>
+          <a:p>
+            <a:pPr algn="r" indent="0" marL="0">
+              <a:spcAft>
+                <a:spcPts val="1000"/>
+              </a:spcAft>
+              <a:buNone/>
+            </a:pPr>
+            <a:r>
+              <a:rPr lang="en-US" sz="1900" b="1" dirty="0">
+                <a:solidFill>
+                  <a:srgbClr val="1B1F3B"/>
+                </a:solidFill>
+                <a:latin typeface="Calibri" pitchFamily="34" charset="0"/>
+                <a:ea typeface="Calibri" pitchFamily="34" charset="-122"/>
+                <a:cs typeface="Calibri" pitchFamily="34" charset="-120"/>
+              </a:rPr>
+              <a:t>• פעילות זוגות:</a:t>
+            </a:r>
+            <a:pPr algn="r" indent="0" marL="0">
+              <a:spcAft>
+                <a:spcPts val="1000"/>
+              </a:spcAft>
+              <a:buNone/>
+            </a:pPr>
+            <a:r>
+              <a:rPr lang="en-US" sz="1900" dirty="0">
+                <a:solidFill>
+                  <a:srgbClr val="1B1F3B"/>
+                </a:solidFill>
+                <a:latin typeface="Calibri" pitchFamily="34" charset="0"/>
+                <a:ea typeface="Calibri" pitchFamily="34" charset="-122"/>
+                <a:cs typeface="Calibri" pitchFamily="34" charset="-120"/>
+              </a:rPr>
+              <a:t> תחשבו על כלי שהשתנה דרמטית בחייכם תוך שנה-שנתיים — שתפו את בן/בת הזוג</a:t>
+            </a:r>
+            <a:endParaRPr lang="en-US" sz="1900" dirty="0"/>
           </a:p>
         </p:txBody>
       </p:sp>
@@ -6108,7 +6195,7 @@
         <p:spPr>
           <a:xfrm>
             <a:off x="548640" y="4023360"/>
-            <a:ext cx="11091672" cy="777240"/>
+            <a:ext cx="11091672" cy="868680"/>
           </a:xfrm>
           <a:prstGeom prst="rect">
             <a:avLst/>
@@ -6124,7 +6211,7 @@
               <a:buNone/>
             </a:pPr>
             <a:r>
-              <a:rPr lang="en-US" sz="1500" dirty="0">
+              <a:rPr lang="en-US" sz="1700" dirty="0">
                 <a:solidFill>
                   <a:srgbClr val="00A88A"/>
                 </a:solidFill>
@@ -6132,54 +6219,15 @@
                 <a:ea typeface="Arial" pitchFamily="34" charset="-122"/>
                 <a:cs typeface="Arial" pitchFamily="34" charset="-120"/>
               </a:rPr>
-              <a:t>✔ מה עושים בפועל: זה לא רק סטארטאפים של שני אנשים — זה גם ענקיות טכנולוגיה, באותו Workflow שלמדנו היום.</a:t>
-            </a:r>
-            <a:endParaRPr lang="en-US" sz="1500" dirty="0"/>
+              <a:t>✔ מה עושים בפועל: בונים על התהליך, לא על תנאי גישה של כלי מסוים.</a:t>
+            </a:r>
+            <a:endParaRPr lang="en-US" sz="1700" dirty="0"/>
           </a:p>
         </p:txBody>
       </p:sp>
       <p:sp>
         <p:nvSpPr>
           <p:cNvPr id="7" name="Text 5"/>
-          <p:cNvSpPr/>
-          <p:nvPr/>
-        </p:nvSpPr>
-        <p:spPr>
-          <a:xfrm>
-            <a:off x="548640" y="6172200"/>
-            <a:ext cx="11091672" cy="274320"/>
-          </a:xfrm>
-          <a:prstGeom prst="rect">
-            <a:avLst/>
-          </a:prstGeom>
-          <a:noFill/>
-          <a:ln/>
-        </p:spPr>
-        <p:txBody>
-          <a:bodyPr wrap="square" lIns="0" tIns="0" rIns="0" bIns="0" rtlCol="0" anchor="ctr"/>
-          <a:lstStyle/>
-          <a:p>
-            <a:pPr rtl="1" algn="r" indent="0" marL="0">
-              <a:buNone/>
-            </a:pPr>
-            <a:r>
-              <a:rPr lang="en-US" sz="1000" i="1" dirty="0">
-                <a:solidFill>
-                  <a:srgbClr val="6B7280"/>
-                </a:solidFill>
-                <a:latin typeface="Calibri" pitchFamily="34" charset="0"/>
-                <a:ea typeface="Calibri" pitchFamily="34" charset="-122"/>
-                <a:cs typeface="Calibri" pitchFamily="34" charset="-120"/>
-              </a:rPr>
-              <a:t>מקור: Forbes 2026</a:t>
-            </a:r>
-            <a:endParaRPr lang="en-US" sz="1000" dirty="0"/>
-          </a:p>
-        </p:txBody>
-      </p:sp>
-      <p:sp>
-        <p:nvSpPr>
-          <p:cNvPr id="8" name="Text 6"/>
           <p:cNvSpPr/>
           <p:nvPr/>
         </p:nvSpPr>
@@ -6256,8 +6304,8 @@
         </p:nvSpPr>
         <p:spPr>
           <a:xfrm>
-            <a:off x="548640" y="640080"/>
-            <a:ext cx="11091672" cy="365760"/>
+            <a:off x="548640" y="320040"/>
+            <a:ext cx="11091672" cy="685800"/>
           </a:xfrm>
           <a:prstGeom prst="rect">
             <a:avLst/>
@@ -6269,42 +6317,214 @@
           <a:bodyPr wrap="square" lIns="0" tIns="0" rIns="0" bIns="0" rtlCol="0" anchor="ctr"/>
           <a:lstStyle/>
           <a:p>
-            <a:pPr algn="ctr" indent="0" marL="0">
-              <a:buNone/>
-            </a:pPr>
-            <a:r>
-              <a:rPr lang="en-US" sz="1500" i="1" dirty="0">
-                <a:solidFill>
-                  <a:srgbClr val="00A88A"/>
-                </a:solidFill>
-                <a:latin typeface="Calibri" pitchFamily="34" charset="0"/>
-                <a:ea typeface="Calibri" pitchFamily="34" charset="-122"/>
-                <a:cs typeface="Calibri" pitchFamily="34" charset="-120"/>
-              </a:rPr>
-              <a:t>הדגמה חיה</a:t>
-            </a:r>
-            <a:endParaRPr lang="en-US" sz="1500" dirty="0"/>
-          </a:p>
-        </p:txBody>
-      </p:sp>
-      <p:sp>
-        <p:nvSpPr>
-          <p:cNvPr id="3" name="Shape 1"/>
-          <p:cNvSpPr/>
-          <p:nvPr/>
-        </p:nvSpPr>
-        <p:spPr>
-          <a:xfrm>
-            <a:off x="4718304" y="1051560"/>
-            <a:ext cx="2743200" cy="0"/>
+            <a:pPr rtl="1" algn="r" indent="0" marL="0">
+              <a:buNone/>
+            </a:pPr>
+            <a:r>
+              <a:rPr lang="en-US" sz="2800" b="1" dirty="0">
+                <a:solidFill>
+                  <a:srgbClr val="1B1F3B"/>
+                </a:solidFill>
+                <a:latin typeface="Arial" pitchFamily="34" charset="0"/>
+                <a:ea typeface="Arial" pitchFamily="34" charset="-122"/>
+                <a:cs typeface="Arial" pitchFamily="34" charset="-120"/>
+              </a:rPr>
+              <a:t>זה קורה גם בענק</a:t>
+            </a:r>
+            <a:endParaRPr lang="en-US" sz="2800" dirty="0"/>
+          </a:p>
+        </p:txBody>
+      </p:sp>
+      <p:sp>
+        <p:nvSpPr>
+          <p:cNvPr id="3" name="Text 1"/>
+          <p:cNvSpPr/>
+          <p:nvPr/>
+        </p:nvSpPr>
+        <p:spPr>
+          <a:xfrm>
+            <a:off x="548640" y="1024128"/>
+            <a:ext cx="11091672" cy="411480"/>
+          </a:xfrm>
+          <a:prstGeom prst="rect">
+            <a:avLst/>
+          </a:prstGeom>
+          <a:noFill/>
+          <a:ln/>
+        </p:spPr>
+        <p:txBody>
+          <a:bodyPr wrap="square" lIns="0" tIns="0" rIns="0" bIns="0" rtlCol="0" anchor="ctr"/>
+          <a:lstStyle/>
+          <a:p>
+            <a:pPr algn="r" indent="0" marL="0">
+              <a:buNone/>
+            </a:pPr>
+            <a:r>
+              <a:rPr lang="en-US" sz="1700" i="1" dirty="0">
+                <a:solidFill>
+                  <a:srgbClr val="6B7280"/>
+                </a:solidFill>
+                <a:latin typeface="Calibri" pitchFamily="34" charset="0"/>
+                <a:ea typeface="Calibri" pitchFamily="34" charset="-122"/>
+                <a:cs typeface="Calibri" pitchFamily="34" charset="-120"/>
+              </a:rPr>
+              <a:t>השאלה: אולי זה רלוונטי רק לחברות ענק/סטארטאפים קטנים?</a:t>
+            </a:r>
+            <a:endParaRPr lang="en-US" sz="1700" dirty="0"/>
+          </a:p>
+        </p:txBody>
+      </p:sp>
+      <p:sp>
+        <p:nvSpPr>
+          <p:cNvPr id="4" name="Text 2"/>
+          <p:cNvSpPr/>
+          <p:nvPr/>
+        </p:nvSpPr>
+        <p:spPr>
+          <a:xfrm>
+            <a:off x="548640" y="1508760"/>
+            <a:ext cx="11091672" cy="2286000"/>
+          </a:xfrm>
+          <a:prstGeom prst="rect">
+            <a:avLst/>
+          </a:prstGeom>
+          <a:noFill/>
+          <a:ln/>
+        </p:spPr>
+        <p:txBody>
+          <a:bodyPr wrap="square" lIns="0" tIns="0" rIns="0" bIns="0" rtlCol="0" anchor="ctr"/>
+          <a:lstStyle/>
+          <a:p>
+            <a:pPr algn="r" indent="0" marL="0">
+              <a:spcAft>
+                <a:spcPts val="1000"/>
+              </a:spcAft>
+              <a:buNone/>
+            </a:pPr>
+            <a:r>
+              <a:rPr lang="en-US" sz="1900" b="1" dirty="0">
+                <a:solidFill>
+                  <a:srgbClr val="1B1F3B"/>
+                </a:solidFill>
+                <a:latin typeface="Calibri" pitchFamily="34" charset="0"/>
+                <a:ea typeface="Calibri" pitchFamily="34" charset="-122"/>
+                <a:cs typeface="Calibri" pitchFamily="34" charset="-120"/>
+              </a:rPr>
+              <a:t>• Stripe:</a:t>
+            </a:r>
+            <a:pPr algn="r" indent="0" marL="0">
+              <a:spcAft>
+                <a:spcPts val="1000"/>
+              </a:spcAft>
+              <a:buNone/>
+            </a:pPr>
+            <a:r>
+              <a:rPr lang="en-US" sz="1900" dirty="0">
+                <a:solidFill>
+                  <a:srgbClr val="1B1F3B"/>
+                </a:solidFill>
+                <a:latin typeface="Calibri" pitchFamily="34" charset="0"/>
+                <a:ea typeface="Calibri" pitchFamily="34" charset="-122"/>
+                <a:cs typeface="Calibri" pitchFamily="34" charset="-120"/>
+              </a:rPr>
+              <a:t> מערכת "Minions" — 1,000+ PR ממוזגים בשבוע</a:t>
+            </a:r>
+            <a:endParaRPr lang="en-US" sz="1900" dirty="0"/>
+          </a:p>
+          <a:p>
+            <a:pPr algn="r" indent="0" marL="0">
+              <a:spcAft>
+                <a:spcPts val="1000"/>
+              </a:spcAft>
+              <a:buNone/>
+            </a:pPr>
+            <a:r>
+              <a:rPr lang="en-US" sz="1900" b="1" dirty="0">
+                <a:solidFill>
+                  <a:srgbClr val="1B1F3B"/>
+                </a:solidFill>
+                <a:latin typeface="Calibri" pitchFamily="34" charset="0"/>
+                <a:ea typeface="Calibri" pitchFamily="34" charset="-122"/>
+                <a:cs typeface="Calibri" pitchFamily="34" charset="-120"/>
+              </a:rPr>
+              <a:t>• TELUS:</a:t>
+            </a:r>
+            <a:pPr algn="r" indent="0" marL="0">
+              <a:spcAft>
+                <a:spcPts val="1000"/>
+              </a:spcAft>
+              <a:buNone/>
+            </a:pPr>
+            <a:r>
+              <a:rPr lang="en-US" sz="1900" dirty="0">
+                <a:solidFill>
+                  <a:srgbClr val="1B1F3B"/>
+                </a:solidFill>
+                <a:latin typeface="Calibri" pitchFamily="34" charset="0"/>
+                <a:ea typeface="Calibri" pitchFamily="34" charset="-122"/>
+                <a:cs typeface="Calibri" pitchFamily="34" charset="-120"/>
+              </a:rPr>
+              <a:t> 500,000+ שעות נחסכו, 13,000 פתרונות AI</a:t>
+            </a:r>
+            <a:endParaRPr lang="en-US" sz="1900" dirty="0"/>
+          </a:p>
+          <a:p>
+            <a:pPr algn="r" indent="0" marL="0">
+              <a:spcAft>
+                <a:spcPts val="1000"/>
+              </a:spcAft>
+              <a:buNone/>
+            </a:pPr>
+            <a:r>
+              <a:rPr lang="en-US" sz="1900" b="1" dirty="0">
+                <a:solidFill>
+                  <a:srgbClr val="1B1F3B"/>
+                </a:solidFill>
+                <a:latin typeface="Calibri" pitchFamily="34" charset="0"/>
+                <a:ea typeface="Calibri" pitchFamily="34" charset="-122"/>
+                <a:cs typeface="Calibri" pitchFamily="34" charset="-120"/>
+              </a:rPr>
+              <a:t>• Zapier:</a:t>
+            </a:r>
+            <a:pPr algn="r" indent="0" marL="0">
+              <a:spcAft>
+                <a:spcPts val="1000"/>
+              </a:spcAft>
+              <a:buNone/>
+            </a:pPr>
+            <a:r>
+              <a:rPr lang="en-US" sz="1900" dirty="0">
+                <a:solidFill>
+                  <a:srgbClr val="1B1F3B"/>
+                </a:solidFill>
+                <a:latin typeface="Calibri" pitchFamily="34" charset="0"/>
+                <a:ea typeface="Calibri" pitchFamily="34" charset="-122"/>
+                <a:cs typeface="Calibri" pitchFamily="34" charset="-120"/>
+              </a:rPr>
+              <a:t> 89% אימוץ AI ארגוני</a:t>
+            </a:r>
+            <a:endParaRPr lang="en-US" sz="1900" dirty="0"/>
+          </a:p>
+        </p:txBody>
+      </p:sp>
+      <p:sp>
+        <p:nvSpPr>
+          <p:cNvPr id="5" name="Shape 3"/>
+          <p:cNvSpPr/>
+          <p:nvPr/>
+        </p:nvSpPr>
+        <p:spPr>
+          <a:xfrm>
+            <a:off x="548640" y="3931920"/>
+            <a:ext cx="11091672" cy="0"/>
           </a:xfrm>
           <a:prstGeom prst="line">
             <a:avLst/>
           </a:prstGeom>
           <a:noFill/>
-          <a:ln w="19050">
+          <a:ln w="9525">
             <a:solidFill>
-              <a:srgbClr val="00A88A"/>
+              <a:srgbClr val="B8B8C8"/>
             </a:solidFill>
             <a:prstDash val="solid"/>
           </a:ln>
@@ -6312,14 +6532,14 @@
       </p:sp>
       <p:sp>
         <p:nvSpPr>
-          <p:cNvPr id="4" name="Text 2"/>
-          <p:cNvSpPr/>
-          <p:nvPr/>
-        </p:nvSpPr>
-        <p:spPr>
-          <a:xfrm>
-            <a:off x="548640" y="1234440"/>
-            <a:ext cx="11091672" cy="914400"/>
+          <p:cNvPr id="6" name="Text 4"/>
+          <p:cNvSpPr/>
+          <p:nvPr/>
+        </p:nvSpPr>
+        <p:spPr>
+          <a:xfrm>
+            <a:off x="548640" y="4023360"/>
+            <a:ext cx="11091672" cy="868680"/>
           </a:xfrm>
           <a:prstGeom prst="rect">
             <a:avLst/>
@@ -6331,34 +6551,34 @@
           <a:bodyPr wrap="square" lIns="0" tIns="0" rIns="0" bIns="0" rtlCol="0" anchor="ctr"/>
           <a:lstStyle/>
           <a:p>
-            <a:pPr rtl="1" algn="ctr" indent="0" marL="0">
-              <a:buNone/>
-            </a:pPr>
-            <a:r>
-              <a:rPr lang="en-US" sz="3200" b="1" dirty="0">
-                <a:solidFill>
-                  <a:srgbClr val="1B1F3B"/>
+            <a:pPr algn="r" indent="0" marL="0">
+              <a:buNone/>
+            </a:pPr>
+            <a:r>
+              <a:rPr lang="en-US" sz="1700" dirty="0">
+                <a:solidFill>
+                  <a:srgbClr val="00A88A"/>
                 </a:solidFill>
                 <a:latin typeface="Arial" pitchFamily="34" charset="0"/>
                 <a:ea typeface="Arial" pitchFamily="34" charset="-122"/>
                 <a:cs typeface="Arial" pitchFamily="34" charset="-120"/>
               </a:rPr>
-              <a:t>20 דקות. בונים יחד, בזמן אמת.</a:t>
-            </a:r>
-            <a:endParaRPr lang="en-US" sz="3200" dirty="0"/>
-          </a:p>
-        </p:txBody>
-      </p:sp>
-      <p:sp>
-        <p:nvSpPr>
-          <p:cNvPr id="5" name="Text 3"/>
-          <p:cNvSpPr/>
-          <p:nvPr/>
-        </p:nvSpPr>
-        <p:spPr>
-          <a:xfrm>
-            <a:off x="548640" y="2148840"/>
-            <a:ext cx="11091672" cy="457200"/>
+              <a:t>✔ מה עושים בפועל: זה לא רק סטארטאפים של שני אנשים — זה גם ענקיות טכנולוגיה, באותו Workflow שלמדנו היום.</a:t>
+            </a:r>
+            <a:endParaRPr lang="en-US" sz="1700" dirty="0"/>
+          </a:p>
+        </p:txBody>
+      </p:sp>
+      <p:sp>
+        <p:nvSpPr>
+          <p:cNvPr id="7" name="Text 5"/>
+          <p:cNvSpPr/>
+          <p:nvPr/>
+        </p:nvSpPr>
+        <p:spPr>
+          <a:xfrm>
+            <a:off x="548640" y="6172200"/>
+            <a:ext cx="11091672" cy="274320"/>
           </a:xfrm>
           <a:prstGeom prst="rect">
             <a:avLst/>
@@ -6370,11 +6590,11 @@
           <a:bodyPr wrap="square" lIns="0" tIns="0" rIns="0" bIns="0" rtlCol="0" anchor="ctr"/>
           <a:lstStyle/>
           <a:p>
-            <a:pPr rtl="1" algn="ctr" indent="0" marL="0">
-              <a:buNone/>
-            </a:pPr>
-            <a:r>
-              <a:rPr lang="en-US" sz="1400" i="1" dirty="0">
+            <a:pPr rtl="1" algn="r" indent="0" marL="0">
+              <a:buNone/>
+            </a:pPr>
+            <a:r>
+              <a:rPr lang="en-US" sz="1000" i="1" dirty="0">
                 <a:solidFill>
                   <a:srgbClr val="6B7280"/>
                 </a:solidFill>
@@ -6382,73 +6602,9 @@
                 <a:ea typeface="Calibri" pitchFamily="34" charset="-122"/>
                 <a:cs typeface="Calibri" pitchFamily="34" charset="-120"/>
               </a:rPr>
-              <a:t>ראו demo/prompt.md להוראות המלאות, לפי ה-Workflow שלמדנו</a:t>
-            </a:r>
-            <a:endParaRPr lang="en-US" sz="1400" dirty="0"/>
-          </a:p>
-        </p:txBody>
-      </p:sp>
-      <p:sp>
-        <p:nvSpPr>
-          <p:cNvPr id="6" name="Shape 4"/>
-          <p:cNvSpPr/>
-          <p:nvPr/>
-        </p:nvSpPr>
-        <p:spPr>
-          <a:xfrm>
-            <a:off x="3200400" y="2834640"/>
-            <a:ext cx="5788152" cy="2743200"/>
-          </a:xfrm>
-          <a:prstGeom prst="rect">
-            <a:avLst/>
-          </a:prstGeom>
-          <a:solidFill>
-            <a:srgbClr val="F6F6F8"/>
-          </a:solidFill>
-          <a:ln w="12700">
-            <a:solidFill>
-              <a:srgbClr val="B8B8C8"/>
-            </a:solidFill>
-            <a:prstDash val="dash"/>
-          </a:ln>
-        </p:spPr>
-      </p:sp>
-      <p:sp>
-        <p:nvSpPr>
-          <p:cNvPr id="7" name="Text 5"/>
-          <p:cNvSpPr/>
-          <p:nvPr/>
-        </p:nvSpPr>
-        <p:spPr>
-          <a:xfrm>
-            <a:off x="3200400" y="2834640"/>
-            <a:ext cx="5788152" cy="2743200"/>
-          </a:xfrm>
-          <a:prstGeom prst="rect">
-            <a:avLst/>
-          </a:prstGeom>
-          <a:noFill/>
-          <a:ln/>
-        </p:spPr>
-        <p:txBody>
-          <a:bodyPr wrap="square" lIns="101600" tIns="101600" rIns="101600" bIns="101600" rtlCol="0" anchor="ctr"/>
-          <a:lstStyle/>
-          <a:p>
-            <a:pPr rtl="1" algn="ctr" indent="0" marL="0">
-              <a:buNone/>
-            </a:pPr>
-            <a:r>
-              <a:rPr lang="en-US" sz="1200" i="1" dirty="0">
-                <a:solidFill>
-                  <a:srgbClr val="6B7280"/>
-                </a:solidFill>
-                <a:latin typeface="Calibri" pitchFamily="34" charset="0"/>
-                <a:ea typeface="Calibri" pitchFamily="34" charset="-122"/>
-                <a:cs typeface="Calibri" pitchFamily="34" charset="-120"/>
-              </a:rPr>
-              <a:t>[תמונה: מסך שיתוף / הקלטת מסך של סוכן AI בונה קוד בזמן אמת]</a:t>
-            </a:r>
-            <a:endParaRPr lang="en-US" sz="1200" dirty="0"/>
+              <a:t>מקור: Forbes 2026</a:t>
+            </a:r>
+            <a:endParaRPr lang="en-US" sz="1000" dirty="0"/>
           </a:p>
         </p:txBody>
       </p:sp>
@@ -6556,7 +6712,7 @@
                 <a:ea typeface="Calibri" pitchFamily="34" charset="-122"/>
                 <a:cs typeface="Calibri" pitchFamily="34" charset="-120"/>
               </a:rPr>
-              <a:t>עוברים לתרגול</a:t>
+              <a:t>הדגמה חיה</a:t>
             </a:r>
             <a:endParaRPr lang="en-US" sz="1500" dirty="0"/>
           </a:p>
@@ -6618,7 +6774,7 @@
                 <a:ea typeface="Arial" pitchFamily="34" charset="-122"/>
                 <a:cs typeface="Arial" pitchFamily="34" charset="-120"/>
               </a:rPr>
-              <a:t>45 דקות: בניית Todo App באמצעות AI</a:t>
+              <a:t>20 דקות. בונים יחד, בזמן אמת.</a:t>
             </a:r>
             <a:endParaRPr lang="en-US" sz="3200" dirty="0"/>
           </a:p>
@@ -6632,8 +6788,8 @@
         </p:nvSpPr>
         <p:spPr>
           <a:xfrm>
-            <a:off x="2286000" y="2834640"/>
-            <a:ext cx="7616952" cy="1828800"/>
+            <a:off x="548640" y="2148840"/>
+            <a:ext cx="11091672" cy="457200"/>
           </a:xfrm>
           <a:prstGeom prst="rect">
             <a:avLst/>
@@ -6645,84 +6801,21 @@
           <a:bodyPr wrap="square" lIns="0" tIns="0" rIns="0" bIns="0" rtlCol="0" anchor="ctr"/>
           <a:lstStyle/>
           <a:p>
-            <a:pPr algn="r" indent="0" marL="0">
-              <a:spcAft>
-                <a:spcPts val="800"/>
-              </a:spcAft>
-              <a:buNone/>
-            </a:pPr>
-            <a:r>
-              <a:rPr lang="en-US" sz="1600" dirty="0">
-                <a:solidFill>
-                  <a:srgbClr val="1B1F3B"/>
-                </a:solidFill>
-                <a:latin typeface="Calibri" pitchFamily="34" charset="0"/>
-                <a:ea typeface="Calibri" pitchFamily="34" charset="-122"/>
-                <a:cs typeface="Calibri" pitchFamily="34" charset="-120"/>
-              </a:rPr>
-              <a:t>• הוספת משימה חדשה</a:t>
-            </a:r>
-            <a:endParaRPr lang="en-US" sz="1600" dirty="0"/>
-          </a:p>
-          <a:p>
-            <a:pPr algn="r" indent="0" marL="0">
-              <a:spcAft>
-                <a:spcPts val="800"/>
-              </a:spcAft>
-              <a:buNone/>
-            </a:pPr>
-            <a:r>
-              <a:rPr lang="en-US" sz="1600" dirty="0">
-                <a:solidFill>
-                  <a:srgbClr val="1B1F3B"/>
-                </a:solidFill>
-                <a:latin typeface="Calibri" pitchFamily="34" charset="0"/>
-                <a:ea typeface="Calibri" pitchFamily="34" charset="-122"/>
-                <a:cs typeface="Calibri" pitchFamily="34" charset="-120"/>
-              </a:rPr>
-              <a:t>• סימון משימה כהושלמה</a:t>
-            </a:r>
-            <a:endParaRPr lang="en-US" sz="1600" dirty="0"/>
-          </a:p>
-          <a:p>
-            <a:pPr algn="r" indent="0" marL="0">
-              <a:spcAft>
-                <a:spcPts val="800"/>
-              </a:spcAft>
-              <a:buNone/>
-            </a:pPr>
-            <a:r>
-              <a:rPr lang="en-US" sz="1600" dirty="0">
-                <a:solidFill>
-                  <a:srgbClr val="1B1F3B"/>
-                </a:solidFill>
-                <a:latin typeface="Calibri" pitchFamily="34" charset="0"/>
-                <a:ea typeface="Calibri" pitchFamily="34" charset="-122"/>
-                <a:cs typeface="Calibri" pitchFamily="34" charset="-120"/>
-              </a:rPr>
-              <a:t>• מחיקת משימה</a:t>
-            </a:r>
-            <a:endParaRPr lang="en-US" sz="1600" dirty="0"/>
-          </a:p>
-          <a:p>
-            <a:pPr algn="r" indent="0" marL="0">
-              <a:spcAft>
-                <a:spcPts val="800"/>
-              </a:spcAft>
-              <a:buNone/>
-            </a:pPr>
-            <a:r>
-              <a:rPr lang="en-US" sz="1600" dirty="0">
-                <a:solidFill>
-                  <a:srgbClr val="1B1F3B"/>
-                </a:solidFill>
-                <a:latin typeface="Calibri" pitchFamily="34" charset="0"/>
-                <a:ea typeface="Calibri" pitchFamily="34" charset="-122"/>
-                <a:cs typeface="Calibri" pitchFamily="34" charset="-120"/>
-              </a:rPr>
-              <a:t>• שמירה עם localStorage</a:t>
-            </a:r>
-            <a:endParaRPr lang="en-US" sz="1600" dirty="0"/>
+            <a:pPr rtl="1" algn="ctr" indent="0" marL="0">
+              <a:buNone/>
+            </a:pPr>
+            <a:r>
+              <a:rPr lang="en-US" sz="1500" i="1" dirty="0">
+                <a:solidFill>
+                  <a:srgbClr val="6B7280"/>
+                </a:solidFill>
+                <a:latin typeface="Calibri" pitchFamily="34" charset="0"/>
+                <a:ea typeface="Calibri" pitchFamily="34" charset="-122"/>
+                <a:cs typeface="Calibri" pitchFamily="34" charset="-120"/>
+              </a:rPr>
+              <a:t>ראו demo/prompt.md להוראות המלאות, לפי ה-Workflow שלמדנו</a:t>
+            </a:r>
+            <a:endParaRPr lang="en-US" sz="1500" dirty="0"/>
           </a:p>
         </p:txBody>
       </p:sp>
@@ -6734,8 +6827,8 @@
         </p:nvSpPr>
         <p:spPr>
           <a:xfrm>
-            <a:off x="3200400" y="4846320"/>
-            <a:ext cx="5788152" cy="1371600"/>
+            <a:off x="3200400" y="2834640"/>
+            <a:ext cx="5788152" cy="2743200"/>
           </a:xfrm>
           <a:prstGeom prst="rect">
             <a:avLst/>
@@ -6759,8 +6852,8 @@
         </p:nvSpPr>
         <p:spPr>
           <a:xfrm>
-            <a:off x="3200400" y="4846320"/>
-            <a:ext cx="5788152" cy="1371600"/>
+            <a:off x="3200400" y="2834640"/>
+            <a:ext cx="5788152" cy="2743200"/>
           </a:xfrm>
           <a:prstGeom prst="rect">
             <a:avLst/>
@@ -6776,7 +6869,7 @@
               <a:buNone/>
             </a:pPr>
             <a:r>
-              <a:rPr lang="en-US" sz="1200" i="1" dirty="0">
+              <a:rPr lang="en-US" sz="1300" i="1" dirty="0">
                 <a:solidFill>
                   <a:srgbClr val="6B7280"/>
                 </a:solidFill>
@@ -6784,9 +6877,9 @@
                 <a:ea typeface="Calibri" pitchFamily="34" charset="-122"/>
                 <a:cs typeface="Calibri" pitchFamily="34" charset="-120"/>
               </a:rPr>
-              <a:t>[אייקון/תמונה: רשימת Todo מסומנת ✓]</a:t>
-            </a:r>
-            <a:endParaRPr lang="en-US" sz="1200" dirty="0"/>
+              <a:t>[תמונה: מסך שיתוף / הקלטת מסך של סוכן AI בונה קוד בזמן אמת]</a:t>
+            </a:r>
+            <a:endParaRPr lang="en-US" sz="1300" dirty="0"/>
           </a:p>
         </p:txBody>
       </p:sp>
@@ -6925,7 +7018,7 @@
               <a:buNone/>
             </a:pPr>
             <a:r>
-              <a:rPr lang="en-US" sz="1500" i="1" dirty="0">
+              <a:rPr lang="en-US" sz="1700" i="1" dirty="0">
                 <a:solidFill>
                   <a:srgbClr val="6B7280"/>
                 </a:solidFill>
@@ -6935,7 +7028,7 @@
               </a:rPr>
               <a:t>השאלה: למה בכלל צריך להבין את זה כדי ללמוד Vibe Coding?</a:t>
             </a:r>
-            <a:endParaRPr lang="en-US" sz="1500" dirty="0"/>
+            <a:endParaRPr lang="en-US" sz="1700" dirty="0"/>
           </a:p>
         </p:txBody>
       </p:sp>
@@ -6967,7 +7060,7 @@
               <a:buNone/>
             </a:pPr>
             <a:r>
-              <a:rPr lang="en-US" sz="1600" b="1" dirty="0">
+              <a:rPr lang="en-US" sz="1900" b="1" dirty="0">
                 <a:solidFill>
                   <a:srgbClr val="1B1F3B"/>
                 </a:solidFill>
@@ -6984,7 +7077,7 @@
               <a:buNone/>
             </a:pPr>
             <a:r>
-              <a:rPr lang="en-US" sz="1600" dirty="0">
+              <a:rPr lang="en-US" sz="1900" dirty="0">
                 <a:solidFill>
                   <a:srgbClr val="1B1F3B"/>
                 </a:solidFill>
@@ -6994,17 +7087,17 @@
               </a:rPr>
               <a:t> = תוכנה שאומנה על כמויות עצומות של טקסט וקוד</a:t>
             </a:r>
-            <a:endParaRPr lang="en-US" sz="1600" dirty="0"/>
-          </a:p>
-          <a:p>
-            <a:pPr algn="r" indent="0" marL="0">
-              <a:spcAft>
-                <a:spcPts val="1000"/>
-              </a:spcAft>
-              <a:buNone/>
-            </a:pPr>
-            <a:r>
-              <a:rPr lang="en-US" sz="1600" dirty="0">
+            <a:endParaRPr lang="en-US" sz="1900" dirty="0"/>
+          </a:p>
+          <a:p>
+            <a:pPr algn="r" indent="0" marL="0">
+              <a:spcAft>
+                <a:spcPts val="1000"/>
+              </a:spcAft>
+              <a:buNone/>
+            </a:pPr>
+            <a:r>
+              <a:rPr lang="en-US" sz="1900" dirty="0">
                 <a:solidFill>
                   <a:srgbClr val="1B1F3B"/>
                 </a:solidFill>
@@ -7014,17 +7107,17 @@
               </a:rPr>
               <a:t>• לא "מבין" כמו בן אדם — מנבא Token אחר Token מה סביר לבוא בהמשך</a:t>
             </a:r>
-            <a:endParaRPr lang="en-US" sz="1600" dirty="0"/>
-          </a:p>
-          <a:p>
-            <a:pPr algn="r" indent="0" marL="0">
-              <a:spcAft>
-                <a:spcPts val="1000"/>
-              </a:spcAft>
-              <a:buNone/>
-            </a:pPr>
-            <a:r>
-              <a:rPr lang="en-US" sz="1600" dirty="0">
+            <a:endParaRPr lang="en-US" sz="1900" dirty="0"/>
+          </a:p>
+          <a:p>
+            <a:pPr algn="r" indent="0" marL="0">
+              <a:spcAft>
+                <a:spcPts val="1000"/>
+              </a:spcAft>
+              <a:buNone/>
+            </a:pPr>
+            <a:r>
+              <a:rPr lang="en-US" sz="1900" dirty="0">
                 <a:solidFill>
                   <a:srgbClr val="1B1F3B"/>
                 </a:solidFill>
@@ -7034,7 +7127,7 @@
               </a:rPr>
               <a:t>• ChatGPT ו-Claude = מודלים כאלה, מוכרים לכם כצ'אטבוטים</a:t>
             </a:r>
-            <a:endParaRPr lang="en-US" sz="1600" dirty="0"/>
+            <a:endParaRPr lang="en-US" sz="1900" dirty="0"/>
           </a:p>
         </p:txBody>
       </p:sp>
@@ -7070,7 +7163,7 @@
         <p:spPr>
           <a:xfrm>
             <a:off x="548640" y="4023360"/>
-            <a:ext cx="11091672" cy="777240"/>
+            <a:ext cx="11091672" cy="868680"/>
           </a:xfrm>
           <a:prstGeom prst="rect">
             <a:avLst/>
@@ -7086,7 +7179,7 @@
               <a:buNone/>
             </a:pPr>
             <a:r>
-              <a:rPr lang="en-US" sz="1500" dirty="0">
+              <a:rPr lang="en-US" sz="1700" dirty="0">
                 <a:solidFill>
                   <a:srgbClr val="00A88A"/>
                 </a:solidFill>
@@ -7096,7 +7189,7 @@
               </a:rPr>
               <a:t>✔ מה עושים בפועל: Vibe Coding = אותה טכנולוגיה בדיוק, רק מחוברת ישירות לקבצי הקוד שלכם במקום לחלון צ'אט.</a:t>
             </a:r>
-            <a:endParaRPr lang="en-US" sz="1500" dirty="0"/>
+            <a:endParaRPr lang="en-US" sz="1700" dirty="0"/>
           </a:p>
         </p:txBody>
       </p:sp>
@@ -7150,7 +7243,7 @@
               <a:buNone/>
             </a:pPr>
             <a:r>
-              <a:rPr lang="en-US" sz="1200" i="1" dirty="0">
+              <a:rPr lang="en-US" sz="1300" i="1" dirty="0">
                 <a:solidFill>
                   <a:srgbClr val="6B7280"/>
                 </a:solidFill>
@@ -7160,7 +7253,7 @@
               </a:rPr>
               <a:t>[תמונה: תרשים פשוט — קלט טקסט → מודל שפה (קופסה) → פלט טקסט/קוד, עם חץ לדוגמה של Token אחר Token]</a:t>
             </a:r>
-            <a:endParaRPr lang="en-US" sz="1200" dirty="0"/>
+            <a:endParaRPr lang="en-US" sz="1300" dirty="0"/>
           </a:p>
         </p:txBody>
       </p:sp>
@@ -7243,8 +7336,8 @@
         </p:nvSpPr>
         <p:spPr>
           <a:xfrm>
-            <a:off x="548640" y="320040"/>
-            <a:ext cx="11091672" cy="685800"/>
+            <a:off x="548640" y="640080"/>
+            <a:ext cx="11091672" cy="365760"/>
           </a:xfrm>
           <a:prstGeom prst="rect">
             <a:avLst/>
@@ -7256,11 +7349,73 @@
           <a:bodyPr wrap="square" lIns="0" tIns="0" rIns="0" bIns="0" rtlCol="0" anchor="ctr"/>
           <a:lstStyle/>
           <a:p>
-            <a:pPr rtl="1" algn="r" indent="0" marL="0">
-              <a:buNone/>
-            </a:pPr>
-            <a:r>
-              <a:rPr lang="en-US" sz="2800" b="1" dirty="0">
+            <a:pPr algn="ctr" indent="0" marL="0">
+              <a:buNone/>
+            </a:pPr>
+            <a:r>
+              <a:rPr lang="en-US" sz="1500" i="1" dirty="0">
+                <a:solidFill>
+                  <a:srgbClr val="00A88A"/>
+                </a:solidFill>
+                <a:latin typeface="Calibri" pitchFamily="34" charset="0"/>
+                <a:ea typeface="Calibri" pitchFamily="34" charset="-122"/>
+                <a:cs typeface="Calibri" pitchFamily="34" charset="-120"/>
+              </a:rPr>
+              <a:t>עוברים לתרגול</a:t>
+            </a:r>
+            <a:endParaRPr lang="en-US" sz="1500" dirty="0"/>
+          </a:p>
+        </p:txBody>
+      </p:sp>
+      <p:sp>
+        <p:nvSpPr>
+          <p:cNvPr id="3" name="Shape 1"/>
+          <p:cNvSpPr/>
+          <p:nvPr/>
+        </p:nvSpPr>
+        <p:spPr>
+          <a:xfrm>
+            <a:off x="4718304" y="1051560"/>
+            <a:ext cx="2743200" cy="0"/>
+          </a:xfrm>
+          <a:prstGeom prst="line">
+            <a:avLst/>
+          </a:prstGeom>
+          <a:noFill/>
+          <a:ln w="19050">
+            <a:solidFill>
+              <a:srgbClr val="00A88A"/>
+            </a:solidFill>
+            <a:prstDash val="solid"/>
+          </a:ln>
+        </p:spPr>
+      </p:sp>
+      <p:sp>
+        <p:nvSpPr>
+          <p:cNvPr id="4" name="Text 2"/>
+          <p:cNvSpPr/>
+          <p:nvPr/>
+        </p:nvSpPr>
+        <p:spPr>
+          <a:xfrm>
+            <a:off x="548640" y="1234440"/>
+            <a:ext cx="11091672" cy="914400"/>
+          </a:xfrm>
+          <a:prstGeom prst="rect">
+            <a:avLst/>
+          </a:prstGeom>
+          <a:noFill/>
+          <a:ln/>
+        </p:spPr>
+        <p:txBody>
+          <a:bodyPr wrap="square" lIns="0" tIns="0" rIns="0" bIns="0" rtlCol="0" anchor="ctr"/>
+          <a:lstStyle/>
+          <a:p>
+            <a:pPr rtl="1" algn="ctr" indent="0" marL="0">
+              <a:buNone/>
+            </a:pPr>
+            <a:r>
+              <a:rPr lang="en-US" sz="3200" b="1" dirty="0">
                 <a:solidFill>
                   <a:srgbClr val="1B1F3B"/>
                 </a:solidFill>
@@ -7268,22 +7423,22 @@
                 <a:ea typeface="Arial" pitchFamily="34" charset="-122"/>
                 <a:cs typeface="Arial" pitchFamily="34" charset="-120"/>
               </a:rPr>
-              <a:t>סיכום</a:t>
-            </a:r>
-            <a:endParaRPr lang="en-US" sz="2800" dirty="0"/>
-          </a:p>
-        </p:txBody>
-      </p:sp>
-      <p:sp>
-        <p:nvSpPr>
-          <p:cNvPr id="3" name="Text 1"/>
-          <p:cNvSpPr/>
-          <p:nvPr/>
-        </p:nvSpPr>
-        <p:spPr>
-          <a:xfrm>
-            <a:off x="548640" y="1371600"/>
-            <a:ext cx="11091672" cy="2743200"/>
+              <a:t>45 דקות: בניית Todo App באמצעות AI</a:t>
+            </a:r>
+            <a:endParaRPr lang="en-US" sz="3200" dirty="0"/>
+          </a:p>
+        </p:txBody>
+      </p:sp>
+      <p:sp>
+        <p:nvSpPr>
+          <p:cNvPr id="5" name="Text 3"/>
+          <p:cNvSpPr/>
+          <p:nvPr/>
+        </p:nvSpPr>
+        <p:spPr>
+          <a:xfrm>
+            <a:off x="2286000" y="2834640"/>
+            <a:ext cx="7616952" cy="1828800"/>
           </a:xfrm>
           <a:prstGeom prst="rect">
             <a:avLst/>
@@ -7297,7 +7452,7 @@
           <a:p>
             <a:pPr algn="r" indent="0" marL="0">
               <a:spcAft>
-                <a:spcPts val="1600"/>
+                <a:spcPts val="800"/>
               </a:spcAft>
               <a:buNone/>
             </a:pPr>
@@ -7310,14 +7465,14 @@
                 <a:ea typeface="Calibri" pitchFamily="34" charset="-122"/>
                 <a:cs typeface="Calibri" pitchFamily="34" charset="-120"/>
               </a:rPr>
-              <a:t>1. Vibe Coding = תהליך מקצועי, לא ניחוש — והנתונים מוכיחים את זה</a:t>
+              <a:t>• הוספת משימה חדשה</a:t>
             </a:r>
             <a:endParaRPr lang="en-US" sz="1800" dirty="0"/>
           </a:p>
           <a:p>
             <a:pPr algn="r" indent="0" marL="0">
               <a:spcAft>
-                <a:spcPts val="1600"/>
+                <a:spcPts val="800"/>
               </a:spcAft>
               <a:buNone/>
             </a:pPr>
@@ -7330,14 +7485,14 @@
                 <a:ea typeface="Calibri" pitchFamily="34" charset="-122"/>
                 <a:cs typeface="Calibri" pitchFamily="34" charset="-120"/>
               </a:rPr>
-              <a:t>2. AI מאיץ עבודה, אבל 71% לא סומכים על הפלט בלי ביקורת — ולכן תמיד בודקים קוד לא מוכר (Hallucination)</a:t>
+              <a:t>• סימון משימה כהושלמה</a:t>
             </a:r>
             <a:endParaRPr lang="en-US" sz="1800" dirty="0"/>
           </a:p>
           <a:p>
             <a:pPr algn="r" indent="0" marL="0">
               <a:spcAft>
-                <a:spcPts val="1600"/>
+                <a:spcPts val="800"/>
               </a:spcAft>
               <a:buNone/>
             </a:pPr>
@@ -7350,77 +7505,99 @@
                 <a:ea typeface="Calibri" pitchFamily="34" charset="-122"/>
                 <a:cs typeface="Calibri" pitchFamily="34" charset="-120"/>
               </a:rPr>
-              <a:t>3. לומדים Workflow — כלים יוחלפו, התהליך נשאר (וזה ההבדל בין 10% ל-40%)</a:t>
+              <a:t>• מחיקת משימה</a:t>
             </a:r>
             <a:endParaRPr lang="en-US" sz="1800" dirty="0"/>
           </a:p>
-        </p:txBody>
-      </p:sp>
-      <p:sp>
-        <p:nvSpPr>
-          <p:cNvPr id="4" name="Shape 2"/>
-          <p:cNvSpPr/>
-          <p:nvPr/>
-        </p:nvSpPr>
-        <p:spPr>
-          <a:xfrm>
-            <a:off x="548640" y="4572000"/>
-            <a:ext cx="11091672" cy="0"/>
-          </a:xfrm>
-          <a:prstGeom prst="line">
-            <a:avLst/>
-          </a:prstGeom>
-          <a:noFill/>
-          <a:ln w="9525">
+          <a:p>
+            <a:pPr algn="r" indent="0" marL="0">
+              <a:spcAft>
+                <a:spcPts val="800"/>
+              </a:spcAft>
+              <a:buNone/>
+            </a:pPr>
+            <a:r>
+              <a:rPr lang="en-US" sz="1800" dirty="0">
+                <a:solidFill>
+                  <a:srgbClr val="1B1F3B"/>
+                </a:solidFill>
+                <a:latin typeface="Calibri" pitchFamily="34" charset="0"/>
+                <a:ea typeface="Calibri" pitchFamily="34" charset="-122"/>
+                <a:cs typeface="Calibri" pitchFamily="34" charset="-120"/>
+              </a:rPr>
+              <a:t>• שמירה עם localStorage</a:t>
+            </a:r>
+            <a:endParaRPr lang="en-US" sz="1800" dirty="0"/>
+          </a:p>
+        </p:txBody>
+      </p:sp>
+      <p:sp>
+        <p:nvSpPr>
+          <p:cNvPr id="6" name="Shape 4"/>
+          <p:cNvSpPr/>
+          <p:nvPr/>
+        </p:nvSpPr>
+        <p:spPr>
+          <a:xfrm>
+            <a:off x="3200400" y="4846320"/>
+            <a:ext cx="5788152" cy="1371600"/>
+          </a:xfrm>
+          <a:prstGeom prst="rect">
+            <a:avLst/>
+          </a:prstGeom>
+          <a:solidFill>
+            <a:srgbClr val="F6F6F8"/>
+          </a:solidFill>
+          <a:ln w="12700">
             <a:solidFill>
               <a:srgbClr val="B8B8C8"/>
             </a:solidFill>
-            <a:prstDash val="solid"/>
+            <a:prstDash val="dash"/>
           </a:ln>
         </p:spPr>
       </p:sp>
       <p:sp>
         <p:nvSpPr>
-          <p:cNvPr id="5" name="Text 3"/>
-          <p:cNvSpPr/>
-          <p:nvPr/>
-        </p:nvSpPr>
-        <p:spPr>
-          <a:xfrm>
-            <a:off x="548640" y="4709160"/>
-            <a:ext cx="11091672" cy="548640"/>
-          </a:xfrm>
-          <a:prstGeom prst="rect">
-            <a:avLst/>
-          </a:prstGeom>
-          <a:noFill/>
-          <a:ln/>
-        </p:spPr>
-        <p:txBody>
-          <a:bodyPr wrap="square" lIns="0" tIns="0" rIns="0" bIns="0" rtlCol="0" anchor="ctr"/>
-          <a:lstStyle/>
-          <a:p>
-            <a:pPr rtl="1" algn="r" indent="0" marL="0">
-              <a:buNone/>
-            </a:pPr>
-            <a:r>
-              <a:rPr lang="en-US" sz="1700" b="1" dirty="0">
-                <a:solidFill>
-                  <a:srgbClr val="00A88A"/>
-                </a:solidFill>
-                <a:latin typeface="Arial" pitchFamily="34" charset="0"/>
-                <a:ea typeface="Arial" pitchFamily="34" charset="-122"/>
-                <a:cs typeface="Arial" pitchFamily="34" charset="-120"/>
-              </a:rPr>
-              <a:t>שבוע הבא: AI Development Environment — מקימים סביבת עבודה אמיתית</a:t>
-            </a:r>
-            <a:endParaRPr lang="en-US" sz="1700" dirty="0"/>
-          </a:p>
-        </p:txBody>
-      </p:sp>
-      <p:sp>
-        <p:nvSpPr>
-          <p:cNvPr id="6" name="Text 4"/>
+          <p:cNvPr id="7" name="Text 5"/>
+          <p:cNvSpPr/>
+          <p:nvPr/>
+        </p:nvSpPr>
+        <p:spPr>
+          <a:xfrm>
+            <a:off x="3200400" y="4846320"/>
+            <a:ext cx="5788152" cy="1371600"/>
+          </a:xfrm>
+          <a:prstGeom prst="rect">
+            <a:avLst/>
+          </a:prstGeom>
+          <a:noFill/>
+          <a:ln/>
+        </p:spPr>
+        <p:txBody>
+          <a:bodyPr wrap="square" lIns="101600" tIns="101600" rIns="101600" bIns="101600" rtlCol="0" anchor="ctr"/>
+          <a:lstStyle/>
+          <a:p>
+            <a:pPr rtl="1" algn="ctr" indent="0" marL="0">
+              <a:buNone/>
+            </a:pPr>
+            <a:r>
+              <a:rPr lang="en-US" sz="1300" i="1" dirty="0">
+                <a:solidFill>
+                  <a:srgbClr val="6B7280"/>
+                </a:solidFill>
+                <a:latin typeface="Calibri" pitchFamily="34" charset="0"/>
+                <a:ea typeface="Calibri" pitchFamily="34" charset="-122"/>
+                <a:cs typeface="Calibri" pitchFamily="34" charset="-120"/>
+              </a:rPr>
+              <a:t>[אייקון/תמונה: רשימת Todo מסומנת ✓]</a:t>
+            </a:r>
+            <a:endParaRPr lang="en-US" sz="1300" dirty="0"/>
+          </a:p>
+        </p:txBody>
+      </p:sp>
+      <p:sp>
+        <p:nvSpPr>
+          <p:cNvPr id="8" name="Text 6"/>
           <p:cNvSpPr/>
           <p:nvPr/>
         </p:nvSpPr>
@@ -7522,6 +7699,260 @@
                 <a:ea typeface="Arial" pitchFamily="34" charset="-122"/>
                 <a:cs typeface="Arial" pitchFamily="34" charset="-120"/>
               </a:rPr>
+              <a:t>סיכום</a:t>
+            </a:r>
+            <a:endParaRPr lang="en-US" sz="2800" dirty="0"/>
+          </a:p>
+        </p:txBody>
+      </p:sp>
+      <p:sp>
+        <p:nvSpPr>
+          <p:cNvPr id="3" name="Text 1"/>
+          <p:cNvSpPr/>
+          <p:nvPr/>
+        </p:nvSpPr>
+        <p:spPr>
+          <a:xfrm>
+            <a:off x="548640" y="1371600"/>
+            <a:ext cx="11091672" cy="2743200"/>
+          </a:xfrm>
+          <a:prstGeom prst="rect">
+            <a:avLst/>
+          </a:prstGeom>
+          <a:noFill/>
+          <a:ln/>
+        </p:spPr>
+        <p:txBody>
+          <a:bodyPr wrap="square" lIns="0" tIns="0" rIns="0" bIns="0" rtlCol="0" anchor="ctr"/>
+          <a:lstStyle/>
+          <a:p>
+            <a:pPr algn="r" indent="0" marL="0">
+              <a:spcAft>
+                <a:spcPts val="1600"/>
+              </a:spcAft>
+              <a:buNone/>
+            </a:pPr>
+            <a:r>
+              <a:rPr lang="en-US" sz="1800" dirty="0">
+                <a:solidFill>
+                  <a:srgbClr val="1B1F3B"/>
+                </a:solidFill>
+                <a:latin typeface="Calibri" pitchFamily="34" charset="0"/>
+                <a:ea typeface="Calibri" pitchFamily="34" charset="-122"/>
+                <a:cs typeface="Calibri" pitchFamily="34" charset="-120"/>
+              </a:rPr>
+              <a:t>1. Vibe Coding = תהליך מקצועי, לא ניחוש — והנתונים מוכיחים את זה</a:t>
+            </a:r>
+            <a:endParaRPr lang="en-US" sz="1800" dirty="0"/>
+          </a:p>
+          <a:p>
+            <a:pPr algn="r" indent="0" marL="0">
+              <a:spcAft>
+                <a:spcPts val="1600"/>
+              </a:spcAft>
+              <a:buNone/>
+            </a:pPr>
+            <a:r>
+              <a:rPr lang="en-US" sz="1800" dirty="0">
+                <a:solidFill>
+                  <a:srgbClr val="1B1F3B"/>
+                </a:solidFill>
+                <a:latin typeface="Calibri" pitchFamily="34" charset="0"/>
+                <a:ea typeface="Calibri" pitchFamily="34" charset="-122"/>
+                <a:cs typeface="Calibri" pitchFamily="34" charset="-120"/>
+              </a:rPr>
+              <a:t>2. AI מאיץ עבודה, אבל 71% לא סומכים על הפלט בלי ביקורת — ולכן תמיד בודקים קוד לא מוכר (Hallucination)</a:t>
+            </a:r>
+            <a:endParaRPr lang="en-US" sz="1800" dirty="0"/>
+          </a:p>
+          <a:p>
+            <a:pPr algn="r" indent="0" marL="0">
+              <a:spcAft>
+                <a:spcPts val="1600"/>
+              </a:spcAft>
+              <a:buNone/>
+            </a:pPr>
+            <a:r>
+              <a:rPr lang="en-US" sz="1800" dirty="0">
+                <a:solidFill>
+                  <a:srgbClr val="1B1F3B"/>
+                </a:solidFill>
+                <a:latin typeface="Calibri" pitchFamily="34" charset="0"/>
+                <a:ea typeface="Calibri" pitchFamily="34" charset="-122"/>
+                <a:cs typeface="Calibri" pitchFamily="34" charset="-120"/>
+              </a:rPr>
+              <a:t>3. לומדים Workflow — כלים יוחלפו, התהליך נשאר (וזה ההבדל בין 10% ל-40%)</a:t>
+            </a:r>
+            <a:endParaRPr lang="en-US" sz="1800" dirty="0"/>
+          </a:p>
+        </p:txBody>
+      </p:sp>
+      <p:sp>
+        <p:nvSpPr>
+          <p:cNvPr id="4" name="Shape 2"/>
+          <p:cNvSpPr/>
+          <p:nvPr/>
+        </p:nvSpPr>
+        <p:spPr>
+          <a:xfrm>
+            <a:off x="548640" y="4572000"/>
+            <a:ext cx="11091672" cy="0"/>
+          </a:xfrm>
+          <a:prstGeom prst="line">
+            <a:avLst/>
+          </a:prstGeom>
+          <a:noFill/>
+          <a:ln w="9525">
+            <a:solidFill>
+              <a:srgbClr val="B8B8C8"/>
+            </a:solidFill>
+            <a:prstDash val="solid"/>
+          </a:ln>
+        </p:spPr>
+      </p:sp>
+      <p:sp>
+        <p:nvSpPr>
+          <p:cNvPr id="5" name="Text 3"/>
+          <p:cNvSpPr/>
+          <p:nvPr/>
+        </p:nvSpPr>
+        <p:spPr>
+          <a:xfrm>
+            <a:off x="548640" y="4709160"/>
+            <a:ext cx="11091672" cy="548640"/>
+          </a:xfrm>
+          <a:prstGeom prst="rect">
+            <a:avLst/>
+          </a:prstGeom>
+          <a:noFill/>
+          <a:ln/>
+        </p:spPr>
+        <p:txBody>
+          <a:bodyPr wrap="square" lIns="0" tIns="0" rIns="0" bIns="0" rtlCol="0" anchor="ctr"/>
+          <a:lstStyle/>
+          <a:p>
+            <a:pPr rtl="1" algn="r" indent="0" marL="0">
+              <a:buNone/>
+            </a:pPr>
+            <a:r>
+              <a:rPr lang="en-US" sz="1700" b="1" dirty="0">
+                <a:solidFill>
+                  <a:srgbClr val="00A88A"/>
+                </a:solidFill>
+                <a:latin typeface="Arial" pitchFamily="34" charset="0"/>
+                <a:ea typeface="Arial" pitchFamily="34" charset="-122"/>
+                <a:cs typeface="Arial" pitchFamily="34" charset="-120"/>
+              </a:rPr>
+              <a:t>שבוע הבא: AI Development Environment — מקימים סביבת עבודה אמיתית</a:t>
+            </a:r>
+            <a:endParaRPr lang="en-US" sz="1700" dirty="0"/>
+          </a:p>
+        </p:txBody>
+      </p:sp>
+      <p:sp>
+        <p:nvSpPr>
+          <p:cNvPr id="6" name="Text 4"/>
+          <p:cNvSpPr/>
+          <p:nvPr/>
+        </p:nvSpPr>
+        <p:spPr>
+          <a:xfrm>
+            <a:off x="548640" y="6492240"/>
+            <a:ext cx="11091672" cy="274320"/>
+          </a:xfrm>
+          <a:prstGeom prst="rect">
+            <a:avLst/>
+          </a:prstGeom>
+          <a:noFill/>
+          <a:ln/>
+        </p:spPr>
+        <p:txBody>
+          <a:bodyPr wrap="square" lIns="0" tIns="0" rIns="0" bIns="0" rtlCol="0" anchor="ctr"/>
+          <a:lstStyle/>
+          <a:p>
+            <a:pPr rtl="1" algn="r" indent="0" marL="0">
+              <a:buNone/>
+            </a:pPr>
+            <a:r>
+              <a:rPr lang="en-US" sz="900" dirty="0">
+                <a:solidFill>
+                  <a:srgbClr val="A6A6B0"/>
+                </a:solidFill>
+                <a:latin typeface="Calibri" pitchFamily="34" charset="0"/>
+                <a:ea typeface="Calibri" pitchFamily="34" charset="-122"/>
+                <a:cs typeface="Calibri" pitchFamily="34" charset="-120"/>
+              </a:rPr>
+              <a:t>Vibe Coding · שיעור 1 · שקף 21</a:t>
+            </a:r>
+            <a:endParaRPr lang="en-US" sz="900" dirty="0"/>
+          </a:p>
+        </p:txBody>
+      </p:sp>
+    </p:spTree>
+  </p:cSld>
+  <p:clrMapOvr>
+    <a:masterClrMapping/>
+  </p:clrMapOvr>
+</p:sld>
+</file>
+
+<file path=ppt/slides/slide22.xml><?xml version="1.0" encoding="utf-8"?>
+<p:sld xmlns:a="http://schemas.openxmlformats.org/drawingml/2006/main" xmlns:r="http://schemas.openxmlformats.org/officeDocument/2006/relationships" xmlns:p="http://schemas.openxmlformats.org/presentationml/2006/main">
+  <p:cSld name="Slide 22">
+    <p:bg>
+      <p:bgPr>
+        <a:solidFill>
+          <a:srgbClr val="FFFFFF"/>
+        </a:solidFill>
+      </p:bgPr>
+    </p:bg>
+    <p:spTree>
+      <p:nvGrpSpPr>
+        <p:cNvPr id="1" name=""/>
+        <p:cNvGrpSpPr/>
+        <p:nvPr/>
+      </p:nvGrpSpPr>
+      <p:grpSpPr>
+        <a:xfrm>
+          <a:off x="0" y="0"/>
+          <a:ext cx="0" cy="0"/>
+          <a:chOff x="0" y="0"/>
+          <a:chExt cx="0" cy="0"/>
+        </a:xfrm>
+      </p:grpSpPr>
+      <p:sp>
+        <p:nvSpPr>
+          <p:cNvPr id="2" name="Text 0"/>
+          <p:cNvSpPr/>
+          <p:nvPr/>
+        </p:nvSpPr>
+        <p:spPr>
+          <a:xfrm>
+            <a:off x="548640" y="320040"/>
+            <a:ext cx="11091672" cy="685800"/>
+          </a:xfrm>
+          <a:prstGeom prst="rect">
+            <a:avLst/>
+          </a:prstGeom>
+          <a:noFill/>
+          <a:ln/>
+        </p:spPr>
+        <p:txBody>
+          <a:bodyPr wrap="square" lIns="0" tIns="0" rIns="0" bIns="0" rtlCol="0" anchor="ctr"/>
+          <a:lstStyle/>
+          <a:p>
+            <a:pPr rtl="1" algn="r" indent="0" marL="0">
+              <a:buNone/>
+            </a:pPr>
+            <a:r>
+              <a:rPr lang="en-US" sz="2800" b="1" dirty="0">
+                <a:solidFill>
+                  <a:srgbClr val="1B1F3B"/>
+                </a:solidFill>
+                <a:latin typeface="Arial" pitchFamily="34" charset="0"/>
+                <a:ea typeface="Arial" pitchFamily="34" charset="-122"/>
+                <a:cs typeface="Arial" pitchFamily="34" charset="-120"/>
+              </a:rPr>
               <a:t>מקורות</a:t>
             </a:r>
             <a:endParaRPr lang="en-US" sz="2800" dirty="0"/>
@@ -7762,7 +8193,7 @@
                 <a:ea typeface="Calibri" pitchFamily="34" charset="-122"/>
                 <a:cs typeface="Calibri" pitchFamily="34" charset="-120"/>
               </a:rPr>
-              <a:t>Vibe Coding · שיעור 1 · שקף 21</a:t>
+              <a:t>Vibe Coding · שיעור 1 · שקף 22</a:t>
             </a:r>
             <a:endParaRPr lang="en-US" sz="900" dirty="0"/>
           </a:p>
@@ -7864,7 +8295,7 @@
               <a:buNone/>
             </a:pPr>
             <a:r>
-              <a:rPr lang="en-US" sz="1500" i="1" dirty="0">
+              <a:rPr lang="en-US" sz="1700" i="1" dirty="0">
                 <a:solidFill>
                   <a:srgbClr val="6B7280"/>
                 </a:solidFill>
@@ -7874,7 +8305,7 @@
               </a:rPr>
               <a:t>השאלה: במה זה שונה מסתם "לבקש מ-ChatGPT קוד"?</a:t>
             </a:r>
-            <a:endParaRPr lang="en-US" sz="1500" dirty="0"/>
+            <a:endParaRPr lang="en-US" sz="1700" dirty="0"/>
           </a:p>
         </p:txBody>
       </p:sp>
@@ -7906,7 +8337,7 @@
               <a:buNone/>
             </a:pPr>
             <a:r>
-              <a:rPr lang="en-US" sz="1600" dirty="0">
+              <a:rPr lang="en-US" sz="1900" dirty="0">
                 <a:solidFill>
                   <a:srgbClr val="1B1F3B"/>
                 </a:solidFill>
@@ -7916,17 +8347,17 @@
               </a:rPr>
               <a:t>• מנחים AI לכתוב/לבדוק/לתקן קוד — לא כותבים כל שורה לבד</a:t>
             </a:r>
-            <a:endParaRPr lang="en-US" sz="1600" dirty="0"/>
-          </a:p>
-          <a:p>
-            <a:pPr algn="r" indent="0" marL="0">
-              <a:spcAft>
-                <a:spcPts val="1000"/>
-              </a:spcAft>
-              <a:buNone/>
-            </a:pPr>
-            <a:r>
-              <a:rPr lang="en-US" sz="1600" dirty="0">
+            <a:endParaRPr lang="en-US" sz="1900" dirty="0"/>
+          </a:p>
+          <a:p>
+            <a:pPr algn="r" indent="0" marL="0">
+              <a:spcAft>
+                <a:spcPts val="1000"/>
+              </a:spcAft>
+              <a:buNone/>
+            </a:pPr>
+            <a:r>
+              <a:rPr lang="en-US" sz="1900" dirty="0">
                 <a:solidFill>
                   <a:srgbClr val="1B1F3B"/>
                 </a:solidFill>
@@ -7936,17 +8367,17 @@
               </a:rPr>
               <a:t>• שומרים שליטה על כיוון, איכות והחלטות ארכיטקטוניות</a:t>
             </a:r>
-            <a:endParaRPr lang="en-US" sz="1600" dirty="0"/>
-          </a:p>
-          <a:p>
-            <a:pPr algn="r" indent="0" marL="0">
-              <a:spcAft>
-                <a:spcPts val="1000"/>
-              </a:spcAft>
-              <a:buNone/>
-            </a:pPr>
-            <a:r>
-              <a:rPr lang="en-US" sz="1600" b="1" dirty="0">
+            <a:endParaRPr lang="en-US" sz="1900" dirty="0"/>
+          </a:p>
+          <a:p>
+            <a:pPr algn="r" indent="0" marL="0">
+              <a:spcAft>
+                <a:spcPts val="1000"/>
+              </a:spcAft>
+              <a:buNone/>
+            </a:pPr>
+            <a:r>
+              <a:rPr lang="en-US" sz="1900" b="1" dirty="0">
                 <a:solidFill>
                   <a:srgbClr val="1B1F3B"/>
                 </a:solidFill>
@@ -7963,7 +8394,7 @@
               <a:buNone/>
             </a:pPr>
             <a:r>
-              <a:rPr lang="en-US" sz="1600" dirty="0">
+              <a:rPr lang="en-US" sz="1900" dirty="0">
                 <a:solidFill>
                   <a:srgbClr val="1B1F3B"/>
                 </a:solidFill>
@@ -7973,17 +8404,17 @@
               </a:rPr>
               <a:t> = "מקלידים פרומפט ומקווים לטוב"</a:t>
             </a:r>
-            <a:endParaRPr lang="en-US" sz="1600" dirty="0"/>
-          </a:p>
-          <a:p>
-            <a:pPr algn="r" indent="0" marL="0">
-              <a:spcAft>
-                <a:spcPts val="1000"/>
-              </a:spcAft>
-              <a:buNone/>
-            </a:pPr>
-            <a:r>
-              <a:rPr lang="en-US" sz="1600" b="1" dirty="0">
+            <a:endParaRPr lang="en-US" sz="1900" dirty="0"/>
+          </a:p>
+          <a:p>
+            <a:pPr algn="r" indent="0" marL="0">
+              <a:spcAft>
+                <a:spcPts val="1000"/>
+              </a:spcAft>
+              <a:buNone/>
+            </a:pPr>
+            <a:r>
+              <a:rPr lang="en-US" sz="1900" b="1" dirty="0">
                 <a:solidFill>
                   <a:srgbClr val="1B1F3B"/>
                 </a:solidFill>
@@ -8000,7 +8431,7 @@
               <a:buNone/>
             </a:pPr>
             <a:r>
-              <a:rPr lang="en-US" sz="1600" dirty="0">
+              <a:rPr lang="en-US" sz="1900" dirty="0">
                 <a:solidFill>
                   <a:srgbClr val="1B1F3B"/>
                 </a:solidFill>
@@ -8010,7 +8441,7 @@
               </a:rPr>
               <a:t> = תכנון, בדיקה, הבנה, ואחריות מלאה על הקוד</a:t>
             </a:r>
-            <a:endParaRPr lang="en-US" sz="1600" dirty="0"/>
+            <a:endParaRPr lang="en-US" sz="1900" dirty="0"/>
           </a:p>
         </p:txBody>
       </p:sp>
@@ -8046,7 +8477,7 @@
         <p:spPr>
           <a:xfrm>
             <a:off x="548640" y="4023360"/>
-            <a:ext cx="11091672" cy="777240"/>
+            <a:ext cx="11091672" cy="868680"/>
           </a:xfrm>
           <a:prstGeom prst="rect">
             <a:avLst/>
@@ -8062,7 +8493,7 @@
               <a:buNone/>
             </a:pPr>
             <a:r>
-              <a:rPr lang="en-US" sz="1500" dirty="0">
+              <a:rPr lang="en-US" sz="1700" dirty="0">
                 <a:solidFill>
                   <a:srgbClr val="00A88A"/>
                 </a:solidFill>
@@ -8072,7 +8503,7 @@
               </a:rPr>
               <a:t>✔ מה עושים בפועל: לפני שמאשרים כל שינוי שה-AI מציע — קוראים אותו, מבינים למה הוא נכון, ורק אז ממשיכים.</a:t>
             </a:r>
-            <a:endParaRPr lang="en-US" sz="1500" dirty="0"/>
+            <a:endParaRPr lang="en-US" sz="1700" dirty="0"/>
           </a:p>
         </p:txBody>
       </p:sp>
@@ -8126,7 +8557,7 @@
               <a:buNone/>
             </a:pPr>
             <a:r>
-              <a:rPr lang="en-US" sz="1200" i="1" dirty="0">
+              <a:rPr lang="en-US" sz="1300" i="1" dirty="0">
                 <a:solidFill>
                   <a:srgbClr val="6B7280"/>
                 </a:solidFill>
@@ -8136,7 +8567,7 @@
               </a:rPr>
               <a:t>[תמונה: ממשק Claude Code בפעולה — מפתח נותן הנחיה, הסוכן כותב קוד]</a:t>
             </a:r>
-            <a:endParaRPr lang="en-US" sz="1200" dirty="0"/>
+            <a:endParaRPr lang="en-US" sz="1300" dirty="0"/>
           </a:p>
         </p:txBody>
       </p:sp>
@@ -8275,7 +8706,7 @@
               <a:buNone/>
             </a:pPr>
             <a:r>
-              <a:rPr lang="en-US" sz="1500" i="1" dirty="0">
+              <a:rPr lang="en-US" sz="1700" i="1" dirty="0">
                 <a:solidFill>
                   <a:srgbClr val="6B7280"/>
                 </a:solidFill>
@@ -8285,7 +8716,7 @@
               </a:rPr>
               <a:t>השאלה: האם AI הוא רק "עוד כלי עזר", או משהו אחר לגמרי?</a:t>
             </a:r>
-            <a:endParaRPr lang="en-US" sz="1500" dirty="0"/>
+            <a:endParaRPr lang="en-US" sz="1700" dirty="0"/>
           </a:p>
         </p:txBody>
       </p:sp>
@@ -8317,7 +8748,7 @@
               <a:buNone/>
             </a:pPr>
             <a:r>
-              <a:rPr lang="en-US" sz="1600" b="1" dirty="0">
+              <a:rPr lang="en-US" sz="1900" b="1" dirty="0">
                 <a:solidFill>
                   <a:srgbClr val="1B1F3B"/>
                 </a:solidFill>
@@ -8334,7 +8765,7 @@
               <a:buNone/>
             </a:pPr>
             <a:r>
-              <a:rPr lang="en-US" sz="1600" dirty="0">
+              <a:rPr lang="en-US" sz="1900" dirty="0">
                 <a:solidFill>
                   <a:srgbClr val="1B1F3B"/>
                 </a:solidFill>
@@ -8344,17 +8775,17 @@
               </a:rPr>
               <a:t> AI כשותף עבודה מרכזי, מעורב מהבנת הדרישה ועד פריסה בענן</a:t>
             </a:r>
-            <a:endParaRPr lang="en-US" sz="1600" dirty="0"/>
-          </a:p>
-          <a:p>
-            <a:pPr algn="r" indent="0" marL="0">
-              <a:spcAft>
-                <a:spcPts val="1000"/>
-              </a:spcAft>
-              <a:buNone/>
-            </a:pPr>
-            <a:r>
-              <a:rPr lang="en-US" sz="1600" b="1" dirty="0">
+            <a:endParaRPr lang="en-US" sz="1900" dirty="0"/>
+          </a:p>
+          <a:p>
+            <a:pPr algn="r" indent="0" marL="0">
+              <a:spcAft>
+                <a:spcPts val="1000"/>
+              </a:spcAft>
+              <a:buNone/>
+            </a:pPr>
+            <a:r>
+              <a:rPr lang="en-US" sz="1900" b="1" dirty="0">
                 <a:solidFill>
                   <a:srgbClr val="1B1F3B"/>
                 </a:solidFill>
@@ -8371,7 +8802,7 @@
               <a:buNone/>
             </a:pPr>
             <a:r>
-              <a:rPr lang="en-US" sz="1600" dirty="0">
+              <a:rPr lang="en-US" sz="1900" dirty="0">
                 <a:solidFill>
                   <a:srgbClr val="1B1F3B"/>
                 </a:solidFill>
@@ -8381,17 +8812,17 @@
               </a:rPr>
               <a:t> AI ככלי עזר צדדי, בעיקר להשלמת קוד בסיסית (Autocomplete)</a:t>
             </a:r>
-            <a:endParaRPr lang="en-US" sz="1600" dirty="0"/>
-          </a:p>
-          <a:p>
-            <a:pPr algn="r" indent="0" marL="0">
-              <a:spcAft>
-                <a:spcPts val="1000"/>
-              </a:spcAft>
-              <a:buNone/>
-            </a:pPr>
-            <a:r>
-              <a:rPr lang="en-US" sz="1600" dirty="0">
+            <a:endParaRPr lang="en-US" sz="1900" dirty="0"/>
+          </a:p>
+          <a:p>
+            <a:pPr algn="r" indent="0" marL="0">
+              <a:spcAft>
+                <a:spcPts val="1000"/>
+              </a:spcAft>
+              <a:buNone/>
+            </a:pPr>
+            <a:r>
+              <a:rPr lang="en-US" sz="1900" dirty="0">
                 <a:solidFill>
                   <a:srgbClr val="1B1F3B"/>
                 </a:solidFill>
@@ -8401,7 +8832,7 @@
               </a:rPr>
               <a:t>• ההבדל אינו כמותי אלא מהותי — זה לא תוספת לתהליך הקיים, זהו תהליך חדש</a:t>
             </a:r>
-            <a:endParaRPr lang="en-US" sz="1600" dirty="0"/>
+            <a:endParaRPr lang="en-US" sz="1900" dirty="0"/>
           </a:p>
         </p:txBody>
       </p:sp>
@@ -8437,7 +8868,7 @@
         <p:spPr>
           <a:xfrm>
             <a:off x="548640" y="4023360"/>
-            <a:ext cx="11091672" cy="777240"/>
+            <a:ext cx="11091672" cy="868680"/>
           </a:xfrm>
           <a:prstGeom prst="rect">
             <a:avLst/>
@@ -8453,7 +8884,7 @@
               <a:buNone/>
             </a:pPr>
             <a:r>
-              <a:rPr lang="en-US" sz="1500" dirty="0">
+              <a:rPr lang="en-US" sz="1700" dirty="0">
                 <a:solidFill>
                   <a:srgbClr val="00A88A"/>
                 </a:solidFill>
@@ -8463,7 +8894,7 @@
               </a:rPr>
               <a:t>✔ מה עושים בפועל: בכל שלב בפרויקט (לא רק בזמן הקלדה) שואלים "איך AI יכול לעזור כאן" — בתכנון, בבדיקה, בתיעוד.</a:t>
             </a:r>
-            <a:endParaRPr lang="en-US" sz="1500" dirty="0"/>
+            <a:endParaRPr lang="en-US" sz="1700" dirty="0"/>
           </a:p>
         </p:txBody>
       </p:sp>
@@ -8605,7 +9036,7 @@
               <a:buNone/>
             </a:pPr>
             <a:r>
-              <a:rPr lang="en-US" sz="1600" b="1" dirty="0">
+              <a:rPr lang="en-US" sz="1900" b="1" dirty="0">
                 <a:solidFill>
                   <a:srgbClr val="1B1F3B"/>
                 </a:solidFill>
@@ -8622,7 +9053,7 @@
               <a:buNone/>
             </a:pPr>
             <a:r>
-              <a:rPr lang="en-US" sz="1600" dirty="0">
+              <a:rPr lang="en-US" sz="1900" dirty="0">
                 <a:solidFill>
                   <a:srgbClr val="1B1F3B"/>
                 </a:solidFill>
@@ -8632,17 +9063,17 @@
               </a:rPr>
               <a:t> מהמפתחים משתמשים בכלי AI לפחות פעם בחודש</a:t>
             </a:r>
-            <a:endParaRPr lang="en-US" sz="1600" dirty="0"/>
-          </a:p>
-          <a:p>
-            <a:pPr algn="r" indent="0" marL="0">
-              <a:spcAft>
-                <a:spcPts val="1000"/>
-              </a:spcAft>
-              <a:buNone/>
-            </a:pPr>
-            <a:r>
-              <a:rPr lang="en-US" sz="1600" b="1" dirty="0">
+            <a:endParaRPr lang="en-US" sz="1900" dirty="0"/>
+          </a:p>
+          <a:p>
+            <a:pPr algn="r" indent="0" marL="0">
+              <a:spcAft>
+                <a:spcPts val="1000"/>
+              </a:spcAft>
+              <a:buNone/>
+            </a:pPr>
+            <a:r>
+              <a:rPr lang="en-US" sz="1900" b="1" dirty="0">
                 <a:solidFill>
                   <a:srgbClr val="1B1F3B"/>
                 </a:solidFill>
@@ -8659,7 +9090,7 @@
               <a:buNone/>
             </a:pPr>
             <a:r>
-              <a:rPr lang="en-US" sz="1600" dirty="0">
+              <a:rPr lang="en-US" sz="1900" dirty="0">
                 <a:solidFill>
                   <a:srgbClr val="1B1F3B"/>
                 </a:solidFill>
@@ -8669,17 +9100,17 @@
               </a:rPr>
               <a:t> מקוד הפרודקשן בתעשייה נכתב היום על ידי AI</a:t>
             </a:r>
-            <a:endParaRPr lang="en-US" sz="1600" dirty="0"/>
-          </a:p>
-          <a:p>
-            <a:pPr algn="r" indent="0" marL="0">
-              <a:spcAft>
-                <a:spcPts val="1000"/>
-              </a:spcAft>
-              <a:buNone/>
-            </a:pPr>
-            <a:r>
-              <a:rPr lang="en-US" sz="1600" b="1" dirty="0">
+            <a:endParaRPr lang="en-US" sz="1900" dirty="0"/>
+          </a:p>
+          <a:p>
+            <a:pPr algn="r" indent="0" marL="0">
+              <a:spcAft>
+                <a:spcPts val="1000"/>
+              </a:spcAft>
+              <a:buNone/>
+            </a:pPr>
+            <a:r>
+              <a:rPr lang="en-US" sz="1900" b="1" dirty="0">
                 <a:solidFill>
                   <a:srgbClr val="1B1F3B"/>
                 </a:solidFill>
@@ -8696,27 +9127,27 @@
               <a:buNone/>
             </a:pPr>
             <a:r>
-              <a:rPr lang="en-US" sz="1600" dirty="0">
-                <a:solidFill>
-                  <a:srgbClr val="1B1F3B"/>
-                </a:solidFill>
-                <a:latin typeface="Calibri" pitchFamily="34" charset="0"/>
-                <a:ea typeface="Calibri" pitchFamily="34" charset="-122"/>
-                <a:cs typeface="Calibri" pitchFamily="34" charset="-120"/>
-              </a:rPr>
-              <a:t> Pull Requests בשבוע דרך מערכת "Minions" הפנימית של Stripe</a:t>
-            </a:r>
-            <a:endParaRPr lang="en-US" sz="1600" dirty="0"/>
-          </a:p>
-          <a:p>
-            <a:pPr algn="r" indent="0" marL="0">
-              <a:spcAft>
-                <a:spcPts val="1000"/>
-              </a:spcAft>
-              <a:buNone/>
-            </a:pPr>
-            <a:r>
-              <a:rPr lang="en-US" sz="1600" b="1" dirty="0">
+              <a:rPr lang="en-US" sz="1900" dirty="0">
+                <a:solidFill>
+                  <a:srgbClr val="1B1F3B"/>
+                </a:solidFill>
+                <a:latin typeface="Calibri" pitchFamily="34" charset="0"/>
+                <a:ea typeface="Calibri" pitchFamily="34" charset="-122"/>
+                <a:cs typeface="Calibri" pitchFamily="34" charset="-120"/>
+              </a:rPr>
+              <a:t> בקשות שילוב קוד (Pull Requests) בשבוע דרך מערכת "Minions" הפנימית של Stripe</a:t>
+            </a:r>
+            <a:endParaRPr lang="en-US" sz="1900" dirty="0"/>
+          </a:p>
+          <a:p>
+            <a:pPr algn="r" indent="0" marL="0">
+              <a:spcAft>
+                <a:spcPts val="1000"/>
+              </a:spcAft>
+              <a:buNone/>
+            </a:pPr>
+            <a:r>
+              <a:rPr lang="en-US" sz="1900" b="1" dirty="0">
                 <a:solidFill>
                   <a:srgbClr val="1B1F3B"/>
                 </a:solidFill>
@@ -8733,7 +9164,7 @@
               <a:buNone/>
             </a:pPr>
             <a:r>
-              <a:rPr lang="en-US" sz="1600" dirty="0">
+              <a:rPr lang="en-US" sz="1900" dirty="0">
                 <a:solidFill>
                   <a:srgbClr val="1B1F3B"/>
                 </a:solidFill>
@@ -8743,7 +9174,7 @@
               </a:rPr>
               <a:t> מהאפליקציות הארגוניות — סוכני AI אוטונומיים עד סוף 2026 (מ-5% ב-2025, Deloitte)</a:t>
             </a:r>
-            <a:endParaRPr lang="en-US" sz="1600" dirty="0"/>
+            <a:endParaRPr lang="en-US" sz="1900" dirty="0"/>
           </a:p>
         </p:txBody>
       </p:sp>
@@ -8779,7 +9210,7 @@
         <p:spPr>
           <a:xfrm>
             <a:off x="548640" y="3749040"/>
-            <a:ext cx="11091672" cy="777240"/>
+            <a:ext cx="11091672" cy="868680"/>
           </a:xfrm>
           <a:prstGeom prst="rect">
             <a:avLst/>
@@ -8795,7 +9226,7 @@
               <a:buNone/>
             </a:pPr>
             <a:r>
-              <a:rPr lang="en-US" sz="1500" dirty="0">
+              <a:rPr lang="en-US" sz="1700" dirty="0">
                 <a:solidFill>
                   <a:srgbClr val="00A88A"/>
                 </a:solidFill>
@@ -8805,7 +9236,7 @@
               </a:rPr>
               <a:t>✔ מה עושים בפועל: זו כבר לא "טכנולוגיה חדשה שכדאי להכיר" — זו התשתית שרוב התעשייה כבר עובדת איתה.</a:t>
             </a:r>
-            <a:endParaRPr lang="en-US" sz="1500" dirty="0"/>
+            <a:endParaRPr lang="en-US" sz="1700" dirty="0"/>
           </a:p>
         </p:txBody>
       </p:sp>
@@ -8983,7 +9414,7 @@
               <a:buNone/>
             </a:pPr>
             <a:r>
-              <a:rPr lang="en-US" sz="1500" i="1" dirty="0">
+              <a:rPr lang="en-US" sz="1700" i="1" dirty="0">
                 <a:solidFill>
                   <a:srgbClr val="6B7280"/>
                 </a:solidFill>
@@ -8993,7 +9424,7 @@
               </a:rPr>
               <a:t>השאלה: למה בכלל ללמוד היסטוריה של כלים בשיעור על AI?</a:t>
             </a:r>
-            <a:endParaRPr lang="en-US" sz="1500" dirty="0"/>
+            <a:endParaRPr lang="en-US" sz="1700" dirty="0"/>
           </a:p>
         </p:txBody>
       </p:sp>
@@ -9025,24 +9456,61 @@
               <a:buNone/>
             </a:pPr>
             <a:r>
-              <a:rPr lang="en-US" sz="1600" dirty="0">
-                <a:solidFill>
-                  <a:srgbClr val="1B1F3B"/>
-                </a:solidFill>
-                <a:latin typeface="Calibri" pitchFamily="34" charset="0"/>
-                <a:ea typeface="Calibri" pitchFamily="34" charset="-122"/>
-                <a:cs typeface="Calibri" pitchFamily="34" charset="-120"/>
-              </a:rPr>
-              <a:t>• קוד מכונה → שפות עיליות → IDE + Autocomplete → Git → </a:t>
-            </a:r>
-            <a:pPr algn="r" indent="0" marL="0">
-              <a:spcAft>
-                <a:spcPts val="1000"/>
-              </a:spcAft>
-              <a:buNone/>
-            </a:pPr>
-            <a:r>
-              <a:rPr lang="en-US" sz="1600" b="1" dirty="0">
+              <a:rPr lang="en-US" sz="1900" b="1" dirty="0">
+                <a:solidFill>
+                  <a:srgbClr val="1B1F3B"/>
+                </a:solidFill>
+                <a:latin typeface="Calibri" pitchFamily="34" charset="0"/>
+                <a:ea typeface="Calibri" pitchFamily="34" charset="-122"/>
+                <a:cs typeface="Calibri" pitchFamily="34" charset="-120"/>
+              </a:rPr>
+              <a:t>• התשובה:</a:t>
+            </a:r>
+            <a:pPr algn="r" indent="0" marL="0">
+              <a:spcAft>
+                <a:spcPts val="1000"/>
+              </a:spcAft>
+              <a:buNone/>
+            </a:pPr>
+            <a:r>
+              <a:rPr lang="en-US" sz="1900" dirty="0">
+                <a:solidFill>
+                  <a:srgbClr val="1B1F3B"/>
+                </a:solidFill>
+                <a:latin typeface="Calibri" pitchFamily="34" charset="0"/>
+                <a:ea typeface="Calibri" pitchFamily="34" charset="-122"/>
+                <a:cs typeface="Calibri" pitchFamily="34" charset="-120"/>
+              </a:rPr>
+              <a:t> כי ההיסטוריה מראה שהקצב שבו כלים מתחלפים הולך ומואץ — וזו בדיוק הסיבה שהקורס מלמד תהליך עבודה (Workflow), לא כלי ספציפי אחד</a:t>
+            </a:r>
+            <a:endParaRPr lang="en-US" sz="1900" dirty="0"/>
+          </a:p>
+          <a:p>
+            <a:pPr algn="r" indent="0" marL="0">
+              <a:spcAft>
+                <a:spcPts val="1000"/>
+              </a:spcAft>
+              <a:buNone/>
+            </a:pPr>
+            <a:r>
+              <a:rPr lang="en-US" sz="1900" dirty="0">
+                <a:solidFill>
+                  <a:srgbClr val="1B1F3B"/>
+                </a:solidFill>
+                <a:latin typeface="Calibri" pitchFamily="34" charset="0"/>
+                <a:ea typeface="Calibri" pitchFamily="34" charset="-122"/>
+                <a:cs typeface="Calibri" pitchFamily="34" charset="-120"/>
+              </a:rPr>
+              <a:t>• קוד מכונה → שפות עיליות (כמו Python) → IDE + Autocomplete → Git → </a:t>
+            </a:r>
+            <a:pPr algn="r" indent="0" marL="0">
+              <a:spcAft>
+                <a:spcPts val="1000"/>
+              </a:spcAft>
+              <a:buNone/>
+            </a:pPr>
+            <a:r>
+              <a:rPr lang="en-US" sz="1900" b="1" dirty="0">
                 <a:solidFill>
                   <a:srgbClr val="1B1F3B"/>
                 </a:solidFill>
@@ -9052,27 +9520,27 @@
               </a:rPr>
               <a:t>AI Agentic</a:t>
             </a:r>
-            <a:endParaRPr lang="en-US" sz="1600" dirty="0"/>
-          </a:p>
-          <a:p>
-            <a:pPr algn="r" indent="0" marL="0">
-              <a:spcAft>
-                <a:spcPts val="1000"/>
-              </a:spcAft>
-              <a:buNone/>
-            </a:pPr>
-            <a:r>
-              <a:rPr lang="en-US" sz="1600" dirty="0">
-                <a:solidFill>
-                  <a:srgbClr val="1B1F3B"/>
-                </a:solidFill>
-                <a:latin typeface="Calibri" pitchFamily="34" charset="0"/>
-                <a:ea typeface="Calibri" pitchFamily="34" charset="-122"/>
-                <a:cs typeface="Calibri" pitchFamily="34" charset="-120"/>
-              </a:rPr>
-              <a:t>• כל קפיצה שינתה מה נחשב "עבודה של מפתח" — ולא נעצרה</a:t>
-            </a:r>
-            <a:endParaRPr lang="en-US" sz="1600" dirty="0"/>
+            <a:endParaRPr lang="en-US" sz="1900" dirty="0"/>
+          </a:p>
+          <a:p>
+            <a:pPr algn="r" indent="0" marL="0">
+              <a:spcAft>
+                <a:spcPts val="1000"/>
+              </a:spcAft>
+              <a:buNone/>
+            </a:pPr>
+            <a:r>
+              <a:rPr lang="en-US" sz="1900" dirty="0">
+                <a:solidFill>
+                  <a:srgbClr val="1B1F3B"/>
+                </a:solidFill>
+                <a:latin typeface="Calibri" pitchFamily="34" charset="0"/>
+                <a:ea typeface="Calibri" pitchFamily="34" charset="-122"/>
+                <a:cs typeface="Calibri" pitchFamily="34" charset="-120"/>
+              </a:rPr>
+              <a:t>• כל קפיצה שינתה מה נחשב "עבודה של מפתח" — ולא נעצרה. את IDE, Git ו-Autocomplete נסביר לעומק בשיעור הבא</a:t>
+            </a:r>
+            <a:endParaRPr lang="en-US" sz="1900" dirty="0"/>
           </a:p>
         </p:txBody>
       </p:sp>
@@ -9108,7 +9576,7 @@
         <p:spPr>
           <a:xfrm>
             <a:off x="548640" y="4023360"/>
-            <a:ext cx="11091672" cy="777240"/>
+            <a:ext cx="11091672" cy="868680"/>
           </a:xfrm>
           <a:prstGeom prst="rect">
             <a:avLst/>
@@ -9124,7 +9592,7 @@
               <a:buNone/>
             </a:pPr>
             <a:r>
-              <a:rPr lang="en-US" sz="1500" dirty="0">
+              <a:rPr lang="en-US" sz="1700" dirty="0">
                 <a:solidFill>
                   <a:srgbClr val="00A88A"/>
                 </a:solidFill>
@@ -9132,9 +9600,9 @@
                 <a:ea typeface="Arial" pitchFamily="34" charset="-122"/>
                 <a:cs typeface="Arial" pitchFamily="34" charset="-120"/>
               </a:rPr>
-              <a:t>✔ מה עושים בפועל: לומדים את התהליך (Workflow), לא רק את הכלי הנוכחי — כי הקפיצה הבאה כבר בדרך.</a:t>
-            </a:r>
-            <a:endParaRPr lang="en-US" sz="1500" dirty="0"/>
+              <a:t>✔ מה עושים בפועל: לומדים את התהליך, לא רק את הכלי הנוכחי — כי הקפיצה הבאה כבר בדרך. בשקף הבא נראה את הקצב הזה עם תאריכים מדויקים.</a:t>
+            </a:r>
+            <a:endParaRPr lang="en-US" sz="1700" dirty="0"/>
           </a:p>
         </p:txBody>
       </p:sp>
@@ -9188,7 +9656,7 @@
               <a:buNone/>
             </a:pPr>
             <a:r>
-              <a:rPr lang="en-US" sz="1200" i="1" dirty="0">
+              <a:rPr lang="en-US" sz="1300" i="1" dirty="0">
                 <a:solidFill>
                   <a:srgbClr val="6B7280"/>
                 </a:solidFill>
@@ -9198,7 +9666,7 @@
               </a:rPr>
               <a:t>[תמונה: רצף ויזואלי לכל עידן — כרטיסי ניקוב, IDE ראשון, ממשק Git, סוכן AI]</a:t>
             </a:r>
-            <a:endParaRPr lang="en-US" sz="1200" dirty="0"/>
+            <a:endParaRPr lang="en-US" sz="1300" dirty="0"/>
           </a:p>
         </p:txBody>
       </p:sp>
@@ -9340,7 +9808,7 @@
               <a:buNone/>
             </a:pPr>
             <a:r>
-              <a:rPr lang="en-US" sz="1600" dirty="0">
+              <a:rPr lang="en-US" sz="1900" dirty="0">
                 <a:solidFill>
                   <a:srgbClr val="1B1F3B"/>
                 </a:solidFill>
@@ -9357,7 +9825,7 @@
               <a:buNone/>
             </a:pPr>
             <a:r>
-              <a:rPr lang="en-US" sz="1600" b="1" dirty="0">
+              <a:rPr lang="en-US" sz="1900" b="1" dirty="0">
                 <a:solidFill>
                   <a:srgbClr val="1B1F3B"/>
                 </a:solidFill>
@@ -9367,17 +9835,17 @@
               </a:rPr>
               <a:t>שנות ה-70</a:t>
             </a:r>
-            <a:endParaRPr lang="en-US" sz="1600" dirty="0"/>
-          </a:p>
-          <a:p>
-            <a:pPr algn="r" indent="0" marL="0">
-              <a:spcAft>
-                <a:spcPts val="1000"/>
-              </a:spcAft>
-              <a:buNone/>
-            </a:pPr>
-            <a:r>
-              <a:rPr lang="en-US" sz="1600" dirty="0">
+            <a:endParaRPr lang="en-US" sz="1900" dirty="0"/>
+          </a:p>
+          <a:p>
+            <a:pPr algn="r" indent="0" marL="0">
+              <a:spcAft>
+                <a:spcPts val="1000"/>
+              </a:spcAft>
+              <a:buNone/>
+            </a:pPr>
+            <a:r>
+              <a:rPr lang="en-US" sz="1900" dirty="0">
                 <a:solidFill>
                   <a:srgbClr val="1B1F3B"/>
                 </a:solidFill>
@@ -9394,7 +9862,7 @@
               <a:buNone/>
             </a:pPr>
             <a:r>
-              <a:rPr lang="en-US" sz="1600" b="1" dirty="0">
+              <a:rPr lang="en-US" sz="1900" b="1" dirty="0">
                 <a:solidFill>
                   <a:srgbClr val="1B1F3B"/>
                 </a:solidFill>
@@ -9411,7 +9879,7 @@
               <a:buNone/>
             </a:pPr>
             <a:r>
-              <a:rPr lang="en-US" sz="1600" dirty="0">
+              <a:rPr lang="en-US" sz="1900" dirty="0">
                 <a:solidFill>
                   <a:srgbClr val="1B1F3B"/>
                 </a:solidFill>
@@ -9428,7 +9896,7 @@
               <a:buNone/>
             </a:pPr>
             <a:r>
-              <a:rPr lang="en-US" sz="1600" b="1" dirty="0">
+              <a:rPr lang="en-US" sz="1900" b="1" dirty="0">
                 <a:solidFill>
                   <a:srgbClr val="1B1F3B"/>
                 </a:solidFill>
@@ -9438,17 +9906,17 @@
               </a:rPr>
               <a:t>2008</a:t>
             </a:r>
-            <a:endParaRPr lang="en-US" sz="1600" dirty="0"/>
-          </a:p>
-          <a:p>
-            <a:pPr algn="r" indent="0" marL="0">
-              <a:spcAft>
-                <a:spcPts val="1000"/>
-              </a:spcAft>
-              <a:buNone/>
-            </a:pPr>
-            <a:r>
-              <a:rPr lang="en-US" sz="1600" dirty="0">
+            <a:endParaRPr lang="en-US" sz="1900" dirty="0"/>
+          </a:p>
+          <a:p>
+            <a:pPr algn="r" indent="0" marL="0">
+              <a:spcAft>
+                <a:spcPts val="1000"/>
+              </a:spcAft>
+              <a:buNone/>
+            </a:pPr>
+            <a:r>
+              <a:rPr lang="en-US" sz="1900" dirty="0">
                 <a:solidFill>
                   <a:srgbClr val="1B1F3B"/>
                 </a:solidFill>
@@ -9465,7 +9933,7 @@
               <a:buNone/>
             </a:pPr>
             <a:r>
-              <a:rPr lang="en-US" sz="1600" b="1" dirty="0">
+              <a:rPr lang="en-US" sz="1900" b="1" dirty="0">
                 <a:solidFill>
                   <a:srgbClr val="1B1F3B"/>
                 </a:solidFill>
@@ -9475,17 +9943,17 @@
               </a:rPr>
               <a:t>יוני 2021</a:t>
             </a:r>
-            <a:endParaRPr lang="en-US" sz="1600" dirty="0"/>
-          </a:p>
-          <a:p>
-            <a:pPr algn="r" indent="0" marL="0">
-              <a:spcAft>
-                <a:spcPts val="1000"/>
-              </a:spcAft>
-              <a:buNone/>
-            </a:pPr>
-            <a:r>
-              <a:rPr lang="en-US" sz="1600" dirty="0">
+            <a:endParaRPr lang="en-US" sz="1900" dirty="0"/>
+          </a:p>
+          <a:p>
+            <a:pPr algn="r" indent="0" marL="0">
+              <a:spcAft>
+                <a:spcPts val="1000"/>
+              </a:spcAft>
+              <a:buNone/>
+            </a:pPr>
+            <a:r>
+              <a:rPr lang="en-US" sz="1900" dirty="0">
                 <a:solidFill>
                   <a:srgbClr val="1B1F3B"/>
                 </a:solidFill>
@@ -9502,7 +9970,7 @@
               <a:buNone/>
             </a:pPr>
             <a:r>
-              <a:rPr lang="en-US" sz="1600" b="1" dirty="0">
+              <a:rPr lang="en-US" sz="1900" b="1" dirty="0">
                 <a:solidFill>
                   <a:srgbClr val="1B1F3B"/>
                 </a:solidFill>
@@ -9512,17 +9980,17 @@
               </a:rPr>
               <a:t>נובמבר 2022</a:t>
             </a:r>
-            <a:endParaRPr lang="en-US" sz="1600" dirty="0"/>
-          </a:p>
-          <a:p>
-            <a:pPr algn="r" indent="0" marL="0">
-              <a:spcAft>
-                <a:spcPts val="1000"/>
-              </a:spcAft>
-              <a:buNone/>
-            </a:pPr>
-            <a:r>
-              <a:rPr lang="en-US" sz="1600" dirty="0">
+            <a:endParaRPr lang="en-US" sz="1900" dirty="0"/>
+          </a:p>
+          <a:p>
+            <a:pPr algn="r" indent="0" marL="0">
+              <a:spcAft>
+                <a:spcPts val="1000"/>
+              </a:spcAft>
+              <a:buNone/>
+            </a:pPr>
+            <a:r>
+              <a:rPr lang="en-US" sz="1900" dirty="0">
                 <a:solidFill>
                   <a:srgbClr val="1B1F3B"/>
                 </a:solidFill>
@@ -9539,7 +10007,7 @@
               <a:buNone/>
             </a:pPr>
             <a:r>
-              <a:rPr lang="en-US" sz="1600" b="1" dirty="0">
+              <a:rPr lang="en-US" sz="1900" b="1" dirty="0">
                 <a:solidFill>
                   <a:srgbClr val="1B1F3B"/>
                 </a:solidFill>
@@ -9549,7 +10017,7 @@
               </a:rPr>
               <a:t>2024-2026</a:t>
             </a:r>
-            <a:endParaRPr lang="en-US" sz="1600" dirty="0"/>
+            <a:endParaRPr lang="en-US" sz="1900" dirty="0"/>
           </a:p>
         </p:txBody>
       </p:sp>
@@ -9585,7 +10053,7 @@
         <p:spPr>
           <a:xfrm>
             <a:off x="548640" y="3749040"/>
-            <a:ext cx="11091672" cy="777240"/>
+            <a:ext cx="11091672" cy="868680"/>
           </a:xfrm>
           <a:prstGeom prst="rect">
             <a:avLst/>
@@ -9601,7 +10069,7 @@
               <a:buNone/>
             </a:pPr>
             <a:r>
-              <a:rPr lang="en-US" sz="1500" dirty="0">
+              <a:rPr lang="en-US" sz="1700" dirty="0">
                 <a:solidFill>
                   <a:srgbClr val="00A88A"/>
                 </a:solidFill>
@@ -9611,7 +10079,7 @@
               </a:rPr>
               <a:t>✔ מה עושים בפועל: מ-IDE ל-Git: ~30 שנה. מ-Git ל-Copilot: ~16 שנה. מ-Copilot לאג'נטי: ~3 שנים בלבד.</a:t>
             </a:r>
-            <a:endParaRPr lang="en-US" sz="1500" dirty="0"/>
+            <a:endParaRPr lang="en-US" sz="1700" dirty="0"/>
           </a:p>
         </p:txBody>
       </p:sp>
@@ -9789,7 +10257,7 @@
               <a:buNone/>
             </a:pPr>
             <a:r>
-              <a:rPr lang="en-US" sz="1500" i="1" dirty="0">
+              <a:rPr lang="en-US" sz="1700" i="1" dirty="0">
                 <a:solidFill>
                   <a:srgbClr val="6B7280"/>
                 </a:solidFill>
@@ -9799,7 +10267,7 @@
               </a:rPr>
               <a:t>השאלה: אז למה בכלל להשתמש בזה?</a:t>
             </a:r>
-            <a:endParaRPr lang="en-US" sz="1500" dirty="0"/>
+            <a:endParaRPr lang="en-US" sz="1700" dirty="0"/>
           </a:p>
         </p:txBody>
       </p:sp>
@@ -9831,7 +10299,7 @@
               <a:buNone/>
             </a:pPr>
             <a:r>
-              <a:rPr lang="en-US" sz="1600" b="1" dirty="0">
+              <a:rPr lang="en-US" sz="1900" b="1" dirty="0">
                 <a:solidFill>
                   <a:srgbClr val="1B1F3B"/>
                 </a:solidFill>
@@ -9848,7 +10316,7 @@
               <a:buNone/>
             </a:pPr>
             <a:r>
-              <a:rPr lang="en-US" sz="1600" dirty="0">
+              <a:rPr lang="en-US" sz="1900" dirty="0">
                 <a:solidFill>
                   <a:srgbClr val="1B1F3B"/>
                 </a:solidFill>
@@ -9858,17 +10326,17 @@
               </a:rPr>
               <a:t> משימות שלקחו ימים — עכשיו לוקחות דקות</a:t>
             </a:r>
-            <a:endParaRPr lang="en-US" sz="1600" dirty="0"/>
-          </a:p>
-          <a:p>
-            <a:pPr algn="r" indent="0" marL="0">
-              <a:spcAft>
-                <a:spcPts val="1000"/>
-              </a:spcAft>
-              <a:buNone/>
-            </a:pPr>
-            <a:r>
-              <a:rPr lang="en-US" sz="1600" b="1" dirty="0">
+            <a:endParaRPr lang="en-US" sz="1900" dirty="0"/>
+          </a:p>
+          <a:p>
+            <a:pPr algn="r" indent="0" marL="0">
+              <a:spcAft>
+                <a:spcPts val="1000"/>
+              </a:spcAft>
+              <a:buNone/>
+            </a:pPr>
+            <a:r>
+              <a:rPr lang="en-US" sz="1900" b="1" dirty="0">
                 <a:solidFill>
                   <a:srgbClr val="1B1F3B"/>
                 </a:solidFill>
@@ -9885,7 +10353,7 @@
               <a:buNone/>
             </a:pPr>
             <a:r>
-              <a:rPr lang="en-US" sz="1600" dirty="0">
+              <a:rPr lang="en-US" sz="1900" dirty="0">
                 <a:solidFill>
                   <a:srgbClr val="1B1F3B"/>
                 </a:solidFill>
@@ -9895,17 +10363,17 @@
               </a:rPr>
               <a:t> אפשר להתחיל בלי רקע תכנותי עמוק</a:t>
             </a:r>
-            <a:endParaRPr lang="en-US" sz="1600" dirty="0"/>
-          </a:p>
-          <a:p>
-            <a:pPr algn="r" indent="0" marL="0">
-              <a:spcAft>
-                <a:spcPts val="1000"/>
-              </a:spcAft>
-              <a:buNone/>
-            </a:pPr>
-            <a:r>
-              <a:rPr lang="en-US" sz="1600" b="1" dirty="0">
+            <a:endParaRPr lang="en-US" sz="1900" dirty="0"/>
+          </a:p>
+          <a:p>
+            <a:pPr algn="r" indent="0" marL="0">
+              <a:spcAft>
+                <a:spcPts val="1000"/>
+              </a:spcAft>
+              <a:buNone/>
+            </a:pPr>
+            <a:r>
+              <a:rPr lang="en-US" sz="1900" b="1" dirty="0">
                 <a:solidFill>
                   <a:srgbClr val="1B1F3B"/>
                 </a:solidFill>
@@ -9922,7 +10390,7 @@
               <a:buNone/>
             </a:pPr>
             <a:r>
-              <a:rPr lang="en-US" sz="1600" dirty="0">
+              <a:rPr lang="en-US" sz="1900" dirty="0">
                 <a:solidFill>
                   <a:srgbClr val="1B1F3B"/>
                 </a:solidFill>
@@ -9932,7 +10400,7 @@
               </a:rPr>
               <a:t> פחות זמן על קוד חוזר וסטנדרטי, יותר על החלטות</a:t>
             </a:r>
-            <a:endParaRPr lang="en-US" sz="1600" dirty="0"/>
+            <a:endParaRPr lang="en-US" sz="1900" dirty="0"/>
           </a:p>
         </p:txBody>
       </p:sp>
@@ -9968,7 +10436,7 @@
         <p:spPr>
           <a:xfrm>
             <a:off x="548640" y="4023360"/>
-            <a:ext cx="11091672" cy="777240"/>
+            <a:ext cx="11091672" cy="868680"/>
           </a:xfrm>
           <a:prstGeom prst="rect">
             <a:avLst/>
@@ -9984,7 +10452,7 @@
               <a:buNone/>
             </a:pPr>
             <a:r>
-              <a:rPr lang="en-US" sz="1500" dirty="0">
+              <a:rPr lang="en-US" sz="1700" dirty="0">
                 <a:solidFill>
                   <a:srgbClr val="00A88A"/>
                 </a:solidFill>
@@ -9994,7 +10462,7 @@
               </a:rPr>
               <a:t>✔ מה עושים בפועל: משתמשים ביתרון הזה במקום הנכון — קוד סטנדרטי זה מקום מצוין ל-AI; החלטות ארכיטקטורה נשארות אצלכם.</a:t>
             </a:r>
-            <a:endParaRPr lang="en-US" sz="1500" dirty="0"/>
+            <a:endParaRPr lang="en-US" sz="1700" dirty="0"/>
           </a:p>
         </p:txBody>
       </p:sp>
@@ -10048,7 +10516,7 @@
               <a:buNone/>
             </a:pPr>
             <a:r>
-              <a:rPr lang="en-US" sz="1200" i="1" dirty="0">
+              <a:rPr lang="en-US" sz="1300" i="1" dirty="0">
                 <a:solidFill>
                   <a:srgbClr val="6B7280"/>
                 </a:solidFill>
@@ -10058,7 +10526,7 @@
               </a:rPr>
               <a:t>[תמונה: השוואת ״לפני / אחרי״ — זמן פיתוח שהצטמצם מימים לדקות]</a:t>
             </a:r>
-            <a:endParaRPr lang="en-US" sz="1200" dirty="0"/>
+            <a:endParaRPr lang="en-US" sz="1300" dirty="0"/>
           </a:p>
         </p:txBody>
       </p:sp>
@@ -10197,7 +10665,7 @@
               <a:buNone/>
             </a:pPr>
             <a:r>
-              <a:rPr lang="en-US" sz="1500" i="1" dirty="0">
+              <a:rPr lang="en-US" sz="1700" i="1" dirty="0">
                 <a:solidFill>
                   <a:srgbClr val="6B7280"/>
                 </a:solidFill>
@@ -10207,7 +10675,7 @@
               </a:rPr>
               <a:t>השאלה: אם AI כל כך טוב, למה לא סתם לתת לו לעבוד לבד?</a:t>
             </a:r>
-            <a:endParaRPr lang="en-US" sz="1500" dirty="0"/>
+            <a:endParaRPr lang="en-US" sz="1700" dirty="0"/>
           </a:p>
         </p:txBody>
       </p:sp>
@@ -10239,7 +10707,7 @@
               <a:buNone/>
             </a:pPr>
             <a:r>
-              <a:rPr lang="en-US" sz="1600" dirty="0">
+              <a:rPr lang="en-US" sz="1900" dirty="0">
                 <a:solidFill>
                   <a:srgbClr val="1B1F3B"/>
                 </a:solidFill>
@@ -10249,17 +10717,17 @@
               </a:rPr>
               <a:t>• שוכח הקשר בלי Context מנוהל (נעמיק בשיעור 3)</a:t>
             </a:r>
-            <a:endParaRPr lang="en-US" sz="1600" dirty="0"/>
-          </a:p>
-          <a:p>
-            <a:pPr algn="r" indent="0" marL="0">
-              <a:spcAft>
-                <a:spcPts val="1000"/>
-              </a:spcAft>
-              <a:buNone/>
-            </a:pPr>
-            <a:r>
-              <a:rPr lang="en-US" sz="1600" dirty="0">
+            <a:endParaRPr lang="en-US" sz="1900" dirty="0"/>
+          </a:p>
+          <a:p>
+            <a:pPr algn="r" indent="0" marL="0">
+              <a:spcAft>
+                <a:spcPts val="1000"/>
+              </a:spcAft>
+              <a:buNone/>
+            </a:pPr>
+            <a:r>
+              <a:rPr lang="en-US" sz="1900" dirty="0">
                 <a:solidFill>
                   <a:srgbClr val="1B1F3B"/>
                 </a:solidFill>
@@ -10269,17 +10737,17 @@
               </a:rPr>
               <a:t>• קוד שרץ ≠ קוד נכון — "עובד" ו"נכון" הם שני דברים שונים</a:t>
             </a:r>
-            <a:endParaRPr lang="en-US" sz="1600" dirty="0"/>
-          </a:p>
-          <a:p>
-            <a:pPr algn="r" indent="0" marL="0">
-              <a:spcAft>
-                <a:spcPts val="1000"/>
-              </a:spcAft>
-              <a:buNone/>
-            </a:pPr>
-            <a:r>
-              <a:rPr lang="en-US" sz="1600" dirty="0">
+            <a:endParaRPr lang="en-US" sz="1900" dirty="0"/>
+          </a:p>
+          <a:p>
+            <a:pPr algn="r" indent="0" marL="0">
+              <a:spcAft>
+                <a:spcPts val="1000"/>
+              </a:spcAft>
+              <a:buNone/>
+            </a:pPr>
+            <a:r>
+              <a:rPr lang="en-US" sz="1900" dirty="0">
                 <a:solidFill>
                   <a:srgbClr val="1B1F3B"/>
                 </a:solidFill>
@@ -10289,17 +10757,17 @@
               </a:rPr>
               <a:t>• תלות בכלי שמשתנה מהר (נדבר על זה בעוד כמה שקפים)</a:t>
             </a:r>
-            <a:endParaRPr lang="en-US" sz="1600" dirty="0"/>
-          </a:p>
-          <a:p>
-            <a:pPr algn="r" indent="0" marL="0">
-              <a:spcAft>
-                <a:spcPts val="1000"/>
-              </a:spcAft>
-              <a:buNone/>
-            </a:pPr>
-            <a:r>
-              <a:rPr lang="en-US" sz="1600" dirty="0">
+            <a:endParaRPr lang="en-US" sz="1900" dirty="0"/>
+          </a:p>
+          <a:p>
+            <a:pPr algn="r" indent="0" marL="0">
+              <a:spcAft>
+                <a:spcPts val="1000"/>
+              </a:spcAft>
+              <a:buNone/>
+            </a:pPr>
+            <a:r>
+              <a:rPr lang="en-US" sz="1900" dirty="0">
                 <a:solidFill>
                   <a:srgbClr val="1B1F3B"/>
                 </a:solidFill>
@@ -10316,7 +10784,7 @@
               <a:buNone/>
             </a:pPr>
             <a:r>
-              <a:rPr lang="en-US" sz="1600" b="1" dirty="0">
+              <a:rPr lang="en-US" sz="1900" b="1" dirty="0">
                 <a:solidFill>
                   <a:srgbClr val="1B1F3B"/>
                 </a:solidFill>
@@ -10326,7 +10794,7 @@
               </a:rPr>
               <a:t>Hallucination</a:t>
             </a:r>
-            <a:endParaRPr lang="en-US" sz="1600" dirty="0"/>
+            <a:endParaRPr lang="en-US" sz="1900" dirty="0"/>
           </a:p>
         </p:txBody>
       </p:sp>
@@ -10362,7 +10830,7 @@
         <p:spPr>
           <a:xfrm>
             <a:off x="548640" y="4023360"/>
-            <a:ext cx="11091672" cy="777240"/>
+            <a:ext cx="11091672" cy="868680"/>
           </a:xfrm>
           <a:prstGeom prst="rect">
             <a:avLst/>
@@ -10378,7 +10846,7 @@
               <a:buNone/>
             </a:pPr>
             <a:r>
-              <a:rPr lang="en-US" sz="1500" dirty="0">
+              <a:rPr lang="en-US" sz="1700" dirty="0">
                 <a:solidFill>
                   <a:srgbClr val="00A88A"/>
                 </a:solidFill>
@@ -10388,7 +10856,7 @@
               </a:rPr>
               <a:t>✔ מה עושים בפועל: כל אחת מהמגבלות האלה היא סיבה לשלב Review אנושי בתהליך — לא סיבה לוותר על AI לגמרי.</a:t>
             </a:r>
-            <a:endParaRPr lang="en-US" sz="1500" dirty="0"/>
+            <a:endParaRPr lang="en-US" sz="1700" dirty="0"/>
           </a:p>
         </p:txBody>
       </p:sp>

--- a/lesson_01/lesson_01_slides.pptx
+++ b/lesson_01/lesson_01_slides.pptx
@@ -2921,7 +2921,7 @@
           <a:bodyPr wrap="square" lIns="0" tIns="0" rIns="0" bIns="0" rtlCol="0" anchor="ctr"/>
           <a:lstStyle/>
           <a:p>
-            <a:pPr algn="r" indent="0" marL="0">
+            <a:pPr rtl="1" algn="r" indent="0" marL="0">
               <a:spcAft>
                 <a:spcPts val="800"/>
               </a:spcAft>
@@ -2941,7 +2941,7 @@
             <a:endParaRPr lang="en-US" sz="1700" dirty="0"/>
           </a:p>
           <a:p>
-            <a:pPr algn="r" indent="0" marL="0">
+            <a:pPr rtl="1" algn="r" indent="0" marL="0">
               <a:spcAft>
                 <a:spcPts val="800"/>
               </a:spcAft>
@@ -2961,7 +2961,7 @@
             <a:endParaRPr lang="en-US" sz="1700" dirty="0"/>
           </a:p>
           <a:p>
-            <a:pPr algn="r" indent="0" marL="0">
+            <a:pPr rtl="1" algn="r" indent="0" marL="0">
               <a:spcAft>
                 <a:spcPts val="800"/>
               </a:spcAft>
@@ -2981,7 +2981,7 @@
             <a:endParaRPr lang="en-US" sz="1700" dirty="0"/>
           </a:p>
           <a:p>
-            <a:pPr algn="r" indent="0" marL="0">
+            <a:pPr rtl="1" algn="r" indent="0" marL="0">
               <a:spcAft>
                 <a:spcPts val="800"/>
               </a:spcAft>
@@ -3197,7 +3197,7 @@
           <a:bodyPr wrap="square" lIns="0" tIns="0" rIns="0" bIns="0" rtlCol="0" anchor="ctr"/>
           <a:lstStyle/>
           <a:p>
-            <a:pPr algn="r" indent="0" marL="0">
+            <a:pPr rtl="1" algn="r" indent="0" marL="0">
               <a:buNone/>
             </a:pPr>
             <a:r>
@@ -3236,7 +3236,7 @@
           <a:bodyPr wrap="square" lIns="0" tIns="0" rIns="0" bIns="0" rtlCol="0" anchor="ctr"/>
           <a:lstStyle/>
           <a:p>
-            <a:pPr algn="r" indent="0" marL="0">
+            <a:pPr rtl="1" algn="r" indent="0" marL="0">
               <a:spcAft>
                 <a:spcPts val="1000"/>
               </a:spcAft>
@@ -3256,7 +3256,7 @@
             <a:endParaRPr lang="en-US" sz="1900" dirty="0"/>
           </a:p>
           <a:p>
-            <a:pPr algn="r" indent="0" marL="0">
+            <a:pPr rtl="1" algn="r" indent="0" marL="0">
               <a:spcAft>
                 <a:spcPts val="1000"/>
               </a:spcAft>
@@ -3276,7 +3276,7 @@
             <a:endParaRPr lang="en-US" sz="1900" dirty="0"/>
           </a:p>
           <a:p>
-            <a:pPr algn="r" indent="0" marL="0">
+            <a:pPr rtl="1" algn="r" indent="0" marL="0">
               <a:spcAft>
                 <a:spcPts val="1000"/>
               </a:spcAft>
@@ -3293,7 +3293,7 @@
               </a:rPr>
               <a:t>• זה קורה </a:t>
             </a:r>
-            <a:pPr algn="r" indent="0" marL="0">
+            <a:pPr rtl="1" algn="r" indent="0" marL="0">
               <a:spcAft>
                 <a:spcPts val="1000"/>
               </a:spcAft>
@@ -3310,7 +3310,7 @@
               </a:rPr>
               <a:t>בביטחון מלא</a:t>
             </a:r>
-            <a:pPr algn="r" indent="0" marL="0">
+            <a:pPr rtl="1" algn="r" indent="0" marL="0">
               <a:spcAft>
                 <a:spcPts val="1000"/>
               </a:spcAft>
@@ -3375,7 +3375,7 @@
           <a:bodyPr wrap="square" lIns="0" tIns="0" rIns="0" bIns="0" rtlCol="0" anchor="ctr"/>
           <a:lstStyle/>
           <a:p>
-            <a:pPr algn="r" indent="0" marL="0">
+            <a:pPr rtl="1" algn="r" indent="0" marL="0">
               <a:buNone/>
             </a:pPr>
             <a:r>
@@ -3588,7 +3588,7 @@
           <a:bodyPr wrap="square" lIns="0" tIns="0" rIns="0" bIns="0" rtlCol="0" anchor="ctr"/>
           <a:lstStyle/>
           <a:p>
-            <a:pPr algn="r" indent="0" marL="0">
+            <a:pPr rtl="1" algn="r" indent="0" marL="0">
               <a:spcAft>
                 <a:spcPts val="1000"/>
               </a:spcAft>
@@ -3605,7 +3605,7 @@
               </a:rPr>
               <a:t>• 84%</a:t>
             </a:r>
-            <a:pPr algn="r" indent="0" marL="0">
+            <a:pPr rtl="1" algn="r" indent="0" marL="0">
               <a:spcAft>
                 <a:spcPts val="1000"/>
               </a:spcAft>
@@ -3625,7 +3625,7 @@
             <a:endParaRPr lang="en-US" sz="1900" dirty="0"/>
           </a:p>
           <a:p>
-            <a:pPr algn="r" indent="0" marL="0">
+            <a:pPr rtl="1" algn="r" indent="0" marL="0">
               <a:spcAft>
                 <a:spcPts val="1000"/>
               </a:spcAft>
@@ -3642,7 +3642,7 @@
               </a:rPr>
               <a:t>• אבל רק </a:t>
             </a:r>
-            <a:pPr algn="r" indent="0" marL="0">
+            <a:pPr rtl="1" algn="r" indent="0" marL="0">
               <a:spcAft>
                 <a:spcPts val="1000"/>
               </a:spcAft>
@@ -3659,7 +3659,7 @@
               </a:rPr>
               <a:t>29%</a:t>
             </a:r>
-            <a:pPr algn="r" indent="0" marL="0">
+            <a:pPr rtl="1" algn="r" indent="0" marL="0">
               <a:spcAft>
                 <a:spcPts val="1000"/>
               </a:spcAft>
@@ -3679,7 +3679,7 @@
             <a:endParaRPr lang="en-US" sz="1900" dirty="0"/>
           </a:p>
           <a:p>
-            <a:pPr algn="r" indent="0" marL="0">
+            <a:pPr rtl="1" algn="r" indent="0" marL="0">
               <a:spcAft>
                 <a:spcPts val="1000"/>
               </a:spcAft>
@@ -3696,7 +3696,7 @@
               </a:rPr>
               <a:t>• 61%</a:t>
             </a:r>
-            <a:pPr algn="r" indent="0" marL="0">
+            <a:pPr rtl="1" algn="r" indent="0" marL="0">
               <a:spcAft>
                 <a:spcPts val="1000"/>
               </a:spcAft>
@@ -3716,7 +3716,7 @@
             <a:endParaRPr lang="en-US" sz="1900" dirty="0"/>
           </a:p>
           <a:p>
-            <a:pPr algn="r" indent="0" marL="0">
+            <a:pPr rtl="1" algn="r" indent="0" marL="0">
               <a:spcAft>
                 <a:spcPts val="1000"/>
               </a:spcAft>
@@ -3733,7 +3733,7 @@
               </a:rPr>
               <a:t>• קוד AI-heavy: </a:t>
             </a:r>
-            <a:pPr algn="r" indent="0" marL="0">
+            <a:pPr rtl="1" algn="r" indent="0" marL="0">
               <a:spcAft>
                 <a:spcPts val="1000"/>
               </a:spcAft>
@@ -3750,7 +3750,7 @@
               </a:rPr>
               <a:t>41%+</a:t>
             </a:r>
-            <a:pPr algn="r" indent="0" marL="0">
+            <a:pPr rtl="1" algn="r" indent="0" marL="0">
               <a:spcAft>
                 <a:spcPts val="1000"/>
               </a:spcAft>
@@ -3767,7 +3767,7 @@
               </a:rPr>
               <a:t> באגים, </a:t>
             </a:r>
-            <a:pPr algn="r" indent="0" marL="0">
+            <a:pPr rtl="1" algn="r" indent="0" marL="0">
               <a:spcAft>
                 <a:spcPts val="1000"/>
               </a:spcAft>
@@ -3784,7 +3784,7 @@
               </a:rPr>
               <a:t>7.2%-</a:t>
             </a:r>
-            <a:pPr algn="r" indent="0" marL="0">
+            <a:pPr rtl="1" algn="r" indent="0" marL="0">
               <a:spcAft>
                 <a:spcPts val="1000"/>
               </a:spcAft>
@@ -3849,7 +3849,7 @@
           <a:bodyPr wrap="square" lIns="0" tIns="0" rIns="0" bIns="0" rtlCol="0" anchor="ctr"/>
           <a:lstStyle/>
           <a:p>
-            <a:pPr algn="r" indent="0" marL="0">
+            <a:pPr rtl="1" algn="r" indent="0" marL="0">
               <a:buNone/>
             </a:pPr>
             <a:r>
@@ -4037,7 +4037,7 @@
           <a:bodyPr wrap="square" lIns="0" tIns="0" rIns="0" bIns="0" rtlCol="0" anchor="ctr"/>
           <a:lstStyle/>
           <a:p>
-            <a:pPr algn="r" indent="0" marL="0">
+            <a:pPr rtl="1" algn="r" indent="0" marL="0">
               <a:buNone/>
             </a:pPr>
             <a:r>
@@ -4076,7 +4076,7 @@
           <a:bodyPr wrap="square" lIns="0" tIns="0" rIns="0" bIns="0" rtlCol="0" anchor="ctr"/>
           <a:lstStyle/>
           <a:p>
-            <a:pPr algn="r" indent="0" marL="0">
+            <a:pPr rtl="1" algn="r" indent="0" marL="0">
               <a:spcAft>
                 <a:spcPts val="1000"/>
               </a:spcAft>
@@ -4096,7 +4096,7 @@
             <a:endParaRPr lang="en-US" sz="1900" dirty="0"/>
           </a:p>
           <a:p>
-            <a:pPr algn="r" indent="0" marL="0">
+            <a:pPr rtl="1" algn="r" indent="0" marL="0">
               <a:spcAft>
                 <a:spcPts val="1000"/>
               </a:spcAft>
@@ -4113,7 +4113,7 @@
               </a:rPr>
               <a:t>• בפועל: </a:t>
             </a:r>
-            <a:pPr algn="r" indent="0" marL="0">
+            <a:pPr rtl="1" algn="r" indent="0" marL="0">
               <a:spcAft>
                 <a:spcPts val="1000"/>
               </a:spcAft>
@@ -4133,7 +4133,7 @@
             <a:endParaRPr lang="en-US" sz="1900" dirty="0"/>
           </a:p>
           <a:p>
-            <a:pPr algn="r" indent="0" marL="0">
+            <a:pPr rtl="1" algn="r" indent="0" marL="0">
               <a:spcAft>
                 <a:spcPts val="1000"/>
               </a:spcAft>
@@ -4150,7 +4150,7 @@
               </a:rPr>
               <a:t>• אבל האמינו: </a:t>
             </a:r>
-            <a:pPr algn="r" indent="0" marL="0">
+            <a:pPr rtl="1" algn="r" indent="0" marL="0">
               <a:spcAft>
                 <a:spcPts val="1000"/>
               </a:spcAft>
@@ -4215,7 +4215,7 @@
           <a:bodyPr wrap="square" lIns="0" tIns="0" rIns="0" bIns="0" rtlCol="0" anchor="ctr"/>
           <a:lstStyle/>
           <a:p>
-            <a:pPr algn="r" indent="0" marL="0">
+            <a:pPr rtl="1" algn="r" indent="0" marL="0">
               <a:buNone/>
             </a:pPr>
             <a:r>
@@ -4403,7 +4403,7 @@
           <a:bodyPr wrap="square" lIns="0" tIns="0" rIns="0" bIns="0" rtlCol="0" anchor="ctr"/>
           <a:lstStyle/>
           <a:p>
-            <a:pPr algn="r" indent="0" marL="0">
+            <a:pPr rtl="1" algn="r" indent="0" marL="0">
               <a:buNone/>
             </a:pPr>
             <a:r>
@@ -4442,7 +4442,7 @@
           <a:bodyPr wrap="square" lIns="0" tIns="0" rIns="0" bIns="0" rtlCol="0" anchor="ctr"/>
           <a:lstStyle/>
           <a:p>
-            <a:pPr algn="r" indent="0" marL="0">
+            <a:pPr rtl="1" algn="r" indent="0" marL="0">
               <a:spcAft>
                 <a:spcPts val="1000"/>
               </a:spcAft>
@@ -4459,7 +4459,7 @@
               </a:rPr>
               <a:t>• 1. הבנת הבעיה</a:t>
             </a:r>
-            <a:pPr algn="r" indent="0" marL="0">
+            <a:pPr rtl="1" algn="r" indent="0" marL="0">
               <a:spcAft>
                 <a:spcPts val="1000"/>
               </a:spcAft>
@@ -4479,7 +4479,7 @@
             <a:endParaRPr lang="en-US" sz="1900" dirty="0"/>
           </a:p>
           <a:p>
-            <a:pPr algn="r" indent="0" marL="0">
+            <a:pPr rtl="1" algn="r" indent="0" marL="0">
               <a:spcAft>
                 <a:spcPts val="1000"/>
               </a:spcAft>
@@ -4496,7 +4496,7 @@
               </a:rPr>
               <a:t>• 2. Specification</a:t>
             </a:r>
-            <a:pPr algn="r" indent="0" marL="0">
+            <a:pPr rtl="1" algn="r" indent="0" marL="0">
               <a:spcAft>
                 <a:spcPts val="1000"/>
               </a:spcAft>
@@ -4516,7 +4516,7 @@
             <a:endParaRPr lang="en-US" sz="1900" dirty="0"/>
           </a:p>
           <a:p>
-            <a:pPr algn="r" indent="0" marL="0">
+            <a:pPr rtl="1" algn="r" indent="0" marL="0">
               <a:spcAft>
                 <a:spcPts val="1000"/>
               </a:spcAft>
@@ -4533,7 +4533,7 @@
               </a:rPr>
               <a:t>• 3. בניית Context</a:t>
             </a:r>
-            <a:pPr algn="r" indent="0" marL="0">
+            <a:pPr rtl="1" algn="r" indent="0" marL="0">
               <a:spcAft>
                 <a:spcPts val="1000"/>
               </a:spcAft>
@@ -4553,7 +4553,7 @@
             <a:endParaRPr lang="en-US" sz="1900" dirty="0"/>
           </a:p>
           <a:p>
-            <a:pPr algn="r" indent="0" marL="0">
+            <a:pPr rtl="1" algn="r" indent="0" marL="0">
               <a:spcAft>
                 <a:spcPts val="1000"/>
               </a:spcAft>
@@ -4570,7 +4570,7 @@
               </a:rPr>
               <a:t>• 4. תכנון עם AI</a:t>
             </a:r>
-            <a:pPr algn="r" indent="0" marL="0">
+            <a:pPr rtl="1" algn="r" indent="0" marL="0">
               <a:spcAft>
                 <a:spcPts val="1000"/>
               </a:spcAft>
@@ -4590,7 +4590,7 @@
             <a:endParaRPr lang="en-US" sz="1900" dirty="0"/>
           </a:p>
           <a:p>
-            <a:pPr algn="r" indent="0" marL="0">
+            <a:pPr rtl="1" algn="r" indent="0" marL="0">
               <a:spcAft>
                 <a:spcPts val="1000"/>
               </a:spcAft>
@@ -4607,7 +4607,7 @@
               </a:rPr>
               <a:t>• 5. מימוש עם AI</a:t>
             </a:r>
-            <a:pPr algn="r" indent="0" marL="0">
+            <a:pPr rtl="1" algn="r" indent="0" marL="0">
               <a:spcAft>
                 <a:spcPts val="1000"/>
               </a:spcAft>
@@ -4672,7 +4672,7 @@
           <a:bodyPr wrap="square" lIns="0" tIns="0" rIns="0" bIns="0" rtlCol="0" anchor="ctr"/>
           <a:lstStyle/>
           <a:p>
-            <a:pPr algn="r" indent="0" marL="0">
+            <a:pPr rtl="1" algn="r" indent="0" marL="0">
               <a:buNone/>
             </a:pPr>
             <a:r>
@@ -4821,7 +4821,7 @@
           <a:bodyPr wrap="square" lIns="0" tIns="0" rIns="0" bIns="0" rtlCol="0" anchor="ctr"/>
           <a:lstStyle/>
           <a:p>
-            <a:pPr algn="r" indent="0" marL="0">
+            <a:pPr rtl="1" algn="r" indent="0" marL="0">
               <a:spcAft>
                 <a:spcPts val="1000"/>
               </a:spcAft>
@@ -4838,7 +4838,7 @@
               </a:rPr>
               <a:t>• 6. Code Review</a:t>
             </a:r>
-            <a:pPr algn="r" indent="0" marL="0">
+            <a:pPr rtl="1" algn="r" indent="0" marL="0">
               <a:spcAft>
                 <a:spcPts val="1000"/>
               </a:spcAft>
@@ -4858,7 +4858,7 @@
             <a:endParaRPr lang="en-US" sz="1900" dirty="0"/>
           </a:p>
           <a:p>
-            <a:pPr algn="r" indent="0" marL="0">
+            <a:pPr rtl="1" algn="r" indent="0" marL="0">
               <a:spcAft>
                 <a:spcPts val="1000"/>
               </a:spcAft>
@@ -4875,7 +4875,7 @@
               </a:rPr>
               <a:t>• 7. Testing</a:t>
             </a:r>
-            <a:pPr algn="r" indent="0" marL="0">
+            <a:pPr rtl="1" algn="r" indent="0" marL="0">
               <a:spcAft>
                 <a:spcPts val="1000"/>
               </a:spcAft>
@@ -4895,7 +4895,7 @@
             <a:endParaRPr lang="en-US" sz="1900" dirty="0"/>
           </a:p>
           <a:p>
-            <a:pPr algn="r" indent="0" marL="0">
+            <a:pPr rtl="1" algn="r" indent="0" marL="0">
               <a:spcAft>
                 <a:spcPts val="1000"/>
               </a:spcAft>
@@ -4912,7 +4912,7 @@
               </a:rPr>
               <a:t>• 8. Commit</a:t>
             </a:r>
-            <a:pPr algn="r" indent="0" marL="0">
+            <a:pPr rtl="1" algn="r" indent="0" marL="0">
               <a:spcAft>
                 <a:spcPts val="1000"/>
               </a:spcAft>
@@ -4932,7 +4932,7 @@
             <a:endParaRPr lang="en-US" sz="1900" dirty="0"/>
           </a:p>
           <a:p>
-            <a:pPr algn="r" indent="0" marL="0">
+            <a:pPr rtl="1" algn="r" indent="0" marL="0">
               <a:spcAft>
                 <a:spcPts val="1000"/>
               </a:spcAft>
@@ -4949,7 +4949,7 @@
               </a:rPr>
               <a:t>• 9. Deploy</a:t>
             </a:r>
-            <a:pPr algn="r" indent="0" marL="0">
+            <a:pPr rtl="1" algn="r" indent="0" marL="0">
               <a:spcAft>
                 <a:spcPts val="1000"/>
               </a:spcAft>
@@ -4969,7 +4969,7 @@
             <a:endParaRPr lang="en-US" sz="1900" dirty="0"/>
           </a:p>
           <a:p>
-            <a:pPr algn="r" indent="0" marL="0">
+            <a:pPr rtl="1" algn="r" indent="0" marL="0">
               <a:spcAft>
                 <a:spcPts val="1000"/>
               </a:spcAft>
@@ -4986,7 +4986,7 @@
               </a:rPr>
               <a:t>• 10. שיתוף</a:t>
             </a:r>
-            <a:pPr algn="r" indent="0" marL="0">
+            <a:pPr rtl="1" algn="r" indent="0" marL="0">
               <a:spcAft>
                 <a:spcPts val="1000"/>
               </a:spcAft>
@@ -5051,7 +5051,7 @@
           <a:bodyPr wrap="square" lIns="0" tIns="0" rIns="0" bIns="0" rtlCol="0" anchor="ctr"/>
           <a:lstStyle/>
           <a:p>
-            <a:pPr algn="r" indent="0" marL="0">
+            <a:pPr rtl="1" algn="r" indent="0" marL="0">
               <a:buNone/>
             </a:pPr>
             <a:r>
@@ -5200,7 +5200,7 @@
           <a:bodyPr wrap="square" lIns="0" tIns="0" rIns="0" bIns="0" rtlCol="0" anchor="ctr"/>
           <a:lstStyle/>
           <a:p>
-            <a:pPr algn="r" indent="0" marL="0">
+            <a:pPr rtl="1" algn="r" indent="0" marL="0">
               <a:spcAft>
                 <a:spcPts val="1000"/>
               </a:spcAft>
@@ -5220,7 +5220,7 @@
             <a:endParaRPr lang="en-US" sz="1900" dirty="0"/>
           </a:p>
           <a:p>
-            <a:pPr algn="r" indent="0" marL="0">
+            <a:pPr rtl="1" algn="r" indent="0" marL="0">
               <a:spcAft>
                 <a:spcPts val="1000"/>
               </a:spcAft>
@@ -5237,7 +5237,7 @@
               </a:rPr>
               <a:t>• קוד קיים (Brownfield) בלי תהליך מסודר: </a:t>
             </a:r>
-            <a:pPr algn="r" indent="0" marL="0">
+            <a:pPr rtl="1" algn="r" indent="0" marL="0">
               <a:spcAft>
                 <a:spcPts val="1000"/>
               </a:spcAft>
@@ -5254,7 +5254,7 @@
               </a:rPr>
               <a:t>~10%</a:t>
             </a:r>
-            <a:pPr algn="r" indent="0" marL="0">
+            <a:pPr rtl="1" algn="r" indent="0" marL="0">
               <a:spcAft>
                 <a:spcPts val="1000"/>
               </a:spcAft>
@@ -5274,7 +5274,7 @@
             <a:endParaRPr lang="en-US" sz="1900" dirty="0"/>
           </a:p>
           <a:p>
-            <a:pPr algn="r" indent="0" marL="0">
+            <a:pPr rtl="1" algn="r" indent="0" marL="0">
               <a:spcAft>
                 <a:spcPts val="1000"/>
               </a:spcAft>
@@ -5291,7 +5291,7 @@
               </a:rPr>
               <a:t>• אותם כלים, על פרויקט חדש שנבנה מאפס (Greenfield) עם Workflow ברור: </a:t>
             </a:r>
-            <a:pPr algn="r" indent="0" marL="0">
+            <a:pPr rtl="1" algn="r" indent="0" marL="0">
               <a:spcAft>
                 <a:spcPts val="1000"/>
               </a:spcAft>
@@ -5308,7 +5308,7 @@
               </a:rPr>
               <a:t>35-40%</a:t>
             </a:r>
-            <a:pPr algn="r" indent="0" marL="0">
+            <a:pPr rtl="1" algn="r" indent="0" marL="0">
               <a:spcAft>
                 <a:spcPts val="1000"/>
               </a:spcAft>
@@ -5328,7 +5328,7 @@
             <a:endParaRPr lang="en-US" sz="1900" dirty="0"/>
           </a:p>
           <a:p>
-            <a:pPr algn="r" indent="0" marL="0">
+            <a:pPr rtl="1" algn="r" indent="0" marL="0">
               <a:spcAft>
                 <a:spcPts val="1000"/>
               </a:spcAft>
@@ -5345,7 +5345,7 @@
               </a:rPr>
               <a:t>• בלי תהליך מסודר: </a:t>
             </a:r>
-            <a:pPr algn="r" indent="0" marL="0">
+            <a:pPr rtl="1" algn="r" indent="0" marL="0">
               <a:spcAft>
                 <a:spcPts val="1000"/>
               </a:spcAft>
@@ -5362,7 +5362,7 @@
               </a:rPr>
               <a:t>30-41%</a:t>
             </a:r>
-            <a:pPr algn="r" indent="0" marL="0">
+            <a:pPr rtl="1" algn="r" indent="0" marL="0">
               <a:spcAft>
                 <a:spcPts val="1000"/>
               </a:spcAft>
@@ -5379,7 +5379,7 @@
               </a:rPr>
               <a:t> יותר חוב טכני, PR עם AI = </a:t>
             </a:r>
-            <a:pPr algn="r" indent="0" marL="0">
+            <a:pPr rtl="1" algn="r" indent="0" marL="0">
               <a:spcAft>
                 <a:spcPts val="1000"/>
               </a:spcAft>
@@ -5396,7 +5396,7 @@
               </a:rPr>
               <a:t>פי 1.7</a:t>
             </a:r>
-            <a:pPr algn="r" indent="0" marL="0">
+            <a:pPr rtl="1" algn="r" indent="0" marL="0">
               <a:spcAft>
                 <a:spcPts val="1000"/>
               </a:spcAft>
@@ -5461,7 +5461,7 @@
           <a:bodyPr wrap="square" lIns="0" tIns="0" rIns="0" bIns="0" rtlCol="0" anchor="ctr"/>
           <a:lstStyle/>
           <a:p>
-            <a:pPr algn="r" indent="0" marL="0">
+            <a:pPr rtl="1" algn="r" indent="0" marL="0">
               <a:buNone/>
             </a:pPr>
             <a:r>
@@ -5649,7 +5649,7 @@
           <a:bodyPr wrap="square" lIns="0" tIns="0" rIns="0" bIns="0" rtlCol="0" anchor="ctr"/>
           <a:lstStyle/>
           <a:p>
-            <a:pPr algn="r" indent="0" marL="0">
+            <a:pPr rtl="1" algn="r" indent="0" marL="0">
               <a:buNone/>
             </a:pPr>
             <a:r>
@@ -5688,7 +5688,7 @@
           <a:bodyPr wrap="square" lIns="0" tIns="0" rIns="0" bIns="0" rtlCol="0" anchor="ctr"/>
           <a:lstStyle/>
           <a:p>
-            <a:pPr algn="r" indent="0" marL="0">
+            <a:pPr rtl="1" algn="r" indent="0" marL="0">
               <a:spcAft>
                 <a:spcPts val="1000"/>
               </a:spcAft>
@@ -5708,7 +5708,7 @@
             <a:endParaRPr lang="en-US" sz="1900" dirty="0"/>
           </a:p>
           <a:p>
-            <a:pPr algn="r" indent="0" marL="0">
+            <a:pPr rtl="1" algn="r" indent="0" marL="0">
               <a:spcAft>
                 <a:spcPts val="1000"/>
               </a:spcAft>
@@ -5728,7 +5728,7 @@
             <a:endParaRPr lang="en-US" sz="1900" dirty="0"/>
           </a:p>
           <a:p>
-            <a:pPr algn="r" indent="0" marL="0">
+            <a:pPr rtl="1" algn="r" indent="0" marL="0">
               <a:spcAft>
                 <a:spcPts val="1000"/>
               </a:spcAft>
@@ -5748,7 +5748,7 @@
             <a:endParaRPr lang="en-US" sz="1900" dirty="0"/>
           </a:p>
           <a:p>
-            <a:pPr algn="r" indent="0" marL="0">
+            <a:pPr rtl="1" algn="r" indent="0" marL="0">
               <a:spcAft>
                 <a:spcPts val="1000"/>
               </a:spcAft>
@@ -5813,7 +5813,7 @@
           <a:bodyPr wrap="square" lIns="0" tIns="0" rIns="0" bIns="0" rtlCol="0" anchor="ctr"/>
           <a:lstStyle/>
           <a:p>
-            <a:pPr algn="r" indent="0" marL="0">
+            <a:pPr rtl="1" algn="r" indent="0" marL="0">
               <a:buNone/>
             </a:pPr>
             <a:r>
@@ -6026,7 +6026,7 @@
           <a:bodyPr wrap="square" lIns="0" tIns="0" rIns="0" bIns="0" rtlCol="0" anchor="ctr"/>
           <a:lstStyle/>
           <a:p>
-            <a:pPr algn="r" indent="0" marL="0">
+            <a:pPr rtl="1" algn="r" indent="0" marL="0">
               <a:buNone/>
             </a:pPr>
             <a:r>
@@ -6065,7 +6065,7 @@
           <a:bodyPr wrap="square" lIns="0" tIns="0" rIns="0" bIns="0" rtlCol="0" anchor="ctr"/>
           <a:lstStyle/>
           <a:p>
-            <a:pPr algn="r" indent="0" marL="0">
+            <a:pPr rtl="1" algn="r" indent="0" marL="0">
               <a:spcAft>
                 <a:spcPts val="1000"/>
               </a:spcAft>
@@ -6085,7 +6085,7 @@
             <a:endParaRPr lang="en-US" sz="1900" dirty="0"/>
           </a:p>
           <a:p>
-            <a:pPr algn="r" indent="0" marL="0">
+            <a:pPr rtl="1" algn="r" indent="0" marL="0">
               <a:spcAft>
                 <a:spcPts val="1000"/>
               </a:spcAft>
@@ -6105,7 +6105,7 @@
             <a:endParaRPr lang="en-US" sz="1900" dirty="0"/>
           </a:p>
           <a:p>
-            <a:pPr algn="r" indent="0" marL="0">
+            <a:pPr rtl="1" algn="r" indent="0" marL="0">
               <a:spcAft>
                 <a:spcPts val="1000"/>
               </a:spcAft>
@@ -6125,7 +6125,7 @@
             <a:endParaRPr lang="en-US" sz="1900" dirty="0"/>
           </a:p>
           <a:p>
-            <a:pPr algn="r" indent="0" marL="0">
+            <a:pPr rtl="1" algn="r" indent="0" marL="0">
               <a:spcAft>
                 <a:spcPts val="1000"/>
               </a:spcAft>
@@ -6142,7 +6142,7 @@
               </a:rPr>
               <a:t>• פעילות זוגות:</a:t>
             </a:r>
-            <a:pPr algn="r" indent="0" marL="0">
+            <a:pPr rtl="1" algn="r" indent="0" marL="0">
               <a:spcAft>
                 <a:spcPts val="1000"/>
               </a:spcAft>
@@ -6207,7 +6207,7 @@
           <a:bodyPr wrap="square" lIns="0" tIns="0" rIns="0" bIns="0" rtlCol="0" anchor="ctr"/>
           <a:lstStyle/>
           <a:p>
-            <a:pPr algn="r" indent="0" marL="0">
+            <a:pPr rtl="1" algn="r" indent="0" marL="0">
               <a:buNone/>
             </a:pPr>
             <a:r>
@@ -6356,7 +6356,7 @@
           <a:bodyPr wrap="square" lIns="0" tIns="0" rIns="0" bIns="0" rtlCol="0" anchor="ctr"/>
           <a:lstStyle/>
           <a:p>
-            <a:pPr algn="r" indent="0" marL="0">
+            <a:pPr rtl="1" algn="r" indent="0" marL="0">
               <a:buNone/>
             </a:pPr>
             <a:r>
@@ -6395,7 +6395,7 @@
           <a:bodyPr wrap="square" lIns="0" tIns="0" rIns="0" bIns="0" rtlCol="0" anchor="ctr"/>
           <a:lstStyle/>
           <a:p>
-            <a:pPr algn="r" indent="0" marL="0">
+            <a:pPr rtl="1" algn="r" indent="0" marL="0">
               <a:spcAft>
                 <a:spcPts val="1000"/>
               </a:spcAft>
@@ -6412,7 +6412,7 @@
               </a:rPr>
               <a:t>• Stripe:</a:t>
             </a:r>
-            <a:pPr algn="r" indent="0" marL="0">
+            <a:pPr rtl="1" algn="r" indent="0" marL="0">
               <a:spcAft>
                 <a:spcPts val="1000"/>
               </a:spcAft>
@@ -6432,7 +6432,7 @@
             <a:endParaRPr lang="en-US" sz="1900" dirty="0"/>
           </a:p>
           <a:p>
-            <a:pPr algn="r" indent="0" marL="0">
+            <a:pPr rtl="1" algn="r" indent="0" marL="0">
               <a:spcAft>
                 <a:spcPts val="1000"/>
               </a:spcAft>
@@ -6449,7 +6449,7 @@
               </a:rPr>
               <a:t>• TELUS:</a:t>
             </a:r>
-            <a:pPr algn="r" indent="0" marL="0">
+            <a:pPr rtl="1" algn="r" indent="0" marL="0">
               <a:spcAft>
                 <a:spcPts val="1000"/>
               </a:spcAft>
@@ -6469,7 +6469,7 @@
             <a:endParaRPr lang="en-US" sz="1900" dirty="0"/>
           </a:p>
           <a:p>
-            <a:pPr algn="r" indent="0" marL="0">
+            <a:pPr rtl="1" algn="r" indent="0" marL="0">
               <a:spcAft>
                 <a:spcPts val="1000"/>
               </a:spcAft>
@@ -6486,7 +6486,7 @@
               </a:rPr>
               <a:t>• Zapier:</a:t>
             </a:r>
-            <a:pPr algn="r" indent="0" marL="0">
+            <a:pPr rtl="1" algn="r" indent="0" marL="0">
               <a:spcAft>
                 <a:spcPts val="1000"/>
               </a:spcAft>
@@ -6551,7 +6551,7 @@
           <a:bodyPr wrap="square" lIns="0" tIns="0" rIns="0" bIns="0" rtlCol="0" anchor="ctr"/>
           <a:lstStyle/>
           <a:p>
-            <a:pPr algn="r" indent="0" marL="0">
+            <a:pPr rtl="1" algn="r" indent="0" marL="0">
               <a:buNone/>
             </a:pPr>
             <a:r>
@@ -6700,7 +6700,7 @@
           <a:bodyPr wrap="square" lIns="0" tIns="0" rIns="0" bIns="0" rtlCol="0" anchor="ctr"/>
           <a:lstStyle/>
           <a:p>
-            <a:pPr algn="ctr" indent="0" marL="0">
+            <a:pPr rtl="1" algn="ctr" indent="0" marL="0">
               <a:buNone/>
             </a:pPr>
             <a:r>
@@ -7014,7 +7014,7 @@
           <a:bodyPr wrap="square" lIns="0" tIns="0" rIns="0" bIns="0" rtlCol="0" anchor="ctr"/>
           <a:lstStyle/>
           <a:p>
-            <a:pPr algn="r" indent="0" marL="0">
+            <a:pPr rtl="1" algn="r" indent="0" marL="0">
               <a:buNone/>
             </a:pPr>
             <a:r>
@@ -7053,7 +7053,7 @@
           <a:bodyPr wrap="square" lIns="0" tIns="0" rIns="0" bIns="0" rtlCol="0" anchor="ctr"/>
           <a:lstStyle/>
           <a:p>
-            <a:pPr algn="r" indent="0" marL="0">
+            <a:pPr rtl="1" algn="r" indent="0" marL="0">
               <a:spcAft>
                 <a:spcPts val="1000"/>
               </a:spcAft>
@@ -7070,7 +7070,7 @@
               </a:rPr>
               <a:t>• LLM (Large Language Model)</a:t>
             </a:r>
-            <a:pPr algn="r" indent="0" marL="0">
+            <a:pPr rtl="1" algn="r" indent="0" marL="0">
               <a:spcAft>
                 <a:spcPts val="1000"/>
               </a:spcAft>
@@ -7090,7 +7090,7 @@
             <a:endParaRPr lang="en-US" sz="1900" dirty="0"/>
           </a:p>
           <a:p>
-            <a:pPr algn="r" indent="0" marL="0">
+            <a:pPr rtl="1" algn="r" indent="0" marL="0">
               <a:spcAft>
                 <a:spcPts val="1000"/>
               </a:spcAft>
@@ -7110,7 +7110,7 @@
             <a:endParaRPr lang="en-US" sz="1900" dirty="0"/>
           </a:p>
           <a:p>
-            <a:pPr algn="r" indent="0" marL="0">
+            <a:pPr rtl="1" algn="r" indent="0" marL="0">
               <a:spcAft>
                 <a:spcPts val="1000"/>
               </a:spcAft>
@@ -7175,7 +7175,7 @@
           <a:bodyPr wrap="square" lIns="0" tIns="0" rIns="0" bIns="0" rtlCol="0" anchor="ctr"/>
           <a:lstStyle/>
           <a:p>
-            <a:pPr algn="r" indent="0" marL="0">
+            <a:pPr rtl="1" algn="r" indent="0" marL="0">
               <a:buNone/>
             </a:pPr>
             <a:r>
@@ -7349,7 +7349,7 @@
           <a:bodyPr wrap="square" lIns="0" tIns="0" rIns="0" bIns="0" rtlCol="0" anchor="ctr"/>
           <a:lstStyle/>
           <a:p>
-            <a:pPr algn="ctr" indent="0" marL="0">
+            <a:pPr rtl="1" algn="ctr" indent="0" marL="0">
               <a:buNone/>
             </a:pPr>
             <a:r>
@@ -7450,7 +7450,7 @@
           <a:bodyPr wrap="square" lIns="0" tIns="0" rIns="0" bIns="0" rtlCol="0" anchor="ctr"/>
           <a:lstStyle/>
           <a:p>
-            <a:pPr algn="r" indent="0" marL="0">
+            <a:pPr rtl="1" algn="r" indent="0" marL="0">
               <a:spcAft>
                 <a:spcPts val="800"/>
               </a:spcAft>
@@ -7470,7 +7470,7 @@
             <a:endParaRPr lang="en-US" sz="1800" dirty="0"/>
           </a:p>
           <a:p>
-            <a:pPr algn="r" indent="0" marL="0">
+            <a:pPr rtl="1" algn="r" indent="0" marL="0">
               <a:spcAft>
                 <a:spcPts val="800"/>
               </a:spcAft>
@@ -7490,7 +7490,7 @@
             <a:endParaRPr lang="en-US" sz="1800" dirty="0"/>
           </a:p>
           <a:p>
-            <a:pPr algn="r" indent="0" marL="0">
+            <a:pPr rtl="1" algn="r" indent="0" marL="0">
               <a:spcAft>
                 <a:spcPts val="800"/>
               </a:spcAft>
@@ -7510,7 +7510,7 @@
             <a:endParaRPr lang="en-US" sz="1800" dirty="0"/>
           </a:p>
           <a:p>
-            <a:pPr algn="r" indent="0" marL="0">
+            <a:pPr rtl="1" algn="r" indent="0" marL="0">
               <a:spcAft>
                 <a:spcPts val="800"/>
               </a:spcAft>
@@ -7726,7 +7726,7 @@
           <a:bodyPr wrap="square" lIns="0" tIns="0" rIns="0" bIns="0" rtlCol="0" anchor="ctr"/>
           <a:lstStyle/>
           <a:p>
-            <a:pPr algn="r" indent="0" marL="0">
+            <a:pPr rtl="1" algn="r" indent="0" marL="0">
               <a:spcAft>
                 <a:spcPts val="1600"/>
               </a:spcAft>
@@ -7746,7 +7746,7 @@
             <a:endParaRPr lang="en-US" sz="1800" dirty="0"/>
           </a:p>
           <a:p>
-            <a:pPr algn="r" indent="0" marL="0">
+            <a:pPr rtl="1" algn="r" indent="0" marL="0">
               <a:spcAft>
                 <a:spcPts val="1600"/>
               </a:spcAft>
@@ -7766,7 +7766,7 @@
             <a:endParaRPr lang="en-US" sz="1800" dirty="0"/>
           </a:p>
           <a:p>
-            <a:pPr algn="r" indent="0" marL="0">
+            <a:pPr rtl="1" algn="r" indent="0" marL="0">
               <a:spcAft>
                 <a:spcPts val="1600"/>
               </a:spcAft>
@@ -7980,7 +7980,7 @@
           <a:bodyPr wrap="square" lIns="0" tIns="0" rIns="0" bIns="0" rtlCol="0" anchor="ctr"/>
           <a:lstStyle/>
           <a:p>
-            <a:pPr algn="r" indent="0" marL="0">
+            <a:pPr rtl="1" algn="r" indent="0" marL="0">
               <a:spcAft>
                 <a:spcPts val="1200"/>
               </a:spcAft>
@@ -8000,7 +8000,7 @@
             <a:endParaRPr lang="en-US" sz="1500" dirty="0"/>
           </a:p>
           <a:p>
-            <a:pPr algn="r" indent="0" marL="0">
+            <a:pPr rtl="1" algn="r" indent="0" marL="0">
               <a:spcAft>
                 <a:spcPts val="1200"/>
               </a:spcAft>
@@ -8020,7 +8020,7 @@
             <a:endParaRPr lang="en-US" sz="1500" dirty="0"/>
           </a:p>
           <a:p>
-            <a:pPr algn="r" indent="0" marL="0">
+            <a:pPr rtl="1" algn="r" indent="0" marL="0">
               <a:spcAft>
                 <a:spcPts val="1200"/>
               </a:spcAft>
@@ -8040,7 +8040,7 @@
             <a:endParaRPr lang="en-US" sz="1500" dirty="0"/>
           </a:p>
           <a:p>
-            <a:pPr algn="r" indent="0" marL="0">
+            <a:pPr rtl="1" algn="r" indent="0" marL="0">
               <a:spcAft>
                 <a:spcPts val="1200"/>
               </a:spcAft>
@@ -8060,7 +8060,7 @@
             <a:endParaRPr lang="en-US" sz="1500" dirty="0"/>
           </a:p>
           <a:p>
-            <a:pPr algn="r" indent="0" marL="0">
+            <a:pPr rtl="1" algn="r" indent="0" marL="0">
               <a:spcAft>
                 <a:spcPts val="1200"/>
               </a:spcAft>
@@ -8080,7 +8080,7 @@
             <a:endParaRPr lang="en-US" sz="1500" dirty="0"/>
           </a:p>
           <a:p>
-            <a:pPr algn="r" indent="0" marL="0">
+            <a:pPr rtl="1" algn="r" indent="0" marL="0">
               <a:spcAft>
                 <a:spcPts val="1200"/>
               </a:spcAft>
@@ -8100,7 +8100,7 @@
             <a:endParaRPr lang="en-US" sz="1500" dirty="0"/>
           </a:p>
           <a:p>
-            <a:pPr algn="r" indent="0" marL="0">
+            <a:pPr rtl="1" algn="r" indent="0" marL="0">
               <a:spcAft>
                 <a:spcPts val="1200"/>
               </a:spcAft>
@@ -8291,7 +8291,7 @@
           <a:bodyPr wrap="square" lIns="0" tIns="0" rIns="0" bIns="0" rtlCol="0" anchor="ctr"/>
           <a:lstStyle/>
           <a:p>
-            <a:pPr algn="r" indent="0" marL="0">
+            <a:pPr rtl="1" algn="r" indent="0" marL="0">
               <a:buNone/>
             </a:pPr>
             <a:r>
@@ -8330,7 +8330,7 @@
           <a:bodyPr wrap="square" lIns="0" tIns="0" rIns="0" bIns="0" rtlCol="0" anchor="ctr"/>
           <a:lstStyle/>
           <a:p>
-            <a:pPr algn="r" indent="0" marL="0">
+            <a:pPr rtl="1" algn="r" indent="0" marL="0">
               <a:spcAft>
                 <a:spcPts val="1000"/>
               </a:spcAft>
@@ -8350,7 +8350,7 @@
             <a:endParaRPr lang="en-US" sz="1900" dirty="0"/>
           </a:p>
           <a:p>
-            <a:pPr algn="r" indent="0" marL="0">
+            <a:pPr rtl="1" algn="r" indent="0" marL="0">
               <a:spcAft>
                 <a:spcPts val="1000"/>
               </a:spcAft>
@@ -8370,7 +8370,7 @@
             <a:endParaRPr lang="en-US" sz="1900" dirty="0"/>
           </a:p>
           <a:p>
-            <a:pPr algn="r" indent="0" marL="0">
+            <a:pPr rtl="1" algn="r" indent="0" marL="0">
               <a:spcAft>
                 <a:spcPts val="1000"/>
               </a:spcAft>
@@ -8387,7 +8387,7 @@
               </a:rPr>
               <a:t>• לא</a:t>
             </a:r>
-            <a:pPr algn="r" indent="0" marL="0">
+            <a:pPr rtl="1" algn="r" indent="0" marL="0">
               <a:spcAft>
                 <a:spcPts val="1000"/>
               </a:spcAft>
@@ -8407,7 +8407,7 @@
             <a:endParaRPr lang="en-US" sz="1900" dirty="0"/>
           </a:p>
           <a:p>
-            <a:pPr algn="r" indent="0" marL="0">
+            <a:pPr rtl="1" algn="r" indent="0" marL="0">
               <a:spcAft>
                 <a:spcPts val="1000"/>
               </a:spcAft>
@@ -8424,7 +8424,7 @@
               </a:rPr>
               <a:t>• כן</a:t>
             </a:r>
-            <a:pPr algn="r" indent="0" marL="0">
+            <a:pPr rtl="1" algn="r" indent="0" marL="0">
               <a:spcAft>
                 <a:spcPts val="1000"/>
               </a:spcAft>
@@ -8489,7 +8489,7 @@
           <a:bodyPr wrap="square" lIns="0" tIns="0" rIns="0" bIns="0" rtlCol="0" anchor="ctr"/>
           <a:lstStyle/>
           <a:p>
-            <a:pPr algn="r" indent="0" marL="0">
+            <a:pPr rtl="1" algn="r" indent="0" marL="0">
               <a:buNone/>
             </a:pPr>
             <a:r>
@@ -8702,7 +8702,7 @@
           <a:bodyPr wrap="square" lIns="0" tIns="0" rIns="0" bIns="0" rtlCol="0" anchor="ctr"/>
           <a:lstStyle/>
           <a:p>
-            <a:pPr algn="r" indent="0" marL="0">
+            <a:pPr rtl="1" algn="r" indent="0" marL="0">
               <a:buNone/>
             </a:pPr>
             <a:r>
@@ -8741,7 +8741,7 @@
           <a:bodyPr wrap="square" lIns="0" tIns="0" rIns="0" bIns="0" rtlCol="0" anchor="ctr"/>
           <a:lstStyle/>
           <a:p>
-            <a:pPr algn="r" indent="0" marL="0">
+            <a:pPr rtl="1" algn="r" indent="0" marL="0">
               <a:spcAft>
                 <a:spcPts val="1000"/>
               </a:spcAft>
@@ -8758,7 +8758,7 @@
               </a:rPr>
               <a:t>• AI-Native (הגישה של הקורס):</a:t>
             </a:r>
-            <a:pPr algn="r" indent="0" marL="0">
+            <a:pPr rtl="1" algn="r" indent="0" marL="0">
               <a:spcAft>
                 <a:spcPts val="1000"/>
               </a:spcAft>
@@ -8778,7 +8778,7 @@
             <a:endParaRPr lang="en-US" sz="1900" dirty="0"/>
           </a:p>
           <a:p>
-            <a:pPr algn="r" indent="0" marL="0">
+            <a:pPr rtl="1" algn="r" indent="0" marL="0">
               <a:spcAft>
                 <a:spcPts val="1000"/>
               </a:spcAft>
@@ -8795,7 +8795,7 @@
               </a:rPr>
               <a:t>• הגישה הישנה:</a:t>
             </a:r>
-            <a:pPr algn="r" indent="0" marL="0">
+            <a:pPr rtl="1" algn="r" indent="0" marL="0">
               <a:spcAft>
                 <a:spcPts val="1000"/>
               </a:spcAft>
@@ -8815,7 +8815,7 @@
             <a:endParaRPr lang="en-US" sz="1900" dirty="0"/>
           </a:p>
           <a:p>
-            <a:pPr algn="r" indent="0" marL="0">
+            <a:pPr rtl="1" algn="r" indent="0" marL="0">
               <a:spcAft>
                 <a:spcPts val="1000"/>
               </a:spcAft>
@@ -8880,7 +8880,7 @@
           <a:bodyPr wrap="square" lIns="0" tIns="0" rIns="0" bIns="0" rtlCol="0" anchor="ctr"/>
           <a:lstStyle/>
           <a:p>
-            <a:pPr algn="r" indent="0" marL="0">
+            <a:pPr rtl="1" algn="r" indent="0" marL="0">
               <a:buNone/>
             </a:pPr>
             <a:r>
@@ -9029,7 +9029,7 @@
           <a:bodyPr wrap="square" lIns="0" tIns="0" rIns="0" bIns="0" rtlCol="0" anchor="ctr"/>
           <a:lstStyle/>
           <a:p>
-            <a:pPr algn="r" indent="0" marL="0">
+            <a:pPr rtl="1" algn="r" indent="0" marL="0">
               <a:spcAft>
                 <a:spcPts val="1000"/>
               </a:spcAft>
@@ -9046,7 +9046,7 @@
               </a:rPr>
               <a:t>• 92.6%</a:t>
             </a:r>
-            <a:pPr algn="r" indent="0" marL="0">
+            <a:pPr rtl="1" algn="r" indent="0" marL="0">
               <a:spcAft>
                 <a:spcPts val="1000"/>
               </a:spcAft>
@@ -9066,7 +9066,7 @@
             <a:endParaRPr lang="en-US" sz="1900" dirty="0"/>
           </a:p>
           <a:p>
-            <a:pPr algn="r" indent="0" marL="0">
+            <a:pPr rtl="1" algn="r" indent="0" marL="0">
               <a:spcAft>
                 <a:spcPts val="1000"/>
               </a:spcAft>
@@ -9083,7 +9083,7 @@
               </a:rPr>
               <a:t>• 26.9%</a:t>
             </a:r>
-            <a:pPr algn="r" indent="0" marL="0">
+            <a:pPr rtl="1" algn="r" indent="0" marL="0">
               <a:spcAft>
                 <a:spcPts val="1000"/>
               </a:spcAft>
@@ -9103,7 +9103,7 @@
             <a:endParaRPr lang="en-US" sz="1900" dirty="0"/>
           </a:p>
           <a:p>
-            <a:pPr algn="r" indent="0" marL="0">
+            <a:pPr rtl="1" algn="r" indent="0" marL="0">
               <a:spcAft>
                 <a:spcPts val="1000"/>
               </a:spcAft>
@@ -9120,7 +9120,7 @@
               </a:rPr>
               <a:t>• 1,000+</a:t>
             </a:r>
-            <a:pPr algn="r" indent="0" marL="0">
+            <a:pPr rtl="1" algn="r" indent="0" marL="0">
               <a:spcAft>
                 <a:spcPts val="1000"/>
               </a:spcAft>
@@ -9140,7 +9140,7 @@
             <a:endParaRPr lang="en-US" sz="1900" dirty="0"/>
           </a:p>
           <a:p>
-            <a:pPr algn="r" indent="0" marL="0">
+            <a:pPr rtl="1" algn="r" indent="0" marL="0">
               <a:spcAft>
                 <a:spcPts val="1000"/>
               </a:spcAft>
@@ -9157,7 +9157,7 @@
               </a:rPr>
               <a:t>• 40%</a:t>
             </a:r>
-            <a:pPr algn="r" indent="0" marL="0">
+            <a:pPr rtl="1" algn="r" indent="0" marL="0">
               <a:spcAft>
                 <a:spcPts val="1000"/>
               </a:spcAft>
@@ -9222,7 +9222,7 @@
           <a:bodyPr wrap="square" lIns="0" tIns="0" rIns="0" bIns="0" rtlCol="0" anchor="ctr"/>
           <a:lstStyle/>
           <a:p>
-            <a:pPr algn="r" indent="0" marL="0">
+            <a:pPr rtl="1" algn="r" indent="0" marL="0">
               <a:buNone/>
             </a:pPr>
             <a:r>
@@ -9410,7 +9410,7 @@
           <a:bodyPr wrap="square" lIns="0" tIns="0" rIns="0" bIns="0" rtlCol="0" anchor="ctr"/>
           <a:lstStyle/>
           <a:p>
-            <a:pPr algn="r" indent="0" marL="0">
+            <a:pPr rtl="1" algn="r" indent="0" marL="0">
               <a:buNone/>
             </a:pPr>
             <a:r>
@@ -9449,7 +9449,7 @@
           <a:bodyPr wrap="square" lIns="0" tIns="0" rIns="0" bIns="0" rtlCol="0" anchor="ctr"/>
           <a:lstStyle/>
           <a:p>
-            <a:pPr algn="r" indent="0" marL="0">
+            <a:pPr rtl="1" algn="r" indent="0" marL="0">
               <a:spcAft>
                 <a:spcPts val="1000"/>
               </a:spcAft>
@@ -9466,7 +9466,7 @@
               </a:rPr>
               <a:t>• התשובה:</a:t>
             </a:r>
-            <a:pPr algn="r" indent="0" marL="0">
+            <a:pPr rtl="1" algn="r" indent="0" marL="0">
               <a:spcAft>
                 <a:spcPts val="1000"/>
               </a:spcAft>
@@ -9486,7 +9486,7 @@
             <a:endParaRPr lang="en-US" sz="1900" dirty="0"/>
           </a:p>
           <a:p>
-            <a:pPr algn="r" indent="0" marL="0">
+            <a:pPr rtl="1" algn="r" indent="0" marL="0">
               <a:spcAft>
                 <a:spcPts val="1000"/>
               </a:spcAft>
@@ -9503,7 +9503,7 @@
               </a:rPr>
               <a:t>• קוד מכונה → שפות עיליות (כמו Python) → IDE + Autocomplete → Git → </a:t>
             </a:r>
-            <a:pPr algn="r" indent="0" marL="0">
+            <a:pPr rtl="1" algn="r" indent="0" marL="0">
               <a:spcAft>
                 <a:spcPts val="1000"/>
               </a:spcAft>
@@ -9523,7 +9523,7 @@
             <a:endParaRPr lang="en-US" sz="1900" dirty="0"/>
           </a:p>
           <a:p>
-            <a:pPr algn="r" indent="0" marL="0">
+            <a:pPr rtl="1" algn="r" indent="0" marL="0">
               <a:spcAft>
                 <a:spcPts val="1000"/>
               </a:spcAft>
@@ -9588,7 +9588,7 @@
           <a:bodyPr wrap="square" lIns="0" tIns="0" rIns="0" bIns="0" rtlCol="0" anchor="ctr"/>
           <a:lstStyle/>
           <a:p>
-            <a:pPr algn="r" indent="0" marL="0">
+            <a:pPr rtl="1" algn="r" indent="0" marL="0">
               <a:buNone/>
             </a:pPr>
             <a:r>
@@ -9801,7 +9801,7 @@
           <a:bodyPr wrap="square" lIns="0" tIns="0" rIns="0" bIns="0" rtlCol="0" anchor="ctr"/>
           <a:lstStyle/>
           <a:p>
-            <a:pPr algn="r" indent="0" marL="0">
+            <a:pPr rtl="1" algn="r" indent="0" marL="0">
               <a:spcAft>
                 <a:spcPts val="1000"/>
               </a:spcAft>
@@ -9818,7 +9818,7 @@
               </a:rPr>
               <a:t>• IDE ראשונים: </a:t>
             </a:r>
-            <a:pPr algn="r" indent="0" marL="0">
+            <a:pPr rtl="1" algn="r" indent="0" marL="0">
               <a:spcAft>
                 <a:spcPts val="1000"/>
               </a:spcAft>
@@ -9838,7 +9838,7 @@
             <a:endParaRPr lang="en-US" sz="1900" dirty="0"/>
           </a:p>
           <a:p>
-            <a:pPr algn="r" indent="0" marL="0">
+            <a:pPr rtl="1" algn="r" indent="0" marL="0">
               <a:spcAft>
                 <a:spcPts val="1000"/>
               </a:spcAft>
@@ -9855,7 +9855,7 @@
               </a:rPr>
               <a:t>• Git: </a:t>
             </a:r>
-            <a:pPr algn="r" indent="0" marL="0">
+            <a:pPr rtl="1" algn="r" indent="0" marL="0">
               <a:spcAft>
                 <a:spcPts val="1000"/>
               </a:spcAft>
@@ -9872,7 +9872,7 @@
               </a:rPr>
               <a:t>2005</a:t>
             </a:r>
-            <a:pPr algn="r" indent="0" marL="0">
+            <a:pPr rtl="1" algn="r" indent="0" marL="0">
               <a:spcAft>
                 <a:spcPts val="1000"/>
               </a:spcAft>
@@ -9889,7 +9889,7 @@
               </a:rPr>
               <a:t> · GitHub: </a:t>
             </a:r>
-            <a:pPr algn="r" indent="0" marL="0">
+            <a:pPr rtl="1" algn="r" indent="0" marL="0">
               <a:spcAft>
                 <a:spcPts val="1000"/>
               </a:spcAft>
@@ -9909,7 +9909,7 @@
             <a:endParaRPr lang="en-US" sz="1900" dirty="0"/>
           </a:p>
           <a:p>
-            <a:pPr algn="r" indent="0" marL="0">
+            <a:pPr rtl="1" algn="r" indent="0" marL="0">
               <a:spcAft>
                 <a:spcPts val="1000"/>
               </a:spcAft>
@@ -9926,7 +9926,7 @@
               </a:rPr>
               <a:t>• GitHub Copilot (Preview): </a:t>
             </a:r>
-            <a:pPr algn="r" indent="0" marL="0">
+            <a:pPr rtl="1" algn="r" indent="0" marL="0">
               <a:spcAft>
                 <a:spcPts val="1000"/>
               </a:spcAft>
@@ -9946,7 +9946,7 @@
             <a:endParaRPr lang="en-US" sz="1900" dirty="0"/>
           </a:p>
           <a:p>
-            <a:pPr algn="r" indent="0" marL="0">
+            <a:pPr rtl="1" algn="r" indent="0" marL="0">
               <a:spcAft>
                 <a:spcPts val="1000"/>
               </a:spcAft>
@@ -9963,7 +9963,7 @@
               </a:rPr>
               <a:t>• ChatGPT: </a:t>
             </a:r>
-            <a:pPr algn="r" indent="0" marL="0">
+            <a:pPr rtl="1" algn="r" indent="0" marL="0">
               <a:spcAft>
                 <a:spcPts val="1000"/>
               </a:spcAft>
@@ -9983,7 +9983,7 @@
             <a:endParaRPr lang="en-US" sz="1900" dirty="0"/>
           </a:p>
           <a:p>
-            <a:pPr algn="r" indent="0" marL="0">
+            <a:pPr rtl="1" algn="r" indent="0" marL="0">
               <a:spcAft>
                 <a:spcPts val="1000"/>
               </a:spcAft>
@@ -10000,7 +10000,7 @@
               </a:rPr>
               <a:t>• כלים אג'נטיים אמיתיים: </a:t>
             </a:r>
-            <a:pPr algn="r" indent="0" marL="0">
+            <a:pPr rtl="1" algn="r" indent="0" marL="0">
               <a:spcAft>
                 <a:spcPts val="1000"/>
               </a:spcAft>
@@ -10065,7 +10065,7 @@
           <a:bodyPr wrap="square" lIns="0" tIns="0" rIns="0" bIns="0" rtlCol="0" anchor="ctr"/>
           <a:lstStyle/>
           <a:p>
-            <a:pPr algn="r" indent="0" marL="0">
+            <a:pPr rtl="1" algn="r" indent="0" marL="0">
               <a:buNone/>
             </a:pPr>
             <a:r>
@@ -10253,7 +10253,7 @@
           <a:bodyPr wrap="square" lIns="0" tIns="0" rIns="0" bIns="0" rtlCol="0" anchor="ctr"/>
           <a:lstStyle/>
           <a:p>
-            <a:pPr algn="r" indent="0" marL="0">
+            <a:pPr rtl="1" algn="r" indent="0" marL="0">
               <a:buNone/>
             </a:pPr>
             <a:r>
@@ -10292,7 +10292,7 @@
           <a:bodyPr wrap="square" lIns="0" tIns="0" rIns="0" bIns="0" rtlCol="0" anchor="ctr"/>
           <a:lstStyle/>
           <a:p>
-            <a:pPr algn="r" indent="0" marL="0">
+            <a:pPr rtl="1" algn="r" indent="0" marL="0">
               <a:spcAft>
                 <a:spcPts val="1000"/>
               </a:spcAft>
@@ -10309,7 +10309,7 @@
               </a:rPr>
               <a:t>• מהירות:</a:t>
             </a:r>
-            <a:pPr algn="r" indent="0" marL="0">
+            <a:pPr rtl="1" algn="r" indent="0" marL="0">
               <a:spcAft>
                 <a:spcPts val="1000"/>
               </a:spcAft>
@@ -10329,7 +10329,7 @@
             <a:endParaRPr lang="en-US" sz="1900" dirty="0"/>
           </a:p>
           <a:p>
-            <a:pPr algn="r" indent="0" marL="0">
+            <a:pPr rtl="1" algn="r" indent="0" marL="0">
               <a:spcAft>
                 <a:spcPts val="1000"/>
               </a:spcAft>
@@ -10346,7 +10346,7 @@
               </a:rPr>
               <a:t>• נגישות:</a:t>
             </a:r>
-            <a:pPr algn="r" indent="0" marL="0">
+            <a:pPr rtl="1" algn="r" indent="0" marL="0">
               <a:spcAft>
                 <a:spcPts val="1000"/>
               </a:spcAft>
@@ -10366,7 +10366,7 @@
             <a:endParaRPr lang="en-US" sz="1900" dirty="0"/>
           </a:p>
           <a:p>
-            <a:pPr algn="r" indent="0" marL="0">
+            <a:pPr rtl="1" algn="r" indent="0" marL="0">
               <a:spcAft>
                 <a:spcPts val="1000"/>
               </a:spcAft>
@@ -10383,7 +10383,7 @@
               </a:rPr>
               <a:t>• שחרור מבוילרפלייט:</a:t>
             </a:r>
-            <a:pPr algn="r" indent="0" marL="0">
+            <a:pPr rtl="1" algn="r" indent="0" marL="0">
               <a:spcAft>
                 <a:spcPts val="1000"/>
               </a:spcAft>
@@ -10448,7 +10448,7 @@
           <a:bodyPr wrap="square" lIns="0" tIns="0" rIns="0" bIns="0" rtlCol="0" anchor="ctr"/>
           <a:lstStyle/>
           <a:p>
-            <a:pPr algn="r" indent="0" marL="0">
+            <a:pPr rtl="1" algn="r" indent="0" marL="0">
               <a:buNone/>
             </a:pPr>
             <a:r>
@@ -10661,7 +10661,7 @@
           <a:bodyPr wrap="square" lIns="0" tIns="0" rIns="0" bIns="0" rtlCol="0" anchor="ctr"/>
           <a:lstStyle/>
           <a:p>
-            <a:pPr algn="r" indent="0" marL="0">
+            <a:pPr rtl="1" algn="r" indent="0" marL="0">
               <a:buNone/>
             </a:pPr>
             <a:r>
@@ -10700,7 +10700,7 @@
           <a:bodyPr wrap="square" lIns="0" tIns="0" rIns="0" bIns="0" rtlCol="0" anchor="ctr"/>
           <a:lstStyle/>
           <a:p>
-            <a:pPr algn="r" indent="0" marL="0">
+            <a:pPr rtl="1" algn="r" indent="0" marL="0">
               <a:spcAft>
                 <a:spcPts val="1000"/>
               </a:spcAft>
@@ -10720,7 +10720,7 @@
             <a:endParaRPr lang="en-US" sz="1900" dirty="0"/>
           </a:p>
           <a:p>
-            <a:pPr algn="r" indent="0" marL="0">
+            <a:pPr rtl="1" algn="r" indent="0" marL="0">
               <a:spcAft>
                 <a:spcPts val="1000"/>
               </a:spcAft>
@@ -10740,7 +10740,7 @@
             <a:endParaRPr lang="en-US" sz="1900" dirty="0"/>
           </a:p>
           <a:p>
-            <a:pPr algn="r" indent="0" marL="0">
+            <a:pPr rtl="1" algn="r" indent="0" marL="0">
               <a:spcAft>
                 <a:spcPts val="1000"/>
               </a:spcAft>
@@ -10760,7 +10760,7 @@
             <a:endParaRPr lang="en-US" sz="1900" dirty="0"/>
           </a:p>
           <a:p>
-            <a:pPr algn="r" indent="0" marL="0">
+            <a:pPr rtl="1" algn="r" indent="0" marL="0">
               <a:spcAft>
                 <a:spcPts val="1000"/>
               </a:spcAft>
@@ -10777,7 +10777,7 @@
               </a:rPr>
               <a:t>• והבעיה המרכזית שבה נתמקד עכשיו: </a:t>
             </a:r>
-            <a:pPr algn="r" indent="0" marL="0">
+            <a:pPr rtl="1" algn="r" indent="0" marL="0">
               <a:spcAft>
                 <a:spcPts val="1000"/>
               </a:spcAft>
@@ -10842,7 +10842,7 @@
           <a:bodyPr wrap="square" lIns="0" tIns="0" rIns="0" bIns="0" rtlCol="0" anchor="ctr"/>
           <a:lstStyle/>
           <a:p>
-            <a:pPr algn="r" indent="0" marL="0">
+            <a:pPr rtl="1" algn="r" indent="0" marL="0">
               <a:buNone/>
             </a:pPr>
             <a:r>

--- a/lesson_01/lesson_01_slides.pptx
+++ b/lesson_01/lesson_01_slides.pptx
@@ -4083,6 +4083,23 @@
               <a:buNone/>
             </a:pPr>
             <a:r>
+              <a:rPr lang="en-US" sz="1900" b="1" dirty="0">
+                <a:solidFill>
+                  <a:srgbClr val="1B1F3B"/>
+                </a:solidFill>
+                <a:latin typeface="Calibri" pitchFamily="34" charset="0"/>
+                <a:ea typeface="Calibri" pitchFamily="34" charset="-122"/>
+                <a:cs typeface="Calibri" pitchFamily="34" charset="-120"/>
+              </a:rPr>
+              <a:t>• METR</a:t>
+            </a:r>
+            <a:pPr rtl="1" algn="r" indent="0" marL="0">
+              <a:spcAft>
+                <a:spcPts val="1000"/>
+              </a:spcAft>
+              <a:buNone/>
+            </a:pPr>
+            <a:r>
               <a:rPr lang="en-US" sz="1900" dirty="0">
                 <a:solidFill>
                   <a:srgbClr val="1B1F3B"/>
@@ -4091,7 +4108,7 @@
                 <a:ea typeface="Calibri" pitchFamily="34" charset="-122"/>
                 <a:cs typeface="Calibri" pitchFamily="34" charset="-120"/>
               </a:rPr>
-              <a:t>• מפתחים מנוסים עבדו עם כלי AI על משימות אמיתיות</a:t>
+              <a:t> (ארגון מחקר עצמאי שבוחן ביצועים אמיתיים של כלי AI) עקב אחרי מפתחים מנוסים שעבדו עם כלי AI על משימות אמיתיות</a:t>
             </a:r>
             <a:endParaRPr lang="en-US" sz="1900" dirty="0"/>
           </a:p>
@@ -5207,6 +5224,23 @@
               <a:buNone/>
             </a:pPr>
             <a:r>
+              <a:rPr lang="en-US" sz="1900" b="1" dirty="0">
+                <a:solidFill>
+                  <a:srgbClr val="1B1F3B"/>
+                </a:solidFill>
+                <a:latin typeface="Calibri" pitchFamily="34" charset="0"/>
+                <a:ea typeface="Calibri" pitchFamily="34" charset="-122"/>
+                <a:cs typeface="Calibri" pitchFamily="34" charset="-120"/>
+              </a:rPr>
+              <a:t>• דו"ח DORA</a:t>
+            </a:r>
+            <a:pPr rtl="1" algn="r" indent="0" marL="0">
+              <a:spcAft>
+                <a:spcPts val="1000"/>
+              </a:spcAft>
+              <a:buNone/>
+            </a:pPr>
+            <a:r>
               <a:rPr lang="en-US" sz="1900" dirty="0">
                 <a:solidFill>
                   <a:srgbClr val="1B1F3B"/>
@@ -5215,7 +5249,7 @@
                 <a:ea typeface="Calibri" pitchFamily="34" charset="-122"/>
                 <a:cs typeface="Calibri" pitchFamily="34" charset="-120"/>
               </a:rPr>
-              <a:t>• דו"ח DORA 2026:</a:t>
+              <a:t> (מחקר שנתי מוביל בתעשייה על תהליכי פיתוח תוכנה, מבית Google) לשנת 2026:</a:t>
             </a:r>
             <a:endParaRPr lang="en-US" sz="1900" dirty="0"/>
           </a:p>
@@ -6080,7 +6114,41 @@
                 <a:ea typeface="Calibri" pitchFamily="34" charset="-122"/>
                 <a:cs typeface="Calibri" pitchFamily="34" charset="-120"/>
               </a:rPr>
-              <a:t>• מרץ 2026: GitHub שינה את מסלול הסטודנטים ל-Copilot Student</a:t>
+              <a:t>• מרץ 2026: </a:t>
+            </a:r>
+            <a:pPr rtl="1" algn="r" indent="0" marL="0">
+              <a:spcAft>
+                <a:spcPts val="1000"/>
+              </a:spcAft>
+              <a:buNone/>
+            </a:pPr>
+            <a:r>
+              <a:rPr lang="en-US" sz="1900" b="1" dirty="0">
+                <a:solidFill>
+                  <a:srgbClr val="1B1F3B"/>
+                </a:solidFill>
+                <a:latin typeface="Calibri" pitchFamily="34" charset="0"/>
+                <a:ea typeface="Calibri" pitchFamily="34" charset="-122"/>
+                <a:cs typeface="Calibri" pitchFamily="34" charset="-120"/>
+              </a:rPr>
+              <a:t>GitHub</a:t>
+            </a:r>
+            <a:pPr rtl="1" algn="r" indent="0" marL="0">
+              <a:spcAft>
+                <a:spcPts val="1000"/>
+              </a:spcAft>
+              <a:buNone/>
+            </a:pPr>
+            <a:r>
+              <a:rPr lang="en-US" sz="1900" dirty="0">
+                <a:solidFill>
+                  <a:srgbClr val="1B1F3B"/>
+                </a:solidFill>
+                <a:latin typeface="Calibri" pitchFamily="34" charset="0"/>
+                <a:ea typeface="Calibri" pitchFamily="34" charset="-122"/>
+                <a:cs typeface="Calibri" pitchFamily="34" charset="-120"/>
+              </a:rPr>
+              <a:t> (הפלטפורמה המרכזית בעולם לאחסון ושיתוף קוד — נסביר עליה לעומק בשיעור הבא) שינה את מסלול הסטודנטים ל-Copilot Student</a:t>
             </a:r>
             <a:endParaRPr lang="en-US" sz="1900" dirty="0"/>
           </a:p>
@@ -6410,7 +6478,7 @@
                 <a:ea typeface="Calibri" pitchFamily="34" charset="-122"/>
                 <a:cs typeface="Calibri" pitchFamily="34" charset="-120"/>
               </a:rPr>
-              <a:t>• Stripe:</a:t>
+              <a:t>• Stripe</a:t>
             </a:r>
             <a:pPr rtl="1" algn="r" indent="0" marL="0">
               <a:spcAft>
@@ -6427,7 +6495,7 @@
                 <a:ea typeface="Calibri" pitchFamily="34" charset="-122"/>
                 <a:cs typeface="Calibri" pitchFamily="34" charset="-120"/>
               </a:rPr>
-              <a:t> מערכת "Minions" — 1,000+ PR ממוזגים בשבוע</a:t>
+              <a:t> (חברת התשלומים הדיגיטליים שראינו קודם): מערכת "Minions" — 1,000+ PR ממוזגים בשבוע</a:t>
             </a:r>
             <a:endParaRPr lang="en-US" sz="1900" dirty="0"/>
           </a:p>
@@ -6447,7 +6515,7 @@
                 <a:ea typeface="Calibri" pitchFamily="34" charset="-122"/>
                 <a:cs typeface="Calibri" pitchFamily="34" charset="-120"/>
               </a:rPr>
-              <a:t>• TELUS:</a:t>
+              <a:t>• TELUS</a:t>
             </a:r>
             <a:pPr rtl="1" algn="r" indent="0" marL="0">
               <a:spcAft>
@@ -6464,7 +6532,7 @@
                 <a:ea typeface="Calibri" pitchFamily="34" charset="-122"/>
                 <a:cs typeface="Calibri" pitchFamily="34" charset="-120"/>
               </a:rPr>
-              <a:t> 500,000+ שעות נחסכו, 13,000 פתרונות AI</a:t>
+              <a:t> (חברת תקשורת קנדית גדולה): 500,000+ שעות נחסכו, 13,000 פתרונות AI</a:t>
             </a:r>
             <a:endParaRPr lang="en-US" sz="1900" dirty="0"/>
           </a:p>
@@ -6484,7 +6552,7 @@
                 <a:ea typeface="Calibri" pitchFamily="34" charset="-122"/>
                 <a:cs typeface="Calibri" pitchFamily="34" charset="-120"/>
               </a:rPr>
-              <a:t>• Zapier:</a:t>
+              <a:t>• Zapier</a:t>
             </a:r>
             <a:pPr rtl="1" algn="r" indent="0" marL="0">
               <a:spcAft>
@@ -6501,7 +6569,7 @@
                 <a:ea typeface="Calibri" pitchFamily="34" charset="-122"/>
                 <a:cs typeface="Calibri" pitchFamily="34" charset="-120"/>
               </a:rPr>
-              <a:t> 89% אימוץ AI ארגוני</a:t>
+              <a:t> (פלטפורמה פופולרית לחיבור אוטומטי בין אפליקציות): 89% אימוץ AI ארגוני</a:t>
             </a:r>
             <a:endParaRPr lang="en-US" sz="1900" dirty="0"/>
           </a:p>
@@ -9135,7 +9203,41 @@
                 <a:ea typeface="Calibri" pitchFamily="34" charset="-122"/>
                 <a:cs typeface="Calibri" pitchFamily="34" charset="-120"/>
               </a:rPr>
-              <a:t> בקשות שילוב קוד (Pull Requests) בשבוע דרך מערכת "Minions" הפנימית של Stripe</a:t>
+              <a:t> בקשות שילוב קוד (Pull Requests) בשבוע — דרך "Minions", מערכת AI פנימית שבנתה </a:t>
+            </a:r>
+            <a:pPr rtl="1" algn="r" indent="0" marL="0">
+              <a:spcAft>
+                <a:spcPts val="1000"/>
+              </a:spcAft>
+              <a:buNone/>
+            </a:pPr>
+            <a:r>
+              <a:rPr lang="en-US" sz="1900" b="1" dirty="0">
+                <a:solidFill>
+                  <a:srgbClr val="1B1F3B"/>
+                </a:solidFill>
+                <a:latin typeface="Calibri" pitchFamily="34" charset="0"/>
+                <a:ea typeface="Calibri" pitchFamily="34" charset="-122"/>
+                <a:cs typeface="Calibri" pitchFamily="34" charset="-120"/>
+              </a:rPr>
+              <a:t>Stripe</a:t>
+            </a:r>
+            <a:pPr rtl="1" algn="r" indent="0" marL="0">
+              <a:spcAft>
+                <a:spcPts val="1000"/>
+              </a:spcAft>
+              <a:buNone/>
+            </a:pPr>
+            <a:r>
+              <a:rPr lang="en-US" sz="1900" dirty="0">
+                <a:solidFill>
+                  <a:srgbClr val="1B1F3B"/>
+                </a:solidFill>
+                <a:latin typeface="Calibri" pitchFamily="34" charset="0"/>
+                <a:ea typeface="Calibri" pitchFamily="34" charset="-122"/>
+                <a:cs typeface="Calibri" pitchFamily="34" charset="-120"/>
+              </a:rPr>
+              <a:t> (חברת תשלומים דיגיטליים עולמית) כדי לבצע חלק ניכר מעבודת הפיתוח שלה אוטומטית</a:t>
             </a:r>
             <a:endParaRPr lang="en-US" sz="1900" dirty="0"/>
           </a:p>

--- a/lesson_01/lesson_01_slides.pptx
+++ b/lesson_01/lesson_01_slides.pptx
@@ -3271,7 +3271,41 @@
                 <a:ea typeface="Calibri" pitchFamily="34" charset="-122"/>
                 <a:cs typeface="Calibri" pitchFamily="34" charset="-120"/>
               </a:rPr>
-              <a:t>• הוא ממשיך "לנחש" את הטקסט הכי סביר — גם אם זה אומר להמציא פונקציה, ספרייה, או API שלא קיימים</a:t>
+              <a:t>• הוא ממשיך "לנחש" את הטקסט הכי סביר — גם אם זה אומר להמציא פונקציה, ספרייה, או </a:t>
+            </a:r>
+            <a:pPr rtl="1" algn="r" indent="0" marL="0">
+              <a:spcAft>
+                <a:spcPts val="1000"/>
+              </a:spcAft>
+              <a:buNone/>
+            </a:pPr>
+            <a:r>
+              <a:rPr lang="en-US" sz="1900" b="1" dirty="0">
+                <a:solidFill>
+                  <a:srgbClr val="1B1F3B"/>
+                </a:solidFill>
+                <a:latin typeface="Calibri" pitchFamily="34" charset="0"/>
+                <a:ea typeface="Calibri" pitchFamily="34" charset="-122"/>
+                <a:cs typeface="Calibri" pitchFamily="34" charset="-120"/>
+              </a:rPr>
+              <a:t>API</a:t>
+            </a:r>
+            <a:pPr rtl="1" algn="r" indent="0" marL="0">
+              <a:spcAft>
+                <a:spcPts val="1000"/>
+              </a:spcAft>
+              <a:buNone/>
+            </a:pPr>
+            <a:r>
+              <a:rPr lang="en-US" sz="1900" dirty="0">
+                <a:solidFill>
+                  <a:srgbClr val="1B1F3B"/>
+                </a:solidFill>
+                <a:latin typeface="Calibri" pitchFamily="34" charset="0"/>
+                <a:ea typeface="Calibri" pitchFamily="34" charset="-122"/>
+                <a:cs typeface="Calibri" pitchFamily="34" charset="-120"/>
+              </a:rPr>
+              <a:t> (ממשק שדרכו תוכנות מדברות זו עם זו) שלא קיימים</a:t>
             </a:r>
             <a:endParaRPr lang="en-US" sz="1900" dirty="0"/>
           </a:p>
@@ -5737,7 +5771,41 @@
                 <a:ea typeface="Calibri" pitchFamily="34" charset="-122"/>
                 <a:cs typeface="Calibri" pitchFamily="34" charset="-120"/>
               </a:rPr>
-              <a:t>• Google הריצה כלי CLI חינמי — Gemini CLI</a:t>
+              <a:t>• Google הריצה כלי </a:t>
+            </a:r>
+            <a:pPr rtl="1" algn="r" indent="0" marL="0">
+              <a:spcAft>
+                <a:spcPts val="1000"/>
+              </a:spcAft>
+              <a:buNone/>
+            </a:pPr>
+            <a:r>
+              <a:rPr lang="en-US" sz="1900" b="1" dirty="0">
+                <a:solidFill>
+                  <a:srgbClr val="1B1F3B"/>
+                </a:solidFill>
+                <a:latin typeface="Calibri" pitchFamily="34" charset="0"/>
+                <a:ea typeface="Calibri" pitchFamily="34" charset="-122"/>
+                <a:cs typeface="Calibri" pitchFamily="34" charset="-120"/>
+              </a:rPr>
+              <a:t>CLI</a:t>
+            </a:r>
+            <a:pPr rtl="1" algn="r" indent="0" marL="0">
+              <a:spcAft>
+                <a:spcPts val="1000"/>
+              </a:spcAft>
+              <a:buNone/>
+            </a:pPr>
+            <a:r>
+              <a:rPr lang="en-US" sz="1900" dirty="0">
+                <a:solidFill>
+                  <a:srgbClr val="1B1F3B"/>
+                </a:solidFill>
+                <a:latin typeface="Calibri" pitchFamily="34" charset="0"/>
+                <a:ea typeface="Calibri" pitchFamily="34" charset="-122"/>
+                <a:cs typeface="Calibri" pitchFamily="34" charset="-120"/>
+              </a:rPr>
+              <a:t> (ממשק שורת-פקודה — עובדים דרך הקלדת פקודות טקסט, בלי עכבר) חינמי — Gemini CLI</a:t>
             </a:r>
             <a:endParaRPr lang="en-US" sz="1900" dirty="0"/>
           </a:p>
@@ -6148,7 +6216,41 @@
                 <a:ea typeface="Calibri" pitchFamily="34" charset="-122"/>
                 <a:cs typeface="Calibri" pitchFamily="34" charset="-120"/>
               </a:rPr>
-              <a:t> (הפלטפורמה המרכזית בעולם לאחסון ושיתוף קוד — נסביר עליה לעומק בשיעור הבא) שינה את מסלול הסטודנטים ל-Copilot Student</a:t>
+              <a:t> (הפלטפורמה המרכזית בעולם לאחסון ושיתוף קוד — נסביר עליה לעומק בשיעור הבא) שינה את מסלול הסטודנטים ל-</a:t>
+            </a:r>
+            <a:pPr rtl="1" algn="r" indent="0" marL="0">
+              <a:spcAft>
+                <a:spcPts val="1000"/>
+              </a:spcAft>
+              <a:buNone/>
+            </a:pPr>
+            <a:r>
+              <a:rPr lang="en-US" sz="1900" b="1" dirty="0">
+                <a:solidFill>
+                  <a:srgbClr val="1B1F3B"/>
+                </a:solidFill>
+                <a:latin typeface="Calibri" pitchFamily="34" charset="0"/>
+                <a:ea typeface="Calibri" pitchFamily="34" charset="-122"/>
+                <a:cs typeface="Calibri" pitchFamily="34" charset="-120"/>
+              </a:rPr>
+              <a:t>Copilot Student</a:t>
+            </a:r>
+            <a:pPr rtl="1" algn="r" indent="0" marL="0">
+              <a:spcAft>
+                <a:spcPts val="1000"/>
+              </a:spcAft>
+              <a:buNone/>
+            </a:pPr>
+            <a:r>
+              <a:rPr lang="en-US" sz="1900" dirty="0">
+                <a:solidFill>
+                  <a:srgbClr val="1B1F3B"/>
+                </a:solidFill>
+                <a:latin typeface="Calibri" pitchFamily="34" charset="0"/>
+                <a:ea typeface="Calibri" pitchFamily="34" charset="-122"/>
+                <a:cs typeface="Calibri" pitchFamily="34" charset="-120"/>
+              </a:rPr>
+              <a:t> (התוכנית שנותנת לסטודנטים גישה חינמית ל-GitHub Copilot)</a:t>
             </a:r>
             <a:endParaRPr lang="en-US" sz="1900" dirty="0"/>
           </a:p>
@@ -7173,7 +7275,41 @@
                 <a:ea typeface="Calibri" pitchFamily="34" charset="-122"/>
                 <a:cs typeface="Calibri" pitchFamily="34" charset="-120"/>
               </a:rPr>
-              <a:t>• לא "מבין" כמו בן אדם — מנבא Token אחר Token מה סביר לבוא בהמשך</a:t>
+              <a:t>• לא "מבין" כמו בן אדם — מנבא </a:t>
+            </a:r>
+            <a:pPr rtl="1" algn="r" indent="0" marL="0">
+              <a:spcAft>
+                <a:spcPts val="1000"/>
+              </a:spcAft>
+              <a:buNone/>
+            </a:pPr>
+            <a:r>
+              <a:rPr lang="en-US" sz="1900" b="1" dirty="0">
+                <a:solidFill>
+                  <a:srgbClr val="1B1F3B"/>
+                </a:solidFill>
+                <a:latin typeface="Calibri" pitchFamily="34" charset="0"/>
+                <a:ea typeface="Calibri" pitchFamily="34" charset="-122"/>
+                <a:cs typeface="Calibri" pitchFamily="34" charset="-120"/>
+              </a:rPr>
+              <a:t>Token</a:t>
+            </a:r>
+            <a:pPr rtl="1" algn="r" indent="0" marL="0">
+              <a:spcAft>
+                <a:spcPts val="1000"/>
+              </a:spcAft>
+              <a:buNone/>
+            </a:pPr>
+            <a:r>
+              <a:rPr lang="en-US" sz="1900" dirty="0">
+                <a:solidFill>
+                  <a:srgbClr val="1B1F3B"/>
+                </a:solidFill>
+                <a:latin typeface="Calibri" pitchFamily="34" charset="0"/>
+                <a:ea typeface="Calibri" pitchFamily="34" charset="-122"/>
+                <a:cs typeface="Calibri" pitchFamily="34" charset="-120"/>
+              </a:rPr>
+              <a:t> (יחידת טקסט קטנה: מילה או חלק ממילה) אחר Token מה סביר לבוא בהמשך</a:t>
             </a:r>
             <a:endParaRPr lang="en-US" sz="1900" dirty="0"/>
           </a:p>
@@ -7593,7 +7729,7 @@
                 <a:ea typeface="Calibri" pitchFamily="34" charset="-122"/>
                 <a:cs typeface="Calibri" pitchFamily="34" charset="-120"/>
               </a:rPr>
-              <a:t>• שמירה עם localStorage</a:t>
+              <a:t>• שמירה עם localStorage (זיכרון מקומי בדפדפן שנשמר גם אחרי רענון הדף)</a:t>
             </a:r>
             <a:endParaRPr lang="en-US" sz="1800" dirty="0"/>
           </a:p>
@@ -9274,7 +9410,41 @@
                 <a:ea typeface="Calibri" pitchFamily="34" charset="-122"/>
                 <a:cs typeface="Calibri" pitchFamily="34" charset="-120"/>
               </a:rPr>
-              <a:t> מהאפליקציות הארגוניות — סוכני AI אוטונומיים עד סוף 2026 (מ-5% ב-2025, Deloitte)</a:t>
+              <a:t> מהאפליקציות הארגוניות — סוכני AI אוטונומיים עד סוף 2026 (מ-5% ב-2025, לפי </a:t>
+            </a:r>
+            <a:pPr rtl="1" algn="r" indent="0" marL="0">
+              <a:spcAft>
+                <a:spcPts val="1000"/>
+              </a:spcAft>
+              <a:buNone/>
+            </a:pPr>
+            <a:r>
+              <a:rPr lang="en-US" sz="1900" b="1" dirty="0">
+                <a:solidFill>
+                  <a:srgbClr val="1B1F3B"/>
+                </a:solidFill>
+                <a:latin typeface="Calibri" pitchFamily="34" charset="0"/>
+                <a:ea typeface="Calibri" pitchFamily="34" charset="-122"/>
+                <a:cs typeface="Calibri" pitchFamily="34" charset="-120"/>
+              </a:rPr>
+              <a:t>Deloitte</a:t>
+            </a:r>
+            <a:pPr rtl="1" algn="r" indent="0" marL="0">
+              <a:spcAft>
+                <a:spcPts val="1000"/>
+              </a:spcAft>
+              <a:buNone/>
+            </a:pPr>
+            <a:r>
+              <a:rPr lang="en-US" sz="1900" dirty="0">
+                <a:solidFill>
+                  <a:srgbClr val="1B1F3B"/>
+                </a:solidFill>
+                <a:latin typeface="Calibri" pitchFamily="34" charset="0"/>
+                <a:ea typeface="Calibri" pitchFamily="34" charset="-122"/>
+                <a:cs typeface="Calibri" pitchFamily="34" charset="-120"/>
+              </a:rPr>
+              <a:t> — חברת ייעוץ עסקי בינלאומית גדולה)</a:t>
             </a:r>
             <a:endParaRPr lang="en-US" sz="1900" dirty="0"/>
           </a:p>
@@ -9603,7 +9773,7 @@
                 <a:ea typeface="Calibri" pitchFamily="34" charset="-122"/>
                 <a:cs typeface="Calibri" pitchFamily="34" charset="-120"/>
               </a:rPr>
-              <a:t>• קוד מכונה → שפות עיליות (כמו Python) → IDE + Autocomplete → Git → </a:t>
+              <a:t>• קוד מכונה → שפות עיליות (כמו Python) → </a:t>
             </a:r>
             <a:pPr rtl="1" algn="r" indent="0" marL="0">
               <a:spcAft>
@@ -9620,8 +9790,93 @@
                 <a:ea typeface="Calibri" pitchFamily="34" charset="-122"/>
                 <a:cs typeface="Calibri" pitchFamily="34" charset="-120"/>
               </a:rPr>
+              <a:t>IDE</a:t>
+            </a:r>
+            <a:pPr rtl="1" algn="r" indent="0" marL="0">
+              <a:spcAft>
+                <a:spcPts val="1000"/>
+              </a:spcAft>
+              <a:buNone/>
+            </a:pPr>
+            <a:r>
+              <a:rPr lang="en-US" sz="1900" dirty="0">
+                <a:solidFill>
+                  <a:srgbClr val="1B1F3B"/>
+                </a:solidFill>
+                <a:latin typeface="Calibri" pitchFamily="34" charset="0"/>
+                <a:ea typeface="Calibri" pitchFamily="34" charset="-122"/>
+                <a:cs typeface="Calibri" pitchFamily="34" charset="-120"/>
+              </a:rPr>
+              <a:t> (תוכנה אחת לכתיבה, הרצה ובדיקה של קוד) ו-Autocomplete (השלמה אוטומטית של קוד) → </a:t>
+            </a:r>
+            <a:pPr rtl="1" algn="r" indent="0" marL="0">
+              <a:spcAft>
+                <a:spcPts val="1000"/>
+              </a:spcAft>
+              <a:buNone/>
+            </a:pPr>
+            <a:r>
+              <a:rPr lang="en-US" sz="1900" b="1" dirty="0">
+                <a:solidFill>
+                  <a:srgbClr val="1B1F3B"/>
+                </a:solidFill>
+                <a:latin typeface="Calibri" pitchFamily="34" charset="0"/>
+                <a:ea typeface="Calibri" pitchFamily="34" charset="-122"/>
+                <a:cs typeface="Calibri" pitchFamily="34" charset="-120"/>
+              </a:rPr>
+              <a:t>Git</a:t>
+            </a:r>
+            <a:pPr rtl="1" algn="r" indent="0" marL="0">
+              <a:spcAft>
+                <a:spcPts val="1000"/>
+              </a:spcAft>
+              <a:buNone/>
+            </a:pPr>
+            <a:r>
+              <a:rPr lang="en-US" sz="1900" dirty="0">
+                <a:solidFill>
+                  <a:srgbClr val="1B1F3B"/>
+                </a:solidFill>
+                <a:latin typeface="Calibri" pitchFamily="34" charset="0"/>
+                <a:ea typeface="Calibri" pitchFamily="34" charset="-122"/>
+                <a:cs typeface="Calibri" pitchFamily="34" charset="-120"/>
+              </a:rPr>
+              <a:t> (מערכת לשמירת היסטוריית שינויים בקוד) → </a:t>
+            </a:r>
+            <a:pPr rtl="1" algn="r" indent="0" marL="0">
+              <a:spcAft>
+                <a:spcPts val="1000"/>
+              </a:spcAft>
+              <a:buNone/>
+            </a:pPr>
+            <a:r>
+              <a:rPr lang="en-US" sz="1900" b="1" dirty="0">
+                <a:solidFill>
+                  <a:srgbClr val="1B1F3B"/>
+                </a:solidFill>
+                <a:latin typeface="Calibri" pitchFamily="34" charset="0"/>
+                <a:ea typeface="Calibri" pitchFamily="34" charset="-122"/>
+                <a:cs typeface="Calibri" pitchFamily="34" charset="-120"/>
+              </a:rPr>
               <a:t>AI Agentic</a:t>
             </a:r>
+            <a:pPr rtl="1" algn="r" indent="0" marL="0">
+              <a:spcAft>
+                <a:spcPts val="1000"/>
+              </a:spcAft>
+              <a:buNone/>
+            </a:pPr>
+            <a:r>
+              <a:rPr lang="en-US" sz="1900" dirty="0">
+                <a:solidFill>
+                  <a:srgbClr val="1B1F3B"/>
+                </a:solidFill>
+                <a:latin typeface="Calibri" pitchFamily="34" charset="0"/>
+                <a:ea typeface="Calibri" pitchFamily="34" charset="-122"/>
+                <a:cs typeface="Calibri" pitchFamily="34" charset="-120"/>
+              </a:rPr>
+              <a:t> (AI שפועל עצמאית על משימה שלמה, לא רק עונה לשאלה)</a:t>
+            </a:r>
             <a:endParaRPr lang="en-US" sz="1900" dirty="0"/>
           </a:p>
           <a:p>
@@ -9640,7 +9895,7 @@
                 <a:ea typeface="Calibri" pitchFamily="34" charset="-122"/>
                 <a:cs typeface="Calibri" pitchFamily="34" charset="-120"/>
               </a:rPr>
-              <a:t>• כל קפיצה שינתה מה נחשב "עבודה של מפתח" — ולא נעצרה. את IDE, Git ו-Autocomplete נסביר לעומק בשיעור הבא</a:t>
+              <a:t>• כל קפיצה שינתה מה נחשב "עבודה של מפתח" — ולא נעצרה (נעמיק בכל כלי לאורך הקורס)</a:t>
             </a:r>
             <a:endParaRPr lang="en-US" sz="1900" dirty="0"/>
           </a:p>
@@ -9918,7 +10173,7 @@
                 <a:ea typeface="Calibri" pitchFamily="34" charset="-122"/>
                 <a:cs typeface="Calibri" pitchFamily="34" charset="-120"/>
               </a:rPr>
-              <a:t>• IDE ראשונים: </a:t>
+              <a:t>• IDE (סביבת פיתוח לכתיבת קוד — ראינו בשקף הקודם) ראשונים: </a:t>
             </a:r>
             <a:pPr rtl="1" algn="r" indent="0" marL="0">
               <a:spcAft>
@@ -9955,7 +10210,7 @@
                 <a:ea typeface="Calibri" pitchFamily="34" charset="-122"/>
                 <a:cs typeface="Calibri" pitchFamily="34" charset="-120"/>
               </a:rPr>
-              <a:t>• Git: </a:t>
+              <a:t>• Git (ניהול גרסאות קוד): </a:t>
             </a:r>
             <a:pPr rtl="1" algn="r" indent="0" marL="0">
               <a:spcAft>
@@ -9989,7 +10244,7 @@
                 <a:ea typeface="Calibri" pitchFamily="34" charset="-122"/>
                 <a:cs typeface="Calibri" pitchFamily="34" charset="-120"/>
               </a:rPr>
-              <a:t> · GitHub: </a:t>
+              <a:t> · GitHub (פלטפורמה לאחסון ושיתוף קוד, מבוססת Git): </a:t>
             </a:r>
             <a:pPr rtl="1" algn="r" indent="0" marL="0">
               <a:spcAft>
@@ -10026,7 +10281,7 @@
                 <a:ea typeface="Calibri" pitchFamily="34" charset="-122"/>
                 <a:cs typeface="Calibri" pitchFamily="34" charset="-120"/>
               </a:rPr>
-              <a:t>• GitHub Copilot (Preview): </a:t>
+              <a:t>• GitHub Copilot (עוזר AI לכתיבת קוד) בגרסת Preview (תצוגה מקדימה): </a:t>
             </a:r>
             <a:pPr rtl="1" algn="r" indent="0" marL="0">
               <a:spcAft>
@@ -10100,7 +10355,7 @@
                 <a:ea typeface="Calibri" pitchFamily="34" charset="-122"/>
                 <a:cs typeface="Calibri" pitchFamily="34" charset="-120"/>
               </a:rPr>
-              <a:t>• כלים אג'נטיים אמיתיים: </a:t>
+              <a:t>• כלים אג'נטיים אמיתיים (AI שפועל עצמאית על משימה שלמה): </a:t>
             </a:r>
             <a:pPr rtl="1" algn="r" indent="0" marL="0">
               <a:spcAft>
@@ -10817,7 +11072,41 @@
                 <a:ea typeface="Calibri" pitchFamily="34" charset="-122"/>
                 <a:cs typeface="Calibri" pitchFamily="34" charset="-120"/>
               </a:rPr>
-              <a:t>• שוכח הקשר בלי Context מנוהל (נעמיק בשיעור 3)</a:t>
+              <a:t>• שוכח הקשר בלי </a:t>
+            </a:r>
+            <a:pPr rtl="1" algn="r" indent="0" marL="0">
+              <a:spcAft>
+                <a:spcPts val="1000"/>
+              </a:spcAft>
+              <a:buNone/>
+            </a:pPr>
+            <a:r>
+              <a:rPr lang="en-US" sz="1900" b="1" dirty="0">
+                <a:solidFill>
+                  <a:srgbClr val="1B1F3B"/>
+                </a:solidFill>
+                <a:latin typeface="Calibri" pitchFamily="34" charset="0"/>
+                <a:ea typeface="Calibri" pitchFamily="34" charset="-122"/>
+                <a:cs typeface="Calibri" pitchFamily="34" charset="-120"/>
+              </a:rPr>
+              <a:t>Context</a:t>
+            </a:r>
+            <a:pPr rtl="1" algn="r" indent="0" marL="0">
+              <a:spcAft>
+                <a:spcPts val="1000"/>
+              </a:spcAft>
+              <a:buNone/>
+            </a:pPr>
+            <a:r>
+              <a:rPr lang="en-US" sz="1900" dirty="0">
+                <a:solidFill>
+                  <a:srgbClr val="1B1F3B"/>
+                </a:solidFill>
+                <a:latin typeface="Calibri" pitchFamily="34" charset="0"/>
+                <a:ea typeface="Calibri" pitchFamily="34" charset="-122"/>
+                <a:cs typeface="Calibri" pitchFamily="34" charset="-120"/>
+              </a:rPr>
+              <a:t> (המידע שה-AI 'זוכר' על הפרויקט) מנוהל (נעמיק בשיעור 3)</a:t>
             </a:r>
             <a:endParaRPr lang="en-US" sz="1900" dirty="0"/>
           </a:p>

--- a/lesson_01/lesson_01_slides.pptx
+++ b/lesson_01/lesson_01_slides.pptx
@@ -3363,6 +3363,43 @@
             </a:r>
             <a:endParaRPr lang="en-US" sz="1900" dirty="0"/>
           </a:p>
+          <a:p>
+            <a:pPr rtl="1" algn="r" indent="0" marL="0">
+              <a:spcAft>
+                <a:spcPts val="1000"/>
+              </a:spcAft>
+              <a:buNone/>
+            </a:pPr>
+            <a:r>
+              <a:rPr lang="en-US" sz="1900" b="1" dirty="0">
+                <a:solidFill>
+                  <a:srgbClr val="1B1F3B"/>
+                </a:solidFill>
+                <a:latin typeface="Calibri" pitchFamily="34" charset="0"/>
+                <a:ea typeface="Calibri" pitchFamily="34" charset="-122"/>
+                <a:cs typeface="Calibri" pitchFamily="34" charset="-120"/>
+              </a:rPr>
+              <a:t>• למסלול AI:</a:t>
+            </a:r>
+            <a:pPr rtl="1" algn="r" indent="0" marL="0">
+              <a:spcAft>
+                <a:spcPts val="1000"/>
+              </a:spcAft>
+              <a:buNone/>
+            </a:pPr>
+            <a:r>
+              <a:rPr lang="en-US" sz="1900" dirty="0">
+                <a:solidFill>
+                  <a:srgbClr val="1B1F3B"/>
+                </a:solidFill>
+                <a:latin typeface="Calibri" pitchFamily="34" charset="0"/>
+                <a:ea typeface="Calibri" pitchFamily="34" charset="-122"/>
+                <a:cs typeface="Calibri" pitchFamily="34" charset="-120"/>
+              </a:rPr>
+              <a:t> זו אותה תופעה שמכירים מכל הקשר אחר של מודלי שפה, לא רק קוד — ההבדל כאן הוא שהפלט השגוי הופך לבאג אמיתי שרץ במערכת</a:t>
+            </a:r>
+            <a:endParaRPr lang="en-US" sz="1900" dirty="0"/>
+          </a:p>
         </p:txBody>
       </p:sp>
       <p:sp>
@@ -3421,7 +3458,7 @@
                 <a:ea typeface="Arial" pitchFamily="34" charset="-122"/>
                 <a:cs typeface="Arial" pitchFamily="34" charset="-120"/>
               </a:rPr>
-              <a:t>✔ מה עושים בפועל: לא מכירים פונקציה/ספרייה שה-AI השתמש בה? בודקים בתיעוד הרשמי לפני שממשיכים.</a:t>
+              <a:t>✔ מה עושים בפועל: לא מכירים פונקציה/ספרייה שה-AI השתמש בה? בודקים בתיעוד הרשמי לפני שממשיכים. ככלל אצבע: קוד שנראה מוכר מדי בקלות — זה בדיוק הזמן לעצור ולבדוק.</a:t>
             </a:r>
             <a:endParaRPr lang="en-US" sz="1700" dirty="0"/>
           </a:p>
@@ -3429,71 +3466,7 @@
       </p:sp>
       <p:sp>
         <p:nvSpPr>
-          <p:cNvPr id="7" name="Shape 5"/>
-          <p:cNvSpPr/>
-          <p:nvPr/>
-        </p:nvSpPr>
-        <p:spPr>
-          <a:xfrm>
-            <a:off x="548640" y="4846320"/>
-            <a:ext cx="11091672" cy="1143000"/>
-          </a:xfrm>
-          <a:prstGeom prst="rect">
-            <a:avLst/>
-          </a:prstGeom>
-          <a:solidFill>
-            <a:srgbClr val="F6F6F8"/>
-          </a:solidFill>
-          <a:ln w="12700">
-            <a:solidFill>
-              <a:srgbClr val="B8B8C8"/>
-            </a:solidFill>
-            <a:prstDash val="dash"/>
-          </a:ln>
-        </p:spPr>
-      </p:sp>
-      <p:sp>
-        <p:nvSpPr>
-          <p:cNvPr id="8" name="Text 6"/>
-          <p:cNvSpPr/>
-          <p:nvPr/>
-        </p:nvSpPr>
-        <p:spPr>
-          <a:xfrm>
-            <a:off x="548640" y="4846320"/>
-            <a:ext cx="11091672" cy="1143000"/>
-          </a:xfrm>
-          <a:prstGeom prst="rect">
-            <a:avLst/>
-          </a:prstGeom>
-          <a:noFill/>
-          <a:ln/>
-        </p:spPr>
-        <p:txBody>
-          <a:bodyPr wrap="square" lIns="101600" tIns="101600" rIns="101600" bIns="101600" rtlCol="0" anchor="ctr"/>
-          <a:lstStyle/>
-          <a:p>
-            <a:pPr rtl="1" algn="ctr" indent="0" marL="0">
-              <a:buNone/>
-            </a:pPr>
-            <a:r>
-              <a:rPr lang="en-US" sz="1300" i="1" dirty="0">
-                <a:solidFill>
-                  <a:srgbClr val="6B7280"/>
-                </a:solidFill>
-                <a:latin typeface="Calibri" pitchFamily="34" charset="0"/>
-                <a:ea typeface="Calibri" pitchFamily="34" charset="-122"/>
-                <a:cs typeface="Calibri" pitchFamily="34" charset="-120"/>
-              </a:rPr>
-              <a:t>[תמונה: קטע קוד עם קריאה לפונקציה שנראית לגיטימית, וסימן שאלה אדום ליד שמה — "האם זה קיים באמת?"]</a:t>
-            </a:r>
-            <a:endParaRPr lang="en-US" sz="1300" dirty="0"/>
-          </a:p>
-        </p:txBody>
-      </p:sp>
-      <p:sp>
-        <p:nvSpPr>
-          <p:cNvPr id="9" name="Text 7"/>
+          <p:cNvPr id="7" name="Text 5"/>
           <p:cNvSpPr/>
           <p:nvPr/>
         </p:nvSpPr>
@@ -4142,7 +4115,7 @@
                 <a:ea typeface="Calibri" pitchFamily="34" charset="-122"/>
                 <a:cs typeface="Calibri" pitchFamily="34" charset="-120"/>
               </a:rPr>
-              <a:t> (ארגון מחקר עצמאי שבוחן ביצועים אמיתיים של כלי AI) עקב אחרי מפתחים מנוסים שעבדו עם כלי AI על משימות אמיתיות</a:t>
+              <a:t> (ארגון מחקר עצמאי שבוחן ביצועים אמיתיים של כלי AI) השווה מפתחים מנוסים שעבדו עם כלי AI על משימות אמיתיות, מול אותם מפתחים על משימות דומות בלי AI</a:t>
             </a:r>
             <a:endParaRPr lang="en-US" sz="1900" dirty="0"/>
           </a:p>
@@ -4180,6 +4153,23 @@
                 <a:cs typeface="Calibri" pitchFamily="34" charset="-120"/>
               </a:rPr>
               <a:t>איטיים ב-19%</a:t>
+            </a:r>
+            <a:pPr rtl="1" algn="r" indent="0" marL="0">
+              <a:spcAft>
+                <a:spcPts val="1000"/>
+              </a:spcAft>
+              <a:buNone/>
+            </a:pPr>
+            <a:r>
+              <a:rPr lang="en-US" sz="1900" dirty="0">
+                <a:solidFill>
+                  <a:srgbClr val="1B1F3B"/>
+                </a:solidFill>
+                <a:latin typeface="Calibri" pitchFamily="34" charset="0"/>
+                <a:ea typeface="Calibri" pitchFamily="34" charset="-122"/>
+                <a:cs typeface="Calibri" pitchFamily="34" charset="-120"/>
+              </a:rPr>
+              <a:t> (לעומת עבודה בלי כלי AI)</a:t>
             </a:r>
             <a:endParaRPr lang="en-US" sz="1900" dirty="0"/>
           </a:p>
@@ -5445,7 +5435,7 @@
                 <a:ea typeface="Calibri" pitchFamily="34" charset="-122"/>
                 <a:cs typeface="Calibri" pitchFamily="34" charset="-120"/>
               </a:rPr>
-              <a:t> יותר חוב טכני, PR עם AI = </a:t>
+              <a:t> יותר </a:t>
             </a:r>
             <a:pPr rtl="1" algn="r" indent="0" marL="0">
               <a:spcAft>
@@ -5462,6 +5452,40 @@
                 <a:ea typeface="Calibri" pitchFamily="34" charset="-122"/>
                 <a:cs typeface="Calibri" pitchFamily="34" charset="-120"/>
               </a:rPr>
+              <a:t>חוב טכני</a:t>
+            </a:r>
+            <a:pPr rtl="1" algn="r" indent="0" marL="0">
+              <a:spcAft>
+                <a:spcPts val="1000"/>
+              </a:spcAft>
+              <a:buNone/>
+            </a:pPr>
+            <a:r>
+              <a:rPr lang="en-US" sz="1900" dirty="0">
+                <a:solidFill>
+                  <a:srgbClr val="1B1F3B"/>
+                </a:solidFill>
+                <a:latin typeface="Calibri" pitchFamily="34" charset="0"/>
+                <a:ea typeface="Calibri" pitchFamily="34" charset="-122"/>
+                <a:cs typeface="Calibri" pitchFamily="34" charset="-120"/>
+              </a:rPr>
+              <a:t> (עבודה "מהירה" עכשיו שדורשת תיקון יקר יותר בהמשך), ו-PR עם AI = </a:t>
+            </a:r>
+            <a:pPr rtl="1" algn="r" indent="0" marL="0">
+              <a:spcAft>
+                <a:spcPts val="1000"/>
+              </a:spcAft>
+              <a:buNone/>
+            </a:pPr>
+            <a:r>
+              <a:rPr lang="en-US" sz="1900" b="1" dirty="0">
+                <a:solidFill>
+                  <a:srgbClr val="1B1F3B"/>
+                </a:solidFill>
+                <a:latin typeface="Calibri" pitchFamily="34" charset="0"/>
+                <a:ea typeface="Calibri" pitchFamily="34" charset="-122"/>
+                <a:cs typeface="Calibri" pitchFamily="34" charset="-120"/>
+              </a:rPr>
               <a:t>פי 1.7</a:t>
             </a:r>
             <a:pPr rtl="1" algn="r" indent="0" marL="0">
@@ -5479,7 +5503,7 @@
                 <a:ea typeface="Calibri" pitchFamily="34" charset="-122"/>
                 <a:cs typeface="Calibri" pitchFamily="34" charset="-120"/>
               </a:rPr>
-              <a:t> יותר בעיות</a:t>
+              <a:t> יותר בעיות מ-PR שכתב בן אדם</a:t>
             </a:r>
             <a:endParaRPr lang="en-US" sz="1900" dirty="0"/>
           </a:p>
@@ -7965,7 +7989,7 @@
                 <a:ea typeface="Calibri" pitchFamily="34" charset="-122"/>
                 <a:cs typeface="Calibri" pitchFamily="34" charset="-120"/>
               </a:rPr>
-              <a:t>2. AI מאיץ עבודה, אבל 71% לא סומכים על הפלט בלי ביקורת — ולכן תמיד בודקים קוד לא מוכר (Hallucination)</a:t>
+              <a:t>2. AI מאיץ עבודה, אבל כפי שראינו — רק 29% סומכים על הפלט (כלומר 71% לא) — ולכן תמיד בודקים קוד לא מוכר (Hallucination)</a:t>
             </a:r>
             <a:endParaRPr lang="en-US" sz="1800" dirty="0"/>
           </a:p>
@@ -8549,7 +8573,7 @@
                 <a:ea typeface="Calibri" pitchFamily="34" charset="-122"/>
                 <a:cs typeface="Calibri" pitchFamily="34" charset="-120"/>
               </a:rPr>
-              <a:t>• מנחים AI לכתוב/לבדוק/לתקן קוד — לא כותבים כל שורה לבד</a:t>
+              <a:t>• השם "Vibe" מרמז על תחושת זרימה: מתארים במילים מה רוצים, וה-AI הופך את זה לקוד עובד — לרוב תוך דקות ולא שעות</a:t>
             </a:r>
             <a:endParaRPr lang="en-US" sz="1900" dirty="0"/>
           </a:p>
@@ -8569,7 +8593,7 @@
                 <a:ea typeface="Calibri" pitchFamily="34" charset="-122"/>
                 <a:cs typeface="Calibri" pitchFamily="34" charset="-120"/>
               </a:rPr>
-              <a:t>• שומרים שליטה על כיוון, איכות והחלטות ארכיטקטוניות</a:t>
+              <a:t>• מנחים AI לכתוב/לבדוק/לתקן קוד — לא כותבים כל שורה לבד, ושומרים שליטה על כיוון, איכות והחלטות ארכיטקטוניות</a:t>
             </a:r>
             <a:endParaRPr lang="en-US" sz="1900" dirty="0"/>
           </a:p>
@@ -8606,11 +8630,8 @@
                 <a:ea typeface="Calibri" pitchFamily="34" charset="-122"/>
                 <a:cs typeface="Calibri" pitchFamily="34" charset="-120"/>
               </a:rPr>
-              <a:t> = "מקלידים פרומפט ומקווים לטוב"</a:t>
-            </a:r>
-            <a:endParaRPr lang="en-US" sz="1900" dirty="0"/>
-          </a:p>
-          <a:p>
+              <a:t> = "מקלידים פרומפט ומקווים לטוב" · </a:t>
+            </a:r>
             <a:pPr rtl="1" algn="r" indent="0" marL="0">
               <a:spcAft>
                 <a:spcPts val="1000"/>
@@ -8626,7 +8647,7 @@
                 <a:ea typeface="Calibri" pitchFamily="34" charset="-122"/>
                 <a:cs typeface="Calibri" pitchFamily="34" charset="-120"/>
               </a:rPr>
-              <a:t>• כן</a:t>
+              <a:t>כן</a:t>
             </a:r>
             <a:pPr rtl="1" algn="r" indent="0" marL="0">
               <a:spcAft>

--- a/lesson_01/lesson_01_slides.pptx
+++ b/lesson_01/lesson_01_slides.pptx
@@ -3738,7 +3738,7 @@
                 <a:ea typeface="Calibri" pitchFamily="34" charset="-122"/>
                 <a:cs typeface="Calibri" pitchFamily="34" charset="-120"/>
               </a:rPr>
-              <a:t>• קוד AI-heavy: </a:t>
+              <a:t>• בפרויקטים שהסתמכו הרבה על AI (AI-heavy), לעומת פרויקטים שהסתמכו עליו פחות: </a:t>
             </a:r>
             <a:pPr rtl="1" algn="r" indent="0" marL="0">
               <a:spcAft>
@@ -3772,7 +3772,7 @@
                 <a:ea typeface="Calibri" pitchFamily="34" charset="-122"/>
                 <a:cs typeface="Calibri" pitchFamily="34" charset="-120"/>
               </a:rPr>
-              <a:t> באגים, </a:t>
+              <a:t> יותר באגים, </a:t>
             </a:r>
             <a:pPr rtl="1" algn="r" indent="0" marL="0">
               <a:spcAft>
@@ -3789,7 +3789,7 @@
                 <a:ea typeface="Calibri" pitchFamily="34" charset="-122"/>
                 <a:cs typeface="Calibri" pitchFamily="34" charset="-120"/>
               </a:rPr>
-              <a:t>7.2%-</a:t>
+              <a:t>ירידה של 7.2%</a:t>
             </a:r>
             <a:pPr rtl="1" algn="r" indent="0" marL="0">
               <a:spcAft>
@@ -3806,7 +3806,7 @@
                 <a:ea typeface="Calibri" pitchFamily="34" charset="-122"/>
                 <a:cs typeface="Calibri" pitchFamily="34" charset="-120"/>
               </a:rPr>
-              <a:t> יציבות מערכת</a:t>
+              <a:t> ביציבות המערכת</a:t>
             </a:r>
             <a:endParaRPr lang="en-US" sz="1900" dirty="0"/>
           </a:p>

--- a/lesson_01/lesson_01_slides.pptx
+++ b/lesson_01/lesson_01_slides.pptx
@@ -7279,7 +7279,7 @@
                 <a:ea typeface="Calibri" pitchFamily="34" charset="-122"/>
                 <a:cs typeface="Calibri" pitchFamily="34" charset="-120"/>
               </a:rPr>
-              <a:t> = תוכנה שאומנה על כמויות עצומות של טקסט וקוד</a:t>
+              <a:t> = תוכנה שאומנה (למדה מדוגמאות) על כמויות עצומות של טקסט וקוד</a:t>
             </a:r>
             <a:endParaRPr lang="en-US" sz="1900" dirty="0"/>
           </a:p>
@@ -7299,7 +7299,61 @@
                 <a:ea typeface="Calibri" pitchFamily="34" charset="-122"/>
                 <a:cs typeface="Calibri" pitchFamily="34" charset="-120"/>
               </a:rPr>
-              <a:t>• לא "מבין" כמו בן אדם — מנבא </a:t>
+              <a:t>• כותבים בקשה בשפה טבעית (למשל: "תכתוב לי פונקציה שממיינת רשימה") — הטקסט הזה נקרא </a:t>
+            </a:r>
+            <a:pPr rtl="1" algn="r" indent="0" marL="0">
+              <a:spcAft>
+                <a:spcPts val="1000"/>
+              </a:spcAft>
+              <a:buNone/>
+            </a:pPr>
+            <a:r>
+              <a:rPr lang="en-US" sz="1900" b="1" dirty="0">
+                <a:solidFill>
+                  <a:srgbClr val="1B1F3B"/>
+                </a:solidFill>
+                <a:latin typeface="Calibri" pitchFamily="34" charset="0"/>
+                <a:ea typeface="Calibri" pitchFamily="34" charset="-122"/>
+                <a:cs typeface="Calibri" pitchFamily="34" charset="-120"/>
+              </a:rPr>
+              <a:t>Prompt</a:t>
+            </a:r>
+            <a:pPr rtl="1" algn="r" indent="0" marL="0">
+              <a:spcAft>
+                <a:spcPts val="1000"/>
+              </a:spcAft>
+              <a:buNone/>
+            </a:pPr>
+            <a:r>
+              <a:rPr lang="en-US" sz="1900" dirty="0">
+                <a:solidFill>
+                  <a:srgbClr val="1B1F3B"/>
+                </a:solidFill>
+                <a:latin typeface="Calibri" pitchFamily="34" charset="0"/>
+                <a:ea typeface="Calibri" pitchFamily="34" charset="-122"/>
+                <a:cs typeface="Calibri" pitchFamily="34" charset="-120"/>
+              </a:rPr>
+              <a:t> (פרומפט)</a:t>
+            </a:r>
+            <a:endParaRPr lang="en-US" sz="1900" dirty="0"/>
+          </a:p>
+          <a:p>
+            <a:pPr rtl="1" algn="r" indent="0" marL="0">
+              <a:spcAft>
+                <a:spcPts val="1000"/>
+              </a:spcAft>
+              <a:buNone/>
+            </a:pPr>
+            <a:r>
+              <a:rPr lang="en-US" sz="1900" dirty="0">
+                <a:solidFill>
+                  <a:srgbClr val="1B1F3B"/>
+                </a:solidFill>
+                <a:latin typeface="Calibri" pitchFamily="34" charset="0"/>
+                <a:ea typeface="Calibri" pitchFamily="34" charset="-122"/>
+                <a:cs typeface="Calibri" pitchFamily="34" charset="-120"/>
+              </a:rPr>
+              <a:t>• המודל לא "מבין" את הפרומפט כמו בן אדם — מנבא </a:t>
             </a:r>
             <a:pPr rtl="1" algn="r" indent="0" marL="0">
               <a:spcAft>

--- a/lesson_01/lesson_01_slides.pptx
+++ b/lesson_01/lesson_01_slides.pptx
@@ -11320,7 +11320,7 @@
                 <a:ea typeface="Arial" pitchFamily="34" charset="-122"/>
                 <a:cs typeface="Arial" pitchFamily="34" charset="-120"/>
               </a:rPr>
-              <a:t>✔ מה עושים בפועל: כל אחת מהמגבלות האלה היא סיבה לשלב Review אנושי בתהליך — לא סיבה לוותר על AI לגמרי.</a:t>
+              <a:t>✔ מה עושים בפועל: כל אחת מהמגבלות האלה היא סיבה לשלב Review (בדיקה) אנושי בתהליך — לא סיבה לוותר על AI לגמרי.</a:t>
             </a:r>
             <a:endParaRPr lang="en-US" sz="1700" dirty="0"/>
           </a:p>

--- a/lesson_01/lesson_01_slides.pptx
+++ b/lesson_01/lesson_01_slides.pptx
@@ -6881,7 +6881,7 @@
         </p:nvSpPr>
         <p:spPr>
           <a:xfrm>
-            <a:off x="548640" y="640080"/>
+            <a:off x="548640" y="457200"/>
             <a:ext cx="11091672" cy="365760"/>
           </a:xfrm>
           <a:prstGeom prst="rect">
@@ -6920,7 +6920,7 @@
         </p:nvSpPr>
         <p:spPr>
           <a:xfrm>
-            <a:off x="4718304" y="1051560"/>
+            <a:off x="4718304" y="868680"/>
             <a:ext cx="2743200" cy="0"/>
           </a:xfrm>
           <a:prstGeom prst="line">
@@ -6943,8 +6943,8 @@
         </p:nvSpPr>
         <p:spPr>
           <a:xfrm>
-            <a:off x="548640" y="1234440"/>
-            <a:ext cx="11091672" cy="914400"/>
+            <a:off x="548640" y="1005840"/>
+            <a:ext cx="11091672" cy="594360"/>
           </a:xfrm>
           <a:prstGeom prst="rect">
             <a:avLst/>
@@ -6960,7 +6960,7 @@
               <a:buNone/>
             </a:pPr>
             <a:r>
-              <a:rPr lang="en-US" sz="3200" b="1" dirty="0">
+              <a:rPr lang="en-US" sz="2800" b="1" dirty="0">
                 <a:solidFill>
                   <a:srgbClr val="1B1F3B"/>
                 </a:solidFill>
@@ -6970,7 +6970,7 @@
               </a:rPr>
               <a:t>20 דקות. בונים יחד, בזמן אמת.</a:t>
             </a:r>
-            <a:endParaRPr lang="en-US" sz="3200" dirty="0"/>
+            <a:endParaRPr lang="en-US" sz="2800" dirty="0"/>
           </a:p>
         </p:txBody>
       </p:sp>
@@ -6982,8 +6982,8 @@
         </p:nvSpPr>
         <p:spPr>
           <a:xfrm>
-            <a:off x="548640" y="2148840"/>
-            <a:ext cx="11091672" cy="457200"/>
+            <a:off x="548640" y="1600200"/>
+            <a:ext cx="11091672" cy="365760"/>
           </a:xfrm>
           <a:prstGeom prst="rect">
             <a:avLst/>
@@ -7007,7 +7007,7 @@
                 <a:ea typeface="Calibri" pitchFamily="34" charset="-122"/>
                 <a:cs typeface="Calibri" pitchFamily="34" charset="-120"/>
               </a:rPr>
-              <a:t>ראו demo/prompt.md להוראות המלאות, לפי ה-Workflow שלמדנו</a:t>
+              <a:t>הפרומפט הראשון להקלדה חיה מול הכיתה, לפי ה-Workflow שלמדנו:</a:t>
             </a:r>
             <a:endParaRPr lang="en-US" sz="1500" dirty="0"/>
           </a:p>
@@ -7021,8 +7021,8 @@
         </p:nvSpPr>
         <p:spPr>
           <a:xfrm>
-            <a:off x="3200400" y="2834640"/>
-            <a:ext cx="5788152" cy="2743200"/>
+            <a:off x="1188720" y="2148840"/>
+            <a:ext cx="9811512" cy="3246120"/>
           </a:xfrm>
           <a:prstGeom prst="rect">
             <a:avLst/>
@@ -7034,7 +7034,7 @@
             <a:solidFill>
               <a:srgbClr val="B8B8C8"/>
             </a:solidFill>
-            <a:prstDash val="dash"/>
+            <a:prstDash val="solid"/>
           </a:ln>
         </p:spPr>
       </p:sp>
@@ -7046,8 +7046,8 @@
         </p:nvSpPr>
         <p:spPr>
           <a:xfrm>
-            <a:off x="3200400" y="2834640"/>
-            <a:ext cx="5788152" cy="2743200"/>
+            <a:off x="1508760" y="2423160"/>
+            <a:ext cx="9171432" cy="2697480"/>
           </a:xfrm>
           <a:prstGeom prst="rect">
             <a:avLst/>
@@ -7056,14 +7056,76 @@
           <a:ln/>
         </p:spPr>
         <p:txBody>
-          <a:bodyPr wrap="square" lIns="101600" tIns="101600" rIns="101600" bIns="101600" rtlCol="0" anchor="ctr"/>
+          <a:bodyPr wrap="square" lIns="0" tIns="0" rIns="0" bIns="0" rtlCol="0" anchor="t"/>
+          <a:lstStyle/>
+          <a:p>
+            <a:pPr rtl="1" algn="r" indent="0" marL="0">
+              <a:buNone/>
+            </a:pPr>
+            <a:r>
+              <a:rPr lang="en-US" sz="1500" dirty="0">
+                <a:solidFill>
+                  <a:srgbClr val="1B1F3B"/>
+                </a:solidFill>
+                <a:latin typeface="Courier New" pitchFamily="34" charset="0"/>
+                <a:ea typeface="Courier New" pitchFamily="34" charset="-122"/>
+                <a:cs typeface="Courier New" pitchFamily="34" charset="-120"/>
+              </a:rPr>
+              <a:t>בוא נבנה יחד, שלב אחר שלב, אפליקציית Note-Taking פשוטה שרצה בדפדפן — קובץ HTML יחיד עם CSS ו-JS מוטמעים, בלי שרת.</a:t>
+            </a:r>
+            <a:endParaRPr lang="en-US" sz="1500" dirty="0"/>
+          </a:p>
+          <a:p>
+            <a:pPr rtl="1" algn="r" indent="0" marL="0">
+              <a:buNone/>
+            </a:pPr>
+            <a:endParaRPr lang="en-US" sz="1500" dirty="0"/>
+          </a:p>
+          <a:p>
+            <a:pPr rtl="1" algn="r" indent="0" marL="0">
+              <a:buNone/>
+            </a:pPr>
+            <a:r>
+              <a:rPr lang="en-US" sz="1500" dirty="0">
+                <a:solidFill>
+                  <a:srgbClr val="1B1F3B"/>
+                </a:solidFill>
+                <a:latin typeface="Courier New" pitchFamily="34" charset="0"/>
+                <a:ea typeface="Courier New" pitchFamily="34" charset="-122"/>
+                <a:cs typeface="Courier New" pitchFamily="34" charset="-120"/>
+              </a:rPr>
+              <a:t>שלב 1: תתחיל רק במבנה הבסיסי — אזור טקסט לכתיבת פתק חדש, וכפתור שמירה. אחרי שאני מאשר, נמשיך לשלב הבא (הצגת רשימת הפתקים שנשמרו).</a:t>
+            </a:r>
+            <a:endParaRPr lang="en-US" sz="1500" dirty="0"/>
+          </a:p>
+        </p:txBody>
+      </p:sp>
+      <p:sp>
+        <p:nvSpPr>
+          <p:cNvPr id="8" name="Text 6"/>
+          <p:cNvSpPr/>
+          <p:nvPr/>
+        </p:nvSpPr>
+        <p:spPr>
+          <a:xfrm>
+            <a:off x="548640" y="5532120"/>
+            <a:ext cx="11091672" cy="365760"/>
+          </a:xfrm>
+          <a:prstGeom prst="rect">
+            <a:avLst/>
+          </a:prstGeom>
+          <a:noFill/>
+          <a:ln/>
+        </p:spPr>
+        <p:txBody>
+          <a:bodyPr wrap="square" lIns="0" tIns="0" rIns="0" bIns="0" rtlCol="0" anchor="ctr"/>
           <a:lstStyle/>
           <a:p>
             <a:pPr rtl="1" algn="ctr" indent="0" marL="0">
               <a:buNone/>
             </a:pPr>
             <a:r>
-              <a:rPr lang="en-US" sz="1300" i="1" dirty="0">
+              <a:rPr lang="en-US" sz="1200" i="1" dirty="0">
                 <a:solidFill>
                   <a:srgbClr val="6B7280"/>
                 </a:solidFill>
@@ -7071,15 +7133,15 @@
                 <a:ea typeface="Calibri" pitchFamily="34" charset="-122"/>
                 <a:cs typeface="Calibri" pitchFamily="34" charset="-120"/>
               </a:rPr>
-              <a:t>[תמונה: מסך שיתוף / הקלטת מסך של סוכן AI בונה קוד בזמן אמת]</a:t>
-            </a:r>
-            <a:endParaRPr lang="en-US" sz="1300" dirty="0"/>
-          </a:p>
-        </p:txBody>
-      </p:sp>
-      <p:sp>
-        <p:nvSpPr>
-          <p:cNvPr id="8" name="Text 6"/>
+              <a:t>שני הפרומפטים הבאים בהדגמה (הצגת הפתקים שנשמרו, וחיפוש חופשי) — בקובץ demo/prompt.md</a:t>
+            </a:r>
+            <a:endParaRPr lang="en-US" sz="1200" dirty="0"/>
+          </a:p>
+        </p:txBody>
+      </p:sp>
+      <p:sp>
+        <p:nvSpPr>
+          <p:cNvPr id="9" name="Text 7"/>
           <p:cNvSpPr/>
           <p:nvPr/>
         </p:nvSpPr>

--- a/lesson_01/lesson_01_slides.pptx
+++ b/lesson_01/lesson_01_slides.pptx
@@ -27,9 +27,10 @@
     <p:sldId id="275" r:id="rId21"/>
     <p:sldId id="276" r:id="rId22"/>
     <p:sldId id="277" r:id="rId23"/>
+    <p:sldId id="278" r:id="rId24"/>
   </p:sldIdLst>
   <p:notesMasterIdLst>
-    <p:notesMasterId r:id="rId24"/>
+    <p:notesMasterId r:id="rId25"/>
   </p:notesMasterIdLst>
   <p:sldSz cx="12192000" cy="6858000"/>
   <p:notesSz cx="6858000" cy="12192000"/>
@@ -1779,6 +1780,94 @@
             <a:fld id="{F7021451-1387-4CA6-816F-3879F97B5CBC}" type="slidenum">
               <a:rPr lang="en-US"/>
               <a:t>22</a:t>
+            </a:fld>
+            <a:endParaRPr lang="en-US"/>
+          </a:p>
+        </p:txBody>
+      </p:sp>
+    </p:spTree>
+    <p:extLst>
+      <p:ext uri="{BB962C8B-B14F-4D97-AF65-F5344CB8AC3E}">
+        <p14:creationId xmlns:p14="http://schemas.microsoft.com/office/powerpoint/2010/main" val="1024086991"/>
+      </p:ext>
+    </p:extLst>
+  </p:cSld>
+  <p:clrMapOvr>
+    <a:masterClrMapping/>
+  </p:clrMapOvr>
+</p:notes>
+</file>
+
+<file path=ppt/notesSlides/notesSlide23.xml><?xml version="1.0" encoding="utf-8"?>
+<p:notes xmlns:a="http://schemas.openxmlformats.org/drawingml/2006/main" xmlns:r="http://schemas.openxmlformats.org/officeDocument/2006/relationships" xmlns:p="http://schemas.openxmlformats.org/presentationml/2006/main">
+  <p:cSld>
+    <p:spTree>
+      <p:nvGrpSpPr>
+        <p:cNvPr id="1" name=""/>
+        <p:cNvGrpSpPr/>
+        <p:nvPr/>
+      </p:nvGrpSpPr>
+      <p:grpSpPr>
+        <a:xfrm>
+          <a:off x="0" y="0"/>
+          <a:ext cx="0" cy="0"/>
+          <a:chOff x="0" y="0"/>
+          <a:chExt cx="0" cy="0"/>
+        </a:xfrm>
+      </p:grpSpPr>
+      <p:sp>
+        <p:nvSpPr>
+          <p:cNvPr id="2" name="Slide Image Placeholder 1"/>
+          <p:cNvSpPr>
+            <a:spLocks noGrp="1" noRot="1" noChangeAspect="1"/>
+          </p:cNvSpPr>
+          <p:nvPr>
+            <p:ph type="sldImg"/>
+          </p:nvPr>
+        </p:nvSpPr>
+        <p:spPr/>
+      </p:sp>
+      <p:sp>
+        <p:nvSpPr>
+          <p:cNvPr id="3" name="Notes Placeholder 2"/>
+          <p:cNvSpPr>
+            <a:spLocks noGrp="1"/>
+          </p:cNvSpPr>
+          <p:nvPr>
+            <p:ph type="body" idx="1"/>
+          </p:nvPr>
+        </p:nvSpPr>
+        <p:spPr/>
+        <p:txBody>
+          <a:bodyPr/>
+          <a:lstStyle/>
+          <a:p>
+            <a:r>
+              <a:rPr lang="en-US" dirty="0"/>
+              <a:t/>
+            </a:r>
+            <a:endParaRPr lang="en-US" dirty="0"/>
+          </a:p>
+        </p:txBody>
+      </p:sp>
+      <p:sp>
+        <p:nvSpPr>
+          <p:cNvPr id="4" name="Slide Number Placeholder 3"/>
+          <p:cNvSpPr>
+            <a:spLocks noGrp="1"/>
+          </p:cNvSpPr>
+          <p:nvPr>
+            <p:ph type="sldNum" sz="quarter" idx="10"/>
+          </p:nvPr>
+        </p:nvSpPr>
+        <p:spPr/>
+        <p:txBody>
+          <a:bodyPr/>
+          <a:lstStyle/>
+          <a:p>
+            <a:fld id="{F7021451-1387-4CA6-816F-3879F97B5CBC}" type="slidenum">
+              <a:rPr lang="en-US"/>
+              <a:t>23</a:t>
             </a:fld>
             <a:endParaRPr lang="en-US"/>
           </a:p>
@@ -6881,7 +6970,7 @@
         </p:nvSpPr>
         <p:spPr>
           <a:xfrm>
-            <a:off x="548640" y="457200"/>
+            <a:off x="548640" y="411480"/>
             <a:ext cx="11091672" cy="365760"/>
           </a:xfrm>
           <a:prstGeom prst="rect">
@@ -6906,7 +6995,7 @@
                 <a:ea typeface="Calibri" pitchFamily="34" charset="-122"/>
                 <a:cs typeface="Calibri" pitchFamily="34" charset="-120"/>
               </a:rPr>
-              <a:t>הדגמה חיה</a:t>
+              <a:t>הדגמה חיה (חלק א׳)</a:t>
             </a:r>
             <a:endParaRPr lang="en-US" sz="1500" dirty="0"/>
           </a:p>
@@ -6920,7 +7009,7 @@
         </p:nvSpPr>
         <p:spPr>
           <a:xfrm>
-            <a:off x="4718304" y="868680"/>
+            <a:off x="4718304" y="822960"/>
             <a:ext cx="2743200" cy="0"/>
           </a:xfrm>
           <a:prstGeom prst="line">
@@ -6943,8 +7032,8 @@
         </p:nvSpPr>
         <p:spPr>
           <a:xfrm>
-            <a:off x="548640" y="1005840"/>
-            <a:ext cx="11091672" cy="594360"/>
+            <a:off x="548640" y="960120"/>
+            <a:ext cx="11091672" cy="548640"/>
           </a:xfrm>
           <a:prstGeom prst="rect">
             <a:avLst/>
@@ -6960,7 +7049,7 @@
               <a:buNone/>
             </a:pPr>
             <a:r>
-              <a:rPr lang="en-US" sz="2800" b="1" dirty="0">
+              <a:rPr lang="en-US" sz="2600" b="1" dirty="0">
                 <a:solidFill>
                   <a:srgbClr val="1B1F3B"/>
                 </a:solidFill>
@@ -6970,7 +7059,7 @@
               </a:rPr>
               <a:t>20 דקות. בונים יחד, בזמן אמת.</a:t>
             </a:r>
-            <a:endParaRPr lang="en-US" sz="2800" dirty="0"/>
+            <a:endParaRPr lang="en-US" sz="2600" dirty="0"/>
           </a:p>
         </p:txBody>
       </p:sp>
@@ -6982,8 +7071,8 @@
         </p:nvSpPr>
         <p:spPr>
           <a:xfrm>
-            <a:off x="548640" y="1600200"/>
-            <a:ext cx="11091672" cy="365760"/>
+            <a:off x="548640" y="1508760"/>
+            <a:ext cx="11091672" cy="320040"/>
           </a:xfrm>
           <a:prstGeom prst="rect">
             <a:avLst/>
@@ -6999,7 +7088,7 @@
               <a:buNone/>
             </a:pPr>
             <a:r>
-              <a:rPr lang="en-US" sz="1500" i="1" dirty="0">
+              <a:rPr lang="en-US" sz="1400" i="1" dirty="0">
                 <a:solidFill>
                   <a:srgbClr val="6B7280"/>
                 </a:solidFill>
@@ -7007,22 +7096,50 @@
                 <a:ea typeface="Calibri" pitchFamily="34" charset="-122"/>
                 <a:cs typeface="Calibri" pitchFamily="34" charset="-120"/>
               </a:rPr>
-              <a:t>הפרומפט הראשון להקלדה חיה מול הכיתה, לפי ה-Workflow שלמדנו:</a:t>
-            </a:r>
-            <a:endParaRPr lang="en-US" sz="1500" dirty="0"/>
-          </a:p>
-        </p:txBody>
-      </p:sp>
-      <p:sp>
-        <p:nvSpPr>
-          <p:cNvPr id="6" name="Shape 4"/>
-          <p:cNvSpPr/>
-          <p:nvPr/>
-        </p:nvSpPr>
-        <p:spPr>
-          <a:xfrm>
-            <a:off x="1188720" y="2148840"/>
-            <a:ext cx="9811512" cy="3246120"/>
+              <a:t>פרומפט 1 — ההתחלה, מקלידים מול הכיתה:</a:t>
+            </a:r>
+            <a:endParaRPr lang="en-US" sz="1400" dirty="0"/>
+          </a:p>
+        </p:txBody>
+      </p:sp>
+      <p:sp>
+        <p:nvSpPr>
+          <p:cNvPr id="6" name="Text 4"/>
+          <p:cNvSpPr/>
+          <p:nvPr/>
+        </p:nvSpPr>
+        <p:spPr>
+          <a:xfrm>
+            <a:off x="548640" y="1965960"/>
+            <a:ext cx="11091672" cy="274320"/>
+          </a:xfrm>
+          <a:prstGeom prst="rect">
+            <a:avLst/>
+          </a:prstGeom>
+          <a:noFill/>
+          <a:ln/>
+        </p:spPr>
+        <p:txBody>
+          <a:bodyPr wrap="square" lIns="0" tIns="0" rIns="0" bIns="0" rtlCol="0" anchor="ctr"/>
+          <a:lstStyle/>
+          <a:p>
+            <a:pPr rtl="1" algn="r" indent="0" marL="0">
+              <a:buNone/>
+            </a:pPr>
+            <a:endParaRPr lang="en-US" sz="1400" dirty="0"/>
+          </a:p>
+        </p:txBody>
+      </p:sp>
+      <p:sp>
+        <p:nvSpPr>
+          <p:cNvPr id="7" name="Shape 5"/>
+          <p:cNvSpPr/>
+          <p:nvPr/>
+        </p:nvSpPr>
+        <p:spPr>
+          <a:xfrm>
+            <a:off x="914400" y="2258568"/>
+            <a:ext cx="10360152" cy="4005072"/>
           </a:xfrm>
           <a:prstGeom prst="rect">
             <a:avLst/>
@@ -7040,14 +7157,14 @@
       </p:sp>
       <p:sp>
         <p:nvSpPr>
-          <p:cNvPr id="7" name="Text 5"/>
-          <p:cNvSpPr/>
-          <p:nvPr/>
-        </p:nvSpPr>
-        <p:spPr>
-          <a:xfrm>
-            <a:off x="1508760" y="2423160"/>
-            <a:ext cx="9171432" cy="2697480"/>
+          <p:cNvPr id="8" name="Text 6"/>
+          <p:cNvSpPr/>
+          <p:nvPr/>
+        </p:nvSpPr>
+        <p:spPr>
+          <a:xfrm>
+            <a:off x="1188720" y="2395728"/>
+            <a:ext cx="9811512" cy="3730752"/>
           </a:xfrm>
           <a:prstGeom prst="rect">
             <a:avLst/>
@@ -7063,7 +7180,7 @@
               <a:buNone/>
             </a:pPr>
             <a:r>
-              <a:rPr lang="en-US" sz="1500" dirty="0">
+              <a:rPr lang="en-US" sz="1400" dirty="0">
                 <a:solidFill>
                   <a:srgbClr val="1B1F3B"/>
                 </a:solidFill>
@@ -7073,20 +7190,20 @@
               </a:rPr>
               <a:t>בוא נבנה יחד, שלב אחר שלב, אפליקציית Note-Taking פשוטה שרצה בדפדפן — קובץ HTML יחיד עם CSS ו-JS מוטמעים, בלי שרת.</a:t>
             </a:r>
-            <a:endParaRPr lang="en-US" sz="1500" dirty="0"/>
-          </a:p>
-          <a:p>
-            <a:pPr rtl="1" algn="r" indent="0" marL="0">
-              <a:buNone/>
-            </a:pPr>
-            <a:endParaRPr lang="en-US" sz="1500" dirty="0"/>
-          </a:p>
-          <a:p>
-            <a:pPr rtl="1" algn="r" indent="0" marL="0">
-              <a:buNone/>
-            </a:pPr>
-            <a:r>
-              <a:rPr lang="en-US" sz="1500" dirty="0">
+            <a:endParaRPr lang="en-US" sz="1400" dirty="0"/>
+          </a:p>
+          <a:p>
+            <a:pPr rtl="1" algn="r" indent="0" marL="0">
+              <a:buNone/>
+            </a:pPr>
+            <a:endParaRPr lang="en-US" sz="1400" dirty="0"/>
+          </a:p>
+          <a:p>
+            <a:pPr rtl="1" algn="r" indent="0" marL="0">
+              <a:buNone/>
+            </a:pPr>
+            <a:r>
+              <a:rPr lang="en-US" sz="1400" dirty="0">
                 <a:solidFill>
                   <a:srgbClr val="1B1F3B"/>
                 </a:solidFill>
@@ -7096,46 +7213,7 @@
               </a:rPr>
               <a:t>שלב 1: תתחיל רק במבנה הבסיסי — אזור טקסט לכתיבת פתק חדש, וכפתור שמירה. אחרי שאני מאשר, נמשיך לשלב הבא (הצגת רשימת הפתקים שנשמרו).</a:t>
             </a:r>
-            <a:endParaRPr lang="en-US" sz="1500" dirty="0"/>
-          </a:p>
-        </p:txBody>
-      </p:sp>
-      <p:sp>
-        <p:nvSpPr>
-          <p:cNvPr id="8" name="Text 6"/>
-          <p:cNvSpPr/>
-          <p:nvPr/>
-        </p:nvSpPr>
-        <p:spPr>
-          <a:xfrm>
-            <a:off x="548640" y="5532120"/>
-            <a:ext cx="11091672" cy="365760"/>
-          </a:xfrm>
-          <a:prstGeom prst="rect">
-            <a:avLst/>
-          </a:prstGeom>
-          <a:noFill/>
-          <a:ln/>
-        </p:spPr>
-        <p:txBody>
-          <a:bodyPr wrap="square" lIns="0" tIns="0" rIns="0" bIns="0" rtlCol="0" anchor="ctr"/>
-          <a:lstStyle/>
-          <a:p>
-            <a:pPr rtl="1" algn="ctr" indent="0" marL="0">
-              <a:buNone/>
-            </a:pPr>
-            <a:r>
-              <a:rPr lang="en-US" sz="1200" i="1" dirty="0">
-                <a:solidFill>
-                  <a:srgbClr val="6B7280"/>
-                </a:solidFill>
-                <a:latin typeface="Calibri" pitchFamily="34" charset="0"/>
-                <a:ea typeface="Calibri" pitchFamily="34" charset="-122"/>
-                <a:cs typeface="Calibri" pitchFamily="34" charset="-120"/>
-              </a:rPr>
-              <a:t>שני הפרומפטים הבאים בהדגמה (הצגת הפתקים שנשמרו, וחיפוש חופשי) — בקובץ demo/prompt.md</a:t>
-            </a:r>
-            <a:endParaRPr lang="en-US" sz="1200" dirty="0"/>
+            <a:endParaRPr lang="en-US" sz="1400" dirty="0"/>
           </a:p>
         </p:txBody>
       </p:sp>
@@ -7680,7 +7758,7 @@
         </p:nvSpPr>
         <p:spPr>
           <a:xfrm>
-            <a:off x="548640" y="640080"/>
+            <a:off x="548640" y="411480"/>
             <a:ext cx="11091672" cy="365760"/>
           </a:xfrm>
           <a:prstGeom prst="rect">
@@ -7705,7 +7783,7 @@
                 <a:ea typeface="Calibri" pitchFamily="34" charset="-122"/>
                 <a:cs typeface="Calibri" pitchFamily="34" charset="-120"/>
               </a:rPr>
-              <a:t>עוברים לתרגול</a:t>
+              <a:t>הדגמה חיה (חלק ב׳)</a:t>
             </a:r>
             <a:endParaRPr lang="en-US" sz="1500" dirty="0"/>
           </a:p>
@@ -7719,7 +7797,7 @@
         </p:nvSpPr>
         <p:spPr>
           <a:xfrm>
-            <a:off x="4718304" y="1051560"/>
+            <a:off x="4718304" y="822960"/>
             <a:ext cx="2743200" cy="0"/>
           </a:xfrm>
           <a:prstGeom prst="line">
@@ -7742,8 +7820,8 @@
         </p:nvSpPr>
         <p:spPr>
           <a:xfrm>
-            <a:off x="548640" y="1234440"/>
-            <a:ext cx="11091672" cy="914400"/>
+            <a:off x="548640" y="960120"/>
+            <a:ext cx="11091672" cy="548640"/>
           </a:xfrm>
           <a:prstGeom prst="rect">
             <a:avLst/>
@@ -7759,7 +7837,7 @@
               <a:buNone/>
             </a:pPr>
             <a:r>
-              <a:rPr lang="en-US" sz="3200" b="1" dirty="0">
+              <a:rPr lang="en-US" sz="2600" b="1" dirty="0">
                 <a:solidFill>
                   <a:srgbClr val="1B1F3B"/>
                 </a:solidFill>
@@ -7767,9 +7845,9 @@
                 <a:ea typeface="Arial" pitchFamily="34" charset="-122"/>
                 <a:cs typeface="Arial" pitchFamily="34" charset="-120"/>
               </a:rPr>
-              <a:t>45 דקות: בניית Todo App באמצעות AI</a:t>
-            </a:r>
-            <a:endParaRPr lang="en-US" sz="3200" dirty="0"/>
+              <a:t>ממשיכים בזמן אמת</a:t>
+            </a:r>
+            <a:endParaRPr lang="en-US" sz="2600" dirty="0"/>
           </a:p>
         </p:txBody>
       </p:sp>
@@ -7781,8 +7859,8 @@
         </p:nvSpPr>
         <p:spPr>
           <a:xfrm>
-            <a:off x="2286000" y="2834640"/>
-            <a:ext cx="7616952" cy="1828800"/>
+            <a:off x="548640" y="1508760"/>
+            <a:ext cx="11091672" cy="320040"/>
           </a:xfrm>
           <a:prstGeom prst="rect">
             <a:avLst/>
@@ -7794,97 +7872,73 @@
           <a:bodyPr wrap="square" lIns="0" tIns="0" rIns="0" bIns="0" rtlCol="0" anchor="ctr"/>
           <a:lstStyle/>
           <a:p>
-            <a:pPr rtl="1" algn="r" indent="0" marL="0">
-              <a:spcAft>
-                <a:spcPts val="800"/>
-              </a:spcAft>
-              <a:buNone/>
-            </a:pPr>
-            <a:r>
-              <a:rPr lang="en-US" sz="1800" dirty="0">
-                <a:solidFill>
-                  <a:srgbClr val="1B1F3B"/>
-                </a:solidFill>
-                <a:latin typeface="Calibri" pitchFamily="34" charset="0"/>
-                <a:ea typeface="Calibri" pitchFamily="34" charset="-122"/>
-                <a:cs typeface="Calibri" pitchFamily="34" charset="-120"/>
-              </a:rPr>
-              <a:t>• הוספת משימה חדשה</a:t>
-            </a:r>
-            <a:endParaRPr lang="en-US" sz="1800" dirty="0"/>
-          </a:p>
-          <a:p>
-            <a:pPr rtl="1" algn="r" indent="0" marL="0">
-              <a:spcAft>
-                <a:spcPts val="800"/>
-              </a:spcAft>
-              <a:buNone/>
-            </a:pPr>
-            <a:r>
-              <a:rPr lang="en-US" sz="1800" dirty="0">
-                <a:solidFill>
-                  <a:srgbClr val="1B1F3B"/>
-                </a:solidFill>
-                <a:latin typeface="Calibri" pitchFamily="34" charset="0"/>
-                <a:ea typeface="Calibri" pitchFamily="34" charset="-122"/>
-                <a:cs typeface="Calibri" pitchFamily="34" charset="-120"/>
-              </a:rPr>
-              <a:t>• סימון משימה כהושלמה</a:t>
-            </a:r>
-            <a:endParaRPr lang="en-US" sz="1800" dirty="0"/>
-          </a:p>
-          <a:p>
-            <a:pPr rtl="1" algn="r" indent="0" marL="0">
-              <a:spcAft>
-                <a:spcPts val="800"/>
-              </a:spcAft>
-              <a:buNone/>
-            </a:pPr>
-            <a:r>
-              <a:rPr lang="en-US" sz="1800" dirty="0">
-                <a:solidFill>
-                  <a:srgbClr val="1B1F3B"/>
-                </a:solidFill>
-                <a:latin typeface="Calibri" pitchFamily="34" charset="0"/>
-                <a:ea typeface="Calibri" pitchFamily="34" charset="-122"/>
-                <a:cs typeface="Calibri" pitchFamily="34" charset="-120"/>
-              </a:rPr>
-              <a:t>• מחיקת משימה</a:t>
-            </a:r>
-            <a:endParaRPr lang="en-US" sz="1800" dirty="0"/>
-          </a:p>
-          <a:p>
-            <a:pPr rtl="1" algn="r" indent="0" marL="0">
-              <a:spcAft>
-                <a:spcPts val="800"/>
-              </a:spcAft>
-              <a:buNone/>
-            </a:pPr>
-            <a:r>
-              <a:rPr lang="en-US" sz="1800" dirty="0">
-                <a:solidFill>
-                  <a:srgbClr val="1B1F3B"/>
-                </a:solidFill>
-                <a:latin typeface="Calibri" pitchFamily="34" charset="0"/>
-                <a:ea typeface="Calibri" pitchFamily="34" charset="-122"/>
-                <a:cs typeface="Calibri" pitchFamily="34" charset="-120"/>
-              </a:rPr>
-              <a:t>• שמירה עם localStorage (זיכרון מקומי בדפדפן שנשמר גם אחרי רענון הדף)</a:t>
-            </a:r>
-            <a:endParaRPr lang="en-US" sz="1800" dirty="0"/>
-          </a:p>
-        </p:txBody>
-      </p:sp>
-      <p:sp>
-        <p:nvSpPr>
-          <p:cNvPr id="6" name="Shape 4"/>
-          <p:cNvSpPr/>
-          <p:nvPr/>
-        </p:nvSpPr>
-        <p:spPr>
-          <a:xfrm>
-            <a:off x="3200400" y="4846320"/>
-            <a:ext cx="5788152" cy="1371600"/>
+            <a:pPr rtl="1" algn="ctr" indent="0" marL="0">
+              <a:buNone/>
+            </a:pPr>
+            <a:r>
+              <a:rPr lang="en-US" sz="1400" i="1" dirty="0">
+                <a:solidFill>
+                  <a:srgbClr val="6B7280"/>
+                </a:solidFill>
+                <a:latin typeface="Calibri" pitchFamily="34" charset="0"/>
+                <a:ea typeface="Calibri" pitchFamily="34" charset="-122"/>
+                <a:cs typeface="Calibri" pitchFamily="34" charset="-120"/>
+              </a:rPr>
+              <a:t>אחרי שהתוצאה של פרומפט 1 עובדת מקלידים בהמשך:</a:t>
+            </a:r>
+            <a:endParaRPr lang="en-US" sz="1400" dirty="0"/>
+          </a:p>
+        </p:txBody>
+      </p:sp>
+      <p:sp>
+        <p:nvSpPr>
+          <p:cNvPr id="6" name="Text 4"/>
+          <p:cNvSpPr/>
+          <p:nvPr/>
+        </p:nvSpPr>
+        <p:spPr>
+          <a:xfrm>
+            <a:off x="548640" y="1965960"/>
+            <a:ext cx="11091672" cy="274320"/>
+          </a:xfrm>
+          <a:prstGeom prst="rect">
+            <a:avLst/>
+          </a:prstGeom>
+          <a:noFill/>
+          <a:ln/>
+        </p:spPr>
+        <p:txBody>
+          <a:bodyPr wrap="square" lIns="0" tIns="0" rIns="0" bIns="0" rtlCol="0" anchor="ctr"/>
+          <a:lstStyle/>
+          <a:p>
+            <a:pPr rtl="1" algn="r" indent="0" marL="0">
+              <a:buNone/>
+            </a:pPr>
+            <a:r>
+              <a:rPr lang="en-US" sz="1400" b="1" dirty="0">
+                <a:solidFill>
+                  <a:srgbClr val="1B1F3B"/>
+                </a:solidFill>
+                <a:latin typeface="Arial" pitchFamily="34" charset="0"/>
+                <a:ea typeface="Arial" pitchFamily="34" charset="-122"/>
+                <a:cs typeface="Arial" pitchFamily="34" charset="-120"/>
+              </a:rPr>
+              <a:t>פרומפט 2 (אחרי אישור שלב 1):</a:t>
+            </a:r>
+            <a:endParaRPr lang="en-US" sz="1400" dirty="0"/>
+          </a:p>
+        </p:txBody>
+      </p:sp>
+      <p:sp>
+        <p:nvSpPr>
+          <p:cNvPr id="7" name="Shape 5"/>
+          <p:cNvSpPr/>
+          <p:nvPr/>
+        </p:nvSpPr>
+        <p:spPr>
+          <a:xfrm>
+            <a:off x="914400" y="2258568"/>
+            <a:ext cx="10360152" cy="1764792"/>
           </a:xfrm>
           <a:prstGeom prst="rect">
             <a:avLst/>
@@ -7896,52 +7950,155 @@
             <a:solidFill>
               <a:srgbClr val="B8B8C8"/>
             </a:solidFill>
-            <a:prstDash val="dash"/>
+            <a:prstDash val="solid"/>
           </a:ln>
         </p:spPr>
       </p:sp>
       <p:sp>
         <p:nvSpPr>
-          <p:cNvPr id="7" name="Text 5"/>
-          <p:cNvSpPr/>
-          <p:nvPr/>
-        </p:nvSpPr>
-        <p:spPr>
-          <a:xfrm>
-            <a:off x="3200400" y="4846320"/>
-            <a:ext cx="5788152" cy="1371600"/>
-          </a:xfrm>
-          <a:prstGeom prst="rect">
-            <a:avLst/>
-          </a:prstGeom>
-          <a:noFill/>
-          <a:ln/>
-        </p:spPr>
-        <p:txBody>
-          <a:bodyPr wrap="square" lIns="101600" tIns="101600" rIns="101600" bIns="101600" rtlCol="0" anchor="ctr"/>
-          <a:lstStyle/>
-          <a:p>
-            <a:pPr rtl="1" algn="ctr" indent="0" marL="0">
-              <a:buNone/>
-            </a:pPr>
-            <a:r>
-              <a:rPr lang="en-US" sz="1300" i="1" dirty="0">
-                <a:solidFill>
-                  <a:srgbClr val="6B7280"/>
-                </a:solidFill>
-                <a:latin typeface="Calibri" pitchFamily="34" charset="0"/>
-                <a:ea typeface="Calibri" pitchFamily="34" charset="-122"/>
-                <a:cs typeface="Calibri" pitchFamily="34" charset="-120"/>
-              </a:rPr>
-              <a:t>[אייקון/תמונה: רשימת Todo מסומנת ✓]</a:t>
-            </a:r>
-            <a:endParaRPr lang="en-US" sz="1300" dirty="0"/>
-          </a:p>
-        </p:txBody>
-      </p:sp>
-      <p:sp>
-        <p:nvSpPr>
           <p:cNvPr id="8" name="Text 6"/>
+          <p:cNvSpPr/>
+          <p:nvPr/>
+        </p:nvSpPr>
+        <p:spPr>
+          <a:xfrm>
+            <a:off x="1188720" y="2395728"/>
+            <a:ext cx="9811512" cy="1490472"/>
+          </a:xfrm>
+          <a:prstGeom prst="rect">
+            <a:avLst/>
+          </a:prstGeom>
+          <a:noFill/>
+          <a:ln/>
+        </p:spPr>
+        <p:txBody>
+          <a:bodyPr wrap="square" lIns="0" tIns="0" rIns="0" bIns="0" rtlCol="0" anchor="t"/>
+          <a:lstStyle/>
+          <a:p>
+            <a:pPr rtl="1" algn="r" indent="0" marL="0">
+              <a:buNone/>
+            </a:pPr>
+            <a:r>
+              <a:rPr lang="en-US" sz="1400" dirty="0">
+                <a:solidFill>
+                  <a:srgbClr val="1B1F3B"/>
+                </a:solidFill>
+                <a:latin typeface="Courier New" pitchFamily="34" charset="0"/>
+                <a:ea typeface="Courier New" pitchFamily="34" charset="-122"/>
+                <a:cs typeface="Courier New" pitchFamily="34" charset="-120"/>
+              </a:rPr>
+              <a:t>מעולה. עכשיו תוסיף: הצגת כל הפתקים השמורים מתחת לטופס, כל אחד בכרטיס נפרד, עם כפתור מחיקה. השתמש ב-localStorage לשמירה בין רענוני דף.</a:t>
+            </a:r>
+            <a:endParaRPr lang="en-US" sz="1400" dirty="0"/>
+          </a:p>
+        </p:txBody>
+      </p:sp>
+      <p:sp>
+        <p:nvSpPr>
+          <p:cNvPr id="9" name="Text 7"/>
+          <p:cNvSpPr/>
+          <p:nvPr/>
+        </p:nvSpPr>
+        <p:spPr>
+          <a:xfrm>
+            <a:off x="548640" y="4206240"/>
+            <a:ext cx="11091672" cy="274320"/>
+          </a:xfrm>
+          <a:prstGeom prst="rect">
+            <a:avLst/>
+          </a:prstGeom>
+          <a:noFill/>
+          <a:ln/>
+        </p:spPr>
+        <p:txBody>
+          <a:bodyPr wrap="square" lIns="0" tIns="0" rIns="0" bIns="0" rtlCol="0" anchor="ctr"/>
+          <a:lstStyle/>
+          <a:p>
+            <a:pPr rtl="1" algn="r" indent="0" marL="0">
+              <a:buNone/>
+            </a:pPr>
+            <a:r>
+              <a:rPr lang="en-US" sz="1400" b="1" dirty="0">
+                <a:solidFill>
+                  <a:srgbClr val="1B1F3B"/>
+                </a:solidFill>
+                <a:latin typeface="Arial" pitchFamily="34" charset="0"/>
+                <a:ea typeface="Arial" pitchFamily="34" charset="-122"/>
+                <a:cs typeface="Arial" pitchFamily="34" charset="-120"/>
+              </a:rPr>
+              <a:t>פרומפט 3 (אופציונלי, אם נשאר זמן):</a:t>
+            </a:r>
+            <a:endParaRPr lang="en-US" sz="1400" dirty="0"/>
+          </a:p>
+        </p:txBody>
+      </p:sp>
+      <p:sp>
+        <p:nvSpPr>
+          <p:cNvPr id="10" name="Shape 8"/>
+          <p:cNvSpPr/>
+          <p:nvPr/>
+        </p:nvSpPr>
+        <p:spPr>
+          <a:xfrm>
+            <a:off x="914400" y="4498848"/>
+            <a:ext cx="10360152" cy="1764792"/>
+          </a:xfrm>
+          <a:prstGeom prst="rect">
+            <a:avLst/>
+          </a:prstGeom>
+          <a:solidFill>
+            <a:srgbClr val="F6F6F8"/>
+          </a:solidFill>
+          <a:ln w="12700">
+            <a:solidFill>
+              <a:srgbClr val="B8B8C8"/>
+            </a:solidFill>
+            <a:prstDash val="solid"/>
+          </a:ln>
+        </p:spPr>
+      </p:sp>
+      <p:sp>
+        <p:nvSpPr>
+          <p:cNvPr id="11" name="Text 9"/>
+          <p:cNvSpPr/>
+          <p:nvPr/>
+        </p:nvSpPr>
+        <p:spPr>
+          <a:xfrm>
+            <a:off x="1188720" y="4636008"/>
+            <a:ext cx="9811512" cy="1490472"/>
+          </a:xfrm>
+          <a:prstGeom prst="rect">
+            <a:avLst/>
+          </a:prstGeom>
+          <a:noFill/>
+          <a:ln/>
+        </p:spPr>
+        <p:txBody>
+          <a:bodyPr wrap="square" lIns="0" tIns="0" rIns="0" bIns="0" rtlCol="0" anchor="t"/>
+          <a:lstStyle/>
+          <a:p>
+            <a:pPr rtl="1" algn="r" indent="0" marL="0">
+              <a:buNone/>
+            </a:pPr>
+            <a:r>
+              <a:rPr lang="en-US" sz="1400" dirty="0">
+                <a:solidFill>
+                  <a:srgbClr val="1B1F3B"/>
+                </a:solidFill>
+                <a:latin typeface="Courier New" pitchFamily="34" charset="0"/>
+                <a:ea typeface="Courier New" pitchFamily="34" charset="-122"/>
+                <a:cs typeface="Courier New" pitchFamily="34" charset="-120"/>
+              </a:rPr>
+              <a:t>תוסיף חיפוש טקסט חופשי שמסנן את הפתקים המוצגים בזמן אמת תוך כדי הקלדה.</a:t>
+            </a:r>
+            <a:endParaRPr lang="en-US" sz="1400" dirty="0"/>
+          </a:p>
+        </p:txBody>
+      </p:sp>
+      <p:sp>
+        <p:nvSpPr>
+          <p:cNvPr id="12" name="Text 10"/>
           <p:cNvSpPr/>
           <p:nvPr/>
         </p:nvSpPr>
@@ -8018,8 +8175,8 @@
         </p:nvSpPr>
         <p:spPr>
           <a:xfrm>
-            <a:off x="548640" y="320040"/>
-            <a:ext cx="11091672" cy="685800"/>
+            <a:off x="548640" y="640080"/>
+            <a:ext cx="11091672" cy="365760"/>
           </a:xfrm>
           <a:prstGeom prst="rect">
             <a:avLst/>
@@ -8031,11 +8188,73 @@
           <a:bodyPr wrap="square" lIns="0" tIns="0" rIns="0" bIns="0" rtlCol="0" anchor="ctr"/>
           <a:lstStyle/>
           <a:p>
-            <a:pPr rtl="1" algn="r" indent="0" marL="0">
-              <a:buNone/>
-            </a:pPr>
-            <a:r>
-              <a:rPr lang="en-US" sz="2800" b="1" dirty="0">
+            <a:pPr rtl="1" algn="ctr" indent="0" marL="0">
+              <a:buNone/>
+            </a:pPr>
+            <a:r>
+              <a:rPr lang="en-US" sz="1500" i="1" dirty="0">
+                <a:solidFill>
+                  <a:srgbClr val="00A88A"/>
+                </a:solidFill>
+                <a:latin typeface="Calibri" pitchFamily="34" charset="0"/>
+                <a:ea typeface="Calibri" pitchFamily="34" charset="-122"/>
+                <a:cs typeface="Calibri" pitchFamily="34" charset="-120"/>
+              </a:rPr>
+              <a:t>עוברים לתרגול</a:t>
+            </a:r>
+            <a:endParaRPr lang="en-US" sz="1500" dirty="0"/>
+          </a:p>
+        </p:txBody>
+      </p:sp>
+      <p:sp>
+        <p:nvSpPr>
+          <p:cNvPr id="3" name="Shape 1"/>
+          <p:cNvSpPr/>
+          <p:nvPr/>
+        </p:nvSpPr>
+        <p:spPr>
+          <a:xfrm>
+            <a:off x="4718304" y="1051560"/>
+            <a:ext cx="2743200" cy="0"/>
+          </a:xfrm>
+          <a:prstGeom prst="line">
+            <a:avLst/>
+          </a:prstGeom>
+          <a:noFill/>
+          <a:ln w="19050">
+            <a:solidFill>
+              <a:srgbClr val="00A88A"/>
+            </a:solidFill>
+            <a:prstDash val="solid"/>
+          </a:ln>
+        </p:spPr>
+      </p:sp>
+      <p:sp>
+        <p:nvSpPr>
+          <p:cNvPr id="4" name="Text 2"/>
+          <p:cNvSpPr/>
+          <p:nvPr/>
+        </p:nvSpPr>
+        <p:spPr>
+          <a:xfrm>
+            <a:off x="548640" y="1234440"/>
+            <a:ext cx="11091672" cy="914400"/>
+          </a:xfrm>
+          <a:prstGeom prst="rect">
+            <a:avLst/>
+          </a:prstGeom>
+          <a:noFill/>
+          <a:ln/>
+        </p:spPr>
+        <p:txBody>
+          <a:bodyPr wrap="square" lIns="0" tIns="0" rIns="0" bIns="0" rtlCol="0" anchor="ctr"/>
+          <a:lstStyle/>
+          <a:p>
+            <a:pPr rtl="1" algn="ctr" indent="0" marL="0">
+              <a:buNone/>
+            </a:pPr>
+            <a:r>
+              <a:rPr lang="en-US" sz="3200" b="1" dirty="0">
                 <a:solidFill>
                   <a:srgbClr val="1B1F3B"/>
                 </a:solidFill>
@@ -8043,22 +8262,22 @@
                 <a:ea typeface="Arial" pitchFamily="34" charset="-122"/>
                 <a:cs typeface="Arial" pitchFamily="34" charset="-120"/>
               </a:rPr>
-              <a:t>סיכום</a:t>
-            </a:r>
-            <a:endParaRPr lang="en-US" sz="2800" dirty="0"/>
-          </a:p>
-        </p:txBody>
-      </p:sp>
-      <p:sp>
-        <p:nvSpPr>
-          <p:cNvPr id="3" name="Text 1"/>
-          <p:cNvSpPr/>
-          <p:nvPr/>
-        </p:nvSpPr>
-        <p:spPr>
-          <a:xfrm>
-            <a:off x="548640" y="1371600"/>
-            <a:ext cx="11091672" cy="2743200"/>
+              <a:t>45 דקות: בניית Todo App באמצעות AI</a:t>
+            </a:r>
+            <a:endParaRPr lang="en-US" sz="3200" dirty="0"/>
+          </a:p>
+        </p:txBody>
+      </p:sp>
+      <p:sp>
+        <p:nvSpPr>
+          <p:cNvPr id="5" name="Text 3"/>
+          <p:cNvSpPr/>
+          <p:nvPr/>
+        </p:nvSpPr>
+        <p:spPr>
+          <a:xfrm>
+            <a:off x="2286000" y="2834640"/>
+            <a:ext cx="7616952" cy="1828800"/>
           </a:xfrm>
           <a:prstGeom prst="rect">
             <a:avLst/>
@@ -8072,7 +8291,7 @@
           <a:p>
             <a:pPr rtl="1" algn="r" indent="0" marL="0">
               <a:spcAft>
-                <a:spcPts val="1600"/>
+                <a:spcPts val="800"/>
               </a:spcAft>
               <a:buNone/>
             </a:pPr>
@@ -8085,14 +8304,14 @@
                 <a:ea typeface="Calibri" pitchFamily="34" charset="-122"/>
                 <a:cs typeface="Calibri" pitchFamily="34" charset="-120"/>
               </a:rPr>
-              <a:t>1. Vibe Coding = תהליך מקצועי, לא ניחוש — והנתונים מוכיחים את זה</a:t>
+              <a:t>• הוספת משימה חדשה</a:t>
             </a:r>
             <a:endParaRPr lang="en-US" sz="1800" dirty="0"/>
           </a:p>
           <a:p>
             <a:pPr rtl="1" algn="r" indent="0" marL="0">
               <a:spcAft>
-                <a:spcPts val="1600"/>
+                <a:spcPts val="800"/>
               </a:spcAft>
               <a:buNone/>
             </a:pPr>
@@ -8105,14 +8324,14 @@
                 <a:ea typeface="Calibri" pitchFamily="34" charset="-122"/>
                 <a:cs typeface="Calibri" pitchFamily="34" charset="-120"/>
               </a:rPr>
-              <a:t>2. AI מאיץ עבודה, אבל כפי שראינו — רק 29% סומכים על הפלט (כלומר 71% לא) — ולכן תמיד בודקים קוד לא מוכר (Hallucination)</a:t>
+              <a:t>• סימון משימה כהושלמה</a:t>
             </a:r>
             <a:endParaRPr lang="en-US" sz="1800" dirty="0"/>
           </a:p>
           <a:p>
             <a:pPr rtl="1" algn="r" indent="0" marL="0">
               <a:spcAft>
-                <a:spcPts val="1600"/>
+                <a:spcPts val="800"/>
               </a:spcAft>
               <a:buNone/>
             </a:pPr>
@@ -8125,77 +8344,99 @@
                 <a:ea typeface="Calibri" pitchFamily="34" charset="-122"/>
                 <a:cs typeface="Calibri" pitchFamily="34" charset="-120"/>
               </a:rPr>
-              <a:t>3. לומדים Workflow — כלים יוחלפו, התהליך נשאר (וזה ההבדל בין 10% ל-40%)</a:t>
+              <a:t>• מחיקת משימה</a:t>
             </a:r>
             <a:endParaRPr lang="en-US" sz="1800" dirty="0"/>
           </a:p>
-        </p:txBody>
-      </p:sp>
-      <p:sp>
-        <p:nvSpPr>
-          <p:cNvPr id="4" name="Shape 2"/>
-          <p:cNvSpPr/>
-          <p:nvPr/>
-        </p:nvSpPr>
-        <p:spPr>
-          <a:xfrm>
-            <a:off x="548640" y="4572000"/>
-            <a:ext cx="11091672" cy="0"/>
-          </a:xfrm>
-          <a:prstGeom prst="line">
-            <a:avLst/>
-          </a:prstGeom>
-          <a:noFill/>
-          <a:ln w="9525">
+          <a:p>
+            <a:pPr rtl="1" algn="r" indent="0" marL="0">
+              <a:spcAft>
+                <a:spcPts val="800"/>
+              </a:spcAft>
+              <a:buNone/>
+            </a:pPr>
+            <a:r>
+              <a:rPr lang="en-US" sz="1800" dirty="0">
+                <a:solidFill>
+                  <a:srgbClr val="1B1F3B"/>
+                </a:solidFill>
+                <a:latin typeface="Calibri" pitchFamily="34" charset="0"/>
+                <a:ea typeface="Calibri" pitchFamily="34" charset="-122"/>
+                <a:cs typeface="Calibri" pitchFamily="34" charset="-120"/>
+              </a:rPr>
+              <a:t>• שמירה עם localStorage (זיכרון מקומי בדפדפן שנשמר גם אחרי רענון הדף)</a:t>
+            </a:r>
+            <a:endParaRPr lang="en-US" sz="1800" dirty="0"/>
+          </a:p>
+        </p:txBody>
+      </p:sp>
+      <p:sp>
+        <p:nvSpPr>
+          <p:cNvPr id="6" name="Shape 4"/>
+          <p:cNvSpPr/>
+          <p:nvPr/>
+        </p:nvSpPr>
+        <p:spPr>
+          <a:xfrm>
+            <a:off x="3200400" y="4846320"/>
+            <a:ext cx="5788152" cy="1371600"/>
+          </a:xfrm>
+          <a:prstGeom prst="rect">
+            <a:avLst/>
+          </a:prstGeom>
+          <a:solidFill>
+            <a:srgbClr val="F6F6F8"/>
+          </a:solidFill>
+          <a:ln w="12700">
             <a:solidFill>
               <a:srgbClr val="B8B8C8"/>
             </a:solidFill>
-            <a:prstDash val="solid"/>
+            <a:prstDash val="dash"/>
           </a:ln>
         </p:spPr>
       </p:sp>
       <p:sp>
         <p:nvSpPr>
-          <p:cNvPr id="5" name="Text 3"/>
-          <p:cNvSpPr/>
-          <p:nvPr/>
-        </p:nvSpPr>
-        <p:spPr>
-          <a:xfrm>
-            <a:off x="548640" y="4709160"/>
-            <a:ext cx="11091672" cy="548640"/>
-          </a:xfrm>
-          <a:prstGeom prst="rect">
-            <a:avLst/>
-          </a:prstGeom>
-          <a:noFill/>
-          <a:ln/>
-        </p:spPr>
-        <p:txBody>
-          <a:bodyPr wrap="square" lIns="0" tIns="0" rIns="0" bIns="0" rtlCol="0" anchor="ctr"/>
-          <a:lstStyle/>
-          <a:p>
-            <a:pPr rtl="1" algn="r" indent="0" marL="0">
-              <a:buNone/>
-            </a:pPr>
-            <a:r>
-              <a:rPr lang="en-US" sz="1700" b="1" dirty="0">
-                <a:solidFill>
-                  <a:srgbClr val="00A88A"/>
-                </a:solidFill>
-                <a:latin typeface="Arial" pitchFamily="34" charset="0"/>
-                <a:ea typeface="Arial" pitchFamily="34" charset="-122"/>
-                <a:cs typeface="Arial" pitchFamily="34" charset="-120"/>
-              </a:rPr>
-              <a:t>שבוע הבא: AI Development Environment — מקימים סביבת עבודה אמיתית</a:t>
-            </a:r>
-            <a:endParaRPr lang="en-US" sz="1700" dirty="0"/>
-          </a:p>
-        </p:txBody>
-      </p:sp>
-      <p:sp>
-        <p:nvSpPr>
-          <p:cNvPr id="6" name="Text 4"/>
+          <p:cNvPr id="7" name="Text 5"/>
+          <p:cNvSpPr/>
+          <p:nvPr/>
+        </p:nvSpPr>
+        <p:spPr>
+          <a:xfrm>
+            <a:off x="3200400" y="4846320"/>
+            <a:ext cx="5788152" cy="1371600"/>
+          </a:xfrm>
+          <a:prstGeom prst="rect">
+            <a:avLst/>
+          </a:prstGeom>
+          <a:noFill/>
+          <a:ln/>
+        </p:spPr>
+        <p:txBody>
+          <a:bodyPr wrap="square" lIns="101600" tIns="101600" rIns="101600" bIns="101600" rtlCol="0" anchor="ctr"/>
+          <a:lstStyle/>
+          <a:p>
+            <a:pPr rtl="1" algn="ctr" indent="0" marL="0">
+              <a:buNone/>
+            </a:pPr>
+            <a:r>
+              <a:rPr lang="en-US" sz="1300" i="1" dirty="0">
+                <a:solidFill>
+                  <a:srgbClr val="6B7280"/>
+                </a:solidFill>
+                <a:latin typeface="Calibri" pitchFamily="34" charset="0"/>
+                <a:ea typeface="Calibri" pitchFamily="34" charset="-122"/>
+                <a:cs typeface="Calibri" pitchFamily="34" charset="-120"/>
+              </a:rPr>
+              <a:t>[אייקון/תמונה: רשימת Todo מסומנת ✓]</a:t>
+            </a:r>
+            <a:endParaRPr lang="en-US" sz="1300" dirty="0"/>
+          </a:p>
+        </p:txBody>
+      </p:sp>
+      <p:sp>
+        <p:nvSpPr>
+          <p:cNvPr id="8" name="Text 6"/>
           <p:cNvSpPr/>
           <p:nvPr/>
         </p:nvSpPr>
@@ -8297,6 +8538,260 @@
                 <a:ea typeface="Arial" pitchFamily="34" charset="-122"/>
                 <a:cs typeface="Arial" pitchFamily="34" charset="-120"/>
               </a:rPr>
+              <a:t>סיכום</a:t>
+            </a:r>
+            <a:endParaRPr lang="en-US" sz="2800" dirty="0"/>
+          </a:p>
+        </p:txBody>
+      </p:sp>
+      <p:sp>
+        <p:nvSpPr>
+          <p:cNvPr id="3" name="Text 1"/>
+          <p:cNvSpPr/>
+          <p:nvPr/>
+        </p:nvSpPr>
+        <p:spPr>
+          <a:xfrm>
+            <a:off x="548640" y="1371600"/>
+            <a:ext cx="11091672" cy="2743200"/>
+          </a:xfrm>
+          <a:prstGeom prst="rect">
+            <a:avLst/>
+          </a:prstGeom>
+          <a:noFill/>
+          <a:ln/>
+        </p:spPr>
+        <p:txBody>
+          <a:bodyPr wrap="square" lIns="0" tIns="0" rIns="0" bIns="0" rtlCol="0" anchor="ctr"/>
+          <a:lstStyle/>
+          <a:p>
+            <a:pPr rtl="1" algn="r" indent="0" marL="0">
+              <a:spcAft>
+                <a:spcPts val="1600"/>
+              </a:spcAft>
+              <a:buNone/>
+            </a:pPr>
+            <a:r>
+              <a:rPr lang="en-US" sz="1800" dirty="0">
+                <a:solidFill>
+                  <a:srgbClr val="1B1F3B"/>
+                </a:solidFill>
+                <a:latin typeface="Calibri" pitchFamily="34" charset="0"/>
+                <a:ea typeface="Calibri" pitchFamily="34" charset="-122"/>
+                <a:cs typeface="Calibri" pitchFamily="34" charset="-120"/>
+              </a:rPr>
+              <a:t>1. Vibe Coding = תהליך מקצועי, לא ניחוש — והנתונים מוכיחים את זה</a:t>
+            </a:r>
+            <a:endParaRPr lang="en-US" sz="1800" dirty="0"/>
+          </a:p>
+          <a:p>
+            <a:pPr rtl="1" algn="r" indent="0" marL="0">
+              <a:spcAft>
+                <a:spcPts val="1600"/>
+              </a:spcAft>
+              <a:buNone/>
+            </a:pPr>
+            <a:r>
+              <a:rPr lang="en-US" sz="1800" dirty="0">
+                <a:solidFill>
+                  <a:srgbClr val="1B1F3B"/>
+                </a:solidFill>
+                <a:latin typeface="Calibri" pitchFamily="34" charset="0"/>
+                <a:ea typeface="Calibri" pitchFamily="34" charset="-122"/>
+                <a:cs typeface="Calibri" pitchFamily="34" charset="-120"/>
+              </a:rPr>
+              <a:t>2. AI מאיץ עבודה, אבל כפי שראינו — רק 29% סומכים על הפלט (כלומר 71% לא) — ולכן תמיד בודקים קוד לא מוכר (Hallucination)</a:t>
+            </a:r>
+            <a:endParaRPr lang="en-US" sz="1800" dirty="0"/>
+          </a:p>
+          <a:p>
+            <a:pPr rtl="1" algn="r" indent="0" marL="0">
+              <a:spcAft>
+                <a:spcPts val="1600"/>
+              </a:spcAft>
+              <a:buNone/>
+            </a:pPr>
+            <a:r>
+              <a:rPr lang="en-US" sz="1800" dirty="0">
+                <a:solidFill>
+                  <a:srgbClr val="1B1F3B"/>
+                </a:solidFill>
+                <a:latin typeface="Calibri" pitchFamily="34" charset="0"/>
+                <a:ea typeface="Calibri" pitchFamily="34" charset="-122"/>
+                <a:cs typeface="Calibri" pitchFamily="34" charset="-120"/>
+              </a:rPr>
+              <a:t>3. לומדים Workflow — כלים יוחלפו, התהליך נשאר (וזה ההבדל בין 10% ל-40%)</a:t>
+            </a:r>
+            <a:endParaRPr lang="en-US" sz="1800" dirty="0"/>
+          </a:p>
+        </p:txBody>
+      </p:sp>
+      <p:sp>
+        <p:nvSpPr>
+          <p:cNvPr id="4" name="Shape 2"/>
+          <p:cNvSpPr/>
+          <p:nvPr/>
+        </p:nvSpPr>
+        <p:spPr>
+          <a:xfrm>
+            <a:off x="548640" y="4572000"/>
+            <a:ext cx="11091672" cy="0"/>
+          </a:xfrm>
+          <a:prstGeom prst="line">
+            <a:avLst/>
+          </a:prstGeom>
+          <a:noFill/>
+          <a:ln w="9525">
+            <a:solidFill>
+              <a:srgbClr val="B8B8C8"/>
+            </a:solidFill>
+            <a:prstDash val="solid"/>
+          </a:ln>
+        </p:spPr>
+      </p:sp>
+      <p:sp>
+        <p:nvSpPr>
+          <p:cNvPr id="5" name="Text 3"/>
+          <p:cNvSpPr/>
+          <p:nvPr/>
+        </p:nvSpPr>
+        <p:spPr>
+          <a:xfrm>
+            <a:off x="548640" y="4709160"/>
+            <a:ext cx="11091672" cy="548640"/>
+          </a:xfrm>
+          <a:prstGeom prst="rect">
+            <a:avLst/>
+          </a:prstGeom>
+          <a:noFill/>
+          <a:ln/>
+        </p:spPr>
+        <p:txBody>
+          <a:bodyPr wrap="square" lIns="0" tIns="0" rIns="0" bIns="0" rtlCol="0" anchor="ctr"/>
+          <a:lstStyle/>
+          <a:p>
+            <a:pPr rtl="1" algn="r" indent="0" marL="0">
+              <a:buNone/>
+            </a:pPr>
+            <a:r>
+              <a:rPr lang="en-US" sz="1700" b="1" dirty="0">
+                <a:solidFill>
+                  <a:srgbClr val="00A88A"/>
+                </a:solidFill>
+                <a:latin typeface="Arial" pitchFamily="34" charset="0"/>
+                <a:ea typeface="Arial" pitchFamily="34" charset="-122"/>
+                <a:cs typeface="Arial" pitchFamily="34" charset="-120"/>
+              </a:rPr>
+              <a:t>שבוע הבא: AI Development Environment — מקימים סביבת עבודה אמיתית</a:t>
+            </a:r>
+            <a:endParaRPr lang="en-US" sz="1700" dirty="0"/>
+          </a:p>
+        </p:txBody>
+      </p:sp>
+      <p:sp>
+        <p:nvSpPr>
+          <p:cNvPr id="6" name="Text 4"/>
+          <p:cNvSpPr/>
+          <p:nvPr/>
+        </p:nvSpPr>
+        <p:spPr>
+          <a:xfrm>
+            <a:off x="548640" y="6492240"/>
+            <a:ext cx="11091672" cy="274320"/>
+          </a:xfrm>
+          <a:prstGeom prst="rect">
+            <a:avLst/>
+          </a:prstGeom>
+          <a:noFill/>
+          <a:ln/>
+        </p:spPr>
+        <p:txBody>
+          <a:bodyPr wrap="square" lIns="0" tIns="0" rIns="0" bIns="0" rtlCol="0" anchor="ctr"/>
+          <a:lstStyle/>
+          <a:p>
+            <a:pPr rtl="1" algn="r" indent="0" marL="0">
+              <a:buNone/>
+            </a:pPr>
+            <a:r>
+              <a:rPr lang="en-US" sz="900" dirty="0">
+                <a:solidFill>
+                  <a:srgbClr val="A6A6B0"/>
+                </a:solidFill>
+                <a:latin typeface="Calibri" pitchFamily="34" charset="0"/>
+                <a:ea typeface="Calibri" pitchFamily="34" charset="-122"/>
+                <a:cs typeface="Calibri" pitchFamily="34" charset="-120"/>
+              </a:rPr>
+              <a:t>Vibe Coding · שיעור 1 · שקף 22</a:t>
+            </a:r>
+            <a:endParaRPr lang="en-US" sz="900" dirty="0"/>
+          </a:p>
+        </p:txBody>
+      </p:sp>
+    </p:spTree>
+  </p:cSld>
+  <p:clrMapOvr>
+    <a:masterClrMapping/>
+  </p:clrMapOvr>
+</p:sld>
+</file>
+
+<file path=ppt/slides/slide23.xml><?xml version="1.0" encoding="utf-8"?>
+<p:sld xmlns:a="http://schemas.openxmlformats.org/drawingml/2006/main" xmlns:r="http://schemas.openxmlformats.org/officeDocument/2006/relationships" xmlns:p="http://schemas.openxmlformats.org/presentationml/2006/main">
+  <p:cSld name="Slide 23">
+    <p:bg>
+      <p:bgPr>
+        <a:solidFill>
+          <a:srgbClr val="FFFFFF"/>
+        </a:solidFill>
+      </p:bgPr>
+    </p:bg>
+    <p:spTree>
+      <p:nvGrpSpPr>
+        <p:cNvPr id="1" name=""/>
+        <p:cNvGrpSpPr/>
+        <p:nvPr/>
+      </p:nvGrpSpPr>
+      <p:grpSpPr>
+        <a:xfrm>
+          <a:off x="0" y="0"/>
+          <a:ext cx="0" cy="0"/>
+          <a:chOff x="0" y="0"/>
+          <a:chExt cx="0" cy="0"/>
+        </a:xfrm>
+      </p:grpSpPr>
+      <p:sp>
+        <p:nvSpPr>
+          <p:cNvPr id="2" name="Text 0"/>
+          <p:cNvSpPr/>
+          <p:nvPr/>
+        </p:nvSpPr>
+        <p:spPr>
+          <a:xfrm>
+            <a:off x="548640" y="320040"/>
+            <a:ext cx="11091672" cy="685800"/>
+          </a:xfrm>
+          <a:prstGeom prst="rect">
+            <a:avLst/>
+          </a:prstGeom>
+          <a:noFill/>
+          <a:ln/>
+        </p:spPr>
+        <p:txBody>
+          <a:bodyPr wrap="square" lIns="0" tIns="0" rIns="0" bIns="0" rtlCol="0" anchor="ctr"/>
+          <a:lstStyle/>
+          <a:p>
+            <a:pPr rtl="1" algn="r" indent="0" marL="0">
+              <a:buNone/>
+            </a:pPr>
+            <a:r>
+              <a:rPr lang="en-US" sz="2800" b="1" dirty="0">
+                <a:solidFill>
+                  <a:srgbClr val="1B1F3B"/>
+                </a:solidFill>
+                <a:latin typeface="Arial" pitchFamily="34" charset="0"/>
+                <a:ea typeface="Arial" pitchFamily="34" charset="-122"/>
+                <a:cs typeface="Arial" pitchFamily="34" charset="-120"/>
+              </a:rPr>
               <a:t>מקורות</a:t>
             </a:r>
             <a:endParaRPr lang="en-US" sz="2800" dirty="0"/>
@@ -8537,7 +9032,7 @@
                 <a:ea typeface="Calibri" pitchFamily="34" charset="-122"/>
                 <a:cs typeface="Calibri" pitchFamily="34" charset="-120"/>
               </a:rPr>
-              <a:t>Vibe Coding · שיעור 1 · שקף 22</a:t>
+              <a:t>Vibe Coding · שיעור 1 · שקף 23</a:t>
             </a:r>
             <a:endParaRPr lang="en-US" sz="900" dirty="0"/>
           </a:p>

--- a/lesson_01/lesson_01_slides.pptx
+++ b/lesson_01/lesson_01_slides.pptx
@@ -3010,11 +3010,12 @@
           <a:bodyPr wrap="square" lIns="0" tIns="0" rIns="0" bIns="0" rtlCol="0" anchor="ctr"/>
           <a:lstStyle/>
           <a:p>
-            <a:pPr rtl="1" algn="r" indent="0" marL="0">
+            <a:pPr rtl="1" algn="r" marL="228600" indent="-228600">
               <a:spcAft>
                 <a:spcPts val="800"/>
               </a:spcAft>
-              <a:buNone/>
+              <a:buSzPct val="100000"/>
+              <a:buChar char="•"/>
             </a:pPr>
             <a:r>
               <a:rPr lang="en-US" sz="1700" dirty="0">
@@ -3025,16 +3026,17 @@
                 <a:ea typeface="Calibri" pitchFamily="34" charset="-122"/>
                 <a:cs typeface="Calibri" pitchFamily="34" charset="-120"/>
               </a:rPr>
-              <a:t>• מהו Vibe Coding, ובמה הוא שונה מ״להקליד פרומפט״?</a:t>
+              <a:t>מהו Vibe Coding, ובמה הוא שונה מ״להקליד פרומפט״?</a:t>
             </a:r>
             <a:endParaRPr lang="en-US" sz="1700" dirty="0"/>
           </a:p>
           <a:p>
-            <a:pPr rtl="1" algn="r" indent="0" marL="0">
+            <a:pPr rtl="1" algn="r" marL="228600" indent="-228600">
               <a:spcAft>
                 <a:spcPts val="800"/>
               </a:spcAft>
-              <a:buNone/>
+              <a:buSzPct val="100000"/>
+              <a:buChar char="•"/>
             </a:pPr>
             <a:r>
               <a:rPr lang="en-US" sz="1700" dirty="0">
@@ -3045,16 +3047,17 @@
                 <a:ea typeface="Calibri" pitchFamily="34" charset="-122"/>
                 <a:cs typeface="Calibri" pitchFamily="34" charset="-120"/>
               </a:rPr>
-              <a:t>• מה היתרונות, החסרונות והמגבלות — עם נתונים אמיתיים?</a:t>
+              <a:t>מה היתרונות, החסרונות והמגבלות — עם נתונים אמיתיים?</a:t>
             </a:r>
             <a:endParaRPr lang="en-US" sz="1700" dirty="0"/>
           </a:p>
           <a:p>
-            <a:pPr rtl="1" algn="r" indent="0" marL="0">
+            <a:pPr rtl="1" algn="r" marL="228600" indent="-228600">
               <a:spcAft>
                 <a:spcPts val="800"/>
               </a:spcAft>
-              <a:buNone/>
+              <a:buSzPct val="100000"/>
+              <a:buChar char="•"/>
             </a:pPr>
             <a:r>
               <a:rPr lang="en-US" sz="1700" dirty="0">
@@ -3065,16 +3068,17 @@
                 <a:ea typeface="Calibri" pitchFamily="34" charset="-122"/>
                 <a:cs typeface="Calibri" pitchFamily="34" charset="-120"/>
               </a:rPr>
-              <a:t>• מהו ה-Workflow בן 10 השלבים שנלמד לאורך כל הקורס?</a:t>
+              <a:t>מהו ה-Workflow בן 10 השלבים שנלמד לאורך כל הקורס?</a:t>
             </a:r>
             <a:endParaRPr lang="en-US" sz="1700" dirty="0"/>
           </a:p>
           <a:p>
-            <a:pPr rtl="1" algn="r" indent="0" marL="0">
+            <a:pPr rtl="1" algn="r" marL="228600" indent="-228600">
               <a:spcAft>
                 <a:spcPts val="800"/>
               </a:spcAft>
-              <a:buNone/>
+              <a:buSzPct val="100000"/>
+              <a:buChar char="•"/>
             </a:pPr>
             <a:r>
               <a:rPr lang="en-US" sz="1700" dirty="0">
@@ -3085,7 +3089,7 @@
                 <a:ea typeface="Calibri" pitchFamily="34" charset="-122"/>
                 <a:cs typeface="Calibri" pitchFamily="34" charset="-120"/>
               </a:rPr>
-              <a:t>• למה הקורס מלמד ״תהליך״, ולא ״כלי״?</a:t>
+              <a:t>למה הקורס מלמד ״תהליך״, ולא ״כלי״?</a:t>
             </a:r>
             <a:endParaRPr lang="en-US" sz="1700" dirty="0"/>
           </a:p>
@@ -3325,11 +3329,12 @@
           <a:bodyPr wrap="square" lIns="0" tIns="0" rIns="0" bIns="0" rtlCol="0" anchor="ctr"/>
           <a:lstStyle/>
           <a:p>
-            <a:pPr rtl="1" algn="r" indent="0" marL="0">
-              <a:spcAft>
-                <a:spcPts val="1000"/>
-              </a:spcAft>
-              <a:buNone/>
+            <a:pPr rtl="1" algn="r" marL="228600" indent="-228600">
+              <a:spcAft>
+                <a:spcPts val="1000"/>
+              </a:spcAft>
+              <a:buSzPct val="100000"/>
+              <a:buChar char="•"/>
             </a:pPr>
             <a:r>
               <a:rPr lang="en-US" sz="1900" dirty="0">
@@ -3340,16 +3345,17 @@
                 <a:ea typeface="Calibri" pitchFamily="34" charset="-122"/>
                 <a:cs typeface="Calibri" pitchFamily="34" charset="-120"/>
               </a:rPr>
-              <a:t>• בניגוד לבן אדם, מודל שפה כמעט אף פעם לא אומר "אני לא יודע"</a:t>
+              <a:t>בניגוד לבן אדם, מודל שפה כמעט אף פעם לא אומר "אני לא יודע"</a:t>
             </a:r>
             <a:endParaRPr lang="en-US" sz="1900" dirty="0"/>
           </a:p>
           <a:p>
-            <a:pPr rtl="1" algn="r" indent="0" marL="0">
-              <a:spcAft>
-                <a:spcPts val="1000"/>
-              </a:spcAft>
-              <a:buNone/>
+            <a:pPr rtl="1" algn="r" marL="228600" indent="-228600">
+              <a:spcAft>
+                <a:spcPts val="1000"/>
+              </a:spcAft>
+              <a:buSzPct val="100000"/>
+              <a:buChar char="•"/>
             </a:pPr>
             <a:r>
               <a:rPr lang="en-US" sz="1900" dirty="0">
@@ -3360,7 +3366,7 @@
                 <a:ea typeface="Calibri" pitchFamily="34" charset="-122"/>
                 <a:cs typeface="Calibri" pitchFamily="34" charset="-120"/>
               </a:rPr>
-              <a:t>• הוא ממשיך "לנחש" את הטקסט הכי סביר — גם אם זה אומר להמציא פונקציה, ספרייה, או </a:t>
+              <a:t>הוא ממשיך "לנחש" את הטקסט הכי סביר — גם אם זה אומר להמציא פונקציה, ספרייה, או </a:t>
             </a:r>
             <a:pPr rtl="1" algn="r" indent="0" marL="0">
               <a:spcAft>
@@ -3399,11 +3405,12 @@
             <a:endParaRPr lang="en-US" sz="1900" dirty="0"/>
           </a:p>
           <a:p>
-            <a:pPr rtl="1" algn="r" indent="0" marL="0">
-              <a:spcAft>
-                <a:spcPts val="1000"/>
-              </a:spcAft>
-              <a:buNone/>
+            <a:pPr rtl="1" algn="r" marL="228600" indent="-228600">
+              <a:spcAft>
+                <a:spcPts val="1000"/>
+              </a:spcAft>
+              <a:buSzPct val="100000"/>
+              <a:buChar char="•"/>
             </a:pPr>
             <a:r>
               <a:rPr lang="en-US" sz="1900" dirty="0">
@@ -3414,7 +3421,7 @@
                 <a:ea typeface="Calibri" pitchFamily="34" charset="-122"/>
                 <a:cs typeface="Calibri" pitchFamily="34" charset="-120"/>
               </a:rPr>
-              <a:t>• זה קורה </a:t>
+              <a:t>זה קורה </a:t>
             </a:r>
             <a:pPr rtl="1" algn="r" indent="0" marL="0">
               <a:spcAft>
@@ -3453,11 +3460,12 @@
             <a:endParaRPr lang="en-US" sz="1900" dirty="0"/>
           </a:p>
           <a:p>
-            <a:pPr rtl="1" algn="r" indent="0" marL="0">
-              <a:spcAft>
-                <a:spcPts val="1000"/>
-              </a:spcAft>
-              <a:buNone/>
+            <a:pPr rtl="1" algn="r" marL="228600" indent="-228600">
+              <a:spcAft>
+                <a:spcPts val="1000"/>
+              </a:spcAft>
+              <a:buSzPct val="100000"/>
+              <a:buChar char="•"/>
             </a:pPr>
             <a:r>
               <a:rPr lang="en-US" sz="1900" b="1" dirty="0">
@@ -3468,7 +3476,7 @@
                 <a:ea typeface="Calibri" pitchFamily="34" charset="-122"/>
                 <a:cs typeface="Calibri" pitchFamily="34" charset="-120"/>
               </a:rPr>
-              <a:t>• למסלול AI:</a:t>
+              <a:t>למסלול AI:</a:t>
             </a:r>
             <a:pPr rtl="1" algn="r" indent="0" marL="0">
               <a:spcAft>
@@ -3684,11 +3692,12 @@
           <a:bodyPr wrap="square" lIns="0" tIns="0" rIns="0" bIns="0" rtlCol="0" anchor="ctr"/>
           <a:lstStyle/>
           <a:p>
-            <a:pPr rtl="1" algn="r" indent="0" marL="0">
-              <a:spcAft>
-                <a:spcPts val="1000"/>
-              </a:spcAft>
-              <a:buNone/>
+            <a:pPr rtl="1" algn="r" marL="228600" indent="-228600">
+              <a:spcAft>
+                <a:spcPts val="1000"/>
+              </a:spcAft>
+              <a:buSzPct val="100000"/>
+              <a:buChar char="•"/>
             </a:pPr>
             <a:r>
               <a:rPr lang="en-US" sz="1900" b="1" dirty="0">
@@ -3699,7 +3708,7 @@
                 <a:ea typeface="Calibri" pitchFamily="34" charset="-122"/>
                 <a:cs typeface="Calibri" pitchFamily="34" charset="-120"/>
               </a:rPr>
-              <a:t>• 84%</a:t>
+              <a:t>84%</a:t>
             </a:r>
             <a:pPr rtl="1" algn="r" indent="0" marL="0">
               <a:spcAft>
@@ -3721,11 +3730,12 @@
             <a:endParaRPr lang="en-US" sz="1900" dirty="0"/>
           </a:p>
           <a:p>
-            <a:pPr rtl="1" algn="r" indent="0" marL="0">
-              <a:spcAft>
-                <a:spcPts val="1000"/>
-              </a:spcAft>
-              <a:buNone/>
+            <a:pPr rtl="1" algn="r" marL="228600" indent="-228600">
+              <a:spcAft>
+                <a:spcPts val="1000"/>
+              </a:spcAft>
+              <a:buSzPct val="100000"/>
+              <a:buChar char="•"/>
             </a:pPr>
             <a:r>
               <a:rPr lang="en-US" sz="1900" dirty="0">
@@ -3736,7 +3746,7 @@
                 <a:ea typeface="Calibri" pitchFamily="34" charset="-122"/>
                 <a:cs typeface="Calibri" pitchFamily="34" charset="-120"/>
               </a:rPr>
-              <a:t>• אבל רק </a:t>
+              <a:t>אבל רק </a:t>
             </a:r>
             <a:pPr rtl="1" algn="r" indent="0" marL="0">
               <a:spcAft>
@@ -3775,11 +3785,12 @@
             <a:endParaRPr lang="en-US" sz="1900" dirty="0"/>
           </a:p>
           <a:p>
-            <a:pPr rtl="1" algn="r" indent="0" marL="0">
-              <a:spcAft>
-                <a:spcPts val="1000"/>
-              </a:spcAft>
-              <a:buNone/>
+            <a:pPr rtl="1" algn="r" marL="228600" indent="-228600">
+              <a:spcAft>
+                <a:spcPts val="1000"/>
+              </a:spcAft>
+              <a:buSzPct val="100000"/>
+              <a:buChar char="•"/>
             </a:pPr>
             <a:r>
               <a:rPr lang="en-US" sz="1900" b="1" dirty="0">
@@ -3790,7 +3801,7 @@
                 <a:ea typeface="Calibri" pitchFamily="34" charset="-122"/>
                 <a:cs typeface="Calibri" pitchFamily="34" charset="-120"/>
               </a:rPr>
-              <a:t>• 61%</a:t>
+              <a:t>61%</a:t>
             </a:r>
             <a:pPr rtl="1" algn="r" indent="0" marL="0">
               <a:spcAft>
@@ -3812,11 +3823,12 @@
             <a:endParaRPr lang="en-US" sz="1900" dirty="0"/>
           </a:p>
           <a:p>
-            <a:pPr rtl="1" algn="r" indent="0" marL="0">
-              <a:spcAft>
-                <a:spcPts val="1000"/>
-              </a:spcAft>
-              <a:buNone/>
+            <a:pPr rtl="1" algn="r" marL="228600" indent="-228600">
+              <a:spcAft>
+                <a:spcPts val="1000"/>
+              </a:spcAft>
+              <a:buSzPct val="100000"/>
+              <a:buChar char="•"/>
             </a:pPr>
             <a:r>
               <a:rPr lang="en-US" sz="1900" dirty="0">
@@ -3827,7 +3839,7 @@
                 <a:ea typeface="Calibri" pitchFamily="34" charset="-122"/>
                 <a:cs typeface="Calibri" pitchFamily="34" charset="-120"/>
               </a:rPr>
-              <a:t>• בפרויקטים שהסתמכו הרבה על AI (AI-heavy), לעומת פרויקטים שהסתמכו עליו פחות: </a:t>
+              <a:t>בפרויקטים שהסתמכו הרבה על AI (AI-heavy), לעומת פרויקטים שהסתמכו עליו פחות: </a:t>
             </a:r>
             <a:pPr rtl="1" algn="r" indent="0" marL="0">
               <a:spcAft>
@@ -4172,11 +4184,12 @@
           <a:bodyPr wrap="square" lIns="0" tIns="0" rIns="0" bIns="0" rtlCol="0" anchor="ctr"/>
           <a:lstStyle/>
           <a:p>
-            <a:pPr rtl="1" algn="r" indent="0" marL="0">
-              <a:spcAft>
-                <a:spcPts val="1000"/>
-              </a:spcAft>
-              <a:buNone/>
+            <a:pPr rtl="1" algn="r" marL="228600" indent="-228600">
+              <a:spcAft>
+                <a:spcPts val="1000"/>
+              </a:spcAft>
+              <a:buSzPct val="100000"/>
+              <a:buChar char="•"/>
             </a:pPr>
             <a:r>
               <a:rPr lang="en-US" sz="1900" b="1" dirty="0">
@@ -4187,7 +4200,7 @@
                 <a:ea typeface="Calibri" pitchFamily="34" charset="-122"/>
                 <a:cs typeface="Calibri" pitchFamily="34" charset="-120"/>
               </a:rPr>
-              <a:t>• METR</a:t>
+              <a:t>METR</a:t>
             </a:r>
             <a:pPr rtl="1" algn="r" indent="0" marL="0">
               <a:spcAft>
@@ -4209,11 +4222,12 @@
             <a:endParaRPr lang="en-US" sz="1900" dirty="0"/>
           </a:p>
           <a:p>
-            <a:pPr rtl="1" algn="r" indent="0" marL="0">
-              <a:spcAft>
-                <a:spcPts val="1000"/>
-              </a:spcAft>
-              <a:buNone/>
+            <a:pPr rtl="1" algn="r" marL="228600" indent="-228600">
+              <a:spcAft>
+                <a:spcPts val="1000"/>
+              </a:spcAft>
+              <a:buSzPct val="100000"/>
+              <a:buChar char="•"/>
             </a:pPr>
             <a:r>
               <a:rPr lang="en-US" sz="1900" dirty="0">
@@ -4224,7 +4238,7 @@
                 <a:ea typeface="Calibri" pitchFamily="34" charset="-122"/>
                 <a:cs typeface="Calibri" pitchFamily="34" charset="-120"/>
               </a:rPr>
-              <a:t>• בפועל: </a:t>
+              <a:t>בפועל: </a:t>
             </a:r>
             <a:pPr rtl="1" algn="r" indent="0" marL="0">
               <a:spcAft>
@@ -4263,11 +4277,12 @@
             <a:endParaRPr lang="en-US" sz="1900" dirty="0"/>
           </a:p>
           <a:p>
-            <a:pPr rtl="1" algn="r" indent="0" marL="0">
-              <a:spcAft>
-                <a:spcPts val="1000"/>
-              </a:spcAft>
-              <a:buNone/>
+            <a:pPr rtl="1" algn="r" marL="228600" indent="-228600">
+              <a:spcAft>
+                <a:spcPts val="1000"/>
+              </a:spcAft>
+              <a:buSzPct val="100000"/>
+              <a:buChar char="•"/>
             </a:pPr>
             <a:r>
               <a:rPr lang="en-US" sz="1900" dirty="0">
@@ -4278,7 +4293,7 @@
                 <a:ea typeface="Calibri" pitchFamily="34" charset="-122"/>
                 <a:cs typeface="Calibri" pitchFamily="34" charset="-120"/>
               </a:rPr>
-              <a:t>• אבל האמינו: </a:t>
+              <a:t>אבל האמינו: </a:t>
             </a:r>
             <a:pPr rtl="1" algn="r" indent="0" marL="0">
               <a:spcAft>
@@ -4572,11 +4587,12 @@
           <a:bodyPr wrap="square" lIns="0" tIns="0" rIns="0" bIns="0" rtlCol="0" anchor="ctr"/>
           <a:lstStyle/>
           <a:p>
-            <a:pPr rtl="1" algn="r" indent="0" marL="0">
-              <a:spcAft>
-                <a:spcPts val="1000"/>
-              </a:spcAft>
-              <a:buNone/>
+            <a:pPr rtl="1" algn="r" marL="228600" indent="-228600">
+              <a:spcAft>
+                <a:spcPts val="1000"/>
+              </a:spcAft>
+              <a:buSzPct val="100000"/>
+              <a:buChar char="•"/>
             </a:pPr>
             <a:r>
               <a:rPr lang="en-US" sz="1900" b="1" dirty="0">
@@ -4587,7 +4603,7 @@
                 <a:ea typeface="Calibri" pitchFamily="34" charset="-122"/>
                 <a:cs typeface="Calibri" pitchFamily="34" charset="-120"/>
               </a:rPr>
-              <a:t>• 1. הבנת הבעיה</a:t>
+              <a:t>1. הבנת הבעיה</a:t>
             </a:r>
             <a:pPr rtl="1" algn="r" indent="0" marL="0">
               <a:spcAft>
@@ -4609,11 +4625,12 @@
             <a:endParaRPr lang="en-US" sz="1900" dirty="0"/>
           </a:p>
           <a:p>
-            <a:pPr rtl="1" algn="r" indent="0" marL="0">
-              <a:spcAft>
-                <a:spcPts val="1000"/>
-              </a:spcAft>
-              <a:buNone/>
+            <a:pPr rtl="1" algn="r" marL="228600" indent="-228600">
+              <a:spcAft>
+                <a:spcPts val="1000"/>
+              </a:spcAft>
+              <a:buSzPct val="100000"/>
+              <a:buChar char="•"/>
             </a:pPr>
             <a:r>
               <a:rPr lang="en-US" sz="1900" b="1" dirty="0">
@@ -4624,7 +4641,7 @@
                 <a:ea typeface="Calibri" pitchFamily="34" charset="-122"/>
                 <a:cs typeface="Calibri" pitchFamily="34" charset="-120"/>
               </a:rPr>
-              <a:t>• 2. Specification</a:t>
+              <a:t>2. Specification</a:t>
             </a:r>
             <a:pPr rtl="1" algn="r" indent="0" marL="0">
               <a:spcAft>
@@ -4646,11 +4663,12 @@
             <a:endParaRPr lang="en-US" sz="1900" dirty="0"/>
           </a:p>
           <a:p>
-            <a:pPr rtl="1" algn="r" indent="0" marL="0">
-              <a:spcAft>
-                <a:spcPts val="1000"/>
-              </a:spcAft>
-              <a:buNone/>
+            <a:pPr rtl="1" algn="r" marL="228600" indent="-228600">
+              <a:spcAft>
+                <a:spcPts val="1000"/>
+              </a:spcAft>
+              <a:buSzPct val="100000"/>
+              <a:buChar char="•"/>
             </a:pPr>
             <a:r>
               <a:rPr lang="en-US" sz="1900" b="1" dirty="0">
@@ -4661,7 +4679,7 @@
                 <a:ea typeface="Calibri" pitchFamily="34" charset="-122"/>
                 <a:cs typeface="Calibri" pitchFamily="34" charset="-120"/>
               </a:rPr>
-              <a:t>• 3. בניית Context</a:t>
+              <a:t>3. בניית Context</a:t>
             </a:r>
             <a:pPr rtl="1" algn="r" indent="0" marL="0">
               <a:spcAft>
@@ -4683,11 +4701,12 @@
             <a:endParaRPr lang="en-US" sz="1900" dirty="0"/>
           </a:p>
           <a:p>
-            <a:pPr rtl="1" algn="r" indent="0" marL="0">
-              <a:spcAft>
-                <a:spcPts val="1000"/>
-              </a:spcAft>
-              <a:buNone/>
+            <a:pPr rtl="1" algn="r" marL="228600" indent="-228600">
+              <a:spcAft>
+                <a:spcPts val="1000"/>
+              </a:spcAft>
+              <a:buSzPct val="100000"/>
+              <a:buChar char="•"/>
             </a:pPr>
             <a:r>
               <a:rPr lang="en-US" sz="1900" b="1" dirty="0">
@@ -4698,7 +4717,7 @@
                 <a:ea typeface="Calibri" pitchFamily="34" charset="-122"/>
                 <a:cs typeface="Calibri" pitchFamily="34" charset="-120"/>
               </a:rPr>
-              <a:t>• 4. תכנון עם AI</a:t>
+              <a:t>4. תכנון עם AI</a:t>
             </a:r>
             <a:pPr rtl="1" algn="r" indent="0" marL="0">
               <a:spcAft>
@@ -4720,11 +4739,12 @@
             <a:endParaRPr lang="en-US" sz="1900" dirty="0"/>
           </a:p>
           <a:p>
-            <a:pPr rtl="1" algn="r" indent="0" marL="0">
-              <a:spcAft>
-                <a:spcPts val="1000"/>
-              </a:spcAft>
-              <a:buNone/>
+            <a:pPr rtl="1" algn="r" marL="228600" indent="-228600">
+              <a:spcAft>
+                <a:spcPts val="1000"/>
+              </a:spcAft>
+              <a:buSzPct val="100000"/>
+              <a:buChar char="•"/>
             </a:pPr>
             <a:r>
               <a:rPr lang="en-US" sz="1900" b="1" dirty="0">
@@ -4735,7 +4755,7 @@
                 <a:ea typeface="Calibri" pitchFamily="34" charset="-122"/>
                 <a:cs typeface="Calibri" pitchFamily="34" charset="-120"/>
               </a:rPr>
-              <a:t>• 5. מימוש עם AI</a:t>
+              <a:t>5. מימוש עם AI</a:t>
             </a:r>
             <a:pPr rtl="1" algn="r" indent="0" marL="0">
               <a:spcAft>
@@ -4951,11 +4971,12 @@
           <a:bodyPr wrap="square" lIns="0" tIns="0" rIns="0" bIns="0" rtlCol="0" anchor="ctr"/>
           <a:lstStyle/>
           <a:p>
-            <a:pPr rtl="1" algn="r" indent="0" marL="0">
-              <a:spcAft>
-                <a:spcPts val="1000"/>
-              </a:spcAft>
-              <a:buNone/>
+            <a:pPr rtl="1" algn="r" marL="228600" indent="-228600">
+              <a:spcAft>
+                <a:spcPts val="1000"/>
+              </a:spcAft>
+              <a:buSzPct val="100000"/>
+              <a:buChar char="•"/>
             </a:pPr>
             <a:r>
               <a:rPr lang="en-US" sz="1900" b="1" dirty="0">
@@ -4966,7 +4987,7 @@
                 <a:ea typeface="Calibri" pitchFamily="34" charset="-122"/>
                 <a:cs typeface="Calibri" pitchFamily="34" charset="-120"/>
               </a:rPr>
-              <a:t>• 6. Code Review</a:t>
+              <a:t>6. Code Review</a:t>
             </a:r>
             <a:pPr rtl="1" algn="r" indent="0" marL="0">
               <a:spcAft>
@@ -4988,11 +5009,12 @@
             <a:endParaRPr lang="en-US" sz="1900" dirty="0"/>
           </a:p>
           <a:p>
-            <a:pPr rtl="1" algn="r" indent="0" marL="0">
-              <a:spcAft>
-                <a:spcPts val="1000"/>
-              </a:spcAft>
-              <a:buNone/>
+            <a:pPr rtl="1" algn="r" marL="228600" indent="-228600">
+              <a:spcAft>
+                <a:spcPts val="1000"/>
+              </a:spcAft>
+              <a:buSzPct val="100000"/>
+              <a:buChar char="•"/>
             </a:pPr>
             <a:r>
               <a:rPr lang="en-US" sz="1900" b="1" dirty="0">
@@ -5003,7 +5025,7 @@
                 <a:ea typeface="Calibri" pitchFamily="34" charset="-122"/>
                 <a:cs typeface="Calibri" pitchFamily="34" charset="-120"/>
               </a:rPr>
-              <a:t>• 7. Testing</a:t>
+              <a:t>7. Testing</a:t>
             </a:r>
             <a:pPr rtl="1" algn="r" indent="0" marL="0">
               <a:spcAft>
@@ -5025,11 +5047,12 @@
             <a:endParaRPr lang="en-US" sz="1900" dirty="0"/>
           </a:p>
           <a:p>
-            <a:pPr rtl="1" algn="r" indent="0" marL="0">
-              <a:spcAft>
-                <a:spcPts val="1000"/>
-              </a:spcAft>
-              <a:buNone/>
+            <a:pPr rtl="1" algn="r" marL="228600" indent="-228600">
+              <a:spcAft>
+                <a:spcPts val="1000"/>
+              </a:spcAft>
+              <a:buSzPct val="100000"/>
+              <a:buChar char="•"/>
             </a:pPr>
             <a:r>
               <a:rPr lang="en-US" sz="1900" b="1" dirty="0">
@@ -5040,7 +5063,7 @@
                 <a:ea typeface="Calibri" pitchFamily="34" charset="-122"/>
                 <a:cs typeface="Calibri" pitchFamily="34" charset="-120"/>
               </a:rPr>
-              <a:t>• 8. Commit</a:t>
+              <a:t>8. Commit</a:t>
             </a:r>
             <a:pPr rtl="1" algn="r" indent="0" marL="0">
               <a:spcAft>
@@ -5062,11 +5085,12 @@
             <a:endParaRPr lang="en-US" sz="1900" dirty="0"/>
           </a:p>
           <a:p>
-            <a:pPr rtl="1" algn="r" indent="0" marL="0">
-              <a:spcAft>
-                <a:spcPts val="1000"/>
-              </a:spcAft>
-              <a:buNone/>
+            <a:pPr rtl="1" algn="r" marL="228600" indent="-228600">
+              <a:spcAft>
+                <a:spcPts val="1000"/>
+              </a:spcAft>
+              <a:buSzPct val="100000"/>
+              <a:buChar char="•"/>
             </a:pPr>
             <a:r>
               <a:rPr lang="en-US" sz="1900" b="1" dirty="0">
@@ -5077,7 +5101,7 @@
                 <a:ea typeface="Calibri" pitchFamily="34" charset="-122"/>
                 <a:cs typeface="Calibri" pitchFamily="34" charset="-120"/>
               </a:rPr>
-              <a:t>• 9. Deploy</a:t>
+              <a:t>9. Deploy</a:t>
             </a:r>
             <a:pPr rtl="1" algn="r" indent="0" marL="0">
               <a:spcAft>
@@ -5099,11 +5123,12 @@
             <a:endParaRPr lang="en-US" sz="1900" dirty="0"/>
           </a:p>
           <a:p>
-            <a:pPr rtl="1" algn="r" indent="0" marL="0">
-              <a:spcAft>
-                <a:spcPts val="1000"/>
-              </a:spcAft>
-              <a:buNone/>
+            <a:pPr rtl="1" algn="r" marL="228600" indent="-228600">
+              <a:spcAft>
+                <a:spcPts val="1000"/>
+              </a:spcAft>
+              <a:buSzPct val="100000"/>
+              <a:buChar char="•"/>
             </a:pPr>
             <a:r>
               <a:rPr lang="en-US" sz="1900" b="1" dirty="0">
@@ -5114,7 +5139,7 @@
                 <a:ea typeface="Calibri" pitchFamily="34" charset="-122"/>
                 <a:cs typeface="Calibri" pitchFamily="34" charset="-120"/>
               </a:rPr>
-              <a:t>• 10. שיתוף</a:t>
+              <a:t>10. שיתוף</a:t>
             </a:r>
             <a:pPr rtl="1" algn="r" indent="0" marL="0">
               <a:spcAft>
@@ -5330,11 +5355,12 @@
           <a:bodyPr wrap="square" lIns="0" tIns="0" rIns="0" bIns="0" rtlCol="0" anchor="ctr"/>
           <a:lstStyle/>
           <a:p>
-            <a:pPr rtl="1" algn="r" indent="0" marL="0">
-              <a:spcAft>
-                <a:spcPts val="1000"/>
-              </a:spcAft>
-              <a:buNone/>
+            <a:pPr rtl="1" algn="r" marL="228600" indent="-228600">
+              <a:spcAft>
+                <a:spcPts val="1000"/>
+              </a:spcAft>
+              <a:buSzPct val="100000"/>
+              <a:buChar char="•"/>
             </a:pPr>
             <a:r>
               <a:rPr lang="en-US" sz="1900" b="1" dirty="0">
@@ -5345,7 +5371,7 @@
                 <a:ea typeface="Calibri" pitchFamily="34" charset="-122"/>
                 <a:cs typeface="Calibri" pitchFamily="34" charset="-120"/>
               </a:rPr>
-              <a:t>• דו"ח DORA</a:t>
+              <a:t>דו"ח DORA</a:t>
             </a:r>
             <a:pPr rtl="1" algn="r" indent="0" marL="0">
               <a:spcAft>
@@ -5367,11 +5393,12 @@
             <a:endParaRPr lang="en-US" sz="1900" dirty="0"/>
           </a:p>
           <a:p>
-            <a:pPr rtl="1" algn="r" indent="0" marL="0">
-              <a:spcAft>
-                <a:spcPts val="1000"/>
-              </a:spcAft>
-              <a:buNone/>
+            <a:pPr rtl="1" algn="r" marL="228600" indent="-228600">
+              <a:spcAft>
+                <a:spcPts val="1000"/>
+              </a:spcAft>
+              <a:buSzPct val="100000"/>
+              <a:buChar char="•"/>
             </a:pPr>
             <a:r>
               <a:rPr lang="en-US" sz="1900" dirty="0">
@@ -5382,7 +5409,7 @@
                 <a:ea typeface="Calibri" pitchFamily="34" charset="-122"/>
                 <a:cs typeface="Calibri" pitchFamily="34" charset="-120"/>
               </a:rPr>
-              <a:t>• קוד קיים (Brownfield) בלי תהליך מסודר: </a:t>
+              <a:t>קוד קיים (Brownfield) בלי תהליך מסודר: </a:t>
             </a:r>
             <a:pPr rtl="1" algn="r" indent="0" marL="0">
               <a:spcAft>
@@ -5421,11 +5448,12 @@
             <a:endParaRPr lang="en-US" sz="1900" dirty="0"/>
           </a:p>
           <a:p>
-            <a:pPr rtl="1" algn="r" indent="0" marL="0">
-              <a:spcAft>
-                <a:spcPts val="1000"/>
-              </a:spcAft>
-              <a:buNone/>
+            <a:pPr rtl="1" algn="r" marL="228600" indent="-228600">
+              <a:spcAft>
+                <a:spcPts val="1000"/>
+              </a:spcAft>
+              <a:buSzPct val="100000"/>
+              <a:buChar char="•"/>
             </a:pPr>
             <a:r>
               <a:rPr lang="en-US" sz="1900" dirty="0">
@@ -5436,7 +5464,7 @@
                 <a:ea typeface="Calibri" pitchFamily="34" charset="-122"/>
                 <a:cs typeface="Calibri" pitchFamily="34" charset="-120"/>
               </a:rPr>
-              <a:t>• אותם כלים, על פרויקט חדש שנבנה מאפס (Greenfield) עם Workflow ברור: </a:t>
+              <a:t>אותם כלים, על פרויקט חדש שנבנה מאפס (Greenfield) עם Workflow ברור: </a:t>
             </a:r>
             <a:pPr rtl="1" algn="r" indent="0" marL="0">
               <a:spcAft>
@@ -5475,11 +5503,12 @@
             <a:endParaRPr lang="en-US" sz="1900" dirty="0"/>
           </a:p>
           <a:p>
-            <a:pPr rtl="1" algn="r" indent="0" marL="0">
-              <a:spcAft>
-                <a:spcPts val="1000"/>
-              </a:spcAft>
-              <a:buNone/>
+            <a:pPr rtl="1" algn="r" marL="228600" indent="-228600">
+              <a:spcAft>
+                <a:spcPts val="1000"/>
+              </a:spcAft>
+              <a:buSzPct val="100000"/>
+              <a:buChar char="•"/>
             </a:pPr>
             <a:r>
               <a:rPr lang="en-US" sz="1900" dirty="0">
@@ -5490,7 +5519,7 @@
                 <a:ea typeface="Calibri" pitchFamily="34" charset="-122"/>
                 <a:cs typeface="Calibri" pitchFamily="34" charset="-120"/>
               </a:rPr>
-              <a:t>• בלי תהליך מסודר: </a:t>
+              <a:t>בלי תהליך מסודר: </a:t>
             </a:r>
             <a:pPr rtl="1" algn="r" indent="0" marL="0">
               <a:spcAft>
@@ -5869,11 +5898,12 @@
           <a:bodyPr wrap="square" lIns="0" tIns="0" rIns="0" bIns="0" rtlCol="0" anchor="ctr"/>
           <a:lstStyle/>
           <a:p>
-            <a:pPr rtl="1" algn="r" indent="0" marL="0">
-              <a:spcAft>
-                <a:spcPts val="1000"/>
-              </a:spcAft>
-              <a:buNone/>
+            <a:pPr rtl="1" algn="r" marL="228600" indent="-228600">
+              <a:spcAft>
+                <a:spcPts val="1000"/>
+              </a:spcAft>
+              <a:buSzPct val="100000"/>
+              <a:buChar char="•"/>
             </a:pPr>
             <a:r>
               <a:rPr lang="en-US" sz="1900" dirty="0">
@@ -5884,7 +5914,7 @@
                 <a:ea typeface="Calibri" pitchFamily="34" charset="-122"/>
                 <a:cs typeface="Calibri" pitchFamily="34" charset="-120"/>
               </a:rPr>
-              <a:t>• Google הריצה כלי </a:t>
+              <a:t>Google הריצה כלי </a:t>
             </a:r>
             <a:pPr rtl="1" algn="r" indent="0" marL="0">
               <a:spcAft>
@@ -5923,11 +5953,12 @@
             <a:endParaRPr lang="en-US" sz="1900" dirty="0"/>
           </a:p>
           <a:p>
-            <a:pPr rtl="1" algn="r" indent="0" marL="0">
-              <a:spcAft>
-                <a:spcPts val="1000"/>
-              </a:spcAft>
-              <a:buNone/>
+            <a:pPr rtl="1" algn="r" marL="228600" indent="-228600">
+              <a:spcAft>
+                <a:spcPts val="1000"/>
+              </a:spcAft>
+              <a:buSzPct val="100000"/>
+              <a:buChar char="•"/>
             </a:pPr>
             <a:r>
               <a:rPr lang="en-US" sz="1900" dirty="0">
@@ -5938,16 +5969,17 @@
                 <a:ea typeface="Calibri" pitchFamily="34" charset="-122"/>
                 <a:cs typeface="Calibri" pitchFamily="34" charset="-120"/>
               </a:rPr>
-              <a:t>• אמצע 2026: נסגר, הוחלף ב-Antigravity CLI (לא חינמי באותו אופן)</a:t>
+              <a:t>אמצע 2026: נסגר, הוחלף ב-Antigravity CLI (לא חינמי באותו אופן)</a:t>
             </a:r>
             <a:endParaRPr lang="en-US" sz="1900" dirty="0"/>
           </a:p>
           <a:p>
-            <a:pPr rtl="1" algn="r" indent="0" marL="0">
-              <a:spcAft>
-                <a:spcPts val="1000"/>
-              </a:spcAft>
-              <a:buNone/>
+            <a:pPr rtl="1" algn="r" marL="228600" indent="-228600">
+              <a:spcAft>
+                <a:spcPts val="1000"/>
+              </a:spcAft>
+              <a:buSzPct val="100000"/>
+              <a:buChar char="•"/>
             </a:pPr>
             <a:r>
               <a:rPr lang="en-US" sz="1900" dirty="0">
@@ -5958,16 +5990,17 @@
                 <a:ea typeface="Calibri" pitchFamily="34" charset="-122"/>
                 <a:cs typeface="Calibri" pitchFamily="34" charset="-120"/>
               </a:rPr>
-              <a:t>• מי שלמד רק "את הכלי" — מתחיל כמעט מאפס</a:t>
+              <a:t>מי שלמד רק "את הכלי" — מתחיל כמעט מאפס</a:t>
             </a:r>
             <a:endParaRPr lang="en-US" sz="1900" dirty="0"/>
           </a:p>
           <a:p>
-            <a:pPr rtl="1" algn="r" indent="0" marL="0">
-              <a:spcAft>
-                <a:spcPts val="1000"/>
-              </a:spcAft>
-              <a:buNone/>
+            <a:pPr rtl="1" algn="r" marL="228600" indent="-228600">
+              <a:spcAft>
+                <a:spcPts val="1000"/>
+              </a:spcAft>
+              <a:buSzPct val="100000"/>
+              <a:buChar char="•"/>
             </a:pPr>
             <a:r>
               <a:rPr lang="en-US" sz="1900" dirty="0">
@@ -5978,7 +6011,7 @@
                 <a:ea typeface="Calibri" pitchFamily="34" charset="-122"/>
                 <a:cs typeface="Calibri" pitchFamily="34" charset="-120"/>
               </a:rPr>
-              <a:t>• מי שלמד את ה-Workflow — עובר לכלי הבא כמעט בלי לאבד זמן</a:t>
+              <a:t>מי שלמד את ה-Workflow — עובר לכלי הבא כמעט בלי לאבד זמן</a:t>
             </a:r>
             <a:endParaRPr lang="en-US" sz="1900" dirty="0"/>
           </a:p>
@@ -6280,11 +6313,12 @@
           <a:bodyPr wrap="square" lIns="0" tIns="0" rIns="0" bIns="0" rtlCol="0" anchor="ctr"/>
           <a:lstStyle/>
           <a:p>
-            <a:pPr rtl="1" algn="r" indent="0" marL="0">
-              <a:spcAft>
-                <a:spcPts val="1000"/>
-              </a:spcAft>
-              <a:buNone/>
+            <a:pPr rtl="1" algn="r" marL="228600" indent="-228600">
+              <a:spcAft>
+                <a:spcPts val="1000"/>
+              </a:spcAft>
+              <a:buSzPct val="100000"/>
+              <a:buChar char="•"/>
             </a:pPr>
             <a:r>
               <a:rPr lang="en-US" sz="1900" dirty="0">
@@ -6295,7 +6329,7 @@
                 <a:ea typeface="Calibri" pitchFamily="34" charset="-122"/>
                 <a:cs typeface="Calibri" pitchFamily="34" charset="-120"/>
               </a:rPr>
-              <a:t>• מרץ 2026: </a:t>
+              <a:t>מרץ 2026: </a:t>
             </a:r>
             <a:pPr rtl="1" algn="r" indent="0" marL="0">
               <a:spcAft>
@@ -6368,11 +6402,12 @@
             <a:endParaRPr lang="en-US" sz="1900" dirty="0"/>
           </a:p>
           <a:p>
-            <a:pPr rtl="1" algn="r" indent="0" marL="0">
-              <a:spcAft>
-                <a:spcPts val="1000"/>
-              </a:spcAft>
-              <a:buNone/>
+            <a:pPr rtl="1" algn="r" marL="228600" indent="-228600">
+              <a:spcAft>
+                <a:spcPts val="1000"/>
+              </a:spcAft>
+              <a:buSzPct val="100000"/>
+              <a:buChar char="•"/>
             </a:pPr>
             <a:r>
               <a:rPr lang="en-US" sz="1900" dirty="0">
@@ -6383,16 +6418,17 @@
                 <a:ea typeface="Calibri" pitchFamily="34" charset="-122"/>
                 <a:cs typeface="Calibri" pitchFamily="34" charset="-120"/>
               </a:rPr>
-              <a:t>• הפעלות חדשות מוקפאות זמנית — בלי לוח זמנים לחידוש</a:t>
+              <a:t>הפעלות חדשות מוקפאות זמנית — בלי לוח זמנים לחידוש</a:t>
             </a:r>
             <a:endParaRPr lang="en-US" sz="1900" dirty="0"/>
           </a:p>
           <a:p>
-            <a:pPr rtl="1" algn="r" indent="0" marL="0">
-              <a:spcAft>
-                <a:spcPts val="1000"/>
-              </a:spcAft>
-              <a:buNone/>
+            <a:pPr rtl="1" algn="r" marL="228600" indent="-228600">
+              <a:spcAft>
+                <a:spcPts val="1000"/>
+              </a:spcAft>
+              <a:buSzPct val="100000"/>
+              <a:buChar char="•"/>
             </a:pPr>
             <a:r>
               <a:rPr lang="en-US" sz="1900" dirty="0">
@@ -6403,16 +6439,17 @@
                 <a:ea typeface="Calibri" pitchFamily="34" charset="-122"/>
                 <a:cs typeface="Calibri" pitchFamily="34" charset="-120"/>
               </a:rPr>
-              <a:t>• גם "תנאי מסלול חינם" משתנים בלי אזהרה, לא רק כלים שלמים</a:t>
+              <a:t>גם "תנאי מסלול חינם" משתנים בלי אזהרה, לא רק כלים שלמים</a:t>
             </a:r>
             <a:endParaRPr lang="en-US" sz="1900" dirty="0"/>
           </a:p>
           <a:p>
-            <a:pPr rtl="1" algn="r" indent="0" marL="0">
-              <a:spcAft>
-                <a:spcPts val="1000"/>
-              </a:spcAft>
-              <a:buNone/>
+            <a:pPr rtl="1" algn="r" marL="228600" indent="-228600">
+              <a:spcAft>
+                <a:spcPts val="1000"/>
+              </a:spcAft>
+              <a:buSzPct val="100000"/>
+              <a:buChar char="•"/>
             </a:pPr>
             <a:r>
               <a:rPr lang="en-US" sz="1900" b="1" dirty="0">
@@ -6423,7 +6460,7 @@
                 <a:ea typeface="Calibri" pitchFamily="34" charset="-122"/>
                 <a:cs typeface="Calibri" pitchFamily="34" charset="-120"/>
               </a:rPr>
-              <a:t>• פעילות זוגות:</a:t>
+              <a:t>פעילות זוגות:</a:t>
             </a:r>
             <a:pPr rtl="1" algn="r" indent="0" marL="0">
               <a:spcAft>
@@ -6678,11 +6715,12 @@
           <a:bodyPr wrap="square" lIns="0" tIns="0" rIns="0" bIns="0" rtlCol="0" anchor="ctr"/>
           <a:lstStyle/>
           <a:p>
-            <a:pPr rtl="1" algn="r" indent="0" marL="0">
-              <a:spcAft>
-                <a:spcPts val="1000"/>
-              </a:spcAft>
-              <a:buNone/>
+            <a:pPr rtl="1" algn="r" marL="228600" indent="-228600">
+              <a:spcAft>
+                <a:spcPts val="1000"/>
+              </a:spcAft>
+              <a:buSzPct val="100000"/>
+              <a:buChar char="•"/>
             </a:pPr>
             <a:r>
               <a:rPr lang="en-US" sz="1900" b="1" dirty="0">
@@ -6693,7 +6731,7 @@
                 <a:ea typeface="Calibri" pitchFamily="34" charset="-122"/>
                 <a:cs typeface="Calibri" pitchFamily="34" charset="-120"/>
               </a:rPr>
-              <a:t>• Stripe</a:t>
+              <a:t>Stripe</a:t>
             </a:r>
             <a:pPr rtl="1" algn="r" indent="0" marL="0">
               <a:spcAft>
@@ -6715,11 +6753,12 @@
             <a:endParaRPr lang="en-US" sz="1900" dirty="0"/>
           </a:p>
           <a:p>
-            <a:pPr rtl="1" algn="r" indent="0" marL="0">
-              <a:spcAft>
-                <a:spcPts val="1000"/>
-              </a:spcAft>
-              <a:buNone/>
+            <a:pPr rtl="1" algn="r" marL="228600" indent="-228600">
+              <a:spcAft>
+                <a:spcPts val="1000"/>
+              </a:spcAft>
+              <a:buSzPct val="100000"/>
+              <a:buChar char="•"/>
             </a:pPr>
             <a:r>
               <a:rPr lang="en-US" sz="1900" b="1" dirty="0">
@@ -6730,7 +6769,7 @@
                 <a:ea typeface="Calibri" pitchFamily="34" charset="-122"/>
                 <a:cs typeface="Calibri" pitchFamily="34" charset="-120"/>
               </a:rPr>
-              <a:t>• TELUS</a:t>
+              <a:t>TELUS</a:t>
             </a:r>
             <a:pPr rtl="1" algn="r" indent="0" marL="0">
               <a:spcAft>
@@ -6752,11 +6791,12 @@
             <a:endParaRPr lang="en-US" sz="1900" dirty="0"/>
           </a:p>
           <a:p>
-            <a:pPr rtl="1" algn="r" indent="0" marL="0">
-              <a:spcAft>
-                <a:spcPts val="1000"/>
-              </a:spcAft>
-              <a:buNone/>
+            <a:pPr rtl="1" algn="r" marL="228600" indent="-228600">
+              <a:spcAft>
+                <a:spcPts val="1000"/>
+              </a:spcAft>
+              <a:buSzPct val="100000"/>
+              <a:buChar char="•"/>
             </a:pPr>
             <a:r>
               <a:rPr lang="en-US" sz="1900" b="1" dirty="0">
@@ -6767,7 +6807,7 @@
                 <a:ea typeface="Calibri" pitchFamily="34" charset="-122"/>
                 <a:cs typeface="Calibri" pitchFamily="34" charset="-120"/>
               </a:rPr>
-              <a:t>• Zapier</a:t>
+              <a:t>Zapier</a:t>
             </a:r>
             <a:pPr rtl="1" algn="r" indent="0" marL="0">
               <a:spcAft>
@@ -7387,11 +7427,12 @@
           <a:bodyPr wrap="square" lIns="0" tIns="0" rIns="0" bIns="0" rtlCol="0" anchor="ctr"/>
           <a:lstStyle/>
           <a:p>
-            <a:pPr rtl="1" algn="r" indent="0" marL="0">
-              <a:spcAft>
-                <a:spcPts val="1000"/>
-              </a:spcAft>
-              <a:buNone/>
+            <a:pPr rtl="1" algn="r" marL="228600" indent="-228600">
+              <a:spcAft>
+                <a:spcPts val="1000"/>
+              </a:spcAft>
+              <a:buSzPct val="100000"/>
+              <a:buChar char="•"/>
             </a:pPr>
             <a:r>
               <a:rPr lang="en-US" sz="1900" b="1" dirty="0">
@@ -7402,7 +7443,7 @@
                 <a:ea typeface="Calibri" pitchFamily="34" charset="-122"/>
                 <a:cs typeface="Calibri" pitchFamily="34" charset="-120"/>
               </a:rPr>
-              <a:t>• LLM (Large Language Model)</a:t>
+              <a:t>LLM (Large Language Model)</a:t>
             </a:r>
             <a:pPr rtl="1" algn="r" indent="0" marL="0">
               <a:spcAft>
@@ -7424,11 +7465,12 @@
             <a:endParaRPr lang="en-US" sz="1900" dirty="0"/>
           </a:p>
           <a:p>
-            <a:pPr rtl="1" algn="r" indent="0" marL="0">
-              <a:spcAft>
-                <a:spcPts val="1000"/>
-              </a:spcAft>
-              <a:buNone/>
+            <a:pPr rtl="1" algn="r" marL="228600" indent="-228600">
+              <a:spcAft>
+                <a:spcPts val="1000"/>
+              </a:spcAft>
+              <a:buSzPct val="100000"/>
+              <a:buChar char="•"/>
             </a:pPr>
             <a:r>
               <a:rPr lang="en-US" sz="1900" dirty="0">
@@ -7439,7 +7481,7 @@
                 <a:ea typeface="Calibri" pitchFamily="34" charset="-122"/>
                 <a:cs typeface="Calibri" pitchFamily="34" charset="-120"/>
               </a:rPr>
-              <a:t>• כותבים בקשה בשפה טבעית (למשל: "תכתוב לי פונקציה שממיינת רשימה") — הטקסט הזה נקרא </a:t>
+              <a:t>כותבים בקשה בשפה טבעית (למשל: "תכתוב לי פונקציה שממיינת רשימה") — הטקסט הזה נקרא </a:t>
             </a:r>
             <a:pPr rtl="1" algn="r" indent="0" marL="0">
               <a:spcAft>
@@ -7478,11 +7520,12 @@
             <a:endParaRPr lang="en-US" sz="1900" dirty="0"/>
           </a:p>
           <a:p>
-            <a:pPr rtl="1" algn="r" indent="0" marL="0">
-              <a:spcAft>
-                <a:spcPts val="1000"/>
-              </a:spcAft>
-              <a:buNone/>
+            <a:pPr rtl="1" algn="r" marL="228600" indent="-228600">
+              <a:spcAft>
+                <a:spcPts val="1000"/>
+              </a:spcAft>
+              <a:buSzPct val="100000"/>
+              <a:buChar char="•"/>
             </a:pPr>
             <a:r>
               <a:rPr lang="en-US" sz="1900" dirty="0">
@@ -7493,7 +7536,7 @@
                 <a:ea typeface="Calibri" pitchFamily="34" charset="-122"/>
                 <a:cs typeface="Calibri" pitchFamily="34" charset="-120"/>
               </a:rPr>
-              <a:t>• המודל לא "מבין" את הפרומפט כמו בן אדם — מנבא </a:t>
+              <a:t>המודל לא "מבין" את הפרומפט כמו בן אדם — מנבא </a:t>
             </a:r>
             <a:pPr rtl="1" algn="r" indent="0" marL="0">
               <a:spcAft>
@@ -7532,11 +7575,12 @@
             <a:endParaRPr lang="en-US" sz="1900" dirty="0"/>
           </a:p>
           <a:p>
-            <a:pPr rtl="1" algn="r" indent="0" marL="0">
-              <a:spcAft>
-                <a:spcPts val="1000"/>
-              </a:spcAft>
-              <a:buNone/>
+            <a:pPr rtl="1" algn="r" marL="228600" indent="-228600">
+              <a:spcAft>
+                <a:spcPts val="1000"/>
+              </a:spcAft>
+              <a:buSzPct val="100000"/>
+              <a:buChar char="•"/>
             </a:pPr>
             <a:r>
               <a:rPr lang="en-US" sz="1900" dirty="0">
@@ -7547,7 +7591,7 @@
                 <a:ea typeface="Calibri" pitchFamily="34" charset="-122"/>
                 <a:cs typeface="Calibri" pitchFamily="34" charset="-120"/>
               </a:rPr>
-              <a:t>• ChatGPT ו-Claude = מודלים כאלה, מוכרים לכם כצ'אטבוטים</a:t>
+              <a:t>ChatGPT ו-Claude = מודלים כאלה, מוכרים לכם כצ'אטבוטים</a:t>
             </a:r>
             <a:endParaRPr lang="en-US" sz="1900" dirty="0"/>
           </a:p>
@@ -8289,11 +8333,12 @@
           <a:bodyPr wrap="square" lIns="0" tIns="0" rIns="0" bIns="0" rtlCol="0" anchor="ctr"/>
           <a:lstStyle/>
           <a:p>
-            <a:pPr rtl="1" algn="r" indent="0" marL="0">
+            <a:pPr rtl="1" algn="r" marL="228600" indent="-228600">
               <a:spcAft>
                 <a:spcPts val="800"/>
               </a:spcAft>
-              <a:buNone/>
+              <a:buSzPct val="100000"/>
+              <a:buChar char="•"/>
             </a:pPr>
             <a:r>
               <a:rPr lang="en-US" sz="1800" dirty="0">
@@ -8304,16 +8349,17 @@
                 <a:ea typeface="Calibri" pitchFamily="34" charset="-122"/>
                 <a:cs typeface="Calibri" pitchFamily="34" charset="-120"/>
               </a:rPr>
-              <a:t>• הוספת משימה חדשה</a:t>
+              <a:t>הוספת משימה חדשה</a:t>
             </a:r>
             <a:endParaRPr lang="en-US" sz="1800" dirty="0"/>
           </a:p>
           <a:p>
-            <a:pPr rtl="1" algn="r" indent="0" marL="0">
+            <a:pPr rtl="1" algn="r" marL="228600" indent="-228600">
               <a:spcAft>
                 <a:spcPts val="800"/>
               </a:spcAft>
-              <a:buNone/>
+              <a:buSzPct val="100000"/>
+              <a:buChar char="•"/>
             </a:pPr>
             <a:r>
               <a:rPr lang="en-US" sz="1800" dirty="0">
@@ -8324,16 +8370,17 @@
                 <a:ea typeface="Calibri" pitchFamily="34" charset="-122"/>
                 <a:cs typeface="Calibri" pitchFamily="34" charset="-120"/>
               </a:rPr>
-              <a:t>• סימון משימה כהושלמה</a:t>
+              <a:t>סימון משימה כהושלמה</a:t>
             </a:r>
             <a:endParaRPr lang="en-US" sz="1800" dirty="0"/>
           </a:p>
           <a:p>
-            <a:pPr rtl="1" algn="r" indent="0" marL="0">
+            <a:pPr rtl="1" algn="r" marL="228600" indent="-228600">
               <a:spcAft>
                 <a:spcPts val="800"/>
               </a:spcAft>
-              <a:buNone/>
+              <a:buSzPct val="100000"/>
+              <a:buChar char="•"/>
             </a:pPr>
             <a:r>
               <a:rPr lang="en-US" sz="1800" dirty="0">
@@ -8344,16 +8391,17 @@
                 <a:ea typeface="Calibri" pitchFamily="34" charset="-122"/>
                 <a:cs typeface="Calibri" pitchFamily="34" charset="-120"/>
               </a:rPr>
-              <a:t>• מחיקת משימה</a:t>
+              <a:t>מחיקת משימה</a:t>
             </a:r>
             <a:endParaRPr lang="en-US" sz="1800" dirty="0"/>
           </a:p>
           <a:p>
-            <a:pPr rtl="1" algn="r" indent="0" marL="0">
+            <a:pPr rtl="1" algn="r" marL="228600" indent="-228600">
               <a:spcAft>
                 <a:spcPts val="800"/>
               </a:spcAft>
-              <a:buNone/>
+              <a:buSzPct val="100000"/>
+              <a:buChar char="•"/>
             </a:pPr>
             <a:r>
               <a:rPr lang="en-US" sz="1800" dirty="0">
@@ -8364,7 +8412,7 @@
                 <a:ea typeface="Calibri" pitchFamily="34" charset="-122"/>
                 <a:cs typeface="Calibri" pitchFamily="34" charset="-120"/>
               </a:rPr>
-              <a:t>• שמירה עם localStorage (זיכרון מקומי בדפדפן שנשמר גם אחרי רענון הדף)</a:t>
+              <a:t>שמירה עם localStorage (זיכרון מקומי בדפדפן שנשמר גם אחרי רענון הדף)</a:t>
             </a:r>
             <a:endParaRPr lang="en-US" sz="1800" dirty="0"/>
           </a:p>
@@ -9169,11 +9217,12 @@
           <a:bodyPr wrap="square" lIns="0" tIns="0" rIns="0" bIns="0" rtlCol="0" anchor="ctr"/>
           <a:lstStyle/>
           <a:p>
-            <a:pPr rtl="1" algn="r" indent="0" marL="0">
-              <a:spcAft>
-                <a:spcPts val="1000"/>
-              </a:spcAft>
-              <a:buNone/>
+            <a:pPr rtl="1" algn="r" marL="228600" indent="-228600">
+              <a:spcAft>
+                <a:spcPts val="1000"/>
+              </a:spcAft>
+              <a:buSzPct val="100000"/>
+              <a:buChar char="•"/>
             </a:pPr>
             <a:r>
               <a:rPr lang="en-US" sz="1900" dirty="0">
@@ -9184,16 +9233,17 @@
                 <a:ea typeface="Calibri" pitchFamily="34" charset="-122"/>
                 <a:cs typeface="Calibri" pitchFamily="34" charset="-120"/>
               </a:rPr>
-              <a:t>• השם "Vibe" מרמז על תחושת זרימה: מתארים במילים מה רוצים, וה-AI הופך את זה לקוד עובד — לרוב תוך דקות ולא שעות</a:t>
+              <a:t>השם "Vibe" מרמז על תחושת זרימה: מתארים במילים מה רוצים, וה-AI הופך את זה לקוד עובד — לרוב תוך דקות ולא שעות</a:t>
             </a:r>
             <a:endParaRPr lang="en-US" sz="1900" dirty="0"/>
           </a:p>
           <a:p>
-            <a:pPr rtl="1" algn="r" indent="0" marL="0">
-              <a:spcAft>
-                <a:spcPts val="1000"/>
-              </a:spcAft>
-              <a:buNone/>
+            <a:pPr rtl="1" algn="r" marL="228600" indent="-228600">
+              <a:spcAft>
+                <a:spcPts val="1000"/>
+              </a:spcAft>
+              <a:buSzPct val="100000"/>
+              <a:buChar char="•"/>
             </a:pPr>
             <a:r>
               <a:rPr lang="en-US" sz="1900" dirty="0">
@@ -9204,16 +9254,17 @@
                 <a:ea typeface="Calibri" pitchFamily="34" charset="-122"/>
                 <a:cs typeface="Calibri" pitchFamily="34" charset="-120"/>
               </a:rPr>
-              <a:t>• מנחים AI לכתוב/לבדוק/לתקן קוד — לא כותבים כל שורה לבד, ושומרים שליטה על כיוון, איכות והחלטות ארכיטקטוניות</a:t>
+              <a:t>מנחים AI לכתוב/לבדוק/לתקן קוד — לא כותבים כל שורה לבד, ושומרים שליטה על כיוון, איכות והחלטות ארכיטקטוניות</a:t>
             </a:r>
             <a:endParaRPr lang="en-US" sz="1900" dirty="0"/>
           </a:p>
           <a:p>
-            <a:pPr rtl="1" algn="r" indent="0" marL="0">
-              <a:spcAft>
-                <a:spcPts val="1000"/>
-              </a:spcAft>
-              <a:buNone/>
+            <a:pPr rtl="1" algn="r" marL="228600" indent="-228600">
+              <a:spcAft>
+                <a:spcPts val="1000"/>
+              </a:spcAft>
+              <a:buSzPct val="100000"/>
+              <a:buChar char="•"/>
             </a:pPr>
             <a:r>
               <a:rPr lang="en-US" sz="1900" b="1" dirty="0">
@@ -9224,7 +9275,7 @@
                 <a:ea typeface="Calibri" pitchFamily="34" charset="-122"/>
                 <a:cs typeface="Calibri" pitchFamily="34" charset="-120"/>
               </a:rPr>
-              <a:t>• לא</a:t>
+              <a:t>לא</a:t>
             </a:r>
             <a:pPr rtl="1" algn="r" indent="0" marL="0">
               <a:spcAft>
@@ -9577,11 +9628,12 @@
           <a:bodyPr wrap="square" lIns="0" tIns="0" rIns="0" bIns="0" rtlCol="0" anchor="ctr"/>
           <a:lstStyle/>
           <a:p>
-            <a:pPr rtl="1" algn="r" indent="0" marL="0">
-              <a:spcAft>
-                <a:spcPts val="1000"/>
-              </a:spcAft>
-              <a:buNone/>
+            <a:pPr rtl="1" algn="r" marL="228600" indent="-228600">
+              <a:spcAft>
+                <a:spcPts val="1000"/>
+              </a:spcAft>
+              <a:buSzPct val="100000"/>
+              <a:buChar char="•"/>
             </a:pPr>
             <a:r>
               <a:rPr lang="en-US" sz="1900" b="1" dirty="0">
@@ -9592,7 +9644,7 @@
                 <a:ea typeface="Calibri" pitchFamily="34" charset="-122"/>
                 <a:cs typeface="Calibri" pitchFamily="34" charset="-120"/>
               </a:rPr>
-              <a:t>• AI-Native (הגישה של הקורס):</a:t>
+              <a:t>AI-Native (הגישה של הקורס):</a:t>
             </a:r>
             <a:pPr rtl="1" algn="r" indent="0" marL="0">
               <a:spcAft>
@@ -9614,11 +9666,12 @@
             <a:endParaRPr lang="en-US" sz="1900" dirty="0"/>
           </a:p>
           <a:p>
-            <a:pPr rtl="1" algn="r" indent="0" marL="0">
-              <a:spcAft>
-                <a:spcPts val="1000"/>
-              </a:spcAft>
-              <a:buNone/>
+            <a:pPr rtl="1" algn="r" marL="228600" indent="-228600">
+              <a:spcAft>
+                <a:spcPts val="1000"/>
+              </a:spcAft>
+              <a:buSzPct val="100000"/>
+              <a:buChar char="•"/>
             </a:pPr>
             <a:r>
               <a:rPr lang="en-US" sz="1900" b="1" dirty="0">
@@ -9629,7 +9682,7 @@
                 <a:ea typeface="Calibri" pitchFamily="34" charset="-122"/>
                 <a:cs typeface="Calibri" pitchFamily="34" charset="-120"/>
               </a:rPr>
-              <a:t>• הגישה הישנה:</a:t>
+              <a:t>הגישה הישנה:</a:t>
             </a:r>
             <a:pPr rtl="1" algn="r" indent="0" marL="0">
               <a:spcAft>
@@ -9651,11 +9704,12 @@
             <a:endParaRPr lang="en-US" sz="1900" dirty="0"/>
           </a:p>
           <a:p>
-            <a:pPr rtl="1" algn="r" indent="0" marL="0">
-              <a:spcAft>
-                <a:spcPts val="1000"/>
-              </a:spcAft>
-              <a:buNone/>
+            <a:pPr rtl="1" algn="r" marL="228600" indent="-228600">
+              <a:spcAft>
+                <a:spcPts val="1000"/>
+              </a:spcAft>
+              <a:buSzPct val="100000"/>
+              <a:buChar char="•"/>
             </a:pPr>
             <a:r>
               <a:rPr lang="en-US" sz="1900" dirty="0">
@@ -9666,7 +9720,7 @@
                 <a:ea typeface="Calibri" pitchFamily="34" charset="-122"/>
                 <a:cs typeface="Calibri" pitchFamily="34" charset="-120"/>
               </a:rPr>
-              <a:t>• ההבדל אינו כמותי אלא מהותי — זה לא תוספת לתהליך הקיים, זהו תהליך חדש</a:t>
+              <a:t>ההבדל אינו כמותי אלא מהותי — זה לא תוספת לתהליך הקיים, זהו תהליך חדש</a:t>
             </a:r>
             <a:endParaRPr lang="en-US" sz="1900" dirty="0"/>
           </a:p>
@@ -9865,11 +9919,12 @@
           <a:bodyPr wrap="square" lIns="0" tIns="0" rIns="0" bIns="0" rtlCol="0" anchor="ctr"/>
           <a:lstStyle/>
           <a:p>
-            <a:pPr rtl="1" algn="r" indent="0" marL="0">
-              <a:spcAft>
-                <a:spcPts val="1000"/>
-              </a:spcAft>
-              <a:buNone/>
+            <a:pPr rtl="1" algn="r" marL="228600" indent="-228600">
+              <a:spcAft>
+                <a:spcPts val="1000"/>
+              </a:spcAft>
+              <a:buSzPct val="100000"/>
+              <a:buChar char="•"/>
             </a:pPr>
             <a:r>
               <a:rPr lang="en-US" sz="1900" b="1" dirty="0">
@@ -9880,7 +9935,7 @@
                 <a:ea typeface="Calibri" pitchFamily="34" charset="-122"/>
                 <a:cs typeface="Calibri" pitchFamily="34" charset="-120"/>
               </a:rPr>
-              <a:t>• 92.6%</a:t>
+              <a:t>92.6%</a:t>
             </a:r>
             <a:pPr rtl="1" algn="r" indent="0" marL="0">
               <a:spcAft>
@@ -9902,11 +9957,12 @@
             <a:endParaRPr lang="en-US" sz="1900" dirty="0"/>
           </a:p>
           <a:p>
-            <a:pPr rtl="1" algn="r" indent="0" marL="0">
-              <a:spcAft>
-                <a:spcPts val="1000"/>
-              </a:spcAft>
-              <a:buNone/>
+            <a:pPr rtl="1" algn="r" marL="228600" indent="-228600">
+              <a:spcAft>
+                <a:spcPts val="1000"/>
+              </a:spcAft>
+              <a:buSzPct val="100000"/>
+              <a:buChar char="•"/>
             </a:pPr>
             <a:r>
               <a:rPr lang="en-US" sz="1900" b="1" dirty="0">
@@ -9917,7 +9973,7 @@
                 <a:ea typeface="Calibri" pitchFamily="34" charset="-122"/>
                 <a:cs typeface="Calibri" pitchFamily="34" charset="-120"/>
               </a:rPr>
-              <a:t>• 26.9%</a:t>
+              <a:t>26.9%</a:t>
             </a:r>
             <a:pPr rtl="1" algn="r" indent="0" marL="0">
               <a:spcAft>
@@ -9939,11 +9995,12 @@
             <a:endParaRPr lang="en-US" sz="1900" dirty="0"/>
           </a:p>
           <a:p>
-            <a:pPr rtl="1" algn="r" indent="0" marL="0">
-              <a:spcAft>
-                <a:spcPts val="1000"/>
-              </a:spcAft>
-              <a:buNone/>
+            <a:pPr rtl="1" algn="r" marL="228600" indent="-228600">
+              <a:spcAft>
+                <a:spcPts val="1000"/>
+              </a:spcAft>
+              <a:buSzPct val="100000"/>
+              <a:buChar char="•"/>
             </a:pPr>
             <a:r>
               <a:rPr lang="en-US" sz="1900" b="1" dirty="0">
@@ -9954,7 +10011,7 @@
                 <a:ea typeface="Calibri" pitchFamily="34" charset="-122"/>
                 <a:cs typeface="Calibri" pitchFamily="34" charset="-120"/>
               </a:rPr>
-              <a:t>• 1,000+</a:t>
+              <a:t>1,000+</a:t>
             </a:r>
             <a:pPr rtl="1" algn="r" indent="0" marL="0">
               <a:spcAft>
@@ -10010,11 +10067,12 @@
             <a:endParaRPr lang="en-US" sz="1900" dirty="0"/>
           </a:p>
           <a:p>
-            <a:pPr rtl="1" algn="r" indent="0" marL="0">
-              <a:spcAft>
-                <a:spcPts val="1000"/>
-              </a:spcAft>
-              <a:buNone/>
+            <a:pPr rtl="1" algn="r" marL="228600" indent="-228600">
+              <a:spcAft>
+                <a:spcPts val="1000"/>
+              </a:spcAft>
+              <a:buSzPct val="100000"/>
+              <a:buChar char="•"/>
             </a:pPr>
             <a:r>
               <a:rPr lang="en-US" sz="1900" b="1" dirty="0">
@@ -10025,7 +10083,7 @@
                 <a:ea typeface="Calibri" pitchFamily="34" charset="-122"/>
                 <a:cs typeface="Calibri" pitchFamily="34" charset="-120"/>
               </a:rPr>
-              <a:t>• 40%</a:t>
+              <a:t>40%</a:t>
             </a:r>
             <a:pPr rtl="1" algn="r" indent="0" marL="0">
               <a:spcAft>
@@ -10353,11 +10411,12 @@
           <a:bodyPr wrap="square" lIns="0" tIns="0" rIns="0" bIns="0" rtlCol="0" anchor="ctr"/>
           <a:lstStyle/>
           <a:p>
-            <a:pPr rtl="1" algn="r" indent="0" marL="0">
-              <a:spcAft>
-                <a:spcPts val="1000"/>
-              </a:spcAft>
-              <a:buNone/>
+            <a:pPr rtl="1" algn="r" marL="228600" indent="-228600">
+              <a:spcAft>
+                <a:spcPts val="1000"/>
+              </a:spcAft>
+              <a:buSzPct val="100000"/>
+              <a:buChar char="•"/>
             </a:pPr>
             <a:r>
               <a:rPr lang="en-US" sz="1900" b="1" dirty="0">
@@ -10368,7 +10427,7 @@
                 <a:ea typeface="Calibri" pitchFamily="34" charset="-122"/>
                 <a:cs typeface="Calibri" pitchFamily="34" charset="-120"/>
               </a:rPr>
-              <a:t>• התשובה:</a:t>
+              <a:t>התשובה:</a:t>
             </a:r>
             <a:pPr rtl="1" algn="r" indent="0" marL="0">
               <a:spcAft>
@@ -10390,11 +10449,12 @@
             <a:endParaRPr lang="en-US" sz="1900" dirty="0"/>
           </a:p>
           <a:p>
-            <a:pPr rtl="1" algn="r" indent="0" marL="0">
-              <a:spcAft>
-                <a:spcPts val="1000"/>
-              </a:spcAft>
-              <a:buNone/>
+            <a:pPr rtl="1" algn="r" marL="228600" indent="-228600">
+              <a:spcAft>
+                <a:spcPts val="1000"/>
+              </a:spcAft>
+              <a:buSzPct val="100000"/>
+              <a:buChar char="•"/>
             </a:pPr>
             <a:r>
               <a:rPr lang="en-US" sz="1900" dirty="0">
@@ -10405,7 +10465,7 @@
                 <a:ea typeface="Calibri" pitchFamily="34" charset="-122"/>
                 <a:cs typeface="Calibri" pitchFamily="34" charset="-120"/>
               </a:rPr>
-              <a:t>• קוד מכונה → שפות עיליות (כמו Python) → </a:t>
+              <a:t>קוד מכונה → שפות עיליות (כמו Python) → </a:t>
             </a:r>
             <a:pPr rtl="1" algn="r" indent="0" marL="0">
               <a:spcAft>
@@ -10512,11 +10572,12 @@
             <a:endParaRPr lang="en-US" sz="1900" dirty="0"/>
           </a:p>
           <a:p>
-            <a:pPr rtl="1" algn="r" indent="0" marL="0">
-              <a:spcAft>
-                <a:spcPts val="1000"/>
-              </a:spcAft>
-              <a:buNone/>
+            <a:pPr rtl="1" algn="r" marL="228600" indent="-228600">
+              <a:spcAft>
+                <a:spcPts val="1000"/>
+              </a:spcAft>
+              <a:buSzPct val="100000"/>
+              <a:buChar char="•"/>
             </a:pPr>
             <a:r>
               <a:rPr lang="en-US" sz="1900" dirty="0">
@@ -10527,7 +10588,7 @@
                 <a:ea typeface="Calibri" pitchFamily="34" charset="-122"/>
                 <a:cs typeface="Calibri" pitchFamily="34" charset="-120"/>
               </a:rPr>
-              <a:t>• כל קפיצה שינתה מה נחשב "עבודה של מפתח" — ולא נעצרה (נעמיק בכל כלי לאורך הקורס)</a:t>
+              <a:t>כל קפיצה שינתה מה נחשב "עבודה של מפתח" — ולא נעצרה (נעמיק בכל כלי לאורך הקורס)</a:t>
             </a:r>
             <a:endParaRPr lang="en-US" sz="1900" dirty="0"/>
           </a:p>
@@ -10790,11 +10851,12 @@
           <a:bodyPr wrap="square" lIns="0" tIns="0" rIns="0" bIns="0" rtlCol="0" anchor="ctr"/>
           <a:lstStyle/>
           <a:p>
-            <a:pPr rtl="1" algn="r" indent="0" marL="0">
-              <a:spcAft>
-                <a:spcPts val="1000"/>
-              </a:spcAft>
-              <a:buNone/>
+            <a:pPr rtl="1" algn="r" marL="228600" indent="-228600">
+              <a:spcAft>
+                <a:spcPts val="1000"/>
+              </a:spcAft>
+              <a:buSzPct val="100000"/>
+              <a:buChar char="•"/>
             </a:pPr>
             <a:r>
               <a:rPr lang="en-US" sz="1900" dirty="0">
@@ -10805,7 +10867,7 @@
                 <a:ea typeface="Calibri" pitchFamily="34" charset="-122"/>
                 <a:cs typeface="Calibri" pitchFamily="34" charset="-120"/>
               </a:rPr>
-              <a:t>• IDE (סביבת פיתוח לכתיבת קוד — ראינו בשקף הקודם) ראשונים: </a:t>
+              <a:t>IDE (סביבת פיתוח לכתיבת קוד — ראינו בשקף הקודם) ראשונים: </a:t>
             </a:r>
             <a:pPr rtl="1" algn="r" indent="0" marL="0">
               <a:spcAft>
@@ -10827,11 +10889,12 @@
             <a:endParaRPr lang="en-US" sz="1900" dirty="0"/>
           </a:p>
           <a:p>
-            <a:pPr rtl="1" algn="r" indent="0" marL="0">
-              <a:spcAft>
-                <a:spcPts val="1000"/>
-              </a:spcAft>
-              <a:buNone/>
+            <a:pPr rtl="1" algn="r" marL="228600" indent="-228600">
+              <a:spcAft>
+                <a:spcPts val="1000"/>
+              </a:spcAft>
+              <a:buSzPct val="100000"/>
+              <a:buChar char="•"/>
             </a:pPr>
             <a:r>
               <a:rPr lang="en-US" sz="1900" dirty="0">
@@ -10842,7 +10905,7 @@
                 <a:ea typeface="Calibri" pitchFamily="34" charset="-122"/>
                 <a:cs typeface="Calibri" pitchFamily="34" charset="-120"/>
               </a:rPr>
-              <a:t>• Git (ניהול גרסאות קוד): </a:t>
+              <a:t>Git (ניהול גרסאות קוד): </a:t>
             </a:r>
             <a:pPr rtl="1" algn="r" indent="0" marL="0">
               <a:spcAft>
@@ -10898,11 +10961,12 @@
             <a:endParaRPr lang="en-US" sz="1900" dirty="0"/>
           </a:p>
           <a:p>
-            <a:pPr rtl="1" algn="r" indent="0" marL="0">
-              <a:spcAft>
-                <a:spcPts val="1000"/>
-              </a:spcAft>
-              <a:buNone/>
+            <a:pPr rtl="1" algn="r" marL="228600" indent="-228600">
+              <a:spcAft>
+                <a:spcPts val="1000"/>
+              </a:spcAft>
+              <a:buSzPct val="100000"/>
+              <a:buChar char="•"/>
             </a:pPr>
             <a:r>
               <a:rPr lang="en-US" sz="1900" dirty="0">
@@ -10913,7 +10977,7 @@
                 <a:ea typeface="Calibri" pitchFamily="34" charset="-122"/>
                 <a:cs typeface="Calibri" pitchFamily="34" charset="-120"/>
               </a:rPr>
-              <a:t>• GitHub Copilot (עוזר AI לכתיבת קוד) בגרסת Preview (תצוגה מקדימה): </a:t>
+              <a:t>GitHub Copilot (עוזר AI לכתיבת קוד) בגרסת Preview (תצוגה מקדימה): </a:t>
             </a:r>
             <a:pPr rtl="1" algn="r" indent="0" marL="0">
               <a:spcAft>
@@ -10935,11 +10999,12 @@
             <a:endParaRPr lang="en-US" sz="1900" dirty="0"/>
           </a:p>
           <a:p>
-            <a:pPr rtl="1" algn="r" indent="0" marL="0">
-              <a:spcAft>
-                <a:spcPts val="1000"/>
-              </a:spcAft>
-              <a:buNone/>
+            <a:pPr rtl="1" algn="r" marL="228600" indent="-228600">
+              <a:spcAft>
+                <a:spcPts val="1000"/>
+              </a:spcAft>
+              <a:buSzPct val="100000"/>
+              <a:buChar char="•"/>
             </a:pPr>
             <a:r>
               <a:rPr lang="en-US" sz="1900" dirty="0">
@@ -10950,7 +11015,7 @@
                 <a:ea typeface="Calibri" pitchFamily="34" charset="-122"/>
                 <a:cs typeface="Calibri" pitchFamily="34" charset="-120"/>
               </a:rPr>
-              <a:t>• ChatGPT: </a:t>
+              <a:t>ChatGPT: </a:t>
             </a:r>
             <a:pPr rtl="1" algn="r" indent="0" marL="0">
               <a:spcAft>
@@ -10972,11 +11037,12 @@
             <a:endParaRPr lang="en-US" sz="1900" dirty="0"/>
           </a:p>
           <a:p>
-            <a:pPr rtl="1" algn="r" indent="0" marL="0">
-              <a:spcAft>
-                <a:spcPts val="1000"/>
-              </a:spcAft>
-              <a:buNone/>
+            <a:pPr rtl="1" algn="r" marL="228600" indent="-228600">
+              <a:spcAft>
+                <a:spcPts val="1000"/>
+              </a:spcAft>
+              <a:buSzPct val="100000"/>
+              <a:buChar char="•"/>
             </a:pPr>
             <a:r>
               <a:rPr lang="en-US" sz="1900" dirty="0">
@@ -10987,7 +11053,7 @@
                 <a:ea typeface="Calibri" pitchFamily="34" charset="-122"/>
                 <a:cs typeface="Calibri" pitchFamily="34" charset="-120"/>
               </a:rPr>
-              <a:t>• כלים אג'נטיים אמיתיים (AI שפועל עצמאית על משימה שלמה): </a:t>
+              <a:t>כלים אג'נטיים אמיתיים (AI שפועל עצמאית על משימה שלמה): </a:t>
             </a:r>
             <a:pPr rtl="1" algn="r" indent="0" marL="0">
               <a:spcAft>
@@ -11281,11 +11347,12 @@
           <a:bodyPr wrap="square" lIns="0" tIns="0" rIns="0" bIns="0" rtlCol="0" anchor="ctr"/>
           <a:lstStyle/>
           <a:p>
-            <a:pPr rtl="1" algn="r" indent="0" marL="0">
-              <a:spcAft>
-                <a:spcPts val="1000"/>
-              </a:spcAft>
-              <a:buNone/>
+            <a:pPr rtl="1" algn="r" marL="228600" indent="-228600">
+              <a:spcAft>
+                <a:spcPts val="1000"/>
+              </a:spcAft>
+              <a:buSzPct val="100000"/>
+              <a:buChar char="•"/>
             </a:pPr>
             <a:r>
               <a:rPr lang="en-US" sz="1900" b="1" dirty="0">
@@ -11296,7 +11363,7 @@
                 <a:ea typeface="Calibri" pitchFamily="34" charset="-122"/>
                 <a:cs typeface="Calibri" pitchFamily="34" charset="-120"/>
               </a:rPr>
-              <a:t>• מהירות:</a:t>
+              <a:t>מהירות:</a:t>
             </a:r>
             <a:pPr rtl="1" algn="r" indent="0" marL="0">
               <a:spcAft>
@@ -11318,11 +11385,12 @@
             <a:endParaRPr lang="en-US" sz="1900" dirty="0"/>
           </a:p>
           <a:p>
-            <a:pPr rtl="1" algn="r" indent="0" marL="0">
-              <a:spcAft>
-                <a:spcPts val="1000"/>
-              </a:spcAft>
-              <a:buNone/>
+            <a:pPr rtl="1" algn="r" marL="228600" indent="-228600">
+              <a:spcAft>
+                <a:spcPts val="1000"/>
+              </a:spcAft>
+              <a:buSzPct val="100000"/>
+              <a:buChar char="•"/>
             </a:pPr>
             <a:r>
               <a:rPr lang="en-US" sz="1900" b="1" dirty="0">
@@ -11333,7 +11401,7 @@
                 <a:ea typeface="Calibri" pitchFamily="34" charset="-122"/>
                 <a:cs typeface="Calibri" pitchFamily="34" charset="-120"/>
               </a:rPr>
-              <a:t>• נגישות:</a:t>
+              <a:t>נגישות:</a:t>
             </a:r>
             <a:pPr rtl="1" algn="r" indent="0" marL="0">
               <a:spcAft>
@@ -11355,11 +11423,12 @@
             <a:endParaRPr lang="en-US" sz="1900" dirty="0"/>
           </a:p>
           <a:p>
-            <a:pPr rtl="1" algn="r" indent="0" marL="0">
-              <a:spcAft>
-                <a:spcPts val="1000"/>
-              </a:spcAft>
-              <a:buNone/>
+            <a:pPr rtl="1" algn="r" marL="228600" indent="-228600">
+              <a:spcAft>
+                <a:spcPts val="1000"/>
+              </a:spcAft>
+              <a:buSzPct val="100000"/>
+              <a:buChar char="•"/>
             </a:pPr>
             <a:r>
               <a:rPr lang="en-US" sz="1900" b="1" dirty="0">
@@ -11370,7 +11439,7 @@
                 <a:ea typeface="Calibri" pitchFamily="34" charset="-122"/>
                 <a:cs typeface="Calibri" pitchFamily="34" charset="-120"/>
               </a:rPr>
-              <a:t>• שחרור מבוילרפלייט:</a:t>
+              <a:t>שחרור מבוילרפלייט:</a:t>
             </a:r>
             <a:pPr rtl="1" algn="r" indent="0" marL="0">
               <a:spcAft>
@@ -11689,11 +11758,12 @@
           <a:bodyPr wrap="square" lIns="0" tIns="0" rIns="0" bIns="0" rtlCol="0" anchor="ctr"/>
           <a:lstStyle/>
           <a:p>
-            <a:pPr rtl="1" algn="r" indent="0" marL="0">
-              <a:spcAft>
-                <a:spcPts val="1000"/>
-              </a:spcAft>
-              <a:buNone/>
+            <a:pPr rtl="1" algn="r" marL="228600" indent="-228600">
+              <a:spcAft>
+                <a:spcPts val="1000"/>
+              </a:spcAft>
+              <a:buSzPct val="100000"/>
+              <a:buChar char="•"/>
             </a:pPr>
             <a:r>
               <a:rPr lang="en-US" sz="1900" dirty="0">
@@ -11704,7 +11774,7 @@
                 <a:ea typeface="Calibri" pitchFamily="34" charset="-122"/>
                 <a:cs typeface="Calibri" pitchFamily="34" charset="-120"/>
               </a:rPr>
-              <a:t>• שוכח הקשר בלי </a:t>
+              <a:t>שוכח הקשר בלי </a:t>
             </a:r>
             <a:pPr rtl="1" algn="r" indent="0" marL="0">
               <a:spcAft>
@@ -11743,11 +11813,12 @@
             <a:endParaRPr lang="en-US" sz="1900" dirty="0"/>
           </a:p>
           <a:p>
-            <a:pPr rtl="1" algn="r" indent="0" marL="0">
-              <a:spcAft>
-                <a:spcPts val="1000"/>
-              </a:spcAft>
-              <a:buNone/>
+            <a:pPr rtl="1" algn="r" marL="228600" indent="-228600">
+              <a:spcAft>
+                <a:spcPts val="1000"/>
+              </a:spcAft>
+              <a:buSzPct val="100000"/>
+              <a:buChar char="•"/>
             </a:pPr>
             <a:r>
               <a:rPr lang="en-US" sz="1900" dirty="0">
@@ -11758,16 +11829,17 @@
                 <a:ea typeface="Calibri" pitchFamily="34" charset="-122"/>
                 <a:cs typeface="Calibri" pitchFamily="34" charset="-120"/>
               </a:rPr>
-              <a:t>• קוד שרץ ≠ קוד נכון — "עובד" ו"נכון" הם שני דברים שונים</a:t>
+              <a:t>קוד שרץ ≠ קוד נכון — "עובד" ו"נכון" הם שני דברים שונים</a:t>
             </a:r>
             <a:endParaRPr lang="en-US" sz="1900" dirty="0"/>
           </a:p>
           <a:p>
-            <a:pPr rtl="1" algn="r" indent="0" marL="0">
-              <a:spcAft>
-                <a:spcPts val="1000"/>
-              </a:spcAft>
-              <a:buNone/>
+            <a:pPr rtl="1" algn="r" marL="228600" indent="-228600">
+              <a:spcAft>
+                <a:spcPts val="1000"/>
+              </a:spcAft>
+              <a:buSzPct val="100000"/>
+              <a:buChar char="•"/>
             </a:pPr>
             <a:r>
               <a:rPr lang="en-US" sz="1900" dirty="0">
@@ -11778,16 +11850,17 @@
                 <a:ea typeface="Calibri" pitchFamily="34" charset="-122"/>
                 <a:cs typeface="Calibri" pitchFamily="34" charset="-120"/>
               </a:rPr>
-              <a:t>• תלות בכלי שמשתנה מהר (נדבר על זה בעוד כמה שקפים)</a:t>
+              <a:t>תלות בכלי שמשתנה מהר (נדבר על זה בעוד כמה שקפים)</a:t>
             </a:r>
             <a:endParaRPr lang="en-US" sz="1900" dirty="0"/>
           </a:p>
           <a:p>
-            <a:pPr rtl="1" algn="r" indent="0" marL="0">
-              <a:spcAft>
-                <a:spcPts val="1000"/>
-              </a:spcAft>
-              <a:buNone/>
+            <a:pPr rtl="1" algn="r" marL="228600" indent="-228600">
+              <a:spcAft>
+                <a:spcPts val="1000"/>
+              </a:spcAft>
+              <a:buSzPct val="100000"/>
+              <a:buChar char="•"/>
             </a:pPr>
             <a:r>
               <a:rPr lang="en-US" sz="1900" dirty="0">
@@ -11798,7 +11871,7 @@
                 <a:ea typeface="Calibri" pitchFamily="34" charset="-122"/>
                 <a:cs typeface="Calibri" pitchFamily="34" charset="-120"/>
               </a:rPr>
-              <a:t>• והבעיה המרכזית שבה נתמקד עכשיו: </a:t>
+              <a:t>והבעיה המרכזית שבה נתמקד עכשיו: </a:t>
             </a:r>
             <a:pPr rtl="1" algn="r" indent="0" marL="0">
               <a:spcAft>

--- a/lesson_01/lesson_01_slides.pptx
+++ b/lesson_01/lesson_01_slides.pptx
@@ -28,9 +28,11 @@
     <p:sldId id="276" r:id="rId22"/>
     <p:sldId id="277" r:id="rId23"/>
     <p:sldId id="278" r:id="rId24"/>
+    <p:sldId id="279" r:id="rId25"/>
+    <p:sldId id="280" r:id="rId26"/>
   </p:sldIdLst>
   <p:notesMasterIdLst>
-    <p:notesMasterId r:id="rId25"/>
+    <p:notesMasterId r:id="rId27"/>
   </p:notesMasterIdLst>
   <p:sldSz cx="12192000" cy="6858000"/>
   <p:notesSz cx="6858000" cy="12192000"/>
@@ -1868,6 +1870,182 @@
             <a:fld id="{F7021451-1387-4CA6-816F-3879F97B5CBC}" type="slidenum">
               <a:rPr lang="en-US"/>
               <a:t>23</a:t>
+            </a:fld>
+            <a:endParaRPr lang="en-US"/>
+          </a:p>
+        </p:txBody>
+      </p:sp>
+    </p:spTree>
+    <p:extLst>
+      <p:ext uri="{BB962C8B-B14F-4D97-AF65-F5344CB8AC3E}">
+        <p14:creationId xmlns:p14="http://schemas.microsoft.com/office/powerpoint/2010/main" val="1024086991"/>
+      </p:ext>
+    </p:extLst>
+  </p:cSld>
+  <p:clrMapOvr>
+    <a:masterClrMapping/>
+  </p:clrMapOvr>
+</p:notes>
+</file>
+
+<file path=ppt/notesSlides/notesSlide24.xml><?xml version="1.0" encoding="utf-8"?>
+<p:notes xmlns:a="http://schemas.openxmlformats.org/drawingml/2006/main" xmlns:r="http://schemas.openxmlformats.org/officeDocument/2006/relationships" xmlns:p="http://schemas.openxmlformats.org/presentationml/2006/main">
+  <p:cSld>
+    <p:spTree>
+      <p:nvGrpSpPr>
+        <p:cNvPr id="1" name=""/>
+        <p:cNvGrpSpPr/>
+        <p:nvPr/>
+      </p:nvGrpSpPr>
+      <p:grpSpPr>
+        <a:xfrm>
+          <a:off x="0" y="0"/>
+          <a:ext cx="0" cy="0"/>
+          <a:chOff x="0" y="0"/>
+          <a:chExt cx="0" cy="0"/>
+        </a:xfrm>
+      </p:grpSpPr>
+      <p:sp>
+        <p:nvSpPr>
+          <p:cNvPr id="2" name="Slide Image Placeholder 1"/>
+          <p:cNvSpPr>
+            <a:spLocks noGrp="1" noRot="1" noChangeAspect="1"/>
+          </p:cNvSpPr>
+          <p:nvPr>
+            <p:ph type="sldImg"/>
+          </p:nvPr>
+        </p:nvSpPr>
+        <p:spPr/>
+      </p:sp>
+      <p:sp>
+        <p:nvSpPr>
+          <p:cNvPr id="3" name="Notes Placeholder 2"/>
+          <p:cNvSpPr>
+            <a:spLocks noGrp="1"/>
+          </p:cNvSpPr>
+          <p:nvPr>
+            <p:ph type="body" idx="1"/>
+          </p:nvPr>
+        </p:nvSpPr>
+        <p:spPr/>
+        <p:txBody>
+          <a:bodyPr/>
+          <a:lstStyle/>
+          <a:p>
+            <a:r>
+              <a:rPr lang="en-US" dirty="0"/>
+              <a:t/>
+            </a:r>
+            <a:endParaRPr lang="en-US" dirty="0"/>
+          </a:p>
+        </p:txBody>
+      </p:sp>
+      <p:sp>
+        <p:nvSpPr>
+          <p:cNvPr id="4" name="Slide Number Placeholder 3"/>
+          <p:cNvSpPr>
+            <a:spLocks noGrp="1"/>
+          </p:cNvSpPr>
+          <p:nvPr>
+            <p:ph type="sldNum" sz="quarter" idx="10"/>
+          </p:nvPr>
+        </p:nvSpPr>
+        <p:spPr/>
+        <p:txBody>
+          <a:bodyPr/>
+          <a:lstStyle/>
+          <a:p>
+            <a:fld id="{F7021451-1387-4CA6-816F-3879F97B5CBC}" type="slidenum">
+              <a:rPr lang="en-US"/>
+              <a:t>24</a:t>
+            </a:fld>
+            <a:endParaRPr lang="en-US"/>
+          </a:p>
+        </p:txBody>
+      </p:sp>
+    </p:spTree>
+    <p:extLst>
+      <p:ext uri="{BB962C8B-B14F-4D97-AF65-F5344CB8AC3E}">
+        <p14:creationId xmlns:p14="http://schemas.microsoft.com/office/powerpoint/2010/main" val="1024086991"/>
+      </p:ext>
+    </p:extLst>
+  </p:cSld>
+  <p:clrMapOvr>
+    <a:masterClrMapping/>
+  </p:clrMapOvr>
+</p:notes>
+</file>
+
+<file path=ppt/notesSlides/notesSlide25.xml><?xml version="1.0" encoding="utf-8"?>
+<p:notes xmlns:a="http://schemas.openxmlformats.org/drawingml/2006/main" xmlns:r="http://schemas.openxmlformats.org/officeDocument/2006/relationships" xmlns:p="http://schemas.openxmlformats.org/presentationml/2006/main">
+  <p:cSld>
+    <p:spTree>
+      <p:nvGrpSpPr>
+        <p:cNvPr id="1" name=""/>
+        <p:cNvGrpSpPr/>
+        <p:nvPr/>
+      </p:nvGrpSpPr>
+      <p:grpSpPr>
+        <a:xfrm>
+          <a:off x="0" y="0"/>
+          <a:ext cx="0" cy="0"/>
+          <a:chOff x="0" y="0"/>
+          <a:chExt cx="0" cy="0"/>
+        </a:xfrm>
+      </p:grpSpPr>
+      <p:sp>
+        <p:nvSpPr>
+          <p:cNvPr id="2" name="Slide Image Placeholder 1"/>
+          <p:cNvSpPr>
+            <a:spLocks noGrp="1" noRot="1" noChangeAspect="1"/>
+          </p:cNvSpPr>
+          <p:nvPr>
+            <p:ph type="sldImg"/>
+          </p:nvPr>
+        </p:nvSpPr>
+        <p:spPr/>
+      </p:sp>
+      <p:sp>
+        <p:nvSpPr>
+          <p:cNvPr id="3" name="Notes Placeholder 2"/>
+          <p:cNvSpPr>
+            <a:spLocks noGrp="1"/>
+          </p:cNvSpPr>
+          <p:nvPr>
+            <p:ph type="body" idx="1"/>
+          </p:nvPr>
+        </p:nvSpPr>
+        <p:spPr/>
+        <p:txBody>
+          <a:bodyPr/>
+          <a:lstStyle/>
+          <a:p>
+            <a:r>
+              <a:rPr lang="en-US" dirty="0"/>
+              <a:t/>
+            </a:r>
+            <a:endParaRPr lang="en-US" dirty="0"/>
+          </a:p>
+        </p:txBody>
+      </p:sp>
+      <p:sp>
+        <p:nvSpPr>
+          <p:cNvPr id="4" name="Slide Number Placeholder 3"/>
+          <p:cNvSpPr>
+            <a:spLocks noGrp="1"/>
+          </p:cNvSpPr>
+          <p:nvPr>
+            <p:ph type="sldNum" sz="quarter" idx="10"/>
+          </p:nvPr>
+        </p:nvSpPr>
+        <p:spPr/>
+        <p:txBody>
+          <a:bodyPr/>
+          <a:lstStyle/>
+          <a:p>
+            <a:fld id="{F7021451-1387-4CA6-816F-3879F97B5CBC}" type="slidenum">
+              <a:rPr lang="en-US"/>
+              <a:t>25</a:t>
             </a:fld>
             <a:endParaRPr lang="en-US"/>
           </a:p>
@@ -5218,7 +5396,7 @@
                 <a:ea typeface="Arial" pitchFamily="34" charset="-122"/>
                 <a:cs typeface="Arial" pitchFamily="34" charset="-120"/>
               </a:rPr>
-              <a:t>✔ מה עושים בפועל: בכל שיעור מהיום נחזור לרשימה הזו (כל 10 השלבים) ונעמיק בשלב אחד או שניים ממנה — זהו העיקרון-על של כל הקורס.</a:t>
+              <a:t>✔ מה עושים בפועל: בכל שיעור מהיום נחזור לרשימה הזו ונעמיק בשלב אחד או שניים ממנה. שימו לב: אחרי שלב 10 חוזרים לשלב 1 — זה תהליך מעגלי ואיטרטיבי, לא רצף חד-פעמי שנגמר.</a:t>
             </a:r>
             <a:endParaRPr lang="en-US" sz="1700" dirty="0"/>
           </a:p>
@@ -6073,7 +6251,63 @@
                 <a:ea typeface="Arial" pitchFamily="34" charset="-122"/>
                 <a:cs typeface="Arial" pitchFamily="34" charset="-120"/>
               </a:rPr>
-              <a:t>✔ מה עושים בפועל: משקיעים בהבנת התהליך של עבודה עם כלי אג'נטי, לא רק ב"איך לוחצים איפה" בכלי ספציפי אחד.</a:t>
+              <a:t>✔ מה עושים בפועל: משקיעים בהבנת התהליך של עבודה עם כלי אג'נטי — כמו </a:t>
+            </a:r>
+            <a:pPr rtl="1" algn="r" indent="0" marL="0">
+              <a:buNone/>
+            </a:pPr>
+            <a:r>
+              <a:rPr lang="en-US" sz="1700" b="1" dirty="0">
+                <a:solidFill>
+                  <a:srgbClr val="00A88A"/>
+                </a:solidFill>
+                <a:latin typeface="Arial" pitchFamily="34" charset="0"/>
+                <a:ea typeface="Arial" pitchFamily="34" charset="-122"/>
+                <a:cs typeface="Arial" pitchFamily="34" charset="-120"/>
+              </a:rPr>
+              <a:t>Claude Code</a:t>
+            </a:r>
+            <a:pPr rtl="1" algn="r" indent="0" marL="0">
+              <a:buNone/>
+            </a:pPr>
+            <a:r>
+              <a:rPr lang="en-US" sz="1700" dirty="0">
+                <a:solidFill>
+                  <a:srgbClr val="00A88A"/>
+                </a:solidFill>
+                <a:latin typeface="Arial" pitchFamily="34" charset="0"/>
+                <a:ea typeface="Arial" pitchFamily="34" charset="-122"/>
+                <a:cs typeface="Arial" pitchFamily="34" charset="-120"/>
+              </a:rPr>
+              <a:t> (כלי AI לכתיבת קוד מבית Anthropic), </a:t>
+            </a:r>
+            <a:pPr rtl="1" algn="r" indent="0" marL="0">
+              <a:buNone/>
+            </a:pPr>
+            <a:r>
+              <a:rPr lang="en-US" sz="1700" b="1" dirty="0">
+                <a:solidFill>
+                  <a:srgbClr val="00A88A"/>
+                </a:solidFill>
+                <a:latin typeface="Arial" pitchFamily="34" charset="0"/>
+                <a:ea typeface="Arial" pitchFamily="34" charset="-122"/>
+                <a:cs typeface="Arial" pitchFamily="34" charset="-120"/>
+              </a:rPr>
+              <a:t>Cursor</a:t>
+            </a:r>
+            <a:pPr rtl="1" algn="r" indent="0" marL="0">
+              <a:buNone/>
+            </a:pPr>
+            <a:r>
+              <a:rPr lang="en-US" sz="1700" dirty="0">
+                <a:solidFill>
+                  <a:srgbClr val="00A88A"/>
+                </a:solidFill>
+                <a:latin typeface="Arial" pitchFamily="34" charset="0"/>
+                <a:ea typeface="Arial" pitchFamily="34" charset="-122"/>
+                <a:cs typeface="Arial" pitchFamily="34" charset="-120"/>
+              </a:rPr>
+              <a:t> (עורך קוד עם AI מובנה) או Gemini CLI — לא רק ב"איך לוחצים איפה" בכלי ספציפי אחד.</a:t>
             </a:r>
             <a:endParaRPr lang="en-US" sz="1700" dirty="0"/>
           </a:p>
@@ -8219,8 +8453,8 @@
         </p:nvSpPr>
         <p:spPr>
           <a:xfrm>
-            <a:off x="548640" y="640080"/>
-            <a:ext cx="11091672" cy="365760"/>
+            <a:off x="548640" y="320040"/>
+            <a:ext cx="11091672" cy="685800"/>
           </a:xfrm>
           <a:prstGeom prst="rect">
             <a:avLst/>
@@ -8232,42 +8466,234 @@
           <a:bodyPr wrap="square" lIns="0" tIns="0" rIns="0" bIns="0" rtlCol="0" anchor="ctr"/>
           <a:lstStyle/>
           <a:p>
-            <a:pPr rtl="1" algn="ctr" indent="0" marL="0">
-              <a:buNone/>
-            </a:pPr>
-            <a:r>
-              <a:rPr lang="en-US" sz="1500" i="1" dirty="0">
-                <a:solidFill>
-                  <a:srgbClr val="00A88A"/>
-                </a:solidFill>
-                <a:latin typeface="Calibri" pitchFamily="34" charset="0"/>
-                <a:ea typeface="Calibri" pitchFamily="34" charset="-122"/>
-                <a:cs typeface="Calibri" pitchFamily="34" charset="-120"/>
-              </a:rPr>
-              <a:t>עוברים לתרגול</a:t>
-            </a:r>
-            <a:endParaRPr lang="en-US" sz="1500" dirty="0"/>
-          </a:p>
-        </p:txBody>
-      </p:sp>
-      <p:sp>
-        <p:nvSpPr>
-          <p:cNvPr id="3" name="Shape 1"/>
-          <p:cNvSpPr/>
-          <p:nvPr/>
-        </p:nvSpPr>
-        <p:spPr>
-          <a:xfrm>
-            <a:off x="4718304" y="1051560"/>
-            <a:ext cx="2743200" cy="0"/>
+            <a:pPr rtl="1" algn="r" indent="0" marL="0">
+              <a:buNone/>
+            </a:pPr>
+            <a:r>
+              <a:rPr lang="en-US" sz="2800" b="1" dirty="0">
+                <a:solidFill>
+                  <a:srgbClr val="1B1F3B"/>
+                </a:solidFill>
+                <a:latin typeface="Arial" pitchFamily="34" charset="0"/>
+                <a:ea typeface="Arial" pitchFamily="34" charset="-122"/>
+                <a:cs typeface="Arial" pitchFamily="34" charset="-120"/>
+              </a:rPr>
+              <a:t>עוברים לתרגול: Todo App (חלק א׳ — המשימה)</a:t>
+            </a:r>
+            <a:endParaRPr lang="en-US" sz="2800" dirty="0"/>
+          </a:p>
+        </p:txBody>
+      </p:sp>
+      <p:sp>
+        <p:nvSpPr>
+          <p:cNvPr id="3" name="Text 1"/>
+          <p:cNvSpPr/>
+          <p:nvPr/>
+        </p:nvSpPr>
+        <p:spPr>
+          <a:xfrm>
+            <a:off x="548640" y="1024128"/>
+            <a:ext cx="11091672" cy="411480"/>
+          </a:xfrm>
+          <a:prstGeom prst="rect">
+            <a:avLst/>
+          </a:prstGeom>
+          <a:noFill/>
+          <a:ln/>
+        </p:spPr>
+        <p:txBody>
+          <a:bodyPr wrap="square" lIns="0" tIns="0" rIns="0" bIns="0" rtlCol="0" anchor="ctr"/>
+          <a:lstStyle/>
+          <a:p>
+            <a:pPr rtl="1" algn="r" indent="0" marL="0">
+              <a:buNone/>
+            </a:pPr>
+            <a:r>
+              <a:rPr lang="en-US" sz="1700" i="1" dirty="0">
+                <a:solidFill>
+                  <a:srgbClr val="6B7280"/>
+                </a:solidFill>
+                <a:latin typeface="Calibri" pitchFamily="34" charset="0"/>
+                <a:ea typeface="Calibri" pitchFamily="34" charset="-122"/>
+                <a:cs typeface="Calibri" pitchFamily="34" charset="-120"/>
+              </a:rPr>
+              <a:t>מה המטרה של 45 הדקות האלה?</a:t>
+            </a:r>
+            <a:endParaRPr lang="en-US" sz="1700" dirty="0"/>
+          </a:p>
+        </p:txBody>
+      </p:sp>
+      <p:sp>
+        <p:nvSpPr>
+          <p:cNvPr id="4" name="Text 2"/>
+          <p:cNvSpPr/>
+          <p:nvPr/>
+        </p:nvSpPr>
+        <p:spPr>
+          <a:xfrm>
+            <a:off x="548640" y="1508760"/>
+            <a:ext cx="11091672" cy="2286000"/>
+          </a:xfrm>
+          <a:prstGeom prst="rect">
+            <a:avLst/>
+          </a:prstGeom>
+          <a:noFill/>
+          <a:ln/>
+        </p:spPr>
+        <p:txBody>
+          <a:bodyPr wrap="square" lIns="0" tIns="0" rIns="0" bIns="0" rtlCol="0" anchor="ctr"/>
+          <a:lstStyle/>
+          <a:p>
+            <a:pPr rtl="1" algn="r" marL="228600" indent="-228600">
+              <a:spcAft>
+                <a:spcPts val="1000"/>
+              </a:spcAft>
+              <a:buSzPct val="100000"/>
+              <a:buChar char="•"/>
+            </a:pPr>
+            <a:r>
+              <a:rPr lang="en-US" sz="1900" dirty="0">
+                <a:solidFill>
+                  <a:srgbClr val="1B1F3B"/>
+                </a:solidFill>
+                <a:latin typeface="Calibri" pitchFamily="34" charset="0"/>
+                <a:ea typeface="Calibri" pitchFamily="34" charset="-122"/>
+                <a:cs typeface="Calibri" pitchFamily="34" charset="-120"/>
+              </a:rPr>
+              <a:t>לחוות בפועל את מלוא ה-Workflow שלמדנו היום (בקנה מידה זעיר): מהבנת דרישה, דרך שימוש ב-AI למימוש, ועד בדיקה שהתוצר עובד — בזוגות</a:t>
+            </a:r>
+            <a:endParaRPr lang="en-US" sz="1900" dirty="0"/>
+          </a:p>
+          <a:p>
+            <a:pPr rtl="1" algn="r" marL="228600" indent="-228600">
+              <a:spcAft>
+                <a:spcPts val="1000"/>
+              </a:spcAft>
+              <a:buSzPct val="100000"/>
+              <a:buChar char="•"/>
+            </a:pPr>
+            <a:r>
+              <a:rPr lang="en-US" sz="1900" dirty="0">
+                <a:solidFill>
+                  <a:srgbClr val="1B1F3B"/>
+                </a:solidFill>
+                <a:latin typeface="Calibri" pitchFamily="34" charset="0"/>
+                <a:ea typeface="Calibri" pitchFamily="34" charset="-122"/>
+                <a:cs typeface="Calibri" pitchFamily="34" charset="-120"/>
+              </a:rPr>
+              <a:t>המשימה: </a:t>
+            </a:r>
+            <a:pPr rtl="1" algn="r" indent="0" marL="0">
+              <a:spcAft>
+                <a:spcPts val="1000"/>
+              </a:spcAft>
+              <a:buNone/>
+            </a:pPr>
+            <a:r>
+              <a:rPr lang="en-US" sz="1900" b="1" dirty="0">
+                <a:solidFill>
+                  <a:srgbClr val="1B1F3B"/>
+                </a:solidFill>
+                <a:latin typeface="Calibri" pitchFamily="34" charset="0"/>
+                <a:ea typeface="Calibri" pitchFamily="34" charset="-122"/>
+                <a:cs typeface="Calibri" pitchFamily="34" charset="-120"/>
+              </a:rPr>
+              <a:t>Todo App</a:t>
+            </a:r>
+            <a:pPr rtl="1" algn="r" indent="0" marL="0">
+              <a:spcAft>
+                <a:spcPts val="1000"/>
+              </a:spcAft>
+              <a:buNone/>
+            </a:pPr>
+            <a:r>
+              <a:rPr lang="en-US" sz="1900" dirty="0">
+                <a:solidFill>
+                  <a:srgbClr val="1B1F3B"/>
+                </a:solidFill>
+                <a:latin typeface="Calibri" pitchFamily="34" charset="0"/>
+                <a:ea typeface="Calibri" pitchFamily="34" charset="-122"/>
+                <a:cs typeface="Calibri" pitchFamily="34" charset="-120"/>
+              </a:rPr>
+              <a:t> באמצעות כלי AI (Claude Code / Cursor / GitHub Copilot — לפי מה שמותקן) שתומך ב: הוספת משימה, סימון כהושלמה, מחיקה, והצגת הרשימה</a:t>
+            </a:r>
+            <a:endParaRPr lang="en-US" sz="1900" dirty="0"/>
+          </a:p>
+          <a:p>
+            <a:pPr rtl="1" algn="r" marL="228600" indent="-228600">
+              <a:spcAft>
+                <a:spcPts val="1000"/>
+              </a:spcAft>
+              <a:buSzPct val="100000"/>
+              <a:buChar char="•"/>
+            </a:pPr>
+            <a:r>
+              <a:rPr lang="en-US" sz="1900" dirty="0">
+                <a:solidFill>
+                  <a:srgbClr val="1B1F3B"/>
+                </a:solidFill>
+                <a:latin typeface="Calibri" pitchFamily="34" charset="0"/>
+                <a:ea typeface="Calibri" pitchFamily="34" charset="-122"/>
+                <a:cs typeface="Calibri" pitchFamily="34" charset="-120"/>
+              </a:rPr>
+              <a:t>בלי Backend — מספיק קובץ HTML/CSS/JS אחד שרץ בדפדפן, עם שמירה ב-</a:t>
+            </a:r>
+            <a:pPr rtl="1" algn="r" indent="0" marL="0">
+              <a:spcAft>
+                <a:spcPts val="1000"/>
+              </a:spcAft>
+              <a:buNone/>
+            </a:pPr>
+            <a:r>
+              <a:rPr lang="en-US" sz="1900" b="1" dirty="0">
+                <a:solidFill>
+                  <a:srgbClr val="1B1F3B"/>
+                </a:solidFill>
+                <a:latin typeface="Calibri" pitchFamily="34" charset="0"/>
+                <a:ea typeface="Calibri" pitchFamily="34" charset="-122"/>
+                <a:cs typeface="Calibri" pitchFamily="34" charset="-120"/>
+              </a:rPr>
+              <a:t>localStorage</a:t>
+            </a:r>
+            <a:pPr rtl="1" algn="r" indent="0" marL="0">
+              <a:spcAft>
+                <a:spcPts val="1000"/>
+              </a:spcAft>
+              <a:buNone/>
+            </a:pPr>
+            <a:r>
+              <a:rPr lang="en-US" sz="1900" dirty="0">
+                <a:solidFill>
+                  <a:srgbClr val="1B1F3B"/>
+                </a:solidFill>
+                <a:latin typeface="Calibri" pitchFamily="34" charset="0"/>
+                <a:ea typeface="Calibri" pitchFamily="34" charset="-122"/>
+                <a:cs typeface="Calibri" pitchFamily="34" charset="-120"/>
+              </a:rPr>
+              <a:t> (זיכרון מקומי בדפדפן שנשמר גם אחרי רענון הדף)</a:t>
+            </a:r>
+            <a:endParaRPr lang="en-US" sz="1900" dirty="0"/>
+          </a:p>
+        </p:txBody>
+      </p:sp>
+      <p:sp>
+        <p:nvSpPr>
+          <p:cNvPr id="5" name="Shape 3"/>
+          <p:cNvSpPr/>
+          <p:nvPr/>
+        </p:nvSpPr>
+        <p:spPr>
+          <a:xfrm>
+            <a:off x="548640" y="3931920"/>
+            <a:ext cx="11091672" cy="0"/>
           </a:xfrm>
           <a:prstGeom prst="line">
             <a:avLst/>
           </a:prstGeom>
           <a:noFill/>
-          <a:ln w="19050">
+          <a:ln w="9525">
             <a:solidFill>
-              <a:srgbClr val="00A88A"/>
+              <a:srgbClr val="B8B8C8"/>
             </a:solidFill>
             <a:prstDash val="solid"/>
           </a:ln>
@@ -8275,14 +8701,14 @@
       </p:sp>
       <p:sp>
         <p:nvSpPr>
-          <p:cNvPr id="4" name="Text 2"/>
-          <p:cNvSpPr/>
-          <p:nvPr/>
-        </p:nvSpPr>
-        <p:spPr>
-          <a:xfrm>
-            <a:off x="548640" y="1234440"/>
-            <a:ext cx="11091672" cy="914400"/>
+          <p:cNvPr id="6" name="Text 4"/>
+          <p:cNvSpPr/>
+          <p:nvPr/>
+        </p:nvSpPr>
+        <p:spPr>
+          <a:xfrm>
+            <a:off x="548640" y="4023360"/>
+            <a:ext cx="11091672" cy="868680"/>
           </a:xfrm>
           <a:prstGeom prst="rect">
             <a:avLst/>
@@ -8294,197 +8720,27 @@
           <a:bodyPr wrap="square" lIns="0" tIns="0" rIns="0" bIns="0" rtlCol="0" anchor="ctr"/>
           <a:lstStyle/>
           <a:p>
-            <a:pPr rtl="1" algn="ctr" indent="0" marL="0">
-              <a:buNone/>
-            </a:pPr>
-            <a:r>
-              <a:rPr lang="en-US" sz="3200" b="1" dirty="0">
-                <a:solidFill>
-                  <a:srgbClr val="1B1F3B"/>
+            <a:pPr rtl="1" algn="r" indent="0" marL="0">
+              <a:buNone/>
+            </a:pPr>
+            <a:r>
+              <a:rPr lang="en-US" sz="1700" dirty="0">
+                <a:solidFill>
+                  <a:srgbClr val="00A88A"/>
                 </a:solidFill>
                 <a:latin typeface="Arial" pitchFamily="34" charset="0"/>
                 <a:ea typeface="Arial" pitchFamily="34" charset="-122"/>
                 <a:cs typeface="Arial" pitchFamily="34" charset="-120"/>
               </a:rPr>
-              <a:t>45 דקות: בניית Todo App באמצעות AI</a:t>
-            </a:r>
-            <a:endParaRPr lang="en-US" sz="3200" dirty="0"/>
-          </a:p>
-        </p:txBody>
-      </p:sp>
-      <p:sp>
-        <p:nvSpPr>
-          <p:cNvPr id="5" name="Text 3"/>
-          <p:cNvSpPr/>
-          <p:nvPr/>
-        </p:nvSpPr>
-        <p:spPr>
-          <a:xfrm>
-            <a:off x="2286000" y="2834640"/>
-            <a:ext cx="7616952" cy="1828800"/>
-          </a:xfrm>
-          <a:prstGeom prst="rect">
-            <a:avLst/>
-          </a:prstGeom>
-          <a:noFill/>
-          <a:ln/>
-        </p:spPr>
-        <p:txBody>
-          <a:bodyPr wrap="square" lIns="0" tIns="0" rIns="0" bIns="0" rtlCol="0" anchor="ctr"/>
-          <a:lstStyle/>
-          <a:p>
-            <a:pPr rtl="1" algn="r" marL="228600" indent="-228600">
-              <a:spcAft>
-                <a:spcPts val="800"/>
-              </a:spcAft>
-              <a:buSzPct val="100000"/>
-              <a:buChar char="•"/>
-            </a:pPr>
-            <a:r>
-              <a:rPr lang="en-US" sz="1800" dirty="0">
-                <a:solidFill>
-                  <a:srgbClr val="1B1F3B"/>
-                </a:solidFill>
-                <a:latin typeface="Calibri" pitchFamily="34" charset="0"/>
-                <a:ea typeface="Calibri" pitchFamily="34" charset="-122"/>
-                <a:cs typeface="Calibri" pitchFamily="34" charset="-120"/>
-              </a:rPr>
-              <a:t>הוספת משימה חדשה</a:t>
-            </a:r>
-            <a:endParaRPr lang="en-US" sz="1800" dirty="0"/>
-          </a:p>
-          <a:p>
-            <a:pPr rtl="1" algn="r" marL="228600" indent="-228600">
-              <a:spcAft>
-                <a:spcPts val="800"/>
-              </a:spcAft>
-              <a:buSzPct val="100000"/>
-              <a:buChar char="•"/>
-            </a:pPr>
-            <a:r>
-              <a:rPr lang="en-US" sz="1800" dirty="0">
-                <a:solidFill>
-                  <a:srgbClr val="1B1F3B"/>
-                </a:solidFill>
-                <a:latin typeface="Calibri" pitchFamily="34" charset="0"/>
-                <a:ea typeface="Calibri" pitchFamily="34" charset="-122"/>
-                <a:cs typeface="Calibri" pitchFamily="34" charset="-120"/>
-              </a:rPr>
-              <a:t>סימון משימה כהושלמה</a:t>
-            </a:r>
-            <a:endParaRPr lang="en-US" sz="1800" dirty="0"/>
-          </a:p>
-          <a:p>
-            <a:pPr rtl="1" algn="r" marL="228600" indent="-228600">
-              <a:spcAft>
-                <a:spcPts val="800"/>
-              </a:spcAft>
-              <a:buSzPct val="100000"/>
-              <a:buChar char="•"/>
-            </a:pPr>
-            <a:r>
-              <a:rPr lang="en-US" sz="1800" dirty="0">
-                <a:solidFill>
-                  <a:srgbClr val="1B1F3B"/>
-                </a:solidFill>
-                <a:latin typeface="Calibri" pitchFamily="34" charset="0"/>
-                <a:ea typeface="Calibri" pitchFamily="34" charset="-122"/>
-                <a:cs typeface="Calibri" pitchFamily="34" charset="-120"/>
-              </a:rPr>
-              <a:t>מחיקת משימה</a:t>
-            </a:r>
-            <a:endParaRPr lang="en-US" sz="1800" dirty="0"/>
-          </a:p>
-          <a:p>
-            <a:pPr rtl="1" algn="r" marL="228600" indent="-228600">
-              <a:spcAft>
-                <a:spcPts val="800"/>
-              </a:spcAft>
-              <a:buSzPct val="100000"/>
-              <a:buChar char="•"/>
-            </a:pPr>
-            <a:r>
-              <a:rPr lang="en-US" sz="1800" dirty="0">
-                <a:solidFill>
-                  <a:srgbClr val="1B1F3B"/>
-                </a:solidFill>
-                <a:latin typeface="Calibri" pitchFamily="34" charset="0"/>
-                <a:ea typeface="Calibri" pitchFamily="34" charset="-122"/>
-                <a:cs typeface="Calibri" pitchFamily="34" charset="-120"/>
-              </a:rPr>
-              <a:t>שמירה עם localStorage (זיכרון מקומי בדפדפן שנשמר גם אחרי רענון הדף)</a:t>
-            </a:r>
-            <a:endParaRPr lang="en-US" sz="1800" dirty="0"/>
-          </a:p>
-        </p:txBody>
-      </p:sp>
-      <p:sp>
-        <p:nvSpPr>
-          <p:cNvPr id="6" name="Shape 4"/>
-          <p:cNvSpPr/>
-          <p:nvPr/>
-        </p:nvSpPr>
-        <p:spPr>
-          <a:xfrm>
-            <a:off x="3200400" y="4846320"/>
-            <a:ext cx="5788152" cy="1371600"/>
-          </a:xfrm>
-          <a:prstGeom prst="rect">
-            <a:avLst/>
-          </a:prstGeom>
-          <a:solidFill>
-            <a:srgbClr val="F6F6F8"/>
-          </a:solidFill>
-          <a:ln w="12700">
-            <a:solidFill>
-              <a:srgbClr val="B8B8C8"/>
-            </a:solidFill>
-            <a:prstDash val="dash"/>
-          </a:ln>
-        </p:spPr>
+              <a:t>✔ מה עושים בפועל: אחרי קבלת קוד ראשוני — לא עוצרים. מבקשים שיפור אחד נוסף (מיון, ספירה, עיצוב) כדי לתרגל איטרציה על קוד קיים, לא רק בקשה ראשונה.</a:t>
+            </a:r>
+            <a:endParaRPr lang="en-US" sz="1700" dirty="0"/>
+          </a:p>
+        </p:txBody>
       </p:sp>
       <p:sp>
         <p:nvSpPr>
           <p:cNvPr id="7" name="Text 5"/>
-          <p:cNvSpPr/>
-          <p:nvPr/>
-        </p:nvSpPr>
-        <p:spPr>
-          <a:xfrm>
-            <a:off x="3200400" y="4846320"/>
-            <a:ext cx="5788152" cy="1371600"/>
-          </a:xfrm>
-          <a:prstGeom prst="rect">
-            <a:avLst/>
-          </a:prstGeom>
-          <a:noFill/>
-          <a:ln/>
-        </p:spPr>
-        <p:txBody>
-          <a:bodyPr wrap="square" lIns="101600" tIns="101600" rIns="101600" bIns="101600" rtlCol="0" anchor="ctr"/>
-          <a:lstStyle/>
-          <a:p>
-            <a:pPr rtl="1" algn="ctr" indent="0" marL="0">
-              <a:buNone/>
-            </a:pPr>
-            <a:r>
-              <a:rPr lang="en-US" sz="1300" i="1" dirty="0">
-                <a:solidFill>
-                  <a:srgbClr val="6B7280"/>
-                </a:solidFill>
-                <a:latin typeface="Calibri" pitchFamily="34" charset="0"/>
-                <a:ea typeface="Calibri" pitchFamily="34" charset="-122"/>
-                <a:cs typeface="Calibri" pitchFamily="34" charset="-120"/>
-              </a:rPr>
-              <a:t>[אייקון/תמונה: רשימת Todo מסומנת ✓]</a:t>
-            </a:r>
-            <a:endParaRPr lang="en-US" sz="1300" dirty="0"/>
-          </a:p>
-        </p:txBody>
-      </p:sp>
-      <p:sp>
-        <p:nvSpPr>
-          <p:cNvPr id="8" name="Text 6"/>
           <p:cNvSpPr/>
           <p:nvPr/>
         </p:nvSpPr>
@@ -8561,8 +8817,8 @@
         </p:nvSpPr>
         <p:spPr>
           <a:xfrm>
-            <a:off x="548640" y="320040"/>
-            <a:ext cx="11091672" cy="685800"/>
+            <a:off x="548640" y="411480"/>
+            <a:ext cx="11091672" cy="365760"/>
           </a:xfrm>
           <a:prstGeom prst="rect">
             <a:avLst/>
@@ -8574,11 +8830,73 @@
           <a:bodyPr wrap="square" lIns="0" tIns="0" rIns="0" bIns="0" rtlCol="0" anchor="ctr"/>
           <a:lstStyle/>
           <a:p>
-            <a:pPr rtl="1" algn="r" indent="0" marL="0">
-              <a:buNone/>
-            </a:pPr>
-            <a:r>
-              <a:rPr lang="en-US" sz="2800" b="1" dirty="0">
+            <a:pPr rtl="1" algn="ctr" indent="0" marL="0">
+              <a:buNone/>
+            </a:pPr>
+            <a:r>
+              <a:rPr lang="en-US" sz="1500" i="1" dirty="0">
+                <a:solidFill>
+                  <a:srgbClr val="00A88A"/>
+                </a:solidFill>
+                <a:latin typeface="Calibri" pitchFamily="34" charset="0"/>
+                <a:ea typeface="Calibri" pitchFamily="34" charset="-122"/>
+                <a:cs typeface="Calibri" pitchFamily="34" charset="-120"/>
+              </a:rPr>
+              <a:t>עוברים לתרגול (חלק ב׳)</a:t>
+            </a:r>
+            <a:endParaRPr lang="en-US" sz="1500" dirty="0"/>
+          </a:p>
+        </p:txBody>
+      </p:sp>
+      <p:sp>
+        <p:nvSpPr>
+          <p:cNvPr id="3" name="Shape 1"/>
+          <p:cNvSpPr/>
+          <p:nvPr/>
+        </p:nvSpPr>
+        <p:spPr>
+          <a:xfrm>
+            <a:off x="4718304" y="822960"/>
+            <a:ext cx="2743200" cy="0"/>
+          </a:xfrm>
+          <a:prstGeom prst="line">
+            <a:avLst/>
+          </a:prstGeom>
+          <a:noFill/>
+          <a:ln w="19050">
+            <a:solidFill>
+              <a:srgbClr val="00A88A"/>
+            </a:solidFill>
+            <a:prstDash val="solid"/>
+          </a:ln>
+        </p:spPr>
+      </p:sp>
+      <p:sp>
+        <p:nvSpPr>
+          <p:cNvPr id="4" name="Text 2"/>
+          <p:cNvSpPr/>
+          <p:nvPr/>
+        </p:nvSpPr>
+        <p:spPr>
+          <a:xfrm>
+            <a:off x="548640" y="960120"/>
+            <a:ext cx="11091672" cy="548640"/>
+          </a:xfrm>
+          <a:prstGeom prst="rect">
+            <a:avLst/>
+          </a:prstGeom>
+          <a:noFill/>
+          <a:ln/>
+        </p:spPr>
+        <p:txBody>
+          <a:bodyPr wrap="square" lIns="0" tIns="0" rIns="0" bIns="0" rtlCol="0" anchor="ctr"/>
+          <a:lstStyle/>
+          <a:p>
+            <a:pPr rtl="1" algn="ctr" indent="0" marL="0">
+              <a:buNone/>
+            </a:pPr>
+            <a:r>
+              <a:rPr lang="en-US" sz="2600" b="1" dirty="0">
                 <a:solidFill>
                   <a:srgbClr val="1B1F3B"/>
                 </a:solidFill>
@@ -8586,22 +8904,22 @@
                 <a:ea typeface="Arial" pitchFamily="34" charset="-122"/>
                 <a:cs typeface="Arial" pitchFamily="34" charset="-120"/>
               </a:rPr>
-              <a:t>סיכום</a:t>
-            </a:r>
-            <a:endParaRPr lang="en-US" sz="2800" dirty="0"/>
-          </a:p>
-        </p:txBody>
-      </p:sp>
-      <p:sp>
-        <p:nvSpPr>
-          <p:cNvPr id="3" name="Text 1"/>
-          <p:cNvSpPr/>
-          <p:nvPr/>
-        </p:nvSpPr>
-        <p:spPr>
-          <a:xfrm>
-            <a:off x="548640" y="1371600"/>
-            <a:ext cx="11091672" cy="2743200"/>
+              <a:t>פרומפט פתיחה לתרגול</a:t>
+            </a:r>
+            <a:endParaRPr lang="en-US" sz="2600" dirty="0"/>
+          </a:p>
+        </p:txBody>
+      </p:sp>
+      <p:sp>
+        <p:nvSpPr>
+          <p:cNvPr id="5" name="Text 3"/>
+          <p:cNvSpPr/>
+          <p:nvPr/>
+        </p:nvSpPr>
+        <p:spPr>
+          <a:xfrm>
+            <a:off x="548640" y="1508760"/>
+            <a:ext cx="11091672" cy="320040"/>
           </a:xfrm>
           <a:prstGeom prst="rect">
             <a:avLst/>
@@ -8613,83 +8931,70 @@
           <a:bodyPr wrap="square" lIns="0" tIns="0" rIns="0" bIns="0" rtlCol="0" anchor="ctr"/>
           <a:lstStyle/>
           <a:p>
-            <a:pPr rtl="1" algn="r" indent="0" marL="0">
-              <a:spcAft>
-                <a:spcPts val="1600"/>
-              </a:spcAft>
-              <a:buNone/>
-            </a:pPr>
-            <a:r>
-              <a:rPr lang="en-US" sz="1800" dirty="0">
-                <a:solidFill>
-                  <a:srgbClr val="1B1F3B"/>
-                </a:solidFill>
-                <a:latin typeface="Calibri" pitchFamily="34" charset="0"/>
-                <a:ea typeface="Calibri" pitchFamily="34" charset="-122"/>
-                <a:cs typeface="Calibri" pitchFamily="34" charset="-120"/>
-              </a:rPr>
-              <a:t>1. Vibe Coding = תהליך מקצועי, לא ניחוש — והנתונים מוכיחים את זה</a:t>
-            </a:r>
-            <a:endParaRPr lang="en-US" sz="1800" dirty="0"/>
-          </a:p>
-          <a:p>
-            <a:pPr rtl="1" algn="r" indent="0" marL="0">
-              <a:spcAft>
-                <a:spcPts val="1600"/>
-              </a:spcAft>
-              <a:buNone/>
-            </a:pPr>
-            <a:r>
-              <a:rPr lang="en-US" sz="1800" dirty="0">
-                <a:solidFill>
-                  <a:srgbClr val="1B1F3B"/>
-                </a:solidFill>
-                <a:latin typeface="Calibri" pitchFamily="34" charset="0"/>
-                <a:ea typeface="Calibri" pitchFamily="34" charset="-122"/>
-                <a:cs typeface="Calibri" pitchFamily="34" charset="-120"/>
-              </a:rPr>
-              <a:t>2. AI מאיץ עבודה, אבל כפי שראינו — רק 29% סומכים על הפלט (כלומר 71% לא) — ולכן תמיד בודקים קוד לא מוכר (Hallucination)</a:t>
-            </a:r>
-            <a:endParaRPr lang="en-US" sz="1800" dirty="0"/>
-          </a:p>
-          <a:p>
-            <a:pPr rtl="1" algn="r" indent="0" marL="0">
-              <a:spcAft>
-                <a:spcPts val="1600"/>
-              </a:spcAft>
-              <a:buNone/>
-            </a:pPr>
-            <a:r>
-              <a:rPr lang="en-US" sz="1800" dirty="0">
-                <a:solidFill>
-                  <a:srgbClr val="1B1F3B"/>
-                </a:solidFill>
-                <a:latin typeface="Calibri" pitchFamily="34" charset="0"/>
-                <a:ea typeface="Calibri" pitchFamily="34" charset="-122"/>
-                <a:cs typeface="Calibri" pitchFamily="34" charset="-120"/>
-              </a:rPr>
-              <a:t>3. לומדים Workflow — כלים יוחלפו, התהליך נשאר (וזה ההבדל בין 10% ל-40%)</a:t>
-            </a:r>
-            <a:endParaRPr lang="en-US" sz="1800" dirty="0"/>
-          </a:p>
-        </p:txBody>
-      </p:sp>
-      <p:sp>
-        <p:nvSpPr>
-          <p:cNvPr id="4" name="Shape 2"/>
-          <p:cNvSpPr/>
-          <p:nvPr/>
-        </p:nvSpPr>
-        <p:spPr>
-          <a:xfrm>
-            <a:off x="548640" y="4572000"/>
-            <a:ext cx="11091672" cy="0"/>
-          </a:xfrm>
-          <a:prstGeom prst="line">
-            <a:avLst/>
-          </a:prstGeom>
-          <a:noFill/>
-          <a:ln w="9525">
+            <a:pPr rtl="1" algn="ctr" indent="0" marL="0">
+              <a:buNone/>
+            </a:pPr>
+            <a:r>
+              <a:rPr lang="en-US" sz="1400" i="1" dirty="0">
+                <a:solidFill>
+                  <a:srgbClr val="6B7280"/>
+                </a:solidFill>
+                <a:latin typeface="Calibri" pitchFamily="34" charset="0"/>
+                <a:ea typeface="Calibri" pitchFamily="34" charset="-122"/>
+                <a:cs typeface="Calibri" pitchFamily="34" charset="-120"/>
+              </a:rPr>
+              <a:t>התחילו מכאן, והתאימו לפי הצורך:</a:t>
+            </a:r>
+            <a:endParaRPr lang="en-US" sz="1400" dirty="0"/>
+          </a:p>
+        </p:txBody>
+      </p:sp>
+      <p:sp>
+        <p:nvSpPr>
+          <p:cNvPr id="6" name="Text 4"/>
+          <p:cNvSpPr/>
+          <p:nvPr/>
+        </p:nvSpPr>
+        <p:spPr>
+          <a:xfrm>
+            <a:off x="548640" y="1965960"/>
+            <a:ext cx="11091672" cy="274320"/>
+          </a:xfrm>
+          <a:prstGeom prst="rect">
+            <a:avLst/>
+          </a:prstGeom>
+          <a:noFill/>
+          <a:ln/>
+        </p:spPr>
+        <p:txBody>
+          <a:bodyPr wrap="square" lIns="0" tIns="0" rIns="0" bIns="0" rtlCol="0" anchor="ctr"/>
+          <a:lstStyle/>
+          <a:p>
+            <a:pPr rtl="1" algn="r" indent="0" marL="0">
+              <a:buNone/>
+            </a:pPr>
+            <a:endParaRPr lang="en-US" sz="1400" dirty="0"/>
+          </a:p>
+        </p:txBody>
+      </p:sp>
+      <p:sp>
+        <p:nvSpPr>
+          <p:cNvPr id="7" name="Shape 5"/>
+          <p:cNvSpPr/>
+          <p:nvPr/>
+        </p:nvSpPr>
+        <p:spPr>
+          <a:xfrm>
+            <a:off x="914400" y="2258568"/>
+            <a:ext cx="10360152" cy="4005072"/>
+          </a:xfrm>
+          <a:prstGeom prst="rect">
+            <a:avLst/>
+          </a:prstGeom>
+          <a:solidFill>
+            <a:srgbClr val="F6F6F8"/>
+          </a:solidFill>
+          <a:ln w="12700">
             <a:solidFill>
               <a:srgbClr val="B8B8C8"/>
             </a:solidFill>
@@ -8699,46 +9004,69 @@
       </p:sp>
       <p:sp>
         <p:nvSpPr>
-          <p:cNvPr id="5" name="Text 3"/>
-          <p:cNvSpPr/>
-          <p:nvPr/>
-        </p:nvSpPr>
-        <p:spPr>
-          <a:xfrm>
-            <a:off x="548640" y="4709160"/>
-            <a:ext cx="11091672" cy="548640"/>
-          </a:xfrm>
-          <a:prstGeom prst="rect">
-            <a:avLst/>
-          </a:prstGeom>
-          <a:noFill/>
-          <a:ln/>
-        </p:spPr>
-        <p:txBody>
-          <a:bodyPr wrap="square" lIns="0" tIns="0" rIns="0" bIns="0" rtlCol="0" anchor="ctr"/>
-          <a:lstStyle/>
-          <a:p>
-            <a:pPr rtl="1" algn="r" indent="0" marL="0">
-              <a:buNone/>
-            </a:pPr>
-            <a:r>
-              <a:rPr lang="en-US" sz="1700" b="1" dirty="0">
-                <a:solidFill>
-                  <a:srgbClr val="00A88A"/>
-                </a:solidFill>
-                <a:latin typeface="Arial" pitchFamily="34" charset="0"/>
-                <a:ea typeface="Arial" pitchFamily="34" charset="-122"/>
-                <a:cs typeface="Arial" pitchFamily="34" charset="-120"/>
-              </a:rPr>
-              <a:t>שבוע הבא: AI Development Environment — מקימים סביבת עבודה אמיתית</a:t>
-            </a:r>
-            <a:endParaRPr lang="en-US" sz="1700" dirty="0"/>
-          </a:p>
-        </p:txBody>
-      </p:sp>
-      <p:sp>
-        <p:nvSpPr>
-          <p:cNvPr id="6" name="Text 4"/>
+          <p:cNvPr id="8" name="Text 6"/>
+          <p:cNvSpPr/>
+          <p:nvPr/>
+        </p:nvSpPr>
+        <p:spPr>
+          <a:xfrm>
+            <a:off x="1188720" y="2395728"/>
+            <a:ext cx="9811512" cy="3730752"/>
+          </a:xfrm>
+          <a:prstGeom prst="rect">
+            <a:avLst/>
+          </a:prstGeom>
+          <a:noFill/>
+          <a:ln/>
+        </p:spPr>
+        <p:txBody>
+          <a:bodyPr wrap="square" lIns="0" tIns="0" rIns="0" bIns="0" rtlCol="0" anchor="t"/>
+          <a:lstStyle/>
+          <a:p>
+            <a:pPr rtl="1" algn="r" indent="0" marL="0">
+              <a:buNone/>
+            </a:pPr>
+            <a:r>
+              <a:rPr lang="en-US" sz="1400" dirty="0">
+                <a:solidFill>
+                  <a:srgbClr val="1B1F3B"/>
+                </a:solidFill>
+                <a:latin typeface="Courier New" pitchFamily="34" charset="0"/>
+                <a:ea typeface="Courier New" pitchFamily="34" charset="-122"/>
+                <a:cs typeface="Courier New" pitchFamily="34" charset="-120"/>
+              </a:rPr>
+              <a:t>אני רוצה לבנות Todo App פשוט שרץ בדפדפן, קובץ HTML יחיד עם CSS ו-JS מוטמעים (בלי צורך בשרת). דרישות: טופס להוספת משימה חדשה, רשימת משימות עם checkbox לסימון "הושלם", כפתור מחיקה לכל משימה, שמירת המצב ב-localStorage כך שהרשימה נשארת אחרי רענון הדף, עיצוב נקי ופשוט.</a:t>
+            </a:r>
+            <a:endParaRPr lang="en-US" sz="1400" dirty="0"/>
+          </a:p>
+          <a:p>
+            <a:pPr rtl="1" algn="r" indent="0" marL="0">
+              <a:buNone/>
+            </a:pPr>
+            <a:endParaRPr lang="en-US" sz="1400" dirty="0"/>
+          </a:p>
+          <a:p>
+            <a:pPr rtl="1" algn="r" indent="0" marL="0">
+              <a:buNone/>
+            </a:pPr>
+            <a:r>
+              <a:rPr lang="en-US" sz="1400" dirty="0">
+                <a:solidFill>
+                  <a:srgbClr val="1B1F3B"/>
+                </a:solidFill>
+                <a:latin typeface="Courier New" pitchFamily="34" charset="0"/>
+                <a:ea typeface="Courier New" pitchFamily="34" charset="-122"/>
+                <a:cs typeface="Courier New" pitchFamily="34" charset="-120"/>
+              </a:rPr>
+              <a:t>תכתוב את הקוד המלא בקובץ אחד. תסביר בקצרה מה כל חלק עושה.</a:t>
+            </a:r>
+            <a:endParaRPr lang="en-US" sz="1400" dirty="0"/>
+          </a:p>
+        </p:txBody>
+      </p:sp>
+      <p:sp>
+        <p:nvSpPr>
+          <p:cNvPr id="9" name="Text 7"/>
           <p:cNvSpPr/>
           <p:nvPr/>
         </p:nvSpPr>
@@ -8840,6 +9168,630 @@
                 <a:ea typeface="Arial" pitchFamily="34" charset="-122"/>
                 <a:cs typeface="Arial" pitchFamily="34" charset="-120"/>
               </a:rPr>
+              <a:t>עוברים לתרגול: מתי סיימתם? (חלק ג׳)</a:t>
+            </a:r>
+            <a:endParaRPr lang="en-US" sz="2800" dirty="0"/>
+          </a:p>
+        </p:txBody>
+      </p:sp>
+      <p:sp>
+        <p:nvSpPr>
+          <p:cNvPr id="3" name="Text 1"/>
+          <p:cNvSpPr/>
+          <p:nvPr/>
+        </p:nvSpPr>
+        <p:spPr>
+          <a:xfrm>
+            <a:off x="548640" y="1024128"/>
+            <a:ext cx="11091672" cy="411480"/>
+          </a:xfrm>
+          <a:prstGeom prst="rect">
+            <a:avLst/>
+          </a:prstGeom>
+          <a:noFill/>
+          <a:ln/>
+        </p:spPr>
+        <p:txBody>
+          <a:bodyPr wrap="square" lIns="0" tIns="0" rIns="0" bIns="0" rtlCol="0" anchor="ctr"/>
+          <a:lstStyle/>
+          <a:p>
+            <a:pPr rtl="1" algn="r" indent="0" marL="0">
+              <a:buNone/>
+            </a:pPr>
+            <a:r>
+              <a:rPr lang="en-US" sz="1700" i="1" dirty="0">
+                <a:solidFill>
+                  <a:srgbClr val="6B7280"/>
+                </a:solidFill>
+                <a:latin typeface="Calibri" pitchFamily="34" charset="0"/>
+                <a:ea typeface="Calibri" pitchFamily="34" charset="-122"/>
+                <a:cs typeface="Calibri" pitchFamily="34" charset="-120"/>
+              </a:rPr>
+              <a:t>השאלה: איך יודעים שהתרגול הושלם בהצלחה?</a:t>
+            </a:r>
+            <a:endParaRPr lang="en-US" sz="1700" dirty="0"/>
+          </a:p>
+        </p:txBody>
+      </p:sp>
+      <p:sp>
+        <p:nvSpPr>
+          <p:cNvPr id="4" name="Text 2"/>
+          <p:cNvSpPr/>
+          <p:nvPr/>
+        </p:nvSpPr>
+        <p:spPr>
+          <a:xfrm>
+            <a:off x="548640" y="1508760"/>
+            <a:ext cx="11091672" cy="2286000"/>
+          </a:xfrm>
+          <a:prstGeom prst="rect">
+            <a:avLst/>
+          </a:prstGeom>
+          <a:noFill/>
+          <a:ln/>
+        </p:spPr>
+        <p:txBody>
+          <a:bodyPr wrap="square" lIns="0" tIns="0" rIns="0" bIns="0" rtlCol="0" anchor="ctr"/>
+          <a:lstStyle/>
+          <a:p>
+            <a:pPr rtl="1" algn="r" marL="228600" indent="-228600">
+              <a:spcAft>
+                <a:spcPts val="1000"/>
+              </a:spcAft>
+              <a:buSzPct val="100000"/>
+              <a:buChar char="•"/>
+            </a:pPr>
+            <a:r>
+              <a:rPr lang="en-US" sz="1900" dirty="0">
+                <a:solidFill>
+                  <a:srgbClr val="1B1F3B"/>
+                </a:solidFill>
+                <a:latin typeface="Calibri" pitchFamily="34" charset="0"/>
+                <a:ea typeface="Calibri" pitchFamily="34" charset="-122"/>
+                <a:cs typeface="Calibri" pitchFamily="34" charset="-120"/>
+              </a:rPr>
+              <a:t>קובץ index.html שנפתח בדפדפן ועובד בפועל — לא רק "קוד שנראה טוב"</a:t>
+            </a:r>
+            <a:endParaRPr lang="en-US" sz="1900" dirty="0"/>
+          </a:p>
+          <a:p>
+            <a:pPr rtl="1" algn="r" marL="228600" indent="-228600">
+              <a:spcAft>
+                <a:spcPts val="1000"/>
+              </a:spcAft>
+              <a:buSzPct val="100000"/>
+              <a:buChar char="•"/>
+            </a:pPr>
+            <a:r>
+              <a:rPr lang="en-US" sz="1900" dirty="0">
+                <a:solidFill>
+                  <a:srgbClr val="1B1F3B"/>
+                </a:solidFill>
+                <a:latin typeface="Calibri" pitchFamily="34" charset="0"/>
+                <a:ea typeface="Calibri" pitchFamily="34" charset="-122"/>
+                <a:cs typeface="Calibri" pitchFamily="34" charset="-120"/>
+              </a:rPr>
+              <a:t>אפשר להוסיף, לסמן כהושלם, ולמחוק משימה — כל השלושה נבדקו בפועל בדפדפן</a:t>
+            </a:r>
+            <a:endParaRPr lang="en-US" sz="1900" dirty="0"/>
+          </a:p>
+          <a:p>
+            <a:pPr rtl="1" algn="r" marL="228600" indent="-228600">
+              <a:spcAft>
+                <a:spcPts val="1000"/>
+              </a:spcAft>
+              <a:buSzPct val="100000"/>
+              <a:buChar char="•"/>
+            </a:pPr>
+            <a:r>
+              <a:rPr lang="en-US" sz="1900" dirty="0">
+                <a:solidFill>
+                  <a:srgbClr val="1B1F3B"/>
+                </a:solidFill>
+                <a:latin typeface="Calibri" pitchFamily="34" charset="0"/>
+                <a:ea typeface="Calibri" pitchFamily="34" charset="-122"/>
+                <a:cs typeface="Calibri" pitchFamily="34" charset="-120"/>
+              </a:rPr>
+              <a:t>המשימות נשמרות גם אחרי רענון הדף (localStorage)</a:t>
+            </a:r>
+            <a:endParaRPr lang="en-US" sz="1900" dirty="0"/>
+          </a:p>
+          <a:p>
+            <a:pPr rtl="1" algn="r" marL="228600" indent="-228600">
+              <a:spcAft>
+                <a:spcPts val="1000"/>
+              </a:spcAft>
+              <a:buSzPct val="100000"/>
+              <a:buChar char="•"/>
+            </a:pPr>
+            <a:r>
+              <a:rPr lang="en-US" sz="1900" dirty="0">
+                <a:solidFill>
+                  <a:srgbClr val="1B1F3B"/>
+                </a:solidFill>
+                <a:latin typeface="Calibri" pitchFamily="34" charset="0"/>
+                <a:ea typeface="Calibri" pitchFamily="34" charset="-122"/>
+                <a:cs typeface="Calibri" pitchFamily="34" charset="-120"/>
+              </a:rPr>
+              <a:t>כל אחד/ת מבני הזוג יודע/ת להסביר מה הקוד עושה, גם אם AI כתב אותו — זה חלק מהתרגול, לא בונוס</a:t>
+            </a:r>
+            <a:endParaRPr lang="en-US" sz="1900" dirty="0"/>
+          </a:p>
+        </p:txBody>
+      </p:sp>
+      <p:sp>
+        <p:nvSpPr>
+          <p:cNvPr id="5" name="Shape 3"/>
+          <p:cNvSpPr/>
+          <p:nvPr/>
+        </p:nvSpPr>
+        <p:spPr>
+          <a:xfrm>
+            <a:off x="548640" y="3931920"/>
+            <a:ext cx="11091672" cy="0"/>
+          </a:xfrm>
+          <a:prstGeom prst="line">
+            <a:avLst/>
+          </a:prstGeom>
+          <a:noFill/>
+          <a:ln w="9525">
+            <a:solidFill>
+              <a:srgbClr val="B8B8C8"/>
+            </a:solidFill>
+            <a:prstDash val="solid"/>
+          </a:ln>
+        </p:spPr>
+      </p:sp>
+      <p:sp>
+        <p:nvSpPr>
+          <p:cNvPr id="6" name="Text 4"/>
+          <p:cNvSpPr/>
+          <p:nvPr/>
+        </p:nvSpPr>
+        <p:spPr>
+          <a:xfrm>
+            <a:off x="548640" y="4023360"/>
+            <a:ext cx="11091672" cy="868680"/>
+          </a:xfrm>
+          <a:prstGeom prst="rect">
+            <a:avLst/>
+          </a:prstGeom>
+          <a:noFill/>
+          <a:ln/>
+        </p:spPr>
+        <p:txBody>
+          <a:bodyPr wrap="square" lIns="0" tIns="0" rIns="0" bIns="0" rtlCol="0" anchor="ctr"/>
+          <a:lstStyle/>
+          <a:p>
+            <a:pPr rtl="1" algn="r" indent="0" marL="0">
+              <a:buNone/>
+            </a:pPr>
+            <a:r>
+              <a:rPr lang="en-US" sz="1700" dirty="0">
+                <a:solidFill>
+                  <a:srgbClr val="00A88A"/>
+                </a:solidFill>
+                <a:latin typeface="Arial" pitchFamily="34" charset="0"/>
+                <a:ea typeface="Arial" pitchFamily="34" charset="-122"/>
+                <a:cs typeface="Arial" pitchFamily="34" charset="-120"/>
+              </a:rPr>
+              <a:t>✔ מה עושים בפועל: אם ה-AI "ממציא" קוד שלא עובד או משתמש בפונקציה לא קיימת — זה בדיוק Hallucination שדיברנו עליו היום. לא תקלה שלכם: תקנו על ידי בקשה מפורשת מה-AI לתקן, או תיאור מדויק יותר של השגיאה שקיבלתם.</a:t>
+            </a:r>
+            <a:endParaRPr lang="en-US" sz="1700" dirty="0"/>
+          </a:p>
+        </p:txBody>
+      </p:sp>
+      <p:sp>
+        <p:nvSpPr>
+          <p:cNvPr id="7" name="Text 5"/>
+          <p:cNvSpPr/>
+          <p:nvPr/>
+        </p:nvSpPr>
+        <p:spPr>
+          <a:xfrm>
+            <a:off x="548640" y="6492240"/>
+            <a:ext cx="11091672" cy="274320"/>
+          </a:xfrm>
+          <a:prstGeom prst="rect">
+            <a:avLst/>
+          </a:prstGeom>
+          <a:noFill/>
+          <a:ln/>
+        </p:spPr>
+        <p:txBody>
+          <a:bodyPr wrap="square" lIns="0" tIns="0" rIns="0" bIns="0" rtlCol="0" anchor="ctr"/>
+          <a:lstStyle/>
+          <a:p>
+            <a:pPr rtl="1" algn="r" indent="0" marL="0">
+              <a:buNone/>
+            </a:pPr>
+            <a:r>
+              <a:rPr lang="en-US" sz="900" dirty="0">
+                <a:solidFill>
+                  <a:srgbClr val="A6A6B0"/>
+                </a:solidFill>
+                <a:latin typeface="Calibri" pitchFamily="34" charset="0"/>
+                <a:ea typeface="Calibri" pitchFamily="34" charset="-122"/>
+                <a:cs typeface="Calibri" pitchFamily="34" charset="-120"/>
+              </a:rPr>
+              <a:t>Vibe Coding · שיעור 1 · שקף 23</a:t>
+            </a:r>
+            <a:endParaRPr lang="en-US" sz="900" dirty="0"/>
+          </a:p>
+        </p:txBody>
+      </p:sp>
+    </p:spTree>
+  </p:cSld>
+  <p:clrMapOvr>
+    <a:masterClrMapping/>
+  </p:clrMapOvr>
+</p:sld>
+</file>
+
+<file path=ppt/slides/slide24.xml><?xml version="1.0" encoding="utf-8"?>
+<p:sld xmlns:a="http://schemas.openxmlformats.org/drawingml/2006/main" xmlns:r="http://schemas.openxmlformats.org/officeDocument/2006/relationships" xmlns:p="http://schemas.openxmlformats.org/presentationml/2006/main">
+  <p:cSld name="Slide 24">
+    <p:bg>
+      <p:bgPr>
+        <a:solidFill>
+          <a:srgbClr val="FFFFFF"/>
+        </a:solidFill>
+      </p:bgPr>
+    </p:bg>
+    <p:spTree>
+      <p:nvGrpSpPr>
+        <p:cNvPr id="1" name=""/>
+        <p:cNvGrpSpPr/>
+        <p:nvPr/>
+      </p:nvGrpSpPr>
+      <p:grpSpPr>
+        <a:xfrm>
+          <a:off x="0" y="0"/>
+          <a:ext cx="0" cy="0"/>
+          <a:chOff x="0" y="0"/>
+          <a:chExt cx="0" cy="0"/>
+        </a:xfrm>
+      </p:grpSpPr>
+      <p:sp>
+        <p:nvSpPr>
+          <p:cNvPr id="2" name="Text 0"/>
+          <p:cNvSpPr/>
+          <p:nvPr/>
+        </p:nvSpPr>
+        <p:spPr>
+          <a:xfrm>
+            <a:off x="548640" y="320040"/>
+            <a:ext cx="11091672" cy="685800"/>
+          </a:xfrm>
+          <a:prstGeom prst="rect">
+            <a:avLst/>
+          </a:prstGeom>
+          <a:noFill/>
+          <a:ln/>
+        </p:spPr>
+        <p:txBody>
+          <a:bodyPr wrap="square" lIns="0" tIns="0" rIns="0" bIns="0" rtlCol="0" anchor="ctr"/>
+          <a:lstStyle/>
+          <a:p>
+            <a:pPr rtl="1" algn="r" indent="0" marL="0">
+              <a:buNone/>
+            </a:pPr>
+            <a:r>
+              <a:rPr lang="en-US" sz="2800" b="1" dirty="0">
+                <a:solidFill>
+                  <a:srgbClr val="1B1F3B"/>
+                </a:solidFill>
+                <a:latin typeface="Arial" pitchFamily="34" charset="0"/>
+                <a:ea typeface="Arial" pitchFamily="34" charset="-122"/>
+                <a:cs typeface="Arial" pitchFamily="34" charset="-120"/>
+              </a:rPr>
+              <a:t>סיכום</a:t>
+            </a:r>
+            <a:endParaRPr lang="en-US" sz="2800" dirty="0"/>
+          </a:p>
+        </p:txBody>
+      </p:sp>
+      <p:sp>
+        <p:nvSpPr>
+          <p:cNvPr id="3" name="Text 1"/>
+          <p:cNvSpPr/>
+          <p:nvPr/>
+        </p:nvSpPr>
+        <p:spPr>
+          <a:xfrm>
+            <a:off x="548640" y="1371600"/>
+            <a:ext cx="11091672" cy="2743200"/>
+          </a:xfrm>
+          <a:prstGeom prst="rect">
+            <a:avLst/>
+          </a:prstGeom>
+          <a:noFill/>
+          <a:ln/>
+        </p:spPr>
+        <p:txBody>
+          <a:bodyPr wrap="square" lIns="0" tIns="0" rIns="0" bIns="0" rtlCol="0" anchor="ctr"/>
+          <a:lstStyle/>
+          <a:p>
+            <a:pPr rtl="1" algn="r" indent="0" marL="0">
+              <a:spcAft>
+                <a:spcPts val="1600"/>
+              </a:spcAft>
+              <a:buNone/>
+            </a:pPr>
+            <a:r>
+              <a:rPr lang="en-US" sz="1800" dirty="0">
+                <a:solidFill>
+                  <a:srgbClr val="1B1F3B"/>
+                </a:solidFill>
+                <a:latin typeface="Calibri" pitchFamily="34" charset="0"/>
+                <a:ea typeface="Calibri" pitchFamily="34" charset="-122"/>
+                <a:cs typeface="Calibri" pitchFamily="34" charset="-120"/>
+              </a:rPr>
+              <a:t>1. Vibe Coding = תהליך מקצועי, לא ניחוש — והנתונים מוכיחים את זה</a:t>
+            </a:r>
+            <a:endParaRPr lang="en-US" sz="1800" dirty="0"/>
+          </a:p>
+          <a:p>
+            <a:pPr rtl="1" algn="r" indent="0" marL="0">
+              <a:spcAft>
+                <a:spcPts val="1600"/>
+              </a:spcAft>
+              <a:buNone/>
+            </a:pPr>
+            <a:r>
+              <a:rPr lang="en-US" sz="1800" dirty="0">
+                <a:solidFill>
+                  <a:srgbClr val="1B1F3B"/>
+                </a:solidFill>
+                <a:latin typeface="Calibri" pitchFamily="34" charset="0"/>
+                <a:ea typeface="Calibri" pitchFamily="34" charset="-122"/>
+                <a:cs typeface="Calibri" pitchFamily="34" charset="-120"/>
+              </a:rPr>
+              <a:t>2. AI מאיץ עבודה, אבל כפי שראינו — רק 29% סומכים על הפלט (כלומר 71% לא) — ולכן תמיד בודקים קוד לא מוכר (Hallucination)</a:t>
+            </a:r>
+            <a:endParaRPr lang="en-US" sz="1800" dirty="0"/>
+          </a:p>
+          <a:p>
+            <a:pPr rtl="1" algn="r" indent="0" marL="0">
+              <a:spcAft>
+                <a:spcPts val="1600"/>
+              </a:spcAft>
+              <a:buNone/>
+            </a:pPr>
+            <a:r>
+              <a:rPr lang="en-US" sz="1800" dirty="0">
+                <a:solidFill>
+                  <a:srgbClr val="1B1F3B"/>
+                </a:solidFill>
+                <a:latin typeface="Calibri" pitchFamily="34" charset="0"/>
+                <a:ea typeface="Calibri" pitchFamily="34" charset="-122"/>
+                <a:cs typeface="Calibri" pitchFamily="34" charset="-120"/>
+              </a:rPr>
+              <a:t>3. לומדים Workflow — כלים יוחלפו, התהליך נשאר (וזה ההבדל בין 10% ל-40%)</a:t>
+            </a:r>
+            <a:endParaRPr lang="en-US" sz="1800" dirty="0"/>
+          </a:p>
+        </p:txBody>
+      </p:sp>
+      <p:sp>
+        <p:nvSpPr>
+          <p:cNvPr id="4" name="Shape 2"/>
+          <p:cNvSpPr/>
+          <p:nvPr/>
+        </p:nvSpPr>
+        <p:spPr>
+          <a:xfrm>
+            <a:off x="548640" y="4572000"/>
+            <a:ext cx="11091672" cy="0"/>
+          </a:xfrm>
+          <a:prstGeom prst="line">
+            <a:avLst/>
+          </a:prstGeom>
+          <a:noFill/>
+          <a:ln w="9525">
+            <a:solidFill>
+              <a:srgbClr val="B8B8C8"/>
+            </a:solidFill>
+            <a:prstDash val="solid"/>
+          </a:ln>
+        </p:spPr>
+      </p:sp>
+      <p:sp>
+        <p:nvSpPr>
+          <p:cNvPr id="5" name="Text 3"/>
+          <p:cNvSpPr/>
+          <p:nvPr/>
+        </p:nvSpPr>
+        <p:spPr>
+          <a:xfrm>
+            <a:off x="548640" y="4709160"/>
+            <a:ext cx="11091672" cy="365760"/>
+          </a:xfrm>
+          <a:prstGeom prst="rect">
+            <a:avLst/>
+          </a:prstGeom>
+          <a:noFill/>
+          <a:ln/>
+        </p:spPr>
+        <p:txBody>
+          <a:bodyPr wrap="square" lIns="0" tIns="0" rIns="0" bIns="0" rtlCol="0" anchor="ctr"/>
+          <a:lstStyle/>
+          <a:p>
+            <a:pPr rtl="1" algn="r" indent="0" marL="0">
+              <a:buNone/>
+            </a:pPr>
+            <a:r>
+              <a:rPr lang="en-US" sz="1700" b="1" dirty="0">
+                <a:solidFill>
+                  <a:srgbClr val="00A88A"/>
+                </a:solidFill>
+                <a:latin typeface="Arial" pitchFamily="34" charset="0"/>
+                <a:ea typeface="Arial" pitchFamily="34" charset="-122"/>
+                <a:cs typeface="Arial" pitchFamily="34" charset="-120"/>
+              </a:rPr>
+              <a:t>שבוע הבא:</a:t>
+            </a:r>
+            <a:pPr rtl="1" algn="r" indent="0" marL="0">
+              <a:buNone/>
+            </a:pPr>
+            <a:r>
+              <a:rPr lang="en-US" sz="1700" b="1" dirty="0">
+                <a:solidFill>
+                  <a:srgbClr val="00A88A"/>
+                </a:solidFill>
+                <a:latin typeface="Arial" pitchFamily="34" charset="0"/>
+                <a:ea typeface="Arial" pitchFamily="34" charset="-122"/>
+                <a:cs typeface="Arial" pitchFamily="34" charset="-120"/>
+              </a:rPr>
+              <a:t> AI Development Environment — מקימים סביבת עבודה אמיתית</a:t>
+            </a:r>
+            <a:endParaRPr lang="en-US" sz="1700" dirty="0"/>
+          </a:p>
+        </p:txBody>
+      </p:sp>
+      <p:sp>
+        <p:nvSpPr>
+          <p:cNvPr id="6" name="Text 4"/>
+          <p:cNvSpPr/>
+          <p:nvPr/>
+        </p:nvSpPr>
+        <p:spPr>
+          <a:xfrm>
+            <a:off x="548640" y="5120640"/>
+            <a:ext cx="11091672" cy="548640"/>
+          </a:xfrm>
+          <a:prstGeom prst="rect">
+            <a:avLst/>
+          </a:prstGeom>
+          <a:noFill/>
+          <a:ln/>
+        </p:spPr>
+        <p:txBody>
+          <a:bodyPr wrap="square" lIns="0" tIns="0" rIns="0" bIns="0" rtlCol="0" anchor="ctr"/>
+          <a:lstStyle/>
+          <a:p>
+            <a:pPr rtl="1" algn="r" indent="0" marL="0">
+              <a:buNone/>
+            </a:pPr>
+            <a:r>
+              <a:rPr lang="en-US" sz="1300" i="1" dirty="0">
+                <a:solidFill>
+                  <a:srgbClr val="6B7280"/>
+                </a:solidFill>
+                <a:latin typeface="Calibri" pitchFamily="34" charset="0"/>
+                <a:ea typeface="Calibri" pitchFamily="34" charset="-122"/>
+                <a:cs typeface="Calibri" pitchFamily="34" charset="-120"/>
+              </a:rPr>
+              <a:t>בהמשך הקורס: Context נכון (שבוע 3) · עבודה עם קוד קיים (שבוע 4) · Agents (שבוע 5) · תכנון לפני קוד (שבוע 6) · עד פריסה מלאה בענן ואבטחה (שבועות 11-12)</a:t>
+            </a:r>
+            <a:endParaRPr lang="en-US" sz="1300" dirty="0"/>
+          </a:p>
+        </p:txBody>
+      </p:sp>
+      <p:sp>
+        <p:nvSpPr>
+          <p:cNvPr id="7" name="Text 5"/>
+          <p:cNvSpPr/>
+          <p:nvPr/>
+        </p:nvSpPr>
+        <p:spPr>
+          <a:xfrm>
+            <a:off x="548640" y="6492240"/>
+            <a:ext cx="11091672" cy="274320"/>
+          </a:xfrm>
+          <a:prstGeom prst="rect">
+            <a:avLst/>
+          </a:prstGeom>
+          <a:noFill/>
+          <a:ln/>
+        </p:spPr>
+        <p:txBody>
+          <a:bodyPr wrap="square" lIns="0" tIns="0" rIns="0" bIns="0" rtlCol="0" anchor="ctr"/>
+          <a:lstStyle/>
+          <a:p>
+            <a:pPr rtl="1" algn="r" indent="0" marL="0">
+              <a:buNone/>
+            </a:pPr>
+            <a:r>
+              <a:rPr lang="en-US" sz="900" dirty="0">
+                <a:solidFill>
+                  <a:srgbClr val="A6A6B0"/>
+                </a:solidFill>
+                <a:latin typeface="Calibri" pitchFamily="34" charset="0"/>
+                <a:ea typeface="Calibri" pitchFamily="34" charset="-122"/>
+                <a:cs typeface="Calibri" pitchFamily="34" charset="-120"/>
+              </a:rPr>
+              <a:t>Vibe Coding · שיעור 1 · שקף 24</a:t>
+            </a:r>
+            <a:endParaRPr lang="en-US" sz="900" dirty="0"/>
+          </a:p>
+        </p:txBody>
+      </p:sp>
+    </p:spTree>
+  </p:cSld>
+  <p:clrMapOvr>
+    <a:masterClrMapping/>
+  </p:clrMapOvr>
+</p:sld>
+</file>
+
+<file path=ppt/slides/slide25.xml><?xml version="1.0" encoding="utf-8"?>
+<p:sld xmlns:a="http://schemas.openxmlformats.org/drawingml/2006/main" xmlns:r="http://schemas.openxmlformats.org/officeDocument/2006/relationships" xmlns:p="http://schemas.openxmlformats.org/presentationml/2006/main">
+  <p:cSld name="Slide 25">
+    <p:bg>
+      <p:bgPr>
+        <a:solidFill>
+          <a:srgbClr val="FFFFFF"/>
+        </a:solidFill>
+      </p:bgPr>
+    </p:bg>
+    <p:spTree>
+      <p:nvGrpSpPr>
+        <p:cNvPr id="1" name=""/>
+        <p:cNvGrpSpPr/>
+        <p:nvPr/>
+      </p:nvGrpSpPr>
+      <p:grpSpPr>
+        <a:xfrm>
+          <a:off x="0" y="0"/>
+          <a:ext cx="0" cy="0"/>
+          <a:chOff x="0" y="0"/>
+          <a:chExt cx="0" cy="0"/>
+        </a:xfrm>
+      </p:grpSpPr>
+      <p:sp>
+        <p:nvSpPr>
+          <p:cNvPr id="2" name="Text 0"/>
+          <p:cNvSpPr/>
+          <p:nvPr/>
+        </p:nvSpPr>
+        <p:spPr>
+          <a:xfrm>
+            <a:off x="548640" y="320040"/>
+            <a:ext cx="11091672" cy="685800"/>
+          </a:xfrm>
+          <a:prstGeom prst="rect">
+            <a:avLst/>
+          </a:prstGeom>
+          <a:noFill/>
+          <a:ln/>
+        </p:spPr>
+        <p:txBody>
+          <a:bodyPr wrap="square" lIns="0" tIns="0" rIns="0" bIns="0" rtlCol="0" anchor="ctr"/>
+          <a:lstStyle/>
+          <a:p>
+            <a:pPr rtl="1" algn="r" indent="0" marL="0">
+              <a:buNone/>
+            </a:pPr>
+            <a:r>
+              <a:rPr lang="en-US" sz="2800" b="1" dirty="0">
+                <a:solidFill>
+                  <a:srgbClr val="1B1F3B"/>
+                </a:solidFill>
+                <a:latin typeface="Arial" pitchFamily="34" charset="0"/>
+                <a:ea typeface="Arial" pitchFamily="34" charset="-122"/>
+                <a:cs typeface="Arial" pitchFamily="34" charset="-120"/>
+              </a:rPr>
               <a:t>מקורות</a:t>
             </a:r>
             <a:endParaRPr lang="en-US" sz="2800" dirty="0"/>
@@ -9080,7 +10032,7 @@
                 <a:ea typeface="Calibri" pitchFamily="34" charset="-122"/>
                 <a:cs typeface="Calibri" pitchFamily="34" charset="-120"/>
               </a:rPr>
-              <a:t>Vibe Coding · שיעור 1 · שקף 23</a:t>
+              <a:t>Vibe Coding · שיעור 1 · שקף 25</a:t>
             </a:r>
             <a:endParaRPr lang="en-US" sz="900" dirty="0"/>
           </a:p>

--- a/lesson_01/lesson_01_slides.pptx
+++ b/lesson_01/lesson_01_slides.pptx
@@ -5566,7 +5566,7 @@
                 <a:ea typeface="Calibri" pitchFamily="34" charset="-122"/>
                 <a:cs typeface="Calibri" pitchFamily="34" charset="-120"/>
               </a:rPr>
-              <a:t> (מחקר שנתי מוביל בתעשייה על תהליכי פיתוח תוכנה, מבית Google) לשנת 2026:</a:t>
+              <a:t> (מחקר שנתי מוביל בתעשייה על תהליכי פיתוח תוכנה, מבית Google) לשנת 2026, שיפור פרודוקטיביות בהשוואה לעבודה בלי כלי AI כלל:</a:t>
             </a:r>
             <a:endParaRPr lang="en-US" sz="1900" dirty="0"/>
           </a:p>
@@ -5621,7 +5621,7 @@
                 <a:ea typeface="Calibri" pitchFamily="34" charset="-122"/>
                 <a:cs typeface="Calibri" pitchFamily="34" charset="-120"/>
               </a:rPr>
-              <a:t> שיפור פרודוקטיביות</a:t>
+              <a:t> שיפור</a:t>
             </a:r>
             <a:endParaRPr lang="en-US" sz="1900" dirty="0"/>
           </a:p>
@@ -6279,7 +6279,35 @@
                 <a:ea typeface="Arial" pitchFamily="34" charset="-122"/>
                 <a:cs typeface="Arial" pitchFamily="34" charset="-120"/>
               </a:rPr>
-              <a:t> (כלי AI לכתיבת קוד מבית Anthropic), </a:t>
+              <a:t> (כלי AI לכתיבת קוד מבית </a:t>
+            </a:r>
+            <a:pPr rtl="1" algn="r" indent="0" marL="0">
+              <a:buNone/>
+            </a:pPr>
+            <a:r>
+              <a:rPr lang="en-US" sz="1700" b="1" dirty="0">
+                <a:solidFill>
+                  <a:srgbClr val="00A88A"/>
+                </a:solidFill>
+                <a:latin typeface="Arial" pitchFamily="34" charset="0"/>
+                <a:ea typeface="Arial" pitchFamily="34" charset="-122"/>
+                <a:cs typeface="Arial" pitchFamily="34" charset="-120"/>
+              </a:rPr>
+              <a:t>Anthropic</a:t>
+            </a:r>
+            <a:pPr rtl="1" algn="r" indent="0" marL="0">
+              <a:buNone/>
+            </a:pPr>
+            <a:r>
+              <a:rPr lang="en-US" sz="1700" dirty="0">
+                <a:solidFill>
+                  <a:srgbClr val="00A88A"/>
+                </a:solidFill>
+                <a:latin typeface="Arial" pitchFamily="34" charset="0"/>
+                <a:ea typeface="Arial" pitchFamily="34" charset="-122"/>
+                <a:cs typeface="Arial" pitchFamily="34" charset="-120"/>
+              </a:rPr>
+              <a:t>, החברה שיצרה את Claude), </a:t>
             </a:r>
             <a:pPr rtl="1" algn="r" indent="0" marL="0">
               <a:buNone/>
@@ -7370,7 +7398,7 @@
                 <a:ea typeface="Calibri" pitchFamily="34" charset="-122"/>
                 <a:cs typeface="Calibri" pitchFamily="34" charset="-120"/>
               </a:rPr>
-              <a:t>פרומפט 1 — ההתחלה, מקלידים מול הכיתה:</a:t>
+              <a:t>פרומפט 1 — ההתחלה, מקלידים מול הכיתה (קובץ HTML=שפת מבנה הדף, CSS=שפת עיצוב, JS/JavaScript=שפת תכנות להתנהגות אינטראקטיבית — שלושתם ביחד = דף אינטרנט עובד):</a:t>
             </a:r>
             <a:endParaRPr lang="en-US" sz="1400" dirty="0"/>
           </a:p>
@@ -8162,7 +8190,7 @@
                 <a:ea typeface="Calibri" pitchFamily="34" charset="-122"/>
                 <a:cs typeface="Calibri" pitchFamily="34" charset="-120"/>
               </a:rPr>
-              <a:t>אחרי שהתוצאה של פרומפט 1 עובדת מקלידים בהמשך:</a:t>
+              <a:t>אחרי שהתוצאה של פרומפט 1 עובדת מקלידים בהמשך (פרומפט 2 מבקש שמירה ב-localStorage — זיכרון מקומי בדפדפן שנשמר גם אחרי רענון הדף):</a:t>
             </a:r>
             <a:endParaRPr lang="en-US" sz="1400" dirty="0"/>
           </a:p>
@@ -8636,7 +8664,7 @@
                 <a:ea typeface="Calibri" pitchFamily="34" charset="-122"/>
                 <a:cs typeface="Calibri" pitchFamily="34" charset="-120"/>
               </a:rPr>
-              <a:t>בלי Backend — מספיק קובץ HTML/CSS/JS אחד שרץ בדפדפן, עם שמירה ב-</a:t>
+              <a:t>בלי </a:t>
             </a:r>
             <a:pPr rtl="1" algn="r" indent="0" marL="0">
               <a:spcAft>
@@ -8653,7 +8681,7 @@
                 <a:ea typeface="Calibri" pitchFamily="34" charset="-122"/>
                 <a:cs typeface="Calibri" pitchFamily="34" charset="-120"/>
               </a:rPr>
-              <a:t>localStorage</a:t>
+              <a:t>Backend</a:t>
             </a:r>
             <a:pPr rtl="1" algn="r" indent="0" marL="0">
               <a:spcAft>
@@ -8670,7 +8698,7 @@
                 <a:ea typeface="Calibri" pitchFamily="34" charset="-122"/>
                 <a:cs typeface="Calibri" pitchFamily="34" charset="-120"/>
               </a:rPr>
-              <a:t> (זיכרון מקומי בדפדפן שנשמר גם אחרי רענון הדף)</a:t>
+              <a:t> (קוד שרץ בצד שרת מרוחק, לא בדפדפן שלכם) — מספיק קובץ HTML/CSS/JS אחד שרץ בדפדפן, עם שמירה ב-localStorage</a:t>
             </a:r>
             <a:endParaRPr lang="en-US" sz="1900" dirty="0"/>
           </a:p>
@@ -10980,7 +11008,41 @@
                 <a:ea typeface="Calibri" pitchFamily="34" charset="-122"/>
                 <a:cs typeface="Calibri" pitchFamily="34" charset="-120"/>
               </a:rPr>
-              <a:t> בקשות שילוב קוד (Pull Requests) בשבוע — דרך "Minions", מערכת AI פנימית שבנתה </a:t>
+              <a:t> בקשות שילוב קוד (Pull Requests, מכונות בקיצור </a:t>
+            </a:r>
+            <a:pPr rtl="1" algn="r" indent="0" marL="0">
+              <a:spcAft>
+                <a:spcPts val="1000"/>
+              </a:spcAft>
+              <a:buNone/>
+            </a:pPr>
+            <a:r>
+              <a:rPr lang="en-US" sz="1900" b="1" dirty="0">
+                <a:solidFill>
+                  <a:srgbClr val="1B1F3B"/>
+                </a:solidFill>
+                <a:latin typeface="Calibri" pitchFamily="34" charset="0"/>
+                <a:ea typeface="Calibri" pitchFamily="34" charset="-122"/>
+                <a:cs typeface="Calibri" pitchFamily="34" charset="-120"/>
+              </a:rPr>
+              <a:t>PR</a:t>
+            </a:r>
+            <a:pPr rtl="1" algn="r" indent="0" marL="0">
+              <a:spcAft>
+                <a:spcPts val="1000"/>
+              </a:spcAft>
+              <a:buNone/>
+            </a:pPr>
+            <a:r>
+              <a:rPr lang="en-US" sz="1900" dirty="0">
+                <a:solidFill>
+                  <a:srgbClr val="1B1F3B"/>
+                </a:solidFill>
+                <a:latin typeface="Calibri" pitchFamily="34" charset="0"/>
+                <a:ea typeface="Calibri" pitchFamily="34" charset="-122"/>
+                <a:cs typeface="Calibri" pitchFamily="34" charset="-120"/>
+              </a:rPr>
+              <a:t>) בשבוע — דרך "Minions", מערכת AI פנימית שבנתה </a:t>
             </a:r>
             <a:pPr rtl="1" algn="r" indent="0" marL="0">
               <a:spcAft>

--- a/lesson_01/lesson_01_slides.pptx
+++ b/lesson_01/lesson_01_slides.pptx
@@ -3281,65 +3281,283 @@
         </p:nvSpPr>
         <p:spPr>
           <a:xfrm>
-            <a:off x="2286000" y="5212080"/>
-            <a:ext cx="7616952" cy="1051560"/>
-          </a:xfrm>
-          <a:prstGeom prst="rect">
-            <a:avLst/>
+            <a:off x="2286000" y="5166360"/>
+            <a:ext cx="7616952" cy="1097280"/>
+          </a:xfrm>
+          <a:prstGeom prst="roundRect">
+            <a:avLst>
+              <a:gd name="adj" fmla="val 5000"/>
+            </a:avLst>
           </a:prstGeom>
           <a:solidFill>
-            <a:srgbClr val="F6F6F8"/>
+            <a:srgbClr val="1B1F3B"/>
           </a:solidFill>
-          <a:ln w="12700">
+          <a:ln w="6350">
             <a:solidFill>
               <a:srgbClr val="B8B8C8"/>
             </a:solidFill>
-            <a:prstDash val="dash"/>
+            <a:prstDash val="solid"/>
           </a:ln>
         </p:spPr>
       </p:sp>
       <p:sp>
         <p:nvSpPr>
-          <p:cNvPr id="8" name="Text 6"/>
-          <p:cNvSpPr/>
-          <p:nvPr/>
-        </p:nvSpPr>
-        <p:spPr>
-          <a:xfrm>
-            <a:off x="2286000" y="5212080"/>
-            <a:ext cx="7616952" cy="1051560"/>
-          </a:xfrm>
-          <a:prstGeom prst="rect">
-            <a:avLst/>
-          </a:prstGeom>
-          <a:noFill/>
-          <a:ln/>
-        </p:spPr>
-        <p:txBody>
-          <a:bodyPr wrap="square" lIns="101600" tIns="101600" rIns="101600" bIns="101600" rtlCol="0" anchor="ctr"/>
-          <a:lstStyle/>
-          <a:p>
-            <a:pPr rtl="1" algn="ctr" indent="0" marL="0">
-              <a:buNone/>
-            </a:pPr>
-            <a:r>
-              <a:rPr lang="en-US" sz="1300" i="1" dirty="0">
-                <a:solidFill>
-                  <a:srgbClr val="6B7280"/>
-                </a:solidFill>
-                <a:latin typeface="Calibri" pitchFamily="34" charset="0"/>
-                <a:ea typeface="Calibri" pitchFamily="34" charset="-122"/>
-                <a:cs typeface="Calibri" pitchFamily="34" charset="-120"/>
-              </a:rPr>
-              <a:t>[תמונה: מסך טרמינל / IDE עם סוכן AI כותב קוד בזמן אמת]</a:t>
-            </a:r>
-            <a:endParaRPr lang="en-US" sz="1300" dirty="0"/>
-          </a:p>
-        </p:txBody>
-      </p:sp>
-      <p:sp>
-        <p:nvSpPr>
-          <p:cNvPr id="9" name="Text 7"/>
+          <p:cNvPr id="8" name="Shape 6"/>
+          <p:cNvSpPr/>
+          <p:nvPr/>
+        </p:nvSpPr>
+        <p:spPr>
+          <a:xfrm>
+            <a:off x="2414016" y="5241341"/>
+            <a:ext cx="91440" cy="91440"/>
+          </a:xfrm>
+          <a:prstGeom prst="ellipse">
+            <a:avLst/>
+          </a:prstGeom>
+          <a:solidFill>
+            <a:srgbClr val="FF5F56"/>
+          </a:solidFill>
+          <a:ln/>
+        </p:spPr>
+      </p:sp>
+      <p:sp>
+        <p:nvSpPr>
+          <p:cNvPr id="9" name="Shape 7"/>
+          <p:cNvSpPr/>
+          <p:nvPr/>
+        </p:nvSpPr>
+        <p:spPr>
+          <a:xfrm>
+            <a:off x="2615184" y="5241341"/>
+            <a:ext cx="91440" cy="91440"/>
+          </a:xfrm>
+          <a:prstGeom prst="ellipse">
+            <a:avLst/>
+          </a:prstGeom>
+          <a:solidFill>
+            <a:srgbClr val="FFBD2E"/>
+          </a:solidFill>
+          <a:ln/>
+        </p:spPr>
+      </p:sp>
+      <p:sp>
+        <p:nvSpPr>
+          <p:cNvPr id="10" name="Shape 8"/>
+          <p:cNvSpPr/>
+          <p:nvPr/>
+        </p:nvSpPr>
+        <p:spPr>
+          <a:xfrm>
+            <a:off x="2816352" y="5241341"/>
+            <a:ext cx="91440" cy="91440"/>
+          </a:xfrm>
+          <a:prstGeom prst="ellipse">
+            <a:avLst/>
+          </a:prstGeom>
+          <a:solidFill>
+            <a:srgbClr val="27C93F"/>
+          </a:solidFill>
+          <a:ln/>
+        </p:spPr>
+      </p:sp>
+      <p:sp>
+        <p:nvSpPr>
+          <p:cNvPr id="11" name="Text 9"/>
+          <p:cNvSpPr/>
+          <p:nvPr/>
+        </p:nvSpPr>
+        <p:spPr>
+          <a:xfrm>
+            <a:off x="2286000" y="5166360"/>
+            <a:ext cx="7616952" cy="241402"/>
+          </a:xfrm>
+          <a:prstGeom prst="rect">
+            <a:avLst/>
+          </a:prstGeom>
+          <a:noFill/>
+          <a:ln/>
+        </p:spPr>
+        <p:txBody>
+          <a:bodyPr wrap="square" lIns="0" tIns="0" rIns="0" bIns="0" rtlCol="0" anchor="ctr"/>
+          <a:lstStyle/>
+          <a:p>
+            <a:pPr algn="ctr" indent="0" marL="0">
+              <a:buNone/>
+            </a:pPr>
+            <a:r>
+              <a:rPr lang="en-US" sz="900" dirty="0">
+                <a:solidFill>
+                  <a:srgbClr val="8A8FB0"/>
+                </a:solidFill>
+                <a:latin typeface="Calibri" pitchFamily="34" charset="0"/>
+                <a:ea typeface="Calibri" pitchFamily="34" charset="-122"/>
+                <a:cs typeface="Calibri" pitchFamily="34" charset="-120"/>
+              </a:rPr>
+              <a:t>vibe-agent — zsh</a:t>
+            </a:r>
+            <a:endParaRPr lang="en-US" sz="900" dirty="0"/>
+          </a:p>
+        </p:txBody>
+      </p:sp>
+      <p:sp>
+        <p:nvSpPr>
+          <p:cNvPr id="12" name="Text 10"/>
+          <p:cNvSpPr/>
+          <p:nvPr/>
+        </p:nvSpPr>
+        <p:spPr>
+          <a:xfrm>
+            <a:off x="2468880" y="5480914"/>
+            <a:ext cx="7251192" cy="186538"/>
+          </a:xfrm>
+          <a:prstGeom prst="rect">
+            <a:avLst/>
+          </a:prstGeom>
+          <a:noFill/>
+          <a:ln/>
+        </p:spPr>
+        <p:txBody>
+          <a:bodyPr wrap="square" lIns="0" tIns="0" rIns="0" bIns="0" rtlCol="0" anchor="ctr"/>
+          <a:lstStyle/>
+          <a:p>
+            <a:pPr algn="l" indent="0" marL="0">
+              <a:buNone/>
+            </a:pPr>
+            <a:r>
+              <a:rPr lang="en-US" sz="1000" dirty="0">
+                <a:solidFill>
+                  <a:srgbClr val="FFFFFF"/>
+                </a:solidFill>
+                <a:latin typeface="Courier New" pitchFamily="34" charset="0"/>
+                <a:ea typeface="Courier New" pitchFamily="34" charset="-122"/>
+                <a:cs typeface="Courier New" pitchFamily="34" charset="-120"/>
+              </a:rPr>
+              <a:t>$ vibe-agent run "add dark mode toggle"</a:t>
+            </a:r>
+            <a:endParaRPr lang="en-US" sz="1000" dirty="0"/>
+          </a:p>
+        </p:txBody>
+      </p:sp>
+      <p:sp>
+        <p:nvSpPr>
+          <p:cNvPr id="13" name="Text 11"/>
+          <p:cNvSpPr/>
+          <p:nvPr/>
+        </p:nvSpPr>
+        <p:spPr>
+          <a:xfrm>
+            <a:off x="2468880" y="5667451"/>
+            <a:ext cx="7251192" cy="186538"/>
+          </a:xfrm>
+          <a:prstGeom prst="rect">
+            <a:avLst/>
+          </a:prstGeom>
+          <a:noFill/>
+          <a:ln/>
+        </p:spPr>
+        <p:txBody>
+          <a:bodyPr wrap="square" lIns="0" tIns="0" rIns="0" bIns="0" rtlCol="0" anchor="ctr"/>
+          <a:lstStyle/>
+          <a:p>
+            <a:pPr rtl="1" algn="l" indent="0" marL="0">
+              <a:buNone/>
+            </a:pPr>
+            <a:r>
+              <a:rPr lang="en-US" sz="1000" dirty="0">
+                <a:solidFill>
+                  <a:srgbClr val="8A8FB0"/>
+                </a:solidFill>
+                <a:latin typeface="Courier New" pitchFamily="34" charset="0"/>
+                <a:ea typeface="Courier New" pitchFamily="34" charset="-122"/>
+                <a:cs typeface="Courier New" pitchFamily="34" charset="-120"/>
+              </a:rPr>
+              <a:t>&gt; קורא את src/App.tsx...</a:t>
+            </a:r>
+            <a:endParaRPr lang="en-US" sz="1000" dirty="0"/>
+          </a:p>
+        </p:txBody>
+      </p:sp>
+      <p:sp>
+        <p:nvSpPr>
+          <p:cNvPr id="14" name="Text 12"/>
+          <p:cNvSpPr/>
+          <p:nvPr/>
+        </p:nvSpPr>
+        <p:spPr>
+          <a:xfrm>
+            <a:off x="2468880" y="5853989"/>
+            <a:ext cx="7251192" cy="186538"/>
+          </a:xfrm>
+          <a:prstGeom prst="rect">
+            <a:avLst/>
+          </a:prstGeom>
+          <a:noFill/>
+          <a:ln/>
+        </p:spPr>
+        <p:txBody>
+          <a:bodyPr wrap="square" lIns="0" tIns="0" rIns="0" bIns="0" rtlCol="0" anchor="ctr"/>
+          <a:lstStyle/>
+          <a:p>
+            <a:pPr rtl="1" algn="l" indent="0" marL="0">
+              <a:buNone/>
+            </a:pPr>
+            <a:r>
+              <a:rPr lang="en-US" sz="1000" dirty="0">
+                <a:solidFill>
+                  <a:srgbClr val="5FD9C6"/>
+                </a:solidFill>
+                <a:latin typeface="Courier New" pitchFamily="34" charset="0"/>
+                <a:ea typeface="Courier New" pitchFamily="34" charset="-122"/>
+                <a:cs typeface="Courier New" pitchFamily="34" charset="-120"/>
+              </a:rPr>
+              <a:t>&gt; כותב קומפוננטה חדשה...</a:t>
+            </a:r>
+            <a:endParaRPr lang="en-US" sz="1000" dirty="0"/>
+          </a:p>
+        </p:txBody>
+      </p:sp>
+      <p:sp>
+        <p:nvSpPr>
+          <p:cNvPr id="15" name="Text 13"/>
+          <p:cNvSpPr/>
+          <p:nvPr/>
+        </p:nvSpPr>
+        <p:spPr>
+          <a:xfrm>
+            <a:off x="2468880" y="6040526"/>
+            <a:ext cx="7251192" cy="186538"/>
+          </a:xfrm>
+          <a:prstGeom prst="rect">
+            <a:avLst/>
+          </a:prstGeom>
+          <a:noFill/>
+          <a:ln/>
+        </p:spPr>
+        <p:txBody>
+          <a:bodyPr wrap="square" lIns="0" tIns="0" rIns="0" bIns="0" rtlCol="0" anchor="ctr"/>
+          <a:lstStyle/>
+          <a:p>
+            <a:pPr rtl="1" algn="l" indent="0" marL="0">
+              <a:buNone/>
+            </a:pPr>
+            <a:r>
+              <a:rPr lang="en-US" sz="1000" dirty="0">
+                <a:solidFill>
+                  <a:srgbClr val="27C93F"/>
+                </a:solidFill>
+                <a:latin typeface="Courier New" pitchFamily="34" charset="0"/>
+                <a:ea typeface="Courier New" pitchFamily="34" charset="-122"/>
+                <a:cs typeface="Courier New" pitchFamily="34" charset="-120"/>
+              </a:rPr>
+              <a:t>✓ בוצע — 2 קבצים השתנו ▍</a:t>
+            </a:r>
+            <a:endParaRPr lang="en-US" sz="1000" dirty="0"/>
+          </a:p>
+        </p:txBody>
+      </p:sp>
+      <p:sp>
+        <p:nvSpPr>
+          <p:cNvPr id="16" name="Text 14"/>
           <p:cNvSpPr/>
           <p:nvPr/>
         </p:nvSpPr>
@@ -3741,7 +3959,176 @@
       </p:sp>
       <p:sp>
         <p:nvSpPr>
-          <p:cNvPr id="7" name="Text 5"/>
+          <p:cNvPr id="7" name="Shape 5"/>
+          <p:cNvSpPr/>
+          <p:nvPr/>
+        </p:nvSpPr>
+        <p:spPr>
+          <a:xfrm>
+            <a:off x="548640" y="4846320"/>
+            <a:ext cx="11091672" cy="1188720"/>
+          </a:xfrm>
+          <a:prstGeom prst="roundRect">
+            <a:avLst>
+              <a:gd name="adj" fmla="val 4615"/>
+            </a:avLst>
+          </a:prstGeom>
+          <a:solidFill>
+            <a:srgbClr val="1B1F3B"/>
+          </a:solidFill>
+          <a:ln w="6350">
+            <a:solidFill>
+              <a:srgbClr val="B8B8C8"/>
+            </a:solidFill>
+            <a:prstDash val="solid"/>
+          </a:ln>
+        </p:spPr>
+      </p:sp>
+      <p:sp>
+        <p:nvSpPr>
+          <p:cNvPr id="8" name="Text 6"/>
+          <p:cNvSpPr/>
+          <p:nvPr/>
+        </p:nvSpPr>
+        <p:spPr>
+          <a:xfrm>
+            <a:off x="777240" y="4846320"/>
+            <a:ext cx="10085832" cy="1188720"/>
+          </a:xfrm>
+          <a:prstGeom prst="rect">
+            <a:avLst/>
+          </a:prstGeom>
+          <a:noFill/>
+          <a:ln/>
+        </p:spPr>
+        <p:txBody>
+          <a:bodyPr wrap="square" lIns="0" tIns="0" rIns="0" bIns="0" rtlCol="0" anchor="ctr"/>
+          <a:lstStyle/>
+          <a:p>
+            <a:pPr algn="l" indent="0" marL="0">
+              <a:buNone/>
+            </a:pPr>
+            <a:r>
+              <a:rPr lang="en-US" sz="1300" dirty="0">
+                <a:solidFill>
+                  <a:srgbClr val="FFFFFF"/>
+                </a:solidFill>
+                <a:latin typeface="Courier New" pitchFamily="34" charset="0"/>
+                <a:ea typeface="Courier New" pitchFamily="34" charset="-122"/>
+                <a:cs typeface="Courier New" pitchFamily="34" charset="-120"/>
+              </a:rPr>
+              <a:t>import { smartSort } from "utils";</a:t>
+            </a:r>
+            <a:endParaRPr lang="en-US" sz="1300" dirty="0"/>
+          </a:p>
+        </p:txBody>
+      </p:sp>
+      <p:sp>
+        <p:nvSpPr>
+          <p:cNvPr id="9" name="Shape 7"/>
+          <p:cNvSpPr/>
+          <p:nvPr/>
+        </p:nvSpPr>
+        <p:spPr>
+          <a:xfrm>
+            <a:off x="10981944" y="5248656"/>
+            <a:ext cx="384048" cy="384048"/>
+          </a:xfrm>
+          <a:prstGeom prst="ellipse">
+            <a:avLst/>
+          </a:prstGeom>
+          <a:solidFill>
+            <a:srgbClr val="E05A47"/>
+          </a:solidFill>
+          <a:ln w="19050">
+            <a:solidFill>
+              <a:srgbClr val="FFFFFF"/>
+            </a:solidFill>
+            <a:prstDash val="solid"/>
+          </a:ln>
+        </p:spPr>
+      </p:sp>
+      <p:sp>
+        <p:nvSpPr>
+          <p:cNvPr id="10" name="Text 8"/>
+          <p:cNvSpPr/>
+          <p:nvPr/>
+        </p:nvSpPr>
+        <p:spPr>
+          <a:xfrm>
+            <a:off x="10981944" y="5248656"/>
+            <a:ext cx="384048" cy="384048"/>
+          </a:xfrm>
+          <a:prstGeom prst="rect">
+            <a:avLst/>
+          </a:prstGeom>
+          <a:noFill/>
+          <a:ln/>
+        </p:spPr>
+        <p:txBody>
+          <a:bodyPr wrap="square" lIns="0" tIns="0" rIns="0" bIns="0" rtlCol="0" anchor="ctr"/>
+          <a:lstStyle/>
+          <a:p>
+            <a:pPr algn="ctr" indent="0" marL="0">
+              <a:buNone/>
+            </a:pPr>
+            <a:r>
+              <a:rPr lang="en-US" sz="1600" b="1" dirty="0">
+                <a:solidFill>
+                  <a:srgbClr val="FFFFFF"/>
+                </a:solidFill>
+                <a:latin typeface="Arial" pitchFamily="34" charset="0"/>
+                <a:ea typeface="Arial" pitchFamily="34" charset="-122"/>
+                <a:cs typeface="Arial" pitchFamily="34" charset="-120"/>
+              </a:rPr>
+              <a:t>?</a:t>
+            </a:r>
+            <a:endParaRPr lang="en-US" sz="1600" dirty="0"/>
+          </a:p>
+        </p:txBody>
+      </p:sp>
+      <p:sp>
+        <p:nvSpPr>
+          <p:cNvPr id="11" name="Text 9"/>
+          <p:cNvSpPr/>
+          <p:nvPr/>
+        </p:nvSpPr>
+        <p:spPr>
+          <a:xfrm>
+            <a:off x="548640" y="6080760"/>
+            <a:ext cx="11091672" cy="274320"/>
+          </a:xfrm>
+          <a:prstGeom prst="rect">
+            <a:avLst/>
+          </a:prstGeom>
+          <a:noFill/>
+          <a:ln/>
+        </p:spPr>
+        <p:txBody>
+          <a:bodyPr wrap="square" lIns="0" tIns="0" rIns="0" bIns="0" rtlCol="0" anchor="ctr"/>
+          <a:lstStyle/>
+          <a:p>
+            <a:pPr rtl="1" algn="r" indent="0" marL="0">
+              <a:buNone/>
+            </a:pPr>
+            <a:r>
+              <a:rPr lang="en-US" sz="1000" i="1" dirty="0">
+                <a:solidFill>
+                  <a:srgbClr val="6B7280"/>
+                </a:solidFill>
+                <a:latin typeface="Calibri" pitchFamily="34" charset="0"/>
+                <a:ea typeface="Calibri" pitchFamily="34" charset="-122"/>
+                <a:cs typeface="Calibri" pitchFamily="34" charset="-120"/>
+              </a:rPr>
+              <a:t>איור: דוגמה: import של פונקציה בשם smartSort שנראית לגיטימית לגמרי — אך לא קיימת בפועל בספרייה. ה-AI "המציא" אותה בביטחון מלא.</a:t>
+            </a:r>
+            <a:endParaRPr lang="en-US" sz="1000" dirty="0"/>
+          </a:p>
+        </p:txBody>
+      </p:sp>
+      <p:sp>
+        <p:nvSpPr>
+          <p:cNvPr id="12" name="Text 10"/>
           <p:cNvSpPr/>
           <p:nvPr/>
         </p:nvSpPr>
@@ -5020,7 +5407,462 @@
       </p:sp>
       <p:sp>
         <p:nvSpPr>
-          <p:cNvPr id="7" name="Text 5"/>
+          <p:cNvPr id="7" name="Shape 5"/>
+          <p:cNvSpPr/>
+          <p:nvPr/>
+        </p:nvSpPr>
+        <p:spPr>
+          <a:xfrm>
+            <a:off x="11137392" y="5189220"/>
+            <a:ext cx="502920" cy="502920"/>
+          </a:xfrm>
+          <a:prstGeom prst="ellipse">
+            <a:avLst/>
+          </a:prstGeom>
+          <a:solidFill>
+            <a:srgbClr val="FFFFFF"/>
+          </a:solidFill>
+          <a:ln w="19050">
+            <a:solidFill>
+              <a:srgbClr val="00A88A"/>
+            </a:solidFill>
+            <a:prstDash val="solid"/>
+          </a:ln>
+        </p:spPr>
+      </p:sp>
+      <p:sp>
+        <p:nvSpPr>
+          <p:cNvPr id="8" name="Text 6"/>
+          <p:cNvSpPr/>
+          <p:nvPr/>
+        </p:nvSpPr>
+        <p:spPr>
+          <a:xfrm>
+            <a:off x="11137392" y="5189220"/>
+            <a:ext cx="502920" cy="502920"/>
+          </a:xfrm>
+          <a:prstGeom prst="rect">
+            <a:avLst/>
+          </a:prstGeom>
+          <a:noFill/>
+          <a:ln/>
+        </p:spPr>
+        <p:txBody>
+          <a:bodyPr wrap="square" lIns="0" tIns="0" rIns="0" bIns="0" rtlCol="0" anchor="ctr"/>
+          <a:lstStyle/>
+          <a:p>
+            <a:pPr algn="ctr" indent="0" marL="0">
+              <a:buNone/>
+            </a:pPr>
+            <a:r>
+              <a:rPr lang="en-US" sz="1300" b="1" dirty="0">
+                <a:solidFill>
+                  <a:srgbClr val="1B1F3B"/>
+                </a:solidFill>
+                <a:latin typeface="Arial" pitchFamily="34" charset="0"/>
+                <a:ea typeface="Arial" pitchFamily="34" charset="-122"/>
+                <a:cs typeface="Arial" pitchFamily="34" charset="-120"/>
+              </a:rPr>
+              <a:t>1</a:t>
+            </a:r>
+            <a:endParaRPr lang="en-US" sz="1300" dirty="0"/>
+          </a:p>
+        </p:txBody>
+      </p:sp>
+      <p:sp>
+        <p:nvSpPr>
+          <p:cNvPr id="9" name="Shape 7"/>
+          <p:cNvSpPr/>
+          <p:nvPr/>
+        </p:nvSpPr>
+        <p:spPr>
+          <a:xfrm>
+            <a:off x="9020556" y="5440680"/>
+            <a:ext cx="2089404" cy="0"/>
+          </a:xfrm>
+          <a:prstGeom prst="line">
+            <a:avLst/>
+          </a:prstGeom>
+          <a:noFill/>
+          <a:ln w="15875">
+            <a:solidFill>
+              <a:srgbClr val="B8B8C8"/>
+            </a:solidFill>
+            <a:prstDash val="solid"/>
+            <a:headEnd type="triangle"/>
+          </a:ln>
+        </p:spPr>
+      </p:sp>
+      <p:sp>
+        <p:nvSpPr>
+          <p:cNvPr id="10" name="Shape 8"/>
+          <p:cNvSpPr/>
+          <p:nvPr/>
+        </p:nvSpPr>
+        <p:spPr>
+          <a:xfrm>
+            <a:off x="8490204" y="5189220"/>
+            <a:ext cx="502920" cy="502920"/>
+          </a:xfrm>
+          <a:prstGeom prst="ellipse">
+            <a:avLst/>
+          </a:prstGeom>
+          <a:solidFill>
+            <a:srgbClr val="FFFFFF"/>
+          </a:solidFill>
+          <a:ln w="19050">
+            <a:solidFill>
+              <a:srgbClr val="00A88A"/>
+            </a:solidFill>
+            <a:prstDash val="solid"/>
+          </a:ln>
+        </p:spPr>
+      </p:sp>
+      <p:sp>
+        <p:nvSpPr>
+          <p:cNvPr id="11" name="Text 9"/>
+          <p:cNvSpPr/>
+          <p:nvPr/>
+        </p:nvSpPr>
+        <p:spPr>
+          <a:xfrm>
+            <a:off x="8490204" y="5189220"/>
+            <a:ext cx="502920" cy="502920"/>
+          </a:xfrm>
+          <a:prstGeom prst="rect">
+            <a:avLst/>
+          </a:prstGeom>
+          <a:noFill/>
+          <a:ln/>
+        </p:spPr>
+        <p:txBody>
+          <a:bodyPr wrap="square" lIns="0" tIns="0" rIns="0" bIns="0" rtlCol="0" anchor="ctr"/>
+          <a:lstStyle/>
+          <a:p>
+            <a:pPr algn="ctr" indent="0" marL="0">
+              <a:buNone/>
+            </a:pPr>
+            <a:r>
+              <a:rPr lang="en-US" sz="1300" b="1" dirty="0">
+                <a:solidFill>
+                  <a:srgbClr val="1B1F3B"/>
+                </a:solidFill>
+                <a:latin typeface="Arial" pitchFamily="34" charset="0"/>
+                <a:ea typeface="Arial" pitchFamily="34" charset="-122"/>
+                <a:cs typeface="Arial" pitchFamily="34" charset="-120"/>
+              </a:rPr>
+              <a:t>2</a:t>
+            </a:r>
+            <a:endParaRPr lang="en-US" sz="1300" dirty="0"/>
+          </a:p>
+        </p:txBody>
+      </p:sp>
+      <p:sp>
+        <p:nvSpPr>
+          <p:cNvPr id="12" name="Shape 10"/>
+          <p:cNvSpPr/>
+          <p:nvPr/>
+        </p:nvSpPr>
+        <p:spPr>
+          <a:xfrm>
+            <a:off x="6373368" y="5440680"/>
+            <a:ext cx="2089404" cy="0"/>
+          </a:xfrm>
+          <a:prstGeom prst="line">
+            <a:avLst/>
+          </a:prstGeom>
+          <a:noFill/>
+          <a:ln w="15875">
+            <a:solidFill>
+              <a:srgbClr val="B8B8C8"/>
+            </a:solidFill>
+            <a:prstDash val="solid"/>
+            <a:headEnd type="triangle"/>
+          </a:ln>
+        </p:spPr>
+      </p:sp>
+      <p:sp>
+        <p:nvSpPr>
+          <p:cNvPr id="13" name="Shape 11"/>
+          <p:cNvSpPr/>
+          <p:nvPr/>
+        </p:nvSpPr>
+        <p:spPr>
+          <a:xfrm>
+            <a:off x="5843016" y="5189220"/>
+            <a:ext cx="502920" cy="502920"/>
+          </a:xfrm>
+          <a:prstGeom prst="ellipse">
+            <a:avLst/>
+          </a:prstGeom>
+          <a:solidFill>
+            <a:srgbClr val="FFFFFF"/>
+          </a:solidFill>
+          <a:ln w="19050">
+            <a:solidFill>
+              <a:srgbClr val="00A88A"/>
+            </a:solidFill>
+            <a:prstDash val="solid"/>
+          </a:ln>
+        </p:spPr>
+      </p:sp>
+      <p:sp>
+        <p:nvSpPr>
+          <p:cNvPr id="14" name="Text 12"/>
+          <p:cNvSpPr/>
+          <p:nvPr/>
+        </p:nvSpPr>
+        <p:spPr>
+          <a:xfrm>
+            <a:off x="5843016" y="5189220"/>
+            <a:ext cx="502920" cy="502920"/>
+          </a:xfrm>
+          <a:prstGeom prst="rect">
+            <a:avLst/>
+          </a:prstGeom>
+          <a:noFill/>
+          <a:ln/>
+        </p:spPr>
+        <p:txBody>
+          <a:bodyPr wrap="square" lIns="0" tIns="0" rIns="0" bIns="0" rtlCol="0" anchor="ctr"/>
+          <a:lstStyle/>
+          <a:p>
+            <a:pPr algn="ctr" indent="0" marL="0">
+              <a:buNone/>
+            </a:pPr>
+            <a:r>
+              <a:rPr lang="en-US" sz="1300" b="1" dirty="0">
+                <a:solidFill>
+                  <a:srgbClr val="1B1F3B"/>
+                </a:solidFill>
+                <a:latin typeface="Arial" pitchFamily="34" charset="0"/>
+                <a:ea typeface="Arial" pitchFamily="34" charset="-122"/>
+                <a:cs typeface="Arial" pitchFamily="34" charset="-120"/>
+              </a:rPr>
+              <a:t>3</a:t>
+            </a:r>
+            <a:endParaRPr lang="en-US" sz="1300" dirty="0"/>
+          </a:p>
+        </p:txBody>
+      </p:sp>
+      <p:sp>
+        <p:nvSpPr>
+          <p:cNvPr id="15" name="Shape 13"/>
+          <p:cNvSpPr/>
+          <p:nvPr/>
+        </p:nvSpPr>
+        <p:spPr>
+          <a:xfrm>
+            <a:off x="3726180" y="5440680"/>
+            <a:ext cx="2089404" cy="0"/>
+          </a:xfrm>
+          <a:prstGeom prst="line">
+            <a:avLst/>
+          </a:prstGeom>
+          <a:noFill/>
+          <a:ln w="15875">
+            <a:solidFill>
+              <a:srgbClr val="B8B8C8"/>
+            </a:solidFill>
+            <a:prstDash val="solid"/>
+            <a:headEnd type="triangle"/>
+          </a:ln>
+        </p:spPr>
+      </p:sp>
+      <p:sp>
+        <p:nvSpPr>
+          <p:cNvPr id="16" name="Shape 14"/>
+          <p:cNvSpPr/>
+          <p:nvPr/>
+        </p:nvSpPr>
+        <p:spPr>
+          <a:xfrm>
+            <a:off x="3195828" y="5189220"/>
+            <a:ext cx="502920" cy="502920"/>
+          </a:xfrm>
+          <a:prstGeom prst="ellipse">
+            <a:avLst/>
+          </a:prstGeom>
+          <a:solidFill>
+            <a:srgbClr val="FFFFFF"/>
+          </a:solidFill>
+          <a:ln w="19050">
+            <a:solidFill>
+              <a:srgbClr val="00A88A"/>
+            </a:solidFill>
+            <a:prstDash val="solid"/>
+          </a:ln>
+        </p:spPr>
+      </p:sp>
+      <p:sp>
+        <p:nvSpPr>
+          <p:cNvPr id="17" name="Text 15"/>
+          <p:cNvSpPr/>
+          <p:nvPr/>
+        </p:nvSpPr>
+        <p:spPr>
+          <a:xfrm>
+            <a:off x="3195828" y="5189220"/>
+            <a:ext cx="502920" cy="502920"/>
+          </a:xfrm>
+          <a:prstGeom prst="rect">
+            <a:avLst/>
+          </a:prstGeom>
+          <a:noFill/>
+          <a:ln/>
+        </p:spPr>
+        <p:txBody>
+          <a:bodyPr wrap="square" lIns="0" tIns="0" rIns="0" bIns="0" rtlCol="0" anchor="ctr"/>
+          <a:lstStyle/>
+          <a:p>
+            <a:pPr algn="ctr" indent="0" marL="0">
+              <a:buNone/>
+            </a:pPr>
+            <a:r>
+              <a:rPr lang="en-US" sz="1300" b="1" dirty="0">
+                <a:solidFill>
+                  <a:srgbClr val="1B1F3B"/>
+                </a:solidFill>
+                <a:latin typeface="Arial" pitchFamily="34" charset="0"/>
+                <a:ea typeface="Arial" pitchFamily="34" charset="-122"/>
+                <a:cs typeface="Arial" pitchFamily="34" charset="-120"/>
+              </a:rPr>
+              <a:t>4</a:t>
+            </a:r>
+            <a:endParaRPr lang="en-US" sz="1300" dirty="0"/>
+          </a:p>
+        </p:txBody>
+      </p:sp>
+      <p:sp>
+        <p:nvSpPr>
+          <p:cNvPr id="18" name="Shape 16"/>
+          <p:cNvSpPr/>
+          <p:nvPr/>
+        </p:nvSpPr>
+        <p:spPr>
+          <a:xfrm>
+            <a:off x="1078992" y="5440680"/>
+            <a:ext cx="2089404" cy="0"/>
+          </a:xfrm>
+          <a:prstGeom prst="line">
+            <a:avLst/>
+          </a:prstGeom>
+          <a:noFill/>
+          <a:ln w="15875">
+            <a:solidFill>
+              <a:srgbClr val="B8B8C8"/>
+            </a:solidFill>
+            <a:prstDash val="solid"/>
+            <a:headEnd type="triangle"/>
+          </a:ln>
+        </p:spPr>
+      </p:sp>
+      <p:sp>
+        <p:nvSpPr>
+          <p:cNvPr id="19" name="Shape 17"/>
+          <p:cNvSpPr/>
+          <p:nvPr/>
+        </p:nvSpPr>
+        <p:spPr>
+          <a:xfrm>
+            <a:off x="548640" y="5189220"/>
+            <a:ext cx="502920" cy="502920"/>
+          </a:xfrm>
+          <a:prstGeom prst="ellipse">
+            <a:avLst/>
+          </a:prstGeom>
+          <a:solidFill>
+            <a:srgbClr val="00A88A"/>
+          </a:solidFill>
+          <a:ln w="19050">
+            <a:solidFill>
+              <a:srgbClr val="00A88A"/>
+            </a:solidFill>
+            <a:prstDash val="solid"/>
+          </a:ln>
+        </p:spPr>
+      </p:sp>
+      <p:sp>
+        <p:nvSpPr>
+          <p:cNvPr id="20" name="Text 18"/>
+          <p:cNvSpPr/>
+          <p:nvPr/>
+        </p:nvSpPr>
+        <p:spPr>
+          <a:xfrm>
+            <a:off x="548640" y="5189220"/>
+            <a:ext cx="502920" cy="502920"/>
+          </a:xfrm>
+          <a:prstGeom prst="rect">
+            <a:avLst/>
+          </a:prstGeom>
+          <a:noFill/>
+          <a:ln/>
+        </p:spPr>
+        <p:txBody>
+          <a:bodyPr wrap="square" lIns="0" tIns="0" rIns="0" bIns="0" rtlCol="0" anchor="ctr"/>
+          <a:lstStyle/>
+          <a:p>
+            <a:pPr algn="ctr" indent="0" marL="0">
+              <a:buNone/>
+            </a:pPr>
+            <a:r>
+              <a:rPr lang="en-US" sz="1300" b="1" dirty="0">
+                <a:solidFill>
+                  <a:srgbClr val="FFFFFF"/>
+                </a:solidFill>
+                <a:latin typeface="Arial" pitchFamily="34" charset="0"/>
+                <a:ea typeface="Arial" pitchFamily="34" charset="-122"/>
+                <a:cs typeface="Arial" pitchFamily="34" charset="-120"/>
+              </a:rPr>
+              <a:t>5</a:t>
+            </a:r>
+            <a:endParaRPr lang="en-US" sz="1300" dirty="0"/>
+          </a:p>
+        </p:txBody>
+      </p:sp>
+      <p:sp>
+        <p:nvSpPr>
+          <p:cNvPr id="21" name="Text 19"/>
+          <p:cNvSpPr/>
+          <p:nvPr/>
+        </p:nvSpPr>
+        <p:spPr>
+          <a:xfrm>
+            <a:off x="548640" y="6080760"/>
+            <a:ext cx="11091672" cy="274320"/>
+          </a:xfrm>
+          <a:prstGeom prst="rect">
+            <a:avLst/>
+          </a:prstGeom>
+          <a:noFill/>
+          <a:ln/>
+        </p:spPr>
+        <p:txBody>
+          <a:bodyPr wrap="square" lIns="0" tIns="0" rIns="0" bIns="0" rtlCol="0" anchor="ctr"/>
+          <a:lstStyle/>
+          <a:p>
+            <a:pPr rtl="1" algn="r" indent="0" marL="0">
+              <a:buNone/>
+            </a:pPr>
+            <a:r>
+              <a:rPr lang="en-US" sz="1000" i="1" dirty="0">
+                <a:solidFill>
+                  <a:srgbClr val="6B7280"/>
+                </a:solidFill>
+                <a:latin typeface="Calibri" pitchFamily="34" charset="0"/>
+                <a:ea typeface="Calibri" pitchFamily="34" charset="-122"/>
+                <a:cs typeface="Calibri" pitchFamily="34" charset="-120"/>
+              </a:rPr>
+              <a:t>איור: שלבים 1-5 בזרימה מ-1 עד 5 (ממשיכים לשלבים 6-10 בשקף הבא, כולל מסלול החזרה המלא ל-1).</a:t>
+            </a:r>
+            <a:endParaRPr lang="en-US" sz="1000" dirty="0"/>
+          </a:p>
+        </p:txBody>
+      </p:sp>
+      <p:sp>
+        <p:nvSpPr>
+          <p:cNvPr id="22" name="Text 20"/>
           <p:cNvSpPr/>
           <p:nvPr/>
         </p:nvSpPr>
@@ -5404,7 +6246,1011 @@
       </p:sp>
       <p:sp>
         <p:nvSpPr>
-          <p:cNvPr id="6" name="Text 4"/>
+          <p:cNvPr id="6" name="Shape 4"/>
+          <p:cNvSpPr/>
+          <p:nvPr/>
+        </p:nvSpPr>
+        <p:spPr>
+          <a:xfrm>
+            <a:off x="11183112" y="4617720"/>
+            <a:ext cx="457200" cy="457200"/>
+          </a:xfrm>
+          <a:prstGeom prst="ellipse">
+            <a:avLst/>
+          </a:prstGeom>
+          <a:solidFill>
+            <a:srgbClr val="FFFFFF"/>
+          </a:solidFill>
+          <a:ln w="19050">
+            <a:solidFill>
+              <a:srgbClr val="00A88A"/>
+            </a:solidFill>
+            <a:prstDash val="solid"/>
+          </a:ln>
+        </p:spPr>
+      </p:sp>
+      <p:sp>
+        <p:nvSpPr>
+          <p:cNvPr id="7" name="Text 5"/>
+          <p:cNvSpPr/>
+          <p:nvPr/>
+        </p:nvSpPr>
+        <p:spPr>
+          <a:xfrm>
+            <a:off x="11183112" y="4617720"/>
+            <a:ext cx="457200" cy="457200"/>
+          </a:xfrm>
+          <a:prstGeom prst="rect">
+            <a:avLst/>
+          </a:prstGeom>
+          <a:noFill/>
+          <a:ln/>
+        </p:spPr>
+        <p:txBody>
+          <a:bodyPr wrap="square" lIns="0" tIns="0" rIns="0" bIns="0" rtlCol="0" anchor="ctr"/>
+          <a:lstStyle/>
+          <a:p>
+            <a:pPr algn="ctr" indent="0" marL="0">
+              <a:buNone/>
+            </a:pPr>
+            <a:r>
+              <a:rPr lang="en-US" sz="1200" b="1" dirty="0">
+                <a:solidFill>
+                  <a:srgbClr val="1B1F3B"/>
+                </a:solidFill>
+                <a:latin typeface="Arial" pitchFamily="34" charset="0"/>
+                <a:ea typeface="Arial" pitchFamily="34" charset="-122"/>
+                <a:cs typeface="Arial" pitchFamily="34" charset="-120"/>
+              </a:rPr>
+              <a:t>1</a:t>
+            </a:r>
+            <a:endParaRPr lang="en-US" sz="1200" dirty="0"/>
+          </a:p>
+        </p:txBody>
+      </p:sp>
+      <p:sp>
+        <p:nvSpPr>
+          <p:cNvPr id="8" name="Shape 6"/>
+          <p:cNvSpPr/>
+          <p:nvPr/>
+        </p:nvSpPr>
+        <p:spPr>
+          <a:xfrm>
+            <a:off x="10486136" y="4846320"/>
+            <a:ext cx="669544" cy="0"/>
+          </a:xfrm>
+          <a:prstGeom prst="line">
+            <a:avLst/>
+          </a:prstGeom>
+          <a:noFill/>
+          <a:ln w="15875">
+            <a:solidFill>
+              <a:srgbClr val="B8B8C8"/>
+            </a:solidFill>
+            <a:prstDash val="solid"/>
+            <a:headEnd type="triangle"/>
+          </a:ln>
+        </p:spPr>
+      </p:sp>
+      <p:sp>
+        <p:nvSpPr>
+          <p:cNvPr id="9" name="Shape 7"/>
+          <p:cNvSpPr/>
+          <p:nvPr/>
+        </p:nvSpPr>
+        <p:spPr>
+          <a:xfrm>
+            <a:off x="10001504" y="4617720"/>
+            <a:ext cx="457200" cy="457200"/>
+          </a:xfrm>
+          <a:prstGeom prst="ellipse">
+            <a:avLst/>
+          </a:prstGeom>
+          <a:solidFill>
+            <a:srgbClr val="FFFFFF"/>
+          </a:solidFill>
+          <a:ln w="19050">
+            <a:solidFill>
+              <a:srgbClr val="00A88A"/>
+            </a:solidFill>
+            <a:prstDash val="solid"/>
+          </a:ln>
+        </p:spPr>
+      </p:sp>
+      <p:sp>
+        <p:nvSpPr>
+          <p:cNvPr id="10" name="Text 8"/>
+          <p:cNvSpPr/>
+          <p:nvPr/>
+        </p:nvSpPr>
+        <p:spPr>
+          <a:xfrm>
+            <a:off x="10001504" y="4617720"/>
+            <a:ext cx="457200" cy="457200"/>
+          </a:xfrm>
+          <a:prstGeom prst="rect">
+            <a:avLst/>
+          </a:prstGeom>
+          <a:noFill/>
+          <a:ln/>
+        </p:spPr>
+        <p:txBody>
+          <a:bodyPr wrap="square" lIns="0" tIns="0" rIns="0" bIns="0" rtlCol="0" anchor="ctr"/>
+          <a:lstStyle/>
+          <a:p>
+            <a:pPr algn="ctr" indent="0" marL="0">
+              <a:buNone/>
+            </a:pPr>
+            <a:r>
+              <a:rPr lang="en-US" sz="1200" b="1" dirty="0">
+                <a:solidFill>
+                  <a:srgbClr val="1B1F3B"/>
+                </a:solidFill>
+                <a:latin typeface="Arial" pitchFamily="34" charset="0"/>
+                <a:ea typeface="Arial" pitchFamily="34" charset="-122"/>
+                <a:cs typeface="Arial" pitchFamily="34" charset="-120"/>
+              </a:rPr>
+              <a:t>2</a:t>
+            </a:r>
+            <a:endParaRPr lang="en-US" sz="1200" dirty="0"/>
+          </a:p>
+        </p:txBody>
+      </p:sp>
+      <p:sp>
+        <p:nvSpPr>
+          <p:cNvPr id="11" name="Shape 9"/>
+          <p:cNvSpPr/>
+          <p:nvPr/>
+        </p:nvSpPr>
+        <p:spPr>
+          <a:xfrm>
+            <a:off x="9304528" y="4846320"/>
+            <a:ext cx="669544" cy="0"/>
+          </a:xfrm>
+          <a:prstGeom prst="line">
+            <a:avLst/>
+          </a:prstGeom>
+          <a:noFill/>
+          <a:ln w="15875">
+            <a:solidFill>
+              <a:srgbClr val="B8B8C8"/>
+            </a:solidFill>
+            <a:prstDash val="solid"/>
+            <a:headEnd type="triangle"/>
+          </a:ln>
+        </p:spPr>
+      </p:sp>
+      <p:sp>
+        <p:nvSpPr>
+          <p:cNvPr id="12" name="Shape 10"/>
+          <p:cNvSpPr/>
+          <p:nvPr/>
+        </p:nvSpPr>
+        <p:spPr>
+          <a:xfrm>
+            <a:off x="8819896" y="4617720"/>
+            <a:ext cx="457200" cy="457200"/>
+          </a:xfrm>
+          <a:prstGeom prst="ellipse">
+            <a:avLst/>
+          </a:prstGeom>
+          <a:solidFill>
+            <a:srgbClr val="FFFFFF"/>
+          </a:solidFill>
+          <a:ln w="19050">
+            <a:solidFill>
+              <a:srgbClr val="00A88A"/>
+            </a:solidFill>
+            <a:prstDash val="solid"/>
+          </a:ln>
+        </p:spPr>
+      </p:sp>
+      <p:sp>
+        <p:nvSpPr>
+          <p:cNvPr id="13" name="Text 11"/>
+          <p:cNvSpPr/>
+          <p:nvPr/>
+        </p:nvSpPr>
+        <p:spPr>
+          <a:xfrm>
+            <a:off x="8819896" y="4617720"/>
+            <a:ext cx="457200" cy="457200"/>
+          </a:xfrm>
+          <a:prstGeom prst="rect">
+            <a:avLst/>
+          </a:prstGeom>
+          <a:noFill/>
+          <a:ln/>
+        </p:spPr>
+        <p:txBody>
+          <a:bodyPr wrap="square" lIns="0" tIns="0" rIns="0" bIns="0" rtlCol="0" anchor="ctr"/>
+          <a:lstStyle/>
+          <a:p>
+            <a:pPr algn="ctr" indent="0" marL="0">
+              <a:buNone/>
+            </a:pPr>
+            <a:r>
+              <a:rPr lang="en-US" sz="1200" b="1" dirty="0">
+                <a:solidFill>
+                  <a:srgbClr val="1B1F3B"/>
+                </a:solidFill>
+                <a:latin typeface="Arial" pitchFamily="34" charset="0"/>
+                <a:ea typeface="Arial" pitchFamily="34" charset="-122"/>
+                <a:cs typeface="Arial" pitchFamily="34" charset="-120"/>
+              </a:rPr>
+              <a:t>3</a:t>
+            </a:r>
+            <a:endParaRPr lang="en-US" sz="1200" dirty="0"/>
+          </a:p>
+        </p:txBody>
+      </p:sp>
+      <p:sp>
+        <p:nvSpPr>
+          <p:cNvPr id="14" name="Shape 12"/>
+          <p:cNvSpPr/>
+          <p:nvPr/>
+        </p:nvSpPr>
+        <p:spPr>
+          <a:xfrm>
+            <a:off x="8122920" y="4846320"/>
+            <a:ext cx="669544" cy="0"/>
+          </a:xfrm>
+          <a:prstGeom prst="line">
+            <a:avLst/>
+          </a:prstGeom>
+          <a:noFill/>
+          <a:ln w="15875">
+            <a:solidFill>
+              <a:srgbClr val="B8B8C8"/>
+            </a:solidFill>
+            <a:prstDash val="solid"/>
+            <a:headEnd type="triangle"/>
+          </a:ln>
+        </p:spPr>
+      </p:sp>
+      <p:sp>
+        <p:nvSpPr>
+          <p:cNvPr id="15" name="Shape 13"/>
+          <p:cNvSpPr/>
+          <p:nvPr/>
+        </p:nvSpPr>
+        <p:spPr>
+          <a:xfrm>
+            <a:off x="7638288" y="4617720"/>
+            <a:ext cx="457200" cy="457200"/>
+          </a:xfrm>
+          <a:prstGeom prst="ellipse">
+            <a:avLst/>
+          </a:prstGeom>
+          <a:solidFill>
+            <a:srgbClr val="FFFFFF"/>
+          </a:solidFill>
+          <a:ln w="19050">
+            <a:solidFill>
+              <a:srgbClr val="00A88A"/>
+            </a:solidFill>
+            <a:prstDash val="solid"/>
+          </a:ln>
+        </p:spPr>
+      </p:sp>
+      <p:sp>
+        <p:nvSpPr>
+          <p:cNvPr id="16" name="Text 14"/>
+          <p:cNvSpPr/>
+          <p:nvPr/>
+        </p:nvSpPr>
+        <p:spPr>
+          <a:xfrm>
+            <a:off x="7638288" y="4617720"/>
+            <a:ext cx="457200" cy="457200"/>
+          </a:xfrm>
+          <a:prstGeom prst="rect">
+            <a:avLst/>
+          </a:prstGeom>
+          <a:noFill/>
+          <a:ln/>
+        </p:spPr>
+        <p:txBody>
+          <a:bodyPr wrap="square" lIns="0" tIns="0" rIns="0" bIns="0" rtlCol="0" anchor="ctr"/>
+          <a:lstStyle/>
+          <a:p>
+            <a:pPr algn="ctr" indent="0" marL="0">
+              <a:buNone/>
+            </a:pPr>
+            <a:r>
+              <a:rPr lang="en-US" sz="1200" b="1" dirty="0">
+                <a:solidFill>
+                  <a:srgbClr val="1B1F3B"/>
+                </a:solidFill>
+                <a:latin typeface="Arial" pitchFamily="34" charset="0"/>
+                <a:ea typeface="Arial" pitchFamily="34" charset="-122"/>
+                <a:cs typeface="Arial" pitchFamily="34" charset="-120"/>
+              </a:rPr>
+              <a:t>4</a:t>
+            </a:r>
+            <a:endParaRPr lang="en-US" sz="1200" dirty="0"/>
+          </a:p>
+        </p:txBody>
+      </p:sp>
+      <p:sp>
+        <p:nvSpPr>
+          <p:cNvPr id="17" name="Shape 15"/>
+          <p:cNvSpPr/>
+          <p:nvPr/>
+        </p:nvSpPr>
+        <p:spPr>
+          <a:xfrm>
+            <a:off x="6941312" y="4846320"/>
+            <a:ext cx="669544" cy="0"/>
+          </a:xfrm>
+          <a:prstGeom prst="line">
+            <a:avLst/>
+          </a:prstGeom>
+          <a:noFill/>
+          <a:ln w="15875">
+            <a:solidFill>
+              <a:srgbClr val="B8B8C8"/>
+            </a:solidFill>
+            <a:prstDash val="solid"/>
+            <a:headEnd type="triangle"/>
+          </a:ln>
+        </p:spPr>
+      </p:sp>
+      <p:sp>
+        <p:nvSpPr>
+          <p:cNvPr id="18" name="Shape 16"/>
+          <p:cNvSpPr/>
+          <p:nvPr/>
+        </p:nvSpPr>
+        <p:spPr>
+          <a:xfrm>
+            <a:off x="6456680" y="4617720"/>
+            <a:ext cx="457200" cy="457200"/>
+          </a:xfrm>
+          <a:prstGeom prst="ellipse">
+            <a:avLst/>
+          </a:prstGeom>
+          <a:solidFill>
+            <a:srgbClr val="FFFFFF"/>
+          </a:solidFill>
+          <a:ln w="19050">
+            <a:solidFill>
+              <a:srgbClr val="00A88A"/>
+            </a:solidFill>
+            <a:prstDash val="solid"/>
+          </a:ln>
+        </p:spPr>
+      </p:sp>
+      <p:sp>
+        <p:nvSpPr>
+          <p:cNvPr id="19" name="Text 17"/>
+          <p:cNvSpPr/>
+          <p:nvPr/>
+        </p:nvSpPr>
+        <p:spPr>
+          <a:xfrm>
+            <a:off x="6456680" y="4617720"/>
+            <a:ext cx="457200" cy="457200"/>
+          </a:xfrm>
+          <a:prstGeom prst="rect">
+            <a:avLst/>
+          </a:prstGeom>
+          <a:noFill/>
+          <a:ln/>
+        </p:spPr>
+        <p:txBody>
+          <a:bodyPr wrap="square" lIns="0" tIns="0" rIns="0" bIns="0" rtlCol="0" anchor="ctr"/>
+          <a:lstStyle/>
+          <a:p>
+            <a:pPr algn="ctr" indent="0" marL="0">
+              <a:buNone/>
+            </a:pPr>
+            <a:r>
+              <a:rPr lang="en-US" sz="1200" b="1" dirty="0">
+                <a:solidFill>
+                  <a:srgbClr val="1B1F3B"/>
+                </a:solidFill>
+                <a:latin typeface="Arial" pitchFamily="34" charset="0"/>
+                <a:ea typeface="Arial" pitchFamily="34" charset="-122"/>
+                <a:cs typeface="Arial" pitchFamily="34" charset="-120"/>
+              </a:rPr>
+              <a:t>5</a:t>
+            </a:r>
+            <a:endParaRPr lang="en-US" sz="1200" dirty="0"/>
+          </a:p>
+        </p:txBody>
+      </p:sp>
+      <p:sp>
+        <p:nvSpPr>
+          <p:cNvPr id="20" name="Shape 18"/>
+          <p:cNvSpPr/>
+          <p:nvPr/>
+        </p:nvSpPr>
+        <p:spPr>
+          <a:xfrm>
+            <a:off x="5759704" y="4846320"/>
+            <a:ext cx="669544" cy="0"/>
+          </a:xfrm>
+          <a:prstGeom prst="line">
+            <a:avLst/>
+          </a:prstGeom>
+          <a:noFill/>
+          <a:ln w="15875">
+            <a:solidFill>
+              <a:srgbClr val="B8B8C8"/>
+            </a:solidFill>
+            <a:prstDash val="solid"/>
+            <a:headEnd type="triangle"/>
+          </a:ln>
+        </p:spPr>
+      </p:sp>
+      <p:sp>
+        <p:nvSpPr>
+          <p:cNvPr id="21" name="Shape 19"/>
+          <p:cNvSpPr/>
+          <p:nvPr/>
+        </p:nvSpPr>
+        <p:spPr>
+          <a:xfrm>
+            <a:off x="5275072" y="4617720"/>
+            <a:ext cx="457200" cy="457200"/>
+          </a:xfrm>
+          <a:prstGeom prst="ellipse">
+            <a:avLst/>
+          </a:prstGeom>
+          <a:solidFill>
+            <a:srgbClr val="FFFFFF"/>
+          </a:solidFill>
+          <a:ln w="19050">
+            <a:solidFill>
+              <a:srgbClr val="00A88A"/>
+            </a:solidFill>
+            <a:prstDash val="solid"/>
+          </a:ln>
+        </p:spPr>
+      </p:sp>
+      <p:sp>
+        <p:nvSpPr>
+          <p:cNvPr id="22" name="Text 20"/>
+          <p:cNvSpPr/>
+          <p:nvPr/>
+        </p:nvSpPr>
+        <p:spPr>
+          <a:xfrm>
+            <a:off x="5275072" y="4617720"/>
+            <a:ext cx="457200" cy="457200"/>
+          </a:xfrm>
+          <a:prstGeom prst="rect">
+            <a:avLst/>
+          </a:prstGeom>
+          <a:noFill/>
+          <a:ln/>
+        </p:spPr>
+        <p:txBody>
+          <a:bodyPr wrap="square" lIns="0" tIns="0" rIns="0" bIns="0" rtlCol="0" anchor="ctr"/>
+          <a:lstStyle/>
+          <a:p>
+            <a:pPr algn="ctr" indent="0" marL="0">
+              <a:buNone/>
+            </a:pPr>
+            <a:r>
+              <a:rPr lang="en-US" sz="1200" b="1" dirty="0">
+                <a:solidFill>
+                  <a:srgbClr val="1B1F3B"/>
+                </a:solidFill>
+                <a:latin typeface="Arial" pitchFamily="34" charset="0"/>
+                <a:ea typeface="Arial" pitchFamily="34" charset="-122"/>
+                <a:cs typeface="Arial" pitchFamily="34" charset="-120"/>
+              </a:rPr>
+              <a:t>6</a:t>
+            </a:r>
+            <a:endParaRPr lang="en-US" sz="1200" dirty="0"/>
+          </a:p>
+        </p:txBody>
+      </p:sp>
+      <p:sp>
+        <p:nvSpPr>
+          <p:cNvPr id="23" name="Shape 21"/>
+          <p:cNvSpPr/>
+          <p:nvPr/>
+        </p:nvSpPr>
+        <p:spPr>
+          <a:xfrm>
+            <a:off x="4578096" y="4846320"/>
+            <a:ext cx="669544" cy="0"/>
+          </a:xfrm>
+          <a:prstGeom prst="line">
+            <a:avLst/>
+          </a:prstGeom>
+          <a:noFill/>
+          <a:ln w="15875">
+            <a:solidFill>
+              <a:srgbClr val="B8B8C8"/>
+            </a:solidFill>
+            <a:prstDash val="solid"/>
+            <a:headEnd type="triangle"/>
+          </a:ln>
+        </p:spPr>
+      </p:sp>
+      <p:sp>
+        <p:nvSpPr>
+          <p:cNvPr id="24" name="Shape 22"/>
+          <p:cNvSpPr/>
+          <p:nvPr/>
+        </p:nvSpPr>
+        <p:spPr>
+          <a:xfrm>
+            <a:off x="4093464" y="4617720"/>
+            <a:ext cx="457200" cy="457200"/>
+          </a:xfrm>
+          <a:prstGeom prst="ellipse">
+            <a:avLst/>
+          </a:prstGeom>
+          <a:solidFill>
+            <a:srgbClr val="FFFFFF"/>
+          </a:solidFill>
+          <a:ln w="19050">
+            <a:solidFill>
+              <a:srgbClr val="00A88A"/>
+            </a:solidFill>
+            <a:prstDash val="solid"/>
+          </a:ln>
+        </p:spPr>
+      </p:sp>
+      <p:sp>
+        <p:nvSpPr>
+          <p:cNvPr id="25" name="Text 23"/>
+          <p:cNvSpPr/>
+          <p:nvPr/>
+        </p:nvSpPr>
+        <p:spPr>
+          <a:xfrm>
+            <a:off x="4093464" y="4617720"/>
+            <a:ext cx="457200" cy="457200"/>
+          </a:xfrm>
+          <a:prstGeom prst="rect">
+            <a:avLst/>
+          </a:prstGeom>
+          <a:noFill/>
+          <a:ln/>
+        </p:spPr>
+        <p:txBody>
+          <a:bodyPr wrap="square" lIns="0" tIns="0" rIns="0" bIns="0" rtlCol="0" anchor="ctr"/>
+          <a:lstStyle/>
+          <a:p>
+            <a:pPr algn="ctr" indent="0" marL="0">
+              <a:buNone/>
+            </a:pPr>
+            <a:r>
+              <a:rPr lang="en-US" sz="1200" b="1" dirty="0">
+                <a:solidFill>
+                  <a:srgbClr val="1B1F3B"/>
+                </a:solidFill>
+                <a:latin typeface="Arial" pitchFamily="34" charset="0"/>
+                <a:ea typeface="Arial" pitchFamily="34" charset="-122"/>
+                <a:cs typeface="Arial" pitchFamily="34" charset="-120"/>
+              </a:rPr>
+              <a:t>7</a:t>
+            </a:r>
+            <a:endParaRPr lang="en-US" sz="1200" dirty="0"/>
+          </a:p>
+        </p:txBody>
+      </p:sp>
+      <p:sp>
+        <p:nvSpPr>
+          <p:cNvPr id="26" name="Shape 24"/>
+          <p:cNvSpPr/>
+          <p:nvPr/>
+        </p:nvSpPr>
+        <p:spPr>
+          <a:xfrm>
+            <a:off x="3396488" y="4846320"/>
+            <a:ext cx="669544" cy="0"/>
+          </a:xfrm>
+          <a:prstGeom prst="line">
+            <a:avLst/>
+          </a:prstGeom>
+          <a:noFill/>
+          <a:ln w="15875">
+            <a:solidFill>
+              <a:srgbClr val="B8B8C8"/>
+            </a:solidFill>
+            <a:prstDash val="solid"/>
+            <a:headEnd type="triangle"/>
+          </a:ln>
+        </p:spPr>
+      </p:sp>
+      <p:sp>
+        <p:nvSpPr>
+          <p:cNvPr id="27" name="Shape 25"/>
+          <p:cNvSpPr/>
+          <p:nvPr/>
+        </p:nvSpPr>
+        <p:spPr>
+          <a:xfrm>
+            <a:off x="2911856" y="4617720"/>
+            <a:ext cx="457200" cy="457200"/>
+          </a:xfrm>
+          <a:prstGeom prst="ellipse">
+            <a:avLst/>
+          </a:prstGeom>
+          <a:solidFill>
+            <a:srgbClr val="FFFFFF"/>
+          </a:solidFill>
+          <a:ln w="19050">
+            <a:solidFill>
+              <a:srgbClr val="00A88A"/>
+            </a:solidFill>
+            <a:prstDash val="solid"/>
+          </a:ln>
+        </p:spPr>
+      </p:sp>
+      <p:sp>
+        <p:nvSpPr>
+          <p:cNvPr id="28" name="Text 26"/>
+          <p:cNvSpPr/>
+          <p:nvPr/>
+        </p:nvSpPr>
+        <p:spPr>
+          <a:xfrm>
+            <a:off x="2911856" y="4617720"/>
+            <a:ext cx="457200" cy="457200"/>
+          </a:xfrm>
+          <a:prstGeom prst="rect">
+            <a:avLst/>
+          </a:prstGeom>
+          <a:noFill/>
+          <a:ln/>
+        </p:spPr>
+        <p:txBody>
+          <a:bodyPr wrap="square" lIns="0" tIns="0" rIns="0" bIns="0" rtlCol="0" anchor="ctr"/>
+          <a:lstStyle/>
+          <a:p>
+            <a:pPr algn="ctr" indent="0" marL="0">
+              <a:buNone/>
+            </a:pPr>
+            <a:r>
+              <a:rPr lang="en-US" sz="1200" b="1" dirty="0">
+                <a:solidFill>
+                  <a:srgbClr val="1B1F3B"/>
+                </a:solidFill>
+                <a:latin typeface="Arial" pitchFamily="34" charset="0"/>
+                <a:ea typeface="Arial" pitchFamily="34" charset="-122"/>
+                <a:cs typeface="Arial" pitchFamily="34" charset="-120"/>
+              </a:rPr>
+              <a:t>8</a:t>
+            </a:r>
+            <a:endParaRPr lang="en-US" sz="1200" dirty="0"/>
+          </a:p>
+        </p:txBody>
+      </p:sp>
+      <p:sp>
+        <p:nvSpPr>
+          <p:cNvPr id="29" name="Shape 27"/>
+          <p:cNvSpPr/>
+          <p:nvPr/>
+        </p:nvSpPr>
+        <p:spPr>
+          <a:xfrm>
+            <a:off x="2214880" y="4846320"/>
+            <a:ext cx="669544" cy="0"/>
+          </a:xfrm>
+          <a:prstGeom prst="line">
+            <a:avLst/>
+          </a:prstGeom>
+          <a:noFill/>
+          <a:ln w="15875">
+            <a:solidFill>
+              <a:srgbClr val="B8B8C8"/>
+            </a:solidFill>
+            <a:prstDash val="solid"/>
+            <a:headEnd type="triangle"/>
+          </a:ln>
+        </p:spPr>
+      </p:sp>
+      <p:sp>
+        <p:nvSpPr>
+          <p:cNvPr id="30" name="Shape 28"/>
+          <p:cNvSpPr/>
+          <p:nvPr/>
+        </p:nvSpPr>
+        <p:spPr>
+          <a:xfrm>
+            <a:off x="1730248" y="4617720"/>
+            <a:ext cx="457200" cy="457200"/>
+          </a:xfrm>
+          <a:prstGeom prst="ellipse">
+            <a:avLst/>
+          </a:prstGeom>
+          <a:solidFill>
+            <a:srgbClr val="FFFFFF"/>
+          </a:solidFill>
+          <a:ln w="19050">
+            <a:solidFill>
+              <a:srgbClr val="00A88A"/>
+            </a:solidFill>
+            <a:prstDash val="solid"/>
+          </a:ln>
+        </p:spPr>
+      </p:sp>
+      <p:sp>
+        <p:nvSpPr>
+          <p:cNvPr id="31" name="Text 29"/>
+          <p:cNvSpPr/>
+          <p:nvPr/>
+        </p:nvSpPr>
+        <p:spPr>
+          <a:xfrm>
+            <a:off x="1730248" y="4617720"/>
+            <a:ext cx="457200" cy="457200"/>
+          </a:xfrm>
+          <a:prstGeom prst="rect">
+            <a:avLst/>
+          </a:prstGeom>
+          <a:noFill/>
+          <a:ln/>
+        </p:spPr>
+        <p:txBody>
+          <a:bodyPr wrap="square" lIns="0" tIns="0" rIns="0" bIns="0" rtlCol="0" anchor="ctr"/>
+          <a:lstStyle/>
+          <a:p>
+            <a:pPr algn="ctr" indent="0" marL="0">
+              <a:buNone/>
+            </a:pPr>
+            <a:r>
+              <a:rPr lang="en-US" sz="1200" b="1" dirty="0">
+                <a:solidFill>
+                  <a:srgbClr val="1B1F3B"/>
+                </a:solidFill>
+                <a:latin typeface="Arial" pitchFamily="34" charset="0"/>
+                <a:ea typeface="Arial" pitchFamily="34" charset="-122"/>
+                <a:cs typeface="Arial" pitchFamily="34" charset="-120"/>
+              </a:rPr>
+              <a:t>9</a:t>
+            </a:r>
+            <a:endParaRPr lang="en-US" sz="1200" dirty="0"/>
+          </a:p>
+        </p:txBody>
+      </p:sp>
+      <p:sp>
+        <p:nvSpPr>
+          <p:cNvPr id="32" name="Shape 30"/>
+          <p:cNvSpPr/>
+          <p:nvPr/>
+        </p:nvSpPr>
+        <p:spPr>
+          <a:xfrm>
+            <a:off x="1033272" y="4846320"/>
+            <a:ext cx="669544" cy="0"/>
+          </a:xfrm>
+          <a:prstGeom prst="line">
+            <a:avLst/>
+          </a:prstGeom>
+          <a:noFill/>
+          <a:ln w="15875">
+            <a:solidFill>
+              <a:srgbClr val="B8B8C8"/>
+            </a:solidFill>
+            <a:prstDash val="solid"/>
+            <a:headEnd type="triangle"/>
+          </a:ln>
+        </p:spPr>
+      </p:sp>
+      <p:sp>
+        <p:nvSpPr>
+          <p:cNvPr id="33" name="Shape 31"/>
+          <p:cNvSpPr/>
+          <p:nvPr/>
+        </p:nvSpPr>
+        <p:spPr>
+          <a:xfrm>
+            <a:off x="548640" y="4617720"/>
+            <a:ext cx="457200" cy="457200"/>
+          </a:xfrm>
+          <a:prstGeom prst="ellipse">
+            <a:avLst/>
+          </a:prstGeom>
+          <a:solidFill>
+            <a:srgbClr val="00A88A"/>
+          </a:solidFill>
+          <a:ln w="19050">
+            <a:solidFill>
+              <a:srgbClr val="00A88A"/>
+            </a:solidFill>
+            <a:prstDash val="solid"/>
+          </a:ln>
+        </p:spPr>
+      </p:sp>
+      <p:sp>
+        <p:nvSpPr>
+          <p:cNvPr id="34" name="Text 32"/>
+          <p:cNvSpPr/>
+          <p:nvPr/>
+        </p:nvSpPr>
+        <p:spPr>
+          <a:xfrm>
+            <a:off x="548640" y="4617720"/>
+            <a:ext cx="457200" cy="457200"/>
+          </a:xfrm>
+          <a:prstGeom prst="rect">
+            <a:avLst/>
+          </a:prstGeom>
+          <a:noFill/>
+          <a:ln/>
+        </p:spPr>
+        <p:txBody>
+          <a:bodyPr wrap="square" lIns="0" tIns="0" rIns="0" bIns="0" rtlCol="0" anchor="ctr"/>
+          <a:lstStyle/>
+          <a:p>
+            <a:pPr algn="ctr" indent="0" marL="0">
+              <a:buNone/>
+            </a:pPr>
+            <a:r>
+              <a:rPr lang="en-US" sz="1200" b="1" dirty="0">
+                <a:solidFill>
+                  <a:srgbClr val="FFFFFF"/>
+                </a:solidFill>
+                <a:latin typeface="Arial" pitchFamily="34" charset="0"/>
+                <a:ea typeface="Arial" pitchFamily="34" charset="-122"/>
+                <a:cs typeface="Arial" pitchFamily="34" charset="-120"/>
+              </a:rPr>
+              <a:t>10</a:t>
+            </a:r>
+            <a:endParaRPr lang="en-US" sz="1200" dirty="0"/>
+          </a:p>
+        </p:txBody>
+      </p:sp>
+      <p:sp>
+        <p:nvSpPr>
+          <p:cNvPr id="35" name="Shape 33"/>
+          <p:cNvSpPr/>
+          <p:nvPr/>
+        </p:nvSpPr>
+        <p:spPr>
+          <a:xfrm>
+            <a:off x="777240" y="5074920"/>
+            <a:ext cx="0" cy="201168"/>
+          </a:xfrm>
+          <a:prstGeom prst="line">
+            <a:avLst/>
+          </a:prstGeom>
+          <a:noFill/>
+          <a:ln w="15875">
+            <a:solidFill>
+              <a:srgbClr val="00A88A"/>
+            </a:solidFill>
+            <a:prstDash val="dash"/>
+          </a:ln>
+        </p:spPr>
+      </p:sp>
+      <p:sp>
+        <p:nvSpPr>
+          <p:cNvPr id="36" name="Shape 34"/>
+          <p:cNvSpPr/>
+          <p:nvPr/>
+        </p:nvSpPr>
+        <p:spPr>
+          <a:xfrm>
+            <a:off x="11411712" y="5276088"/>
+            <a:ext cx="-10634472" cy="0"/>
+          </a:xfrm>
+          <a:prstGeom prst="line">
+            <a:avLst/>
+          </a:prstGeom>
+          <a:noFill/>
+          <a:ln w="15875">
+            <a:solidFill>
+              <a:srgbClr val="00A88A"/>
+            </a:solidFill>
+            <a:prstDash val="dash"/>
+          </a:ln>
+        </p:spPr>
+      </p:sp>
+      <p:sp>
+        <p:nvSpPr>
+          <p:cNvPr id="37" name="Shape 35"/>
+          <p:cNvSpPr/>
+          <p:nvPr/>
+        </p:nvSpPr>
+        <p:spPr>
+          <a:xfrm>
+            <a:off x="11411712" y="5074920"/>
+            <a:ext cx="0" cy="201168"/>
+          </a:xfrm>
+          <a:prstGeom prst="line">
+            <a:avLst/>
+          </a:prstGeom>
+          <a:noFill/>
+          <a:ln w="15875">
+            <a:solidFill>
+              <a:srgbClr val="00A88A"/>
+            </a:solidFill>
+            <a:prstDash val="dash"/>
+            <a:headEnd type="triangle"/>
+          </a:ln>
+        </p:spPr>
+      </p:sp>
+      <p:sp>
+        <p:nvSpPr>
+          <p:cNvPr id="38" name="Text 36"/>
+          <p:cNvSpPr/>
+          <p:nvPr/>
+        </p:nvSpPr>
+        <p:spPr>
+          <a:xfrm>
+            <a:off x="9948672" y="5257800"/>
+            <a:ext cx="1371600" cy="219456"/>
+          </a:xfrm>
+          <a:prstGeom prst="rect">
+            <a:avLst/>
+          </a:prstGeom>
+          <a:noFill/>
+          <a:ln/>
+        </p:spPr>
+        <p:txBody>
+          <a:bodyPr wrap="square" lIns="0" tIns="0" rIns="0" bIns="0" rtlCol="0" anchor="ctr"/>
+          <a:lstStyle/>
+          <a:p>
+            <a:pPr rtl="1" algn="ctr" indent="0" marL="0">
+              <a:buNone/>
+            </a:pPr>
+            <a:r>
+              <a:rPr lang="en-US" sz="900" i="1" dirty="0">
+                <a:solidFill>
+                  <a:srgbClr val="00A88A"/>
+                </a:solidFill>
+                <a:latin typeface="Calibri" pitchFamily="34" charset="0"/>
+                <a:ea typeface="Calibri" pitchFamily="34" charset="-122"/>
+                <a:cs typeface="Calibri" pitchFamily="34" charset="-120"/>
+              </a:rPr>
+              <a:t>חוזרים לשלב 1</a:t>
+            </a:r>
+            <a:endParaRPr lang="en-US" sz="900" dirty="0"/>
+          </a:p>
+        </p:txBody>
+      </p:sp>
+      <p:sp>
+        <p:nvSpPr>
+          <p:cNvPr id="39" name="Text 37"/>
+          <p:cNvSpPr/>
+          <p:nvPr/>
+        </p:nvSpPr>
+        <p:spPr>
+          <a:xfrm>
+            <a:off x="548640" y="6080760"/>
+            <a:ext cx="11091672" cy="274320"/>
+          </a:xfrm>
+          <a:prstGeom prst="rect">
+            <a:avLst/>
+          </a:prstGeom>
+          <a:noFill/>
+          <a:ln/>
+        </p:spPr>
+        <p:txBody>
+          <a:bodyPr wrap="square" lIns="0" tIns="0" rIns="0" bIns="0" rtlCol="0" anchor="ctr"/>
+          <a:lstStyle/>
+          <a:p>
+            <a:pPr rtl="1" algn="r" indent="0" marL="0">
+              <a:buNone/>
+            </a:pPr>
+            <a:r>
+              <a:rPr lang="en-US" sz="1000" i="1" dirty="0">
+                <a:solidFill>
+                  <a:srgbClr val="6B7280"/>
+                </a:solidFill>
+                <a:latin typeface="Calibri" pitchFamily="34" charset="0"/>
+                <a:ea typeface="Calibri" pitchFamily="34" charset="-122"/>
+                <a:cs typeface="Calibri" pitchFamily="34" charset="-120"/>
+              </a:rPr>
+              <a:t>איור: עשרת שלבי ה-Workflow בזרימה מ-1 עד 10, עם מסלול חזרה מודגש (מקווקו) מ-10 בחזרה ל-1 — ממחיש שזה תהליך מעגלי, לא רצף חד-פעמי.</a:t>
+            </a:r>
+            <a:endParaRPr lang="en-US" sz="1000" dirty="0"/>
+          </a:p>
+        </p:txBody>
+      </p:sp>
+      <p:sp>
+        <p:nvSpPr>
+          <p:cNvPr id="40" name="Text 38"/>
           <p:cNvSpPr/>
           <p:nvPr/>
         </p:nvSpPr>
@@ -6349,20 +8195,22 @@
         </p:nvSpPr>
         <p:spPr>
           <a:xfrm>
-            <a:off x="548640" y="4846320"/>
-            <a:ext cx="11091672" cy="1143000"/>
-          </a:xfrm>
-          <a:prstGeom prst="rect">
-            <a:avLst/>
+            <a:off x="6505956" y="5052060"/>
+            <a:ext cx="5134356" cy="777240"/>
+          </a:xfrm>
+          <a:prstGeom prst="roundRect">
+            <a:avLst>
+              <a:gd name="adj" fmla="val 7059"/>
+            </a:avLst>
           </a:prstGeom>
           <a:solidFill>
             <a:srgbClr val="F6F6F8"/>
           </a:solidFill>
-          <a:ln w="12700">
+          <a:ln w="15875">
             <a:solidFill>
               <a:srgbClr val="B8B8C8"/>
             </a:solidFill>
-            <a:prstDash val="dash"/>
+            <a:prstDash val="solid"/>
           </a:ln>
         </p:spPr>
       </p:sp>
@@ -6374,24 +8222,175 @@
         </p:nvSpPr>
         <p:spPr>
           <a:xfrm>
-            <a:off x="548640" y="4846320"/>
-            <a:ext cx="11091672" cy="1143000"/>
-          </a:xfrm>
-          <a:prstGeom prst="rect">
-            <a:avLst/>
-          </a:prstGeom>
-          <a:noFill/>
-          <a:ln/>
-        </p:spPr>
-        <p:txBody>
-          <a:bodyPr wrap="square" lIns="101600" tIns="101600" rIns="101600" bIns="101600" rtlCol="0" anchor="ctr"/>
+            <a:off x="6505956" y="5052060"/>
+            <a:ext cx="5134356" cy="777240"/>
+          </a:xfrm>
+          <a:prstGeom prst="rect">
+            <a:avLst/>
+          </a:prstGeom>
+          <a:noFill/>
+          <a:ln/>
+        </p:spPr>
+        <p:txBody>
+          <a:bodyPr wrap="square" lIns="76200" tIns="76200" rIns="76200" bIns="76200" rtlCol="0" anchor="ctr"/>
           <a:lstStyle/>
           <a:p>
             <a:pPr rtl="1" algn="ctr" indent="0" marL="0">
               <a:buNone/>
             </a:pPr>
             <a:r>
-              <a:rPr lang="en-US" sz="1300" i="1" dirty="0">
+              <a:rPr lang="en-US" sz="1300" b="1" dirty="0">
+                <a:solidFill>
+                  <a:srgbClr val="1B1F3B"/>
+                </a:solidFill>
+              </a:rPr>
+              <a:t>Gemini CLI</a:t>
+            </a:r>
+            <a:endParaRPr lang="en-US" sz="1300" dirty="0"/>
+          </a:p>
+          <a:p>
+            <a:pPr rtl="1" algn="ctr" indent="0" marL="0">
+              <a:buNone/>
+            </a:pPr>
+            <a:r>
+              <a:rPr lang="en-US" sz="1000" dirty="0">
+                <a:solidFill>
+                  <a:srgbClr val="C0392B"/>
+                </a:solidFill>
+              </a:rPr>
+              <a:t>חינמי — נסגר אמצע 2026</a:t>
+            </a:r>
+            <a:endParaRPr lang="en-US" sz="1300" dirty="0"/>
+          </a:p>
+        </p:txBody>
+      </p:sp>
+      <p:sp>
+        <p:nvSpPr>
+          <p:cNvPr id="9" name="Shape 7"/>
+          <p:cNvSpPr/>
+          <p:nvPr/>
+        </p:nvSpPr>
+        <p:spPr>
+          <a:xfrm>
+            <a:off x="548640" y="5052060"/>
+            <a:ext cx="5134356" cy="777240"/>
+          </a:xfrm>
+          <a:prstGeom prst="roundRect">
+            <a:avLst>
+              <a:gd name="adj" fmla="val 7059"/>
+            </a:avLst>
+          </a:prstGeom>
+          <a:solidFill>
+            <a:srgbClr val="00A88A"/>
+          </a:solidFill>
+          <a:ln w="15875">
+            <a:solidFill>
+              <a:srgbClr val="00A88A"/>
+            </a:solidFill>
+            <a:prstDash val="solid"/>
+          </a:ln>
+        </p:spPr>
+      </p:sp>
+      <p:sp>
+        <p:nvSpPr>
+          <p:cNvPr id="10" name="Text 8"/>
+          <p:cNvSpPr/>
+          <p:nvPr/>
+        </p:nvSpPr>
+        <p:spPr>
+          <a:xfrm>
+            <a:off x="548640" y="5052060"/>
+            <a:ext cx="5134356" cy="777240"/>
+          </a:xfrm>
+          <a:prstGeom prst="rect">
+            <a:avLst/>
+          </a:prstGeom>
+          <a:noFill/>
+          <a:ln/>
+        </p:spPr>
+        <p:txBody>
+          <a:bodyPr wrap="square" lIns="76200" tIns="76200" rIns="76200" bIns="76200" rtlCol="0" anchor="ctr"/>
+          <a:lstStyle/>
+          <a:p>
+            <a:pPr rtl="1" algn="ctr" indent="0" marL="0">
+              <a:buNone/>
+            </a:pPr>
+            <a:r>
+              <a:rPr lang="en-US" sz="1300" b="1" dirty="0">
+                <a:solidFill>
+                  <a:srgbClr val="FFFFFF"/>
+                </a:solidFill>
+              </a:rPr>
+              <a:t>Antigravity CLI</a:t>
+            </a:r>
+            <a:endParaRPr lang="en-US" sz="1300" dirty="0"/>
+          </a:p>
+          <a:p>
+            <a:pPr rtl="1" algn="ctr" indent="0" marL="0">
+              <a:buNone/>
+            </a:pPr>
+            <a:r>
+              <a:rPr lang="en-US" sz="1000" dirty="0">
+                <a:solidFill>
+                  <a:srgbClr val="E6FFFA"/>
+                </a:solidFill>
+              </a:rPr>
+              <a:t>לא חינמי באותו אופן</a:t>
+            </a:r>
+            <a:endParaRPr lang="en-US" sz="1300" dirty="0"/>
+          </a:p>
+        </p:txBody>
+      </p:sp>
+      <p:sp>
+        <p:nvSpPr>
+          <p:cNvPr id="11" name="Shape 9"/>
+          <p:cNvSpPr/>
+          <p:nvPr/>
+        </p:nvSpPr>
+        <p:spPr>
+          <a:xfrm>
+            <a:off x="5756148" y="5440680"/>
+            <a:ext cx="676656" cy="0"/>
+          </a:xfrm>
+          <a:prstGeom prst="line">
+            <a:avLst/>
+          </a:prstGeom>
+          <a:noFill/>
+          <a:ln w="19050">
+            <a:solidFill>
+              <a:srgbClr val="B8B8C8"/>
+            </a:solidFill>
+            <a:prstDash val="solid"/>
+            <a:headEnd type="triangle"/>
+          </a:ln>
+        </p:spPr>
+      </p:sp>
+      <p:sp>
+        <p:nvSpPr>
+          <p:cNvPr id="12" name="Text 10"/>
+          <p:cNvSpPr/>
+          <p:nvPr/>
+        </p:nvSpPr>
+        <p:spPr>
+          <a:xfrm>
+            <a:off x="548640" y="6080760"/>
+            <a:ext cx="11091672" cy="274320"/>
+          </a:xfrm>
+          <a:prstGeom prst="rect">
+            <a:avLst/>
+          </a:prstGeom>
+          <a:noFill/>
+          <a:ln/>
+        </p:spPr>
+        <p:txBody>
+          <a:bodyPr wrap="square" lIns="0" tIns="0" rIns="0" bIns="0" rtlCol="0" anchor="ctr"/>
+          <a:lstStyle/>
+          <a:p>
+            <a:pPr rtl="1" algn="r" indent="0" marL="0">
+              <a:buNone/>
+            </a:pPr>
+            <a:r>
+              <a:rPr lang="en-US" sz="1000" i="1" dirty="0">
                 <a:solidFill>
                   <a:srgbClr val="6B7280"/>
                 </a:solidFill>
@@ -6399,15 +8398,15 @@
                 <a:ea typeface="Calibri" pitchFamily="34" charset="-122"/>
                 <a:cs typeface="Calibri" pitchFamily="34" charset="-120"/>
               </a:rPr>
-              <a:t>[תמונה/לוגו: Gemini CLI ו-Google Antigravity CLI, זה לצד זה]</a:t>
-            </a:r>
-            <a:endParaRPr lang="en-US" sz="1300" dirty="0"/>
-          </a:p>
-        </p:txBody>
-      </p:sp>
-      <p:sp>
-        <p:nvSpPr>
-          <p:cNvPr id="9" name="Text 7"/>
+              <a:t>איור: Gemini CLI (חינמי, נסגר אמצע 2026) הוחלף ב-Antigravity CLI (לא חינמי באותו אופן). איור המחשה - לא לוגו רשמי.</a:t>
+            </a:r>
+            <a:endParaRPr lang="en-US" sz="1000" dirty="0"/>
+          </a:p>
+        </p:txBody>
+      </p:sp>
+      <p:sp>
+        <p:nvSpPr>
+          <p:cNvPr id="13" name="Text 11"/>
           <p:cNvSpPr/>
           <p:nvPr/>
         </p:nvSpPr>
@@ -7929,49 +9928,693 @@
         </p:nvSpPr>
         <p:spPr>
           <a:xfrm>
-            <a:off x="548640" y="4846320"/>
-            <a:ext cx="11091672" cy="1143000"/>
-          </a:xfrm>
-          <a:prstGeom prst="rect">
-            <a:avLst/>
+            <a:off x="8095488" y="4846320"/>
+            <a:ext cx="3544824" cy="502920"/>
+          </a:xfrm>
+          <a:prstGeom prst="roundRect">
+            <a:avLst>
+              <a:gd name="adj" fmla="val 10909"/>
+            </a:avLst>
           </a:prstGeom>
           <a:solidFill>
             <a:srgbClr val="F6F6F8"/>
           </a:solidFill>
-          <a:ln w="12700">
+          <a:ln w="15875">
             <a:solidFill>
               <a:srgbClr val="B8B8C8"/>
             </a:solidFill>
+            <a:prstDash val="solid"/>
+          </a:ln>
+        </p:spPr>
+      </p:sp>
+      <p:sp>
+        <p:nvSpPr>
+          <p:cNvPr id="8" name="Text 6"/>
+          <p:cNvSpPr/>
+          <p:nvPr/>
+        </p:nvSpPr>
+        <p:spPr>
+          <a:xfrm>
+            <a:off x="8095488" y="4846320"/>
+            <a:ext cx="3544824" cy="502920"/>
+          </a:xfrm>
+          <a:prstGeom prst="rect">
+            <a:avLst/>
+          </a:prstGeom>
+          <a:noFill/>
+          <a:ln/>
+        </p:spPr>
+        <p:txBody>
+          <a:bodyPr wrap="square" lIns="50800" tIns="50800" rIns="50800" bIns="50800" rtlCol="0" anchor="ctr"/>
+          <a:lstStyle/>
+          <a:p>
+            <a:pPr rtl="1" algn="ctr" indent="0" marL="0">
+              <a:buNone/>
+            </a:pPr>
+            <a:r>
+              <a:rPr lang="en-US" sz="1200" dirty="0">
+                <a:solidFill>
+                  <a:srgbClr val="1B1F3B"/>
+                </a:solidFill>
+                <a:latin typeface="Calibri" pitchFamily="34" charset="0"/>
+                <a:ea typeface="Calibri" pitchFamily="34" charset="-122"/>
+                <a:cs typeface="Calibri" pitchFamily="34" charset="-120"/>
+              </a:rPr>
+              <a:t>קלט: טקסט טבעי</a:t>
+            </a:r>
+            <a:endParaRPr lang="en-US" sz="1200" dirty="0"/>
+          </a:p>
+        </p:txBody>
+      </p:sp>
+      <p:sp>
+        <p:nvSpPr>
+          <p:cNvPr id="9" name="Shape 7"/>
+          <p:cNvSpPr/>
+          <p:nvPr/>
+        </p:nvSpPr>
+        <p:spPr>
+          <a:xfrm>
+            <a:off x="7885176" y="5097780"/>
+            <a:ext cx="192024" cy="0"/>
+          </a:xfrm>
+          <a:prstGeom prst="line">
+            <a:avLst/>
+          </a:prstGeom>
+          <a:noFill/>
+          <a:ln w="19050">
+            <a:solidFill>
+              <a:srgbClr val="B8B8C8"/>
+            </a:solidFill>
+            <a:prstDash val="solid"/>
+            <a:headEnd type="triangle"/>
+          </a:ln>
+        </p:spPr>
+      </p:sp>
+      <p:sp>
+        <p:nvSpPr>
+          <p:cNvPr id="10" name="Shape 8"/>
+          <p:cNvSpPr/>
+          <p:nvPr/>
+        </p:nvSpPr>
+        <p:spPr>
+          <a:xfrm>
+            <a:off x="4322064" y="4846320"/>
+            <a:ext cx="3544824" cy="502920"/>
+          </a:xfrm>
+          <a:prstGeom prst="roundRect">
+            <a:avLst>
+              <a:gd name="adj" fmla="val 10909"/>
+            </a:avLst>
+          </a:prstGeom>
+          <a:solidFill>
+            <a:srgbClr val="00A88A"/>
+          </a:solidFill>
+          <a:ln w="15875">
+            <a:solidFill>
+              <a:srgbClr val="00A88A"/>
+            </a:solidFill>
+            <a:prstDash val="solid"/>
+          </a:ln>
+        </p:spPr>
+      </p:sp>
+      <p:sp>
+        <p:nvSpPr>
+          <p:cNvPr id="11" name="Text 9"/>
+          <p:cNvSpPr/>
+          <p:nvPr/>
+        </p:nvSpPr>
+        <p:spPr>
+          <a:xfrm>
+            <a:off x="4322064" y="4846320"/>
+            <a:ext cx="3544824" cy="502920"/>
+          </a:xfrm>
+          <a:prstGeom prst="rect">
+            <a:avLst/>
+          </a:prstGeom>
+          <a:noFill/>
+          <a:ln/>
+        </p:spPr>
+        <p:txBody>
+          <a:bodyPr wrap="square" lIns="50800" tIns="50800" rIns="50800" bIns="50800" rtlCol="0" anchor="ctr"/>
+          <a:lstStyle/>
+          <a:p>
+            <a:pPr rtl="1" algn="ctr" indent="0" marL="0">
+              <a:buNone/>
+            </a:pPr>
+            <a:r>
+              <a:rPr lang="en-US" sz="1200" b="1" dirty="0">
+                <a:solidFill>
+                  <a:srgbClr val="FFFFFF"/>
+                </a:solidFill>
+                <a:latin typeface="Calibri" pitchFamily="34" charset="0"/>
+                <a:ea typeface="Calibri" pitchFamily="34" charset="-122"/>
+                <a:cs typeface="Calibri" pitchFamily="34" charset="-120"/>
+              </a:rPr>
+              <a:t>מודל שפה (LLM)</a:t>
+            </a:r>
+            <a:endParaRPr lang="en-US" sz="1200" dirty="0"/>
+          </a:p>
+        </p:txBody>
+      </p:sp>
+      <p:sp>
+        <p:nvSpPr>
+          <p:cNvPr id="12" name="Shape 10"/>
+          <p:cNvSpPr/>
+          <p:nvPr/>
+        </p:nvSpPr>
+        <p:spPr>
+          <a:xfrm>
+            <a:off x="4111752" y="5097780"/>
+            <a:ext cx="192024" cy="0"/>
+          </a:xfrm>
+          <a:prstGeom prst="line">
+            <a:avLst/>
+          </a:prstGeom>
+          <a:noFill/>
+          <a:ln w="19050">
+            <a:solidFill>
+              <a:srgbClr val="B8B8C8"/>
+            </a:solidFill>
+            <a:prstDash val="solid"/>
+            <a:headEnd type="triangle"/>
+          </a:ln>
+        </p:spPr>
+      </p:sp>
+      <p:sp>
+        <p:nvSpPr>
+          <p:cNvPr id="13" name="Shape 11"/>
+          <p:cNvSpPr/>
+          <p:nvPr/>
+        </p:nvSpPr>
+        <p:spPr>
+          <a:xfrm>
+            <a:off x="548640" y="4846320"/>
+            <a:ext cx="3544824" cy="502920"/>
+          </a:xfrm>
+          <a:prstGeom prst="roundRect">
+            <a:avLst>
+              <a:gd name="adj" fmla="val 10909"/>
+            </a:avLst>
+          </a:prstGeom>
+          <a:solidFill>
+            <a:srgbClr val="F6F6F8"/>
+          </a:solidFill>
+          <a:ln w="15875">
+            <a:solidFill>
+              <a:srgbClr val="B8B8C8"/>
+            </a:solidFill>
+            <a:prstDash val="solid"/>
+          </a:ln>
+        </p:spPr>
+      </p:sp>
+      <p:sp>
+        <p:nvSpPr>
+          <p:cNvPr id="14" name="Text 12"/>
+          <p:cNvSpPr/>
+          <p:nvPr/>
+        </p:nvSpPr>
+        <p:spPr>
+          <a:xfrm>
+            <a:off x="548640" y="4846320"/>
+            <a:ext cx="3544824" cy="502920"/>
+          </a:xfrm>
+          <a:prstGeom prst="rect">
+            <a:avLst/>
+          </a:prstGeom>
+          <a:noFill/>
+          <a:ln/>
+        </p:spPr>
+        <p:txBody>
+          <a:bodyPr wrap="square" lIns="50800" tIns="50800" rIns="50800" bIns="50800" rtlCol="0" anchor="ctr"/>
+          <a:lstStyle/>
+          <a:p>
+            <a:pPr rtl="1" algn="ctr" indent="0" marL="0">
+              <a:buNone/>
+            </a:pPr>
+            <a:r>
+              <a:rPr lang="en-US" sz="1200" dirty="0">
+                <a:solidFill>
+                  <a:srgbClr val="1B1F3B"/>
+                </a:solidFill>
+                <a:latin typeface="Calibri" pitchFamily="34" charset="0"/>
+                <a:ea typeface="Calibri" pitchFamily="34" charset="-122"/>
+                <a:cs typeface="Calibri" pitchFamily="34" charset="-120"/>
+              </a:rPr>
+              <a:t>פלט: טקסט/קוד</a:t>
+            </a:r>
+            <a:endParaRPr lang="en-US" sz="1200" dirty="0"/>
+          </a:p>
+        </p:txBody>
+      </p:sp>
+      <p:sp>
+        <p:nvSpPr>
+          <p:cNvPr id="15" name="Text 13"/>
+          <p:cNvSpPr/>
+          <p:nvPr/>
+        </p:nvSpPr>
+        <p:spPr>
+          <a:xfrm>
+            <a:off x="548640" y="5650992"/>
+            <a:ext cx="6766560" cy="292608"/>
+          </a:xfrm>
+          <a:prstGeom prst="rect">
+            <a:avLst/>
+          </a:prstGeom>
+          <a:noFill/>
+          <a:ln/>
+        </p:spPr>
+        <p:txBody>
+          <a:bodyPr wrap="square" lIns="0" tIns="0" rIns="0" bIns="0" rtlCol="0" anchor="ctr"/>
+          <a:lstStyle/>
+          <a:p>
+            <a:pPr rtl="1" algn="r" indent="0" marL="0">
+              <a:buNone/>
+            </a:pPr>
+            <a:r>
+              <a:rPr lang="en-US" sz="1000" i="1" dirty="0">
+                <a:solidFill>
+                  <a:srgbClr val="6B7280"/>
+                </a:solidFill>
+                <a:latin typeface="Calibri" pitchFamily="34" charset="0"/>
+                <a:ea typeface="Calibri" pitchFamily="34" charset="-122"/>
+                <a:cs typeface="Calibri" pitchFamily="34" charset="-120"/>
+              </a:rPr>
+              <a:t>חיזוי Token אחר Token:</a:t>
+            </a:r>
+            <a:endParaRPr lang="en-US" sz="1000" dirty="0"/>
+          </a:p>
+        </p:txBody>
+      </p:sp>
+      <p:sp>
+        <p:nvSpPr>
+          <p:cNvPr id="16" name="Shape 14"/>
+          <p:cNvSpPr/>
+          <p:nvPr/>
+        </p:nvSpPr>
+        <p:spPr>
+          <a:xfrm>
+            <a:off x="7452360" y="5669280"/>
+            <a:ext cx="621792" cy="292608"/>
+          </a:xfrm>
+          <a:prstGeom prst="rect">
+            <a:avLst/>
+          </a:prstGeom>
+          <a:solidFill>
+            <a:srgbClr val="FFFFFF"/>
+          </a:solidFill>
+          <a:ln w="12700">
+            <a:solidFill>
+              <a:srgbClr val="00A88A"/>
+            </a:solidFill>
+            <a:prstDash val="solid"/>
+          </a:ln>
+        </p:spPr>
+      </p:sp>
+      <p:sp>
+        <p:nvSpPr>
+          <p:cNvPr id="17" name="Text 15"/>
+          <p:cNvSpPr/>
+          <p:nvPr/>
+        </p:nvSpPr>
+        <p:spPr>
+          <a:xfrm>
+            <a:off x="7452360" y="5669280"/>
+            <a:ext cx="621792" cy="292608"/>
+          </a:xfrm>
+          <a:prstGeom prst="rect">
+            <a:avLst/>
+          </a:prstGeom>
+          <a:noFill/>
+          <a:ln/>
+        </p:spPr>
+        <p:txBody>
+          <a:bodyPr wrap="square" lIns="0" tIns="0" rIns="0" bIns="0" rtlCol="0" anchor="ctr"/>
+          <a:lstStyle/>
+          <a:p>
+            <a:pPr algn="ctr" indent="0" marL="0">
+              <a:buNone/>
+            </a:pPr>
+            <a:r>
+              <a:rPr lang="en-US" sz="1000" b="1" dirty="0">
+                <a:solidFill>
+                  <a:srgbClr val="1B1F3B"/>
+                </a:solidFill>
+                <a:latin typeface="Courier New" pitchFamily="34" charset="0"/>
+                <a:ea typeface="Courier New" pitchFamily="34" charset="-122"/>
+                <a:cs typeface="Courier New" pitchFamily="34" charset="-120"/>
+              </a:rPr>
+              <a:t>The</a:t>
+            </a:r>
+            <a:endParaRPr lang="en-US" sz="1000" dirty="0"/>
+          </a:p>
+        </p:txBody>
+      </p:sp>
+      <p:sp>
+        <p:nvSpPr>
+          <p:cNvPr id="18" name="Shape 16"/>
+          <p:cNvSpPr/>
+          <p:nvPr/>
+        </p:nvSpPr>
+        <p:spPr>
+          <a:xfrm>
+            <a:off x="8165592" y="5669280"/>
+            <a:ext cx="621792" cy="292608"/>
+          </a:xfrm>
+          <a:prstGeom prst="rect">
+            <a:avLst/>
+          </a:prstGeom>
+          <a:solidFill>
+            <a:srgbClr val="FFFFFF"/>
+          </a:solidFill>
+          <a:ln w="12700">
+            <a:solidFill>
+              <a:srgbClr val="00A88A"/>
+            </a:solidFill>
+            <a:prstDash val="solid"/>
+          </a:ln>
+        </p:spPr>
+      </p:sp>
+      <p:sp>
+        <p:nvSpPr>
+          <p:cNvPr id="19" name="Text 17"/>
+          <p:cNvSpPr/>
+          <p:nvPr/>
+        </p:nvSpPr>
+        <p:spPr>
+          <a:xfrm>
+            <a:off x="8165592" y="5669280"/>
+            <a:ext cx="621792" cy="292608"/>
+          </a:xfrm>
+          <a:prstGeom prst="rect">
+            <a:avLst/>
+          </a:prstGeom>
+          <a:noFill/>
+          <a:ln/>
+        </p:spPr>
+        <p:txBody>
+          <a:bodyPr wrap="square" lIns="0" tIns="0" rIns="0" bIns="0" rtlCol="0" anchor="ctr"/>
+          <a:lstStyle/>
+          <a:p>
+            <a:pPr algn="ctr" indent="0" marL="0">
+              <a:buNone/>
+            </a:pPr>
+            <a:r>
+              <a:rPr lang="en-US" sz="1000" b="1" dirty="0">
+                <a:solidFill>
+                  <a:srgbClr val="1B1F3B"/>
+                </a:solidFill>
+                <a:latin typeface="Courier New" pitchFamily="34" charset="0"/>
+                <a:ea typeface="Courier New" pitchFamily="34" charset="-122"/>
+                <a:cs typeface="Courier New" pitchFamily="34" charset="-120"/>
+              </a:rPr>
+              <a:t>cat</a:t>
+            </a:r>
+            <a:endParaRPr lang="en-US" sz="1000" dirty="0"/>
+          </a:p>
+        </p:txBody>
+      </p:sp>
+      <p:sp>
+        <p:nvSpPr>
+          <p:cNvPr id="20" name="Shape 18"/>
+          <p:cNvSpPr/>
+          <p:nvPr/>
+        </p:nvSpPr>
+        <p:spPr>
+          <a:xfrm>
+            <a:off x="8878824" y="5669280"/>
+            <a:ext cx="621792" cy="292608"/>
+          </a:xfrm>
+          <a:prstGeom prst="rect">
+            <a:avLst/>
+          </a:prstGeom>
+          <a:solidFill>
+            <a:srgbClr val="FFFFFF"/>
+          </a:solidFill>
+          <a:ln w="12700">
+            <a:solidFill>
+              <a:srgbClr val="00A88A"/>
+            </a:solidFill>
+            <a:prstDash val="solid"/>
+          </a:ln>
+        </p:spPr>
+      </p:sp>
+      <p:sp>
+        <p:nvSpPr>
+          <p:cNvPr id="21" name="Text 19"/>
+          <p:cNvSpPr/>
+          <p:nvPr/>
+        </p:nvSpPr>
+        <p:spPr>
+          <a:xfrm>
+            <a:off x="8878824" y="5669280"/>
+            <a:ext cx="621792" cy="292608"/>
+          </a:xfrm>
+          <a:prstGeom prst="rect">
+            <a:avLst/>
+          </a:prstGeom>
+          <a:noFill/>
+          <a:ln/>
+        </p:spPr>
+        <p:txBody>
+          <a:bodyPr wrap="square" lIns="0" tIns="0" rIns="0" bIns="0" rtlCol="0" anchor="ctr"/>
+          <a:lstStyle/>
+          <a:p>
+            <a:pPr algn="ctr" indent="0" marL="0">
+              <a:buNone/>
+            </a:pPr>
+            <a:r>
+              <a:rPr lang="en-US" sz="1000" b="1" dirty="0">
+                <a:solidFill>
+                  <a:srgbClr val="1B1F3B"/>
+                </a:solidFill>
+                <a:latin typeface="Courier New" pitchFamily="34" charset="0"/>
+                <a:ea typeface="Courier New" pitchFamily="34" charset="-122"/>
+                <a:cs typeface="Courier New" pitchFamily="34" charset="-120"/>
+              </a:rPr>
+              <a:t>sat</a:t>
+            </a:r>
+            <a:endParaRPr lang="en-US" sz="1000" dirty="0"/>
+          </a:p>
+        </p:txBody>
+      </p:sp>
+      <p:sp>
+        <p:nvSpPr>
+          <p:cNvPr id="22" name="Shape 20"/>
+          <p:cNvSpPr/>
+          <p:nvPr/>
+        </p:nvSpPr>
+        <p:spPr>
+          <a:xfrm>
+            <a:off x="9592056" y="5669280"/>
+            <a:ext cx="621792" cy="292608"/>
+          </a:xfrm>
+          <a:prstGeom prst="rect">
+            <a:avLst/>
+          </a:prstGeom>
+          <a:solidFill>
+            <a:srgbClr val="FFFFFF"/>
+          </a:solidFill>
+          <a:ln w="12700">
+            <a:solidFill>
+              <a:srgbClr val="00A88A"/>
+            </a:solidFill>
+            <a:prstDash val="solid"/>
+          </a:ln>
+        </p:spPr>
+      </p:sp>
+      <p:sp>
+        <p:nvSpPr>
+          <p:cNvPr id="23" name="Text 21"/>
+          <p:cNvSpPr/>
+          <p:nvPr/>
+        </p:nvSpPr>
+        <p:spPr>
+          <a:xfrm>
+            <a:off x="9592056" y="5669280"/>
+            <a:ext cx="621792" cy="292608"/>
+          </a:xfrm>
+          <a:prstGeom prst="rect">
+            <a:avLst/>
+          </a:prstGeom>
+          <a:noFill/>
+          <a:ln/>
+        </p:spPr>
+        <p:txBody>
+          <a:bodyPr wrap="square" lIns="0" tIns="0" rIns="0" bIns="0" rtlCol="0" anchor="ctr"/>
+          <a:lstStyle/>
+          <a:p>
+            <a:pPr algn="ctr" indent="0" marL="0">
+              <a:buNone/>
+            </a:pPr>
+            <a:r>
+              <a:rPr lang="en-US" sz="1000" b="1" dirty="0">
+                <a:solidFill>
+                  <a:srgbClr val="1B1F3B"/>
+                </a:solidFill>
+                <a:latin typeface="Courier New" pitchFamily="34" charset="0"/>
+                <a:ea typeface="Courier New" pitchFamily="34" charset="-122"/>
+                <a:cs typeface="Courier New" pitchFamily="34" charset="-120"/>
+              </a:rPr>
+              <a:t>on</a:t>
+            </a:r>
+            <a:endParaRPr lang="en-US" sz="1000" dirty="0"/>
+          </a:p>
+        </p:txBody>
+      </p:sp>
+      <p:sp>
+        <p:nvSpPr>
+          <p:cNvPr id="24" name="Shape 22"/>
+          <p:cNvSpPr/>
+          <p:nvPr/>
+        </p:nvSpPr>
+        <p:spPr>
+          <a:xfrm>
+            <a:off x="10305288" y="5669280"/>
+            <a:ext cx="621792" cy="292608"/>
+          </a:xfrm>
+          <a:prstGeom prst="rect">
+            <a:avLst/>
+          </a:prstGeom>
+          <a:solidFill>
+            <a:srgbClr val="FFFFFF"/>
+          </a:solidFill>
+          <a:ln w="12700">
+            <a:solidFill>
+              <a:srgbClr val="00A88A"/>
+            </a:solidFill>
+            <a:prstDash val="solid"/>
+          </a:ln>
+        </p:spPr>
+      </p:sp>
+      <p:sp>
+        <p:nvSpPr>
+          <p:cNvPr id="25" name="Text 23"/>
+          <p:cNvSpPr/>
+          <p:nvPr/>
+        </p:nvSpPr>
+        <p:spPr>
+          <a:xfrm>
+            <a:off x="10305288" y="5669280"/>
+            <a:ext cx="621792" cy="292608"/>
+          </a:xfrm>
+          <a:prstGeom prst="rect">
+            <a:avLst/>
+          </a:prstGeom>
+          <a:noFill/>
+          <a:ln/>
+        </p:spPr>
+        <p:txBody>
+          <a:bodyPr wrap="square" lIns="0" tIns="0" rIns="0" bIns="0" rtlCol="0" anchor="ctr"/>
+          <a:lstStyle/>
+          <a:p>
+            <a:pPr algn="ctr" indent="0" marL="0">
+              <a:buNone/>
+            </a:pPr>
+            <a:r>
+              <a:rPr lang="en-US" sz="1000" b="1" dirty="0">
+                <a:solidFill>
+                  <a:srgbClr val="1B1F3B"/>
+                </a:solidFill>
+                <a:latin typeface="Courier New" pitchFamily="34" charset="0"/>
+                <a:ea typeface="Courier New" pitchFamily="34" charset="-122"/>
+                <a:cs typeface="Courier New" pitchFamily="34" charset="-120"/>
+              </a:rPr>
+              <a:t>the</a:t>
+            </a:r>
+            <a:endParaRPr lang="en-US" sz="1000" dirty="0"/>
+          </a:p>
+        </p:txBody>
+      </p:sp>
+      <p:sp>
+        <p:nvSpPr>
+          <p:cNvPr id="26" name="Shape 24"/>
+          <p:cNvSpPr/>
+          <p:nvPr/>
+        </p:nvSpPr>
+        <p:spPr>
+          <a:xfrm>
+            <a:off x="11018520" y="5669280"/>
+            <a:ext cx="621792" cy="292608"/>
+          </a:xfrm>
+          <a:prstGeom prst="rect">
+            <a:avLst/>
+          </a:prstGeom>
+          <a:solidFill>
+            <a:srgbClr val="00A88A"/>
+          </a:solidFill>
+          <a:ln w="12700">
+            <a:solidFill>
+              <a:srgbClr val="00A88A"/>
+            </a:solidFill>
             <a:prstDash val="dash"/>
           </a:ln>
         </p:spPr>
       </p:sp>
       <p:sp>
         <p:nvSpPr>
-          <p:cNvPr id="8" name="Text 6"/>
-          <p:cNvSpPr/>
-          <p:nvPr/>
-        </p:nvSpPr>
-        <p:spPr>
-          <a:xfrm>
-            <a:off x="548640" y="4846320"/>
-            <a:ext cx="11091672" cy="1143000"/>
-          </a:xfrm>
-          <a:prstGeom prst="rect">
-            <a:avLst/>
-          </a:prstGeom>
-          <a:noFill/>
-          <a:ln/>
-        </p:spPr>
-        <p:txBody>
-          <a:bodyPr wrap="square" lIns="101600" tIns="101600" rIns="101600" bIns="101600" rtlCol="0" anchor="ctr"/>
-          <a:lstStyle/>
-          <a:p>
-            <a:pPr rtl="1" algn="ctr" indent="0" marL="0">
-              <a:buNone/>
-            </a:pPr>
-            <a:r>
-              <a:rPr lang="en-US" sz="1300" i="1" dirty="0">
+          <p:cNvPr id="27" name="Text 25"/>
+          <p:cNvSpPr/>
+          <p:nvPr/>
+        </p:nvSpPr>
+        <p:spPr>
+          <a:xfrm>
+            <a:off x="11018520" y="5669280"/>
+            <a:ext cx="621792" cy="292608"/>
+          </a:xfrm>
+          <a:prstGeom prst="rect">
+            <a:avLst/>
+          </a:prstGeom>
+          <a:noFill/>
+          <a:ln/>
+        </p:spPr>
+        <p:txBody>
+          <a:bodyPr wrap="square" lIns="0" tIns="0" rIns="0" bIns="0" rtlCol="0" anchor="ctr"/>
+          <a:lstStyle/>
+          <a:p>
+            <a:pPr algn="ctr" indent="0" marL="0">
+              <a:buNone/>
+            </a:pPr>
+            <a:r>
+              <a:rPr lang="en-US" sz="1000" b="1" dirty="0">
+                <a:solidFill>
+                  <a:srgbClr val="FFFFFF"/>
+                </a:solidFill>
+                <a:latin typeface="Courier New" pitchFamily="34" charset="0"/>
+                <a:ea typeface="Courier New" pitchFamily="34" charset="-122"/>
+                <a:cs typeface="Courier New" pitchFamily="34" charset="-120"/>
+              </a:rPr>
+              <a:t>___</a:t>
+            </a:r>
+            <a:endParaRPr lang="en-US" sz="1000" dirty="0"/>
+          </a:p>
+        </p:txBody>
+      </p:sp>
+      <p:sp>
+        <p:nvSpPr>
+          <p:cNvPr id="28" name="Text 26"/>
+          <p:cNvSpPr/>
+          <p:nvPr/>
+        </p:nvSpPr>
+        <p:spPr>
+          <a:xfrm>
+            <a:off x="548640" y="6080760"/>
+            <a:ext cx="11091672" cy="274320"/>
+          </a:xfrm>
+          <a:prstGeom prst="rect">
+            <a:avLst/>
+          </a:prstGeom>
+          <a:noFill/>
+          <a:ln/>
+        </p:spPr>
+        <p:txBody>
+          <a:bodyPr wrap="square" lIns="0" tIns="0" rIns="0" bIns="0" rtlCol="0" anchor="ctr"/>
+          <a:lstStyle/>
+          <a:p>
+            <a:pPr rtl="1" algn="r" indent="0" marL="0">
+              <a:buNone/>
+            </a:pPr>
+            <a:r>
+              <a:rPr lang="en-US" sz="1000" i="1" dirty="0">
                 <a:solidFill>
                   <a:srgbClr val="6B7280"/>
                 </a:solidFill>
@@ -7979,15 +10622,15 @@
                 <a:ea typeface="Calibri" pitchFamily="34" charset="-122"/>
                 <a:cs typeface="Calibri" pitchFamily="34" charset="-120"/>
               </a:rPr>
-              <a:t>[תמונה: תרשים פשוט — קלט טקסט → מודל שפה (קופסה) → פלט טקסט/קוד, עם חץ לדוגמה של Token אחר Token]</a:t>
-            </a:r>
-            <a:endParaRPr lang="en-US" sz="1300" dirty="0"/>
-          </a:p>
-        </p:txBody>
-      </p:sp>
-      <p:sp>
-        <p:nvSpPr>
-          <p:cNvPr id="9" name="Text 7"/>
+              <a:t>איור: זרימת LLM: קלט טקסט → מודל שפה → פלט. למטה: דוגמה לחיזוי Token אחר Token (המודל מנחש את המילה הבאה ברצף לפי מה שסביר).</a:t>
+            </a:r>
+            <a:endParaRPr lang="en-US" sz="1000" dirty="0"/>
+          </a:p>
+        </p:txBody>
+      </p:sp>
+      <p:sp>
+        <p:nvSpPr>
+          <p:cNvPr id="29" name="Text 27"/>
           <p:cNvSpPr/>
           <p:nvPr/>
         </p:nvSpPr>
@@ -10382,20 +13025,22 @@
         </p:nvSpPr>
         <p:spPr>
           <a:xfrm>
-            <a:off x="548640" y="4846320"/>
-            <a:ext cx="11091672" cy="1143000"/>
-          </a:xfrm>
-          <a:prstGeom prst="rect">
-            <a:avLst/>
+            <a:off x="8095488" y="4846320"/>
+            <a:ext cx="3544824" cy="548640"/>
+          </a:xfrm>
+          <a:prstGeom prst="roundRect">
+            <a:avLst>
+              <a:gd name="adj" fmla="val 10000"/>
+            </a:avLst>
           </a:prstGeom>
           <a:solidFill>
             <a:srgbClr val="F6F6F8"/>
           </a:solidFill>
-          <a:ln w="12700">
+          <a:ln w="15875">
             <a:solidFill>
               <a:srgbClr val="B8B8C8"/>
             </a:solidFill>
-            <a:prstDash val="dash"/>
+            <a:prstDash val="solid"/>
           </a:ln>
         </p:spPr>
       </p:sp>
@@ -10407,24 +13052,243 @@
         </p:nvSpPr>
         <p:spPr>
           <a:xfrm>
+            <a:off x="8095488" y="4846320"/>
+            <a:ext cx="3544824" cy="548640"/>
+          </a:xfrm>
+          <a:prstGeom prst="rect">
+            <a:avLst/>
+          </a:prstGeom>
+          <a:noFill/>
+          <a:ln/>
+        </p:spPr>
+        <p:txBody>
+          <a:bodyPr wrap="square" lIns="76200" tIns="76200" rIns="76200" bIns="76200" rtlCol="0" anchor="ctr"/>
+          <a:lstStyle/>
+          <a:p>
+            <a:pPr rtl="1" algn="ctr" indent="0" marL="0">
+              <a:buNone/>
+            </a:pPr>
+            <a:r>
+              <a:rPr lang="en-US" sz="1150" dirty="0">
+                <a:solidFill>
+                  <a:srgbClr val="1B1F3B"/>
+                </a:solidFill>
+                <a:latin typeface="Calibri" pitchFamily="34" charset="0"/>
+                <a:ea typeface="Calibri" pitchFamily="34" charset="-122"/>
+                <a:cs typeface="Calibri" pitchFamily="34" charset="-120"/>
+              </a:rPr>
+              <a:t>1. מנחים בשפה טבעית מה רוצים</a:t>
+            </a:r>
+            <a:endParaRPr lang="en-US" sz="1150" dirty="0"/>
+          </a:p>
+        </p:txBody>
+      </p:sp>
+      <p:sp>
+        <p:nvSpPr>
+          <p:cNvPr id="9" name="Shape 7"/>
+          <p:cNvSpPr/>
+          <p:nvPr/>
+        </p:nvSpPr>
+        <p:spPr>
+          <a:xfrm>
+            <a:off x="7885176" y="5120640"/>
+            <a:ext cx="192024" cy="0"/>
+          </a:xfrm>
+          <a:prstGeom prst="line">
+            <a:avLst/>
+          </a:prstGeom>
+          <a:noFill/>
+          <a:ln w="19050">
+            <a:solidFill>
+              <a:srgbClr val="B8B8C8"/>
+            </a:solidFill>
+            <a:prstDash val="solid"/>
+            <a:headEnd type="triangle"/>
+          </a:ln>
+        </p:spPr>
+      </p:sp>
+      <p:sp>
+        <p:nvSpPr>
+          <p:cNvPr id="10" name="Shape 8"/>
+          <p:cNvSpPr/>
+          <p:nvPr/>
+        </p:nvSpPr>
+        <p:spPr>
+          <a:xfrm>
+            <a:off x="4322064" y="4846320"/>
+            <a:ext cx="3544824" cy="548640"/>
+          </a:xfrm>
+          <a:prstGeom prst="roundRect">
+            <a:avLst>
+              <a:gd name="adj" fmla="val 10000"/>
+            </a:avLst>
+          </a:prstGeom>
+          <a:solidFill>
+            <a:srgbClr val="F6F6F8"/>
+          </a:solidFill>
+          <a:ln w="15875">
+            <a:solidFill>
+              <a:srgbClr val="B8B8C8"/>
+            </a:solidFill>
+            <a:prstDash val="solid"/>
+          </a:ln>
+        </p:spPr>
+      </p:sp>
+      <p:sp>
+        <p:nvSpPr>
+          <p:cNvPr id="11" name="Text 9"/>
+          <p:cNvSpPr/>
+          <p:nvPr/>
+        </p:nvSpPr>
+        <p:spPr>
+          <a:xfrm>
+            <a:off x="4322064" y="4846320"/>
+            <a:ext cx="3544824" cy="548640"/>
+          </a:xfrm>
+          <a:prstGeom prst="rect">
+            <a:avLst/>
+          </a:prstGeom>
+          <a:noFill/>
+          <a:ln/>
+        </p:spPr>
+        <p:txBody>
+          <a:bodyPr wrap="square" lIns="76200" tIns="76200" rIns="76200" bIns="76200" rtlCol="0" anchor="ctr"/>
+          <a:lstStyle/>
+          <a:p>
+            <a:pPr rtl="1" algn="ctr" indent="0" marL="0">
+              <a:buNone/>
+            </a:pPr>
+            <a:r>
+              <a:rPr lang="en-US" sz="1150" dirty="0">
+                <a:solidFill>
+                  <a:srgbClr val="1B1F3B"/>
+                </a:solidFill>
+                <a:latin typeface="Calibri" pitchFamily="34" charset="0"/>
+                <a:ea typeface="Calibri" pitchFamily="34" charset="-122"/>
+                <a:cs typeface="Calibri" pitchFamily="34" charset="-120"/>
+              </a:rPr>
+              <a:t>2. הסוכן פועל ישירות על קבצי הקוד</a:t>
+            </a:r>
+            <a:endParaRPr lang="en-US" sz="1150" dirty="0"/>
+          </a:p>
+        </p:txBody>
+      </p:sp>
+      <p:sp>
+        <p:nvSpPr>
+          <p:cNvPr id="12" name="Shape 10"/>
+          <p:cNvSpPr/>
+          <p:nvPr/>
+        </p:nvSpPr>
+        <p:spPr>
+          <a:xfrm>
+            <a:off x="4111752" y="5120640"/>
+            <a:ext cx="192024" cy="0"/>
+          </a:xfrm>
+          <a:prstGeom prst="line">
+            <a:avLst/>
+          </a:prstGeom>
+          <a:noFill/>
+          <a:ln w="19050">
+            <a:solidFill>
+              <a:srgbClr val="B8B8C8"/>
+            </a:solidFill>
+            <a:prstDash val="solid"/>
+            <a:headEnd type="triangle"/>
+          </a:ln>
+        </p:spPr>
+      </p:sp>
+      <p:sp>
+        <p:nvSpPr>
+          <p:cNvPr id="13" name="Shape 11"/>
+          <p:cNvSpPr/>
+          <p:nvPr/>
+        </p:nvSpPr>
+        <p:spPr>
+          <a:xfrm>
             <a:off x="548640" y="4846320"/>
-            <a:ext cx="11091672" cy="1143000"/>
-          </a:xfrm>
-          <a:prstGeom prst="rect">
-            <a:avLst/>
-          </a:prstGeom>
-          <a:noFill/>
-          <a:ln/>
-        </p:spPr>
-        <p:txBody>
-          <a:bodyPr wrap="square" lIns="101600" tIns="101600" rIns="101600" bIns="101600" rtlCol="0" anchor="ctr"/>
+            <a:ext cx="3544824" cy="548640"/>
+          </a:xfrm>
+          <a:prstGeom prst="roundRect">
+            <a:avLst>
+              <a:gd name="adj" fmla="val 10000"/>
+            </a:avLst>
+          </a:prstGeom>
+          <a:solidFill>
+            <a:srgbClr val="00A88A"/>
+          </a:solidFill>
+          <a:ln w="15875">
+            <a:solidFill>
+              <a:srgbClr val="00A88A"/>
+            </a:solidFill>
+            <a:prstDash val="solid"/>
+          </a:ln>
+        </p:spPr>
+      </p:sp>
+      <p:sp>
+        <p:nvSpPr>
+          <p:cNvPr id="14" name="Text 12"/>
+          <p:cNvSpPr/>
+          <p:nvPr/>
+        </p:nvSpPr>
+        <p:spPr>
+          <a:xfrm>
+            <a:off x="548640" y="4846320"/>
+            <a:ext cx="3544824" cy="548640"/>
+          </a:xfrm>
+          <a:prstGeom prst="rect">
+            <a:avLst/>
+          </a:prstGeom>
+          <a:noFill/>
+          <a:ln/>
+        </p:spPr>
+        <p:txBody>
+          <a:bodyPr wrap="square" lIns="76200" tIns="76200" rIns="76200" bIns="76200" rtlCol="0" anchor="ctr"/>
           <a:lstStyle/>
           <a:p>
             <a:pPr rtl="1" algn="ctr" indent="0" marL="0">
               <a:buNone/>
             </a:pPr>
             <a:r>
-              <a:rPr lang="en-US" sz="1300" i="1" dirty="0">
+              <a:rPr lang="en-US" sz="1150" b="1" dirty="0">
+                <a:solidFill>
+                  <a:srgbClr val="FFFFFF"/>
+                </a:solidFill>
+                <a:latin typeface="Calibri" pitchFamily="34" charset="0"/>
+                <a:ea typeface="Calibri" pitchFamily="34" charset="-122"/>
+                <a:cs typeface="Calibri" pitchFamily="34" charset="-120"/>
+              </a:rPr>
+              <a:t>3. בודקים, מבינים, ומאשרים</a:t>
+            </a:r>
+            <a:endParaRPr lang="en-US" sz="1150" dirty="0"/>
+          </a:p>
+        </p:txBody>
+      </p:sp>
+      <p:sp>
+        <p:nvSpPr>
+          <p:cNvPr id="15" name="Text 13"/>
+          <p:cNvSpPr/>
+          <p:nvPr/>
+        </p:nvSpPr>
+        <p:spPr>
+          <a:xfrm>
+            <a:off x="548640" y="5468112"/>
+            <a:ext cx="11091672" cy="237744"/>
+          </a:xfrm>
+          <a:prstGeom prst="rect">
+            <a:avLst/>
+          </a:prstGeom>
+          <a:noFill/>
+          <a:ln/>
+        </p:spPr>
+        <p:txBody>
+          <a:bodyPr wrap="square" lIns="0" tIns="0" rIns="0" bIns="0" rtlCol="0" anchor="ctr"/>
+          <a:lstStyle/>
+          <a:p>
+            <a:pPr rtl="1" algn="ctr" indent="0" marL="0">
+              <a:buNone/>
+            </a:pPr>
+            <a:r>
+              <a:rPr lang="en-US" sz="1000" i="1" dirty="0">
                 <a:solidFill>
                   <a:srgbClr val="6B7280"/>
                 </a:solidFill>
@@ -10432,15 +13296,54 @@
                 <a:ea typeface="Calibri" pitchFamily="34" charset="-122"/>
                 <a:cs typeface="Calibri" pitchFamily="34" charset="-120"/>
               </a:rPr>
-              <a:t>[תמונה: ממשק Claude Code בפעולה — מפתח נותן הנחיה, הסוכן כותב קוד]</a:t>
-            </a:r>
-            <a:endParaRPr lang="en-US" sz="1300" dirty="0"/>
-          </a:p>
-        </p:txBody>
-      </p:sp>
-      <p:sp>
-        <p:nvSpPr>
-          <p:cNvPr id="9" name="Text 7"/>
+              <a:t>↺ חוזרים על זה בכל שינוי חדש</a:t>
+            </a:r>
+            <a:endParaRPr lang="en-US" sz="1000" dirty="0"/>
+          </a:p>
+        </p:txBody>
+      </p:sp>
+      <p:sp>
+        <p:nvSpPr>
+          <p:cNvPr id="16" name="Text 14"/>
+          <p:cNvSpPr/>
+          <p:nvPr/>
+        </p:nvSpPr>
+        <p:spPr>
+          <a:xfrm>
+            <a:off x="548640" y="6080760"/>
+            <a:ext cx="11091672" cy="274320"/>
+          </a:xfrm>
+          <a:prstGeom prst="rect">
+            <a:avLst/>
+          </a:prstGeom>
+          <a:noFill/>
+          <a:ln/>
+        </p:spPr>
+        <p:txBody>
+          <a:bodyPr wrap="square" lIns="0" tIns="0" rIns="0" bIns="0" rtlCol="0" anchor="ctr"/>
+          <a:lstStyle/>
+          <a:p>
+            <a:pPr rtl="1" algn="r" indent="0" marL="0">
+              <a:buNone/>
+            </a:pPr>
+            <a:r>
+              <a:rPr lang="en-US" sz="1000" i="1" dirty="0">
+                <a:solidFill>
+                  <a:srgbClr val="6B7280"/>
+                </a:solidFill>
+                <a:latin typeface="Calibri" pitchFamily="34" charset="0"/>
+                <a:ea typeface="Calibri" pitchFamily="34" charset="-122"/>
+                <a:cs typeface="Calibri" pitchFamily="34" charset="-120"/>
+              </a:rPr>
+              <a:t>איור: מעגל העבודה של Vibe Coding: מנחים בשפה טבעית → הסוכן פועל על הקבצים → בודקים ומאשרים — וחוזר חלילה בכל שינוי.</a:t>
+            </a:r>
+            <a:endParaRPr lang="en-US" sz="1000" dirty="0"/>
+          </a:p>
+        </p:txBody>
+      </p:sp>
+      <p:sp>
+        <p:nvSpPr>
+          <p:cNvPr id="17" name="Text 15"/>
           <p:cNvSpPr/>
           <p:nvPr/>
         </p:nvSpPr>
@@ -10776,6 +13679,1093 @@
         </p:nvSpPr>
         <p:spPr>
           <a:xfrm>
+            <a:off x="10040112" y="4846320"/>
+            <a:ext cx="1600200" cy="380390"/>
+          </a:xfrm>
+          <a:prstGeom prst="rect">
+            <a:avLst/>
+          </a:prstGeom>
+          <a:noFill/>
+          <a:ln/>
+        </p:spPr>
+        <p:txBody>
+          <a:bodyPr wrap="square" lIns="0" tIns="0" rIns="0" bIns="0" rtlCol="0" anchor="ctr"/>
+          <a:lstStyle/>
+          <a:p>
+            <a:pPr rtl="1" algn="r" indent="0" marL="0">
+              <a:buNone/>
+            </a:pPr>
+            <a:r>
+              <a:rPr lang="en-US" sz="1100" b="1" dirty="0">
+                <a:solidFill>
+                  <a:srgbClr val="1B1F3B"/>
+                </a:solidFill>
+                <a:latin typeface="Arial" pitchFamily="34" charset="0"/>
+                <a:ea typeface="Arial" pitchFamily="34" charset="-122"/>
+                <a:cs typeface="Arial" pitchFamily="34" charset="-120"/>
+              </a:rPr>
+              <a:t>הגישה הישנה</a:t>
+            </a:r>
+            <a:endParaRPr lang="en-US" sz="1100" dirty="0"/>
+          </a:p>
+        </p:txBody>
+      </p:sp>
+      <p:sp>
+        <p:nvSpPr>
+          <p:cNvPr id="8" name="Shape 6"/>
+          <p:cNvSpPr/>
+          <p:nvPr/>
+        </p:nvSpPr>
+        <p:spPr>
+          <a:xfrm>
+            <a:off x="7646670" y="4846320"/>
+            <a:ext cx="2256282" cy="380390"/>
+          </a:xfrm>
+          <a:prstGeom prst="rect">
+            <a:avLst/>
+          </a:prstGeom>
+          <a:solidFill>
+            <a:srgbClr val="F6F6F8"/>
+          </a:solidFill>
+          <a:ln w="12700">
+            <a:solidFill>
+              <a:srgbClr val="B8B8C8"/>
+            </a:solidFill>
+            <a:prstDash val="solid"/>
+          </a:ln>
+        </p:spPr>
+      </p:sp>
+      <p:sp>
+        <p:nvSpPr>
+          <p:cNvPr id="9" name="Text 7"/>
+          <p:cNvSpPr/>
+          <p:nvPr/>
+        </p:nvSpPr>
+        <p:spPr>
+          <a:xfrm>
+            <a:off x="7646670" y="4846320"/>
+            <a:ext cx="2256282" cy="380390"/>
+          </a:xfrm>
+          <a:prstGeom prst="rect">
+            <a:avLst/>
+          </a:prstGeom>
+          <a:noFill/>
+          <a:ln/>
+        </p:spPr>
+        <p:txBody>
+          <a:bodyPr wrap="square" lIns="25400" tIns="25400" rIns="25400" bIns="25400" rtlCol="0" anchor="ctr"/>
+          <a:lstStyle/>
+          <a:p>
+            <a:pPr rtl="1" algn="ctr" indent="0" marL="0">
+              <a:buNone/>
+            </a:pPr>
+            <a:r>
+              <a:rPr lang="en-US" sz="1000" dirty="0">
+                <a:solidFill>
+                  <a:srgbClr val="1B1F3B"/>
+                </a:solidFill>
+                <a:latin typeface="Calibri" pitchFamily="34" charset="0"/>
+                <a:ea typeface="Calibri" pitchFamily="34" charset="-122"/>
+                <a:cs typeface="Calibri" pitchFamily="34" charset="-120"/>
+              </a:rPr>
+              <a:t>הבנת דרישה</a:t>
+            </a:r>
+            <a:endParaRPr lang="en-US" sz="1000" dirty="0"/>
+          </a:p>
+        </p:txBody>
+      </p:sp>
+      <p:sp>
+        <p:nvSpPr>
+          <p:cNvPr id="10" name="Shape 8"/>
+          <p:cNvSpPr/>
+          <p:nvPr/>
+        </p:nvSpPr>
+        <p:spPr>
+          <a:xfrm>
+            <a:off x="7536942" y="5036515"/>
+            <a:ext cx="109728" cy="0"/>
+          </a:xfrm>
+          <a:prstGeom prst="line">
+            <a:avLst/>
+          </a:prstGeom>
+          <a:noFill/>
+          <a:ln w="12700">
+            <a:solidFill>
+              <a:srgbClr val="B8B8C8"/>
+            </a:solidFill>
+            <a:prstDash val="solid"/>
+          </a:ln>
+        </p:spPr>
+      </p:sp>
+      <p:sp>
+        <p:nvSpPr>
+          <p:cNvPr id="11" name="Shape 9"/>
+          <p:cNvSpPr/>
+          <p:nvPr/>
+        </p:nvSpPr>
+        <p:spPr>
+          <a:xfrm>
+            <a:off x="5280660" y="4846320"/>
+            <a:ext cx="2256282" cy="380390"/>
+          </a:xfrm>
+          <a:prstGeom prst="rect">
+            <a:avLst/>
+          </a:prstGeom>
+          <a:solidFill>
+            <a:srgbClr val="F6F6F8"/>
+          </a:solidFill>
+          <a:ln w="12700">
+            <a:solidFill>
+              <a:srgbClr val="B8B8C8"/>
+            </a:solidFill>
+            <a:prstDash val="solid"/>
+          </a:ln>
+        </p:spPr>
+      </p:sp>
+      <p:sp>
+        <p:nvSpPr>
+          <p:cNvPr id="12" name="Text 10"/>
+          <p:cNvSpPr/>
+          <p:nvPr/>
+        </p:nvSpPr>
+        <p:spPr>
+          <a:xfrm>
+            <a:off x="5280660" y="4846320"/>
+            <a:ext cx="2256282" cy="380390"/>
+          </a:xfrm>
+          <a:prstGeom prst="rect">
+            <a:avLst/>
+          </a:prstGeom>
+          <a:noFill/>
+          <a:ln/>
+        </p:spPr>
+        <p:txBody>
+          <a:bodyPr wrap="square" lIns="25400" tIns="25400" rIns="25400" bIns="25400" rtlCol="0" anchor="ctr"/>
+          <a:lstStyle/>
+          <a:p>
+            <a:pPr rtl="1" algn="ctr" indent="0" marL="0">
+              <a:buNone/>
+            </a:pPr>
+            <a:r>
+              <a:rPr lang="en-US" sz="1000" dirty="0">
+                <a:solidFill>
+                  <a:srgbClr val="1B1F3B"/>
+                </a:solidFill>
+                <a:latin typeface="Calibri" pitchFamily="34" charset="0"/>
+                <a:ea typeface="Calibri" pitchFamily="34" charset="-122"/>
+                <a:cs typeface="Calibri" pitchFamily="34" charset="-120"/>
+              </a:rPr>
+              <a:t>תכנון</a:t>
+            </a:r>
+            <a:endParaRPr lang="en-US" sz="1000" dirty="0"/>
+          </a:p>
+        </p:txBody>
+      </p:sp>
+      <p:sp>
+        <p:nvSpPr>
+          <p:cNvPr id="13" name="Shape 11"/>
+          <p:cNvSpPr/>
+          <p:nvPr/>
+        </p:nvSpPr>
+        <p:spPr>
+          <a:xfrm>
+            <a:off x="5170932" y="5036515"/>
+            <a:ext cx="109728" cy="0"/>
+          </a:xfrm>
+          <a:prstGeom prst="line">
+            <a:avLst/>
+          </a:prstGeom>
+          <a:noFill/>
+          <a:ln w="12700">
+            <a:solidFill>
+              <a:srgbClr val="B8B8C8"/>
+            </a:solidFill>
+            <a:prstDash val="solid"/>
+          </a:ln>
+        </p:spPr>
+      </p:sp>
+      <p:sp>
+        <p:nvSpPr>
+          <p:cNvPr id="14" name="Shape 12"/>
+          <p:cNvSpPr/>
+          <p:nvPr/>
+        </p:nvSpPr>
+        <p:spPr>
+          <a:xfrm>
+            <a:off x="2914650" y="4846320"/>
+            <a:ext cx="2256282" cy="380390"/>
+          </a:xfrm>
+          <a:prstGeom prst="rect">
+            <a:avLst/>
+          </a:prstGeom>
+          <a:solidFill>
+            <a:srgbClr val="F6F6F8"/>
+          </a:solidFill>
+          <a:ln w="12700">
+            <a:solidFill>
+              <a:srgbClr val="B8B8C8"/>
+            </a:solidFill>
+            <a:prstDash val="solid"/>
+          </a:ln>
+        </p:spPr>
+      </p:sp>
+      <p:sp>
+        <p:nvSpPr>
+          <p:cNvPr id="15" name="Text 13"/>
+          <p:cNvSpPr/>
+          <p:nvPr/>
+        </p:nvSpPr>
+        <p:spPr>
+          <a:xfrm>
+            <a:off x="2914650" y="4846320"/>
+            <a:ext cx="2256282" cy="380390"/>
+          </a:xfrm>
+          <a:prstGeom prst="rect">
+            <a:avLst/>
+          </a:prstGeom>
+          <a:noFill/>
+          <a:ln/>
+        </p:spPr>
+        <p:txBody>
+          <a:bodyPr wrap="square" lIns="25400" tIns="25400" rIns="25400" bIns="25400" rtlCol="0" anchor="ctr"/>
+          <a:lstStyle/>
+          <a:p>
+            <a:pPr rtl="1" algn="ctr" indent="0" marL="0">
+              <a:buNone/>
+            </a:pPr>
+            <a:r>
+              <a:rPr lang="en-US" sz="1000" dirty="0">
+                <a:solidFill>
+                  <a:srgbClr val="1B1F3B"/>
+                </a:solidFill>
+                <a:latin typeface="Calibri" pitchFamily="34" charset="0"/>
+                <a:ea typeface="Calibri" pitchFamily="34" charset="-122"/>
+                <a:cs typeface="Calibri" pitchFamily="34" charset="-120"/>
+              </a:rPr>
+              <a:t>כתיבת קוד</a:t>
+            </a:r>
+            <a:endParaRPr lang="en-US" sz="1000" dirty="0"/>
+          </a:p>
+        </p:txBody>
+      </p:sp>
+      <p:sp>
+        <p:nvSpPr>
+          <p:cNvPr id="16" name="Shape 14"/>
+          <p:cNvSpPr/>
+          <p:nvPr/>
+        </p:nvSpPr>
+        <p:spPr>
+          <a:xfrm>
+            <a:off x="3923919" y="4691786"/>
+            <a:ext cx="237744" cy="237744"/>
+          </a:xfrm>
+          <a:prstGeom prst="ellipse">
+            <a:avLst/>
+          </a:prstGeom>
+          <a:solidFill>
+            <a:srgbClr val="6B7280"/>
+          </a:solidFill>
+          <a:ln w="12700">
+            <a:solidFill>
+              <a:srgbClr val="FFFFFF"/>
+            </a:solidFill>
+            <a:prstDash val="solid"/>
+          </a:ln>
+        </p:spPr>
+      </p:sp>
+      <p:sp>
+        <p:nvSpPr>
+          <p:cNvPr id="17" name="Text 15"/>
+          <p:cNvSpPr/>
+          <p:nvPr/>
+        </p:nvSpPr>
+        <p:spPr>
+          <a:xfrm>
+            <a:off x="3923919" y="4691786"/>
+            <a:ext cx="237744" cy="237744"/>
+          </a:xfrm>
+          <a:prstGeom prst="rect">
+            <a:avLst/>
+          </a:prstGeom>
+          <a:noFill/>
+          <a:ln/>
+        </p:spPr>
+        <p:txBody>
+          <a:bodyPr wrap="square" lIns="0" tIns="0" rIns="0" bIns="0" rtlCol="0" anchor="ctr"/>
+          <a:lstStyle/>
+          <a:p>
+            <a:pPr algn="ctr" indent="0" marL="0">
+              <a:buNone/>
+            </a:pPr>
+            <a:r>
+              <a:rPr lang="en-US" sz="700" b="1" dirty="0">
+                <a:solidFill>
+                  <a:srgbClr val="FFFFFF"/>
+                </a:solidFill>
+                <a:latin typeface="Arial" pitchFamily="34" charset="0"/>
+                <a:ea typeface="Arial" pitchFamily="34" charset="-122"/>
+                <a:cs typeface="Arial" pitchFamily="34" charset="-120"/>
+              </a:rPr>
+              <a:t>AI</a:t>
+            </a:r>
+            <a:endParaRPr lang="en-US" sz="700" dirty="0"/>
+          </a:p>
+        </p:txBody>
+      </p:sp>
+      <p:sp>
+        <p:nvSpPr>
+          <p:cNvPr id="18" name="Shape 16"/>
+          <p:cNvSpPr/>
+          <p:nvPr/>
+        </p:nvSpPr>
+        <p:spPr>
+          <a:xfrm>
+            <a:off x="2804922" y="5036515"/>
+            <a:ext cx="109728" cy="0"/>
+          </a:xfrm>
+          <a:prstGeom prst="line">
+            <a:avLst/>
+          </a:prstGeom>
+          <a:noFill/>
+          <a:ln w="12700">
+            <a:solidFill>
+              <a:srgbClr val="B8B8C8"/>
+            </a:solidFill>
+            <a:prstDash val="solid"/>
+          </a:ln>
+        </p:spPr>
+      </p:sp>
+      <p:sp>
+        <p:nvSpPr>
+          <p:cNvPr id="19" name="Shape 17"/>
+          <p:cNvSpPr/>
+          <p:nvPr/>
+        </p:nvSpPr>
+        <p:spPr>
+          <a:xfrm>
+            <a:off x="548640" y="4846320"/>
+            <a:ext cx="2256282" cy="380390"/>
+          </a:xfrm>
+          <a:prstGeom prst="rect">
+            <a:avLst/>
+          </a:prstGeom>
+          <a:solidFill>
+            <a:srgbClr val="F6F6F8"/>
+          </a:solidFill>
+          <a:ln w="12700">
+            <a:solidFill>
+              <a:srgbClr val="B8B8C8"/>
+            </a:solidFill>
+            <a:prstDash val="solid"/>
+          </a:ln>
+        </p:spPr>
+      </p:sp>
+      <p:sp>
+        <p:nvSpPr>
+          <p:cNvPr id="20" name="Text 18"/>
+          <p:cNvSpPr/>
+          <p:nvPr/>
+        </p:nvSpPr>
+        <p:spPr>
+          <a:xfrm>
+            <a:off x="548640" y="4846320"/>
+            <a:ext cx="2256282" cy="380390"/>
+          </a:xfrm>
+          <a:prstGeom prst="rect">
+            <a:avLst/>
+          </a:prstGeom>
+          <a:noFill/>
+          <a:ln/>
+        </p:spPr>
+        <p:txBody>
+          <a:bodyPr wrap="square" lIns="25400" tIns="25400" rIns="25400" bIns="25400" rtlCol="0" anchor="ctr"/>
+          <a:lstStyle/>
+          <a:p>
+            <a:pPr rtl="1" algn="ctr" indent="0" marL="0">
+              <a:buNone/>
+            </a:pPr>
+            <a:r>
+              <a:rPr lang="en-US" sz="1000" dirty="0">
+                <a:solidFill>
+                  <a:srgbClr val="1B1F3B"/>
+                </a:solidFill>
+                <a:latin typeface="Calibri" pitchFamily="34" charset="0"/>
+                <a:ea typeface="Calibri" pitchFamily="34" charset="-122"/>
+                <a:cs typeface="Calibri" pitchFamily="34" charset="-120"/>
+              </a:rPr>
+              <a:t>בדיקה ופריסה</a:t>
+            </a:r>
+            <a:endParaRPr lang="en-US" sz="1000" dirty="0"/>
+          </a:p>
+        </p:txBody>
+      </p:sp>
+      <p:sp>
+        <p:nvSpPr>
+          <p:cNvPr id="21" name="Text 19"/>
+          <p:cNvSpPr/>
+          <p:nvPr/>
+        </p:nvSpPr>
+        <p:spPr>
+          <a:xfrm>
+            <a:off x="10040112" y="5563210"/>
+            <a:ext cx="1600200" cy="380390"/>
+          </a:xfrm>
+          <a:prstGeom prst="rect">
+            <a:avLst/>
+          </a:prstGeom>
+          <a:noFill/>
+          <a:ln/>
+        </p:spPr>
+        <p:txBody>
+          <a:bodyPr wrap="square" lIns="0" tIns="0" rIns="0" bIns="0" rtlCol="0" anchor="ctr"/>
+          <a:lstStyle/>
+          <a:p>
+            <a:pPr rtl="1" algn="r" indent="0" marL="0">
+              <a:buNone/>
+            </a:pPr>
+            <a:r>
+              <a:rPr lang="en-US" sz="1100" b="1" dirty="0">
+                <a:solidFill>
+                  <a:srgbClr val="1B1F3B"/>
+                </a:solidFill>
+                <a:latin typeface="Arial" pitchFamily="34" charset="0"/>
+                <a:ea typeface="Arial" pitchFamily="34" charset="-122"/>
+                <a:cs typeface="Arial" pitchFamily="34" charset="-120"/>
+              </a:rPr>
+              <a:t>AI-Native (הקורס)</a:t>
+            </a:r>
+            <a:endParaRPr lang="en-US" sz="1100" dirty="0"/>
+          </a:p>
+        </p:txBody>
+      </p:sp>
+      <p:sp>
+        <p:nvSpPr>
+          <p:cNvPr id="22" name="Shape 20"/>
+          <p:cNvSpPr/>
+          <p:nvPr/>
+        </p:nvSpPr>
+        <p:spPr>
+          <a:xfrm>
+            <a:off x="7646670" y="5563210"/>
+            <a:ext cx="2256282" cy="380390"/>
+          </a:xfrm>
+          <a:prstGeom prst="rect">
+            <a:avLst/>
+          </a:prstGeom>
+          <a:solidFill>
+            <a:srgbClr val="F6F6F8"/>
+          </a:solidFill>
+          <a:ln w="12700">
+            <a:solidFill>
+              <a:srgbClr val="B8B8C8"/>
+            </a:solidFill>
+            <a:prstDash val="solid"/>
+          </a:ln>
+        </p:spPr>
+      </p:sp>
+      <p:sp>
+        <p:nvSpPr>
+          <p:cNvPr id="23" name="Text 21"/>
+          <p:cNvSpPr/>
+          <p:nvPr/>
+        </p:nvSpPr>
+        <p:spPr>
+          <a:xfrm>
+            <a:off x="7646670" y="5563210"/>
+            <a:ext cx="2256282" cy="380390"/>
+          </a:xfrm>
+          <a:prstGeom prst="rect">
+            <a:avLst/>
+          </a:prstGeom>
+          <a:noFill/>
+          <a:ln/>
+        </p:spPr>
+        <p:txBody>
+          <a:bodyPr wrap="square" lIns="25400" tIns="25400" rIns="25400" bIns="25400" rtlCol="0" anchor="ctr"/>
+          <a:lstStyle/>
+          <a:p>
+            <a:pPr rtl="1" algn="ctr" indent="0" marL="0">
+              <a:buNone/>
+            </a:pPr>
+            <a:r>
+              <a:rPr lang="en-US" sz="1000" dirty="0">
+                <a:solidFill>
+                  <a:srgbClr val="1B1F3B"/>
+                </a:solidFill>
+                <a:latin typeface="Calibri" pitchFamily="34" charset="0"/>
+                <a:ea typeface="Calibri" pitchFamily="34" charset="-122"/>
+                <a:cs typeface="Calibri" pitchFamily="34" charset="-120"/>
+              </a:rPr>
+              <a:t>הבנת דרישה</a:t>
+            </a:r>
+            <a:endParaRPr lang="en-US" sz="1000" dirty="0"/>
+          </a:p>
+        </p:txBody>
+      </p:sp>
+      <p:sp>
+        <p:nvSpPr>
+          <p:cNvPr id="24" name="Shape 22"/>
+          <p:cNvSpPr/>
+          <p:nvPr/>
+        </p:nvSpPr>
+        <p:spPr>
+          <a:xfrm>
+            <a:off x="8655939" y="5408676"/>
+            <a:ext cx="237744" cy="237744"/>
+          </a:xfrm>
+          <a:prstGeom prst="ellipse">
+            <a:avLst/>
+          </a:prstGeom>
+          <a:solidFill>
+            <a:srgbClr val="00A88A"/>
+          </a:solidFill>
+          <a:ln w="12700">
+            <a:solidFill>
+              <a:srgbClr val="FFFFFF"/>
+            </a:solidFill>
+            <a:prstDash val="solid"/>
+          </a:ln>
+        </p:spPr>
+      </p:sp>
+      <p:sp>
+        <p:nvSpPr>
+          <p:cNvPr id="25" name="Text 23"/>
+          <p:cNvSpPr/>
+          <p:nvPr/>
+        </p:nvSpPr>
+        <p:spPr>
+          <a:xfrm>
+            <a:off x="8655939" y="5408676"/>
+            <a:ext cx="237744" cy="237744"/>
+          </a:xfrm>
+          <a:prstGeom prst="rect">
+            <a:avLst/>
+          </a:prstGeom>
+          <a:noFill/>
+          <a:ln/>
+        </p:spPr>
+        <p:txBody>
+          <a:bodyPr wrap="square" lIns="0" tIns="0" rIns="0" bIns="0" rtlCol="0" anchor="ctr"/>
+          <a:lstStyle/>
+          <a:p>
+            <a:pPr algn="ctr" indent="0" marL="0">
+              <a:buNone/>
+            </a:pPr>
+            <a:r>
+              <a:rPr lang="en-US" sz="700" b="1" dirty="0">
+                <a:solidFill>
+                  <a:srgbClr val="FFFFFF"/>
+                </a:solidFill>
+                <a:latin typeface="Arial" pitchFamily="34" charset="0"/>
+                <a:ea typeface="Arial" pitchFamily="34" charset="-122"/>
+                <a:cs typeface="Arial" pitchFamily="34" charset="-120"/>
+              </a:rPr>
+              <a:t>AI</a:t>
+            </a:r>
+            <a:endParaRPr lang="en-US" sz="700" dirty="0"/>
+          </a:p>
+        </p:txBody>
+      </p:sp>
+      <p:sp>
+        <p:nvSpPr>
+          <p:cNvPr id="26" name="Shape 24"/>
+          <p:cNvSpPr/>
+          <p:nvPr/>
+        </p:nvSpPr>
+        <p:spPr>
+          <a:xfrm>
+            <a:off x="7536942" y="5753405"/>
+            <a:ext cx="109728" cy="0"/>
+          </a:xfrm>
+          <a:prstGeom prst="line">
+            <a:avLst/>
+          </a:prstGeom>
+          <a:noFill/>
+          <a:ln w="12700">
+            <a:solidFill>
+              <a:srgbClr val="B8B8C8"/>
+            </a:solidFill>
+            <a:prstDash val="solid"/>
+          </a:ln>
+        </p:spPr>
+      </p:sp>
+      <p:sp>
+        <p:nvSpPr>
+          <p:cNvPr id="27" name="Shape 25"/>
+          <p:cNvSpPr/>
+          <p:nvPr/>
+        </p:nvSpPr>
+        <p:spPr>
+          <a:xfrm>
+            <a:off x="5280660" y="5563210"/>
+            <a:ext cx="2256282" cy="380390"/>
+          </a:xfrm>
+          <a:prstGeom prst="rect">
+            <a:avLst/>
+          </a:prstGeom>
+          <a:solidFill>
+            <a:srgbClr val="F6F6F8"/>
+          </a:solidFill>
+          <a:ln w="12700">
+            <a:solidFill>
+              <a:srgbClr val="B8B8C8"/>
+            </a:solidFill>
+            <a:prstDash val="solid"/>
+          </a:ln>
+        </p:spPr>
+      </p:sp>
+      <p:sp>
+        <p:nvSpPr>
+          <p:cNvPr id="28" name="Text 26"/>
+          <p:cNvSpPr/>
+          <p:nvPr/>
+        </p:nvSpPr>
+        <p:spPr>
+          <a:xfrm>
+            <a:off x="5280660" y="5563210"/>
+            <a:ext cx="2256282" cy="380390"/>
+          </a:xfrm>
+          <a:prstGeom prst="rect">
+            <a:avLst/>
+          </a:prstGeom>
+          <a:noFill/>
+          <a:ln/>
+        </p:spPr>
+        <p:txBody>
+          <a:bodyPr wrap="square" lIns="25400" tIns="25400" rIns="25400" bIns="25400" rtlCol="0" anchor="ctr"/>
+          <a:lstStyle/>
+          <a:p>
+            <a:pPr rtl="1" algn="ctr" indent="0" marL="0">
+              <a:buNone/>
+            </a:pPr>
+            <a:r>
+              <a:rPr lang="en-US" sz="1000" dirty="0">
+                <a:solidFill>
+                  <a:srgbClr val="1B1F3B"/>
+                </a:solidFill>
+                <a:latin typeface="Calibri" pitchFamily="34" charset="0"/>
+                <a:ea typeface="Calibri" pitchFamily="34" charset="-122"/>
+                <a:cs typeface="Calibri" pitchFamily="34" charset="-120"/>
+              </a:rPr>
+              <a:t>תכנון</a:t>
+            </a:r>
+            <a:endParaRPr lang="en-US" sz="1000" dirty="0"/>
+          </a:p>
+        </p:txBody>
+      </p:sp>
+      <p:sp>
+        <p:nvSpPr>
+          <p:cNvPr id="29" name="Shape 27"/>
+          <p:cNvSpPr/>
+          <p:nvPr/>
+        </p:nvSpPr>
+        <p:spPr>
+          <a:xfrm>
+            <a:off x="6289929" y="5408676"/>
+            <a:ext cx="237744" cy="237744"/>
+          </a:xfrm>
+          <a:prstGeom prst="ellipse">
+            <a:avLst/>
+          </a:prstGeom>
+          <a:solidFill>
+            <a:srgbClr val="00A88A"/>
+          </a:solidFill>
+          <a:ln w="12700">
+            <a:solidFill>
+              <a:srgbClr val="FFFFFF"/>
+            </a:solidFill>
+            <a:prstDash val="solid"/>
+          </a:ln>
+        </p:spPr>
+      </p:sp>
+      <p:sp>
+        <p:nvSpPr>
+          <p:cNvPr id="30" name="Text 28"/>
+          <p:cNvSpPr/>
+          <p:nvPr/>
+        </p:nvSpPr>
+        <p:spPr>
+          <a:xfrm>
+            <a:off x="6289929" y="5408676"/>
+            <a:ext cx="237744" cy="237744"/>
+          </a:xfrm>
+          <a:prstGeom prst="rect">
+            <a:avLst/>
+          </a:prstGeom>
+          <a:noFill/>
+          <a:ln/>
+        </p:spPr>
+        <p:txBody>
+          <a:bodyPr wrap="square" lIns="0" tIns="0" rIns="0" bIns="0" rtlCol="0" anchor="ctr"/>
+          <a:lstStyle/>
+          <a:p>
+            <a:pPr algn="ctr" indent="0" marL="0">
+              <a:buNone/>
+            </a:pPr>
+            <a:r>
+              <a:rPr lang="en-US" sz="700" b="1" dirty="0">
+                <a:solidFill>
+                  <a:srgbClr val="FFFFFF"/>
+                </a:solidFill>
+                <a:latin typeface="Arial" pitchFamily="34" charset="0"/>
+                <a:ea typeface="Arial" pitchFamily="34" charset="-122"/>
+                <a:cs typeface="Arial" pitchFamily="34" charset="-120"/>
+              </a:rPr>
+              <a:t>AI</a:t>
+            </a:r>
+            <a:endParaRPr lang="en-US" sz="700" dirty="0"/>
+          </a:p>
+        </p:txBody>
+      </p:sp>
+      <p:sp>
+        <p:nvSpPr>
+          <p:cNvPr id="31" name="Shape 29"/>
+          <p:cNvSpPr/>
+          <p:nvPr/>
+        </p:nvSpPr>
+        <p:spPr>
+          <a:xfrm>
+            <a:off x="5170932" y="5753405"/>
+            <a:ext cx="109728" cy="0"/>
+          </a:xfrm>
+          <a:prstGeom prst="line">
+            <a:avLst/>
+          </a:prstGeom>
+          <a:noFill/>
+          <a:ln w="12700">
+            <a:solidFill>
+              <a:srgbClr val="B8B8C8"/>
+            </a:solidFill>
+            <a:prstDash val="solid"/>
+          </a:ln>
+        </p:spPr>
+      </p:sp>
+      <p:sp>
+        <p:nvSpPr>
+          <p:cNvPr id="32" name="Shape 30"/>
+          <p:cNvSpPr/>
+          <p:nvPr/>
+        </p:nvSpPr>
+        <p:spPr>
+          <a:xfrm>
+            <a:off x="2914650" y="5563210"/>
+            <a:ext cx="2256282" cy="380390"/>
+          </a:xfrm>
+          <a:prstGeom prst="rect">
+            <a:avLst/>
+          </a:prstGeom>
+          <a:solidFill>
+            <a:srgbClr val="F6F6F8"/>
+          </a:solidFill>
+          <a:ln w="12700">
+            <a:solidFill>
+              <a:srgbClr val="B8B8C8"/>
+            </a:solidFill>
+            <a:prstDash val="solid"/>
+          </a:ln>
+        </p:spPr>
+      </p:sp>
+      <p:sp>
+        <p:nvSpPr>
+          <p:cNvPr id="33" name="Text 31"/>
+          <p:cNvSpPr/>
+          <p:nvPr/>
+        </p:nvSpPr>
+        <p:spPr>
+          <a:xfrm>
+            <a:off x="2914650" y="5563210"/>
+            <a:ext cx="2256282" cy="380390"/>
+          </a:xfrm>
+          <a:prstGeom prst="rect">
+            <a:avLst/>
+          </a:prstGeom>
+          <a:noFill/>
+          <a:ln/>
+        </p:spPr>
+        <p:txBody>
+          <a:bodyPr wrap="square" lIns="25400" tIns="25400" rIns="25400" bIns="25400" rtlCol="0" anchor="ctr"/>
+          <a:lstStyle/>
+          <a:p>
+            <a:pPr rtl="1" algn="ctr" indent="0" marL="0">
+              <a:buNone/>
+            </a:pPr>
+            <a:r>
+              <a:rPr lang="en-US" sz="1000" dirty="0">
+                <a:solidFill>
+                  <a:srgbClr val="1B1F3B"/>
+                </a:solidFill>
+                <a:latin typeface="Calibri" pitchFamily="34" charset="0"/>
+                <a:ea typeface="Calibri" pitchFamily="34" charset="-122"/>
+                <a:cs typeface="Calibri" pitchFamily="34" charset="-120"/>
+              </a:rPr>
+              <a:t>כתיבת קוד</a:t>
+            </a:r>
+            <a:endParaRPr lang="en-US" sz="1000" dirty="0"/>
+          </a:p>
+        </p:txBody>
+      </p:sp>
+      <p:sp>
+        <p:nvSpPr>
+          <p:cNvPr id="34" name="Shape 32"/>
+          <p:cNvSpPr/>
+          <p:nvPr/>
+        </p:nvSpPr>
+        <p:spPr>
+          <a:xfrm>
+            <a:off x="3923919" y="5408676"/>
+            <a:ext cx="237744" cy="237744"/>
+          </a:xfrm>
+          <a:prstGeom prst="ellipse">
+            <a:avLst/>
+          </a:prstGeom>
+          <a:solidFill>
+            <a:srgbClr val="00A88A"/>
+          </a:solidFill>
+          <a:ln w="12700">
+            <a:solidFill>
+              <a:srgbClr val="FFFFFF"/>
+            </a:solidFill>
+            <a:prstDash val="solid"/>
+          </a:ln>
+        </p:spPr>
+      </p:sp>
+      <p:sp>
+        <p:nvSpPr>
+          <p:cNvPr id="35" name="Text 33"/>
+          <p:cNvSpPr/>
+          <p:nvPr/>
+        </p:nvSpPr>
+        <p:spPr>
+          <a:xfrm>
+            <a:off x="3923919" y="5408676"/>
+            <a:ext cx="237744" cy="237744"/>
+          </a:xfrm>
+          <a:prstGeom prst="rect">
+            <a:avLst/>
+          </a:prstGeom>
+          <a:noFill/>
+          <a:ln/>
+        </p:spPr>
+        <p:txBody>
+          <a:bodyPr wrap="square" lIns="0" tIns="0" rIns="0" bIns="0" rtlCol="0" anchor="ctr"/>
+          <a:lstStyle/>
+          <a:p>
+            <a:pPr algn="ctr" indent="0" marL="0">
+              <a:buNone/>
+            </a:pPr>
+            <a:r>
+              <a:rPr lang="en-US" sz="700" b="1" dirty="0">
+                <a:solidFill>
+                  <a:srgbClr val="FFFFFF"/>
+                </a:solidFill>
+                <a:latin typeface="Arial" pitchFamily="34" charset="0"/>
+                <a:ea typeface="Arial" pitchFamily="34" charset="-122"/>
+                <a:cs typeface="Arial" pitchFamily="34" charset="-120"/>
+              </a:rPr>
+              <a:t>AI</a:t>
+            </a:r>
+            <a:endParaRPr lang="en-US" sz="700" dirty="0"/>
+          </a:p>
+        </p:txBody>
+      </p:sp>
+      <p:sp>
+        <p:nvSpPr>
+          <p:cNvPr id="36" name="Shape 34"/>
+          <p:cNvSpPr/>
+          <p:nvPr/>
+        </p:nvSpPr>
+        <p:spPr>
+          <a:xfrm>
+            <a:off x="2804922" y="5753405"/>
+            <a:ext cx="109728" cy="0"/>
+          </a:xfrm>
+          <a:prstGeom prst="line">
+            <a:avLst/>
+          </a:prstGeom>
+          <a:noFill/>
+          <a:ln w="12700">
+            <a:solidFill>
+              <a:srgbClr val="B8B8C8"/>
+            </a:solidFill>
+            <a:prstDash val="solid"/>
+          </a:ln>
+        </p:spPr>
+      </p:sp>
+      <p:sp>
+        <p:nvSpPr>
+          <p:cNvPr id="37" name="Shape 35"/>
+          <p:cNvSpPr/>
+          <p:nvPr/>
+        </p:nvSpPr>
+        <p:spPr>
+          <a:xfrm>
+            <a:off x="548640" y="5563210"/>
+            <a:ext cx="2256282" cy="380390"/>
+          </a:xfrm>
+          <a:prstGeom prst="rect">
+            <a:avLst/>
+          </a:prstGeom>
+          <a:solidFill>
+            <a:srgbClr val="F6F6F8"/>
+          </a:solidFill>
+          <a:ln w="12700">
+            <a:solidFill>
+              <a:srgbClr val="B8B8C8"/>
+            </a:solidFill>
+            <a:prstDash val="solid"/>
+          </a:ln>
+        </p:spPr>
+      </p:sp>
+      <p:sp>
+        <p:nvSpPr>
+          <p:cNvPr id="38" name="Text 36"/>
+          <p:cNvSpPr/>
+          <p:nvPr/>
+        </p:nvSpPr>
+        <p:spPr>
+          <a:xfrm>
+            <a:off x="548640" y="5563210"/>
+            <a:ext cx="2256282" cy="380390"/>
+          </a:xfrm>
+          <a:prstGeom prst="rect">
+            <a:avLst/>
+          </a:prstGeom>
+          <a:noFill/>
+          <a:ln/>
+        </p:spPr>
+        <p:txBody>
+          <a:bodyPr wrap="square" lIns="25400" tIns="25400" rIns="25400" bIns="25400" rtlCol="0" anchor="ctr"/>
+          <a:lstStyle/>
+          <a:p>
+            <a:pPr rtl="1" algn="ctr" indent="0" marL="0">
+              <a:buNone/>
+            </a:pPr>
+            <a:r>
+              <a:rPr lang="en-US" sz="1000" dirty="0">
+                <a:solidFill>
+                  <a:srgbClr val="1B1F3B"/>
+                </a:solidFill>
+                <a:latin typeface="Calibri" pitchFamily="34" charset="0"/>
+                <a:ea typeface="Calibri" pitchFamily="34" charset="-122"/>
+                <a:cs typeface="Calibri" pitchFamily="34" charset="-120"/>
+              </a:rPr>
+              <a:t>בדיקה ופריסה</a:t>
+            </a:r>
+            <a:endParaRPr lang="en-US" sz="1000" dirty="0"/>
+          </a:p>
+        </p:txBody>
+      </p:sp>
+      <p:sp>
+        <p:nvSpPr>
+          <p:cNvPr id="39" name="Shape 37"/>
+          <p:cNvSpPr/>
+          <p:nvPr/>
+        </p:nvSpPr>
+        <p:spPr>
+          <a:xfrm>
+            <a:off x="1557909" y="5408676"/>
+            <a:ext cx="237744" cy="237744"/>
+          </a:xfrm>
+          <a:prstGeom prst="ellipse">
+            <a:avLst/>
+          </a:prstGeom>
+          <a:solidFill>
+            <a:srgbClr val="00A88A"/>
+          </a:solidFill>
+          <a:ln w="12700">
+            <a:solidFill>
+              <a:srgbClr val="FFFFFF"/>
+            </a:solidFill>
+            <a:prstDash val="solid"/>
+          </a:ln>
+        </p:spPr>
+      </p:sp>
+      <p:sp>
+        <p:nvSpPr>
+          <p:cNvPr id="40" name="Text 38"/>
+          <p:cNvSpPr/>
+          <p:nvPr/>
+        </p:nvSpPr>
+        <p:spPr>
+          <a:xfrm>
+            <a:off x="1557909" y="5408676"/>
+            <a:ext cx="237744" cy="237744"/>
+          </a:xfrm>
+          <a:prstGeom prst="rect">
+            <a:avLst/>
+          </a:prstGeom>
+          <a:noFill/>
+          <a:ln/>
+        </p:spPr>
+        <p:txBody>
+          <a:bodyPr wrap="square" lIns="0" tIns="0" rIns="0" bIns="0" rtlCol="0" anchor="ctr"/>
+          <a:lstStyle/>
+          <a:p>
+            <a:pPr algn="ctr" indent="0" marL="0">
+              <a:buNone/>
+            </a:pPr>
+            <a:r>
+              <a:rPr lang="en-US" sz="700" b="1" dirty="0">
+                <a:solidFill>
+                  <a:srgbClr val="FFFFFF"/>
+                </a:solidFill>
+                <a:latin typeface="Arial" pitchFamily="34" charset="0"/>
+                <a:ea typeface="Arial" pitchFamily="34" charset="-122"/>
+                <a:cs typeface="Arial" pitchFamily="34" charset="-120"/>
+              </a:rPr>
+              <a:t>AI</a:t>
+            </a:r>
+            <a:endParaRPr lang="en-US" sz="700" dirty="0"/>
+          </a:p>
+        </p:txBody>
+      </p:sp>
+      <p:sp>
+        <p:nvSpPr>
+          <p:cNvPr id="41" name="Text 39"/>
+          <p:cNvSpPr/>
+          <p:nvPr/>
+        </p:nvSpPr>
+        <p:spPr>
+          <a:xfrm>
+            <a:off x="548640" y="6080760"/>
+            <a:ext cx="11091672" cy="274320"/>
+          </a:xfrm>
+          <a:prstGeom prst="rect">
+            <a:avLst/>
+          </a:prstGeom>
+          <a:noFill/>
+          <a:ln/>
+        </p:spPr>
+        <p:txBody>
+          <a:bodyPr wrap="square" lIns="0" tIns="0" rIns="0" bIns="0" rtlCol="0" anchor="ctr"/>
+          <a:lstStyle/>
+          <a:p>
+            <a:pPr rtl="1" algn="r" indent="0" marL="0">
+              <a:buNone/>
+            </a:pPr>
+            <a:r>
+              <a:rPr lang="en-US" sz="1000" i="1" dirty="0">
+                <a:solidFill>
+                  <a:srgbClr val="6B7280"/>
+                </a:solidFill>
+                <a:latin typeface="Calibri" pitchFamily="34" charset="0"/>
+                <a:ea typeface="Calibri" pitchFamily="34" charset="-122"/>
+                <a:cs typeface="Calibri" pitchFamily="34" charset="-120"/>
+              </a:rPr>
+              <a:t>איור: אותם 4 שלבי פיתוח בשתי גישות: בגישה הישנה AI מעורב רק בשלב כתיבת הקוד; בגישת AI-Native (הקורס) AI מעורב בכל שלב.</a:t>
+            </a:r>
+            <a:endParaRPr lang="en-US" sz="1000" dirty="0"/>
+          </a:p>
+        </p:txBody>
+      </p:sp>
+      <p:sp>
+        <p:nvSpPr>
+          <p:cNvPr id="42" name="Text 40"/>
+          <p:cNvSpPr/>
+          <p:nvPr/>
+        </p:nvSpPr>
+        <p:spPr>
+          <a:xfrm>
             <a:off x="548640" y="6492240"/>
             <a:ext cx="11091672" cy="274320"/>
           </a:xfrm>
@@ -11678,20 +15668,22 @@
         </p:nvSpPr>
         <p:spPr>
           <a:xfrm>
-            <a:off x="548640" y="4846320"/>
-            <a:ext cx="11091672" cy="1143000"/>
-          </a:xfrm>
-          <a:prstGeom prst="rect">
-            <a:avLst/>
+            <a:off x="9038844" y="4846320"/>
+            <a:ext cx="2601468" cy="502920"/>
+          </a:xfrm>
+          <a:prstGeom prst="roundRect">
+            <a:avLst>
+              <a:gd name="adj" fmla="val 10909"/>
+            </a:avLst>
           </a:prstGeom>
           <a:solidFill>
             <a:srgbClr val="F6F6F8"/>
           </a:solidFill>
-          <a:ln w="12700">
+          <a:ln w="15875">
             <a:solidFill>
               <a:srgbClr val="B8B8C8"/>
             </a:solidFill>
-            <a:prstDash val="dash"/>
+            <a:prstDash val="solid"/>
           </a:ln>
         </p:spPr>
       </p:sp>
@@ -11703,24 +15695,333 @@
         </p:nvSpPr>
         <p:spPr>
           <a:xfrm>
+            <a:off x="9038844" y="4846320"/>
+            <a:ext cx="2601468" cy="502920"/>
+          </a:xfrm>
+          <a:prstGeom prst="rect">
+            <a:avLst/>
+          </a:prstGeom>
+          <a:noFill/>
+          <a:ln/>
+        </p:spPr>
+        <p:txBody>
+          <a:bodyPr wrap="square" lIns="50800" tIns="50800" rIns="50800" bIns="50800" rtlCol="0" anchor="ctr"/>
+          <a:lstStyle/>
+          <a:p>
+            <a:pPr rtl="1" algn="ctr" indent="0" marL="0">
+              <a:buNone/>
+            </a:pPr>
+            <a:r>
+              <a:rPr lang="en-US" sz="1200" dirty="0">
+                <a:solidFill>
+                  <a:srgbClr val="1B1F3B"/>
+                </a:solidFill>
+                <a:latin typeface="Calibri" pitchFamily="34" charset="0"/>
+                <a:ea typeface="Calibri" pitchFamily="34" charset="-122"/>
+                <a:cs typeface="Calibri" pitchFamily="34" charset="-120"/>
+              </a:rPr>
+              <a:t>קוד מכונה</a:t>
+            </a:r>
+            <a:endParaRPr lang="en-US" sz="1200" dirty="0"/>
+          </a:p>
+        </p:txBody>
+      </p:sp>
+      <p:sp>
+        <p:nvSpPr>
+          <p:cNvPr id="9" name="Shape 7"/>
+          <p:cNvSpPr/>
+          <p:nvPr/>
+        </p:nvSpPr>
+        <p:spPr>
+          <a:xfrm>
+            <a:off x="8828532" y="5097780"/>
+            <a:ext cx="192024" cy="0"/>
+          </a:xfrm>
+          <a:prstGeom prst="line">
+            <a:avLst/>
+          </a:prstGeom>
+          <a:noFill/>
+          <a:ln w="19050">
+            <a:solidFill>
+              <a:srgbClr val="B8B8C8"/>
+            </a:solidFill>
+            <a:prstDash val="solid"/>
+            <a:headEnd type="triangle"/>
+          </a:ln>
+        </p:spPr>
+      </p:sp>
+      <p:sp>
+        <p:nvSpPr>
+          <p:cNvPr id="10" name="Shape 8"/>
+          <p:cNvSpPr/>
+          <p:nvPr/>
+        </p:nvSpPr>
+        <p:spPr>
+          <a:xfrm>
+            <a:off x="6208776" y="4846320"/>
+            <a:ext cx="2601468" cy="502920"/>
+          </a:xfrm>
+          <a:prstGeom prst="roundRect">
+            <a:avLst>
+              <a:gd name="adj" fmla="val 10909"/>
+            </a:avLst>
+          </a:prstGeom>
+          <a:solidFill>
+            <a:srgbClr val="F6F6F8"/>
+          </a:solidFill>
+          <a:ln w="15875">
+            <a:solidFill>
+              <a:srgbClr val="B8B8C8"/>
+            </a:solidFill>
+            <a:prstDash val="solid"/>
+          </a:ln>
+        </p:spPr>
+      </p:sp>
+      <p:sp>
+        <p:nvSpPr>
+          <p:cNvPr id="11" name="Text 9"/>
+          <p:cNvSpPr/>
+          <p:nvPr/>
+        </p:nvSpPr>
+        <p:spPr>
+          <a:xfrm>
+            <a:off x="6208776" y="4846320"/>
+            <a:ext cx="2601468" cy="502920"/>
+          </a:xfrm>
+          <a:prstGeom prst="rect">
+            <a:avLst/>
+          </a:prstGeom>
+          <a:noFill/>
+          <a:ln/>
+        </p:spPr>
+        <p:txBody>
+          <a:bodyPr wrap="square" lIns="50800" tIns="50800" rIns="50800" bIns="50800" rtlCol="0" anchor="ctr"/>
+          <a:lstStyle/>
+          <a:p>
+            <a:pPr rtl="1" algn="ctr" indent="0" marL="0">
+              <a:buNone/>
+            </a:pPr>
+            <a:r>
+              <a:rPr lang="en-US" sz="1200" dirty="0">
+                <a:solidFill>
+                  <a:srgbClr val="1B1F3B"/>
+                </a:solidFill>
+                <a:latin typeface="Calibri" pitchFamily="34" charset="0"/>
+                <a:ea typeface="Calibri" pitchFamily="34" charset="-122"/>
+                <a:cs typeface="Calibri" pitchFamily="34" charset="-120"/>
+              </a:rPr>
+              <a:t>שפות עיליות + IDE</a:t>
+            </a:r>
+            <a:endParaRPr lang="en-US" sz="1200" dirty="0"/>
+          </a:p>
+        </p:txBody>
+      </p:sp>
+      <p:sp>
+        <p:nvSpPr>
+          <p:cNvPr id="12" name="Shape 10"/>
+          <p:cNvSpPr/>
+          <p:nvPr/>
+        </p:nvSpPr>
+        <p:spPr>
+          <a:xfrm>
+            <a:off x="5998464" y="5097780"/>
+            <a:ext cx="192024" cy="0"/>
+          </a:xfrm>
+          <a:prstGeom prst="line">
+            <a:avLst/>
+          </a:prstGeom>
+          <a:noFill/>
+          <a:ln w="19050">
+            <a:solidFill>
+              <a:srgbClr val="B8B8C8"/>
+            </a:solidFill>
+            <a:prstDash val="solid"/>
+            <a:headEnd type="triangle"/>
+          </a:ln>
+        </p:spPr>
+      </p:sp>
+      <p:sp>
+        <p:nvSpPr>
+          <p:cNvPr id="13" name="Shape 11"/>
+          <p:cNvSpPr/>
+          <p:nvPr/>
+        </p:nvSpPr>
+        <p:spPr>
+          <a:xfrm>
+            <a:off x="3378708" y="4846320"/>
+            <a:ext cx="2601468" cy="502920"/>
+          </a:xfrm>
+          <a:prstGeom prst="roundRect">
+            <a:avLst>
+              <a:gd name="adj" fmla="val 10909"/>
+            </a:avLst>
+          </a:prstGeom>
+          <a:solidFill>
+            <a:srgbClr val="F6F6F8"/>
+          </a:solidFill>
+          <a:ln w="15875">
+            <a:solidFill>
+              <a:srgbClr val="B8B8C8"/>
+            </a:solidFill>
+            <a:prstDash val="solid"/>
+          </a:ln>
+        </p:spPr>
+      </p:sp>
+      <p:sp>
+        <p:nvSpPr>
+          <p:cNvPr id="14" name="Text 12"/>
+          <p:cNvSpPr/>
+          <p:nvPr/>
+        </p:nvSpPr>
+        <p:spPr>
+          <a:xfrm>
+            <a:off x="3378708" y="4846320"/>
+            <a:ext cx="2601468" cy="502920"/>
+          </a:xfrm>
+          <a:prstGeom prst="rect">
+            <a:avLst/>
+          </a:prstGeom>
+          <a:noFill/>
+          <a:ln/>
+        </p:spPr>
+        <p:txBody>
+          <a:bodyPr wrap="square" lIns="50800" tIns="50800" rIns="50800" bIns="50800" rtlCol="0" anchor="ctr"/>
+          <a:lstStyle/>
+          <a:p>
+            <a:pPr rtl="1" algn="ctr" indent="0" marL="0">
+              <a:buNone/>
+            </a:pPr>
+            <a:r>
+              <a:rPr lang="en-US" sz="1200" dirty="0">
+                <a:solidFill>
+                  <a:srgbClr val="1B1F3B"/>
+                </a:solidFill>
+                <a:latin typeface="Calibri" pitchFamily="34" charset="0"/>
+                <a:ea typeface="Calibri" pitchFamily="34" charset="-122"/>
+                <a:cs typeface="Calibri" pitchFamily="34" charset="-120"/>
+              </a:rPr>
+              <a:t>Git</a:t>
+            </a:r>
+            <a:endParaRPr lang="en-US" sz="1200" dirty="0"/>
+          </a:p>
+        </p:txBody>
+      </p:sp>
+      <p:sp>
+        <p:nvSpPr>
+          <p:cNvPr id="15" name="Shape 13"/>
+          <p:cNvSpPr/>
+          <p:nvPr/>
+        </p:nvSpPr>
+        <p:spPr>
+          <a:xfrm>
+            <a:off x="3168396" y="5097780"/>
+            <a:ext cx="192024" cy="0"/>
+          </a:xfrm>
+          <a:prstGeom prst="line">
+            <a:avLst/>
+          </a:prstGeom>
+          <a:noFill/>
+          <a:ln w="19050">
+            <a:solidFill>
+              <a:srgbClr val="B8B8C8"/>
+            </a:solidFill>
+            <a:prstDash val="solid"/>
+            <a:headEnd type="triangle"/>
+          </a:ln>
+        </p:spPr>
+      </p:sp>
+      <p:sp>
+        <p:nvSpPr>
+          <p:cNvPr id="16" name="Shape 14"/>
+          <p:cNvSpPr/>
+          <p:nvPr/>
+        </p:nvSpPr>
+        <p:spPr>
+          <a:xfrm>
             <a:off x="548640" y="4846320"/>
-            <a:ext cx="11091672" cy="1143000"/>
-          </a:xfrm>
-          <a:prstGeom prst="rect">
-            <a:avLst/>
-          </a:prstGeom>
-          <a:noFill/>
-          <a:ln/>
-        </p:spPr>
-        <p:txBody>
-          <a:bodyPr wrap="square" lIns="101600" tIns="101600" rIns="101600" bIns="101600" rtlCol="0" anchor="ctr"/>
+            <a:ext cx="2601468" cy="502920"/>
+          </a:xfrm>
+          <a:prstGeom prst="roundRect">
+            <a:avLst>
+              <a:gd name="adj" fmla="val 10909"/>
+            </a:avLst>
+          </a:prstGeom>
+          <a:solidFill>
+            <a:srgbClr val="00A88A"/>
+          </a:solidFill>
+          <a:ln w="15875">
+            <a:solidFill>
+              <a:srgbClr val="00A88A"/>
+            </a:solidFill>
+            <a:prstDash val="solid"/>
+          </a:ln>
+        </p:spPr>
+      </p:sp>
+      <p:sp>
+        <p:nvSpPr>
+          <p:cNvPr id="17" name="Text 15"/>
+          <p:cNvSpPr/>
+          <p:nvPr/>
+        </p:nvSpPr>
+        <p:spPr>
+          <a:xfrm>
+            <a:off x="548640" y="4846320"/>
+            <a:ext cx="2601468" cy="502920"/>
+          </a:xfrm>
+          <a:prstGeom prst="rect">
+            <a:avLst/>
+          </a:prstGeom>
+          <a:noFill/>
+          <a:ln/>
+        </p:spPr>
+        <p:txBody>
+          <a:bodyPr wrap="square" lIns="50800" tIns="50800" rIns="50800" bIns="50800" rtlCol="0" anchor="ctr"/>
           <a:lstStyle/>
           <a:p>
             <a:pPr rtl="1" algn="ctr" indent="0" marL="0">
               <a:buNone/>
             </a:pPr>
             <a:r>
-              <a:rPr lang="en-US" sz="1300" i="1" dirty="0">
+              <a:rPr lang="en-US" sz="1200" b="1" dirty="0">
+                <a:solidFill>
+                  <a:srgbClr val="FFFFFF"/>
+                </a:solidFill>
+                <a:latin typeface="Calibri" pitchFamily="34" charset="0"/>
+                <a:ea typeface="Calibri" pitchFamily="34" charset="-122"/>
+                <a:cs typeface="Calibri" pitchFamily="34" charset="-120"/>
+              </a:rPr>
+              <a:t>AI Agentic</a:t>
+            </a:r>
+            <a:endParaRPr lang="en-US" sz="1200" dirty="0"/>
+          </a:p>
+        </p:txBody>
+      </p:sp>
+      <p:sp>
+        <p:nvSpPr>
+          <p:cNvPr id="18" name="Text 16"/>
+          <p:cNvSpPr/>
+          <p:nvPr/>
+        </p:nvSpPr>
+        <p:spPr>
+          <a:xfrm>
+            <a:off x="548640" y="5422392"/>
+            <a:ext cx="11091672" cy="237744"/>
+          </a:xfrm>
+          <a:prstGeom prst="rect">
+            <a:avLst/>
+          </a:prstGeom>
+          <a:noFill/>
+          <a:ln/>
+        </p:spPr>
+        <p:txBody>
+          <a:bodyPr wrap="square" lIns="0" tIns="0" rIns="0" bIns="0" rtlCol="0" anchor="ctr"/>
+          <a:lstStyle/>
+          <a:p>
+            <a:pPr rtl="1" algn="ctr" indent="0" marL="0">
+              <a:buNone/>
+            </a:pPr>
+            <a:r>
+              <a:rPr lang="en-US" sz="1000" i="1" dirty="0">
                 <a:solidFill>
                   <a:srgbClr val="6B7280"/>
                 </a:solidFill>
@@ -11728,15 +16029,54 @@
                 <a:ea typeface="Calibri" pitchFamily="34" charset="-122"/>
                 <a:cs typeface="Calibri" pitchFamily="34" charset="-120"/>
               </a:rPr>
-              <a:t>[תמונה: רצף ויזואלי לכל עידן — כרטיסי ניקוב, IDE ראשון, ממשק Git, סוכן AI]</a:t>
-            </a:r>
-            <a:endParaRPr lang="en-US" sz="1300" dirty="0"/>
-          </a:p>
-        </p:txBody>
-      </p:sp>
-      <p:sp>
-        <p:nvSpPr>
-          <p:cNvPr id="9" name="Text 7"/>
+              <a:t>הקצב בין קפיצה לקפיצה הולך ומתקצר (ראו שקף הבא)</a:t>
+            </a:r>
+            <a:endParaRPr lang="en-US" sz="1000" dirty="0"/>
+          </a:p>
+        </p:txBody>
+      </p:sp>
+      <p:sp>
+        <p:nvSpPr>
+          <p:cNvPr id="19" name="Text 17"/>
+          <p:cNvSpPr/>
+          <p:nvPr/>
+        </p:nvSpPr>
+        <p:spPr>
+          <a:xfrm>
+            <a:off x="548640" y="6080760"/>
+            <a:ext cx="11091672" cy="274320"/>
+          </a:xfrm>
+          <a:prstGeom prst="rect">
+            <a:avLst/>
+          </a:prstGeom>
+          <a:noFill/>
+          <a:ln/>
+        </p:spPr>
+        <p:txBody>
+          <a:bodyPr wrap="square" lIns="0" tIns="0" rIns="0" bIns="0" rtlCol="0" anchor="ctr"/>
+          <a:lstStyle/>
+          <a:p>
+            <a:pPr rtl="1" algn="r" indent="0" marL="0">
+              <a:buNone/>
+            </a:pPr>
+            <a:r>
+              <a:rPr lang="en-US" sz="1000" i="1" dirty="0">
+                <a:solidFill>
+                  <a:srgbClr val="6B7280"/>
+                </a:solidFill>
+                <a:latin typeface="Calibri" pitchFamily="34" charset="0"/>
+                <a:ea typeface="Calibri" pitchFamily="34" charset="-122"/>
+                <a:cs typeface="Calibri" pitchFamily="34" charset="-120"/>
+              </a:rPr>
+              <a:t>איור: 4 עידנים בהתפתחות הכלים: קוד מכונה → שפות עיליות + IDE → Git → AI Agentic (העידן הנוכחי, מודגש).</a:t>
+            </a:r>
+            <a:endParaRPr lang="en-US" sz="1000" dirty="0"/>
+          </a:p>
+        </p:txBody>
+      </p:sp>
+      <p:sp>
+        <p:nvSpPr>
+          <p:cNvPr id="20" name="Text 18"/>
           <p:cNvSpPr/>
           <p:nvPr/>
         </p:nvSpPr>
@@ -12540,55 +16880,148 @@
       </p:sp>
       <p:sp>
         <p:nvSpPr>
-          <p:cNvPr id="7" name="Shape 5"/>
-          <p:cNvSpPr/>
-          <p:nvPr/>
-        </p:nvSpPr>
-        <p:spPr>
-          <a:xfrm>
-            <a:off x="548640" y="4846320"/>
-            <a:ext cx="11091672" cy="1143000"/>
+          <p:cNvPr id="7" name="Text 5"/>
+          <p:cNvSpPr/>
+          <p:nvPr/>
+        </p:nvSpPr>
+        <p:spPr>
+          <a:xfrm>
+            <a:off x="10451592" y="5004816"/>
+            <a:ext cx="1188720" cy="356616"/>
+          </a:xfrm>
+          <a:prstGeom prst="rect">
+            <a:avLst/>
+          </a:prstGeom>
+          <a:noFill/>
+          <a:ln/>
+        </p:spPr>
+        <p:txBody>
+          <a:bodyPr wrap="square" lIns="0" tIns="0" rIns="0" bIns="0" rtlCol="0" anchor="ctr"/>
+          <a:lstStyle/>
+          <a:p>
+            <a:pPr rtl="1" algn="r" indent="0" marL="0">
+              <a:buNone/>
+            </a:pPr>
+            <a:r>
+              <a:rPr lang="en-US" sz="1200" b="1" dirty="0">
+                <a:solidFill>
+                  <a:srgbClr val="1B1F3B"/>
+                </a:solidFill>
+                <a:latin typeface="Arial" pitchFamily="34" charset="0"/>
+                <a:ea typeface="Arial" pitchFamily="34" charset="-122"/>
+                <a:cs typeface="Arial" pitchFamily="34" charset="-120"/>
+              </a:rPr>
+              <a:t>לפני: ימים</a:t>
+            </a:r>
+            <a:endParaRPr lang="en-US" sz="1200" dirty="0"/>
+          </a:p>
+        </p:txBody>
+      </p:sp>
+      <p:sp>
+        <p:nvSpPr>
+          <p:cNvPr id="8" name="Shape 6"/>
+          <p:cNvSpPr/>
+          <p:nvPr/>
+        </p:nvSpPr>
+        <p:spPr>
+          <a:xfrm>
+            <a:off x="1371966" y="5004816"/>
+            <a:ext cx="8942466" cy="356616"/>
           </a:xfrm>
           <a:prstGeom prst="rect">
             <a:avLst/>
           </a:prstGeom>
           <a:solidFill>
-            <a:srgbClr val="F6F6F8"/>
+            <a:srgbClr val="6B7280"/>
           </a:solidFill>
-          <a:ln w="12700">
-            <a:solidFill>
-              <a:srgbClr val="B8B8C8"/>
-            </a:solidFill>
-            <a:prstDash val="dash"/>
-          </a:ln>
-        </p:spPr>
-      </p:sp>
-      <p:sp>
-        <p:nvSpPr>
-          <p:cNvPr id="8" name="Text 6"/>
-          <p:cNvSpPr/>
-          <p:nvPr/>
-        </p:nvSpPr>
-        <p:spPr>
-          <a:xfrm>
-            <a:off x="548640" y="4846320"/>
-            <a:ext cx="11091672" cy="1143000"/>
-          </a:xfrm>
-          <a:prstGeom prst="rect">
-            <a:avLst/>
-          </a:prstGeom>
-          <a:noFill/>
-          <a:ln/>
-        </p:spPr>
-        <p:txBody>
-          <a:bodyPr wrap="square" lIns="101600" tIns="101600" rIns="101600" bIns="101600" rtlCol="0" anchor="ctr"/>
-          <a:lstStyle/>
-          <a:p>
-            <a:pPr rtl="1" algn="ctr" indent="0" marL="0">
-              <a:buNone/>
-            </a:pPr>
-            <a:r>
-              <a:rPr lang="en-US" sz="1300" i="1" dirty="0">
+          <a:ln/>
+        </p:spPr>
+      </p:sp>
+      <p:sp>
+        <p:nvSpPr>
+          <p:cNvPr id="9" name="Text 7"/>
+          <p:cNvSpPr/>
+          <p:nvPr/>
+        </p:nvSpPr>
+        <p:spPr>
+          <a:xfrm>
+            <a:off x="10451592" y="5519928"/>
+            <a:ext cx="1188720" cy="356616"/>
+          </a:xfrm>
+          <a:prstGeom prst="rect">
+            <a:avLst/>
+          </a:prstGeom>
+          <a:noFill/>
+          <a:ln/>
+        </p:spPr>
+        <p:txBody>
+          <a:bodyPr wrap="square" lIns="0" tIns="0" rIns="0" bIns="0" rtlCol="0" anchor="ctr"/>
+          <a:lstStyle/>
+          <a:p>
+            <a:pPr rtl="1" algn="r" indent="0" marL="0">
+              <a:buNone/>
+            </a:pPr>
+            <a:r>
+              <a:rPr lang="en-US" sz="1200" b="1" dirty="0">
+                <a:solidFill>
+                  <a:srgbClr val="1B1F3B"/>
+                </a:solidFill>
+                <a:latin typeface="Arial" pitchFamily="34" charset="0"/>
+                <a:ea typeface="Arial" pitchFamily="34" charset="-122"/>
+                <a:cs typeface="Arial" pitchFamily="34" charset="-120"/>
+              </a:rPr>
+              <a:t>היום: דקות</a:t>
+            </a:r>
+            <a:endParaRPr lang="en-US" sz="1200" dirty="0"/>
+          </a:p>
+        </p:txBody>
+      </p:sp>
+      <p:sp>
+        <p:nvSpPr>
+          <p:cNvPr id="10" name="Shape 8"/>
+          <p:cNvSpPr/>
+          <p:nvPr/>
+        </p:nvSpPr>
+        <p:spPr>
+          <a:xfrm>
+            <a:off x="9148023" y="5519928"/>
+            <a:ext cx="1166409" cy="356616"/>
+          </a:xfrm>
+          <a:prstGeom prst="rect">
+            <a:avLst/>
+          </a:prstGeom>
+          <a:solidFill>
+            <a:srgbClr val="00A88A"/>
+          </a:solidFill>
+          <a:ln/>
+        </p:spPr>
+      </p:sp>
+      <p:sp>
+        <p:nvSpPr>
+          <p:cNvPr id="11" name="Text 9"/>
+          <p:cNvSpPr/>
+          <p:nvPr/>
+        </p:nvSpPr>
+        <p:spPr>
+          <a:xfrm>
+            <a:off x="548640" y="6080760"/>
+            <a:ext cx="11091672" cy="274320"/>
+          </a:xfrm>
+          <a:prstGeom prst="rect">
+            <a:avLst/>
+          </a:prstGeom>
+          <a:noFill/>
+          <a:ln/>
+        </p:spPr>
+        <p:txBody>
+          <a:bodyPr wrap="square" lIns="0" tIns="0" rIns="0" bIns="0" rtlCol="0" anchor="ctr"/>
+          <a:lstStyle/>
+          <a:p>
+            <a:pPr rtl="1" algn="r" indent="0" marL="0">
+              <a:buNone/>
+            </a:pPr>
+            <a:r>
+              <a:rPr lang="en-US" sz="1000" i="1" dirty="0">
                 <a:solidFill>
                   <a:srgbClr val="6B7280"/>
                 </a:solidFill>
@@ -12596,15 +17029,15 @@
                 <a:ea typeface="Calibri" pitchFamily="34" charset="-122"/>
                 <a:cs typeface="Calibri" pitchFamily="34" charset="-120"/>
               </a:rPr>
-              <a:t>[תמונה: השוואת ״לפני / אחרי״ — זמן פיתוח שהצטמצם מימים לדקות]</a:t>
-            </a:r>
-            <a:endParaRPr lang="en-US" sz="1300" dirty="0"/>
-          </a:p>
-        </p:txBody>
-      </p:sp>
-      <p:sp>
-        <p:nvSpPr>
-          <p:cNvPr id="9" name="Text 7"/>
+              <a:t>איור: השוואת אורך יחסי: זמן פיתוח שהצטמצם מ״ימים״ (פס ארוך) ל״דקות״ (פס קצר) עבור אותה משימה.</a:t>
+            </a:r>
+            <a:endParaRPr lang="en-US" sz="1000" dirty="0"/>
+          </a:p>
+        </p:txBody>
+      </p:sp>
+      <p:sp>
+        <p:nvSpPr>
+          <p:cNvPr id="12" name="Text 10"/>
           <p:cNvSpPr/>
           <p:nvPr/>
         </p:nvSpPr>
@@ -12972,7 +17405,438 @@
       </p:sp>
       <p:sp>
         <p:nvSpPr>
-          <p:cNvPr id="7" name="Text 5"/>
+          <p:cNvPr id="7" name="Shape 5"/>
+          <p:cNvSpPr/>
+          <p:nvPr/>
+        </p:nvSpPr>
+        <p:spPr>
+          <a:xfrm>
+            <a:off x="10025253" y="4846320"/>
+            <a:ext cx="457200" cy="457200"/>
+          </a:xfrm>
+          <a:prstGeom prst="ellipse">
+            <a:avLst/>
+          </a:prstGeom>
+          <a:solidFill>
+            <a:srgbClr val="6B7280"/>
+          </a:solidFill>
+          <a:ln/>
+        </p:spPr>
+      </p:sp>
+      <p:sp>
+        <p:nvSpPr>
+          <p:cNvPr id="8" name="Text 6"/>
+          <p:cNvSpPr/>
+          <p:nvPr/>
+        </p:nvSpPr>
+        <p:spPr>
+          <a:xfrm>
+            <a:off x="10025253" y="4846320"/>
+            <a:ext cx="457200" cy="457200"/>
+          </a:xfrm>
+          <a:prstGeom prst="rect">
+            <a:avLst/>
+          </a:prstGeom>
+          <a:noFill/>
+          <a:ln/>
+        </p:spPr>
+        <p:txBody>
+          <a:bodyPr wrap="square" lIns="0" tIns="0" rIns="0" bIns="0" rtlCol="0" anchor="ctr"/>
+          <a:lstStyle/>
+          <a:p>
+            <a:pPr algn="ctr" indent="0" marL="0">
+              <a:buNone/>
+            </a:pPr>
+            <a:r>
+              <a:rPr lang="en-US" sz="1600" b="1" dirty="0">
+                <a:solidFill>
+                  <a:srgbClr val="FFFFFF"/>
+                </a:solidFill>
+                <a:latin typeface="Arial" pitchFamily="34" charset="0"/>
+                <a:ea typeface="Arial" pitchFamily="34" charset="-122"/>
+                <a:cs typeface="Arial" pitchFamily="34" charset="-120"/>
+              </a:rPr>
+              <a:t>!</a:t>
+            </a:r>
+            <a:endParaRPr lang="en-US" sz="1600" dirty="0"/>
+          </a:p>
+        </p:txBody>
+      </p:sp>
+      <p:sp>
+        <p:nvSpPr>
+          <p:cNvPr id="9" name="Text 7"/>
+          <p:cNvSpPr/>
+          <p:nvPr/>
+        </p:nvSpPr>
+        <p:spPr>
+          <a:xfrm>
+            <a:off x="8913114" y="5376672"/>
+            <a:ext cx="2681478" cy="365760"/>
+          </a:xfrm>
+          <a:prstGeom prst="rect">
+            <a:avLst/>
+          </a:prstGeom>
+          <a:noFill/>
+          <a:ln/>
+        </p:spPr>
+        <p:txBody>
+          <a:bodyPr wrap="square" lIns="0" tIns="0" rIns="0" bIns="0" rtlCol="0" anchor="t"/>
+          <a:lstStyle/>
+          <a:p>
+            <a:pPr rtl="1" algn="ctr" indent="0" marL="0">
+              <a:buNone/>
+            </a:pPr>
+            <a:r>
+              <a:rPr lang="en-US" sz="1100" dirty="0">
+                <a:solidFill>
+                  <a:srgbClr val="1B1F3B"/>
+                </a:solidFill>
+                <a:latin typeface="Calibri" pitchFamily="34" charset="0"/>
+                <a:ea typeface="Calibri" pitchFamily="34" charset="-122"/>
+                <a:cs typeface="Calibri" pitchFamily="34" charset="-120"/>
+              </a:rPr>
+              <a:t>Context נשכח</a:t>
+            </a:r>
+            <a:endParaRPr lang="en-US" sz="1100" dirty="0"/>
+          </a:p>
+        </p:txBody>
+      </p:sp>
+      <p:sp>
+        <p:nvSpPr>
+          <p:cNvPr id="10" name="Shape 8"/>
+          <p:cNvSpPr/>
+          <p:nvPr/>
+        </p:nvSpPr>
+        <p:spPr>
+          <a:xfrm>
+            <a:off x="7252335" y="4846320"/>
+            <a:ext cx="457200" cy="457200"/>
+          </a:xfrm>
+          <a:prstGeom prst="ellipse">
+            <a:avLst/>
+          </a:prstGeom>
+          <a:solidFill>
+            <a:srgbClr val="6B7280"/>
+          </a:solidFill>
+          <a:ln/>
+        </p:spPr>
+      </p:sp>
+      <p:sp>
+        <p:nvSpPr>
+          <p:cNvPr id="11" name="Text 9"/>
+          <p:cNvSpPr/>
+          <p:nvPr/>
+        </p:nvSpPr>
+        <p:spPr>
+          <a:xfrm>
+            <a:off x="7252335" y="4846320"/>
+            <a:ext cx="457200" cy="457200"/>
+          </a:xfrm>
+          <a:prstGeom prst="rect">
+            <a:avLst/>
+          </a:prstGeom>
+          <a:noFill/>
+          <a:ln/>
+        </p:spPr>
+        <p:txBody>
+          <a:bodyPr wrap="square" lIns="0" tIns="0" rIns="0" bIns="0" rtlCol="0" anchor="ctr"/>
+          <a:lstStyle/>
+          <a:p>
+            <a:pPr algn="ctr" indent="0" marL="0">
+              <a:buNone/>
+            </a:pPr>
+            <a:r>
+              <a:rPr lang="en-US" sz="1600" b="1" dirty="0">
+                <a:solidFill>
+                  <a:srgbClr val="FFFFFF"/>
+                </a:solidFill>
+                <a:latin typeface="Arial" pitchFamily="34" charset="0"/>
+                <a:ea typeface="Arial" pitchFamily="34" charset="-122"/>
+                <a:cs typeface="Arial" pitchFamily="34" charset="-120"/>
+              </a:rPr>
+              <a:t>!</a:t>
+            </a:r>
+            <a:endParaRPr lang="en-US" sz="1600" dirty="0"/>
+          </a:p>
+        </p:txBody>
+      </p:sp>
+      <p:sp>
+        <p:nvSpPr>
+          <p:cNvPr id="12" name="Text 10"/>
+          <p:cNvSpPr/>
+          <p:nvPr/>
+        </p:nvSpPr>
+        <p:spPr>
+          <a:xfrm>
+            <a:off x="6140196" y="5376672"/>
+            <a:ext cx="2681478" cy="365760"/>
+          </a:xfrm>
+          <a:prstGeom prst="rect">
+            <a:avLst/>
+          </a:prstGeom>
+          <a:noFill/>
+          <a:ln/>
+        </p:spPr>
+        <p:txBody>
+          <a:bodyPr wrap="square" lIns="0" tIns="0" rIns="0" bIns="0" rtlCol="0" anchor="t"/>
+          <a:lstStyle/>
+          <a:p>
+            <a:pPr rtl="1" algn="ctr" indent="0" marL="0">
+              <a:buNone/>
+            </a:pPr>
+            <a:r>
+              <a:rPr lang="en-US" sz="1100" dirty="0">
+                <a:solidFill>
+                  <a:srgbClr val="1B1F3B"/>
+                </a:solidFill>
+                <a:latin typeface="Calibri" pitchFamily="34" charset="0"/>
+                <a:ea typeface="Calibri" pitchFamily="34" charset="-122"/>
+                <a:cs typeface="Calibri" pitchFamily="34" charset="-120"/>
+              </a:rPr>
+              <a:t>עובד ≠ נכון</a:t>
+            </a:r>
+            <a:endParaRPr lang="en-US" sz="1100" dirty="0"/>
+          </a:p>
+        </p:txBody>
+      </p:sp>
+      <p:sp>
+        <p:nvSpPr>
+          <p:cNvPr id="13" name="Shape 11"/>
+          <p:cNvSpPr/>
+          <p:nvPr/>
+        </p:nvSpPr>
+        <p:spPr>
+          <a:xfrm>
+            <a:off x="4479417" y="4846320"/>
+            <a:ext cx="457200" cy="457200"/>
+          </a:xfrm>
+          <a:prstGeom prst="ellipse">
+            <a:avLst/>
+          </a:prstGeom>
+          <a:solidFill>
+            <a:srgbClr val="6B7280"/>
+          </a:solidFill>
+          <a:ln/>
+        </p:spPr>
+      </p:sp>
+      <p:sp>
+        <p:nvSpPr>
+          <p:cNvPr id="14" name="Text 12"/>
+          <p:cNvSpPr/>
+          <p:nvPr/>
+        </p:nvSpPr>
+        <p:spPr>
+          <a:xfrm>
+            <a:off x="4479417" y="4846320"/>
+            <a:ext cx="457200" cy="457200"/>
+          </a:xfrm>
+          <a:prstGeom prst="rect">
+            <a:avLst/>
+          </a:prstGeom>
+          <a:noFill/>
+          <a:ln/>
+        </p:spPr>
+        <p:txBody>
+          <a:bodyPr wrap="square" lIns="0" tIns="0" rIns="0" bIns="0" rtlCol="0" anchor="ctr"/>
+          <a:lstStyle/>
+          <a:p>
+            <a:pPr algn="ctr" indent="0" marL="0">
+              <a:buNone/>
+            </a:pPr>
+            <a:r>
+              <a:rPr lang="en-US" sz="1600" b="1" dirty="0">
+                <a:solidFill>
+                  <a:srgbClr val="FFFFFF"/>
+                </a:solidFill>
+                <a:latin typeface="Arial" pitchFamily="34" charset="0"/>
+                <a:ea typeface="Arial" pitchFamily="34" charset="-122"/>
+                <a:cs typeface="Arial" pitchFamily="34" charset="-120"/>
+              </a:rPr>
+              <a:t>!</a:t>
+            </a:r>
+            <a:endParaRPr lang="en-US" sz="1600" dirty="0"/>
+          </a:p>
+        </p:txBody>
+      </p:sp>
+      <p:sp>
+        <p:nvSpPr>
+          <p:cNvPr id="15" name="Text 13"/>
+          <p:cNvSpPr/>
+          <p:nvPr/>
+        </p:nvSpPr>
+        <p:spPr>
+          <a:xfrm>
+            <a:off x="3367278" y="5376672"/>
+            <a:ext cx="2681478" cy="365760"/>
+          </a:xfrm>
+          <a:prstGeom prst="rect">
+            <a:avLst/>
+          </a:prstGeom>
+          <a:noFill/>
+          <a:ln/>
+        </p:spPr>
+        <p:txBody>
+          <a:bodyPr wrap="square" lIns="0" tIns="0" rIns="0" bIns="0" rtlCol="0" anchor="t"/>
+          <a:lstStyle/>
+          <a:p>
+            <a:pPr rtl="1" algn="ctr" indent="0" marL="0">
+              <a:buNone/>
+            </a:pPr>
+            <a:r>
+              <a:rPr lang="en-US" sz="1100" dirty="0">
+                <a:solidFill>
+                  <a:srgbClr val="1B1F3B"/>
+                </a:solidFill>
+                <a:latin typeface="Calibri" pitchFamily="34" charset="0"/>
+                <a:ea typeface="Calibri" pitchFamily="34" charset="-122"/>
+                <a:cs typeface="Calibri" pitchFamily="34" charset="-120"/>
+              </a:rPr>
+              <a:t>תלות בכלי</a:t>
+            </a:r>
+            <a:endParaRPr lang="en-US" sz="1100" dirty="0"/>
+          </a:p>
+        </p:txBody>
+      </p:sp>
+      <p:sp>
+        <p:nvSpPr>
+          <p:cNvPr id="16" name="Shape 14"/>
+          <p:cNvSpPr/>
+          <p:nvPr/>
+        </p:nvSpPr>
+        <p:spPr>
+          <a:xfrm>
+            <a:off x="1706499" y="4846320"/>
+            <a:ext cx="457200" cy="457200"/>
+          </a:xfrm>
+          <a:prstGeom prst="ellipse">
+            <a:avLst/>
+          </a:prstGeom>
+          <a:solidFill>
+            <a:srgbClr val="6B7280"/>
+          </a:solidFill>
+          <a:ln/>
+        </p:spPr>
+      </p:sp>
+      <p:sp>
+        <p:nvSpPr>
+          <p:cNvPr id="17" name="Text 15"/>
+          <p:cNvSpPr/>
+          <p:nvPr/>
+        </p:nvSpPr>
+        <p:spPr>
+          <a:xfrm>
+            <a:off x="1706499" y="4846320"/>
+            <a:ext cx="457200" cy="457200"/>
+          </a:xfrm>
+          <a:prstGeom prst="rect">
+            <a:avLst/>
+          </a:prstGeom>
+          <a:noFill/>
+          <a:ln/>
+        </p:spPr>
+        <p:txBody>
+          <a:bodyPr wrap="square" lIns="0" tIns="0" rIns="0" bIns="0" rtlCol="0" anchor="ctr"/>
+          <a:lstStyle/>
+          <a:p>
+            <a:pPr algn="ctr" indent="0" marL="0">
+              <a:buNone/>
+            </a:pPr>
+            <a:r>
+              <a:rPr lang="en-US" sz="1600" b="1" dirty="0">
+                <a:solidFill>
+                  <a:srgbClr val="FFFFFF"/>
+                </a:solidFill>
+                <a:latin typeface="Arial" pitchFamily="34" charset="0"/>
+                <a:ea typeface="Arial" pitchFamily="34" charset="-122"/>
+                <a:cs typeface="Arial" pitchFamily="34" charset="-120"/>
+              </a:rPr>
+              <a:t>!</a:t>
+            </a:r>
+            <a:endParaRPr lang="en-US" sz="1600" dirty="0"/>
+          </a:p>
+        </p:txBody>
+      </p:sp>
+      <p:sp>
+        <p:nvSpPr>
+          <p:cNvPr id="18" name="Text 16"/>
+          <p:cNvSpPr/>
+          <p:nvPr/>
+        </p:nvSpPr>
+        <p:spPr>
+          <a:xfrm>
+            <a:off x="594360" y="5376672"/>
+            <a:ext cx="2681478" cy="365760"/>
+          </a:xfrm>
+          <a:prstGeom prst="rect">
+            <a:avLst/>
+          </a:prstGeom>
+          <a:noFill/>
+          <a:ln/>
+        </p:spPr>
+        <p:txBody>
+          <a:bodyPr wrap="square" lIns="0" tIns="0" rIns="0" bIns="0" rtlCol="0" anchor="t"/>
+          <a:lstStyle/>
+          <a:p>
+            <a:pPr rtl="1" algn="ctr" indent="0" marL="0">
+              <a:buNone/>
+            </a:pPr>
+            <a:r>
+              <a:rPr lang="en-US" sz="1100" dirty="0">
+                <a:solidFill>
+                  <a:srgbClr val="1B1F3B"/>
+                </a:solidFill>
+                <a:latin typeface="Calibri" pitchFamily="34" charset="0"/>
+                <a:ea typeface="Calibri" pitchFamily="34" charset="-122"/>
+                <a:cs typeface="Calibri" pitchFamily="34" charset="-120"/>
+              </a:rPr>
+              <a:t>Hallucination</a:t>
+            </a:r>
+            <a:endParaRPr lang="en-US" sz="1100" dirty="0"/>
+          </a:p>
+        </p:txBody>
+      </p:sp>
+      <p:sp>
+        <p:nvSpPr>
+          <p:cNvPr id="19" name="Text 17"/>
+          <p:cNvSpPr/>
+          <p:nvPr/>
+        </p:nvSpPr>
+        <p:spPr>
+          <a:xfrm>
+            <a:off x="548640" y="6080760"/>
+            <a:ext cx="11091672" cy="274320"/>
+          </a:xfrm>
+          <a:prstGeom prst="rect">
+            <a:avLst/>
+          </a:prstGeom>
+          <a:noFill/>
+          <a:ln/>
+        </p:spPr>
+        <p:txBody>
+          <a:bodyPr wrap="square" lIns="0" tIns="0" rIns="0" bIns="0" rtlCol="0" anchor="ctr"/>
+          <a:lstStyle/>
+          <a:p>
+            <a:pPr rtl="1" algn="r" indent="0" marL="0">
+              <a:buNone/>
+            </a:pPr>
+            <a:r>
+              <a:rPr lang="en-US" sz="1000" i="1" dirty="0">
+                <a:solidFill>
+                  <a:srgbClr val="6B7280"/>
+                </a:solidFill>
+                <a:latin typeface="Calibri" pitchFamily="34" charset="0"/>
+                <a:ea typeface="Calibri" pitchFamily="34" charset="-122"/>
+                <a:cs typeface="Calibri" pitchFamily="34" charset="-120"/>
+              </a:rPr>
+              <a:t>איור: תמצות ויזואלי של 4 המגבלות שלמעלה: Context נשכח, עובד≠נכון, תלות בכלי, Hallucination.</a:t>
+            </a:r>
+            <a:endParaRPr lang="en-US" sz="1000" dirty="0"/>
+          </a:p>
+        </p:txBody>
+      </p:sp>
+      <p:sp>
+        <p:nvSpPr>
+          <p:cNvPr id="20" name="Text 18"/>
           <p:cNvSpPr/>
           <p:nvPr/>
         </p:nvSpPr>

--- a/lesson_01/lesson_01_slides.pptx
+++ b/lesson_01/lesson_01_slides.pptx
@@ -3764,43 +3764,6 @@
               </a:rPr>
               <a:t>הוא ממשיך "לנחש" את הטקסט הכי סביר — גם אם זה אומר להמציא פונקציה, ספרייה, או </a:t>
             </a:r>
-            <a:pPr rtl="1" algn="r" indent="0" marL="0">
-              <a:spcAft>
-                <a:spcPts val="1000"/>
-              </a:spcAft>
-              <a:buNone/>
-            </a:pPr>
-            <a:r>
-              <a:rPr lang="en-US" sz="1900" b="1" dirty="0">
-                <a:solidFill>
-                  <a:srgbClr val="1B1F3B"/>
-                </a:solidFill>
-                <a:latin typeface="Calibri" pitchFamily="34" charset="0"/>
-                <a:ea typeface="Calibri" pitchFamily="34" charset="-122"/>
-                <a:cs typeface="Calibri" pitchFamily="34" charset="-120"/>
-              </a:rPr>
-              <a:t>API</a:t>
-            </a:r>
-            <a:pPr rtl="1" algn="r" indent="0" marL="0">
-              <a:spcAft>
-                <a:spcPts val="1000"/>
-              </a:spcAft>
-              <a:buNone/>
-            </a:pPr>
-            <a:r>
-              <a:rPr lang="en-US" sz="1900" dirty="0">
-                <a:solidFill>
-                  <a:srgbClr val="1B1F3B"/>
-                </a:solidFill>
-                <a:latin typeface="Calibri" pitchFamily="34" charset="0"/>
-                <a:ea typeface="Calibri" pitchFamily="34" charset="-122"/>
-                <a:cs typeface="Calibri" pitchFamily="34" charset="-120"/>
-              </a:rPr>
-              <a:t> (ממשק שדרכו תוכנות מדברות זו עם זו) שלא קיימים</a:t>
-            </a:r>
-            <a:endParaRPr lang="en-US" sz="1900" dirty="0"/>
-          </a:p>
-          <a:p>
             <a:pPr rtl="1" algn="r" marL="228600" indent="-228600">
               <a:spcAft>
                 <a:spcPts val="1000"/>
@@ -3809,23 +3772,6 @@
               <a:buChar char="•"/>
             </a:pPr>
             <a:r>
-              <a:rPr lang="en-US" sz="1900" dirty="0">
-                <a:solidFill>
-                  <a:srgbClr val="1B1F3B"/>
-                </a:solidFill>
-                <a:latin typeface="Calibri" pitchFamily="34" charset="0"/>
-                <a:ea typeface="Calibri" pitchFamily="34" charset="-122"/>
-                <a:cs typeface="Calibri" pitchFamily="34" charset="-120"/>
-              </a:rPr>
-              <a:t>זה קורה </a:t>
-            </a:r>
-            <a:pPr rtl="1" algn="r" indent="0" marL="0">
-              <a:spcAft>
-                <a:spcPts val="1000"/>
-              </a:spcAft>
-              <a:buNone/>
-            </a:pPr>
-            <a:r>
               <a:rPr lang="en-US" sz="1900" b="1" dirty="0">
                 <a:solidFill>
                   <a:srgbClr val="1B1F3B"/>
@@ -3834,28 +3780,8 @@
                 <a:ea typeface="Calibri" pitchFamily="34" charset="-122"/>
                 <a:cs typeface="Calibri" pitchFamily="34" charset="-120"/>
               </a:rPr>
-              <a:t>בביטחון מלא</a:t>
-            </a:r>
-            <a:pPr rtl="1" algn="r" indent="0" marL="0">
-              <a:spcAft>
-                <a:spcPts val="1000"/>
-              </a:spcAft>
-              <a:buNone/>
-            </a:pPr>
-            <a:r>
-              <a:rPr lang="en-US" sz="1900" dirty="0">
-                <a:solidFill>
-                  <a:srgbClr val="1B1F3B"/>
-                </a:solidFill>
-                <a:latin typeface="Calibri" pitchFamily="34" charset="0"/>
-                <a:ea typeface="Calibri" pitchFamily="34" charset="-122"/>
-                <a:cs typeface="Calibri" pitchFamily="34" charset="-120"/>
-              </a:rPr>
-              <a:t> — אין שום סימן חזותי שההמצאה שונה מעובדה</a:t>
-            </a:r>
-            <a:endParaRPr lang="en-US" sz="1900" dirty="0"/>
-          </a:p>
-          <a:p>
+              <a:t>API</a:t>
+            </a:r>
             <a:pPr rtl="1" algn="r" marL="228600" indent="-228600">
               <a:spcAft>
                 <a:spcPts val="1000"/>
@@ -3864,21 +3790,100 @@
               <a:buChar char="•"/>
             </a:pPr>
             <a:r>
-              <a:rPr lang="en-US" sz="1900" b="1" dirty="0">
-                <a:solidFill>
-                  <a:srgbClr val="1B1F3B"/>
-                </a:solidFill>
-                <a:latin typeface="Calibri" pitchFamily="34" charset="0"/>
-                <a:ea typeface="Calibri" pitchFamily="34" charset="-122"/>
-                <a:cs typeface="Calibri" pitchFamily="34" charset="-120"/>
-              </a:rPr>
-              <a:t>למסלול AI:</a:t>
-            </a:r>
-            <a:pPr rtl="1" algn="r" indent="0" marL="0">
+              <a:rPr lang="en-US" sz="1900" dirty="0">
+                <a:solidFill>
+                  <a:srgbClr val="1B1F3B"/>
+                </a:solidFill>
+                <a:latin typeface="Calibri" pitchFamily="34" charset="0"/>
+                <a:ea typeface="Calibri" pitchFamily="34" charset="-122"/>
+                <a:cs typeface="Calibri" pitchFamily="34" charset="-120"/>
+              </a:rPr>
+              <a:t> (ממשק שדרכו תוכנות מדברות זו עם זו) שלא קיימים</a:t>
+            </a:r>
+            <a:endParaRPr lang="en-US" sz="1900" dirty="0"/>
+          </a:p>
+          <a:p>
+            <a:pPr rtl="1" algn="r" marL="228600" indent="-228600">
               <a:spcAft>
                 <a:spcPts val="1000"/>
               </a:spcAft>
-              <a:buNone/>
+              <a:buSzPct val="100000"/>
+              <a:buChar char="•"/>
+            </a:pPr>
+            <a:r>
+              <a:rPr lang="en-US" sz="1900" dirty="0">
+                <a:solidFill>
+                  <a:srgbClr val="1B1F3B"/>
+                </a:solidFill>
+                <a:latin typeface="Calibri" pitchFamily="34" charset="0"/>
+                <a:ea typeface="Calibri" pitchFamily="34" charset="-122"/>
+                <a:cs typeface="Calibri" pitchFamily="34" charset="-120"/>
+              </a:rPr>
+              <a:t>זה קורה </a:t>
+            </a:r>
+            <a:pPr rtl="1" algn="r" marL="228600" indent="-228600">
+              <a:spcAft>
+                <a:spcPts val="1000"/>
+              </a:spcAft>
+              <a:buSzPct val="100000"/>
+              <a:buChar char="•"/>
+            </a:pPr>
+            <a:r>
+              <a:rPr lang="en-US" sz="1900" b="1" dirty="0">
+                <a:solidFill>
+                  <a:srgbClr val="1B1F3B"/>
+                </a:solidFill>
+                <a:latin typeface="Calibri" pitchFamily="34" charset="0"/>
+                <a:ea typeface="Calibri" pitchFamily="34" charset="-122"/>
+                <a:cs typeface="Calibri" pitchFamily="34" charset="-120"/>
+              </a:rPr>
+              <a:t>בביטחון מלא</a:t>
+            </a:r>
+            <a:pPr rtl="1" algn="r" marL="228600" indent="-228600">
+              <a:spcAft>
+                <a:spcPts val="1000"/>
+              </a:spcAft>
+              <a:buSzPct val="100000"/>
+              <a:buChar char="•"/>
+            </a:pPr>
+            <a:r>
+              <a:rPr lang="en-US" sz="1900" dirty="0">
+                <a:solidFill>
+                  <a:srgbClr val="1B1F3B"/>
+                </a:solidFill>
+                <a:latin typeface="Calibri" pitchFamily="34" charset="0"/>
+                <a:ea typeface="Calibri" pitchFamily="34" charset="-122"/>
+                <a:cs typeface="Calibri" pitchFamily="34" charset="-120"/>
+              </a:rPr>
+              <a:t> — אין שום סימן חזותי שההמצאה שונה מעובדה</a:t>
+            </a:r>
+            <a:endParaRPr lang="en-US" sz="1900" dirty="0"/>
+          </a:p>
+          <a:p>
+            <a:pPr rtl="1" algn="r" marL="228600" indent="-228600">
+              <a:spcAft>
+                <a:spcPts val="1000"/>
+              </a:spcAft>
+              <a:buSzPct val="100000"/>
+              <a:buChar char="•"/>
+            </a:pPr>
+            <a:r>
+              <a:rPr lang="en-US" sz="1900" b="1" dirty="0">
+                <a:solidFill>
+                  <a:srgbClr val="1B1F3B"/>
+                </a:solidFill>
+                <a:latin typeface="Calibri" pitchFamily="34" charset="0"/>
+                <a:ea typeface="Calibri" pitchFamily="34" charset="-122"/>
+                <a:cs typeface="Calibri" pitchFamily="34" charset="-120"/>
+              </a:rPr>
+              <a:t>למסלול AI:</a:t>
+            </a:r>
+            <a:pPr rtl="1" algn="r" marL="228600" indent="-228600">
+              <a:spcAft>
+                <a:spcPts val="1000"/>
+              </a:spcAft>
+              <a:buSzPct val="100000"/>
+              <a:buChar char="•"/>
             </a:pPr>
             <a:r>
               <a:rPr lang="en-US" sz="1900" dirty="0">
@@ -4275,26 +4280,6 @@
               </a:rPr>
               <a:t>84%</a:t>
             </a:r>
-            <a:pPr rtl="1" algn="r" indent="0" marL="0">
-              <a:spcAft>
-                <a:spcPts val="1000"/>
-              </a:spcAft>
-              <a:buNone/>
-            </a:pPr>
-            <a:r>
-              <a:rPr lang="en-US" sz="1900" dirty="0">
-                <a:solidFill>
-                  <a:srgbClr val="1B1F3B"/>
-                </a:solidFill>
-                <a:latin typeface="Calibri" pitchFamily="34" charset="0"/>
-                <a:ea typeface="Calibri" pitchFamily="34" charset="-122"/>
-                <a:cs typeface="Calibri" pitchFamily="34" charset="-120"/>
-              </a:rPr>
-              <a:t> משתמשים/מתכננים להשתמש בכלי AI</a:t>
-            </a:r>
-            <a:endParaRPr lang="en-US" sz="1900" dirty="0"/>
-          </a:p>
-          <a:p>
             <a:pPr rtl="1" algn="r" marL="228600" indent="-228600">
               <a:spcAft>
                 <a:spcPts val="1000"/>
@@ -4311,41 +4296,7 @@
                 <a:ea typeface="Calibri" pitchFamily="34" charset="-122"/>
                 <a:cs typeface="Calibri" pitchFamily="34" charset="-120"/>
               </a:rPr>
-              <a:t>אבל רק </a:t>
-            </a:r>
-            <a:pPr rtl="1" algn="r" indent="0" marL="0">
-              <a:spcAft>
-                <a:spcPts val="1000"/>
-              </a:spcAft>
-              <a:buNone/>
-            </a:pPr>
-            <a:r>
-              <a:rPr lang="en-US" sz="1900" b="1" dirty="0">
-                <a:solidFill>
-                  <a:srgbClr val="1B1F3B"/>
-                </a:solidFill>
-                <a:latin typeface="Calibri" pitchFamily="34" charset="0"/>
-                <a:ea typeface="Calibri" pitchFamily="34" charset="-122"/>
-                <a:cs typeface="Calibri" pitchFamily="34" charset="-120"/>
-              </a:rPr>
-              <a:t>29%</a:t>
-            </a:r>
-            <a:pPr rtl="1" algn="r" indent="0" marL="0">
-              <a:spcAft>
-                <a:spcPts val="1000"/>
-              </a:spcAft>
-              <a:buNone/>
-            </a:pPr>
-            <a:r>
-              <a:rPr lang="en-US" sz="1900" dirty="0">
-                <a:solidFill>
-                  <a:srgbClr val="1B1F3B"/>
-                </a:solidFill>
-                <a:latin typeface="Calibri" pitchFamily="34" charset="0"/>
-                <a:ea typeface="Calibri" pitchFamily="34" charset="-122"/>
-                <a:cs typeface="Calibri" pitchFamily="34" charset="-120"/>
-              </a:rPr>
-              <a:t> סומכים על הפלט</a:t>
+              <a:t> משתמשים/מתכננים להשתמש בכלי AI</a:t>
             </a:r>
             <a:endParaRPr lang="en-US" sz="1900" dirty="0"/>
           </a:p>
@@ -4358,23 +4309,6 @@
               <a:buChar char="•"/>
             </a:pPr>
             <a:r>
-              <a:rPr lang="en-US" sz="1900" b="1" dirty="0">
-                <a:solidFill>
-                  <a:srgbClr val="1B1F3B"/>
-                </a:solidFill>
-                <a:latin typeface="Calibri" pitchFamily="34" charset="0"/>
-                <a:ea typeface="Calibri" pitchFamily="34" charset="-122"/>
-                <a:cs typeface="Calibri" pitchFamily="34" charset="-120"/>
-              </a:rPr>
-              <a:t>61%</a:t>
-            </a:r>
-            <a:pPr rtl="1" algn="r" indent="0" marL="0">
-              <a:spcAft>
-                <a:spcPts val="1000"/>
-              </a:spcAft>
-              <a:buNone/>
-            </a:pPr>
-            <a:r>
               <a:rPr lang="en-US" sz="1900" dirty="0">
                 <a:solidFill>
                   <a:srgbClr val="1B1F3B"/>
@@ -4383,11 +4317,8 @@
                 <a:ea typeface="Calibri" pitchFamily="34" charset="-122"/>
                 <a:cs typeface="Calibri" pitchFamily="34" charset="-120"/>
               </a:rPr>
-              <a:t> מסכימים: "קוד AI נראה נכון אבל לא אמין"</a:t>
-            </a:r>
-            <a:endParaRPr lang="en-US" sz="1900" dirty="0"/>
-          </a:p>
-          <a:p>
+              <a:t>אבל רק </a:t>
+            </a:r>
             <a:pPr rtl="1" algn="r" marL="228600" indent="-228600">
               <a:spcAft>
                 <a:spcPts val="1000"/>
@@ -4396,72 +4327,154 @@
               <a:buChar char="•"/>
             </a:pPr>
             <a:r>
-              <a:rPr lang="en-US" sz="1900" dirty="0">
-                <a:solidFill>
-                  <a:srgbClr val="1B1F3B"/>
-                </a:solidFill>
-                <a:latin typeface="Calibri" pitchFamily="34" charset="0"/>
-                <a:ea typeface="Calibri" pitchFamily="34" charset="-122"/>
-                <a:cs typeface="Calibri" pitchFamily="34" charset="-120"/>
-              </a:rPr>
-              <a:t>בפרויקטים שהסתמכו הרבה על AI (AI-heavy), לעומת פרויקטים שהסתמכו עליו פחות: </a:t>
-            </a:r>
-            <a:pPr rtl="1" algn="r" indent="0" marL="0">
+              <a:rPr lang="en-US" sz="1900" b="1" dirty="0">
+                <a:solidFill>
+                  <a:srgbClr val="1B1F3B"/>
+                </a:solidFill>
+                <a:latin typeface="Calibri" pitchFamily="34" charset="0"/>
+                <a:ea typeface="Calibri" pitchFamily="34" charset="-122"/>
+                <a:cs typeface="Calibri" pitchFamily="34" charset="-120"/>
+              </a:rPr>
+              <a:t>29%</a:t>
+            </a:r>
+            <a:pPr rtl="1" algn="r" marL="228600" indent="-228600">
               <a:spcAft>
                 <a:spcPts val="1000"/>
               </a:spcAft>
-              <a:buNone/>
-            </a:pPr>
-            <a:r>
-              <a:rPr lang="en-US" sz="1900" b="1" dirty="0">
-                <a:solidFill>
-                  <a:srgbClr val="1B1F3B"/>
-                </a:solidFill>
-                <a:latin typeface="Calibri" pitchFamily="34" charset="0"/>
-                <a:ea typeface="Calibri" pitchFamily="34" charset="-122"/>
-                <a:cs typeface="Calibri" pitchFamily="34" charset="-120"/>
-              </a:rPr>
-              <a:t>41%+</a:t>
-            </a:r>
-            <a:pPr rtl="1" algn="r" indent="0" marL="0">
+              <a:buSzPct val="100000"/>
+              <a:buChar char="•"/>
+            </a:pPr>
+            <a:r>
+              <a:rPr lang="en-US" sz="1900" dirty="0">
+                <a:solidFill>
+                  <a:srgbClr val="1B1F3B"/>
+                </a:solidFill>
+                <a:latin typeface="Calibri" pitchFamily="34" charset="0"/>
+                <a:ea typeface="Calibri" pitchFamily="34" charset="-122"/>
+                <a:cs typeface="Calibri" pitchFamily="34" charset="-120"/>
+              </a:rPr>
+              <a:t> סומכים על הפלט</a:t>
+            </a:r>
+            <a:endParaRPr lang="en-US" sz="1900" dirty="0"/>
+          </a:p>
+          <a:p>
+            <a:pPr rtl="1" algn="r" marL="228600" indent="-228600">
               <a:spcAft>
                 <a:spcPts val="1000"/>
               </a:spcAft>
-              <a:buNone/>
-            </a:pPr>
-            <a:r>
-              <a:rPr lang="en-US" sz="1900" dirty="0">
-                <a:solidFill>
-                  <a:srgbClr val="1B1F3B"/>
-                </a:solidFill>
-                <a:latin typeface="Calibri" pitchFamily="34" charset="0"/>
-                <a:ea typeface="Calibri" pitchFamily="34" charset="-122"/>
-                <a:cs typeface="Calibri" pitchFamily="34" charset="-120"/>
-              </a:rPr>
-              <a:t> יותר באגים, </a:t>
-            </a:r>
-            <a:pPr rtl="1" algn="r" indent="0" marL="0">
+              <a:buSzPct val="100000"/>
+              <a:buChar char="•"/>
+            </a:pPr>
+            <a:r>
+              <a:rPr lang="en-US" sz="1900" b="1" dirty="0">
+                <a:solidFill>
+                  <a:srgbClr val="1B1F3B"/>
+                </a:solidFill>
+                <a:latin typeface="Calibri" pitchFamily="34" charset="0"/>
+                <a:ea typeface="Calibri" pitchFamily="34" charset="-122"/>
+                <a:cs typeface="Calibri" pitchFamily="34" charset="-120"/>
+              </a:rPr>
+              <a:t>61%</a:t>
+            </a:r>
+            <a:pPr rtl="1" algn="r" marL="228600" indent="-228600">
               <a:spcAft>
                 <a:spcPts val="1000"/>
               </a:spcAft>
-              <a:buNone/>
-            </a:pPr>
-            <a:r>
-              <a:rPr lang="en-US" sz="1900" b="1" dirty="0">
-                <a:solidFill>
-                  <a:srgbClr val="1B1F3B"/>
-                </a:solidFill>
-                <a:latin typeface="Calibri" pitchFamily="34" charset="0"/>
-                <a:ea typeface="Calibri" pitchFamily="34" charset="-122"/>
-                <a:cs typeface="Calibri" pitchFamily="34" charset="-120"/>
-              </a:rPr>
-              <a:t>ירידה של 7.2%</a:t>
-            </a:r>
-            <a:pPr rtl="1" algn="r" indent="0" marL="0">
+              <a:buSzPct val="100000"/>
+              <a:buChar char="•"/>
+            </a:pPr>
+            <a:r>
+              <a:rPr lang="en-US" sz="1900" dirty="0">
+                <a:solidFill>
+                  <a:srgbClr val="1B1F3B"/>
+                </a:solidFill>
+                <a:latin typeface="Calibri" pitchFamily="34" charset="0"/>
+                <a:ea typeface="Calibri" pitchFamily="34" charset="-122"/>
+                <a:cs typeface="Calibri" pitchFamily="34" charset="-120"/>
+              </a:rPr>
+              <a:t> מסכימים: "קוד AI נראה נכון אבל לא אמין"</a:t>
+            </a:r>
+            <a:endParaRPr lang="en-US" sz="1900" dirty="0"/>
+          </a:p>
+          <a:p>
+            <a:pPr rtl="1" algn="r" marL="228600" indent="-228600">
               <a:spcAft>
                 <a:spcPts val="1000"/>
               </a:spcAft>
-              <a:buNone/>
+              <a:buSzPct val="100000"/>
+              <a:buChar char="•"/>
+            </a:pPr>
+            <a:r>
+              <a:rPr lang="en-US" sz="1900" dirty="0">
+                <a:solidFill>
+                  <a:srgbClr val="1B1F3B"/>
+                </a:solidFill>
+                <a:latin typeface="Calibri" pitchFamily="34" charset="0"/>
+                <a:ea typeface="Calibri" pitchFamily="34" charset="-122"/>
+                <a:cs typeface="Calibri" pitchFamily="34" charset="-120"/>
+              </a:rPr>
+              <a:t>בפרויקטים שהסתמכו הרבה על AI (AI-heavy), לעומת פרויקטים שהסתמכו עליו פחות: </a:t>
+            </a:r>
+            <a:pPr rtl="1" algn="r" marL="228600" indent="-228600">
+              <a:spcAft>
+                <a:spcPts val="1000"/>
+              </a:spcAft>
+              <a:buSzPct val="100000"/>
+              <a:buChar char="•"/>
+            </a:pPr>
+            <a:r>
+              <a:rPr lang="en-US" sz="1900" b="1" dirty="0">
+                <a:solidFill>
+                  <a:srgbClr val="1B1F3B"/>
+                </a:solidFill>
+                <a:latin typeface="Calibri" pitchFamily="34" charset="0"/>
+                <a:ea typeface="Calibri" pitchFamily="34" charset="-122"/>
+                <a:cs typeface="Calibri" pitchFamily="34" charset="-120"/>
+              </a:rPr>
+              <a:t>41%+</a:t>
+            </a:r>
+            <a:pPr rtl="1" algn="r" marL="228600" indent="-228600">
+              <a:spcAft>
+                <a:spcPts val="1000"/>
+              </a:spcAft>
+              <a:buSzPct val="100000"/>
+              <a:buChar char="•"/>
+            </a:pPr>
+            <a:r>
+              <a:rPr lang="en-US" sz="1900" dirty="0">
+                <a:solidFill>
+                  <a:srgbClr val="1B1F3B"/>
+                </a:solidFill>
+                <a:latin typeface="Calibri" pitchFamily="34" charset="0"/>
+                <a:ea typeface="Calibri" pitchFamily="34" charset="-122"/>
+                <a:cs typeface="Calibri" pitchFamily="34" charset="-120"/>
+              </a:rPr>
+              <a:t> יותר באגים, </a:t>
+            </a:r>
+            <a:pPr rtl="1" algn="r" marL="228600" indent="-228600">
+              <a:spcAft>
+                <a:spcPts val="1000"/>
+              </a:spcAft>
+              <a:buSzPct val="100000"/>
+              <a:buChar char="•"/>
+            </a:pPr>
+            <a:r>
+              <a:rPr lang="en-US" sz="1900" b="1" dirty="0">
+                <a:solidFill>
+                  <a:srgbClr val="1B1F3B"/>
+                </a:solidFill>
+                <a:latin typeface="Calibri" pitchFamily="34" charset="0"/>
+                <a:ea typeface="Calibri" pitchFamily="34" charset="-122"/>
+                <a:cs typeface="Calibri" pitchFamily="34" charset="-120"/>
+              </a:rPr>
+              <a:t>ירידה של 7.2%</a:t>
+            </a:r>
+            <a:pPr rtl="1" algn="r" marL="228600" indent="-228600">
+              <a:spcAft>
+                <a:spcPts val="1000"/>
+              </a:spcAft>
+              <a:buSzPct val="100000"/>
+              <a:buChar char="•"/>
             </a:pPr>
             <a:r>
               <a:rPr lang="en-US" sz="1900" dirty="0">
@@ -4767,26 +4780,6 @@
               </a:rPr>
               <a:t>METR</a:t>
             </a:r>
-            <a:pPr rtl="1" algn="r" indent="0" marL="0">
-              <a:spcAft>
-                <a:spcPts val="1000"/>
-              </a:spcAft>
-              <a:buNone/>
-            </a:pPr>
-            <a:r>
-              <a:rPr lang="en-US" sz="1900" dirty="0">
-                <a:solidFill>
-                  <a:srgbClr val="1B1F3B"/>
-                </a:solidFill>
-                <a:latin typeface="Calibri" pitchFamily="34" charset="0"/>
-                <a:ea typeface="Calibri" pitchFamily="34" charset="-122"/>
-                <a:cs typeface="Calibri" pitchFamily="34" charset="-120"/>
-              </a:rPr>
-              <a:t> (ארגון מחקר עצמאי שבוחן ביצועים אמיתיים של כלי AI) השווה מפתחים מנוסים שעבדו עם כלי AI על משימות אמיתיות, מול אותם מפתחים על משימות דומות בלי AI</a:t>
-            </a:r>
-            <a:endParaRPr lang="en-US" sz="1900" dirty="0"/>
-          </a:p>
-          <a:p>
             <a:pPr rtl="1" algn="r" marL="228600" indent="-228600">
               <a:spcAft>
                 <a:spcPts val="1000"/>
@@ -4803,41 +4796,7 @@
                 <a:ea typeface="Calibri" pitchFamily="34" charset="-122"/>
                 <a:cs typeface="Calibri" pitchFamily="34" charset="-120"/>
               </a:rPr>
-              <a:t>בפועל: </a:t>
-            </a:r>
-            <a:pPr rtl="1" algn="r" indent="0" marL="0">
-              <a:spcAft>
-                <a:spcPts val="1000"/>
-              </a:spcAft>
-              <a:buNone/>
-            </a:pPr>
-            <a:r>
-              <a:rPr lang="en-US" sz="1900" b="1" dirty="0">
-                <a:solidFill>
-                  <a:srgbClr val="1B1F3B"/>
-                </a:solidFill>
-                <a:latin typeface="Calibri" pitchFamily="34" charset="0"/>
-                <a:ea typeface="Calibri" pitchFamily="34" charset="-122"/>
-                <a:cs typeface="Calibri" pitchFamily="34" charset="-120"/>
-              </a:rPr>
-              <a:t>איטיים ב-19%</a:t>
-            </a:r>
-            <a:pPr rtl="1" algn="r" indent="0" marL="0">
-              <a:spcAft>
-                <a:spcPts val="1000"/>
-              </a:spcAft>
-              <a:buNone/>
-            </a:pPr>
-            <a:r>
-              <a:rPr lang="en-US" sz="1900" dirty="0">
-                <a:solidFill>
-                  <a:srgbClr val="1B1F3B"/>
-                </a:solidFill>
-                <a:latin typeface="Calibri" pitchFamily="34" charset="0"/>
-                <a:ea typeface="Calibri" pitchFamily="34" charset="-122"/>
-                <a:cs typeface="Calibri" pitchFamily="34" charset="-120"/>
-              </a:rPr>
-              <a:t> (לעומת עבודה בלי כלי AI)</a:t>
+              <a:t> (ארגון מחקר עצמאי שבוחן ביצועים אמיתיים של כלי AI) השווה מפתחים מנוסים שעבדו עם כלי AI על משימות אמיתיות, מול אותם מפתחים על משימות דומות בלי AI</a:t>
             </a:r>
             <a:endParaRPr lang="en-US" sz="1900" dirty="0"/>
           </a:p>
@@ -4858,13 +4817,71 @@
                 <a:ea typeface="Calibri" pitchFamily="34" charset="-122"/>
                 <a:cs typeface="Calibri" pitchFamily="34" charset="-120"/>
               </a:rPr>
-              <a:t>אבל האמינו: </a:t>
-            </a:r>
-            <a:pPr rtl="1" algn="r" indent="0" marL="0">
+              <a:t>בפועל: </a:t>
+            </a:r>
+            <a:pPr rtl="1" algn="r" marL="228600" indent="-228600">
               <a:spcAft>
                 <a:spcPts val="1000"/>
               </a:spcAft>
-              <a:buNone/>
+              <a:buSzPct val="100000"/>
+              <a:buChar char="•"/>
+            </a:pPr>
+            <a:r>
+              <a:rPr lang="en-US" sz="1900" b="1" dirty="0">
+                <a:solidFill>
+                  <a:srgbClr val="1B1F3B"/>
+                </a:solidFill>
+                <a:latin typeface="Calibri" pitchFamily="34" charset="0"/>
+                <a:ea typeface="Calibri" pitchFamily="34" charset="-122"/>
+                <a:cs typeface="Calibri" pitchFamily="34" charset="-120"/>
+              </a:rPr>
+              <a:t>איטיים ב-19%</a:t>
+            </a:r>
+            <a:pPr rtl="1" algn="r" marL="228600" indent="-228600">
+              <a:spcAft>
+                <a:spcPts val="1000"/>
+              </a:spcAft>
+              <a:buSzPct val="100000"/>
+              <a:buChar char="•"/>
+            </a:pPr>
+            <a:r>
+              <a:rPr lang="en-US" sz="1900" dirty="0">
+                <a:solidFill>
+                  <a:srgbClr val="1B1F3B"/>
+                </a:solidFill>
+                <a:latin typeface="Calibri" pitchFamily="34" charset="0"/>
+                <a:ea typeface="Calibri" pitchFamily="34" charset="-122"/>
+                <a:cs typeface="Calibri" pitchFamily="34" charset="-120"/>
+              </a:rPr>
+              <a:t> (לעומת עבודה בלי כלי AI)</a:t>
+            </a:r>
+            <a:endParaRPr lang="en-US" sz="1900" dirty="0"/>
+          </a:p>
+          <a:p>
+            <a:pPr rtl="1" algn="r" marL="228600" indent="-228600">
+              <a:spcAft>
+                <a:spcPts val="1000"/>
+              </a:spcAft>
+              <a:buSzPct val="100000"/>
+              <a:buChar char="•"/>
+            </a:pPr>
+            <a:r>
+              <a:rPr lang="en-US" sz="1900" dirty="0">
+                <a:solidFill>
+                  <a:srgbClr val="1B1F3B"/>
+                </a:solidFill>
+                <a:latin typeface="Calibri" pitchFamily="34" charset="0"/>
+                <a:ea typeface="Calibri" pitchFamily="34" charset="-122"/>
+                <a:cs typeface="Calibri" pitchFamily="34" charset="-120"/>
+              </a:rPr>
+              <a:t>אבל האמינו: </a:t>
+            </a:r>
+            <a:pPr rtl="1" algn="r" marL="228600" indent="-228600">
+              <a:spcAft>
+                <a:spcPts val="1000"/>
+              </a:spcAft>
+              <a:buSzPct val="100000"/>
+              <a:buChar char="•"/>
             </a:pPr>
             <a:r>
               <a:rPr lang="en-US" sz="1900" b="1" dirty="0">
@@ -5170,26 +5187,6 @@
               </a:rPr>
               <a:t>1. הבנת הבעיה</a:t>
             </a:r>
-            <a:pPr rtl="1" algn="r" indent="0" marL="0">
-              <a:spcAft>
-                <a:spcPts val="1000"/>
-              </a:spcAft>
-              <a:buNone/>
-            </a:pPr>
-            <a:r>
-              <a:rPr lang="en-US" sz="1900" dirty="0">
-                <a:solidFill>
-                  <a:srgbClr val="1B1F3B"/>
-                </a:solidFill>
-                <a:latin typeface="Calibri" pitchFamily="34" charset="0"/>
-                <a:ea typeface="Calibri" pitchFamily="34" charset="-122"/>
-                <a:cs typeface="Calibri" pitchFamily="34" charset="-120"/>
-              </a:rPr>
-              <a:t> — מבינים מה בדיוק צריך, לפני שנוגעים בקוד בכלל</a:t>
-            </a:r>
-            <a:endParaRPr lang="en-US" sz="1900" dirty="0"/>
-          </a:p>
-          <a:p>
             <a:pPr rtl="1" algn="r" marL="228600" indent="-228600">
               <a:spcAft>
                 <a:spcPts val="1000"/>
@@ -5198,23 +5195,6 @@
               <a:buChar char="•"/>
             </a:pPr>
             <a:r>
-              <a:rPr lang="en-US" sz="1900" b="1" dirty="0">
-                <a:solidFill>
-                  <a:srgbClr val="1B1F3B"/>
-                </a:solidFill>
-                <a:latin typeface="Calibri" pitchFamily="34" charset="0"/>
-                <a:ea typeface="Calibri" pitchFamily="34" charset="-122"/>
-                <a:cs typeface="Calibri" pitchFamily="34" charset="-120"/>
-              </a:rPr>
-              <a:t>2. Specification</a:t>
-            </a:r>
-            <a:pPr rtl="1" algn="r" indent="0" marL="0">
-              <a:spcAft>
-                <a:spcPts val="1000"/>
-              </a:spcAft>
-              <a:buNone/>
-            </a:pPr>
-            <a:r>
               <a:rPr lang="en-US" sz="1900" dirty="0">
                 <a:solidFill>
                   <a:srgbClr val="1B1F3B"/>
@@ -5223,7 +5203,7 @@
                 <a:ea typeface="Calibri" pitchFamily="34" charset="-122"/>
                 <a:cs typeface="Calibri" pitchFamily="34" charset="-120"/>
               </a:rPr>
-              <a:t> — כותבים מסמך קצר שמתאר מה בונים ולמה</a:t>
+              <a:t> — מבינים מה בדיוק צריך, לפני שנוגעים בקוד בכלל</a:t>
             </a:r>
             <a:endParaRPr lang="en-US" sz="1900" dirty="0"/>
           </a:p>
@@ -5244,28 +5224,8 @@
                 <a:ea typeface="Calibri" pitchFamily="34" charset="-122"/>
                 <a:cs typeface="Calibri" pitchFamily="34" charset="-120"/>
               </a:rPr>
-              <a:t>3. בניית Context</a:t>
-            </a:r>
-            <a:pPr rtl="1" algn="r" indent="0" marL="0">
-              <a:spcAft>
-                <a:spcPts val="1000"/>
-              </a:spcAft>
-              <a:buNone/>
-            </a:pPr>
-            <a:r>
-              <a:rPr lang="en-US" sz="1900" dirty="0">
-                <a:solidFill>
-                  <a:srgbClr val="1B1F3B"/>
-                </a:solidFill>
-                <a:latin typeface="Calibri" pitchFamily="34" charset="0"/>
-                <a:ea typeface="Calibri" pitchFamily="34" charset="-122"/>
-                <a:cs typeface="Calibri" pitchFamily="34" charset="-120"/>
-              </a:rPr>
-              <a:t> — אוספים את המידע שה-AI צריך כדי להבין את הפרויקט (קבצים קיימים, מוסכמות, החלטות קודמות)</a:t>
-            </a:r>
-            <a:endParaRPr lang="en-US" sz="1900" dirty="0"/>
-          </a:p>
-          <a:p>
+              <a:t>2. Specification</a:t>
+            </a:r>
             <a:pPr rtl="1" algn="r" marL="228600" indent="-228600">
               <a:spcAft>
                 <a:spcPts val="1000"/>
@@ -5274,23 +5234,6 @@
               <a:buChar char="•"/>
             </a:pPr>
             <a:r>
-              <a:rPr lang="en-US" sz="1900" b="1" dirty="0">
-                <a:solidFill>
-                  <a:srgbClr val="1B1F3B"/>
-                </a:solidFill>
-                <a:latin typeface="Calibri" pitchFamily="34" charset="0"/>
-                <a:ea typeface="Calibri" pitchFamily="34" charset="-122"/>
-                <a:cs typeface="Calibri" pitchFamily="34" charset="-120"/>
-              </a:rPr>
-              <a:t>4. תכנון עם AI</a:t>
-            </a:r>
-            <a:pPr rtl="1" algn="r" indent="0" marL="0">
-              <a:spcAft>
-                <a:spcPts val="1000"/>
-              </a:spcAft>
-              <a:buNone/>
-            </a:pPr>
-            <a:r>
               <a:rPr lang="en-US" sz="1900" dirty="0">
                 <a:solidFill>
                   <a:srgbClr val="1B1F3B"/>
@@ -5299,7 +5242,7 @@
                 <a:ea typeface="Calibri" pitchFamily="34" charset="-122"/>
                 <a:cs typeface="Calibri" pitchFamily="34" charset="-120"/>
               </a:rPr>
-              <a:t> — מבקשים מה-AI הצעת תוכנית לפני שהוא כותב שורת קוד אחת</a:t>
+              <a:t> — כותבים מסמך קצר שמתאר מה בונים ולמה</a:t>
             </a:r>
             <a:endParaRPr lang="en-US" sz="1900" dirty="0"/>
           </a:p>
@@ -5320,13 +5263,92 @@
                 <a:ea typeface="Calibri" pitchFamily="34" charset="-122"/>
                 <a:cs typeface="Calibri" pitchFamily="34" charset="-120"/>
               </a:rPr>
-              <a:t>5. מימוש עם AI</a:t>
-            </a:r>
-            <a:pPr rtl="1" algn="r" indent="0" marL="0">
+              <a:t>3. בניית Context</a:t>
+            </a:r>
+            <a:pPr rtl="1" algn="r" marL="228600" indent="-228600">
               <a:spcAft>
                 <a:spcPts val="1000"/>
               </a:spcAft>
-              <a:buNone/>
+              <a:buSzPct val="100000"/>
+              <a:buChar char="•"/>
+            </a:pPr>
+            <a:r>
+              <a:rPr lang="en-US" sz="1900" dirty="0">
+                <a:solidFill>
+                  <a:srgbClr val="1B1F3B"/>
+                </a:solidFill>
+                <a:latin typeface="Calibri" pitchFamily="34" charset="0"/>
+                <a:ea typeface="Calibri" pitchFamily="34" charset="-122"/>
+                <a:cs typeface="Calibri" pitchFamily="34" charset="-120"/>
+              </a:rPr>
+              <a:t> — אוספים את המידע שה-AI צריך כדי להבין את הפרויקט (קבצים קיימים, מוסכמות, החלטות קודמות)</a:t>
+            </a:r>
+            <a:endParaRPr lang="en-US" sz="1900" dirty="0"/>
+          </a:p>
+          <a:p>
+            <a:pPr rtl="1" algn="r" marL="228600" indent="-228600">
+              <a:spcAft>
+                <a:spcPts val="1000"/>
+              </a:spcAft>
+              <a:buSzPct val="100000"/>
+              <a:buChar char="•"/>
+            </a:pPr>
+            <a:r>
+              <a:rPr lang="en-US" sz="1900" b="1" dirty="0">
+                <a:solidFill>
+                  <a:srgbClr val="1B1F3B"/>
+                </a:solidFill>
+                <a:latin typeface="Calibri" pitchFamily="34" charset="0"/>
+                <a:ea typeface="Calibri" pitchFamily="34" charset="-122"/>
+                <a:cs typeface="Calibri" pitchFamily="34" charset="-120"/>
+              </a:rPr>
+              <a:t>4. תכנון עם AI</a:t>
+            </a:r>
+            <a:pPr rtl="1" algn="r" marL="228600" indent="-228600">
+              <a:spcAft>
+                <a:spcPts val="1000"/>
+              </a:spcAft>
+              <a:buSzPct val="100000"/>
+              <a:buChar char="•"/>
+            </a:pPr>
+            <a:r>
+              <a:rPr lang="en-US" sz="1900" dirty="0">
+                <a:solidFill>
+                  <a:srgbClr val="1B1F3B"/>
+                </a:solidFill>
+                <a:latin typeface="Calibri" pitchFamily="34" charset="0"/>
+                <a:ea typeface="Calibri" pitchFamily="34" charset="-122"/>
+                <a:cs typeface="Calibri" pitchFamily="34" charset="-120"/>
+              </a:rPr>
+              <a:t> — מבקשים מה-AI הצעת תוכנית לפני שהוא כותב שורת קוד אחת</a:t>
+            </a:r>
+            <a:endParaRPr lang="en-US" sz="1900" dirty="0"/>
+          </a:p>
+          <a:p>
+            <a:pPr rtl="1" algn="r" marL="228600" indent="-228600">
+              <a:spcAft>
+                <a:spcPts val="1000"/>
+              </a:spcAft>
+              <a:buSzPct val="100000"/>
+              <a:buChar char="•"/>
+            </a:pPr>
+            <a:r>
+              <a:rPr lang="en-US" sz="1900" b="1" dirty="0">
+                <a:solidFill>
+                  <a:srgbClr val="1B1F3B"/>
+                </a:solidFill>
+                <a:latin typeface="Calibri" pitchFamily="34" charset="0"/>
+                <a:ea typeface="Calibri" pitchFamily="34" charset="-122"/>
+                <a:cs typeface="Calibri" pitchFamily="34" charset="-120"/>
+              </a:rPr>
+              <a:t>5. מימוש עם AI</a:t>
+            </a:r>
+            <a:pPr rtl="1" algn="r" marL="228600" indent="-228600">
+              <a:spcAft>
+                <a:spcPts val="1000"/>
+              </a:spcAft>
+              <a:buSzPct val="100000"/>
+              <a:buChar char="•"/>
             </a:pPr>
             <a:r>
               <a:rPr lang="en-US" sz="1900" dirty="0">
@@ -6009,26 +6031,6 @@
               </a:rPr>
               <a:t>6. Code Review</a:t>
             </a:r>
-            <a:pPr rtl="1" algn="r" indent="0" marL="0">
-              <a:spcAft>
-                <a:spcPts val="1000"/>
-              </a:spcAft>
-              <a:buNone/>
-            </a:pPr>
-            <a:r>
-              <a:rPr lang="en-US" sz="1900" dirty="0">
-                <a:solidFill>
-                  <a:srgbClr val="1B1F3B"/>
-                </a:solidFill>
-                <a:latin typeface="Calibri" pitchFamily="34" charset="0"/>
-                <a:ea typeface="Calibri" pitchFamily="34" charset="-122"/>
-                <a:cs typeface="Calibri" pitchFamily="34" charset="-120"/>
-              </a:rPr>
-              <a:t> — קוראים ובודקים כל שורה שה-AI כתב, לפני שהיא נכנסת לפרויקט</a:t>
-            </a:r>
-            <a:endParaRPr lang="en-US" sz="1900" dirty="0"/>
-          </a:p>
-          <a:p>
             <a:pPr rtl="1" algn="r" marL="228600" indent="-228600">
               <a:spcAft>
                 <a:spcPts val="1000"/>
@@ -6037,23 +6039,6 @@
               <a:buChar char="•"/>
             </a:pPr>
             <a:r>
-              <a:rPr lang="en-US" sz="1900" b="1" dirty="0">
-                <a:solidFill>
-                  <a:srgbClr val="1B1F3B"/>
-                </a:solidFill>
-                <a:latin typeface="Calibri" pitchFamily="34" charset="0"/>
-                <a:ea typeface="Calibri" pitchFamily="34" charset="-122"/>
-                <a:cs typeface="Calibri" pitchFamily="34" charset="-120"/>
-              </a:rPr>
-              <a:t>7. Testing</a:t>
-            </a:r>
-            <a:pPr rtl="1" algn="r" indent="0" marL="0">
-              <a:spcAft>
-                <a:spcPts val="1000"/>
-              </a:spcAft>
-              <a:buNone/>
-            </a:pPr>
-            <a:r>
               <a:rPr lang="en-US" sz="1900" dirty="0">
                 <a:solidFill>
                   <a:srgbClr val="1B1F3B"/>
@@ -6062,7 +6047,7 @@
                 <a:ea typeface="Calibri" pitchFamily="34" charset="-122"/>
                 <a:cs typeface="Calibri" pitchFamily="34" charset="-120"/>
               </a:rPr>
-              <a:t> — מריצים בדיקות אוטומטיות שמוודאות שהקוד באמת עושה מה שהוא אמור</a:t>
+              <a:t> — קוראים ובודקים כל שורה שה-AI כתב, לפני שהיא נכנסת לפרויקט</a:t>
             </a:r>
             <a:endParaRPr lang="en-US" sz="1900" dirty="0"/>
           </a:p>
@@ -6083,28 +6068,8 @@
                 <a:ea typeface="Calibri" pitchFamily="34" charset="-122"/>
                 <a:cs typeface="Calibri" pitchFamily="34" charset="-120"/>
               </a:rPr>
-              <a:t>8. Commit</a:t>
-            </a:r>
-            <a:pPr rtl="1" algn="r" indent="0" marL="0">
-              <a:spcAft>
-                <a:spcPts val="1000"/>
-              </a:spcAft>
-              <a:buNone/>
-            </a:pPr>
-            <a:r>
-              <a:rPr lang="en-US" sz="1900" dirty="0">
-                <a:solidFill>
-                  <a:srgbClr val="1B1F3B"/>
-                </a:solidFill>
-                <a:latin typeface="Calibri" pitchFamily="34" charset="0"/>
-                <a:ea typeface="Calibri" pitchFamily="34" charset="-122"/>
-                <a:cs typeface="Calibri" pitchFamily="34" charset="-120"/>
-              </a:rPr>
-              <a:t> — שומרים גרסה מתועדת של השינוי (עם Git — נסביר בשיעור הבא)</a:t>
-            </a:r>
-            <a:endParaRPr lang="en-US" sz="1900" dirty="0"/>
-          </a:p>
-          <a:p>
+              <a:t>7. Testing</a:t>
+            </a:r>
             <a:pPr rtl="1" algn="r" marL="228600" indent="-228600">
               <a:spcAft>
                 <a:spcPts val="1000"/>
@@ -6113,23 +6078,6 @@
               <a:buChar char="•"/>
             </a:pPr>
             <a:r>
-              <a:rPr lang="en-US" sz="1900" b="1" dirty="0">
-                <a:solidFill>
-                  <a:srgbClr val="1B1F3B"/>
-                </a:solidFill>
-                <a:latin typeface="Calibri" pitchFamily="34" charset="0"/>
-                <a:ea typeface="Calibri" pitchFamily="34" charset="-122"/>
-                <a:cs typeface="Calibri" pitchFamily="34" charset="-120"/>
-              </a:rPr>
-              <a:t>9. Deploy</a:t>
-            </a:r>
-            <a:pPr rtl="1" algn="r" indent="0" marL="0">
-              <a:spcAft>
-                <a:spcPts val="1000"/>
-              </a:spcAft>
-              <a:buNone/>
-            </a:pPr>
-            <a:r>
               <a:rPr lang="en-US" sz="1900" dirty="0">
                 <a:solidFill>
                   <a:srgbClr val="1B1F3B"/>
@@ -6138,7 +6086,7 @@
                 <a:ea typeface="Calibri" pitchFamily="34" charset="-122"/>
                 <a:cs typeface="Calibri" pitchFamily="34" charset="-120"/>
               </a:rPr>
-              <a:t> — מעלים את הגרסה לסביבה שבה משתמשים אמיתיים יכולים להשתמש בה</a:t>
+              <a:t> — מריצים בדיקות אוטומטיות שמוודאות שהקוד באמת עושה מה שהוא אמור</a:t>
             </a:r>
             <a:endParaRPr lang="en-US" sz="1900" dirty="0"/>
           </a:p>
@@ -6159,13 +6107,92 @@
                 <a:ea typeface="Calibri" pitchFamily="34" charset="-122"/>
                 <a:cs typeface="Calibri" pitchFamily="34" charset="-120"/>
               </a:rPr>
-              <a:t>10. שיתוף</a:t>
-            </a:r>
-            <a:pPr rtl="1" algn="r" indent="0" marL="0">
+              <a:t>8. Commit</a:t>
+            </a:r>
+            <a:pPr rtl="1" algn="r" marL="228600" indent="-228600">
               <a:spcAft>
                 <a:spcPts val="1000"/>
               </a:spcAft>
-              <a:buNone/>
+              <a:buSzPct val="100000"/>
+              <a:buChar char="•"/>
+            </a:pPr>
+            <a:r>
+              <a:rPr lang="en-US" sz="1900" dirty="0">
+                <a:solidFill>
+                  <a:srgbClr val="1B1F3B"/>
+                </a:solidFill>
+                <a:latin typeface="Calibri" pitchFamily="34" charset="0"/>
+                <a:ea typeface="Calibri" pitchFamily="34" charset="-122"/>
+                <a:cs typeface="Calibri" pitchFamily="34" charset="-120"/>
+              </a:rPr>
+              <a:t> — שומרים גרסה מתועדת של השינוי (עם Git — נסביר בשיעור הבא)</a:t>
+            </a:r>
+            <a:endParaRPr lang="en-US" sz="1900" dirty="0"/>
+          </a:p>
+          <a:p>
+            <a:pPr rtl="1" algn="r" marL="228600" indent="-228600">
+              <a:spcAft>
+                <a:spcPts val="1000"/>
+              </a:spcAft>
+              <a:buSzPct val="100000"/>
+              <a:buChar char="•"/>
+            </a:pPr>
+            <a:r>
+              <a:rPr lang="en-US" sz="1900" b="1" dirty="0">
+                <a:solidFill>
+                  <a:srgbClr val="1B1F3B"/>
+                </a:solidFill>
+                <a:latin typeface="Calibri" pitchFamily="34" charset="0"/>
+                <a:ea typeface="Calibri" pitchFamily="34" charset="-122"/>
+                <a:cs typeface="Calibri" pitchFamily="34" charset="-120"/>
+              </a:rPr>
+              <a:t>9. Deploy</a:t>
+            </a:r>
+            <a:pPr rtl="1" algn="r" marL="228600" indent="-228600">
+              <a:spcAft>
+                <a:spcPts val="1000"/>
+              </a:spcAft>
+              <a:buSzPct val="100000"/>
+              <a:buChar char="•"/>
+            </a:pPr>
+            <a:r>
+              <a:rPr lang="en-US" sz="1900" dirty="0">
+                <a:solidFill>
+                  <a:srgbClr val="1B1F3B"/>
+                </a:solidFill>
+                <a:latin typeface="Calibri" pitchFamily="34" charset="0"/>
+                <a:ea typeface="Calibri" pitchFamily="34" charset="-122"/>
+                <a:cs typeface="Calibri" pitchFamily="34" charset="-120"/>
+              </a:rPr>
+              <a:t> — מעלים את הגרסה לסביבה שבה משתמשים אמיתיים יכולים להשתמש בה</a:t>
+            </a:r>
+            <a:endParaRPr lang="en-US" sz="1900" dirty="0"/>
+          </a:p>
+          <a:p>
+            <a:pPr rtl="1" algn="r" marL="228600" indent="-228600">
+              <a:spcAft>
+                <a:spcPts val="1000"/>
+              </a:spcAft>
+              <a:buSzPct val="100000"/>
+              <a:buChar char="•"/>
+            </a:pPr>
+            <a:r>
+              <a:rPr lang="en-US" sz="1900" b="1" dirty="0">
+                <a:solidFill>
+                  <a:srgbClr val="1B1F3B"/>
+                </a:solidFill>
+                <a:latin typeface="Calibri" pitchFamily="34" charset="0"/>
+                <a:ea typeface="Calibri" pitchFamily="34" charset="-122"/>
+                <a:cs typeface="Calibri" pitchFamily="34" charset="-120"/>
+              </a:rPr>
+              <a:t>10. שיתוף</a:t>
+            </a:r>
+            <a:pPr rtl="1" algn="r" marL="228600" indent="-228600">
+              <a:spcAft>
+                <a:spcPts val="1000"/>
+              </a:spcAft>
+              <a:buSzPct val="100000"/>
+              <a:buChar char="•"/>
             </a:pPr>
             <a:r>
               <a:rPr lang="en-US" sz="1900" dirty="0">
@@ -7397,26 +7424,6 @@
               </a:rPr>
               <a:t>דו"ח DORA</a:t>
             </a:r>
-            <a:pPr rtl="1" algn="r" indent="0" marL="0">
-              <a:spcAft>
-                <a:spcPts val="1000"/>
-              </a:spcAft>
-              <a:buNone/>
-            </a:pPr>
-            <a:r>
-              <a:rPr lang="en-US" sz="1900" dirty="0">
-                <a:solidFill>
-                  <a:srgbClr val="1B1F3B"/>
-                </a:solidFill>
-                <a:latin typeface="Calibri" pitchFamily="34" charset="0"/>
-                <a:ea typeface="Calibri" pitchFamily="34" charset="-122"/>
-                <a:cs typeface="Calibri" pitchFamily="34" charset="-120"/>
-              </a:rPr>
-              <a:t> (מחקר שנתי מוביל בתעשייה על תהליכי פיתוח תוכנה, מבית Google) לשנת 2026, שיפור פרודוקטיביות בהשוואה לעבודה בלי כלי AI כלל:</a:t>
-            </a:r>
-            <a:endParaRPr lang="en-US" sz="1900" dirty="0"/>
-          </a:p>
-          <a:p>
             <a:pPr rtl="1" algn="r" marL="228600" indent="-228600">
               <a:spcAft>
                 <a:spcPts val="1000"/>
@@ -7433,41 +7440,7 @@
                 <a:ea typeface="Calibri" pitchFamily="34" charset="-122"/>
                 <a:cs typeface="Calibri" pitchFamily="34" charset="-120"/>
               </a:rPr>
-              <a:t>קוד קיים (Brownfield) בלי תהליך מסודר: </a:t>
-            </a:r>
-            <a:pPr rtl="1" algn="r" indent="0" marL="0">
-              <a:spcAft>
-                <a:spcPts val="1000"/>
-              </a:spcAft>
-              <a:buNone/>
-            </a:pPr>
-            <a:r>
-              <a:rPr lang="en-US" sz="1900" b="1" dirty="0">
-                <a:solidFill>
-                  <a:srgbClr val="1B1F3B"/>
-                </a:solidFill>
-                <a:latin typeface="Calibri" pitchFamily="34" charset="0"/>
-                <a:ea typeface="Calibri" pitchFamily="34" charset="-122"/>
-                <a:cs typeface="Calibri" pitchFamily="34" charset="-120"/>
-              </a:rPr>
-              <a:t>~10%</a:t>
-            </a:r>
-            <a:pPr rtl="1" algn="r" indent="0" marL="0">
-              <a:spcAft>
-                <a:spcPts val="1000"/>
-              </a:spcAft>
-              <a:buNone/>
-            </a:pPr>
-            <a:r>
-              <a:rPr lang="en-US" sz="1900" dirty="0">
-                <a:solidFill>
-                  <a:srgbClr val="1B1F3B"/>
-                </a:solidFill>
-                <a:latin typeface="Calibri" pitchFamily="34" charset="0"/>
-                <a:ea typeface="Calibri" pitchFamily="34" charset="-122"/>
-                <a:cs typeface="Calibri" pitchFamily="34" charset="-120"/>
-              </a:rPr>
-              <a:t> שיפור</a:t>
+              <a:t> (מחקר שנתי מוביל בתעשייה על תהליכי פיתוח תוכנה, מבית Google) לשנת 2026, שיפור פרודוקטיביות בהשוואה לעבודה בלי כלי AI כלל:</a:t>
             </a:r>
             <a:endParaRPr lang="en-US" sz="1900" dirty="0"/>
           </a:p>
@@ -7488,45 +7461,8 @@
                 <a:ea typeface="Calibri" pitchFamily="34" charset="-122"/>
                 <a:cs typeface="Calibri" pitchFamily="34" charset="-120"/>
               </a:rPr>
-              <a:t>אותם כלים, על פרויקט חדש שנבנה מאפס (Greenfield) עם Workflow ברור: </a:t>
-            </a:r>
-            <a:pPr rtl="1" algn="r" indent="0" marL="0">
-              <a:spcAft>
-                <a:spcPts val="1000"/>
-              </a:spcAft>
-              <a:buNone/>
-            </a:pPr>
-            <a:r>
-              <a:rPr lang="en-US" sz="1900" b="1" dirty="0">
-                <a:solidFill>
-                  <a:srgbClr val="1B1F3B"/>
-                </a:solidFill>
-                <a:latin typeface="Calibri" pitchFamily="34" charset="0"/>
-                <a:ea typeface="Calibri" pitchFamily="34" charset="-122"/>
-                <a:cs typeface="Calibri" pitchFamily="34" charset="-120"/>
-              </a:rPr>
-              <a:t>35-40%</a:t>
-            </a:r>
-            <a:pPr rtl="1" algn="r" indent="0" marL="0">
-              <a:spcAft>
-                <a:spcPts val="1000"/>
-              </a:spcAft>
-              <a:buNone/>
-            </a:pPr>
-            <a:r>
-              <a:rPr lang="en-US" sz="1900" dirty="0">
-                <a:solidFill>
-                  <a:srgbClr val="1B1F3B"/>
-                </a:solidFill>
-                <a:latin typeface="Calibri" pitchFamily="34" charset="0"/>
-                <a:ea typeface="Calibri" pitchFamily="34" charset="-122"/>
-                <a:cs typeface="Calibri" pitchFamily="34" charset="-120"/>
-              </a:rPr>
-              <a:t> שיפור</a:t>
-            </a:r>
-            <a:endParaRPr lang="en-US" sz="1900" dirty="0"/>
-          </a:p>
-          <a:p>
+              <a:t>קוד קיים (Brownfield) בלי תהליך מסודר: </a:t>
+            </a:r>
             <a:pPr rtl="1" algn="r" marL="228600" indent="-228600">
               <a:spcAft>
                 <a:spcPts val="1000"/>
@@ -7535,38 +7471,43 @@
               <a:buChar char="•"/>
             </a:pPr>
             <a:r>
-              <a:rPr lang="en-US" sz="1900" dirty="0">
-                <a:solidFill>
-                  <a:srgbClr val="1B1F3B"/>
-                </a:solidFill>
-                <a:latin typeface="Calibri" pitchFamily="34" charset="0"/>
-                <a:ea typeface="Calibri" pitchFamily="34" charset="-122"/>
-                <a:cs typeface="Calibri" pitchFamily="34" charset="-120"/>
-              </a:rPr>
-              <a:t>בלי תהליך מסודר: </a:t>
-            </a:r>
-            <a:pPr rtl="1" algn="r" indent="0" marL="0">
+              <a:rPr lang="en-US" sz="1900" b="1" dirty="0">
+                <a:solidFill>
+                  <a:srgbClr val="1B1F3B"/>
+                </a:solidFill>
+                <a:latin typeface="Calibri" pitchFamily="34" charset="0"/>
+                <a:ea typeface="Calibri" pitchFamily="34" charset="-122"/>
+                <a:cs typeface="Calibri" pitchFamily="34" charset="-120"/>
+              </a:rPr>
+              <a:t>~10%</a:t>
+            </a:r>
+            <a:pPr rtl="1" algn="r" marL="228600" indent="-228600">
               <a:spcAft>
                 <a:spcPts val="1000"/>
               </a:spcAft>
-              <a:buNone/>
-            </a:pPr>
-            <a:r>
-              <a:rPr lang="en-US" sz="1900" b="1" dirty="0">
-                <a:solidFill>
-                  <a:srgbClr val="1B1F3B"/>
-                </a:solidFill>
-                <a:latin typeface="Calibri" pitchFamily="34" charset="0"/>
-                <a:ea typeface="Calibri" pitchFamily="34" charset="-122"/>
-                <a:cs typeface="Calibri" pitchFamily="34" charset="-120"/>
-              </a:rPr>
-              <a:t>30-41%</a:t>
-            </a:r>
-            <a:pPr rtl="1" algn="r" indent="0" marL="0">
+              <a:buSzPct val="100000"/>
+              <a:buChar char="•"/>
+            </a:pPr>
+            <a:r>
+              <a:rPr lang="en-US" sz="1900" dirty="0">
+                <a:solidFill>
+                  <a:srgbClr val="1B1F3B"/>
+                </a:solidFill>
+                <a:latin typeface="Calibri" pitchFamily="34" charset="0"/>
+                <a:ea typeface="Calibri" pitchFamily="34" charset="-122"/>
+                <a:cs typeface="Calibri" pitchFamily="34" charset="-120"/>
+              </a:rPr>
+              <a:t> שיפור</a:t>
+            </a:r>
+            <a:endParaRPr lang="en-US" sz="1900" dirty="0"/>
+          </a:p>
+          <a:p>
+            <a:pPr rtl="1" algn="r" marL="228600" indent="-228600">
               <a:spcAft>
                 <a:spcPts val="1000"/>
               </a:spcAft>
-              <a:buNone/>
+              <a:buSzPct val="100000"/>
+              <a:buChar char="•"/>
             </a:pPr>
             <a:r>
               <a:rPr lang="en-US" sz="1900" dirty="0">
@@ -7577,13 +7518,14 @@
                 <a:ea typeface="Calibri" pitchFamily="34" charset="-122"/>
                 <a:cs typeface="Calibri" pitchFamily="34" charset="-120"/>
               </a:rPr>
-              <a:t> יותר </a:t>
-            </a:r>
-            <a:pPr rtl="1" algn="r" indent="0" marL="0">
+              <a:t>אותם כלים, על פרויקט חדש שנבנה מאפס (Greenfield) עם Workflow ברור: </a:t>
+            </a:r>
+            <a:pPr rtl="1" algn="r" marL="228600" indent="-228600">
               <a:spcAft>
                 <a:spcPts val="1000"/>
               </a:spcAft>
-              <a:buNone/>
+              <a:buSzPct val="100000"/>
+              <a:buChar char="•"/>
             </a:pPr>
             <a:r>
               <a:rPr lang="en-US" sz="1900" b="1" dirty="0">
@@ -7594,13 +7536,14 @@
                 <a:ea typeface="Calibri" pitchFamily="34" charset="-122"/>
                 <a:cs typeface="Calibri" pitchFamily="34" charset="-120"/>
               </a:rPr>
-              <a:t>חוב טכני</a:t>
-            </a:r>
-            <a:pPr rtl="1" algn="r" indent="0" marL="0">
+              <a:t>35-40%</a:t>
+            </a:r>
+            <a:pPr rtl="1" algn="r" marL="228600" indent="-228600">
               <a:spcAft>
                 <a:spcPts val="1000"/>
               </a:spcAft>
-              <a:buNone/>
+              <a:buSzPct val="100000"/>
+              <a:buChar char="•"/>
             </a:pPr>
             <a:r>
               <a:rPr lang="en-US" sz="1900" dirty="0">
@@ -7611,30 +7554,125 @@
                 <a:ea typeface="Calibri" pitchFamily="34" charset="-122"/>
                 <a:cs typeface="Calibri" pitchFamily="34" charset="-120"/>
               </a:rPr>
-              <a:t> (עבודה "מהירה" עכשיו שדורשת תיקון יקר יותר בהמשך), ו-PR עם AI = </a:t>
-            </a:r>
-            <a:pPr rtl="1" algn="r" indent="0" marL="0">
+              <a:t> שיפור</a:t>
+            </a:r>
+            <a:endParaRPr lang="en-US" sz="1900" dirty="0"/>
+          </a:p>
+          <a:p>
+            <a:pPr rtl="1" algn="r" marL="228600" indent="-228600">
               <a:spcAft>
                 <a:spcPts val="1000"/>
               </a:spcAft>
-              <a:buNone/>
-            </a:pPr>
-            <a:r>
-              <a:rPr lang="en-US" sz="1900" b="1" dirty="0">
-                <a:solidFill>
-                  <a:srgbClr val="1B1F3B"/>
-                </a:solidFill>
-                <a:latin typeface="Calibri" pitchFamily="34" charset="0"/>
-                <a:ea typeface="Calibri" pitchFamily="34" charset="-122"/>
-                <a:cs typeface="Calibri" pitchFamily="34" charset="-120"/>
-              </a:rPr>
-              <a:t>פי 1.7</a:t>
-            </a:r>
-            <a:pPr rtl="1" algn="r" indent="0" marL="0">
+              <a:buSzPct val="100000"/>
+              <a:buChar char="•"/>
+            </a:pPr>
+            <a:r>
+              <a:rPr lang="en-US" sz="1900" dirty="0">
+                <a:solidFill>
+                  <a:srgbClr val="1B1F3B"/>
+                </a:solidFill>
+                <a:latin typeface="Calibri" pitchFamily="34" charset="0"/>
+                <a:ea typeface="Calibri" pitchFamily="34" charset="-122"/>
+                <a:cs typeface="Calibri" pitchFamily="34" charset="-120"/>
+              </a:rPr>
+              <a:t>בלי תהליך מסודר: </a:t>
+            </a:r>
+            <a:pPr rtl="1" algn="r" marL="228600" indent="-228600">
               <a:spcAft>
                 <a:spcPts val="1000"/>
               </a:spcAft>
-              <a:buNone/>
+              <a:buSzPct val="100000"/>
+              <a:buChar char="•"/>
+            </a:pPr>
+            <a:r>
+              <a:rPr lang="en-US" sz="1900" b="1" dirty="0">
+                <a:solidFill>
+                  <a:srgbClr val="1B1F3B"/>
+                </a:solidFill>
+                <a:latin typeface="Calibri" pitchFamily="34" charset="0"/>
+                <a:ea typeface="Calibri" pitchFamily="34" charset="-122"/>
+                <a:cs typeface="Calibri" pitchFamily="34" charset="-120"/>
+              </a:rPr>
+              <a:t>30-41%</a:t>
+            </a:r>
+            <a:pPr rtl="1" algn="r" marL="228600" indent="-228600">
+              <a:spcAft>
+                <a:spcPts val="1000"/>
+              </a:spcAft>
+              <a:buSzPct val="100000"/>
+              <a:buChar char="•"/>
+            </a:pPr>
+            <a:r>
+              <a:rPr lang="en-US" sz="1900" dirty="0">
+                <a:solidFill>
+                  <a:srgbClr val="1B1F3B"/>
+                </a:solidFill>
+                <a:latin typeface="Calibri" pitchFamily="34" charset="0"/>
+                <a:ea typeface="Calibri" pitchFamily="34" charset="-122"/>
+                <a:cs typeface="Calibri" pitchFamily="34" charset="-120"/>
+              </a:rPr>
+              <a:t> יותר </a:t>
+            </a:r>
+            <a:pPr rtl="1" algn="r" marL="228600" indent="-228600">
+              <a:spcAft>
+                <a:spcPts val="1000"/>
+              </a:spcAft>
+              <a:buSzPct val="100000"/>
+              <a:buChar char="•"/>
+            </a:pPr>
+            <a:r>
+              <a:rPr lang="en-US" sz="1900" b="1" dirty="0">
+                <a:solidFill>
+                  <a:srgbClr val="1B1F3B"/>
+                </a:solidFill>
+                <a:latin typeface="Calibri" pitchFamily="34" charset="0"/>
+                <a:ea typeface="Calibri" pitchFamily="34" charset="-122"/>
+                <a:cs typeface="Calibri" pitchFamily="34" charset="-120"/>
+              </a:rPr>
+              <a:t>חוב טכני</a:t>
+            </a:r>
+            <a:pPr rtl="1" algn="r" marL="228600" indent="-228600">
+              <a:spcAft>
+                <a:spcPts val="1000"/>
+              </a:spcAft>
+              <a:buSzPct val="100000"/>
+              <a:buChar char="•"/>
+            </a:pPr>
+            <a:r>
+              <a:rPr lang="en-US" sz="1900" dirty="0">
+                <a:solidFill>
+                  <a:srgbClr val="1B1F3B"/>
+                </a:solidFill>
+                <a:latin typeface="Calibri" pitchFamily="34" charset="0"/>
+                <a:ea typeface="Calibri" pitchFamily="34" charset="-122"/>
+                <a:cs typeface="Calibri" pitchFamily="34" charset="-120"/>
+              </a:rPr>
+              <a:t> (עבודה "מהירה" עכשיו שדורשת תיקון יקר יותר בהמשך), ו-PR עם AI = </a:t>
+            </a:r>
+            <a:pPr rtl="1" algn="r" marL="228600" indent="-228600">
+              <a:spcAft>
+                <a:spcPts val="1000"/>
+              </a:spcAft>
+              <a:buSzPct val="100000"/>
+              <a:buChar char="•"/>
+            </a:pPr>
+            <a:r>
+              <a:rPr lang="en-US" sz="1900" b="1" dirty="0">
+                <a:solidFill>
+                  <a:srgbClr val="1B1F3B"/>
+                </a:solidFill>
+                <a:latin typeface="Calibri" pitchFamily="34" charset="0"/>
+                <a:ea typeface="Calibri" pitchFamily="34" charset="-122"/>
+                <a:cs typeface="Calibri" pitchFamily="34" charset="-120"/>
+              </a:rPr>
+              <a:t>פי 1.7</a:t>
+            </a:r>
+            <a:pPr rtl="1" algn="r" marL="228600" indent="-228600">
+              <a:spcAft>
+                <a:spcPts val="1000"/>
+              </a:spcAft>
+              <a:buSzPct val="100000"/>
+              <a:buChar char="•"/>
             </a:pPr>
             <a:r>
               <a:rPr lang="en-US" sz="1900" dirty="0">
@@ -7940,11 +7978,12 @@
               </a:rPr>
               <a:t>Google הריצה כלי </a:t>
             </a:r>
-            <a:pPr rtl="1" algn="r" indent="0" marL="0">
+            <a:pPr rtl="1" algn="r" marL="228600" indent="-228600">
               <a:spcAft>
                 <a:spcPts val="1000"/>
               </a:spcAft>
-              <a:buNone/>
+              <a:buSzPct val="100000"/>
+              <a:buChar char="•"/>
             </a:pPr>
             <a:r>
               <a:rPr lang="en-US" sz="1900" b="1" dirty="0">
@@ -7957,11 +7996,12 @@
               </a:rPr>
               <a:t>CLI</a:t>
             </a:r>
-            <a:pPr rtl="1" algn="r" indent="0" marL="0">
+            <a:pPr rtl="1" algn="r" marL="228600" indent="-228600">
               <a:spcAft>
                 <a:spcPts val="1000"/>
               </a:spcAft>
-              <a:buNone/>
+              <a:buSzPct val="100000"/>
+              <a:buChar char="•"/>
             </a:pPr>
             <a:r>
               <a:rPr lang="en-US" sz="1900" dirty="0">
@@ -8592,77 +8632,6 @@
               </a:rPr>
               <a:t>מרץ 2026: </a:t>
             </a:r>
-            <a:pPr rtl="1" algn="r" indent="0" marL="0">
-              <a:spcAft>
-                <a:spcPts val="1000"/>
-              </a:spcAft>
-              <a:buNone/>
-            </a:pPr>
-            <a:r>
-              <a:rPr lang="en-US" sz="1900" b="1" dirty="0">
-                <a:solidFill>
-                  <a:srgbClr val="1B1F3B"/>
-                </a:solidFill>
-                <a:latin typeface="Calibri" pitchFamily="34" charset="0"/>
-                <a:ea typeface="Calibri" pitchFamily="34" charset="-122"/>
-                <a:cs typeface="Calibri" pitchFamily="34" charset="-120"/>
-              </a:rPr>
-              <a:t>GitHub</a:t>
-            </a:r>
-            <a:pPr rtl="1" algn="r" indent="0" marL="0">
-              <a:spcAft>
-                <a:spcPts val="1000"/>
-              </a:spcAft>
-              <a:buNone/>
-            </a:pPr>
-            <a:r>
-              <a:rPr lang="en-US" sz="1900" dirty="0">
-                <a:solidFill>
-                  <a:srgbClr val="1B1F3B"/>
-                </a:solidFill>
-                <a:latin typeface="Calibri" pitchFamily="34" charset="0"/>
-                <a:ea typeface="Calibri" pitchFamily="34" charset="-122"/>
-                <a:cs typeface="Calibri" pitchFamily="34" charset="-120"/>
-              </a:rPr>
-              <a:t> (הפלטפורמה המרכזית בעולם לאחסון ושיתוף קוד — נסביר עליה לעומק בשיעור הבא) שינה את מסלול הסטודנטים ל-</a:t>
-            </a:r>
-            <a:pPr rtl="1" algn="r" indent="0" marL="0">
-              <a:spcAft>
-                <a:spcPts val="1000"/>
-              </a:spcAft>
-              <a:buNone/>
-            </a:pPr>
-            <a:r>
-              <a:rPr lang="en-US" sz="1900" b="1" dirty="0">
-                <a:solidFill>
-                  <a:srgbClr val="1B1F3B"/>
-                </a:solidFill>
-                <a:latin typeface="Calibri" pitchFamily="34" charset="0"/>
-                <a:ea typeface="Calibri" pitchFamily="34" charset="-122"/>
-                <a:cs typeface="Calibri" pitchFamily="34" charset="-120"/>
-              </a:rPr>
-              <a:t>Copilot Student</a:t>
-            </a:r>
-            <a:pPr rtl="1" algn="r" indent="0" marL="0">
-              <a:spcAft>
-                <a:spcPts val="1000"/>
-              </a:spcAft>
-              <a:buNone/>
-            </a:pPr>
-            <a:r>
-              <a:rPr lang="en-US" sz="1900" dirty="0">
-                <a:solidFill>
-                  <a:srgbClr val="1B1F3B"/>
-                </a:solidFill>
-                <a:latin typeface="Calibri" pitchFamily="34" charset="0"/>
-                <a:ea typeface="Calibri" pitchFamily="34" charset="-122"/>
-                <a:cs typeface="Calibri" pitchFamily="34" charset="-120"/>
-              </a:rPr>
-              <a:t> (התוכנית שנותנת לסטודנטים גישה חינמית ל-GitHub Copilot)</a:t>
-            </a:r>
-            <a:endParaRPr lang="en-US" sz="1900" dirty="0"/>
-          </a:p>
-          <a:p>
             <a:pPr rtl="1" algn="r" marL="228600" indent="-228600">
               <a:spcAft>
                 <a:spcPts val="1000"/>
@@ -8671,19 +8640,16 @@
               <a:buChar char="•"/>
             </a:pPr>
             <a:r>
-              <a:rPr lang="en-US" sz="1900" dirty="0">
-                <a:solidFill>
-                  <a:srgbClr val="1B1F3B"/>
-                </a:solidFill>
-                <a:latin typeface="Calibri" pitchFamily="34" charset="0"/>
-                <a:ea typeface="Calibri" pitchFamily="34" charset="-122"/>
-                <a:cs typeface="Calibri" pitchFamily="34" charset="-120"/>
-              </a:rPr>
-              <a:t>הפעלות חדשות מוקפאות זמנית — בלי לוח זמנים לחידוש</a:t>
-            </a:r>
-            <a:endParaRPr lang="en-US" sz="1900" dirty="0"/>
-          </a:p>
-          <a:p>
+              <a:rPr lang="en-US" sz="1900" b="1" dirty="0">
+                <a:solidFill>
+                  <a:srgbClr val="1B1F3B"/>
+                </a:solidFill>
+                <a:latin typeface="Calibri" pitchFamily="34" charset="0"/>
+                <a:ea typeface="Calibri" pitchFamily="34" charset="-122"/>
+                <a:cs typeface="Calibri" pitchFamily="34" charset="-120"/>
+              </a:rPr>
+              <a:t>GitHub</a:t>
+            </a:r>
             <a:pPr rtl="1" algn="r" marL="228600" indent="-228600">
               <a:spcAft>
                 <a:spcPts val="1000"/>
@@ -8700,11 +8666,8 @@
                 <a:ea typeface="Calibri" pitchFamily="34" charset="-122"/>
                 <a:cs typeface="Calibri" pitchFamily="34" charset="-120"/>
               </a:rPr>
-              <a:t>גם "תנאי מסלול חינם" משתנים בלי אזהרה, לא רק כלים שלמים</a:t>
-            </a:r>
-            <a:endParaRPr lang="en-US" sz="1900" dirty="0"/>
-          </a:p>
-          <a:p>
+              <a:t> (הפלטפורמה המרכזית בעולם לאחסון ושיתוף קוד — נסביר עליה לעומק בשיעור הבא) שינה את מסלול הסטודנטים ל-</a:t>
+            </a:r>
             <a:pPr rtl="1" algn="r" marL="228600" indent="-228600">
               <a:spcAft>
                 <a:spcPts val="1000"/>
@@ -8721,13 +8684,95 @@
                 <a:ea typeface="Calibri" pitchFamily="34" charset="-122"/>
                 <a:cs typeface="Calibri" pitchFamily="34" charset="-120"/>
               </a:rPr>
-              <a:t>פעילות זוגות:</a:t>
-            </a:r>
-            <a:pPr rtl="1" algn="r" indent="0" marL="0">
+              <a:t>Copilot Student</a:t>
+            </a:r>
+            <a:pPr rtl="1" algn="r" marL="228600" indent="-228600">
               <a:spcAft>
                 <a:spcPts val="1000"/>
               </a:spcAft>
-              <a:buNone/>
+              <a:buSzPct val="100000"/>
+              <a:buChar char="•"/>
+            </a:pPr>
+            <a:r>
+              <a:rPr lang="en-US" sz="1900" dirty="0">
+                <a:solidFill>
+                  <a:srgbClr val="1B1F3B"/>
+                </a:solidFill>
+                <a:latin typeface="Calibri" pitchFamily="34" charset="0"/>
+                <a:ea typeface="Calibri" pitchFamily="34" charset="-122"/>
+                <a:cs typeface="Calibri" pitchFamily="34" charset="-120"/>
+              </a:rPr>
+              <a:t> (התוכנית שנותנת לסטודנטים גישה חינמית ל-GitHub Copilot)</a:t>
+            </a:r>
+            <a:endParaRPr lang="en-US" sz="1900" dirty="0"/>
+          </a:p>
+          <a:p>
+            <a:pPr rtl="1" algn="r" marL="228600" indent="-228600">
+              <a:spcAft>
+                <a:spcPts val="1000"/>
+              </a:spcAft>
+              <a:buSzPct val="100000"/>
+              <a:buChar char="•"/>
+            </a:pPr>
+            <a:r>
+              <a:rPr lang="en-US" sz="1900" dirty="0">
+                <a:solidFill>
+                  <a:srgbClr val="1B1F3B"/>
+                </a:solidFill>
+                <a:latin typeface="Calibri" pitchFamily="34" charset="0"/>
+                <a:ea typeface="Calibri" pitchFamily="34" charset="-122"/>
+                <a:cs typeface="Calibri" pitchFamily="34" charset="-120"/>
+              </a:rPr>
+              <a:t>הפעלות חדשות מוקפאות זמנית — בלי לוח זמנים לחידוש</a:t>
+            </a:r>
+            <a:endParaRPr lang="en-US" sz="1900" dirty="0"/>
+          </a:p>
+          <a:p>
+            <a:pPr rtl="1" algn="r" marL="228600" indent="-228600">
+              <a:spcAft>
+                <a:spcPts val="1000"/>
+              </a:spcAft>
+              <a:buSzPct val="100000"/>
+              <a:buChar char="•"/>
+            </a:pPr>
+            <a:r>
+              <a:rPr lang="en-US" sz="1900" dirty="0">
+                <a:solidFill>
+                  <a:srgbClr val="1B1F3B"/>
+                </a:solidFill>
+                <a:latin typeface="Calibri" pitchFamily="34" charset="0"/>
+                <a:ea typeface="Calibri" pitchFamily="34" charset="-122"/>
+                <a:cs typeface="Calibri" pitchFamily="34" charset="-120"/>
+              </a:rPr>
+              <a:t>גם "תנאי מסלול חינם" משתנים בלי אזהרה, לא רק כלים שלמים</a:t>
+            </a:r>
+            <a:endParaRPr lang="en-US" sz="1900" dirty="0"/>
+          </a:p>
+          <a:p>
+            <a:pPr rtl="1" algn="r" marL="228600" indent="-228600">
+              <a:spcAft>
+                <a:spcPts val="1000"/>
+              </a:spcAft>
+              <a:buSzPct val="100000"/>
+              <a:buChar char="•"/>
+            </a:pPr>
+            <a:r>
+              <a:rPr lang="en-US" sz="1900" b="1" dirty="0">
+                <a:solidFill>
+                  <a:srgbClr val="1B1F3B"/>
+                </a:solidFill>
+                <a:latin typeface="Calibri" pitchFamily="34" charset="0"/>
+                <a:ea typeface="Calibri" pitchFamily="34" charset="-122"/>
+                <a:cs typeface="Calibri" pitchFamily="34" charset="-120"/>
+              </a:rPr>
+              <a:t>פעילות זוגות:</a:t>
+            </a:r>
+            <a:pPr rtl="1" algn="r" marL="228600" indent="-228600">
+              <a:spcAft>
+                <a:spcPts val="1000"/>
+              </a:spcAft>
+              <a:buSzPct val="100000"/>
+              <a:buChar char="•"/>
             </a:pPr>
             <a:r>
               <a:rPr lang="en-US" sz="1900" dirty="0">
@@ -8994,26 +9039,6 @@
               </a:rPr>
               <a:t>Stripe</a:t>
             </a:r>
-            <a:pPr rtl="1" algn="r" indent="0" marL="0">
-              <a:spcAft>
-                <a:spcPts val="1000"/>
-              </a:spcAft>
-              <a:buNone/>
-            </a:pPr>
-            <a:r>
-              <a:rPr lang="en-US" sz="1900" dirty="0">
-                <a:solidFill>
-                  <a:srgbClr val="1B1F3B"/>
-                </a:solidFill>
-                <a:latin typeface="Calibri" pitchFamily="34" charset="0"/>
-                <a:ea typeface="Calibri" pitchFamily="34" charset="-122"/>
-                <a:cs typeface="Calibri" pitchFamily="34" charset="-120"/>
-              </a:rPr>
-              <a:t> (חברת התשלומים הדיגיטליים שראינו קודם): מערכת "Minions" — 1,000+ PR ממוזגים בשבוע</a:t>
-            </a:r>
-            <a:endParaRPr lang="en-US" sz="1900" dirty="0"/>
-          </a:p>
-          <a:p>
             <a:pPr rtl="1" algn="r" marL="228600" indent="-228600">
               <a:spcAft>
                 <a:spcPts val="1000"/>
@@ -9022,23 +9047,6 @@
               <a:buChar char="•"/>
             </a:pPr>
             <a:r>
-              <a:rPr lang="en-US" sz="1900" b="1" dirty="0">
-                <a:solidFill>
-                  <a:srgbClr val="1B1F3B"/>
-                </a:solidFill>
-                <a:latin typeface="Calibri" pitchFamily="34" charset="0"/>
-                <a:ea typeface="Calibri" pitchFamily="34" charset="-122"/>
-                <a:cs typeface="Calibri" pitchFamily="34" charset="-120"/>
-              </a:rPr>
-              <a:t>TELUS</a:t>
-            </a:r>
-            <a:pPr rtl="1" algn="r" indent="0" marL="0">
-              <a:spcAft>
-                <a:spcPts val="1000"/>
-              </a:spcAft>
-              <a:buNone/>
-            </a:pPr>
-            <a:r>
               <a:rPr lang="en-US" sz="1900" dirty="0">
                 <a:solidFill>
                   <a:srgbClr val="1B1F3B"/>
@@ -9047,7 +9055,7 @@
                 <a:ea typeface="Calibri" pitchFamily="34" charset="-122"/>
                 <a:cs typeface="Calibri" pitchFamily="34" charset="-120"/>
               </a:rPr>
-              <a:t> (חברת תקשורת קנדית גדולה): 500,000+ שעות נחסכו, 13,000 פתרונות AI</a:t>
+              <a:t> (חברת התשלומים הדיגיטליים שראינו קודם): מערכת "Minions" — 1,000+ PR ממוזגים בשבוע</a:t>
             </a:r>
             <a:endParaRPr lang="en-US" sz="1900" dirty="0"/>
           </a:p>
@@ -9068,13 +9076,53 @@
                 <a:ea typeface="Calibri" pitchFamily="34" charset="-122"/>
                 <a:cs typeface="Calibri" pitchFamily="34" charset="-120"/>
               </a:rPr>
-              <a:t>Zapier</a:t>
-            </a:r>
-            <a:pPr rtl="1" algn="r" indent="0" marL="0">
+              <a:t>TELUS</a:t>
+            </a:r>
+            <a:pPr rtl="1" algn="r" marL="228600" indent="-228600">
               <a:spcAft>
                 <a:spcPts val="1000"/>
               </a:spcAft>
-              <a:buNone/>
+              <a:buSzPct val="100000"/>
+              <a:buChar char="•"/>
+            </a:pPr>
+            <a:r>
+              <a:rPr lang="en-US" sz="1900" dirty="0">
+                <a:solidFill>
+                  <a:srgbClr val="1B1F3B"/>
+                </a:solidFill>
+                <a:latin typeface="Calibri" pitchFamily="34" charset="0"/>
+                <a:ea typeface="Calibri" pitchFamily="34" charset="-122"/>
+                <a:cs typeface="Calibri" pitchFamily="34" charset="-120"/>
+              </a:rPr>
+              <a:t> (חברת תקשורת קנדית גדולה): 500,000+ שעות נחסכו, 13,000 פתרונות AI</a:t>
+            </a:r>
+            <a:endParaRPr lang="en-US" sz="1900" dirty="0"/>
+          </a:p>
+          <a:p>
+            <a:pPr rtl="1" algn="r" marL="228600" indent="-228600">
+              <a:spcAft>
+                <a:spcPts val="1000"/>
+              </a:spcAft>
+              <a:buSzPct val="100000"/>
+              <a:buChar char="•"/>
+            </a:pPr>
+            <a:r>
+              <a:rPr lang="en-US" sz="1900" b="1" dirty="0">
+                <a:solidFill>
+                  <a:srgbClr val="1B1F3B"/>
+                </a:solidFill>
+                <a:latin typeface="Calibri" pitchFamily="34" charset="0"/>
+                <a:ea typeface="Calibri" pitchFamily="34" charset="-122"/>
+                <a:cs typeface="Calibri" pitchFamily="34" charset="-120"/>
+              </a:rPr>
+              <a:t>Zapier</a:t>
+            </a:r>
+            <a:pPr rtl="1" algn="r" marL="228600" indent="-228600">
+              <a:spcAft>
+                <a:spcPts val="1000"/>
+              </a:spcAft>
+              <a:buSzPct val="100000"/>
+              <a:buChar char="•"/>
             </a:pPr>
             <a:r>
               <a:rPr lang="en-US" sz="1900" dirty="0">
@@ -9706,26 +9754,6 @@
               </a:rPr>
               <a:t>LLM (Large Language Model)</a:t>
             </a:r>
-            <a:pPr rtl="1" algn="r" indent="0" marL="0">
-              <a:spcAft>
-                <a:spcPts val="1000"/>
-              </a:spcAft>
-              <a:buNone/>
-            </a:pPr>
-            <a:r>
-              <a:rPr lang="en-US" sz="1900" dirty="0">
-                <a:solidFill>
-                  <a:srgbClr val="1B1F3B"/>
-                </a:solidFill>
-                <a:latin typeface="Calibri" pitchFamily="34" charset="0"/>
-                <a:ea typeface="Calibri" pitchFamily="34" charset="-122"/>
-                <a:cs typeface="Calibri" pitchFamily="34" charset="-120"/>
-              </a:rPr>
-              <a:t> = תוכנה שאומנה (למדה מדוגמאות) על כמויות עצומות של טקסט וקוד</a:t>
-            </a:r>
-            <a:endParaRPr lang="en-US" sz="1900" dirty="0"/>
-          </a:p>
-          <a:p>
             <a:pPr rtl="1" algn="r" marL="228600" indent="-228600">
               <a:spcAft>
                 <a:spcPts val="1000"/>
@@ -9742,41 +9770,7 @@
                 <a:ea typeface="Calibri" pitchFamily="34" charset="-122"/>
                 <a:cs typeface="Calibri" pitchFamily="34" charset="-120"/>
               </a:rPr>
-              <a:t>כותבים בקשה בשפה טבעית (למשל: "תכתוב לי פונקציה שממיינת רשימה") — הטקסט הזה נקרא </a:t>
-            </a:r>
-            <a:pPr rtl="1" algn="r" indent="0" marL="0">
-              <a:spcAft>
-                <a:spcPts val="1000"/>
-              </a:spcAft>
-              <a:buNone/>
-            </a:pPr>
-            <a:r>
-              <a:rPr lang="en-US" sz="1900" b="1" dirty="0">
-                <a:solidFill>
-                  <a:srgbClr val="1B1F3B"/>
-                </a:solidFill>
-                <a:latin typeface="Calibri" pitchFamily="34" charset="0"/>
-                <a:ea typeface="Calibri" pitchFamily="34" charset="-122"/>
-                <a:cs typeface="Calibri" pitchFamily="34" charset="-120"/>
-              </a:rPr>
-              <a:t>Prompt</a:t>
-            </a:r>
-            <a:pPr rtl="1" algn="r" indent="0" marL="0">
-              <a:spcAft>
-                <a:spcPts val="1000"/>
-              </a:spcAft>
-              <a:buNone/>
-            </a:pPr>
-            <a:r>
-              <a:rPr lang="en-US" sz="1900" dirty="0">
-                <a:solidFill>
-                  <a:srgbClr val="1B1F3B"/>
-                </a:solidFill>
-                <a:latin typeface="Calibri" pitchFamily="34" charset="0"/>
-                <a:ea typeface="Calibri" pitchFamily="34" charset="-122"/>
-                <a:cs typeface="Calibri" pitchFamily="34" charset="-120"/>
-              </a:rPr>
-              <a:t> (פרומפט)</a:t>
+              <a:t> = תוכנה שאומנה (למדה מדוגמאות) על כמויות עצומות של טקסט וקוד</a:t>
             </a:r>
             <a:endParaRPr lang="en-US" sz="1900" dirty="0"/>
           </a:p>
@@ -9797,13 +9791,14 @@
                 <a:ea typeface="Calibri" pitchFamily="34" charset="-122"/>
                 <a:cs typeface="Calibri" pitchFamily="34" charset="-120"/>
               </a:rPr>
-              <a:t>המודל לא "מבין" את הפרומפט כמו בן אדם — מנבא </a:t>
-            </a:r>
-            <a:pPr rtl="1" algn="r" indent="0" marL="0">
+              <a:t>כותבים בקשה בשפה טבעית (למשל: "תכתוב לי פונקציה שממיינת רשימה") — הטקסט הזה נקרא </a:t>
+            </a:r>
+            <a:pPr rtl="1" algn="r" marL="228600" indent="-228600">
               <a:spcAft>
                 <a:spcPts val="1000"/>
               </a:spcAft>
-              <a:buNone/>
+              <a:buSzPct val="100000"/>
+              <a:buChar char="•"/>
             </a:pPr>
             <a:r>
               <a:rPr lang="en-US" sz="1900" b="1" dirty="0">
@@ -9814,13 +9809,71 @@
                 <a:ea typeface="Calibri" pitchFamily="34" charset="-122"/>
                 <a:cs typeface="Calibri" pitchFamily="34" charset="-120"/>
               </a:rPr>
-              <a:t>Token</a:t>
-            </a:r>
-            <a:pPr rtl="1" algn="r" indent="0" marL="0">
+              <a:t>Prompt</a:t>
+            </a:r>
+            <a:pPr rtl="1" algn="r" marL="228600" indent="-228600">
               <a:spcAft>
                 <a:spcPts val="1000"/>
               </a:spcAft>
-              <a:buNone/>
+              <a:buSzPct val="100000"/>
+              <a:buChar char="•"/>
+            </a:pPr>
+            <a:r>
+              <a:rPr lang="en-US" sz="1900" dirty="0">
+                <a:solidFill>
+                  <a:srgbClr val="1B1F3B"/>
+                </a:solidFill>
+                <a:latin typeface="Calibri" pitchFamily="34" charset="0"/>
+                <a:ea typeface="Calibri" pitchFamily="34" charset="-122"/>
+                <a:cs typeface="Calibri" pitchFamily="34" charset="-120"/>
+              </a:rPr>
+              <a:t> (פרומפט)</a:t>
+            </a:r>
+            <a:endParaRPr lang="en-US" sz="1900" dirty="0"/>
+          </a:p>
+          <a:p>
+            <a:pPr rtl="1" algn="r" marL="228600" indent="-228600">
+              <a:spcAft>
+                <a:spcPts val="1000"/>
+              </a:spcAft>
+              <a:buSzPct val="100000"/>
+              <a:buChar char="•"/>
+            </a:pPr>
+            <a:r>
+              <a:rPr lang="en-US" sz="1900" dirty="0">
+                <a:solidFill>
+                  <a:srgbClr val="1B1F3B"/>
+                </a:solidFill>
+                <a:latin typeface="Calibri" pitchFamily="34" charset="0"/>
+                <a:ea typeface="Calibri" pitchFamily="34" charset="-122"/>
+                <a:cs typeface="Calibri" pitchFamily="34" charset="-120"/>
+              </a:rPr>
+              <a:t>המודל לא "מבין" את הפרומפט כמו בן אדם — מנבא </a:t>
+            </a:r>
+            <a:pPr rtl="1" algn="r" marL="228600" indent="-228600">
+              <a:spcAft>
+                <a:spcPts val="1000"/>
+              </a:spcAft>
+              <a:buSzPct val="100000"/>
+              <a:buChar char="•"/>
+            </a:pPr>
+            <a:r>
+              <a:rPr lang="en-US" sz="1900" b="1" dirty="0">
+                <a:solidFill>
+                  <a:srgbClr val="1B1F3B"/>
+                </a:solidFill>
+                <a:latin typeface="Calibri" pitchFamily="34" charset="0"/>
+                <a:ea typeface="Calibri" pitchFamily="34" charset="-122"/>
+                <a:cs typeface="Calibri" pitchFamily="34" charset="-120"/>
+              </a:rPr>
+              <a:t>Token</a:t>
+            </a:r>
+            <a:pPr rtl="1" algn="r" marL="228600" indent="-228600">
+              <a:spcAft>
+                <a:spcPts val="1000"/>
+              </a:spcAft>
+              <a:buSzPct val="100000"/>
+              <a:buChar char="•"/>
             </a:pPr>
             <a:r>
               <a:rPr lang="en-US" sz="1900" dirty="0">
@@ -11254,43 +11307,6 @@
               </a:rPr>
               <a:t>המשימה: </a:t>
             </a:r>
-            <a:pPr rtl="1" algn="r" indent="0" marL="0">
-              <a:spcAft>
-                <a:spcPts val="1000"/>
-              </a:spcAft>
-              <a:buNone/>
-            </a:pPr>
-            <a:r>
-              <a:rPr lang="en-US" sz="1900" b="1" dirty="0">
-                <a:solidFill>
-                  <a:srgbClr val="1B1F3B"/>
-                </a:solidFill>
-                <a:latin typeface="Calibri" pitchFamily="34" charset="0"/>
-                <a:ea typeface="Calibri" pitchFamily="34" charset="-122"/>
-                <a:cs typeface="Calibri" pitchFamily="34" charset="-120"/>
-              </a:rPr>
-              <a:t>Todo App</a:t>
-            </a:r>
-            <a:pPr rtl="1" algn="r" indent="0" marL="0">
-              <a:spcAft>
-                <a:spcPts val="1000"/>
-              </a:spcAft>
-              <a:buNone/>
-            </a:pPr>
-            <a:r>
-              <a:rPr lang="en-US" sz="1900" dirty="0">
-                <a:solidFill>
-                  <a:srgbClr val="1B1F3B"/>
-                </a:solidFill>
-                <a:latin typeface="Calibri" pitchFamily="34" charset="0"/>
-                <a:ea typeface="Calibri" pitchFamily="34" charset="-122"/>
-                <a:cs typeface="Calibri" pitchFamily="34" charset="-120"/>
-              </a:rPr>
-              <a:t> באמצעות כלי AI (Claude Code / Cursor / GitHub Copilot — לפי מה שמותקן) שתומך ב: הוספת משימה, סימון כהושלמה, מחיקה, והצגת הרשימה</a:t>
-            </a:r>
-            <a:endParaRPr lang="en-US" sz="1900" dirty="0"/>
-          </a:p>
-          <a:p>
             <a:pPr rtl="1" algn="r" marL="228600" indent="-228600">
               <a:spcAft>
                 <a:spcPts val="1000"/>
@@ -11299,38 +11315,79 @@
               <a:buChar char="•"/>
             </a:pPr>
             <a:r>
-              <a:rPr lang="en-US" sz="1900" dirty="0">
-                <a:solidFill>
-                  <a:srgbClr val="1B1F3B"/>
-                </a:solidFill>
-                <a:latin typeface="Calibri" pitchFamily="34" charset="0"/>
-                <a:ea typeface="Calibri" pitchFamily="34" charset="-122"/>
-                <a:cs typeface="Calibri" pitchFamily="34" charset="-120"/>
-              </a:rPr>
-              <a:t>בלי </a:t>
-            </a:r>
-            <a:pPr rtl="1" algn="r" indent="0" marL="0">
+              <a:rPr lang="en-US" sz="1900" b="1" dirty="0">
+                <a:solidFill>
+                  <a:srgbClr val="1B1F3B"/>
+                </a:solidFill>
+                <a:latin typeface="Calibri" pitchFamily="34" charset="0"/>
+                <a:ea typeface="Calibri" pitchFamily="34" charset="-122"/>
+                <a:cs typeface="Calibri" pitchFamily="34" charset="-120"/>
+              </a:rPr>
+              <a:t>Todo App</a:t>
+            </a:r>
+            <a:pPr rtl="1" algn="r" marL="228600" indent="-228600">
               <a:spcAft>
                 <a:spcPts val="1000"/>
               </a:spcAft>
-              <a:buNone/>
-            </a:pPr>
-            <a:r>
-              <a:rPr lang="en-US" sz="1900" b="1" dirty="0">
-                <a:solidFill>
-                  <a:srgbClr val="1B1F3B"/>
-                </a:solidFill>
-                <a:latin typeface="Calibri" pitchFamily="34" charset="0"/>
-                <a:ea typeface="Calibri" pitchFamily="34" charset="-122"/>
-                <a:cs typeface="Calibri" pitchFamily="34" charset="-120"/>
-              </a:rPr>
-              <a:t>Backend</a:t>
-            </a:r>
-            <a:pPr rtl="1" algn="r" indent="0" marL="0">
+              <a:buSzPct val="100000"/>
+              <a:buChar char="•"/>
+            </a:pPr>
+            <a:r>
+              <a:rPr lang="en-US" sz="1900" dirty="0">
+                <a:solidFill>
+                  <a:srgbClr val="1B1F3B"/>
+                </a:solidFill>
+                <a:latin typeface="Calibri" pitchFamily="34" charset="0"/>
+                <a:ea typeface="Calibri" pitchFamily="34" charset="-122"/>
+                <a:cs typeface="Calibri" pitchFamily="34" charset="-120"/>
+              </a:rPr>
+              <a:t> באמצעות כלי AI (Claude Code / Cursor / GitHub Copilot — לפי מה שמותקן) שתומך ב: הוספת משימה, סימון כהושלמה, מחיקה, והצגת הרשימה</a:t>
+            </a:r>
+            <a:endParaRPr lang="en-US" sz="1900" dirty="0"/>
+          </a:p>
+          <a:p>
+            <a:pPr rtl="1" algn="r" marL="228600" indent="-228600">
               <a:spcAft>
                 <a:spcPts val="1000"/>
               </a:spcAft>
-              <a:buNone/>
+              <a:buSzPct val="100000"/>
+              <a:buChar char="•"/>
+            </a:pPr>
+            <a:r>
+              <a:rPr lang="en-US" sz="1900" dirty="0">
+                <a:solidFill>
+                  <a:srgbClr val="1B1F3B"/>
+                </a:solidFill>
+                <a:latin typeface="Calibri" pitchFamily="34" charset="0"/>
+                <a:ea typeface="Calibri" pitchFamily="34" charset="-122"/>
+                <a:cs typeface="Calibri" pitchFamily="34" charset="-120"/>
+              </a:rPr>
+              <a:t>בלי </a:t>
+            </a:r>
+            <a:pPr rtl="1" algn="r" marL="228600" indent="-228600">
+              <a:spcAft>
+                <a:spcPts val="1000"/>
+              </a:spcAft>
+              <a:buSzPct val="100000"/>
+              <a:buChar char="•"/>
+            </a:pPr>
+            <a:r>
+              <a:rPr lang="en-US" sz="1900" b="1" dirty="0">
+                <a:solidFill>
+                  <a:srgbClr val="1B1F3B"/>
+                </a:solidFill>
+                <a:latin typeface="Calibri" pitchFamily="34" charset="0"/>
+                <a:ea typeface="Calibri" pitchFamily="34" charset="-122"/>
+                <a:cs typeface="Calibri" pitchFamily="34" charset="-120"/>
+              </a:rPr>
+              <a:t>Backend</a:t>
+            </a:r>
+            <a:pPr rtl="1" algn="r" marL="228600" indent="-228600">
+              <a:spcAft>
+                <a:spcPts val="1000"/>
+              </a:spcAft>
+              <a:buSzPct val="100000"/>
+              <a:buChar char="•"/>
             </a:pPr>
             <a:r>
               <a:rPr lang="en-US" sz="1900" dirty="0">
@@ -12900,11 +12957,12 @@
               </a:rPr>
               <a:t>לא</a:t>
             </a:r>
-            <a:pPr rtl="1" algn="r" indent="0" marL="0">
+            <a:pPr rtl="1" algn="r" marL="228600" indent="-228600">
               <a:spcAft>
                 <a:spcPts val="1000"/>
               </a:spcAft>
-              <a:buNone/>
+              <a:buSzPct val="100000"/>
+              <a:buChar char="•"/>
             </a:pPr>
             <a:r>
               <a:rPr lang="en-US" sz="1900" dirty="0">
@@ -12917,11 +12975,12 @@
               </a:rPr>
               <a:t> = "מקלידים פרומפט ומקווים לטוב" · </a:t>
             </a:r>
-            <a:pPr rtl="1" algn="r" indent="0" marL="0">
+            <a:pPr rtl="1" algn="r" marL="228600" indent="-228600">
               <a:spcAft>
                 <a:spcPts val="1000"/>
               </a:spcAft>
-              <a:buNone/>
+              <a:buSzPct val="100000"/>
+              <a:buChar char="•"/>
             </a:pPr>
             <a:r>
               <a:rPr lang="en-US" sz="1900" b="1" dirty="0">
@@ -12934,11 +12993,12 @@
               </a:rPr>
               <a:t>כן</a:t>
             </a:r>
-            <a:pPr rtl="1" algn="r" indent="0" marL="0">
+            <a:pPr rtl="1" algn="r" marL="228600" indent="-228600">
               <a:spcAft>
                 <a:spcPts val="1000"/>
               </a:spcAft>
-              <a:buNone/>
+              <a:buSzPct val="100000"/>
+              <a:buChar char="•"/>
             </a:pPr>
             <a:r>
               <a:rPr lang="en-US" sz="1900" dirty="0">
@@ -13529,26 +13589,6 @@
               </a:rPr>
               <a:t>AI-Native (הגישה של הקורס):</a:t>
             </a:r>
-            <a:pPr rtl="1" algn="r" indent="0" marL="0">
-              <a:spcAft>
-                <a:spcPts val="1000"/>
-              </a:spcAft>
-              <a:buNone/>
-            </a:pPr>
-            <a:r>
-              <a:rPr lang="en-US" sz="1900" dirty="0">
-                <a:solidFill>
-                  <a:srgbClr val="1B1F3B"/>
-                </a:solidFill>
-                <a:latin typeface="Calibri" pitchFamily="34" charset="0"/>
-                <a:ea typeface="Calibri" pitchFamily="34" charset="-122"/>
-                <a:cs typeface="Calibri" pitchFamily="34" charset="-120"/>
-              </a:rPr>
-              <a:t> AI כשותף עבודה מרכזי, מעורב מהבנת הדרישה ועד פריסה בענן</a:t>
-            </a:r>
-            <a:endParaRPr lang="en-US" sz="1900" dirty="0"/>
-          </a:p>
-          <a:p>
             <a:pPr rtl="1" algn="r" marL="228600" indent="-228600">
               <a:spcAft>
                 <a:spcPts val="1000"/>
@@ -13557,21 +13597,43 @@
               <a:buChar char="•"/>
             </a:pPr>
             <a:r>
-              <a:rPr lang="en-US" sz="1900" b="1" dirty="0">
-                <a:solidFill>
-                  <a:srgbClr val="1B1F3B"/>
-                </a:solidFill>
-                <a:latin typeface="Calibri" pitchFamily="34" charset="0"/>
-                <a:ea typeface="Calibri" pitchFamily="34" charset="-122"/>
-                <a:cs typeface="Calibri" pitchFamily="34" charset="-120"/>
-              </a:rPr>
-              <a:t>הגישה הישנה:</a:t>
-            </a:r>
-            <a:pPr rtl="1" algn="r" indent="0" marL="0">
+              <a:rPr lang="en-US" sz="1900" dirty="0">
+                <a:solidFill>
+                  <a:srgbClr val="1B1F3B"/>
+                </a:solidFill>
+                <a:latin typeface="Calibri" pitchFamily="34" charset="0"/>
+                <a:ea typeface="Calibri" pitchFamily="34" charset="-122"/>
+                <a:cs typeface="Calibri" pitchFamily="34" charset="-120"/>
+              </a:rPr>
+              <a:t> AI כשותף עבודה מרכזי, מעורב מהבנת הדרישה ועד פריסה בענן</a:t>
+            </a:r>
+            <a:endParaRPr lang="en-US" sz="1900" dirty="0"/>
+          </a:p>
+          <a:p>
+            <a:pPr rtl="1" algn="r" marL="228600" indent="-228600">
               <a:spcAft>
                 <a:spcPts val="1000"/>
               </a:spcAft>
-              <a:buNone/>
+              <a:buSzPct val="100000"/>
+              <a:buChar char="•"/>
+            </a:pPr>
+            <a:r>
+              <a:rPr lang="en-US" sz="1900" b="1" dirty="0">
+                <a:solidFill>
+                  <a:srgbClr val="1B1F3B"/>
+                </a:solidFill>
+                <a:latin typeface="Calibri" pitchFamily="34" charset="0"/>
+                <a:ea typeface="Calibri" pitchFamily="34" charset="-122"/>
+                <a:cs typeface="Calibri" pitchFamily="34" charset="-120"/>
+              </a:rPr>
+              <a:t>הגישה הישנה:</a:t>
+            </a:r>
+            <a:pPr rtl="1" algn="r" marL="228600" indent="-228600">
+              <a:spcAft>
+                <a:spcPts val="1000"/>
+              </a:spcAft>
+              <a:buSzPct val="100000"/>
+              <a:buChar char="•"/>
             </a:pPr>
             <a:r>
               <a:rPr lang="en-US" sz="1900" dirty="0">
@@ -14907,26 +14969,6 @@
               </a:rPr>
               <a:t>92.6%</a:t>
             </a:r>
-            <a:pPr rtl="1" algn="r" indent="0" marL="0">
-              <a:spcAft>
-                <a:spcPts val="1000"/>
-              </a:spcAft>
-              <a:buNone/>
-            </a:pPr>
-            <a:r>
-              <a:rPr lang="en-US" sz="1900" dirty="0">
-                <a:solidFill>
-                  <a:srgbClr val="1B1F3B"/>
-                </a:solidFill>
-                <a:latin typeface="Calibri" pitchFamily="34" charset="0"/>
-                <a:ea typeface="Calibri" pitchFamily="34" charset="-122"/>
-                <a:cs typeface="Calibri" pitchFamily="34" charset="-120"/>
-              </a:rPr>
-              <a:t> מהמפתחים משתמשים בכלי AI לפחות פעם בחודש</a:t>
-            </a:r>
-            <a:endParaRPr lang="en-US" sz="1900" dirty="0"/>
-          </a:p>
-          <a:p>
             <a:pPr rtl="1" algn="r" marL="228600" indent="-228600">
               <a:spcAft>
                 <a:spcPts val="1000"/>
@@ -14935,23 +14977,6 @@
               <a:buChar char="•"/>
             </a:pPr>
             <a:r>
-              <a:rPr lang="en-US" sz="1900" b="1" dirty="0">
-                <a:solidFill>
-                  <a:srgbClr val="1B1F3B"/>
-                </a:solidFill>
-                <a:latin typeface="Calibri" pitchFamily="34" charset="0"/>
-                <a:ea typeface="Calibri" pitchFamily="34" charset="-122"/>
-                <a:cs typeface="Calibri" pitchFamily="34" charset="-120"/>
-              </a:rPr>
-              <a:t>26.9%</a:t>
-            </a:r>
-            <a:pPr rtl="1" algn="r" indent="0" marL="0">
-              <a:spcAft>
-                <a:spcPts val="1000"/>
-              </a:spcAft>
-              <a:buNone/>
-            </a:pPr>
-            <a:r>
               <a:rPr lang="en-US" sz="1900" dirty="0">
                 <a:solidFill>
                   <a:srgbClr val="1B1F3B"/>
@@ -14960,7 +14985,7 @@
                 <a:ea typeface="Calibri" pitchFamily="34" charset="-122"/>
                 <a:cs typeface="Calibri" pitchFamily="34" charset="-120"/>
               </a:rPr>
-              <a:t> מקוד הפרודקשן בתעשייה נכתב היום על ידי AI</a:t>
+              <a:t> מהמפתחים משתמשים בכלי AI לפחות פעם בחודש</a:t>
             </a:r>
             <a:endParaRPr lang="en-US" sz="1900" dirty="0"/>
           </a:p>
@@ -14981,96 +15006,8 @@
                 <a:ea typeface="Calibri" pitchFamily="34" charset="-122"/>
                 <a:cs typeface="Calibri" pitchFamily="34" charset="-120"/>
               </a:rPr>
-              <a:t>1,000+</a:t>
-            </a:r>
-            <a:pPr rtl="1" algn="r" indent="0" marL="0">
-              <a:spcAft>
-                <a:spcPts val="1000"/>
-              </a:spcAft>
-              <a:buNone/>
-            </a:pPr>
-            <a:r>
-              <a:rPr lang="en-US" sz="1900" dirty="0">
-                <a:solidFill>
-                  <a:srgbClr val="1B1F3B"/>
-                </a:solidFill>
-                <a:latin typeface="Calibri" pitchFamily="34" charset="0"/>
-                <a:ea typeface="Calibri" pitchFamily="34" charset="-122"/>
-                <a:cs typeface="Calibri" pitchFamily="34" charset="-120"/>
-              </a:rPr>
-              <a:t> בקשות שילוב קוד (Pull Requests, מכונות בקיצור </a:t>
-            </a:r>
-            <a:pPr rtl="1" algn="r" indent="0" marL="0">
-              <a:spcAft>
-                <a:spcPts val="1000"/>
-              </a:spcAft>
-              <a:buNone/>
-            </a:pPr>
-            <a:r>
-              <a:rPr lang="en-US" sz="1900" b="1" dirty="0">
-                <a:solidFill>
-                  <a:srgbClr val="1B1F3B"/>
-                </a:solidFill>
-                <a:latin typeface="Calibri" pitchFamily="34" charset="0"/>
-                <a:ea typeface="Calibri" pitchFamily="34" charset="-122"/>
-                <a:cs typeface="Calibri" pitchFamily="34" charset="-120"/>
-              </a:rPr>
-              <a:t>PR</a:t>
-            </a:r>
-            <a:pPr rtl="1" algn="r" indent="0" marL="0">
-              <a:spcAft>
-                <a:spcPts val="1000"/>
-              </a:spcAft>
-              <a:buNone/>
-            </a:pPr>
-            <a:r>
-              <a:rPr lang="en-US" sz="1900" dirty="0">
-                <a:solidFill>
-                  <a:srgbClr val="1B1F3B"/>
-                </a:solidFill>
-                <a:latin typeface="Calibri" pitchFamily="34" charset="0"/>
-                <a:ea typeface="Calibri" pitchFamily="34" charset="-122"/>
-                <a:cs typeface="Calibri" pitchFamily="34" charset="-120"/>
-              </a:rPr>
-              <a:t>) בשבוע — דרך "Minions", מערכת AI פנימית שבנתה </a:t>
-            </a:r>
-            <a:pPr rtl="1" algn="r" indent="0" marL="0">
-              <a:spcAft>
-                <a:spcPts val="1000"/>
-              </a:spcAft>
-              <a:buNone/>
-            </a:pPr>
-            <a:r>
-              <a:rPr lang="en-US" sz="1900" b="1" dirty="0">
-                <a:solidFill>
-                  <a:srgbClr val="1B1F3B"/>
-                </a:solidFill>
-                <a:latin typeface="Calibri" pitchFamily="34" charset="0"/>
-                <a:ea typeface="Calibri" pitchFamily="34" charset="-122"/>
-                <a:cs typeface="Calibri" pitchFamily="34" charset="-120"/>
-              </a:rPr>
-              <a:t>Stripe</a:t>
-            </a:r>
-            <a:pPr rtl="1" algn="r" indent="0" marL="0">
-              <a:spcAft>
-                <a:spcPts val="1000"/>
-              </a:spcAft>
-              <a:buNone/>
-            </a:pPr>
-            <a:r>
-              <a:rPr lang="en-US" sz="1900" dirty="0">
-                <a:solidFill>
-                  <a:srgbClr val="1B1F3B"/>
-                </a:solidFill>
-                <a:latin typeface="Calibri" pitchFamily="34" charset="0"/>
-                <a:ea typeface="Calibri" pitchFamily="34" charset="-122"/>
-                <a:cs typeface="Calibri" pitchFamily="34" charset="-120"/>
-              </a:rPr>
-              <a:t> (חברת תשלומים דיגיטליים עולמית) כדי לבצע חלק ניכר מעבודת הפיתוח שלה אוטומטית</a:t>
-            </a:r>
-            <a:endParaRPr lang="en-US" sz="1900" dirty="0"/>
-          </a:p>
-          <a:p>
+              <a:t>26.9%</a:t>
+            </a:r>
             <a:pPr rtl="1" algn="r" marL="228600" indent="-228600">
               <a:spcAft>
                 <a:spcPts val="1000"/>
@@ -15079,55 +15016,190 @@
               <a:buChar char="•"/>
             </a:pPr>
             <a:r>
-              <a:rPr lang="en-US" sz="1900" b="1" dirty="0">
-                <a:solidFill>
-                  <a:srgbClr val="1B1F3B"/>
-                </a:solidFill>
-                <a:latin typeface="Calibri" pitchFamily="34" charset="0"/>
-                <a:ea typeface="Calibri" pitchFamily="34" charset="-122"/>
-                <a:cs typeface="Calibri" pitchFamily="34" charset="-120"/>
-              </a:rPr>
-              <a:t>40%</a:t>
-            </a:r>
-            <a:pPr rtl="1" algn="r" indent="0" marL="0">
+              <a:rPr lang="en-US" sz="1900" dirty="0">
+                <a:solidFill>
+                  <a:srgbClr val="1B1F3B"/>
+                </a:solidFill>
+                <a:latin typeface="Calibri" pitchFamily="34" charset="0"/>
+                <a:ea typeface="Calibri" pitchFamily="34" charset="-122"/>
+                <a:cs typeface="Calibri" pitchFamily="34" charset="-120"/>
+              </a:rPr>
+              <a:t> מקוד הפרודקשן בתעשייה נכתב היום על ידי AI</a:t>
+            </a:r>
+            <a:endParaRPr lang="en-US" sz="1900" dirty="0"/>
+          </a:p>
+          <a:p>
+            <a:pPr rtl="1" algn="r" marL="228600" indent="-228600">
               <a:spcAft>
                 <a:spcPts val="1000"/>
               </a:spcAft>
-              <a:buNone/>
-            </a:pPr>
-            <a:r>
-              <a:rPr lang="en-US" sz="1900" dirty="0">
-                <a:solidFill>
-                  <a:srgbClr val="1B1F3B"/>
-                </a:solidFill>
-                <a:latin typeface="Calibri" pitchFamily="34" charset="0"/>
-                <a:ea typeface="Calibri" pitchFamily="34" charset="-122"/>
-                <a:cs typeface="Calibri" pitchFamily="34" charset="-120"/>
-              </a:rPr>
-              <a:t> מהאפליקציות הארגוניות — סוכני AI אוטונומיים עד סוף 2026 (מ-5% ב-2025, לפי </a:t>
-            </a:r>
-            <a:pPr rtl="1" algn="r" indent="0" marL="0">
+              <a:buSzPct val="100000"/>
+              <a:buChar char="•"/>
+            </a:pPr>
+            <a:r>
+              <a:rPr lang="en-US" sz="1900" b="1" dirty="0">
+                <a:solidFill>
+                  <a:srgbClr val="1B1F3B"/>
+                </a:solidFill>
+                <a:latin typeface="Calibri" pitchFamily="34" charset="0"/>
+                <a:ea typeface="Calibri" pitchFamily="34" charset="-122"/>
+                <a:cs typeface="Calibri" pitchFamily="34" charset="-120"/>
+              </a:rPr>
+              <a:t>1,000+</a:t>
+            </a:r>
+            <a:pPr rtl="1" algn="r" marL="228600" indent="-228600">
               <a:spcAft>
                 <a:spcPts val="1000"/>
               </a:spcAft>
-              <a:buNone/>
-            </a:pPr>
-            <a:r>
-              <a:rPr lang="en-US" sz="1900" b="1" dirty="0">
-                <a:solidFill>
-                  <a:srgbClr val="1B1F3B"/>
-                </a:solidFill>
-                <a:latin typeface="Calibri" pitchFamily="34" charset="0"/>
-                <a:ea typeface="Calibri" pitchFamily="34" charset="-122"/>
-                <a:cs typeface="Calibri" pitchFamily="34" charset="-120"/>
-              </a:rPr>
-              <a:t>Deloitte</a:t>
-            </a:r>
-            <a:pPr rtl="1" algn="r" indent="0" marL="0">
+              <a:buSzPct val="100000"/>
+              <a:buChar char="•"/>
+            </a:pPr>
+            <a:r>
+              <a:rPr lang="en-US" sz="1900" dirty="0">
+                <a:solidFill>
+                  <a:srgbClr val="1B1F3B"/>
+                </a:solidFill>
+                <a:latin typeface="Calibri" pitchFamily="34" charset="0"/>
+                <a:ea typeface="Calibri" pitchFamily="34" charset="-122"/>
+                <a:cs typeface="Calibri" pitchFamily="34" charset="-120"/>
+              </a:rPr>
+              <a:t> בקשות שילוב קוד (Pull Requests, מכונות בקיצור </a:t>
+            </a:r>
+            <a:pPr rtl="1" algn="r" marL="228600" indent="-228600">
               <a:spcAft>
                 <a:spcPts val="1000"/>
               </a:spcAft>
-              <a:buNone/>
+              <a:buSzPct val="100000"/>
+              <a:buChar char="•"/>
+            </a:pPr>
+            <a:r>
+              <a:rPr lang="en-US" sz="1900" b="1" dirty="0">
+                <a:solidFill>
+                  <a:srgbClr val="1B1F3B"/>
+                </a:solidFill>
+                <a:latin typeface="Calibri" pitchFamily="34" charset="0"/>
+                <a:ea typeface="Calibri" pitchFamily="34" charset="-122"/>
+                <a:cs typeface="Calibri" pitchFamily="34" charset="-120"/>
+              </a:rPr>
+              <a:t>PR</a:t>
+            </a:r>
+            <a:pPr rtl="1" algn="r" marL="228600" indent="-228600">
+              <a:spcAft>
+                <a:spcPts val="1000"/>
+              </a:spcAft>
+              <a:buSzPct val="100000"/>
+              <a:buChar char="•"/>
+            </a:pPr>
+            <a:r>
+              <a:rPr lang="en-US" sz="1900" dirty="0">
+                <a:solidFill>
+                  <a:srgbClr val="1B1F3B"/>
+                </a:solidFill>
+                <a:latin typeface="Calibri" pitchFamily="34" charset="0"/>
+                <a:ea typeface="Calibri" pitchFamily="34" charset="-122"/>
+                <a:cs typeface="Calibri" pitchFamily="34" charset="-120"/>
+              </a:rPr>
+              <a:t>) בשבוע — דרך "Minions", מערכת AI פנימית שבנתה </a:t>
+            </a:r>
+            <a:pPr rtl="1" algn="r" marL="228600" indent="-228600">
+              <a:spcAft>
+                <a:spcPts val="1000"/>
+              </a:spcAft>
+              <a:buSzPct val="100000"/>
+              <a:buChar char="•"/>
+            </a:pPr>
+            <a:r>
+              <a:rPr lang="en-US" sz="1900" b="1" dirty="0">
+                <a:solidFill>
+                  <a:srgbClr val="1B1F3B"/>
+                </a:solidFill>
+                <a:latin typeface="Calibri" pitchFamily="34" charset="0"/>
+                <a:ea typeface="Calibri" pitchFamily="34" charset="-122"/>
+                <a:cs typeface="Calibri" pitchFamily="34" charset="-120"/>
+              </a:rPr>
+              <a:t>Stripe</a:t>
+            </a:r>
+            <a:pPr rtl="1" algn="r" marL="228600" indent="-228600">
+              <a:spcAft>
+                <a:spcPts val="1000"/>
+              </a:spcAft>
+              <a:buSzPct val="100000"/>
+              <a:buChar char="•"/>
+            </a:pPr>
+            <a:r>
+              <a:rPr lang="en-US" sz="1900" dirty="0">
+                <a:solidFill>
+                  <a:srgbClr val="1B1F3B"/>
+                </a:solidFill>
+                <a:latin typeface="Calibri" pitchFamily="34" charset="0"/>
+                <a:ea typeface="Calibri" pitchFamily="34" charset="-122"/>
+                <a:cs typeface="Calibri" pitchFamily="34" charset="-120"/>
+              </a:rPr>
+              <a:t> (חברת תשלומים דיגיטליים עולמית) כדי לבצע חלק ניכר מעבודת הפיתוח שלה אוטומטית</a:t>
+            </a:r>
+            <a:endParaRPr lang="en-US" sz="1900" dirty="0"/>
+          </a:p>
+          <a:p>
+            <a:pPr rtl="1" algn="r" marL="228600" indent="-228600">
+              <a:spcAft>
+                <a:spcPts val="1000"/>
+              </a:spcAft>
+              <a:buSzPct val="100000"/>
+              <a:buChar char="•"/>
+            </a:pPr>
+            <a:r>
+              <a:rPr lang="en-US" sz="1900" b="1" dirty="0">
+                <a:solidFill>
+                  <a:srgbClr val="1B1F3B"/>
+                </a:solidFill>
+                <a:latin typeface="Calibri" pitchFamily="34" charset="0"/>
+                <a:ea typeface="Calibri" pitchFamily="34" charset="-122"/>
+                <a:cs typeface="Calibri" pitchFamily="34" charset="-120"/>
+              </a:rPr>
+              <a:t>40%</a:t>
+            </a:r>
+            <a:pPr rtl="1" algn="r" marL="228600" indent="-228600">
+              <a:spcAft>
+                <a:spcPts val="1000"/>
+              </a:spcAft>
+              <a:buSzPct val="100000"/>
+              <a:buChar char="•"/>
+            </a:pPr>
+            <a:r>
+              <a:rPr lang="en-US" sz="1900" dirty="0">
+                <a:solidFill>
+                  <a:srgbClr val="1B1F3B"/>
+                </a:solidFill>
+                <a:latin typeface="Calibri" pitchFamily="34" charset="0"/>
+                <a:ea typeface="Calibri" pitchFamily="34" charset="-122"/>
+                <a:cs typeface="Calibri" pitchFamily="34" charset="-120"/>
+              </a:rPr>
+              <a:t> מהאפליקציות הארגוניות — סוכני AI אוטונומיים עד סוף 2026 (מ-5% ב-2025, לפי </a:t>
+            </a:r>
+            <a:pPr rtl="1" algn="r" marL="228600" indent="-228600">
+              <a:spcAft>
+                <a:spcPts val="1000"/>
+              </a:spcAft>
+              <a:buSzPct val="100000"/>
+              <a:buChar char="•"/>
+            </a:pPr>
+            <a:r>
+              <a:rPr lang="en-US" sz="1900" b="1" dirty="0">
+                <a:solidFill>
+                  <a:srgbClr val="1B1F3B"/>
+                </a:solidFill>
+                <a:latin typeface="Calibri" pitchFamily="34" charset="0"/>
+                <a:ea typeface="Calibri" pitchFamily="34" charset="-122"/>
+                <a:cs typeface="Calibri" pitchFamily="34" charset="-120"/>
+              </a:rPr>
+              <a:t>Deloitte</a:t>
+            </a:r>
+            <a:pPr rtl="1" algn="r" marL="228600" indent="-228600">
+              <a:spcAft>
+                <a:spcPts val="1000"/>
+              </a:spcAft>
+              <a:buSzPct val="100000"/>
+              <a:buChar char="•"/>
             </a:pPr>
             <a:r>
               <a:rPr lang="en-US" sz="1900" dirty="0">
@@ -15433,26 +15505,6 @@
               </a:rPr>
               <a:t>התשובה:</a:t>
             </a:r>
-            <a:pPr rtl="1" algn="r" indent="0" marL="0">
-              <a:spcAft>
-                <a:spcPts val="1000"/>
-              </a:spcAft>
-              <a:buNone/>
-            </a:pPr>
-            <a:r>
-              <a:rPr lang="en-US" sz="1900" dirty="0">
-                <a:solidFill>
-                  <a:srgbClr val="1B1F3B"/>
-                </a:solidFill>
-                <a:latin typeface="Calibri" pitchFamily="34" charset="0"/>
-                <a:ea typeface="Calibri" pitchFamily="34" charset="-122"/>
-                <a:cs typeface="Calibri" pitchFamily="34" charset="-120"/>
-              </a:rPr>
-              <a:t> כי ההיסטוריה מראה שהקצב שבו כלים מתחלפים הולך ומואץ — וזו בדיוק הסיבה שהקורס מלמד תהליך עבודה (Workflow), לא כלי ספציפי אחד</a:t>
-            </a:r>
-            <a:endParaRPr lang="en-US" sz="1900" dirty="0"/>
-          </a:p>
-          <a:p>
             <a:pPr rtl="1" algn="r" marL="228600" indent="-228600">
               <a:spcAft>
                 <a:spcPts val="1000"/>
@@ -15469,98 +15521,125 @@
                 <a:ea typeface="Calibri" pitchFamily="34" charset="-122"/>
                 <a:cs typeface="Calibri" pitchFamily="34" charset="-120"/>
               </a:rPr>
-              <a:t>קוד מכונה → שפות עיליות (כמו Python) → </a:t>
-            </a:r>
-            <a:pPr rtl="1" algn="r" indent="0" marL="0">
+              <a:t> כי ההיסטוריה מראה שהקצב שבו כלים מתחלפים הולך ומואץ — וזו בדיוק הסיבה שהקורס מלמד תהליך עבודה (Workflow), לא כלי ספציפי אחד</a:t>
+            </a:r>
+            <a:endParaRPr lang="en-US" sz="1900" dirty="0"/>
+          </a:p>
+          <a:p>
+            <a:pPr rtl="1" algn="r" marL="228600" indent="-228600">
               <a:spcAft>
                 <a:spcPts val="1000"/>
               </a:spcAft>
-              <a:buNone/>
-            </a:pPr>
-            <a:r>
-              <a:rPr lang="en-US" sz="1900" b="1" dirty="0">
-                <a:solidFill>
-                  <a:srgbClr val="1B1F3B"/>
-                </a:solidFill>
-                <a:latin typeface="Calibri" pitchFamily="34" charset="0"/>
-                <a:ea typeface="Calibri" pitchFamily="34" charset="-122"/>
-                <a:cs typeface="Calibri" pitchFamily="34" charset="-120"/>
-              </a:rPr>
-              <a:t>IDE</a:t>
-            </a:r>
-            <a:pPr rtl="1" algn="r" indent="0" marL="0">
+              <a:buSzPct val="100000"/>
+              <a:buChar char="•"/>
+            </a:pPr>
+            <a:r>
+              <a:rPr lang="en-US" sz="1900" dirty="0">
+                <a:solidFill>
+                  <a:srgbClr val="1B1F3B"/>
+                </a:solidFill>
+                <a:latin typeface="Calibri" pitchFamily="34" charset="0"/>
+                <a:ea typeface="Calibri" pitchFamily="34" charset="-122"/>
+                <a:cs typeface="Calibri" pitchFamily="34" charset="-120"/>
+              </a:rPr>
+              <a:t>קוד מכונה → שפות עיליות (כמו Python) → </a:t>
+            </a:r>
+            <a:pPr rtl="1" algn="r" marL="228600" indent="-228600">
               <a:spcAft>
                 <a:spcPts val="1000"/>
               </a:spcAft>
-              <a:buNone/>
-            </a:pPr>
-            <a:r>
-              <a:rPr lang="en-US" sz="1900" dirty="0">
-                <a:solidFill>
-                  <a:srgbClr val="1B1F3B"/>
-                </a:solidFill>
-                <a:latin typeface="Calibri" pitchFamily="34" charset="0"/>
-                <a:ea typeface="Calibri" pitchFamily="34" charset="-122"/>
-                <a:cs typeface="Calibri" pitchFamily="34" charset="-120"/>
-              </a:rPr>
-              <a:t> (תוכנה אחת לכתיבה, הרצה ובדיקה של קוד) ו-Autocomplete (השלמה אוטומטית של קוד) → </a:t>
-            </a:r>
-            <a:pPr rtl="1" algn="r" indent="0" marL="0">
+              <a:buSzPct val="100000"/>
+              <a:buChar char="•"/>
+            </a:pPr>
+            <a:r>
+              <a:rPr lang="en-US" sz="1900" b="1" dirty="0">
+                <a:solidFill>
+                  <a:srgbClr val="1B1F3B"/>
+                </a:solidFill>
+                <a:latin typeface="Calibri" pitchFamily="34" charset="0"/>
+                <a:ea typeface="Calibri" pitchFamily="34" charset="-122"/>
+                <a:cs typeface="Calibri" pitchFamily="34" charset="-120"/>
+              </a:rPr>
+              <a:t>IDE</a:t>
+            </a:r>
+            <a:pPr rtl="1" algn="r" marL="228600" indent="-228600">
               <a:spcAft>
                 <a:spcPts val="1000"/>
               </a:spcAft>
-              <a:buNone/>
-            </a:pPr>
-            <a:r>
-              <a:rPr lang="en-US" sz="1900" b="1" dirty="0">
-                <a:solidFill>
-                  <a:srgbClr val="1B1F3B"/>
-                </a:solidFill>
-                <a:latin typeface="Calibri" pitchFamily="34" charset="0"/>
-                <a:ea typeface="Calibri" pitchFamily="34" charset="-122"/>
-                <a:cs typeface="Calibri" pitchFamily="34" charset="-120"/>
-              </a:rPr>
-              <a:t>Git</a:t>
-            </a:r>
-            <a:pPr rtl="1" algn="r" indent="0" marL="0">
+              <a:buSzPct val="100000"/>
+              <a:buChar char="•"/>
+            </a:pPr>
+            <a:r>
+              <a:rPr lang="en-US" sz="1900" dirty="0">
+                <a:solidFill>
+                  <a:srgbClr val="1B1F3B"/>
+                </a:solidFill>
+                <a:latin typeface="Calibri" pitchFamily="34" charset="0"/>
+                <a:ea typeface="Calibri" pitchFamily="34" charset="-122"/>
+                <a:cs typeface="Calibri" pitchFamily="34" charset="-120"/>
+              </a:rPr>
+              <a:t> (תוכנה אחת לכתיבה, הרצה ובדיקה של קוד) ו-Autocomplete (השלמה אוטומטית של קוד) → </a:t>
+            </a:r>
+            <a:pPr rtl="1" algn="r" marL="228600" indent="-228600">
               <a:spcAft>
                 <a:spcPts val="1000"/>
               </a:spcAft>
-              <a:buNone/>
-            </a:pPr>
-            <a:r>
-              <a:rPr lang="en-US" sz="1900" dirty="0">
-                <a:solidFill>
-                  <a:srgbClr val="1B1F3B"/>
-                </a:solidFill>
-                <a:latin typeface="Calibri" pitchFamily="34" charset="0"/>
-                <a:ea typeface="Calibri" pitchFamily="34" charset="-122"/>
-                <a:cs typeface="Calibri" pitchFamily="34" charset="-120"/>
-              </a:rPr>
-              <a:t> (מערכת לשמירת היסטוריית שינויים בקוד) → </a:t>
-            </a:r>
-            <a:pPr rtl="1" algn="r" indent="0" marL="0">
+              <a:buSzPct val="100000"/>
+              <a:buChar char="•"/>
+            </a:pPr>
+            <a:r>
+              <a:rPr lang="en-US" sz="1900" b="1" dirty="0">
+                <a:solidFill>
+                  <a:srgbClr val="1B1F3B"/>
+                </a:solidFill>
+                <a:latin typeface="Calibri" pitchFamily="34" charset="0"/>
+                <a:ea typeface="Calibri" pitchFamily="34" charset="-122"/>
+                <a:cs typeface="Calibri" pitchFamily="34" charset="-120"/>
+              </a:rPr>
+              <a:t>Git</a:t>
+            </a:r>
+            <a:pPr rtl="1" algn="r" marL="228600" indent="-228600">
               <a:spcAft>
                 <a:spcPts val="1000"/>
               </a:spcAft>
-              <a:buNone/>
-            </a:pPr>
-            <a:r>
-              <a:rPr lang="en-US" sz="1900" b="1" dirty="0">
-                <a:solidFill>
-                  <a:srgbClr val="1B1F3B"/>
-                </a:solidFill>
-                <a:latin typeface="Calibri" pitchFamily="34" charset="0"/>
-                <a:ea typeface="Calibri" pitchFamily="34" charset="-122"/>
-                <a:cs typeface="Calibri" pitchFamily="34" charset="-120"/>
-              </a:rPr>
-              <a:t>AI Agentic</a:t>
-            </a:r>
-            <a:pPr rtl="1" algn="r" indent="0" marL="0">
+              <a:buSzPct val="100000"/>
+              <a:buChar char="•"/>
+            </a:pPr>
+            <a:r>
+              <a:rPr lang="en-US" sz="1900" dirty="0">
+                <a:solidFill>
+                  <a:srgbClr val="1B1F3B"/>
+                </a:solidFill>
+                <a:latin typeface="Calibri" pitchFamily="34" charset="0"/>
+                <a:ea typeface="Calibri" pitchFamily="34" charset="-122"/>
+                <a:cs typeface="Calibri" pitchFamily="34" charset="-120"/>
+              </a:rPr>
+              <a:t> (מערכת לשמירת היסטוריית שינויים בקוד) → </a:t>
+            </a:r>
+            <a:pPr rtl="1" algn="r" marL="228600" indent="-228600">
               <a:spcAft>
                 <a:spcPts val="1000"/>
               </a:spcAft>
-              <a:buNone/>
+              <a:buSzPct val="100000"/>
+              <a:buChar char="•"/>
+            </a:pPr>
+            <a:r>
+              <a:rPr lang="en-US" sz="1900" b="1" dirty="0">
+                <a:solidFill>
+                  <a:srgbClr val="1B1F3B"/>
+                </a:solidFill>
+                <a:latin typeface="Calibri" pitchFamily="34" charset="0"/>
+                <a:ea typeface="Calibri" pitchFamily="34" charset="-122"/>
+                <a:cs typeface="Calibri" pitchFamily="34" charset="-120"/>
+              </a:rPr>
+              <a:t>AI Agentic</a:t>
+            </a:r>
+            <a:pPr rtl="1" algn="r" marL="228600" indent="-228600">
+              <a:spcAft>
+                <a:spcPts val="1000"/>
+              </a:spcAft>
+              <a:buSzPct val="100000"/>
+              <a:buChar char="•"/>
             </a:pPr>
             <a:r>
               <a:rPr lang="en-US" sz="1900" dirty="0">
@@ -16223,26 +16302,6 @@
               </a:rPr>
               <a:t>IDE (סביבת פיתוח לכתיבת קוד — ראינו בשקף הקודם) ראשונים: </a:t>
             </a:r>
-            <a:pPr rtl="1" algn="r" indent="0" marL="0">
-              <a:spcAft>
-                <a:spcPts val="1000"/>
-              </a:spcAft>
-              <a:buNone/>
-            </a:pPr>
-            <a:r>
-              <a:rPr lang="en-US" sz="1900" b="1" dirty="0">
-                <a:solidFill>
-                  <a:srgbClr val="1B1F3B"/>
-                </a:solidFill>
-                <a:latin typeface="Calibri" pitchFamily="34" charset="0"/>
-                <a:ea typeface="Calibri" pitchFamily="34" charset="-122"/>
-                <a:cs typeface="Calibri" pitchFamily="34" charset="-120"/>
-              </a:rPr>
-              <a:t>שנות ה-70</a:t>
-            </a:r>
-            <a:endParaRPr lang="en-US" sz="1900" dirty="0"/>
-          </a:p>
-          <a:p>
             <a:pPr rtl="1" algn="r" marL="228600" indent="-228600">
               <a:spcAft>
                 <a:spcPts val="1000"/>
@@ -16251,23 +16310,6 @@
               <a:buChar char="•"/>
             </a:pPr>
             <a:r>
-              <a:rPr lang="en-US" sz="1900" dirty="0">
-                <a:solidFill>
-                  <a:srgbClr val="1B1F3B"/>
-                </a:solidFill>
-                <a:latin typeface="Calibri" pitchFamily="34" charset="0"/>
-                <a:ea typeface="Calibri" pitchFamily="34" charset="-122"/>
-                <a:cs typeface="Calibri" pitchFamily="34" charset="-120"/>
-              </a:rPr>
-              <a:t>Git (ניהול גרסאות קוד): </a:t>
-            </a:r>
-            <a:pPr rtl="1" algn="r" indent="0" marL="0">
-              <a:spcAft>
-                <a:spcPts val="1000"/>
-              </a:spcAft>
-              <a:buNone/>
-            </a:pPr>
-            <a:r>
               <a:rPr lang="en-US" sz="1900" b="1" dirty="0">
                 <a:solidFill>
                   <a:srgbClr val="1B1F3B"/>
@@ -16276,41 +16318,7 @@
                 <a:ea typeface="Calibri" pitchFamily="34" charset="-122"/>
                 <a:cs typeface="Calibri" pitchFamily="34" charset="-120"/>
               </a:rPr>
-              <a:t>2005</a:t>
-            </a:r>
-            <a:pPr rtl="1" algn="r" indent="0" marL="0">
-              <a:spcAft>
-                <a:spcPts val="1000"/>
-              </a:spcAft>
-              <a:buNone/>
-            </a:pPr>
-            <a:r>
-              <a:rPr lang="en-US" sz="1900" dirty="0">
-                <a:solidFill>
-                  <a:srgbClr val="1B1F3B"/>
-                </a:solidFill>
-                <a:latin typeface="Calibri" pitchFamily="34" charset="0"/>
-                <a:ea typeface="Calibri" pitchFamily="34" charset="-122"/>
-                <a:cs typeface="Calibri" pitchFamily="34" charset="-120"/>
-              </a:rPr>
-              <a:t> · GitHub (פלטפורמה לאחסון ושיתוף קוד, מבוססת Git): </a:t>
-            </a:r>
-            <a:pPr rtl="1" algn="r" indent="0" marL="0">
-              <a:spcAft>
-                <a:spcPts val="1000"/>
-              </a:spcAft>
-              <a:buNone/>
-            </a:pPr>
-            <a:r>
-              <a:rPr lang="en-US" sz="1900" b="1" dirty="0">
-                <a:solidFill>
-                  <a:srgbClr val="1B1F3B"/>
-                </a:solidFill>
-                <a:latin typeface="Calibri" pitchFamily="34" charset="0"/>
-                <a:ea typeface="Calibri" pitchFamily="34" charset="-122"/>
-                <a:cs typeface="Calibri" pitchFamily="34" charset="-120"/>
-              </a:rPr>
-              <a:t>2008</a:t>
+              <a:t>שנות ה-70</a:t>
             </a:r>
             <a:endParaRPr lang="en-US" sz="1900" dirty="0"/>
           </a:p>
@@ -16331,28 +16339,8 @@
                 <a:ea typeface="Calibri" pitchFamily="34" charset="-122"/>
                 <a:cs typeface="Calibri" pitchFamily="34" charset="-120"/>
               </a:rPr>
-              <a:t>GitHub Copilot (עוזר AI לכתיבת קוד) בגרסת Preview (תצוגה מקדימה): </a:t>
-            </a:r>
-            <a:pPr rtl="1" algn="r" indent="0" marL="0">
-              <a:spcAft>
-                <a:spcPts val="1000"/>
-              </a:spcAft>
-              <a:buNone/>
-            </a:pPr>
-            <a:r>
-              <a:rPr lang="en-US" sz="1900" b="1" dirty="0">
-                <a:solidFill>
-                  <a:srgbClr val="1B1F3B"/>
-                </a:solidFill>
-                <a:latin typeface="Calibri" pitchFamily="34" charset="0"/>
-                <a:ea typeface="Calibri" pitchFamily="34" charset="-122"/>
-                <a:cs typeface="Calibri" pitchFamily="34" charset="-120"/>
-              </a:rPr>
-              <a:t>יוני 2021</a:t>
-            </a:r>
-            <a:endParaRPr lang="en-US" sz="1900" dirty="0"/>
-          </a:p>
-          <a:p>
+              <a:t>Git (ניהול גרסאות קוד): </a:t>
+            </a:r>
             <a:pPr rtl="1" algn="r" marL="228600" indent="-228600">
               <a:spcAft>
                 <a:spcPts val="1000"/>
@@ -16361,23 +16349,6 @@
               <a:buChar char="•"/>
             </a:pPr>
             <a:r>
-              <a:rPr lang="en-US" sz="1900" dirty="0">
-                <a:solidFill>
-                  <a:srgbClr val="1B1F3B"/>
-                </a:solidFill>
-                <a:latin typeface="Calibri" pitchFamily="34" charset="0"/>
-                <a:ea typeface="Calibri" pitchFamily="34" charset="-122"/>
-                <a:cs typeface="Calibri" pitchFamily="34" charset="-120"/>
-              </a:rPr>
-              <a:t>ChatGPT: </a:t>
-            </a:r>
-            <a:pPr rtl="1" algn="r" indent="0" marL="0">
-              <a:spcAft>
-                <a:spcPts val="1000"/>
-              </a:spcAft>
-              <a:buNone/>
-            </a:pPr>
-            <a:r>
               <a:rPr lang="en-US" sz="1900" b="1" dirty="0">
                 <a:solidFill>
                   <a:srgbClr val="1B1F3B"/>
@@ -16386,11 +16357,8 @@
                 <a:ea typeface="Calibri" pitchFamily="34" charset="-122"/>
                 <a:cs typeface="Calibri" pitchFamily="34" charset="-120"/>
               </a:rPr>
-              <a:t>נובמבר 2022</a:t>
-            </a:r>
-            <a:endParaRPr lang="en-US" sz="1900" dirty="0"/>
-          </a:p>
-          <a:p>
+              <a:t>2005</a:t>
+            </a:r>
             <a:pPr rtl="1" algn="r" marL="228600" indent="-228600">
               <a:spcAft>
                 <a:spcPts val="1000"/>
@@ -16407,13 +16375,131 @@
                 <a:ea typeface="Calibri" pitchFamily="34" charset="-122"/>
                 <a:cs typeface="Calibri" pitchFamily="34" charset="-120"/>
               </a:rPr>
-              <a:t>כלים אג'נטיים אמיתיים (AI שפועל עצמאית על משימה שלמה): </a:t>
-            </a:r>
-            <a:pPr rtl="1" algn="r" indent="0" marL="0">
+              <a:t> · GitHub (פלטפורמה לאחסון ושיתוף קוד, מבוססת Git): </a:t>
+            </a:r>
+            <a:pPr rtl="1" algn="r" marL="228600" indent="-228600">
               <a:spcAft>
                 <a:spcPts val="1000"/>
               </a:spcAft>
-              <a:buNone/>
+              <a:buSzPct val="100000"/>
+              <a:buChar char="•"/>
+            </a:pPr>
+            <a:r>
+              <a:rPr lang="en-US" sz="1900" b="1" dirty="0">
+                <a:solidFill>
+                  <a:srgbClr val="1B1F3B"/>
+                </a:solidFill>
+                <a:latin typeface="Calibri" pitchFamily="34" charset="0"/>
+                <a:ea typeface="Calibri" pitchFamily="34" charset="-122"/>
+                <a:cs typeface="Calibri" pitchFamily="34" charset="-120"/>
+              </a:rPr>
+              <a:t>2008</a:t>
+            </a:r>
+            <a:endParaRPr lang="en-US" sz="1900" dirty="0"/>
+          </a:p>
+          <a:p>
+            <a:pPr rtl="1" algn="r" marL="228600" indent="-228600">
+              <a:spcAft>
+                <a:spcPts val="1000"/>
+              </a:spcAft>
+              <a:buSzPct val="100000"/>
+              <a:buChar char="•"/>
+            </a:pPr>
+            <a:r>
+              <a:rPr lang="en-US" sz="1900" dirty="0">
+                <a:solidFill>
+                  <a:srgbClr val="1B1F3B"/>
+                </a:solidFill>
+                <a:latin typeface="Calibri" pitchFamily="34" charset="0"/>
+                <a:ea typeface="Calibri" pitchFamily="34" charset="-122"/>
+                <a:cs typeface="Calibri" pitchFamily="34" charset="-120"/>
+              </a:rPr>
+              <a:t>GitHub Copilot (עוזר AI לכתיבת קוד) בגרסת Preview (תצוגה מקדימה): </a:t>
+            </a:r>
+            <a:pPr rtl="1" algn="r" marL="228600" indent="-228600">
+              <a:spcAft>
+                <a:spcPts val="1000"/>
+              </a:spcAft>
+              <a:buSzPct val="100000"/>
+              <a:buChar char="•"/>
+            </a:pPr>
+            <a:r>
+              <a:rPr lang="en-US" sz="1900" b="1" dirty="0">
+                <a:solidFill>
+                  <a:srgbClr val="1B1F3B"/>
+                </a:solidFill>
+                <a:latin typeface="Calibri" pitchFamily="34" charset="0"/>
+                <a:ea typeface="Calibri" pitchFamily="34" charset="-122"/>
+                <a:cs typeface="Calibri" pitchFamily="34" charset="-120"/>
+              </a:rPr>
+              <a:t>יוני 2021</a:t>
+            </a:r>
+            <a:endParaRPr lang="en-US" sz="1900" dirty="0"/>
+          </a:p>
+          <a:p>
+            <a:pPr rtl="1" algn="r" marL="228600" indent="-228600">
+              <a:spcAft>
+                <a:spcPts val="1000"/>
+              </a:spcAft>
+              <a:buSzPct val="100000"/>
+              <a:buChar char="•"/>
+            </a:pPr>
+            <a:r>
+              <a:rPr lang="en-US" sz="1900" dirty="0">
+                <a:solidFill>
+                  <a:srgbClr val="1B1F3B"/>
+                </a:solidFill>
+                <a:latin typeface="Calibri" pitchFamily="34" charset="0"/>
+                <a:ea typeface="Calibri" pitchFamily="34" charset="-122"/>
+                <a:cs typeface="Calibri" pitchFamily="34" charset="-120"/>
+              </a:rPr>
+              <a:t>ChatGPT: </a:t>
+            </a:r>
+            <a:pPr rtl="1" algn="r" marL="228600" indent="-228600">
+              <a:spcAft>
+                <a:spcPts val="1000"/>
+              </a:spcAft>
+              <a:buSzPct val="100000"/>
+              <a:buChar char="•"/>
+            </a:pPr>
+            <a:r>
+              <a:rPr lang="en-US" sz="1900" b="1" dirty="0">
+                <a:solidFill>
+                  <a:srgbClr val="1B1F3B"/>
+                </a:solidFill>
+                <a:latin typeface="Calibri" pitchFamily="34" charset="0"/>
+                <a:ea typeface="Calibri" pitchFamily="34" charset="-122"/>
+                <a:cs typeface="Calibri" pitchFamily="34" charset="-120"/>
+              </a:rPr>
+              <a:t>נובמבר 2022</a:t>
+            </a:r>
+            <a:endParaRPr lang="en-US" sz="1900" dirty="0"/>
+          </a:p>
+          <a:p>
+            <a:pPr rtl="1" algn="r" marL="228600" indent="-228600">
+              <a:spcAft>
+                <a:spcPts val="1000"/>
+              </a:spcAft>
+              <a:buSzPct val="100000"/>
+              <a:buChar char="•"/>
+            </a:pPr>
+            <a:r>
+              <a:rPr lang="en-US" sz="1900" dirty="0">
+                <a:solidFill>
+                  <a:srgbClr val="1B1F3B"/>
+                </a:solidFill>
+                <a:latin typeface="Calibri" pitchFamily="34" charset="0"/>
+                <a:ea typeface="Calibri" pitchFamily="34" charset="-122"/>
+                <a:cs typeface="Calibri" pitchFamily="34" charset="-120"/>
+              </a:rPr>
+              <a:t>כלים אג'נטיים אמיתיים (AI שפועל עצמאית על משימה שלמה): </a:t>
+            </a:r>
+            <a:pPr rtl="1" algn="r" marL="228600" indent="-228600">
+              <a:spcAft>
+                <a:spcPts val="1000"/>
+              </a:spcAft>
+              <a:buSzPct val="100000"/>
+              <a:buChar char="•"/>
             </a:pPr>
             <a:r>
               <a:rPr lang="en-US" sz="1900" b="1" dirty="0">
@@ -16719,26 +16805,6 @@
               </a:rPr>
               <a:t>מהירות:</a:t>
             </a:r>
-            <a:pPr rtl="1" algn="r" indent="0" marL="0">
-              <a:spcAft>
-                <a:spcPts val="1000"/>
-              </a:spcAft>
-              <a:buNone/>
-            </a:pPr>
-            <a:r>
-              <a:rPr lang="en-US" sz="1900" dirty="0">
-                <a:solidFill>
-                  <a:srgbClr val="1B1F3B"/>
-                </a:solidFill>
-                <a:latin typeface="Calibri" pitchFamily="34" charset="0"/>
-                <a:ea typeface="Calibri" pitchFamily="34" charset="-122"/>
-                <a:cs typeface="Calibri" pitchFamily="34" charset="-120"/>
-              </a:rPr>
-              <a:t> משימות שלקחו ימים — עכשיו לוקחות דקות</a:t>
-            </a:r>
-            <a:endParaRPr lang="en-US" sz="1900" dirty="0"/>
-          </a:p>
-          <a:p>
             <a:pPr rtl="1" algn="r" marL="228600" indent="-228600">
               <a:spcAft>
                 <a:spcPts val="1000"/>
@@ -16747,23 +16813,6 @@
               <a:buChar char="•"/>
             </a:pPr>
             <a:r>
-              <a:rPr lang="en-US" sz="1900" b="1" dirty="0">
-                <a:solidFill>
-                  <a:srgbClr val="1B1F3B"/>
-                </a:solidFill>
-                <a:latin typeface="Calibri" pitchFamily="34" charset="0"/>
-                <a:ea typeface="Calibri" pitchFamily="34" charset="-122"/>
-                <a:cs typeface="Calibri" pitchFamily="34" charset="-120"/>
-              </a:rPr>
-              <a:t>נגישות:</a:t>
-            </a:r>
-            <a:pPr rtl="1" algn="r" indent="0" marL="0">
-              <a:spcAft>
-                <a:spcPts val="1000"/>
-              </a:spcAft>
-              <a:buNone/>
-            </a:pPr>
-            <a:r>
               <a:rPr lang="en-US" sz="1900" dirty="0">
                 <a:solidFill>
                   <a:srgbClr val="1B1F3B"/>
@@ -16772,7 +16821,7 @@
                 <a:ea typeface="Calibri" pitchFamily="34" charset="-122"/>
                 <a:cs typeface="Calibri" pitchFamily="34" charset="-120"/>
               </a:rPr>
-              <a:t> אפשר להתחיל בלי רקע תכנותי עמוק</a:t>
+              <a:t> משימות שלקחו ימים — עכשיו לוקחות דקות</a:t>
             </a:r>
             <a:endParaRPr lang="en-US" sz="1900" dirty="0"/>
           </a:p>
@@ -16793,13 +16842,53 @@
                 <a:ea typeface="Calibri" pitchFamily="34" charset="-122"/>
                 <a:cs typeface="Calibri" pitchFamily="34" charset="-120"/>
               </a:rPr>
-              <a:t>שחרור מבוילרפלייט:</a:t>
-            </a:r>
-            <a:pPr rtl="1" algn="r" indent="0" marL="0">
+              <a:t>נגישות:</a:t>
+            </a:r>
+            <a:pPr rtl="1" algn="r" marL="228600" indent="-228600">
               <a:spcAft>
                 <a:spcPts val="1000"/>
               </a:spcAft>
-              <a:buNone/>
+              <a:buSzPct val="100000"/>
+              <a:buChar char="•"/>
+            </a:pPr>
+            <a:r>
+              <a:rPr lang="en-US" sz="1900" dirty="0">
+                <a:solidFill>
+                  <a:srgbClr val="1B1F3B"/>
+                </a:solidFill>
+                <a:latin typeface="Calibri" pitchFamily="34" charset="0"/>
+                <a:ea typeface="Calibri" pitchFamily="34" charset="-122"/>
+                <a:cs typeface="Calibri" pitchFamily="34" charset="-120"/>
+              </a:rPr>
+              <a:t> אפשר להתחיל בלי רקע תכנותי עמוק</a:t>
+            </a:r>
+            <a:endParaRPr lang="en-US" sz="1900" dirty="0"/>
+          </a:p>
+          <a:p>
+            <a:pPr rtl="1" algn="r" marL="228600" indent="-228600">
+              <a:spcAft>
+                <a:spcPts val="1000"/>
+              </a:spcAft>
+              <a:buSzPct val="100000"/>
+              <a:buChar char="•"/>
+            </a:pPr>
+            <a:r>
+              <a:rPr lang="en-US" sz="1900" b="1" dirty="0">
+                <a:solidFill>
+                  <a:srgbClr val="1B1F3B"/>
+                </a:solidFill>
+                <a:latin typeface="Calibri" pitchFamily="34" charset="0"/>
+                <a:ea typeface="Calibri" pitchFamily="34" charset="-122"/>
+                <a:cs typeface="Calibri" pitchFamily="34" charset="-120"/>
+              </a:rPr>
+              <a:t>שחרור מבוילרפלייט:</a:t>
+            </a:r>
+            <a:pPr rtl="1" algn="r" marL="228600" indent="-228600">
+              <a:spcAft>
+                <a:spcPts val="1000"/>
+              </a:spcAft>
+              <a:buSzPct val="100000"/>
+              <a:buChar char="•"/>
             </a:pPr>
             <a:r>
               <a:rPr lang="en-US" sz="1900" dirty="0">
@@ -17223,43 +17312,6 @@
               </a:rPr>
               <a:t>שוכח הקשר בלי </a:t>
             </a:r>
-            <a:pPr rtl="1" algn="r" indent="0" marL="0">
-              <a:spcAft>
-                <a:spcPts val="1000"/>
-              </a:spcAft>
-              <a:buNone/>
-            </a:pPr>
-            <a:r>
-              <a:rPr lang="en-US" sz="1900" b="1" dirty="0">
-                <a:solidFill>
-                  <a:srgbClr val="1B1F3B"/>
-                </a:solidFill>
-                <a:latin typeface="Calibri" pitchFamily="34" charset="0"/>
-                <a:ea typeface="Calibri" pitchFamily="34" charset="-122"/>
-                <a:cs typeface="Calibri" pitchFamily="34" charset="-120"/>
-              </a:rPr>
-              <a:t>Context</a:t>
-            </a:r>
-            <a:pPr rtl="1" algn="r" indent="0" marL="0">
-              <a:spcAft>
-                <a:spcPts val="1000"/>
-              </a:spcAft>
-              <a:buNone/>
-            </a:pPr>
-            <a:r>
-              <a:rPr lang="en-US" sz="1900" dirty="0">
-                <a:solidFill>
-                  <a:srgbClr val="1B1F3B"/>
-                </a:solidFill>
-                <a:latin typeface="Calibri" pitchFamily="34" charset="0"/>
-                <a:ea typeface="Calibri" pitchFamily="34" charset="-122"/>
-                <a:cs typeface="Calibri" pitchFamily="34" charset="-120"/>
-              </a:rPr>
-              <a:t> (המידע שה-AI 'זוכר' על הפרויקט) מנוהל (נעמיק בשיעור 3)</a:t>
-            </a:r>
-            <a:endParaRPr lang="en-US" sz="1900" dirty="0"/>
-          </a:p>
-          <a:p>
             <a:pPr rtl="1" algn="r" marL="228600" indent="-228600">
               <a:spcAft>
                 <a:spcPts val="1000"/>
@@ -17268,19 +17320,16 @@
               <a:buChar char="•"/>
             </a:pPr>
             <a:r>
-              <a:rPr lang="en-US" sz="1900" dirty="0">
-                <a:solidFill>
-                  <a:srgbClr val="1B1F3B"/>
-                </a:solidFill>
-                <a:latin typeface="Calibri" pitchFamily="34" charset="0"/>
-                <a:ea typeface="Calibri" pitchFamily="34" charset="-122"/>
-                <a:cs typeface="Calibri" pitchFamily="34" charset="-120"/>
-              </a:rPr>
-              <a:t>קוד שרץ ≠ קוד נכון — "עובד" ו"נכון" הם שני דברים שונים</a:t>
-            </a:r>
-            <a:endParaRPr lang="en-US" sz="1900" dirty="0"/>
-          </a:p>
-          <a:p>
+              <a:rPr lang="en-US" sz="1900" b="1" dirty="0">
+                <a:solidFill>
+                  <a:srgbClr val="1B1F3B"/>
+                </a:solidFill>
+                <a:latin typeface="Calibri" pitchFamily="34" charset="0"/>
+                <a:ea typeface="Calibri" pitchFamily="34" charset="-122"/>
+                <a:cs typeface="Calibri" pitchFamily="34" charset="-120"/>
+              </a:rPr>
+              <a:t>Context</a:t>
+            </a:r>
             <a:pPr rtl="1" algn="r" marL="228600" indent="-228600">
               <a:spcAft>
                 <a:spcPts val="1000"/>
@@ -17297,7 +17346,7 @@
                 <a:ea typeface="Calibri" pitchFamily="34" charset="-122"/>
                 <a:cs typeface="Calibri" pitchFamily="34" charset="-120"/>
               </a:rPr>
-              <a:t>תלות בכלי שמשתנה מהר (נדבר על זה בעוד כמה שקפים)</a:t>
+              <a:t> (המידע שה-AI 'זוכר' על הפרויקט) מנוהל (נעמיק בשיעור 3)</a:t>
             </a:r>
             <a:endParaRPr lang="en-US" sz="1900" dirty="0"/>
           </a:p>
@@ -17318,13 +17367,56 @@
                 <a:ea typeface="Calibri" pitchFamily="34" charset="-122"/>
                 <a:cs typeface="Calibri" pitchFamily="34" charset="-120"/>
               </a:rPr>
-              <a:t>והבעיה המרכזית שבה נתמקד עכשיו: </a:t>
-            </a:r>
-            <a:pPr rtl="1" algn="r" indent="0" marL="0">
+              <a:t>קוד שרץ ≠ קוד נכון — "עובד" ו"נכון" הם שני דברים שונים</a:t>
+            </a:r>
+            <a:endParaRPr lang="en-US" sz="1900" dirty="0"/>
+          </a:p>
+          <a:p>
+            <a:pPr rtl="1" algn="r" marL="228600" indent="-228600">
               <a:spcAft>
                 <a:spcPts val="1000"/>
               </a:spcAft>
-              <a:buNone/>
+              <a:buSzPct val="100000"/>
+              <a:buChar char="•"/>
+            </a:pPr>
+            <a:r>
+              <a:rPr lang="en-US" sz="1900" dirty="0">
+                <a:solidFill>
+                  <a:srgbClr val="1B1F3B"/>
+                </a:solidFill>
+                <a:latin typeface="Calibri" pitchFamily="34" charset="0"/>
+                <a:ea typeface="Calibri" pitchFamily="34" charset="-122"/>
+                <a:cs typeface="Calibri" pitchFamily="34" charset="-120"/>
+              </a:rPr>
+              <a:t>תלות בכלי שמשתנה מהר (נדבר על זה בעוד כמה שקפים)</a:t>
+            </a:r>
+            <a:endParaRPr lang="en-US" sz="1900" dirty="0"/>
+          </a:p>
+          <a:p>
+            <a:pPr rtl="1" algn="r" marL="228600" indent="-228600">
+              <a:spcAft>
+                <a:spcPts val="1000"/>
+              </a:spcAft>
+              <a:buSzPct val="100000"/>
+              <a:buChar char="•"/>
+            </a:pPr>
+            <a:r>
+              <a:rPr lang="en-US" sz="1900" dirty="0">
+                <a:solidFill>
+                  <a:srgbClr val="1B1F3B"/>
+                </a:solidFill>
+                <a:latin typeface="Calibri" pitchFamily="34" charset="0"/>
+                <a:ea typeface="Calibri" pitchFamily="34" charset="-122"/>
+                <a:cs typeface="Calibri" pitchFamily="34" charset="-120"/>
+              </a:rPr>
+              <a:t>והבעיה המרכזית שבה נתמקד עכשיו: </a:t>
+            </a:r>
+            <a:pPr rtl="1" algn="r" marL="228600" indent="-228600">
+              <a:spcAft>
+                <a:spcPts val="1000"/>
+              </a:spcAft>
+              <a:buSzPct val="100000"/>
+              <a:buChar char="•"/>
             </a:pPr>
             <a:r>
               <a:rPr lang="en-US" sz="1900" b="1" dirty="0">
